--- a/dist/요한복음_1강_영광을_만나기_위한_준비.pptx
+++ b/dist/요한복음_1강_영광을_만나기_위한_준비.pptx
@@ -166,7 +166,7 @@
   <p:extLst>
     <p:ext uri="{521415D9-36F7-43E2-AB2F-B90AF26B5E84}">
       <p14:sectionLst xmlns:p14="http://schemas.microsoft.com/office/powerpoint/2010/main">
-        <p14:section name="오리엔테이션" id="{1e424387-06de-82c9-544b-5a9db08974d7}">
+        <p14:section name="오리엔테이션" id="{259bf60d-900c-1b49-2578-852634c02635}">
           <p14:sldIdLst>
             <p14:sldId id="256"/>
             <p14:sldId id="257"/>
@@ -178,7 +178,7 @@
             <p14:sldId id="263"/>
           </p14:sldIdLst>
         </p14:section>
-        <p14:section name="요한복음 분석" id="{746885e5-7782-8ede-4281-6df7c892b7bc}">
+        <p14:section name="요한복음 분석" id="{119c23d2-4124-5017-72bc-818f6897561c}">
           <p14:sldIdLst>
             <p14:sldId id="264"/>
             <p14:sldId id="265"/>
@@ -198,7 +198,7 @@
             <p14:sldId id="279"/>
           </p14:sldIdLst>
         </p14:section>
-        <p14:section name="1과 · 예수님에 대한 증언" id="{7630b8a6-9938-213f-f035-62b2200a588a}">
+        <p14:section name="1과 · 예수님에 대한 증언" id="{12dcd7f3-0c82-b606-836a-ac9c96f47c90}">
           <p14:sldIdLst>
             <p14:sldId id="280"/>
             <p14:sldId id="281"/>
@@ -218,7 +218,7 @@
             <p14:sldId id="295"/>
           </p14:sldIdLst>
         </p14:section>
-        <p14:section name="1과 · 하나님에 대한 증언" id="{ce84b2d4-9595-aff1-88a5-053207dc4cea}">
+        <p14:section name="1과 · 하나님에 대한 증언" id="{323f61d0-1dc8-c8c1-72b7-5be2486c7f7d}">
           <p14:sldIdLst>
             <p14:sldId id="296"/>
             <p14:sldId id="297"/>
@@ -237,14 +237,14 @@
             <p14:sldId id="310"/>
           </p14:sldIdLst>
         </p14:section>
-        <p14:section name="마무리" id="{1dcf8e8c-d755-874a-5d1a-960a1de7834f}">
+        <p14:section name="마무리" id="{064b5681-e0f1-7598-b221-1967b37e3aa6}">
           <p14:sldIdLst>
             <p14:sldId id="311"/>
             <p14:sldId id="312"/>
             <p14:sldId id="313"/>
           </p14:sldIdLst>
         </p14:section>
-        <p14:section name="부록" id="{bcc71881-ae00-1861-e7b5-009f07157c44}">
+        <p14:section name="부록" id="{1aa4c20a-ab3d-fd06-059f-666ccb69f58d}">
           <p14:sldIdLst>
             <p14:sldId id="314"/>
             <p14:sldId id="315"/>
@@ -8344,10 +8344,12 @@
         <p:spPr>
           <a:xfrm>
             <a:off x="685800" y="3611880"/>
-            <a:ext cx="347472" cy="347472"/>
-          </a:xfrm>
-          <a:prstGeom prst="ellipse">
-            <a:avLst/>
+            <a:ext cx="361188" cy="347472"/>
+          </a:xfrm>
+          <a:prstGeom prst="roundRect">
+            <a:avLst>
+              <a:gd name="adj" fmla="val 50000"/>
+            </a:avLst>
           </a:prstGeom>
           <a:solidFill>
             <a:schemeClr val="accent1"/>
@@ -8364,7 +8366,7 @@
         <p:spPr>
           <a:xfrm>
             <a:off x="685800" y="3611880"/>
-            <a:ext cx="347472" cy="347472"/>
+            <a:ext cx="361188" cy="347472"/>
           </a:xfrm>
           <a:prstGeom prst="rect">
             <a:avLst/>
@@ -8380,14 +8382,14 @@
               <a:buNone/>
             </a:pPr>
             <a:r>
-              <a:rPr lang="en-US" sz="1400" b="1" dirty="0">
+              <a:rPr lang="en-US" sz="1300" b="1" dirty="0">
                 <a:solidFill>
                   <a:schemeClr val="bg1"/>
                 </a:solidFill>
               </a:rPr>
               <a:t>왜</a:t>
             </a:r>
-            <a:endParaRPr lang="en-US" sz="1400" dirty="0"/>
+            <a:endParaRPr lang="en-US" sz="1300" dirty="0"/>
           </a:p>
         </p:txBody>
       </p:sp>
@@ -8399,8 +8401,8 @@
         </p:nvSpPr>
         <p:spPr>
           <a:xfrm>
-            <a:off x="1161288" y="3602736"/>
-            <a:ext cx="10344607" cy="365760"/>
+            <a:off x="1175004" y="3602736"/>
+            <a:ext cx="10330891" cy="365760"/>
           </a:xfrm>
           <a:prstGeom prst="rect">
             <a:avLst/>
@@ -9703,7 +9705,7 @@
           <a:ln/>
         </p:spPr>
         <p:txBody>
-          <a:bodyPr wrap="square" lIns="0" tIns="0" rIns="0" bIns="0" rtlCol="0" anchor="ctr"/>
+          <a:bodyPr wrap="square" lIns="0" tIns="0" rIns="0" bIns="0" rtlCol="0" anchor="t"/>
           <a:lstStyle/>
           <a:p>
             <a:pPr indent="0" marL="0">
@@ -9729,8 +9731,8 @@
         </p:nvSpPr>
         <p:spPr>
           <a:xfrm>
-            <a:off x="960120" y="3090672"/>
-            <a:ext cx="4724248" cy="2432304"/>
+            <a:off x="960120" y="3127248"/>
+            <a:ext cx="4724248" cy="2523744"/>
           </a:xfrm>
           <a:prstGeom prst="rect">
             <a:avLst/>
@@ -9930,7 +9932,7 @@
           <a:ln/>
         </p:spPr>
         <p:txBody>
-          <a:bodyPr wrap="square" lIns="0" tIns="0" rIns="0" bIns="0" rtlCol="0" anchor="ctr"/>
+          <a:bodyPr wrap="square" lIns="0" tIns="0" rIns="0" bIns="0" rtlCol="0" anchor="t"/>
           <a:lstStyle/>
           <a:p>
             <a:pPr indent="0" marL="0">
@@ -9956,8 +9958,8 @@
         </p:nvSpPr>
         <p:spPr>
           <a:xfrm>
-            <a:off x="6507328" y="3090672"/>
-            <a:ext cx="4724248" cy="2432304"/>
+            <a:off x="6507328" y="3127248"/>
+            <a:ext cx="4724248" cy="2523744"/>
           </a:xfrm>
           <a:prstGeom prst="rect">
             <a:avLst/>
@@ -10295,8 +10297,8 @@
         </p:nvSpPr>
         <p:spPr>
           <a:xfrm>
-            <a:off x="685800" y="1572768"/>
-            <a:ext cx="2526716" cy="2697480"/>
+            <a:off x="685800" y="1554480"/>
+            <a:ext cx="2526716" cy="2880360"/>
           </a:xfrm>
           <a:prstGeom prst="roundRect">
             <a:avLst>
@@ -10324,11 +10326,13 @@
         </p:nvSpPr>
         <p:spPr>
           <a:xfrm>
-            <a:off x="923544" y="1810512"/>
-            <a:ext cx="475488" cy="475488"/>
-          </a:xfrm>
-          <a:prstGeom prst="ellipse">
-            <a:avLst/>
+            <a:off x="923544" y="1792224"/>
+            <a:ext cx="621792" cy="475488"/>
+          </a:xfrm>
+          <a:prstGeom prst="roundRect">
+            <a:avLst>
+              <a:gd name="adj" fmla="val 50000"/>
+            </a:avLst>
           </a:prstGeom>
           <a:solidFill>
             <a:schemeClr val="accent1"/>
@@ -10344,8 +10348,8 @@
         </p:nvSpPr>
         <p:spPr>
           <a:xfrm>
-            <a:off x="923544" y="1810512"/>
-            <a:ext cx="475488" cy="475488"/>
+            <a:off x="923544" y="1792224"/>
+            <a:ext cx="621792" cy="475488"/>
           </a:xfrm>
           <a:prstGeom prst="rect">
             <a:avLst/>
@@ -10380,7 +10384,7 @@
         </p:nvSpPr>
         <p:spPr>
           <a:xfrm>
-            <a:off x="923544" y="2414016"/>
+            <a:off x="923544" y="2395728"/>
             <a:ext cx="2051228" cy="272034"/>
           </a:xfrm>
           <a:prstGeom prst="rect">
@@ -10416,8 +10420,8 @@
         </p:nvSpPr>
         <p:spPr>
           <a:xfrm>
-            <a:off x="923544" y="2759202"/>
-            <a:ext cx="2051228" cy="1009650"/>
+            <a:off x="923544" y="2740914"/>
+            <a:ext cx="2051228" cy="1119378"/>
           </a:xfrm>
           <a:prstGeom prst="rect">
             <a:avLst/>
@@ -10472,8 +10476,8 @@
         </p:nvSpPr>
         <p:spPr>
           <a:xfrm>
-            <a:off x="923544" y="3805428"/>
-            <a:ext cx="2051228" cy="263652"/>
+            <a:off x="923544" y="3896868"/>
+            <a:ext cx="2051228" cy="336804"/>
           </a:xfrm>
           <a:prstGeom prst="rect">
             <a:avLst/>
@@ -10508,8 +10512,8 @@
         </p:nvSpPr>
         <p:spPr>
           <a:xfrm>
-            <a:off x="3450260" y="1572768"/>
-            <a:ext cx="2526716" cy="2697480"/>
+            <a:off x="3450260" y="1554480"/>
+            <a:ext cx="2526716" cy="2880360"/>
           </a:xfrm>
           <a:prstGeom prst="roundRect">
             <a:avLst>
@@ -10537,7 +10541,7 @@
         </p:nvSpPr>
         <p:spPr>
           <a:xfrm>
-            <a:off x="3688004" y="1810512"/>
+            <a:off x="3688004" y="1792224"/>
             <a:ext cx="475488" cy="475488"/>
           </a:xfrm>
           <a:prstGeom prst="ellipse">
@@ -10557,7 +10561,7 @@
         </p:nvSpPr>
         <p:spPr>
           <a:xfrm>
-            <a:off x="3688004" y="1810512"/>
+            <a:off x="3688004" y="1792224"/>
             <a:ext cx="475488" cy="475488"/>
           </a:xfrm>
           <a:prstGeom prst="rect">
@@ -10593,7 +10597,7 @@
         </p:nvSpPr>
         <p:spPr>
           <a:xfrm>
-            <a:off x="3688004" y="2414016"/>
+            <a:off x="3688004" y="2395728"/>
             <a:ext cx="2051228" cy="272034"/>
           </a:xfrm>
           <a:prstGeom prst="rect">
@@ -10615,7 +10619,7 @@
                   <a:schemeClr val="tx1"/>
                 </a:solidFill>
               </a:rPr>
-              <a:t>영적 · 성령의 복음서</a:t>
+              <a:t>성령의 복음서</a:t>
             </a:r>
             <a:endParaRPr lang="en-US" sz="1700" dirty="0"/>
           </a:p>
@@ -10629,8 +10633,8 @@
         </p:nvSpPr>
         <p:spPr>
           <a:xfrm>
-            <a:off x="3688004" y="2759202"/>
-            <a:ext cx="2051228" cy="1009650"/>
+            <a:off x="3688004" y="2740914"/>
+            <a:ext cx="2051228" cy="1119378"/>
           </a:xfrm>
           <a:prstGeom prst="rect">
             <a:avLst/>
@@ -10671,7 +10675,7 @@
                   <a:schemeClr val="accent3"/>
                 </a:solidFill>
               </a:rPr>
-              <a:t>3장·4장·6장·14~16장·20장.</a:t>
+              <a:t>3 · 4 · 6 · 14~16 · 20장</a:t>
             </a:r>
             <a:endParaRPr lang="en-US" sz="1400" dirty="0"/>
           </a:p>
@@ -10685,8 +10689,8 @@
         </p:nvSpPr>
         <p:spPr>
           <a:xfrm>
-            <a:off x="3688004" y="3805428"/>
-            <a:ext cx="2051228" cy="263652"/>
+            <a:off x="3688004" y="3896868"/>
+            <a:ext cx="2051228" cy="336804"/>
           </a:xfrm>
           <a:prstGeom prst="rect">
             <a:avLst/>
@@ -10721,8 +10725,8 @@
         </p:nvSpPr>
         <p:spPr>
           <a:xfrm>
-            <a:off x="6214720" y="1572768"/>
-            <a:ext cx="2526716" cy="2697480"/>
+            <a:off x="6214720" y="1554480"/>
+            <a:ext cx="2526716" cy="2880360"/>
           </a:xfrm>
           <a:prstGeom prst="roundRect">
             <a:avLst>
@@ -10750,11 +10754,13 @@
         </p:nvSpPr>
         <p:spPr>
           <a:xfrm>
-            <a:off x="6452464" y="1810512"/>
-            <a:ext cx="475488" cy="475488"/>
-          </a:xfrm>
-          <a:prstGeom prst="ellipse">
-            <a:avLst/>
+            <a:off x="6452464" y="1792224"/>
+            <a:ext cx="621792" cy="475488"/>
+          </a:xfrm>
+          <a:prstGeom prst="roundRect">
+            <a:avLst>
+              <a:gd name="adj" fmla="val 50000"/>
+            </a:avLst>
           </a:prstGeom>
           <a:solidFill>
             <a:schemeClr val="accent1"/>
@@ -10770,8 +10776,8 @@
         </p:nvSpPr>
         <p:spPr>
           <a:xfrm>
-            <a:off x="6452464" y="1810512"/>
-            <a:ext cx="475488" cy="475488"/>
+            <a:off x="6452464" y="1792224"/>
+            <a:ext cx="621792" cy="475488"/>
           </a:xfrm>
           <a:prstGeom prst="rect">
             <a:avLst/>
@@ -10806,7 +10812,7 @@
         </p:nvSpPr>
         <p:spPr>
           <a:xfrm>
-            <a:off x="6452464" y="2414016"/>
+            <a:off x="6452464" y="2395728"/>
             <a:ext cx="2051228" cy="272034"/>
           </a:xfrm>
           <a:prstGeom prst="rect">
@@ -10842,8 +10848,8 @@
         </p:nvSpPr>
         <p:spPr>
           <a:xfrm>
-            <a:off x="6452464" y="2759202"/>
-            <a:ext cx="2051228" cy="1009650"/>
+            <a:off x="6452464" y="2740914"/>
+            <a:ext cx="2051228" cy="1119378"/>
           </a:xfrm>
           <a:prstGeom prst="rect">
             <a:avLst/>
@@ -10898,8 +10904,8 @@
         </p:nvSpPr>
         <p:spPr>
           <a:xfrm>
-            <a:off x="6452464" y="3805428"/>
-            <a:ext cx="2051228" cy="263652"/>
+            <a:off x="6452464" y="3896868"/>
+            <a:ext cx="2051228" cy="336804"/>
           </a:xfrm>
           <a:prstGeom prst="rect">
             <a:avLst/>
@@ -10934,8 +10940,8 @@
         </p:nvSpPr>
         <p:spPr>
           <a:xfrm>
-            <a:off x="8979179" y="1572768"/>
-            <a:ext cx="2526716" cy="2697480"/>
+            <a:off x="8979179" y="1554480"/>
+            <a:ext cx="2526716" cy="2880360"/>
           </a:xfrm>
           <a:prstGeom prst="roundRect">
             <a:avLst>
@@ -10963,11 +10969,13 @@
         </p:nvSpPr>
         <p:spPr>
           <a:xfrm>
-            <a:off x="9216923" y="1810512"/>
-            <a:ext cx="475488" cy="475488"/>
-          </a:xfrm>
-          <a:prstGeom prst="ellipse">
-            <a:avLst/>
+            <a:off x="9216923" y="1792224"/>
+            <a:ext cx="621792" cy="475488"/>
+          </a:xfrm>
+          <a:prstGeom prst="roundRect">
+            <a:avLst>
+              <a:gd name="adj" fmla="val 50000"/>
+            </a:avLst>
           </a:prstGeom>
           <a:solidFill>
             <a:schemeClr val="accent1"/>
@@ -10983,8 +10991,8 @@
         </p:nvSpPr>
         <p:spPr>
           <a:xfrm>
-            <a:off x="9216923" y="1810512"/>
-            <a:ext cx="475488" cy="475488"/>
+            <a:off x="9216923" y="1792224"/>
+            <a:ext cx="621792" cy="475488"/>
           </a:xfrm>
           <a:prstGeom prst="rect">
             <a:avLst/>
@@ -11019,7 +11027,7 @@
         </p:nvSpPr>
         <p:spPr>
           <a:xfrm>
-            <a:off x="9216923" y="2414016"/>
+            <a:off x="9216923" y="2395728"/>
             <a:ext cx="2051228" cy="272034"/>
           </a:xfrm>
           <a:prstGeom prst="rect">
@@ -11055,8 +11063,8 @@
         </p:nvSpPr>
         <p:spPr>
           <a:xfrm>
-            <a:off x="9216923" y="2759202"/>
-            <a:ext cx="2051228" cy="1009650"/>
+            <a:off x="9216923" y="2740914"/>
+            <a:ext cx="2051228" cy="1119378"/>
           </a:xfrm>
           <a:prstGeom prst="rect">
             <a:avLst/>
@@ -11111,8 +11119,8 @@
         </p:nvSpPr>
         <p:spPr>
           <a:xfrm>
-            <a:off x="9216923" y="3805428"/>
-            <a:ext cx="2051228" cy="263652"/>
+            <a:off x="9216923" y="3896868"/>
+            <a:ext cx="2051228" cy="336804"/>
           </a:xfrm>
           <a:prstGeom prst="rect">
             <a:avLst/>
@@ -11147,11 +11155,13 @@
         </p:nvSpPr>
         <p:spPr>
           <a:xfrm>
-            <a:off x="685800" y="4544568"/>
-            <a:ext cx="347472" cy="347472"/>
-          </a:xfrm>
-          <a:prstGeom prst="ellipse">
-            <a:avLst/>
+            <a:off x="685800" y="4672584"/>
+            <a:ext cx="361188" cy="347472"/>
+          </a:xfrm>
+          <a:prstGeom prst="roundRect">
+            <a:avLst>
+              <a:gd name="adj" fmla="val 50000"/>
+            </a:avLst>
           </a:prstGeom>
           <a:solidFill>
             <a:schemeClr val="accent1"/>
@@ -11167,8 +11177,8 @@
         </p:nvSpPr>
         <p:spPr>
           <a:xfrm>
-            <a:off x="685800" y="4544568"/>
-            <a:ext cx="347472" cy="347472"/>
+            <a:off x="685800" y="4672584"/>
+            <a:ext cx="361188" cy="347472"/>
           </a:xfrm>
           <a:prstGeom prst="rect">
             <a:avLst/>
@@ -11184,14 +11194,14 @@
               <a:buNone/>
             </a:pPr>
             <a:r>
-              <a:rPr lang="en-US" sz="1400" b="1" dirty="0">
+              <a:rPr lang="en-US" sz="1300" b="1" dirty="0">
                 <a:solidFill>
                   <a:schemeClr val="bg1"/>
                 </a:solidFill>
               </a:rPr>
               <a:t>왜</a:t>
             </a:r>
-            <a:endParaRPr lang="en-US" sz="1400" dirty="0"/>
+            <a:endParaRPr lang="en-US" sz="1300" dirty="0"/>
           </a:p>
         </p:txBody>
       </p:sp>
@@ -11203,8 +11213,8 @@
         </p:nvSpPr>
         <p:spPr>
           <a:xfrm>
-            <a:off x="1161288" y="4535424"/>
-            <a:ext cx="10344607" cy="365760"/>
+            <a:off x="1175004" y="4663440"/>
+            <a:ext cx="10330891" cy="365760"/>
           </a:xfrm>
           <a:prstGeom prst="rect">
             <a:avLst/>
@@ -11239,8 +11249,8 @@
         </p:nvSpPr>
         <p:spPr>
           <a:xfrm>
-            <a:off x="685800" y="5047488"/>
-            <a:ext cx="10820095" cy="1005840"/>
+            <a:off x="685800" y="5120640"/>
+            <a:ext cx="10820095" cy="987552"/>
           </a:xfrm>
           <a:prstGeom prst="rect">
             <a:avLst/>
@@ -11486,10 +11496,12 @@
         <p:spPr>
           <a:xfrm>
             <a:off x="923544" y="1810512"/>
-            <a:ext cx="548640" cy="548640"/>
-          </a:xfrm>
-          <a:prstGeom prst="ellipse">
-            <a:avLst/>
+            <a:ext cx="676656" cy="548640"/>
+          </a:xfrm>
+          <a:prstGeom prst="roundRect">
+            <a:avLst>
+              <a:gd name="adj" fmla="val 50000"/>
+            </a:avLst>
           </a:prstGeom>
           <a:solidFill>
             <a:schemeClr val="accent1"/>
@@ -11506,7 +11518,7 @@
         <p:spPr>
           <a:xfrm>
             <a:off x="923544" y="1810512"/>
-            <a:ext cx="548640" cy="548640"/>
+            <a:ext cx="676656" cy="548640"/>
           </a:xfrm>
           <a:prstGeom prst="rect">
             <a:avLst/>
@@ -11706,10 +11718,12 @@
         <p:spPr>
           <a:xfrm>
             <a:off x="4609490" y="1810512"/>
-            <a:ext cx="548640" cy="548640"/>
-          </a:xfrm>
-          <a:prstGeom prst="ellipse">
-            <a:avLst/>
+            <a:ext cx="676656" cy="548640"/>
+          </a:xfrm>
+          <a:prstGeom prst="roundRect">
+            <a:avLst>
+              <a:gd name="adj" fmla="val 50000"/>
+            </a:avLst>
           </a:prstGeom>
           <a:solidFill>
             <a:schemeClr val="accent1"/>
@@ -11726,7 +11740,7 @@
         <p:spPr>
           <a:xfrm>
             <a:off x="4609490" y="1810512"/>
-            <a:ext cx="548640" cy="548640"/>
+            <a:ext cx="676656" cy="548640"/>
           </a:xfrm>
           <a:prstGeom prst="rect">
             <a:avLst/>
@@ -11926,10 +11940,12 @@
         <p:spPr>
           <a:xfrm>
             <a:off x="8295437" y="1810512"/>
-            <a:ext cx="548640" cy="548640"/>
-          </a:xfrm>
-          <a:prstGeom prst="ellipse">
-            <a:avLst/>
+            <a:ext cx="676656" cy="548640"/>
+          </a:xfrm>
+          <a:prstGeom prst="roundRect">
+            <a:avLst>
+              <a:gd name="adj" fmla="val 50000"/>
+            </a:avLst>
           </a:prstGeom>
           <a:solidFill>
             <a:schemeClr val="accent1"/>
@@ -11946,7 +11962,7 @@
         <p:spPr>
           <a:xfrm>
             <a:off x="8295437" y="1810512"/>
-            <a:ext cx="548640" cy="548640"/>
+            <a:ext cx="676656" cy="548640"/>
           </a:xfrm>
           <a:prstGeom prst="rect">
             <a:avLst/>
@@ -13574,10 +13590,12 @@
         <p:spPr>
           <a:xfrm>
             <a:off x="685800" y="4946904"/>
-            <a:ext cx="347472" cy="347472"/>
-          </a:xfrm>
-          <a:prstGeom prst="ellipse">
-            <a:avLst/>
+            <a:ext cx="375453" cy="347472"/>
+          </a:xfrm>
+          <a:prstGeom prst="roundRect">
+            <a:avLst>
+              <a:gd name="adj" fmla="val 50000"/>
+            </a:avLst>
           </a:prstGeom>
           <a:solidFill>
             <a:schemeClr val="accent1"/>
@@ -13594,7 +13612,7 @@
         <p:spPr>
           <a:xfrm>
             <a:off x="685800" y="4946904"/>
-            <a:ext cx="347472" cy="347472"/>
+            <a:ext cx="375453" cy="347472"/>
           </a:xfrm>
           <a:prstGeom prst="rect">
             <a:avLst/>
@@ -13610,14 +13628,14 @@
               <a:buNone/>
             </a:pPr>
             <a:r>
-              <a:rPr lang="en-US" sz="1400" b="1" dirty="0">
+              <a:rPr lang="en-US" sz="1300" b="1" dirty="0">
                 <a:solidFill>
                   <a:schemeClr val="bg1"/>
                 </a:solidFill>
               </a:rPr>
               <a:t>cf</a:t>
             </a:r>
-            <a:endParaRPr lang="en-US" sz="1400" dirty="0"/>
+            <a:endParaRPr lang="en-US" sz="1300" dirty="0"/>
           </a:p>
         </p:txBody>
       </p:sp>
@@ -13629,8 +13647,8 @@
         </p:nvSpPr>
         <p:spPr>
           <a:xfrm>
-            <a:off x="1161288" y="4937760"/>
-            <a:ext cx="10344607" cy="365760"/>
+            <a:off x="1189269" y="4937760"/>
+            <a:ext cx="10316627" cy="365760"/>
           </a:xfrm>
           <a:prstGeom prst="rect">
             <a:avLst/>
@@ -13950,7 +13968,7 @@
         <p:spPr>
           <a:xfrm>
             <a:off x="886968" y="2249424"/>
-            <a:ext cx="2124380" cy="240030"/>
+            <a:ext cx="2124380" cy="480060"/>
           </a:xfrm>
           <a:prstGeom prst="rect">
             <a:avLst/>
@@ -13985,8 +14003,8 @@
         </p:nvSpPr>
         <p:spPr>
           <a:xfrm>
-            <a:off x="886968" y="2562606"/>
-            <a:ext cx="2124380" cy="934974"/>
+            <a:off x="886968" y="2802636"/>
+            <a:ext cx="2124380" cy="694944"/>
           </a:xfrm>
           <a:prstGeom prst="rect">
             <a:avLst/>
@@ -15509,7 +15527,7 @@
                   <a:schemeClr val="tx1"/>
                 </a:solidFill>
               </a:rPr>
-              <a:t>완전수 7 ① 일곱 표적 — 가 · 왕 · 베 · 오 · 물 · 실 · 나</a:t>
+              <a:t>완전수 7 ① 일곱 표적</a:t>
             </a:r>
             <a:endParaRPr lang="en-US" sz="3200" dirty="0"/>
           </a:p>
@@ -15523,12 +15541,12 @@
         </p:nvSpPr>
         <p:spPr>
           <a:xfrm>
-            <a:off x="685800" y="1572768"/>
-            <a:ext cx="1341947" cy="2103120"/>
+            <a:off x="685800" y="1517904"/>
+            <a:ext cx="2526716" cy="1687068"/>
           </a:xfrm>
           <a:prstGeom prst="roundRect">
             <a:avLst>
-              <a:gd name="adj" fmla="val 4088"/>
+              <a:gd name="adj" fmla="val 3252"/>
             </a:avLst>
           </a:prstGeom>
           <a:solidFill>
@@ -15552,8 +15570,8 @@
         </p:nvSpPr>
         <p:spPr>
           <a:xfrm>
-            <a:off x="832104" y="1719072"/>
-            <a:ext cx="384048" cy="384048"/>
+            <a:off x="886968" y="1719072"/>
+            <a:ext cx="420624" cy="420624"/>
           </a:xfrm>
           <a:prstGeom prst="ellipse">
             <a:avLst/>
@@ -15572,8 +15590,8 @@
         </p:nvSpPr>
         <p:spPr>
           <a:xfrm>
-            <a:off x="832104" y="1719072"/>
-            <a:ext cx="384048" cy="384048"/>
+            <a:off x="886968" y="1719072"/>
+            <a:ext cx="420624" cy="420624"/>
           </a:xfrm>
           <a:prstGeom prst="rect">
             <a:avLst/>
@@ -15589,14 +15607,14 @@
               <a:buNone/>
             </a:pPr>
             <a:r>
-              <a:rPr lang="en-US" sz="1300" b="1" dirty="0">
+              <a:rPr lang="en-US" sz="1400" b="1" dirty="0">
                 <a:solidFill>
                   <a:schemeClr val="bg1"/>
                 </a:solidFill>
               </a:rPr>
               <a:t>가</a:t>
             </a:r>
-            <a:endParaRPr lang="en-US" sz="1300" dirty="0"/>
+            <a:endParaRPr lang="en-US" sz="1400" dirty="0"/>
           </a:p>
         </p:txBody>
       </p:sp>
@@ -15608,8 +15626,8 @@
         </p:nvSpPr>
         <p:spPr>
           <a:xfrm>
-            <a:off x="832104" y="2231136"/>
-            <a:ext cx="1049339" cy="448056"/>
+            <a:off x="886968" y="2267712"/>
+            <a:ext cx="2124380" cy="256032"/>
           </a:xfrm>
           <a:prstGeom prst="rect">
             <a:avLst/>
@@ -15625,14 +15643,14 @@
               <a:buNone/>
             </a:pPr>
             <a:r>
-              <a:rPr lang="en-US" sz="1400" b="1" dirty="0">
+              <a:rPr lang="en-US" sz="1600" b="1" dirty="0">
                 <a:solidFill>
                   <a:schemeClr val="tx1"/>
                 </a:solidFill>
               </a:rPr>
               <a:t>가나 혼인잔치</a:t>
             </a:r>
-            <a:endParaRPr lang="en-US" sz="1400" dirty="0"/>
+            <a:endParaRPr lang="en-US" sz="1600" dirty="0"/>
           </a:p>
         </p:txBody>
       </p:sp>
@@ -15644,8 +15662,8 @@
         </p:nvSpPr>
         <p:spPr>
           <a:xfrm>
-            <a:off x="832104" y="2752344"/>
-            <a:ext cx="1049339" cy="777240"/>
+            <a:off x="886968" y="2596896"/>
+            <a:ext cx="2124380" cy="406908"/>
           </a:xfrm>
           <a:prstGeom prst="rect">
             <a:avLst/>
@@ -15664,14 +15682,14 @@
               <a:buNone/>
             </a:pPr>
             <a:r>
-              <a:rPr lang="en-US" sz="1200" dirty="0">
+              <a:rPr lang="en-US" sz="1300" dirty="0">
                 <a:solidFill>
                   <a:schemeClr val="accent3"/>
                 </a:solidFill>
               </a:rPr>
               <a:t>물을 포도주로</a:t>
             </a:r>
-            <a:endParaRPr lang="en-US" sz="1200" dirty="0"/>
+            <a:endParaRPr lang="en-US" sz="1300" dirty="0"/>
           </a:p>
           <a:p>
             <a:pPr indent="0" marL="0">
@@ -15681,14 +15699,14 @@
               <a:buNone/>
             </a:pPr>
             <a:r>
-              <a:rPr lang="en-US" sz="1200" dirty="0">
+              <a:rPr lang="en-US" sz="1300" dirty="0">
                 <a:solidFill>
                   <a:schemeClr val="accent3"/>
                 </a:solidFill>
               </a:rPr>
               <a:t>2:1~11</a:t>
             </a:r>
-            <a:endParaRPr lang="en-US" sz="1200" dirty="0"/>
+            <a:endParaRPr lang="en-US" sz="1300" dirty="0"/>
           </a:p>
         </p:txBody>
       </p:sp>
@@ -15700,12 +15718,12 @@
         </p:nvSpPr>
         <p:spPr>
           <a:xfrm>
-            <a:off x="2265491" y="1572768"/>
-            <a:ext cx="1341947" cy="2103120"/>
+            <a:off x="3450260" y="1517904"/>
+            <a:ext cx="2526716" cy="1687068"/>
           </a:xfrm>
           <a:prstGeom prst="roundRect">
             <a:avLst>
-              <a:gd name="adj" fmla="val 4088"/>
+              <a:gd name="adj" fmla="val 3252"/>
             </a:avLst>
           </a:prstGeom>
           <a:solidFill>
@@ -15729,8 +15747,8 @@
         </p:nvSpPr>
         <p:spPr>
           <a:xfrm>
-            <a:off x="2411795" y="1719072"/>
-            <a:ext cx="384048" cy="384048"/>
+            <a:off x="3651428" y="1719072"/>
+            <a:ext cx="420624" cy="420624"/>
           </a:xfrm>
           <a:prstGeom prst="ellipse">
             <a:avLst/>
@@ -15749,8 +15767,8 @@
         </p:nvSpPr>
         <p:spPr>
           <a:xfrm>
-            <a:off x="2411795" y="1719072"/>
-            <a:ext cx="384048" cy="384048"/>
+            <a:off x="3651428" y="1719072"/>
+            <a:ext cx="420624" cy="420624"/>
           </a:xfrm>
           <a:prstGeom prst="rect">
             <a:avLst/>
@@ -15766,14 +15784,14 @@
               <a:buNone/>
             </a:pPr>
             <a:r>
-              <a:rPr lang="en-US" sz="1300" b="1" dirty="0">
+              <a:rPr lang="en-US" sz="1400" b="1" dirty="0">
                 <a:solidFill>
                   <a:schemeClr val="bg1"/>
                 </a:solidFill>
               </a:rPr>
               <a:t>왕</a:t>
             </a:r>
-            <a:endParaRPr lang="en-US" sz="1300" dirty="0"/>
+            <a:endParaRPr lang="en-US" sz="1400" dirty="0"/>
           </a:p>
         </p:txBody>
       </p:sp>
@@ -15785,8 +15803,8 @@
         </p:nvSpPr>
         <p:spPr>
           <a:xfrm>
-            <a:off x="2411795" y="2231136"/>
-            <a:ext cx="1049339" cy="448056"/>
+            <a:off x="3651428" y="2267712"/>
+            <a:ext cx="2124380" cy="256032"/>
           </a:xfrm>
           <a:prstGeom prst="rect">
             <a:avLst/>
@@ -15802,14 +15820,14 @@
               <a:buNone/>
             </a:pPr>
             <a:r>
-              <a:rPr lang="en-US" sz="1400" b="1" dirty="0">
+              <a:rPr lang="en-US" sz="1600" b="1" dirty="0">
                 <a:solidFill>
                   <a:schemeClr val="tx1"/>
                 </a:solidFill>
               </a:rPr>
               <a:t>왕의 신하 아들 치유</a:t>
             </a:r>
-            <a:endParaRPr lang="en-US" sz="1400" dirty="0"/>
+            <a:endParaRPr lang="en-US" sz="1600" dirty="0"/>
           </a:p>
         </p:txBody>
       </p:sp>
@@ -15821,8 +15839,8 @@
         </p:nvSpPr>
         <p:spPr>
           <a:xfrm>
-            <a:off x="2411795" y="2752344"/>
-            <a:ext cx="1049339" cy="777240"/>
+            <a:off x="3651428" y="2596896"/>
+            <a:ext cx="2124380" cy="406908"/>
           </a:xfrm>
           <a:prstGeom prst="rect">
             <a:avLst/>
@@ -15841,14 +15859,14 @@
               <a:buNone/>
             </a:pPr>
             <a:r>
-              <a:rPr lang="en-US" sz="1200" dirty="0">
+              <a:rPr lang="en-US" sz="1300" dirty="0">
                 <a:solidFill>
                   <a:schemeClr val="accent3"/>
                 </a:solidFill>
               </a:rPr>
               <a:t>말씀만으로 고치심</a:t>
             </a:r>
-            <a:endParaRPr lang="en-US" sz="1200" dirty="0"/>
+            <a:endParaRPr lang="en-US" sz="1300" dirty="0"/>
           </a:p>
           <a:p>
             <a:pPr indent="0" marL="0">
@@ -15858,14 +15876,14 @@
               <a:buNone/>
             </a:pPr>
             <a:r>
-              <a:rPr lang="en-US" sz="1200" dirty="0">
+              <a:rPr lang="en-US" sz="1300" dirty="0">
                 <a:solidFill>
                   <a:schemeClr val="accent3"/>
                 </a:solidFill>
               </a:rPr>
               <a:t>4:46~54</a:t>
             </a:r>
-            <a:endParaRPr lang="en-US" sz="1200" dirty="0"/>
+            <a:endParaRPr lang="en-US" sz="1300" dirty="0"/>
           </a:p>
         </p:txBody>
       </p:sp>
@@ -15877,12 +15895,12 @@
         </p:nvSpPr>
         <p:spPr>
           <a:xfrm>
-            <a:off x="3845183" y="1572768"/>
-            <a:ext cx="1341947" cy="2103120"/>
+            <a:off x="6214720" y="1517904"/>
+            <a:ext cx="2526716" cy="1687068"/>
           </a:xfrm>
           <a:prstGeom prst="roundRect">
             <a:avLst>
-              <a:gd name="adj" fmla="val 4088"/>
+              <a:gd name="adj" fmla="val 3252"/>
             </a:avLst>
           </a:prstGeom>
           <a:solidFill>
@@ -15906,8 +15924,8 @@
         </p:nvSpPr>
         <p:spPr>
           <a:xfrm>
-            <a:off x="3991487" y="1719072"/>
-            <a:ext cx="384048" cy="384048"/>
+            <a:off x="6415888" y="1719072"/>
+            <a:ext cx="420624" cy="420624"/>
           </a:xfrm>
           <a:prstGeom prst="ellipse">
             <a:avLst/>
@@ -15926,8 +15944,8 @@
         </p:nvSpPr>
         <p:spPr>
           <a:xfrm>
-            <a:off x="3991487" y="1719072"/>
-            <a:ext cx="384048" cy="384048"/>
+            <a:off x="6415888" y="1719072"/>
+            <a:ext cx="420624" cy="420624"/>
           </a:xfrm>
           <a:prstGeom prst="rect">
             <a:avLst/>
@@ -15943,14 +15961,14 @@
               <a:buNone/>
             </a:pPr>
             <a:r>
-              <a:rPr lang="en-US" sz="1300" b="1" dirty="0">
+              <a:rPr lang="en-US" sz="1400" b="1" dirty="0">
                 <a:solidFill>
                   <a:schemeClr val="bg1"/>
                 </a:solidFill>
               </a:rPr>
               <a:t>베</a:t>
             </a:r>
-            <a:endParaRPr lang="en-US" sz="1300" dirty="0"/>
+            <a:endParaRPr lang="en-US" sz="1400" dirty="0"/>
           </a:p>
         </p:txBody>
       </p:sp>
@@ -15962,8 +15980,8 @@
         </p:nvSpPr>
         <p:spPr>
           <a:xfrm>
-            <a:off x="3991487" y="2231136"/>
-            <a:ext cx="1049339" cy="448056"/>
+            <a:off x="6415888" y="2267712"/>
+            <a:ext cx="2124380" cy="256032"/>
           </a:xfrm>
           <a:prstGeom prst="rect">
             <a:avLst/>
@@ -15979,14 +15997,14 @@
               <a:buNone/>
             </a:pPr>
             <a:r>
-              <a:rPr lang="en-US" sz="1400" b="1" dirty="0">
+              <a:rPr lang="en-US" sz="1600" b="1" dirty="0">
                 <a:solidFill>
                   <a:schemeClr val="tx1"/>
                 </a:solidFill>
               </a:rPr>
               <a:t>베데스다 못 병자</a:t>
             </a:r>
-            <a:endParaRPr lang="en-US" sz="1400" dirty="0"/>
+            <a:endParaRPr lang="en-US" sz="1600" dirty="0"/>
           </a:p>
         </p:txBody>
       </p:sp>
@@ -15998,8 +16016,8 @@
         </p:nvSpPr>
         <p:spPr>
           <a:xfrm>
-            <a:off x="3991487" y="2752344"/>
-            <a:ext cx="1049339" cy="777240"/>
+            <a:off x="6415888" y="2596896"/>
+            <a:ext cx="2124380" cy="406908"/>
           </a:xfrm>
           <a:prstGeom prst="rect">
             <a:avLst/>
@@ -16018,14 +16036,14 @@
               <a:buNone/>
             </a:pPr>
             <a:r>
-              <a:rPr lang="en-US" sz="1200" dirty="0">
+              <a:rPr lang="en-US" sz="1300" dirty="0">
                 <a:solidFill>
                   <a:schemeClr val="accent3"/>
                 </a:solidFill>
               </a:rPr>
               <a:t>38년 된 병자</a:t>
             </a:r>
-            <a:endParaRPr lang="en-US" sz="1200" dirty="0"/>
+            <a:endParaRPr lang="en-US" sz="1300" dirty="0"/>
           </a:p>
           <a:p>
             <a:pPr indent="0" marL="0">
@@ -16035,14 +16053,14 @@
               <a:buNone/>
             </a:pPr>
             <a:r>
-              <a:rPr lang="en-US" sz="1200" dirty="0">
+              <a:rPr lang="en-US" sz="1300" dirty="0">
                 <a:solidFill>
                   <a:schemeClr val="accent3"/>
                 </a:solidFill>
               </a:rPr>
               <a:t>5:1~9</a:t>
             </a:r>
-            <a:endParaRPr lang="en-US" sz="1200" dirty="0"/>
+            <a:endParaRPr lang="en-US" sz="1300" dirty="0"/>
           </a:p>
         </p:txBody>
       </p:sp>
@@ -16054,12 +16072,12 @@
         </p:nvSpPr>
         <p:spPr>
           <a:xfrm>
-            <a:off x="5424874" y="1572768"/>
-            <a:ext cx="1341947" cy="2103120"/>
+            <a:off x="8979179" y="1517904"/>
+            <a:ext cx="2526716" cy="1687068"/>
           </a:xfrm>
           <a:prstGeom prst="roundRect">
             <a:avLst>
-              <a:gd name="adj" fmla="val 4088"/>
+              <a:gd name="adj" fmla="val 3252"/>
             </a:avLst>
           </a:prstGeom>
           <a:solidFill>
@@ -16083,8 +16101,8 @@
         </p:nvSpPr>
         <p:spPr>
           <a:xfrm>
-            <a:off x="5571178" y="1719072"/>
-            <a:ext cx="384048" cy="384048"/>
+            <a:off x="9180347" y="1719072"/>
+            <a:ext cx="420624" cy="420624"/>
           </a:xfrm>
           <a:prstGeom prst="ellipse">
             <a:avLst/>
@@ -16103,8 +16121,8 @@
         </p:nvSpPr>
         <p:spPr>
           <a:xfrm>
-            <a:off x="5571178" y="1719072"/>
-            <a:ext cx="384048" cy="384048"/>
+            <a:off x="9180347" y="1719072"/>
+            <a:ext cx="420624" cy="420624"/>
           </a:xfrm>
           <a:prstGeom prst="rect">
             <a:avLst/>
@@ -16120,14 +16138,14 @@
               <a:buNone/>
             </a:pPr>
             <a:r>
-              <a:rPr lang="en-US" sz="1300" b="1" dirty="0">
+              <a:rPr lang="en-US" sz="1400" b="1" dirty="0">
                 <a:solidFill>
                   <a:schemeClr val="bg1"/>
                 </a:solidFill>
               </a:rPr>
               <a:t>오</a:t>
             </a:r>
-            <a:endParaRPr lang="en-US" sz="1300" dirty="0"/>
+            <a:endParaRPr lang="en-US" sz="1400" dirty="0"/>
           </a:p>
         </p:txBody>
       </p:sp>
@@ -16139,8 +16157,8 @@
         </p:nvSpPr>
         <p:spPr>
           <a:xfrm>
-            <a:off x="5571178" y="2231136"/>
-            <a:ext cx="1049339" cy="224028"/>
+            <a:off x="9180347" y="2267712"/>
+            <a:ext cx="2124380" cy="256032"/>
           </a:xfrm>
           <a:prstGeom prst="rect">
             <a:avLst/>
@@ -16156,14 +16174,14 @@
               <a:buNone/>
             </a:pPr>
             <a:r>
-              <a:rPr lang="en-US" sz="1400" b="1" dirty="0">
+              <a:rPr lang="en-US" sz="1600" b="1" dirty="0">
                 <a:solidFill>
                   <a:schemeClr val="tx1"/>
                 </a:solidFill>
               </a:rPr>
               <a:t>오병이어</a:t>
             </a:r>
-            <a:endParaRPr lang="en-US" sz="1400" dirty="0"/>
+            <a:endParaRPr lang="en-US" sz="1600" dirty="0"/>
           </a:p>
         </p:txBody>
       </p:sp>
@@ -16175,8 +16193,8 @@
         </p:nvSpPr>
         <p:spPr>
           <a:xfrm>
-            <a:off x="5571178" y="2528316"/>
-            <a:ext cx="1049339" cy="1001268"/>
+            <a:off x="9180347" y="2596896"/>
+            <a:ext cx="2124380" cy="406908"/>
           </a:xfrm>
           <a:prstGeom prst="rect">
             <a:avLst/>
@@ -16195,14 +16213,14 @@
               <a:buNone/>
             </a:pPr>
             <a:r>
-              <a:rPr lang="en-US" sz="1200" dirty="0">
+              <a:rPr lang="en-US" sz="1300" dirty="0">
                 <a:solidFill>
                   <a:schemeClr val="accent3"/>
                 </a:solidFill>
               </a:rPr>
               <a:t>오천 명을 먹이심</a:t>
             </a:r>
-            <a:endParaRPr lang="en-US" sz="1200" dirty="0"/>
+            <a:endParaRPr lang="en-US" sz="1300" dirty="0"/>
           </a:p>
           <a:p>
             <a:pPr indent="0" marL="0">
@@ -16212,14 +16230,14 @@
               <a:buNone/>
             </a:pPr>
             <a:r>
-              <a:rPr lang="en-US" sz="1200" dirty="0">
+              <a:rPr lang="en-US" sz="1300" dirty="0">
                 <a:solidFill>
                   <a:schemeClr val="accent3"/>
                 </a:solidFill>
               </a:rPr>
               <a:t>6:5~13</a:t>
             </a:r>
-            <a:endParaRPr lang="en-US" sz="1200" dirty="0"/>
+            <a:endParaRPr lang="en-US" sz="1300" dirty="0"/>
           </a:p>
         </p:txBody>
       </p:sp>
@@ -16231,12 +16249,12 @@
         </p:nvSpPr>
         <p:spPr>
           <a:xfrm>
-            <a:off x="7004565" y="1572768"/>
-            <a:ext cx="1341947" cy="2103120"/>
+            <a:off x="685800" y="3442716"/>
+            <a:ext cx="2526716" cy="1687068"/>
           </a:xfrm>
           <a:prstGeom prst="roundRect">
             <a:avLst>
-              <a:gd name="adj" fmla="val 4088"/>
+              <a:gd name="adj" fmla="val 3252"/>
             </a:avLst>
           </a:prstGeom>
           <a:solidFill>
@@ -16260,8 +16278,8 @@
         </p:nvSpPr>
         <p:spPr>
           <a:xfrm>
-            <a:off x="7150869" y="1719072"/>
-            <a:ext cx="384048" cy="384048"/>
+            <a:off x="886968" y="3643884"/>
+            <a:ext cx="420624" cy="420624"/>
           </a:xfrm>
           <a:prstGeom prst="ellipse">
             <a:avLst/>
@@ -16280,8 +16298,8 @@
         </p:nvSpPr>
         <p:spPr>
           <a:xfrm>
-            <a:off x="7150869" y="1719072"/>
-            <a:ext cx="384048" cy="384048"/>
+            <a:off x="886968" y="3643884"/>
+            <a:ext cx="420624" cy="420624"/>
           </a:xfrm>
           <a:prstGeom prst="rect">
             <a:avLst/>
@@ -16297,14 +16315,14 @@
               <a:buNone/>
             </a:pPr>
             <a:r>
-              <a:rPr lang="en-US" sz="1300" b="1" dirty="0">
+              <a:rPr lang="en-US" sz="1400" b="1" dirty="0">
                 <a:solidFill>
                   <a:schemeClr val="bg1"/>
                 </a:solidFill>
               </a:rPr>
               <a:t>물</a:t>
             </a:r>
-            <a:endParaRPr lang="en-US" sz="1300" dirty="0"/>
+            <a:endParaRPr lang="en-US" sz="1400" dirty="0"/>
           </a:p>
         </p:txBody>
       </p:sp>
@@ -16316,8 +16334,8 @@
         </p:nvSpPr>
         <p:spPr>
           <a:xfrm>
-            <a:off x="7150869" y="2231136"/>
-            <a:ext cx="1049339" cy="448056"/>
+            <a:off x="886968" y="4192524"/>
+            <a:ext cx="2124380" cy="256032"/>
           </a:xfrm>
           <a:prstGeom prst="rect">
             <a:avLst/>
@@ -16333,14 +16351,14 @@
               <a:buNone/>
             </a:pPr>
             <a:r>
-              <a:rPr lang="en-US" sz="1400" b="1" dirty="0">
+              <a:rPr lang="en-US" sz="1600" b="1" dirty="0">
                 <a:solidFill>
                   <a:schemeClr val="tx1"/>
                 </a:solidFill>
               </a:rPr>
               <a:t>물 위를 걸으심</a:t>
             </a:r>
-            <a:endParaRPr lang="en-US" sz="1400" dirty="0"/>
+            <a:endParaRPr lang="en-US" sz="1600" dirty="0"/>
           </a:p>
         </p:txBody>
       </p:sp>
@@ -16352,8 +16370,8 @@
         </p:nvSpPr>
         <p:spPr>
           <a:xfrm>
-            <a:off x="7150869" y="2752344"/>
-            <a:ext cx="1049339" cy="777240"/>
+            <a:off x="886968" y="4521708"/>
+            <a:ext cx="2124380" cy="406908"/>
           </a:xfrm>
           <a:prstGeom prst="rect">
             <a:avLst/>
@@ -16372,14 +16390,14 @@
               <a:buNone/>
             </a:pPr>
             <a:r>
-              <a:rPr lang="en-US" sz="1200" dirty="0">
+              <a:rPr lang="en-US" sz="1300" dirty="0">
                 <a:solidFill>
                   <a:schemeClr val="accent3"/>
                 </a:solidFill>
               </a:rPr>
               <a:t>밤 사경에</a:t>
             </a:r>
-            <a:endParaRPr lang="en-US" sz="1200" dirty="0"/>
+            <a:endParaRPr lang="en-US" sz="1300" dirty="0"/>
           </a:p>
           <a:p>
             <a:pPr indent="0" marL="0">
@@ -16389,14 +16407,14 @@
               <a:buNone/>
             </a:pPr>
             <a:r>
-              <a:rPr lang="en-US" sz="1200" dirty="0">
+              <a:rPr lang="en-US" sz="1300" dirty="0">
                 <a:solidFill>
                   <a:schemeClr val="accent3"/>
                 </a:solidFill>
               </a:rPr>
               <a:t>6:19~21</a:t>
             </a:r>
-            <a:endParaRPr lang="en-US" sz="1200" dirty="0"/>
+            <a:endParaRPr lang="en-US" sz="1300" dirty="0"/>
           </a:p>
         </p:txBody>
       </p:sp>
@@ -16408,12 +16426,12 @@
         </p:nvSpPr>
         <p:spPr>
           <a:xfrm>
-            <a:off x="8584257" y="1572768"/>
-            <a:ext cx="1341947" cy="2103120"/>
+            <a:off x="3450260" y="3442716"/>
+            <a:ext cx="2526716" cy="1687068"/>
           </a:xfrm>
           <a:prstGeom prst="roundRect">
             <a:avLst>
-              <a:gd name="adj" fmla="val 4088"/>
+              <a:gd name="adj" fmla="val 3252"/>
             </a:avLst>
           </a:prstGeom>
           <a:solidFill>
@@ -16437,8 +16455,8 @@
         </p:nvSpPr>
         <p:spPr>
           <a:xfrm>
-            <a:off x="8730561" y="1719072"/>
-            <a:ext cx="384048" cy="384048"/>
+            <a:off x="3651428" y="3643884"/>
+            <a:ext cx="420624" cy="420624"/>
           </a:xfrm>
           <a:prstGeom prst="ellipse">
             <a:avLst/>
@@ -16457,8 +16475,8 @@
         </p:nvSpPr>
         <p:spPr>
           <a:xfrm>
-            <a:off x="8730561" y="1719072"/>
-            <a:ext cx="384048" cy="384048"/>
+            <a:off x="3651428" y="3643884"/>
+            <a:ext cx="420624" cy="420624"/>
           </a:xfrm>
           <a:prstGeom prst="rect">
             <a:avLst/>
@@ -16474,14 +16492,14 @@
               <a:buNone/>
             </a:pPr>
             <a:r>
-              <a:rPr lang="en-US" sz="1300" b="1" dirty="0">
+              <a:rPr lang="en-US" sz="1400" b="1" dirty="0">
                 <a:solidFill>
                   <a:schemeClr val="bg1"/>
                 </a:solidFill>
               </a:rPr>
               <a:t>실</a:t>
             </a:r>
-            <a:endParaRPr lang="en-US" sz="1300" dirty="0"/>
+            <a:endParaRPr lang="en-US" sz="1400" dirty="0"/>
           </a:p>
         </p:txBody>
       </p:sp>
@@ -16493,8 +16511,8 @@
         </p:nvSpPr>
         <p:spPr>
           <a:xfrm>
-            <a:off x="8730561" y="2231136"/>
-            <a:ext cx="1049339" cy="224028"/>
+            <a:off x="3651428" y="4192524"/>
+            <a:ext cx="2124380" cy="256032"/>
           </a:xfrm>
           <a:prstGeom prst="rect">
             <a:avLst/>
@@ -16510,14 +16528,14 @@
               <a:buNone/>
             </a:pPr>
             <a:r>
-              <a:rPr lang="en-US" sz="1400" b="1" dirty="0">
+              <a:rPr lang="en-US" sz="1600" b="1" dirty="0">
                 <a:solidFill>
                   <a:schemeClr val="tx1"/>
                 </a:solidFill>
               </a:rPr>
               <a:t>실로암 맹인</a:t>
             </a:r>
-            <a:endParaRPr lang="en-US" sz="1400" dirty="0"/>
+            <a:endParaRPr lang="en-US" sz="1600" dirty="0"/>
           </a:p>
         </p:txBody>
       </p:sp>
@@ -16529,8 +16547,8 @@
         </p:nvSpPr>
         <p:spPr>
           <a:xfrm>
-            <a:off x="8730561" y="2528316"/>
-            <a:ext cx="1049339" cy="1001268"/>
+            <a:off x="3651428" y="4521708"/>
+            <a:ext cx="2124380" cy="406908"/>
           </a:xfrm>
           <a:prstGeom prst="rect">
             <a:avLst/>
@@ -16549,14 +16567,14 @@
               <a:buNone/>
             </a:pPr>
             <a:r>
-              <a:rPr lang="en-US" sz="1200" dirty="0">
+              <a:rPr lang="en-US" sz="1300" dirty="0">
                 <a:solidFill>
                   <a:schemeClr val="accent3"/>
                 </a:solidFill>
               </a:rPr>
               <a:t>날 때부터 소경</a:t>
             </a:r>
-            <a:endParaRPr lang="en-US" sz="1200" dirty="0"/>
+            <a:endParaRPr lang="en-US" sz="1300" dirty="0"/>
           </a:p>
           <a:p>
             <a:pPr indent="0" marL="0">
@@ -16566,14 +16584,14 @@
               <a:buNone/>
             </a:pPr>
             <a:r>
-              <a:rPr lang="en-US" sz="1200" dirty="0">
+              <a:rPr lang="en-US" sz="1300" dirty="0">
                 <a:solidFill>
                   <a:schemeClr val="accent3"/>
                 </a:solidFill>
               </a:rPr>
               <a:t>9:1~7</a:t>
             </a:r>
-            <a:endParaRPr lang="en-US" sz="1200" dirty="0"/>
+            <a:endParaRPr lang="en-US" sz="1300" dirty="0"/>
           </a:p>
         </p:txBody>
       </p:sp>
@@ -16585,12 +16603,12 @@
         </p:nvSpPr>
         <p:spPr>
           <a:xfrm>
-            <a:off x="10163948" y="1572768"/>
-            <a:ext cx="1341947" cy="2103120"/>
+            <a:off x="6214720" y="3442716"/>
+            <a:ext cx="2526716" cy="1687068"/>
           </a:xfrm>
           <a:prstGeom prst="roundRect">
             <a:avLst>
-              <a:gd name="adj" fmla="val 4088"/>
+              <a:gd name="adj" fmla="val 3252"/>
             </a:avLst>
           </a:prstGeom>
           <a:solidFill>
@@ -16614,8 +16632,8 @@
         </p:nvSpPr>
         <p:spPr>
           <a:xfrm>
-            <a:off x="10310252" y="1719072"/>
-            <a:ext cx="384048" cy="384048"/>
+            <a:off x="6415888" y="3643884"/>
+            <a:ext cx="420624" cy="420624"/>
           </a:xfrm>
           <a:prstGeom prst="ellipse">
             <a:avLst/>
@@ -16634,8 +16652,8 @@
         </p:nvSpPr>
         <p:spPr>
           <a:xfrm>
-            <a:off x="10310252" y="1719072"/>
-            <a:ext cx="384048" cy="384048"/>
+            <a:off x="6415888" y="3643884"/>
+            <a:ext cx="420624" cy="420624"/>
           </a:xfrm>
           <a:prstGeom prst="rect">
             <a:avLst/>
@@ -16651,14 +16669,14 @@
               <a:buNone/>
             </a:pPr>
             <a:r>
-              <a:rPr lang="en-US" sz="1300" b="1" dirty="0">
+              <a:rPr lang="en-US" sz="1400" b="1" dirty="0">
                 <a:solidFill>
                   <a:schemeClr val="bg1"/>
                 </a:solidFill>
               </a:rPr>
               <a:t>나</a:t>
             </a:r>
-            <a:endParaRPr lang="en-US" sz="1300" dirty="0"/>
+            <a:endParaRPr lang="en-US" sz="1400" dirty="0"/>
           </a:p>
         </p:txBody>
       </p:sp>
@@ -16670,8 +16688,8 @@
         </p:nvSpPr>
         <p:spPr>
           <a:xfrm>
-            <a:off x="10310252" y="2231136"/>
-            <a:ext cx="1049339" cy="448056"/>
+            <a:off x="6415888" y="4192524"/>
+            <a:ext cx="2124380" cy="256032"/>
           </a:xfrm>
           <a:prstGeom prst="rect">
             <a:avLst/>
@@ -16687,14 +16705,14 @@
               <a:buNone/>
             </a:pPr>
             <a:r>
-              <a:rPr lang="en-US" sz="1400" b="1" dirty="0">
+              <a:rPr lang="en-US" sz="1600" b="1" dirty="0">
                 <a:solidFill>
                   <a:schemeClr val="tx1"/>
                 </a:solidFill>
               </a:rPr>
               <a:t>나사로를 살리심</a:t>
             </a:r>
-            <a:endParaRPr lang="en-US" sz="1400" dirty="0"/>
+            <a:endParaRPr lang="en-US" sz="1600" dirty="0"/>
           </a:p>
         </p:txBody>
       </p:sp>
@@ -16706,8 +16724,8 @@
         </p:nvSpPr>
         <p:spPr>
           <a:xfrm>
-            <a:off x="10310252" y="2752344"/>
-            <a:ext cx="1049339" cy="777240"/>
+            <a:off x="6415888" y="4521708"/>
+            <a:ext cx="2124380" cy="406908"/>
           </a:xfrm>
           <a:prstGeom prst="rect">
             <a:avLst/>
@@ -16726,14 +16744,14 @@
               <a:buNone/>
             </a:pPr>
             <a:r>
-              <a:rPr lang="en-US" sz="1200" dirty="0">
+              <a:rPr lang="en-US" sz="1300" dirty="0">
                 <a:solidFill>
                   <a:schemeClr val="accent3"/>
                 </a:solidFill>
               </a:rPr>
               <a:t>표적 중의 표적</a:t>
             </a:r>
-            <a:endParaRPr lang="en-US" sz="1200" dirty="0"/>
+            <a:endParaRPr lang="en-US" sz="1300" dirty="0"/>
           </a:p>
           <a:p>
             <a:pPr indent="0" marL="0">
@@ -16743,31 +16761,208 @@
               <a:buNone/>
             </a:pPr>
             <a:r>
-              <a:rPr lang="en-US" sz="1200" dirty="0">
+              <a:rPr lang="en-US" sz="1300" dirty="0">
                 <a:solidFill>
                   <a:schemeClr val="accent3"/>
                 </a:solidFill>
               </a:rPr>
               <a:t>11:1~44</a:t>
             </a:r>
-            <a:endParaRPr lang="en-US" sz="1200" dirty="0"/>
-          </a:p>
-        </p:txBody>
-      </p:sp>
-      <p:sp>
-        <p:nvSpPr>
-          <p:cNvPr id="38" name="keyline"/>
+            <a:endParaRPr lang="en-US" sz="1300" dirty="0"/>
+          </a:p>
+        </p:txBody>
+      </p:sp>
+      <p:sp>
+        <p:nvSpPr>
+          <p:cNvPr id="38" name="card-7"/>
           <p:cNvSpPr/>
           <p:nvPr/>
         </p:nvSpPr>
         <p:spPr>
           <a:xfrm>
-            <a:off x="685800" y="3895344"/>
-            <a:ext cx="10820095" cy="658368"/>
+            <a:off x="8979179" y="3442716"/>
+            <a:ext cx="2526716" cy="1687068"/>
           </a:xfrm>
           <a:prstGeom prst="roundRect">
             <a:avLst>
-              <a:gd name="adj" fmla="val 13889"/>
+              <a:gd name="adj" fmla="val 3252"/>
+            </a:avLst>
+          </a:prstGeom>
+          <a:solidFill>
+            <a:schemeClr val="bg2"/>
+          </a:solidFill>
+          <a:ln/>
+          <a:effectLst>
+            <a:outerShdw sx="100000" sy="100000" kx="0" ky="0" algn="bl" rotWithShape="0" blurRad="127000" dist="25400" dir="5400000">
+              <a:srgbClr val="0E1826">
+                <a:alpha val="10000"/>
+              </a:srgbClr>
+            </a:outerShdw>
+          </a:effectLst>
+        </p:spPr>
+      </p:sp>
+      <p:sp>
+        <p:nvSpPr>
+          <p:cNvPr id="39" name="card-7-badge"/>
+          <p:cNvSpPr/>
+          <p:nvPr/>
+        </p:nvSpPr>
+        <p:spPr>
+          <a:xfrm>
+            <a:off x="9180347" y="3643884"/>
+            <a:ext cx="420624" cy="420624"/>
+          </a:xfrm>
+          <a:prstGeom prst="ellipse">
+            <a:avLst/>
+          </a:prstGeom>
+          <a:solidFill>
+            <a:schemeClr val="accent1"/>
+          </a:solidFill>
+          <a:ln/>
+        </p:spPr>
+      </p:sp>
+      <p:sp>
+        <p:nvSpPr>
+          <p:cNvPr id="40" name="card-7-badge-text"/>
+          <p:cNvSpPr txBox="1"/>
+          <p:nvPr/>
+        </p:nvSpPr>
+        <p:spPr>
+          <a:xfrm>
+            <a:off x="9180347" y="3643884"/>
+            <a:ext cx="420624" cy="420624"/>
+          </a:xfrm>
+          <a:prstGeom prst="rect">
+            <a:avLst/>
+          </a:prstGeom>
+          <a:noFill/>
+          <a:ln/>
+        </p:spPr>
+        <p:txBody>
+          <a:bodyPr wrap="square" lIns="0" tIns="0" rIns="0" bIns="0" rtlCol="0" anchor="ctr"/>
+          <a:lstStyle/>
+          <a:p>
+            <a:pPr algn="ctr" indent="0" marL="0">
+              <a:buNone/>
+            </a:pPr>
+            <a:r>
+              <a:rPr lang="en-US" sz="1400" b="1" dirty="0">
+                <a:solidFill>
+                  <a:schemeClr val="bg1"/>
+                </a:solidFill>
+              </a:rPr>
+              <a:t>+</a:t>
+            </a:r>
+            <a:endParaRPr lang="en-US" sz="1400" dirty="0"/>
+          </a:p>
+        </p:txBody>
+      </p:sp>
+      <p:sp>
+        <p:nvSpPr>
+          <p:cNvPr id="41" name="card-7-head"/>
+          <p:cNvSpPr txBox="1"/>
+          <p:nvPr/>
+        </p:nvSpPr>
+        <p:spPr>
+          <a:xfrm>
+            <a:off x="9180347" y="4192524"/>
+            <a:ext cx="2124380" cy="256032"/>
+          </a:xfrm>
+          <a:prstGeom prst="rect">
+            <a:avLst/>
+          </a:prstGeom>
+          <a:noFill/>
+          <a:ln/>
+        </p:spPr>
+        <p:txBody>
+          <a:bodyPr wrap="square" lIns="0" tIns="0" rIns="0" bIns="0" rtlCol="0" anchor="t"/>
+          <a:lstStyle/>
+          <a:p>
+            <a:pPr indent="0" marL="0">
+              <a:buNone/>
+            </a:pPr>
+            <a:r>
+              <a:rPr lang="en-US" sz="1600" b="1" dirty="0">
+                <a:solidFill>
+                  <a:schemeClr val="tx1"/>
+                </a:solidFill>
+              </a:rPr>
+              <a:t>153마리 고기</a:t>
+            </a:r>
+            <a:endParaRPr lang="en-US" sz="1600" dirty="0"/>
+          </a:p>
+        </p:txBody>
+      </p:sp>
+      <p:sp>
+        <p:nvSpPr>
+          <p:cNvPr id="42" name="card-7-body"/>
+          <p:cNvSpPr txBox="1"/>
+          <p:nvPr/>
+        </p:nvSpPr>
+        <p:spPr>
+          <a:xfrm>
+            <a:off x="9180347" y="4521708"/>
+            <a:ext cx="2124380" cy="406908"/>
+          </a:xfrm>
+          <a:prstGeom prst="rect">
+            <a:avLst/>
+          </a:prstGeom>
+          <a:noFill/>
+          <a:ln/>
+        </p:spPr>
+        <p:txBody>
+          <a:bodyPr wrap="square" lIns="0" tIns="0" rIns="0" bIns="0" rtlCol="0" anchor="t"/>
+          <a:lstStyle/>
+          <a:p>
+            <a:pPr indent="0" marL="0">
+              <a:lnSpc>
+                <a:spcPct val="122000"/>
+              </a:lnSpc>
+              <a:buNone/>
+            </a:pPr>
+            <a:r>
+              <a:rPr lang="en-US" sz="1300" dirty="0">
+                <a:solidFill>
+                  <a:schemeClr val="accent3"/>
+                </a:solidFill>
+              </a:rPr>
+              <a:t>여덟 번째 표적으로 보기도</a:t>
+            </a:r>
+            <a:endParaRPr lang="en-US" sz="1300" dirty="0"/>
+          </a:p>
+          <a:p>
+            <a:pPr indent="0" marL="0">
+              <a:lnSpc>
+                <a:spcPct val="122000"/>
+              </a:lnSpc>
+              <a:buNone/>
+            </a:pPr>
+            <a:r>
+              <a:rPr lang="en-US" sz="1300" dirty="0">
+                <a:solidFill>
+                  <a:schemeClr val="accent3"/>
+                </a:solidFill>
+              </a:rPr>
+              <a:t>21:1~14</a:t>
+            </a:r>
+            <a:endParaRPr lang="en-US" sz="1300" dirty="0"/>
+          </a:p>
+        </p:txBody>
+      </p:sp>
+      <p:sp>
+        <p:nvSpPr>
+          <p:cNvPr id="43" name="keyline"/>
+          <p:cNvSpPr/>
+          <p:nvPr/>
+        </p:nvSpPr>
+        <p:spPr>
+          <a:xfrm>
+            <a:off x="685800" y="5266944"/>
+            <a:ext cx="10820095" cy="969264"/>
+          </a:xfrm>
+          <a:prstGeom prst="roundRect">
+            <a:avLst>
+              <a:gd name="adj" fmla="val 9434"/>
             </a:avLst>
           </a:prstGeom>
           <a:solidFill>
@@ -16778,14 +16973,14 @@
       </p:sp>
       <p:sp>
         <p:nvSpPr>
-          <p:cNvPr id="39" name="keyline-text"/>
-          <p:cNvSpPr txBox="1"/>
-          <p:nvPr/>
-        </p:nvSpPr>
-        <p:spPr>
-          <a:xfrm>
-            <a:off x="960120" y="3895344"/>
-            <a:ext cx="10271455" cy="658368"/>
+          <p:cNvPr id="44" name="keyline-text"/>
+          <p:cNvSpPr txBox="1"/>
+          <p:nvPr/>
+        </p:nvSpPr>
+        <p:spPr>
+          <a:xfrm>
+            <a:off x="960120" y="5266944"/>
+            <a:ext cx="10271455" cy="969264"/>
           </a:xfrm>
           <a:prstGeom prst="rect">
             <a:avLst/>
@@ -16801,96 +16996,34 @@
               <a:buNone/>
             </a:pPr>
             <a:r>
-              <a:rPr lang="en-US" sz="1700" b="1" dirty="0">
+              <a:rPr lang="en-US" sz="1600" b="1" dirty="0">
                 <a:solidFill>
                   <a:schemeClr val="accent6"/>
                 </a:solidFill>
               </a:rPr>
-              <a:t>표적(σημεῖον)은 기적 자체가 아니라, 예수님이 누구신지를 가리키는 ‘표지판’입니다</a:t>
-            </a:r>
-            <a:endParaRPr lang="en-US" sz="1700" dirty="0"/>
-          </a:p>
-        </p:txBody>
-      </p:sp>
-      <p:sp>
-        <p:nvSpPr>
-          <p:cNvPr id="40" name="bullets"/>
-          <p:cNvSpPr txBox="1"/>
-          <p:nvPr/>
-        </p:nvSpPr>
-        <p:spPr>
-          <a:xfrm>
-            <a:off x="685800" y="4700016"/>
-            <a:ext cx="10820095" cy="1371600"/>
-          </a:xfrm>
-          <a:prstGeom prst="rect">
-            <a:avLst/>
-          </a:prstGeom>
-          <a:noFill/>
-          <a:ln/>
-        </p:spPr>
-        <p:txBody>
-          <a:bodyPr wrap="square" lIns="0" tIns="0" rIns="0" bIns="0" rtlCol="0" anchor="t"/>
-          <a:lstStyle/>
-          <a:p>
-            <a:pPr marL="342900" indent="-342900">
-              <a:spcAft>
-                <a:spcPts val="700"/>
-              </a:spcAft>
-              <a:buSzPct val="100000"/>
-              <a:buChar char="•"/>
-            </a:pPr>
-            <a:r>
-              <a:rPr lang="en-US" sz="1500" b="1" dirty="0">
-                <a:solidFill>
-                  <a:schemeClr val="tx1"/>
-                </a:solidFill>
-              </a:rPr>
-              <a:t>나사로를 살리신 사건(11장)은 가장 큰 표적이자, 예수님의 부활을 강력히 예표하는 표적 중의 표적</a:t>
-            </a:r>
-            <a:endParaRPr lang="en-US" sz="1500" dirty="0"/>
-          </a:p>
-          <a:p>
-            <a:pPr marL="342900" indent="-342900">
-              <a:spcAft>
-                <a:spcPts val="700"/>
-              </a:spcAft>
-              <a:buSzPct val="100000"/>
-              <a:buChar char="•"/>
-            </a:pPr>
-            <a:r>
-              <a:rPr lang="en-US" sz="1500" dirty="0">
-                <a:solidFill>
-                  <a:schemeClr val="tx1"/>
-                </a:solidFill>
-              </a:rPr>
-              <a:t>21장의 153마리 고기 사건을 더해 여덟 번째 표적으로 보기도 한다</a:t>
-            </a:r>
-            <a:endParaRPr lang="en-US" sz="1500" dirty="0"/>
-          </a:p>
-          <a:p>
-            <a:pPr marL="342900" indent="-342900">
-              <a:spcAft>
-                <a:spcPts val="700"/>
-              </a:spcAft>
-              <a:buSzPct val="100000"/>
-              <a:buChar char="•"/>
-            </a:pPr>
-            <a:r>
-              <a:rPr lang="en-US" sz="1500" dirty="0">
-                <a:solidFill>
-                  <a:schemeClr val="tx1"/>
-                </a:solidFill>
-              </a:rPr>
-              <a:t>표적은 늘 ‘자기선언’과 짝을 이룬다 — 오병이어 뒤에 “나는 생명의 떡이다”, 실로암 뒤에 “나는 세상의 빛이다”</a:t>
-            </a:r>
-            <a:endParaRPr lang="en-US" sz="1500" dirty="0"/>
-          </a:p>
-        </p:txBody>
-      </p:sp>
-      <p:sp>
-        <p:nvSpPr>
-          <p:cNvPr id="41" name="Text 0"/>
+              <a:t>표적(σημεῖον)은 기적 자체가 아니라, 예수님이 누구신지를 가리키는 ‘표지판’입니다.</a:t>
+            </a:r>
+            <a:endParaRPr lang="en-US" sz="1600" dirty="0"/>
+          </a:p>
+          <a:p>
+            <a:pPr indent="0" marL="0">
+              <a:buNone/>
+            </a:pPr>
+            <a:r>
+              <a:rPr lang="en-US" sz="1600" b="1" dirty="0">
+                <a:solidFill>
+                  <a:schemeClr val="accent6"/>
+                </a:solidFill>
+              </a:rPr>
+              <a:t>표적은 늘 자기선언과 짝을 이룬다 — 오병이어 뒤에 “나는 생명의 떡이다”, 실로암 뒤에 “나는 세상의 빛이다”</a:t>
+            </a:r>
+            <a:endParaRPr lang="en-US" sz="1600" dirty="0"/>
+          </a:p>
+        </p:txBody>
+      </p:sp>
+      <p:sp>
+        <p:nvSpPr>
+          <p:cNvPr id="45" name="Text 0"/>
           <p:cNvSpPr/>
           <p:nvPr>
             <p:ph idx="101" type="body" hasCustomPrompt="1"/>
@@ -17023,7 +17156,7 @@
                   <a:schemeClr val="tx1"/>
                 </a:solidFill>
               </a:rPr>
-              <a:t>완전수 7 ② 일곱 자기선언 — 에고 에이미 (ἐγώ εἰμι)</a:t>
+              <a:t>완전수 7 ② 일곱 자기선언 (에고 에이미)</a:t>
             </a:r>
             <a:endParaRPr lang="en-US" sz="3200" dirty="0"/>
           </a:p>
@@ -17037,12 +17170,12 @@
         </p:nvSpPr>
         <p:spPr>
           <a:xfrm>
-            <a:off x="685800" y="1572768"/>
-            <a:ext cx="1341947" cy="2286000"/>
+            <a:off x="685800" y="1517904"/>
+            <a:ext cx="2526716" cy="1687068"/>
           </a:xfrm>
           <a:prstGeom prst="roundRect">
             <a:avLst>
-              <a:gd name="adj" fmla="val 4088"/>
+              <a:gd name="adj" fmla="val 3252"/>
             </a:avLst>
           </a:prstGeom>
           <a:solidFill>
@@ -17066,8 +17199,8 @@
         </p:nvSpPr>
         <p:spPr>
           <a:xfrm>
-            <a:off x="832104" y="1719072"/>
-            <a:ext cx="384048" cy="384048"/>
+            <a:off x="886968" y="1719072"/>
+            <a:ext cx="420624" cy="420624"/>
           </a:xfrm>
           <a:prstGeom prst="ellipse">
             <a:avLst/>
@@ -17086,8 +17219,8 @@
         </p:nvSpPr>
         <p:spPr>
           <a:xfrm>
-            <a:off x="832104" y="1719072"/>
-            <a:ext cx="384048" cy="384048"/>
+            <a:off x="886968" y="1719072"/>
+            <a:ext cx="420624" cy="420624"/>
           </a:xfrm>
           <a:prstGeom prst="rect">
             <a:avLst/>
@@ -17103,14 +17236,14 @@
               <a:buNone/>
             </a:pPr>
             <a:r>
-              <a:rPr lang="en-US" sz="1300" b="1" dirty="0">
+              <a:rPr lang="en-US" sz="1400" b="1" dirty="0">
                 <a:solidFill>
                   <a:schemeClr val="bg1"/>
                 </a:solidFill>
               </a:rPr>
               <a:t>생</a:t>
             </a:r>
-            <a:endParaRPr lang="en-US" sz="1300" dirty="0"/>
+            <a:endParaRPr lang="en-US" sz="1400" dirty="0"/>
           </a:p>
         </p:txBody>
       </p:sp>
@@ -17122,8 +17255,8 @@
         </p:nvSpPr>
         <p:spPr>
           <a:xfrm>
-            <a:off x="832104" y="2231136"/>
-            <a:ext cx="1049339" cy="432054"/>
+            <a:off x="886968" y="2267712"/>
+            <a:ext cx="2124380" cy="256032"/>
           </a:xfrm>
           <a:prstGeom prst="rect">
             <a:avLst/>
@@ -17139,14 +17272,14 @@
               <a:buNone/>
             </a:pPr>
             <a:r>
-              <a:rPr lang="en-US" sz="1350" b="1" dirty="0">
+              <a:rPr lang="en-US" sz="1600" b="1" dirty="0">
                 <a:solidFill>
                   <a:schemeClr val="tx1"/>
                 </a:solidFill>
               </a:rPr>
-              <a:t>나는 생명의 떡이다</a:t>
-            </a:r>
-            <a:endParaRPr lang="en-US" sz="1350" dirty="0"/>
+              <a:t>생명의 떡</a:t>
+            </a:r>
+            <a:endParaRPr lang="en-US" sz="1600" dirty="0"/>
           </a:p>
         </p:txBody>
       </p:sp>
@@ -17158,8 +17291,8 @@
         </p:nvSpPr>
         <p:spPr>
           <a:xfrm>
-            <a:off x="832104" y="2736342"/>
-            <a:ext cx="1049339" cy="553720"/>
+            <a:off x="886968" y="2596896"/>
+            <a:ext cx="2124380" cy="406908"/>
           </a:xfrm>
           <a:prstGeom prst="rect">
             <a:avLst/>
@@ -17187,58 +17320,39 @@
             </a:r>
             <a:endParaRPr lang="en-US" sz="1300" dirty="0"/>
           </a:p>
-        </p:txBody>
-      </p:sp>
-      <p:sp>
-        <p:nvSpPr>
-          <p:cNvPr id="8" name="card-0-foot"/>
-          <p:cNvSpPr txBox="1"/>
-          <p:nvPr/>
-        </p:nvSpPr>
-        <p:spPr>
-          <a:xfrm>
-            <a:off x="832104" y="3326638"/>
-            <a:ext cx="1049339" cy="422402"/>
-          </a:xfrm>
-          <a:prstGeom prst="rect">
-            <a:avLst/>
-          </a:prstGeom>
-          <a:noFill/>
-          <a:ln/>
-        </p:spPr>
-        <p:txBody>
-          <a:bodyPr wrap="square" lIns="0" tIns="0" rIns="0" bIns="0" rtlCol="0" anchor="b"/>
-          <a:lstStyle/>
-          <a:p>
-            <a:pPr indent="0" marL="0">
-              <a:buNone/>
-            </a:pPr>
-            <a:r>
-              <a:rPr lang="en-US" sz="1100" b="1" dirty="0">
-                <a:solidFill>
-                  <a:schemeClr val="accent1"/>
+          <a:p>
+            <a:pPr indent="0" marL="0">
+              <a:lnSpc>
+                <a:spcPct val="122000"/>
+              </a:lnSpc>
+              <a:buNone/>
+            </a:pPr>
+            <a:r>
+              <a:rPr lang="en-US" sz="1300" dirty="0">
+                <a:solidFill>
+                  <a:schemeClr val="accent3"/>
                 </a:solidFill>
               </a:rPr>
               <a:t>살기 위해 꼭 필요한 양식</a:t>
             </a:r>
-            <a:endParaRPr lang="en-US" sz="1100" dirty="0"/>
-          </a:p>
-        </p:txBody>
-      </p:sp>
-      <p:sp>
-        <p:nvSpPr>
-          <p:cNvPr id="9" name="card-1"/>
+            <a:endParaRPr lang="en-US" sz="1300" dirty="0"/>
+          </a:p>
+        </p:txBody>
+      </p:sp>
+      <p:sp>
+        <p:nvSpPr>
+          <p:cNvPr id="8" name="card-1"/>
           <p:cNvSpPr/>
           <p:nvPr/>
         </p:nvSpPr>
         <p:spPr>
           <a:xfrm>
-            <a:off x="2265491" y="1572768"/>
-            <a:ext cx="1341947" cy="2286000"/>
+            <a:off x="3450260" y="1517904"/>
+            <a:ext cx="2526716" cy="1687068"/>
           </a:xfrm>
           <a:prstGeom prst="roundRect">
             <a:avLst>
-              <a:gd name="adj" fmla="val 4088"/>
+              <a:gd name="adj" fmla="val 3252"/>
             </a:avLst>
           </a:prstGeom>
           <a:solidFill>
@@ -17256,14 +17370,14 @@
       </p:sp>
       <p:sp>
         <p:nvSpPr>
-          <p:cNvPr id="10" name="card-1-badge"/>
+          <p:cNvPr id="9" name="card-1-badge"/>
           <p:cNvSpPr/>
           <p:nvPr/>
         </p:nvSpPr>
         <p:spPr>
           <a:xfrm>
-            <a:off x="2411795" y="1719072"/>
-            <a:ext cx="384048" cy="384048"/>
+            <a:off x="3651428" y="1719072"/>
+            <a:ext cx="420624" cy="420624"/>
           </a:xfrm>
           <a:prstGeom prst="ellipse">
             <a:avLst/>
@@ -17276,14 +17390,14 @@
       </p:sp>
       <p:sp>
         <p:nvSpPr>
-          <p:cNvPr id="11" name="card-1-badge-text"/>
-          <p:cNvSpPr txBox="1"/>
-          <p:nvPr/>
-        </p:nvSpPr>
-        <p:spPr>
-          <a:xfrm>
-            <a:off x="2411795" y="1719072"/>
-            <a:ext cx="384048" cy="384048"/>
+          <p:cNvPr id="10" name="card-1-badge-text"/>
+          <p:cNvSpPr txBox="1"/>
+          <p:nvPr/>
+        </p:nvSpPr>
+        <p:spPr>
+          <a:xfrm>
+            <a:off x="3651428" y="1719072"/>
+            <a:ext cx="420624" cy="420624"/>
           </a:xfrm>
           <a:prstGeom prst="rect">
             <a:avLst/>
@@ -17299,27 +17413,27 @@
               <a:buNone/>
             </a:pPr>
             <a:r>
-              <a:rPr lang="en-US" sz="1300" b="1" dirty="0">
+              <a:rPr lang="en-US" sz="1400" b="1" dirty="0">
                 <a:solidFill>
                   <a:schemeClr val="bg1"/>
                 </a:solidFill>
               </a:rPr>
               <a:t>세</a:t>
             </a:r>
-            <a:endParaRPr lang="en-US" sz="1300" dirty="0"/>
-          </a:p>
-        </p:txBody>
-      </p:sp>
-      <p:sp>
-        <p:nvSpPr>
-          <p:cNvPr id="12" name="card-1-head"/>
-          <p:cNvSpPr txBox="1"/>
-          <p:nvPr/>
-        </p:nvSpPr>
-        <p:spPr>
-          <a:xfrm>
-            <a:off x="2411795" y="2231136"/>
-            <a:ext cx="1049339" cy="432054"/>
+            <a:endParaRPr lang="en-US" sz="1400" dirty="0"/>
+          </a:p>
+        </p:txBody>
+      </p:sp>
+      <p:sp>
+        <p:nvSpPr>
+          <p:cNvPr id="11" name="card-1-head"/>
+          <p:cNvSpPr txBox="1"/>
+          <p:nvPr/>
+        </p:nvSpPr>
+        <p:spPr>
+          <a:xfrm>
+            <a:off x="3651428" y="2267712"/>
+            <a:ext cx="2124380" cy="256032"/>
           </a:xfrm>
           <a:prstGeom prst="rect">
             <a:avLst/>
@@ -17335,27 +17449,27 @@
               <a:buNone/>
             </a:pPr>
             <a:r>
-              <a:rPr lang="en-US" sz="1350" b="1" dirty="0">
+              <a:rPr lang="en-US" sz="1600" b="1" dirty="0">
                 <a:solidFill>
                   <a:schemeClr val="tx1"/>
                 </a:solidFill>
               </a:rPr>
-              <a:t>나는 세상의 빛이다</a:t>
-            </a:r>
-            <a:endParaRPr lang="en-US" sz="1350" dirty="0"/>
-          </a:p>
-        </p:txBody>
-      </p:sp>
-      <p:sp>
-        <p:nvSpPr>
-          <p:cNvPr id="13" name="card-1-body"/>
-          <p:cNvSpPr txBox="1"/>
-          <p:nvPr/>
-        </p:nvSpPr>
-        <p:spPr>
-          <a:xfrm>
-            <a:off x="2411795" y="2736342"/>
-            <a:ext cx="1049339" cy="553720"/>
+              <a:t>세상의 빛</a:t>
+            </a:r>
+            <a:endParaRPr lang="en-US" sz="1600" dirty="0"/>
+          </a:p>
+        </p:txBody>
+      </p:sp>
+      <p:sp>
+        <p:nvSpPr>
+          <p:cNvPr id="12" name="card-1-body"/>
+          <p:cNvSpPr txBox="1"/>
+          <p:nvPr/>
+        </p:nvSpPr>
+        <p:spPr>
+          <a:xfrm>
+            <a:off x="3651428" y="2596896"/>
+            <a:ext cx="2124380" cy="406908"/>
           </a:xfrm>
           <a:prstGeom prst="rect">
             <a:avLst/>
@@ -17379,62 +17493,43 @@
                   <a:schemeClr val="accent3"/>
                 </a:solidFill>
               </a:rPr>
-              <a:t>8:12 / 9:5</a:t>
+              <a:t>8:12 · 9:5</a:t>
             </a:r>
             <a:endParaRPr lang="en-US" sz="1300" dirty="0"/>
           </a:p>
-        </p:txBody>
-      </p:sp>
-      <p:sp>
-        <p:nvSpPr>
-          <p:cNvPr id="14" name="card-1-foot"/>
-          <p:cNvSpPr txBox="1"/>
-          <p:nvPr/>
-        </p:nvSpPr>
-        <p:spPr>
-          <a:xfrm>
-            <a:off x="2411795" y="3326638"/>
-            <a:ext cx="1049339" cy="422402"/>
-          </a:xfrm>
-          <a:prstGeom prst="rect">
-            <a:avLst/>
-          </a:prstGeom>
-          <a:noFill/>
-          <a:ln/>
-        </p:spPr>
-        <p:txBody>
-          <a:bodyPr wrap="square" lIns="0" tIns="0" rIns="0" bIns="0" rtlCol="0" anchor="b"/>
-          <a:lstStyle/>
-          <a:p>
-            <a:pPr indent="0" marL="0">
-              <a:buNone/>
-            </a:pPr>
-            <a:r>
-              <a:rPr lang="en-US" sz="1100" b="1" dirty="0">
-                <a:solidFill>
-                  <a:schemeClr val="accent1"/>
-                </a:solidFill>
-              </a:rPr>
-              <a:t>어둠을 보게 하는 빛</a:t>
-            </a:r>
-            <a:endParaRPr lang="en-US" sz="1100" dirty="0"/>
-          </a:p>
-        </p:txBody>
-      </p:sp>
-      <p:sp>
-        <p:nvSpPr>
-          <p:cNvPr id="15" name="card-2"/>
+          <a:p>
+            <a:pPr indent="0" marL="0">
+              <a:lnSpc>
+                <a:spcPct val="122000"/>
+              </a:lnSpc>
+              <a:buNone/>
+            </a:pPr>
+            <a:r>
+              <a:rPr lang="en-US" sz="1300" dirty="0">
+                <a:solidFill>
+                  <a:schemeClr val="accent3"/>
+                </a:solidFill>
+              </a:rPr>
+              <a:t>어둠 속을 보게 하는 빛</a:t>
+            </a:r>
+            <a:endParaRPr lang="en-US" sz="1300" dirty="0"/>
+          </a:p>
+        </p:txBody>
+      </p:sp>
+      <p:sp>
+        <p:nvSpPr>
+          <p:cNvPr id="13" name="card-2"/>
           <p:cNvSpPr/>
           <p:nvPr/>
         </p:nvSpPr>
         <p:spPr>
           <a:xfrm>
-            <a:off x="3845183" y="1572768"/>
-            <a:ext cx="1341947" cy="2286000"/>
+            <a:off x="6214720" y="1517904"/>
+            <a:ext cx="2526716" cy="1687068"/>
           </a:xfrm>
           <a:prstGeom prst="roundRect">
             <a:avLst>
-              <a:gd name="adj" fmla="val 4088"/>
+              <a:gd name="adj" fmla="val 3252"/>
             </a:avLst>
           </a:prstGeom>
           <a:solidFill>
@@ -17452,14 +17547,14 @@
       </p:sp>
       <p:sp>
         <p:nvSpPr>
-          <p:cNvPr id="16" name="card-2-badge"/>
+          <p:cNvPr id="14" name="card-2-badge"/>
           <p:cNvSpPr/>
           <p:nvPr/>
         </p:nvSpPr>
         <p:spPr>
           <a:xfrm>
-            <a:off x="3991487" y="1719072"/>
-            <a:ext cx="384048" cy="384048"/>
+            <a:off x="6415888" y="1719072"/>
+            <a:ext cx="420624" cy="420624"/>
           </a:xfrm>
           <a:prstGeom prst="ellipse">
             <a:avLst/>
@@ -17472,14 +17567,14 @@
       </p:sp>
       <p:sp>
         <p:nvSpPr>
-          <p:cNvPr id="17" name="card-2-badge-text"/>
-          <p:cNvSpPr txBox="1"/>
-          <p:nvPr/>
-        </p:nvSpPr>
-        <p:spPr>
-          <a:xfrm>
-            <a:off x="3991487" y="1719072"/>
-            <a:ext cx="384048" cy="384048"/>
+          <p:cNvPr id="15" name="card-2-badge-text"/>
+          <p:cNvSpPr txBox="1"/>
+          <p:nvPr/>
+        </p:nvSpPr>
+        <p:spPr>
+          <a:xfrm>
+            <a:off x="6415888" y="1719072"/>
+            <a:ext cx="420624" cy="420624"/>
           </a:xfrm>
           <a:prstGeom prst="rect">
             <a:avLst/>
@@ -17495,27 +17590,27 @@
               <a:buNone/>
             </a:pPr>
             <a:r>
-              <a:rPr lang="en-US" sz="1300" b="1" dirty="0">
+              <a:rPr lang="en-US" sz="1400" b="1" dirty="0">
                 <a:solidFill>
                   <a:schemeClr val="bg1"/>
                 </a:solidFill>
               </a:rPr>
               <a:t>양</a:t>
             </a:r>
-            <a:endParaRPr lang="en-US" sz="1300" dirty="0"/>
-          </a:p>
-        </p:txBody>
-      </p:sp>
-      <p:sp>
-        <p:nvSpPr>
-          <p:cNvPr id="18" name="card-2-head"/>
-          <p:cNvSpPr txBox="1"/>
-          <p:nvPr/>
-        </p:nvSpPr>
-        <p:spPr>
-          <a:xfrm>
-            <a:off x="3991487" y="2231136"/>
-            <a:ext cx="1049339" cy="432054"/>
+            <a:endParaRPr lang="en-US" sz="1400" dirty="0"/>
+          </a:p>
+        </p:txBody>
+      </p:sp>
+      <p:sp>
+        <p:nvSpPr>
+          <p:cNvPr id="16" name="card-2-head"/>
+          <p:cNvSpPr txBox="1"/>
+          <p:nvPr/>
+        </p:nvSpPr>
+        <p:spPr>
+          <a:xfrm>
+            <a:off x="6415888" y="2267712"/>
+            <a:ext cx="2124380" cy="256032"/>
           </a:xfrm>
           <a:prstGeom prst="rect">
             <a:avLst/>
@@ -17531,27 +17626,27 @@
               <a:buNone/>
             </a:pPr>
             <a:r>
-              <a:rPr lang="en-US" sz="1350" b="1" dirty="0">
+              <a:rPr lang="en-US" sz="1600" b="1" dirty="0">
                 <a:solidFill>
                   <a:schemeClr val="tx1"/>
                 </a:solidFill>
               </a:rPr>
-              <a:t>나는 양의 문이다</a:t>
-            </a:r>
-            <a:endParaRPr lang="en-US" sz="1350" dirty="0"/>
-          </a:p>
-        </p:txBody>
-      </p:sp>
-      <p:sp>
-        <p:nvSpPr>
-          <p:cNvPr id="19" name="card-2-body"/>
-          <p:cNvSpPr txBox="1"/>
-          <p:nvPr/>
-        </p:nvSpPr>
-        <p:spPr>
-          <a:xfrm>
-            <a:off x="3991487" y="2736342"/>
-            <a:ext cx="1049339" cy="553720"/>
+              <a:t>양의 문</a:t>
+            </a:r>
+            <a:endParaRPr lang="en-US" sz="1600" dirty="0"/>
+          </a:p>
+        </p:txBody>
+      </p:sp>
+      <p:sp>
+        <p:nvSpPr>
+          <p:cNvPr id="17" name="card-2-body"/>
+          <p:cNvSpPr txBox="1"/>
+          <p:nvPr/>
+        </p:nvSpPr>
+        <p:spPr>
+          <a:xfrm>
+            <a:off x="6415888" y="2596896"/>
+            <a:ext cx="2124380" cy="406908"/>
           </a:xfrm>
           <a:prstGeom prst="rect">
             <a:avLst/>
@@ -17579,58 +17674,39 @@
             </a:r>
             <a:endParaRPr lang="en-US" sz="1300" dirty="0"/>
           </a:p>
-        </p:txBody>
-      </p:sp>
-      <p:sp>
-        <p:nvSpPr>
-          <p:cNvPr id="20" name="card-2-foot"/>
-          <p:cNvSpPr txBox="1"/>
-          <p:nvPr/>
-        </p:nvSpPr>
-        <p:spPr>
-          <a:xfrm>
-            <a:off x="3991487" y="3326638"/>
-            <a:ext cx="1049339" cy="422402"/>
-          </a:xfrm>
-          <a:prstGeom prst="rect">
-            <a:avLst/>
-          </a:prstGeom>
-          <a:noFill/>
-          <a:ln/>
-        </p:spPr>
-        <p:txBody>
-          <a:bodyPr wrap="square" lIns="0" tIns="0" rIns="0" bIns="0" rtlCol="0" anchor="b"/>
-          <a:lstStyle/>
-          <a:p>
-            <a:pPr indent="0" marL="0">
-              <a:buNone/>
-            </a:pPr>
-            <a:r>
-              <a:rPr lang="en-US" sz="1100" b="1" dirty="0">
-                <a:solidFill>
-                  <a:schemeClr val="accent1"/>
-                </a:solidFill>
-              </a:rPr>
-              <a:t>들어가는 유일한 길</a:t>
-            </a:r>
-            <a:endParaRPr lang="en-US" sz="1100" dirty="0"/>
-          </a:p>
-        </p:txBody>
-      </p:sp>
-      <p:sp>
-        <p:nvSpPr>
-          <p:cNvPr id="21" name="card-3"/>
+          <a:p>
+            <a:pPr indent="0" marL="0">
+              <a:lnSpc>
+                <a:spcPct val="122000"/>
+              </a:lnSpc>
+              <a:buNone/>
+            </a:pPr>
+            <a:r>
+              <a:rPr lang="en-US" sz="1300" dirty="0">
+                <a:solidFill>
+                  <a:schemeClr val="accent3"/>
+                </a:solidFill>
+              </a:rPr>
+              <a:t>들어가는 유일한 문</a:t>
+            </a:r>
+            <a:endParaRPr lang="en-US" sz="1300" dirty="0"/>
+          </a:p>
+        </p:txBody>
+      </p:sp>
+      <p:sp>
+        <p:nvSpPr>
+          <p:cNvPr id="18" name="card-3"/>
           <p:cNvSpPr/>
           <p:nvPr/>
         </p:nvSpPr>
         <p:spPr>
           <a:xfrm>
-            <a:off x="5424874" y="1572768"/>
-            <a:ext cx="1341947" cy="2286000"/>
+            <a:off x="8979179" y="1517904"/>
+            <a:ext cx="2526716" cy="1687068"/>
           </a:xfrm>
           <a:prstGeom prst="roundRect">
             <a:avLst>
-              <a:gd name="adj" fmla="val 4088"/>
+              <a:gd name="adj" fmla="val 3252"/>
             </a:avLst>
           </a:prstGeom>
           <a:solidFill>
@@ -17648,14 +17724,14 @@
       </p:sp>
       <p:sp>
         <p:nvSpPr>
-          <p:cNvPr id="22" name="card-3-badge"/>
+          <p:cNvPr id="19" name="card-3-badge"/>
           <p:cNvSpPr/>
           <p:nvPr/>
         </p:nvSpPr>
         <p:spPr>
           <a:xfrm>
-            <a:off x="5571178" y="1719072"/>
-            <a:ext cx="384048" cy="384048"/>
+            <a:off x="9180347" y="1719072"/>
+            <a:ext cx="420624" cy="420624"/>
           </a:xfrm>
           <a:prstGeom prst="ellipse">
             <a:avLst/>
@@ -17668,14 +17744,14 @@
       </p:sp>
       <p:sp>
         <p:nvSpPr>
-          <p:cNvPr id="23" name="card-3-badge-text"/>
-          <p:cNvSpPr txBox="1"/>
-          <p:nvPr/>
-        </p:nvSpPr>
-        <p:spPr>
-          <a:xfrm>
-            <a:off x="5571178" y="1719072"/>
-            <a:ext cx="384048" cy="384048"/>
+          <p:cNvPr id="20" name="card-3-badge-text"/>
+          <p:cNvSpPr txBox="1"/>
+          <p:nvPr/>
+        </p:nvSpPr>
+        <p:spPr>
+          <a:xfrm>
+            <a:off x="9180347" y="1719072"/>
+            <a:ext cx="420624" cy="420624"/>
           </a:xfrm>
           <a:prstGeom prst="rect">
             <a:avLst/>
@@ -17691,27 +17767,27 @@
               <a:buNone/>
             </a:pPr>
             <a:r>
-              <a:rPr lang="en-US" sz="1300" b="1" dirty="0">
+              <a:rPr lang="en-US" sz="1400" b="1" dirty="0">
                 <a:solidFill>
                   <a:schemeClr val="bg1"/>
                 </a:solidFill>
               </a:rPr>
               <a:t>선</a:t>
             </a:r>
-            <a:endParaRPr lang="en-US" sz="1300" dirty="0"/>
-          </a:p>
-        </p:txBody>
-      </p:sp>
-      <p:sp>
-        <p:nvSpPr>
-          <p:cNvPr id="24" name="card-3-head"/>
-          <p:cNvSpPr txBox="1"/>
-          <p:nvPr/>
-        </p:nvSpPr>
-        <p:spPr>
-          <a:xfrm>
-            <a:off x="5571178" y="2231136"/>
-            <a:ext cx="1049339" cy="432054"/>
+            <a:endParaRPr lang="en-US" sz="1400" dirty="0"/>
+          </a:p>
+        </p:txBody>
+      </p:sp>
+      <p:sp>
+        <p:nvSpPr>
+          <p:cNvPr id="21" name="card-3-head"/>
+          <p:cNvSpPr txBox="1"/>
+          <p:nvPr/>
+        </p:nvSpPr>
+        <p:spPr>
+          <a:xfrm>
+            <a:off x="9180347" y="2267712"/>
+            <a:ext cx="2124380" cy="256032"/>
           </a:xfrm>
           <a:prstGeom prst="rect">
             <a:avLst/>
@@ -17727,27 +17803,27 @@
               <a:buNone/>
             </a:pPr>
             <a:r>
-              <a:rPr lang="en-US" sz="1350" b="1" dirty="0">
+              <a:rPr lang="en-US" sz="1600" b="1" dirty="0">
                 <a:solidFill>
                   <a:schemeClr val="tx1"/>
                 </a:solidFill>
               </a:rPr>
-              <a:t>나는 선한 목자다</a:t>
-            </a:r>
-            <a:endParaRPr lang="en-US" sz="1350" dirty="0"/>
-          </a:p>
-        </p:txBody>
-      </p:sp>
-      <p:sp>
-        <p:nvSpPr>
-          <p:cNvPr id="25" name="card-3-body"/>
-          <p:cNvSpPr txBox="1"/>
-          <p:nvPr/>
-        </p:nvSpPr>
-        <p:spPr>
-          <a:xfrm>
-            <a:off x="5571178" y="2736342"/>
-            <a:ext cx="1049339" cy="553720"/>
+              <a:t>선한 목자</a:t>
+            </a:r>
+            <a:endParaRPr lang="en-US" sz="1600" dirty="0"/>
+          </a:p>
+        </p:txBody>
+      </p:sp>
+      <p:sp>
+        <p:nvSpPr>
+          <p:cNvPr id="22" name="card-3-body"/>
+          <p:cNvSpPr txBox="1"/>
+          <p:nvPr/>
+        </p:nvSpPr>
+        <p:spPr>
+          <a:xfrm>
+            <a:off x="9180347" y="2596896"/>
+            <a:ext cx="2124380" cy="406908"/>
           </a:xfrm>
           <a:prstGeom prst="rect">
             <a:avLst/>
@@ -17775,58 +17851,39 @@
             </a:r>
             <a:endParaRPr lang="en-US" sz="1300" dirty="0"/>
           </a:p>
-        </p:txBody>
-      </p:sp>
-      <p:sp>
-        <p:nvSpPr>
-          <p:cNvPr id="26" name="card-3-foot"/>
-          <p:cNvSpPr txBox="1"/>
-          <p:nvPr/>
-        </p:nvSpPr>
-        <p:spPr>
-          <a:xfrm>
-            <a:off x="5571178" y="3326638"/>
-            <a:ext cx="1049339" cy="422402"/>
-          </a:xfrm>
-          <a:prstGeom prst="rect">
-            <a:avLst/>
-          </a:prstGeom>
-          <a:noFill/>
-          <a:ln/>
-        </p:spPr>
-        <p:txBody>
-          <a:bodyPr wrap="square" lIns="0" tIns="0" rIns="0" bIns="0" rtlCol="0" anchor="b"/>
-          <a:lstStyle/>
-          <a:p>
-            <a:pPr indent="0" marL="0">
-              <a:buNone/>
-            </a:pPr>
-            <a:r>
-              <a:rPr lang="en-US" sz="1100" b="1" dirty="0">
-                <a:solidFill>
-                  <a:schemeClr val="accent1"/>
+          <a:p>
+            <a:pPr indent="0" marL="0">
+              <a:lnSpc>
+                <a:spcPct val="122000"/>
+              </a:lnSpc>
+              <a:buNone/>
+            </a:pPr>
+            <a:r>
+              <a:rPr lang="en-US" sz="1300" dirty="0">
+                <a:solidFill>
+                  <a:schemeClr val="accent3"/>
                 </a:solidFill>
               </a:rPr>
               <a:t>목숨을 버리는 목자</a:t>
             </a:r>
-            <a:endParaRPr lang="en-US" sz="1100" dirty="0"/>
-          </a:p>
-        </p:txBody>
-      </p:sp>
-      <p:sp>
-        <p:nvSpPr>
-          <p:cNvPr id="27" name="card-4"/>
+            <a:endParaRPr lang="en-US" sz="1300" dirty="0"/>
+          </a:p>
+        </p:txBody>
+      </p:sp>
+      <p:sp>
+        <p:nvSpPr>
+          <p:cNvPr id="23" name="card-4"/>
           <p:cNvSpPr/>
           <p:nvPr/>
         </p:nvSpPr>
         <p:spPr>
           <a:xfrm>
-            <a:off x="7004565" y="1572768"/>
-            <a:ext cx="1341947" cy="2286000"/>
+            <a:off x="685800" y="3442716"/>
+            <a:ext cx="2526716" cy="1687068"/>
           </a:xfrm>
           <a:prstGeom prst="roundRect">
             <a:avLst>
-              <a:gd name="adj" fmla="val 4088"/>
+              <a:gd name="adj" fmla="val 3252"/>
             </a:avLst>
           </a:prstGeom>
           <a:solidFill>
@@ -17844,14 +17901,14 @@
       </p:sp>
       <p:sp>
         <p:nvSpPr>
-          <p:cNvPr id="28" name="card-4-badge"/>
+          <p:cNvPr id="24" name="card-4-badge"/>
           <p:cNvSpPr/>
           <p:nvPr/>
         </p:nvSpPr>
         <p:spPr>
           <a:xfrm>
-            <a:off x="7150869" y="1719072"/>
-            <a:ext cx="384048" cy="384048"/>
+            <a:off x="886968" y="3643884"/>
+            <a:ext cx="420624" cy="420624"/>
           </a:xfrm>
           <a:prstGeom prst="ellipse">
             <a:avLst/>
@@ -17864,14 +17921,14 @@
       </p:sp>
       <p:sp>
         <p:nvSpPr>
-          <p:cNvPr id="29" name="card-4-badge-text"/>
-          <p:cNvSpPr txBox="1"/>
-          <p:nvPr/>
-        </p:nvSpPr>
-        <p:spPr>
-          <a:xfrm>
-            <a:off x="7150869" y="1719072"/>
-            <a:ext cx="384048" cy="384048"/>
+          <p:cNvPr id="25" name="card-4-badge-text"/>
+          <p:cNvSpPr txBox="1"/>
+          <p:nvPr/>
+        </p:nvSpPr>
+        <p:spPr>
+          <a:xfrm>
+            <a:off x="886968" y="3643884"/>
+            <a:ext cx="420624" cy="420624"/>
           </a:xfrm>
           <a:prstGeom prst="rect">
             <a:avLst/>
@@ -17887,27 +17944,27 @@
               <a:buNone/>
             </a:pPr>
             <a:r>
-              <a:rPr lang="en-US" sz="1300" b="1" dirty="0">
+              <a:rPr lang="en-US" sz="1400" b="1" dirty="0">
                 <a:solidFill>
                   <a:schemeClr val="bg1"/>
                 </a:solidFill>
               </a:rPr>
               <a:t>부</a:t>
             </a:r>
-            <a:endParaRPr lang="en-US" sz="1300" dirty="0"/>
-          </a:p>
-        </p:txBody>
-      </p:sp>
-      <p:sp>
-        <p:nvSpPr>
-          <p:cNvPr id="30" name="card-4-head"/>
-          <p:cNvSpPr txBox="1"/>
-          <p:nvPr/>
-        </p:nvSpPr>
-        <p:spPr>
-          <a:xfrm>
-            <a:off x="7150869" y="2231136"/>
-            <a:ext cx="1049339" cy="432054"/>
+            <a:endParaRPr lang="en-US" sz="1400" dirty="0"/>
+          </a:p>
+        </p:txBody>
+      </p:sp>
+      <p:sp>
+        <p:nvSpPr>
+          <p:cNvPr id="26" name="card-4-head"/>
+          <p:cNvSpPr txBox="1"/>
+          <p:nvPr/>
+        </p:nvSpPr>
+        <p:spPr>
+          <a:xfrm>
+            <a:off x="886968" y="4192524"/>
+            <a:ext cx="2124380" cy="256032"/>
           </a:xfrm>
           <a:prstGeom prst="rect">
             <a:avLst/>
@@ -17923,27 +17980,27 @@
               <a:buNone/>
             </a:pPr>
             <a:r>
-              <a:rPr lang="en-US" sz="1350" b="1" dirty="0">
+              <a:rPr lang="en-US" sz="1600" b="1" dirty="0">
                 <a:solidFill>
                   <a:schemeClr val="tx1"/>
                 </a:solidFill>
               </a:rPr>
-              <a:t>나는 부활이요 생명이다</a:t>
-            </a:r>
-            <a:endParaRPr lang="en-US" sz="1350" dirty="0"/>
-          </a:p>
-        </p:txBody>
-      </p:sp>
-      <p:sp>
-        <p:nvSpPr>
-          <p:cNvPr id="31" name="card-4-body"/>
-          <p:cNvSpPr txBox="1"/>
-          <p:nvPr/>
-        </p:nvSpPr>
-        <p:spPr>
-          <a:xfrm>
-            <a:off x="7150869" y="2736342"/>
-            <a:ext cx="1049339" cy="553720"/>
+              <a:t>부활이요 생명</a:t>
+            </a:r>
+            <a:endParaRPr lang="en-US" sz="1600" dirty="0"/>
+          </a:p>
+        </p:txBody>
+      </p:sp>
+      <p:sp>
+        <p:nvSpPr>
+          <p:cNvPr id="27" name="card-4-body"/>
+          <p:cNvSpPr txBox="1"/>
+          <p:nvPr/>
+        </p:nvSpPr>
+        <p:spPr>
+          <a:xfrm>
+            <a:off x="886968" y="4521708"/>
+            <a:ext cx="2124380" cy="406908"/>
           </a:xfrm>
           <a:prstGeom prst="rect">
             <a:avLst/>
@@ -17971,58 +18028,39 @@
             </a:r>
             <a:endParaRPr lang="en-US" sz="1300" dirty="0"/>
           </a:p>
-        </p:txBody>
-      </p:sp>
-      <p:sp>
-        <p:nvSpPr>
-          <p:cNvPr id="32" name="card-4-foot"/>
-          <p:cNvSpPr txBox="1"/>
-          <p:nvPr/>
-        </p:nvSpPr>
-        <p:spPr>
-          <a:xfrm>
-            <a:off x="7150869" y="3326638"/>
-            <a:ext cx="1049339" cy="422402"/>
-          </a:xfrm>
-          <a:prstGeom prst="rect">
-            <a:avLst/>
-          </a:prstGeom>
-          <a:noFill/>
-          <a:ln/>
-        </p:spPr>
-        <p:txBody>
-          <a:bodyPr wrap="square" lIns="0" tIns="0" rIns="0" bIns="0" rtlCol="0" anchor="b"/>
-          <a:lstStyle/>
-          <a:p>
-            <a:pPr indent="0" marL="0">
-              <a:buNone/>
-            </a:pPr>
-            <a:r>
-              <a:rPr lang="en-US" sz="1100" b="1" dirty="0">
-                <a:solidFill>
-                  <a:schemeClr val="accent1"/>
+          <a:p>
+            <a:pPr indent="0" marL="0">
+              <a:lnSpc>
+                <a:spcPct val="122000"/>
+              </a:lnSpc>
+              <a:buNone/>
+            </a:pPr>
+            <a:r>
+              <a:rPr lang="en-US" sz="1300" dirty="0">
+                <a:solidFill>
+                  <a:schemeClr val="accent3"/>
                 </a:solidFill>
               </a:rPr>
               <a:t>죽음 너머의 생명</a:t>
             </a:r>
-            <a:endParaRPr lang="en-US" sz="1100" dirty="0"/>
-          </a:p>
-        </p:txBody>
-      </p:sp>
-      <p:sp>
-        <p:nvSpPr>
-          <p:cNvPr id="33" name="card-5"/>
+            <a:endParaRPr lang="en-US" sz="1300" dirty="0"/>
+          </a:p>
+        </p:txBody>
+      </p:sp>
+      <p:sp>
+        <p:nvSpPr>
+          <p:cNvPr id="28" name="card-5"/>
           <p:cNvSpPr/>
           <p:nvPr/>
         </p:nvSpPr>
         <p:spPr>
           <a:xfrm>
-            <a:off x="8584257" y="1572768"/>
-            <a:ext cx="1341947" cy="2286000"/>
+            <a:off x="3450260" y="3442716"/>
+            <a:ext cx="2526716" cy="1687068"/>
           </a:xfrm>
           <a:prstGeom prst="roundRect">
             <a:avLst>
-              <a:gd name="adj" fmla="val 4088"/>
+              <a:gd name="adj" fmla="val 3252"/>
             </a:avLst>
           </a:prstGeom>
           <a:solidFill>
@@ -18040,14 +18078,14 @@
       </p:sp>
       <p:sp>
         <p:nvSpPr>
-          <p:cNvPr id="34" name="card-5-badge"/>
+          <p:cNvPr id="29" name="card-5-badge"/>
           <p:cNvSpPr/>
           <p:nvPr/>
         </p:nvSpPr>
         <p:spPr>
           <a:xfrm>
-            <a:off x="8730561" y="1719072"/>
-            <a:ext cx="384048" cy="384048"/>
+            <a:off x="3651428" y="3643884"/>
+            <a:ext cx="420624" cy="420624"/>
           </a:xfrm>
           <a:prstGeom prst="ellipse">
             <a:avLst/>
@@ -18060,14 +18098,14 @@
       </p:sp>
       <p:sp>
         <p:nvSpPr>
-          <p:cNvPr id="35" name="card-5-badge-text"/>
-          <p:cNvSpPr txBox="1"/>
-          <p:nvPr/>
-        </p:nvSpPr>
-        <p:spPr>
-          <a:xfrm>
-            <a:off x="8730561" y="1719072"/>
-            <a:ext cx="384048" cy="384048"/>
+          <p:cNvPr id="30" name="card-5-badge-text"/>
+          <p:cNvSpPr txBox="1"/>
+          <p:nvPr/>
+        </p:nvSpPr>
+        <p:spPr>
+          <a:xfrm>
+            <a:off x="3651428" y="3643884"/>
+            <a:ext cx="420624" cy="420624"/>
           </a:xfrm>
           <a:prstGeom prst="rect">
             <a:avLst/>
@@ -18083,27 +18121,27 @@
               <a:buNone/>
             </a:pPr>
             <a:r>
-              <a:rPr lang="en-US" sz="1300" b="1" dirty="0">
+              <a:rPr lang="en-US" sz="1400" b="1" dirty="0">
                 <a:solidFill>
                   <a:schemeClr val="bg1"/>
                 </a:solidFill>
               </a:rPr>
               <a:t>길</a:t>
             </a:r>
-            <a:endParaRPr lang="en-US" sz="1300" dirty="0"/>
-          </a:p>
-        </p:txBody>
-      </p:sp>
-      <p:sp>
-        <p:nvSpPr>
-          <p:cNvPr id="36" name="card-5-head"/>
-          <p:cNvSpPr txBox="1"/>
-          <p:nvPr/>
-        </p:nvSpPr>
-        <p:spPr>
-          <a:xfrm>
-            <a:off x="8730561" y="2231136"/>
-            <a:ext cx="1049339" cy="432054"/>
+            <a:endParaRPr lang="en-US" sz="1400" dirty="0"/>
+          </a:p>
+        </p:txBody>
+      </p:sp>
+      <p:sp>
+        <p:nvSpPr>
+          <p:cNvPr id="31" name="card-5-head"/>
+          <p:cNvSpPr txBox="1"/>
+          <p:nvPr/>
+        </p:nvSpPr>
+        <p:spPr>
+          <a:xfrm>
+            <a:off x="3651428" y="4192524"/>
+            <a:ext cx="2124380" cy="256032"/>
           </a:xfrm>
           <a:prstGeom prst="rect">
             <a:avLst/>
@@ -18119,27 +18157,27 @@
               <a:buNone/>
             </a:pPr>
             <a:r>
-              <a:rPr lang="en-US" sz="1350" b="1" dirty="0">
+              <a:rPr lang="en-US" sz="1600" b="1" dirty="0">
                 <a:solidFill>
                   <a:schemeClr val="tx1"/>
                 </a:solidFill>
               </a:rPr>
-              <a:t>나는 길 · 진리 · 생명이다</a:t>
-            </a:r>
-            <a:endParaRPr lang="en-US" sz="1350" dirty="0"/>
-          </a:p>
-        </p:txBody>
-      </p:sp>
-      <p:sp>
-        <p:nvSpPr>
-          <p:cNvPr id="37" name="card-5-body"/>
-          <p:cNvSpPr txBox="1"/>
-          <p:nvPr/>
-        </p:nvSpPr>
-        <p:spPr>
-          <a:xfrm>
-            <a:off x="8730561" y="2736342"/>
-            <a:ext cx="1049339" cy="553720"/>
+              <a:t>길 · 진리 · 생명</a:t>
+            </a:r>
+            <a:endParaRPr lang="en-US" sz="1600" dirty="0"/>
+          </a:p>
+        </p:txBody>
+      </p:sp>
+      <p:sp>
+        <p:nvSpPr>
+          <p:cNvPr id="32" name="card-5-body"/>
+          <p:cNvSpPr txBox="1"/>
+          <p:nvPr/>
+        </p:nvSpPr>
+        <p:spPr>
+          <a:xfrm>
+            <a:off x="3651428" y="4521708"/>
+            <a:ext cx="2124380" cy="406908"/>
           </a:xfrm>
           <a:prstGeom prst="rect">
             <a:avLst/>
@@ -18167,58 +18205,39 @@
             </a:r>
             <a:endParaRPr lang="en-US" sz="1300" dirty="0"/>
           </a:p>
-        </p:txBody>
-      </p:sp>
-      <p:sp>
-        <p:nvSpPr>
-          <p:cNvPr id="38" name="card-5-foot"/>
-          <p:cNvSpPr txBox="1"/>
-          <p:nvPr/>
-        </p:nvSpPr>
-        <p:spPr>
-          <a:xfrm>
-            <a:off x="8730561" y="3326638"/>
-            <a:ext cx="1049339" cy="422402"/>
-          </a:xfrm>
-          <a:prstGeom prst="rect">
-            <a:avLst/>
-          </a:prstGeom>
-          <a:noFill/>
-          <a:ln/>
-        </p:spPr>
-        <p:txBody>
-          <a:bodyPr wrap="square" lIns="0" tIns="0" rIns="0" bIns="0" rtlCol="0" anchor="b"/>
-          <a:lstStyle/>
-          <a:p>
-            <a:pPr indent="0" marL="0">
-              <a:buNone/>
-            </a:pPr>
-            <a:r>
-              <a:rPr lang="en-US" sz="1100" b="1" dirty="0">
-                <a:solidFill>
-                  <a:schemeClr val="accent1"/>
+          <a:p>
+            <a:pPr indent="0" marL="0">
+              <a:lnSpc>
+                <a:spcPct val="122000"/>
+              </a:lnSpc>
+              <a:buNone/>
+            </a:pPr>
+            <a:r>
+              <a:rPr lang="en-US" sz="1300" dirty="0">
+                <a:solidFill>
+                  <a:schemeClr val="accent3"/>
                 </a:solidFill>
               </a:rPr>
               <a:t>아버지께 이르는 유일한 길</a:t>
             </a:r>
-            <a:endParaRPr lang="en-US" sz="1100" dirty="0"/>
-          </a:p>
-        </p:txBody>
-      </p:sp>
-      <p:sp>
-        <p:nvSpPr>
-          <p:cNvPr id="39" name="card-6"/>
+            <a:endParaRPr lang="en-US" sz="1300" dirty="0"/>
+          </a:p>
+        </p:txBody>
+      </p:sp>
+      <p:sp>
+        <p:nvSpPr>
+          <p:cNvPr id="33" name="card-6"/>
           <p:cNvSpPr/>
           <p:nvPr/>
         </p:nvSpPr>
         <p:spPr>
           <a:xfrm>
-            <a:off x="10163948" y="1572768"/>
-            <a:ext cx="1341947" cy="2286000"/>
+            <a:off x="6214720" y="3442716"/>
+            <a:ext cx="2526716" cy="1687068"/>
           </a:xfrm>
           <a:prstGeom prst="roundRect">
             <a:avLst>
-              <a:gd name="adj" fmla="val 4088"/>
+              <a:gd name="adj" fmla="val 3252"/>
             </a:avLst>
           </a:prstGeom>
           <a:solidFill>
@@ -18236,14 +18255,14 @@
       </p:sp>
       <p:sp>
         <p:nvSpPr>
-          <p:cNvPr id="40" name="card-6-badge"/>
+          <p:cNvPr id="34" name="card-6-badge"/>
           <p:cNvSpPr/>
           <p:nvPr/>
         </p:nvSpPr>
         <p:spPr>
           <a:xfrm>
-            <a:off x="10310252" y="1719072"/>
-            <a:ext cx="384048" cy="384048"/>
+            <a:off x="6415888" y="3643884"/>
+            <a:ext cx="420624" cy="420624"/>
           </a:xfrm>
           <a:prstGeom prst="ellipse">
             <a:avLst/>
@@ -18256,14 +18275,14 @@
       </p:sp>
       <p:sp>
         <p:nvSpPr>
-          <p:cNvPr id="41" name="card-6-badge-text"/>
-          <p:cNvSpPr txBox="1"/>
-          <p:nvPr/>
-        </p:nvSpPr>
-        <p:spPr>
-          <a:xfrm>
-            <a:off x="10310252" y="1719072"/>
-            <a:ext cx="384048" cy="384048"/>
+          <p:cNvPr id="35" name="card-6-badge-text"/>
+          <p:cNvSpPr txBox="1"/>
+          <p:nvPr/>
+        </p:nvSpPr>
+        <p:spPr>
+          <a:xfrm>
+            <a:off x="6415888" y="3643884"/>
+            <a:ext cx="420624" cy="420624"/>
           </a:xfrm>
           <a:prstGeom prst="rect">
             <a:avLst/>
@@ -18279,27 +18298,27 @@
               <a:buNone/>
             </a:pPr>
             <a:r>
-              <a:rPr lang="en-US" sz="1300" b="1" dirty="0">
+              <a:rPr lang="en-US" sz="1400" b="1" dirty="0">
                 <a:solidFill>
                   <a:schemeClr val="bg1"/>
                 </a:solidFill>
               </a:rPr>
               <a:t>참</a:t>
             </a:r>
-            <a:endParaRPr lang="en-US" sz="1300" dirty="0"/>
-          </a:p>
-        </p:txBody>
-      </p:sp>
-      <p:sp>
-        <p:nvSpPr>
-          <p:cNvPr id="42" name="card-6-head"/>
-          <p:cNvSpPr txBox="1"/>
-          <p:nvPr/>
-        </p:nvSpPr>
-        <p:spPr>
-          <a:xfrm>
-            <a:off x="10310252" y="2231136"/>
-            <a:ext cx="1049339" cy="432054"/>
+            <a:endParaRPr lang="en-US" sz="1400" dirty="0"/>
+          </a:p>
+        </p:txBody>
+      </p:sp>
+      <p:sp>
+        <p:nvSpPr>
+          <p:cNvPr id="36" name="card-6-head"/>
+          <p:cNvSpPr txBox="1"/>
+          <p:nvPr/>
+        </p:nvSpPr>
+        <p:spPr>
+          <a:xfrm>
+            <a:off x="6415888" y="4192524"/>
+            <a:ext cx="2124380" cy="256032"/>
           </a:xfrm>
           <a:prstGeom prst="rect">
             <a:avLst/>
@@ -18315,27 +18334,27 @@
               <a:buNone/>
             </a:pPr>
             <a:r>
-              <a:rPr lang="en-US" sz="1350" b="1" dirty="0">
+              <a:rPr lang="en-US" sz="1600" b="1" dirty="0">
                 <a:solidFill>
                   <a:schemeClr val="tx1"/>
                 </a:solidFill>
               </a:rPr>
-              <a:t>나는 참 포도나무다</a:t>
-            </a:r>
-            <a:endParaRPr lang="en-US" sz="1350" dirty="0"/>
-          </a:p>
-        </p:txBody>
-      </p:sp>
-      <p:sp>
-        <p:nvSpPr>
-          <p:cNvPr id="43" name="card-6-body"/>
-          <p:cNvSpPr txBox="1"/>
-          <p:nvPr/>
-        </p:nvSpPr>
-        <p:spPr>
-          <a:xfrm>
-            <a:off x="10310252" y="2736342"/>
-            <a:ext cx="1049339" cy="553720"/>
+              <a:t>참 포도나무</a:t>
+            </a:r>
+            <a:endParaRPr lang="en-US" sz="1600" dirty="0"/>
+          </a:p>
+        </p:txBody>
+      </p:sp>
+      <p:sp>
+        <p:nvSpPr>
+          <p:cNvPr id="37" name="card-6-body"/>
+          <p:cNvSpPr txBox="1"/>
+          <p:nvPr/>
+        </p:nvSpPr>
+        <p:spPr>
+          <a:xfrm>
+            <a:off x="6415888" y="4521708"/>
+            <a:ext cx="2124380" cy="406908"/>
           </a:xfrm>
           <a:prstGeom prst="rect">
             <a:avLst/>
@@ -18363,58 +18382,216 @@
             </a:r>
             <a:endParaRPr lang="en-US" sz="1300" dirty="0"/>
           </a:p>
-        </p:txBody>
-      </p:sp>
-      <p:sp>
-        <p:nvSpPr>
-          <p:cNvPr id="44" name="card-6-foot"/>
-          <p:cNvSpPr txBox="1"/>
-          <p:nvPr/>
-        </p:nvSpPr>
-        <p:spPr>
-          <a:xfrm>
-            <a:off x="10310252" y="3326638"/>
-            <a:ext cx="1049339" cy="422402"/>
-          </a:xfrm>
-          <a:prstGeom prst="rect">
-            <a:avLst/>
-          </a:prstGeom>
-          <a:noFill/>
-          <a:ln/>
-        </p:spPr>
-        <p:txBody>
-          <a:bodyPr wrap="square" lIns="0" tIns="0" rIns="0" bIns="0" rtlCol="0" anchor="b"/>
-          <a:lstStyle/>
-          <a:p>
-            <a:pPr indent="0" marL="0">
-              <a:buNone/>
-            </a:pPr>
-            <a:r>
-              <a:rPr lang="en-US" sz="1100" b="1" dirty="0">
-                <a:solidFill>
-                  <a:schemeClr val="accent1"/>
+          <a:p>
+            <a:pPr indent="0" marL="0">
+              <a:lnSpc>
+                <a:spcPct val="122000"/>
+              </a:lnSpc>
+              <a:buNone/>
+            </a:pPr>
+            <a:r>
+              <a:rPr lang="en-US" sz="1300" dirty="0">
+                <a:solidFill>
+                  <a:schemeClr val="accent3"/>
                 </a:solidFill>
               </a:rPr>
               <a:t>붙어 있어야 열매 맺는다</a:t>
             </a:r>
-            <a:endParaRPr lang="en-US" sz="1100" dirty="0"/>
-          </a:p>
-        </p:txBody>
-      </p:sp>
-      <p:sp>
-        <p:nvSpPr>
-          <p:cNvPr id="45" name="keyline"/>
+            <a:endParaRPr lang="en-US" sz="1300" dirty="0"/>
+          </a:p>
+        </p:txBody>
+      </p:sp>
+      <p:sp>
+        <p:nvSpPr>
+          <p:cNvPr id="38" name="card-7"/>
           <p:cNvSpPr/>
           <p:nvPr/>
         </p:nvSpPr>
         <p:spPr>
           <a:xfrm>
-            <a:off x="685800" y="4059936"/>
-            <a:ext cx="10820095" cy="896112"/>
+            <a:off x="8979179" y="3442716"/>
+            <a:ext cx="2526716" cy="1687068"/>
           </a:xfrm>
           <a:prstGeom prst="roundRect">
             <a:avLst>
-              <a:gd name="adj" fmla="val 10204"/>
+              <a:gd name="adj" fmla="val 3252"/>
+            </a:avLst>
+          </a:prstGeom>
+          <a:solidFill>
+            <a:schemeClr val="bg2"/>
+          </a:solidFill>
+          <a:ln/>
+          <a:effectLst>
+            <a:outerShdw sx="100000" sy="100000" kx="0" ky="0" algn="bl" rotWithShape="0" blurRad="127000" dist="25400" dir="5400000">
+              <a:srgbClr val="0E1826">
+                <a:alpha val="10000"/>
+              </a:srgbClr>
+            </a:outerShdw>
+          </a:effectLst>
+        </p:spPr>
+      </p:sp>
+      <p:sp>
+        <p:nvSpPr>
+          <p:cNvPr id="39" name="card-7-badge"/>
+          <p:cNvSpPr/>
+          <p:nvPr/>
+        </p:nvSpPr>
+        <p:spPr>
+          <a:xfrm>
+            <a:off x="9180347" y="3643884"/>
+            <a:ext cx="420624" cy="420624"/>
+          </a:xfrm>
+          <a:prstGeom prst="ellipse">
+            <a:avLst/>
+          </a:prstGeom>
+          <a:solidFill>
+            <a:schemeClr val="accent1"/>
+          </a:solidFill>
+          <a:ln/>
+        </p:spPr>
+      </p:sp>
+      <p:sp>
+        <p:nvSpPr>
+          <p:cNvPr id="40" name="card-7-badge-text"/>
+          <p:cNvSpPr txBox="1"/>
+          <p:nvPr/>
+        </p:nvSpPr>
+        <p:spPr>
+          <a:xfrm>
+            <a:off x="9180347" y="3643884"/>
+            <a:ext cx="420624" cy="420624"/>
+          </a:xfrm>
+          <a:prstGeom prst="rect">
+            <a:avLst/>
+          </a:prstGeom>
+          <a:noFill/>
+          <a:ln/>
+        </p:spPr>
+        <p:txBody>
+          <a:bodyPr wrap="square" lIns="0" tIns="0" rIns="0" bIns="0" rtlCol="0" anchor="ctr"/>
+          <a:lstStyle/>
+          <a:p>
+            <a:pPr algn="ctr" indent="0" marL="0">
+              <a:buNone/>
+            </a:pPr>
+            <a:r>
+              <a:rPr lang="en-US" sz="1400" b="1" dirty="0">
+                <a:solidFill>
+                  <a:schemeClr val="bg1"/>
+                </a:solidFill>
+              </a:rPr>
+              <a:t>!</a:t>
+            </a:r>
+            <a:endParaRPr lang="en-US" sz="1400" dirty="0"/>
+          </a:p>
+        </p:txBody>
+      </p:sp>
+      <p:sp>
+        <p:nvSpPr>
+          <p:cNvPr id="41" name="card-7-head"/>
+          <p:cNvSpPr txBox="1"/>
+          <p:nvPr/>
+        </p:nvSpPr>
+        <p:spPr>
+          <a:xfrm>
+            <a:off x="9180347" y="4192524"/>
+            <a:ext cx="2124380" cy="256032"/>
+          </a:xfrm>
+          <a:prstGeom prst="rect">
+            <a:avLst/>
+          </a:prstGeom>
+          <a:noFill/>
+          <a:ln/>
+        </p:spPr>
+        <p:txBody>
+          <a:bodyPr wrap="square" lIns="0" tIns="0" rIns="0" bIns="0" rtlCol="0" anchor="t"/>
+          <a:lstStyle/>
+          <a:p>
+            <a:pPr indent="0" marL="0">
+              <a:buNone/>
+            </a:pPr>
+            <a:r>
+              <a:rPr lang="en-US" sz="1600" b="1" dirty="0">
+                <a:solidFill>
+                  <a:schemeClr val="tx1"/>
+                </a:solidFill>
+              </a:rPr>
+              <a:t>에고 에이미</a:t>
+            </a:r>
+            <a:endParaRPr lang="en-US" sz="1600" dirty="0"/>
+          </a:p>
+        </p:txBody>
+      </p:sp>
+      <p:sp>
+        <p:nvSpPr>
+          <p:cNvPr id="42" name="card-7-body"/>
+          <p:cNvSpPr txBox="1"/>
+          <p:nvPr/>
+        </p:nvSpPr>
+        <p:spPr>
+          <a:xfrm>
+            <a:off x="9180347" y="4521708"/>
+            <a:ext cx="2124380" cy="406908"/>
+          </a:xfrm>
+          <a:prstGeom prst="rect">
+            <a:avLst/>
+          </a:prstGeom>
+          <a:noFill/>
+          <a:ln/>
+        </p:spPr>
+        <p:txBody>
+          <a:bodyPr wrap="square" lIns="0" tIns="0" rIns="0" bIns="0" rtlCol="0" anchor="t"/>
+          <a:lstStyle/>
+          <a:p>
+            <a:pPr indent="0" marL="0">
+              <a:lnSpc>
+                <a:spcPct val="122000"/>
+              </a:lnSpc>
+              <a:buNone/>
+            </a:pPr>
+            <a:r>
+              <a:rPr lang="en-US" sz="1300" dirty="0">
+                <a:solidFill>
+                  <a:schemeClr val="accent3"/>
+                </a:solidFill>
+              </a:rPr>
+              <a:t>출 3:14와 같은 표현</a:t>
+            </a:r>
+            <a:endParaRPr lang="en-US" sz="1300" dirty="0"/>
+          </a:p>
+          <a:p>
+            <a:pPr indent="0" marL="0">
+              <a:lnSpc>
+                <a:spcPct val="122000"/>
+              </a:lnSpc>
+              <a:buNone/>
+            </a:pPr>
+            <a:r>
+              <a:rPr lang="en-US" sz="1300" dirty="0">
+                <a:solidFill>
+                  <a:schemeClr val="accent3"/>
+                </a:solidFill>
+              </a:rPr>
+              <a:t>→ 곧 신성 선언</a:t>
+            </a:r>
+            <a:endParaRPr lang="en-US" sz="1300" dirty="0"/>
+          </a:p>
+        </p:txBody>
+      </p:sp>
+      <p:sp>
+        <p:nvSpPr>
+          <p:cNvPr id="43" name="keyline"/>
+          <p:cNvSpPr/>
+          <p:nvPr/>
+        </p:nvSpPr>
+        <p:spPr>
+          <a:xfrm>
+            <a:off x="685800" y="5266944"/>
+            <a:ext cx="10820095" cy="969264"/>
+          </a:xfrm>
+          <a:prstGeom prst="roundRect">
+            <a:avLst>
+              <a:gd name="adj" fmla="val 9434"/>
             </a:avLst>
           </a:prstGeom>
           <a:solidFill>
@@ -18425,14 +18602,14 @@
       </p:sp>
       <p:sp>
         <p:nvSpPr>
-          <p:cNvPr id="46" name="keyline-text"/>
-          <p:cNvSpPr txBox="1"/>
-          <p:nvPr/>
-        </p:nvSpPr>
-        <p:spPr>
-          <a:xfrm>
-            <a:off x="960120" y="4059936"/>
-            <a:ext cx="10271455" cy="896112"/>
+          <p:cNvPr id="44" name="keyline-text"/>
+          <p:cNvSpPr txBox="1"/>
+          <p:nvPr/>
+        </p:nvSpPr>
+        <p:spPr>
+          <a:xfrm>
+            <a:off x="960120" y="5266944"/>
+            <a:ext cx="10271455" cy="969264"/>
           </a:xfrm>
           <a:prstGeom prst="rect">
             <a:avLst/>
@@ -18448,92 +18625,34 @@
               <a:buNone/>
             </a:pPr>
             <a:r>
-              <a:rPr lang="en-US" sz="1500" b="1" dirty="0">
+              <a:rPr lang="en-US" sz="1600" b="1" dirty="0">
                 <a:solidFill>
                   <a:schemeClr val="accent6"/>
                 </a:solidFill>
               </a:rPr>
               <a:t>떡 · 빛 · 문 · 목자 · 부활 · 길 · 포도나무 — 어린아이도 아는 사물로 자신을 완벽하게 증거하셨습니다.</a:t>
             </a:r>
-            <a:endParaRPr lang="en-US" sz="1500" dirty="0"/>
-          </a:p>
-          <a:p>
-            <a:pPr indent="0" marL="0">
-              <a:buNone/>
-            </a:pPr>
-            <a:r>
-              <a:rPr lang="en-US" sz="1500" b="1" dirty="0">
+            <a:endParaRPr lang="en-US" sz="1600" dirty="0"/>
+          </a:p>
+          <a:p>
+            <a:pPr indent="0" marL="0">
+              <a:buNone/>
+            </a:pPr>
+            <a:r>
+              <a:rPr lang="en-US" sz="1600" b="1" dirty="0">
                 <a:solidFill>
                   <a:schemeClr val="accent6"/>
                 </a:solidFill>
               </a:rPr>
-              <a:t>“나는 ~이다”는 영원한 생명에 대한 인간의 질문에 주시는 답입니다.</a:t>
-            </a:r>
-            <a:endParaRPr lang="en-US" sz="1500" dirty="0"/>
-          </a:p>
-        </p:txBody>
-      </p:sp>
-      <p:sp>
-        <p:nvSpPr>
-          <p:cNvPr id="47" name="bullets"/>
-          <p:cNvSpPr txBox="1"/>
-          <p:nvPr/>
-        </p:nvSpPr>
-        <p:spPr>
-          <a:xfrm>
-            <a:off x="685800" y="5120640"/>
-            <a:ext cx="10820095" cy="914400"/>
-          </a:xfrm>
-          <a:prstGeom prst="rect">
-            <a:avLst/>
-          </a:prstGeom>
-          <a:noFill/>
-          <a:ln/>
-        </p:spPr>
-        <p:txBody>
-          <a:bodyPr wrap="square" lIns="0" tIns="0" rIns="0" bIns="0" rtlCol="0" anchor="t"/>
-          <a:lstStyle/>
-          <a:p>
-            <a:pPr marL="342900" indent="-342900">
-              <a:spcAft>
-                <a:spcPts val="700"/>
-              </a:spcAft>
-              <a:buSzPct val="100000"/>
-              <a:buChar char="•"/>
-            </a:pPr>
-            <a:r>
-              <a:rPr lang="en-US" sz="1500" b="1" dirty="0">
-                <a:solidFill>
-                  <a:schemeClr val="tx1"/>
-                </a:solidFill>
-              </a:rPr>
-              <a:t>‘에고 에이미’는 출애굽기 3:14의 “나는 스스로 있는 자니라”와 같은 표현 — 곧 신성 선언입니다.</a:t>
-            </a:r>
-            <a:endParaRPr lang="en-US" sz="1500" dirty="0"/>
-          </a:p>
-          <a:p>
-            <a:pPr marL="342900" indent="-342900">
-              <a:spcAft>
-                <a:spcPts val="700"/>
-              </a:spcAft>
-              <a:buSzPct val="100000"/>
-              <a:buChar char="•"/>
-            </a:pPr>
-            <a:r>
-              <a:rPr lang="en-US" sz="1500" dirty="0">
-                <a:solidFill>
-                  <a:schemeClr val="tx1"/>
-                </a:solidFill>
-              </a:rPr>
-              <a:t>유대인들이 돌을 들었던 이유도 여기에 있다 (8:58~59, 10:30~33)</a:t>
-            </a:r>
-            <a:endParaRPr lang="en-US" sz="1500" dirty="0"/>
-          </a:p>
-        </p:txBody>
-      </p:sp>
-      <p:sp>
-        <p:nvSpPr>
-          <p:cNvPr id="48" name="Text 0"/>
+              <a:t>“나는 ~이다”는 곧 신성 선언입니다. 유대인들이 돌을 들었던 이유도 여기에 있습니다 (8:58~59, 10:30~33).</a:t>
+            </a:r>
+            <a:endParaRPr lang="en-US" sz="1600" dirty="0"/>
+          </a:p>
+        </p:txBody>
+      </p:sp>
+      <p:sp>
+        <p:nvSpPr>
+          <p:cNvPr id="45" name="Text 0"/>
           <p:cNvSpPr/>
           <p:nvPr>
             <p:ph idx="101" type="body" hasCustomPrompt="1"/>
@@ -18666,7 +18785,7 @@
                   <a:schemeClr val="tx1"/>
                 </a:solidFill>
               </a:rPr>
-              <a:t>완전수 7 ③ 일곱 증인 — 예수님을 무엇이라 불렀는가</a:t>
+              <a:t>완전수 7 ③ 일곱 증인</a:t>
             </a:r>
             <a:endParaRPr lang="en-US" sz="3200" dirty="0"/>
           </a:p>
@@ -18687,7 +18806,7 @@
           </p:nvPr>
         </p:nvGraphicFramePr>
         <p:xfrm>
-          <a:off x="685800" y="1517904"/>
+          <a:off x="685800" y="1481328"/>
           <a:ext cx="10820095" cy="914400"/>
         </p:xfrm>
         <a:graphic>
@@ -18700,7 +18819,7 @@
                 <a:gridCol w="5669280"/>
                 <a:gridCol w="1764792"/>
               </a:tblGrid>
-              <a:tr h="475488">
+              <a:tr h="457200">
                 <a:tc>
                   <a:txBody>
                     <a:bodyPr/>
@@ -18902,7 +19021,7 @@
                   </a:tcPr>
                 </a:tc>
               </a:tr>
-              <a:tr h="475488">
+              <a:tr h="457200">
                 <a:tc>
                   <a:txBody>
                     <a:bodyPr/>
@@ -19104,7 +19223,7 @@
                   </a:tcPr>
                 </a:tc>
               </a:tr>
-              <a:tr h="475488">
+              <a:tr h="457200">
                 <a:tc>
                   <a:txBody>
                     <a:bodyPr/>
@@ -19306,7 +19425,7 @@
                   </a:tcPr>
                 </a:tc>
               </a:tr>
-              <a:tr h="475488">
+              <a:tr h="457200">
                 <a:tc>
                   <a:txBody>
                     <a:bodyPr/>
@@ -19508,7 +19627,7 @@
                   </a:tcPr>
                 </a:tc>
               </a:tr>
-              <a:tr h="475488">
+              <a:tr h="457200">
                 <a:tc>
                   <a:txBody>
                     <a:bodyPr/>
@@ -19710,7 +19829,7 @@
                   </a:tcPr>
                 </a:tc>
               </a:tr>
-              <a:tr h="475488">
+              <a:tr h="457200">
                 <a:tc>
                   <a:txBody>
                     <a:bodyPr/>
@@ -19912,7 +20031,7 @@
                   </a:tcPr>
                 </a:tc>
               </a:tr>
-              <a:tr h="475488">
+              <a:tr h="457200">
                 <a:tc>
                   <a:txBody>
                     <a:bodyPr/>
@@ -20114,7 +20233,7 @@
                   </a:tcPr>
                 </a:tc>
               </a:tr>
-              <a:tr h="475488">
+              <a:tr h="457200">
                 <a:tc>
                   <a:txBody>
                     <a:bodyPr/>
@@ -20328,12 +20447,12 @@
         </p:nvSpPr>
         <p:spPr>
           <a:xfrm>
-            <a:off x="685800" y="5084064"/>
-            <a:ext cx="10820095" cy="822960"/>
+            <a:off x="685800" y="5394960"/>
+            <a:ext cx="10820095" cy="731520"/>
           </a:xfrm>
           <a:prstGeom prst="roundRect">
             <a:avLst>
-              <a:gd name="adj" fmla="val 11111"/>
+              <a:gd name="adj" fmla="val 12500"/>
             </a:avLst>
           </a:prstGeom>
           <a:solidFill>
@@ -20350,8 +20469,8 @@
         </p:nvSpPr>
         <p:spPr>
           <a:xfrm>
-            <a:off x="960120" y="5084064"/>
-            <a:ext cx="10271455" cy="822960"/>
+            <a:off x="960120" y="5394960"/>
+            <a:ext cx="10271455" cy="731520"/>
           </a:xfrm>
           <a:prstGeom prst="rect">
             <a:avLst/>
@@ -20562,10 +20681,12 @@
         <p:spPr>
           <a:xfrm>
             <a:off x="685800" y="4041648"/>
-            <a:ext cx="91440" cy="91440"/>
-          </a:xfrm>
-          <a:prstGeom prst="ellipse">
-            <a:avLst/>
+            <a:ext cx="182880" cy="91440"/>
+          </a:xfrm>
+          <a:prstGeom prst="roundRect">
+            <a:avLst>
+              <a:gd name="adj" fmla="val 50000"/>
+            </a:avLst>
           </a:prstGeom>
           <a:solidFill>
             <a:schemeClr val="accent1"/>
@@ -20582,7 +20703,7 @@
         <p:spPr>
           <a:xfrm>
             <a:off x="685800" y="4041648"/>
-            <a:ext cx="91440" cy="91440"/>
+            <a:ext cx="182880" cy="91440"/>
           </a:xfrm>
           <a:prstGeom prst="rect">
             <a:avLst/>
@@ -20816,12 +20937,12 @@
         </p:nvSpPr>
         <p:spPr>
           <a:xfrm>
-            <a:off x="685800" y="1536192"/>
-            <a:ext cx="5272888" cy="3931920"/>
+            <a:off x="685800" y="1517904"/>
+            <a:ext cx="5272888" cy="4224528"/>
           </a:xfrm>
           <a:prstGeom prst="roundRect">
             <a:avLst>
-              <a:gd name="adj" fmla="val 1395"/>
+              <a:gd name="adj" fmla="val 1299"/>
             </a:avLst>
           </a:prstGeom>
           <a:solidFill>
@@ -20845,7 +20966,7 @@
         </p:nvSpPr>
         <p:spPr>
           <a:xfrm>
-            <a:off x="960120" y="1773936"/>
+            <a:off x="960120" y="1755648"/>
             <a:ext cx="4724248" cy="420624"/>
           </a:xfrm>
           <a:prstGeom prst="rect">
@@ -20855,7 +20976,7 @@
           <a:ln/>
         </p:spPr>
         <p:txBody>
-          <a:bodyPr wrap="square" lIns="0" tIns="0" rIns="0" bIns="0" rtlCol="0" anchor="ctr"/>
+          <a:bodyPr wrap="square" lIns="0" tIns="0" rIns="0" bIns="0" rtlCol="0" anchor="t"/>
           <a:lstStyle/>
           <a:p>
             <a:pPr indent="0" marL="0">
@@ -20881,8 +21002,8 @@
         </p:nvSpPr>
         <p:spPr>
           <a:xfrm>
-            <a:off x="960120" y="2322576"/>
-            <a:ext cx="4724248" cy="2889504"/>
+            <a:off x="960120" y="2340864"/>
+            <a:ext cx="4724248" cy="3273552"/>
           </a:xfrm>
           <a:prstGeom prst="rect">
             <a:avLst/>
@@ -20981,6 +21102,76 @@
             </a:r>
             <a:endParaRPr lang="en-US" sz="1400" dirty="0"/>
           </a:p>
+          <a:p>
+            <a:pPr marL="342900" indent="-342900">
+              <a:spcAft>
+                <a:spcPts val="200"/>
+              </a:spcAft>
+              <a:buSzPct val="100000"/>
+              <a:buChar char="•"/>
+            </a:pPr>
+            <a:r>
+              <a:rPr lang="en-US" sz="1400" b="1" dirty="0">
+                <a:solidFill>
+                  <a:schemeClr val="tx1"/>
+                </a:solidFill>
+              </a:rPr>
+              <a:t>153마리 — 그물이 찢어지지 아니하였더라</a:t>
+            </a:r>
+            <a:endParaRPr lang="en-US" sz="1400" dirty="0"/>
+          </a:p>
+          <a:p>
+            <a:pPr lvl="1" indent="0" marL="0">
+              <a:spcAft>
+                <a:spcPts val="900"/>
+              </a:spcAft>
+              <a:buNone/>
+            </a:pPr>
+            <a:r>
+              <a:rPr lang="en-US" sz="1200" dirty="0">
+                <a:solidFill>
+                  <a:schemeClr val="accent3"/>
+                </a:solidFill>
+              </a:rPr>
+              <a:t>교회는 모든 민족을 담고도 찢어지지 않는다는 상징으로 읽는다</a:t>
+            </a:r>
+            <a:endParaRPr lang="en-US" sz="1400" dirty="0"/>
+          </a:p>
+          <a:p>
+            <a:pPr marL="342900" indent="-342900">
+              <a:spcAft>
+                <a:spcPts val="200"/>
+              </a:spcAft>
+              <a:buSzPct val="100000"/>
+              <a:buChar char="•"/>
+            </a:pPr>
+            <a:r>
+              <a:rPr lang="en-US" sz="1400" b="1" dirty="0">
+                <a:solidFill>
+                  <a:schemeClr val="tx1"/>
+                </a:solidFill>
+              </a:rPr>
+              <a:t>숯불 조반, 그리고 세 번의 질문</a:t>
+            </a:r>
+            <a:endParaRPr lang="en-US" sz="1400" dirty="0"/>
+          </a:p>
+          <a:p>
+            <a:pPr lvl="1" indent="0" marL="0">
+              <a:spcAft>
+                <a:spcPts val="900"/>
+              </a:spcAft>
+              <a:buNone/>
+            </a:pPr>
+            <a:r>
+              <a:rPr lang="en-US" sz="1200" dirty="0">
+                <a:solidFill>
+                  <a:schemeClr val="accent3"/>
+                </a:solidFill>
+              </a:rPr>
+              <a:t>세 번 부인한 베드로를 세 번 물어 회복시키신다 (21:15~17)</a:t>
+            </a:r>
+            <a:endParaRPr lang="en-US" sz="1400" dirty="0"/>
+          </a:p>
         </p:txBody>
       </p:sp>
       <p:sp>
@@ -20991,12 +21182,12 @@
         </p:nvSpPr>
         <p:spPr>
           <a:xfrm>
-            <a:off x="6233008" y="1536192"/>
-            <a:ext cx="5272888" cy="3931920"/>
+            <a:off x="6233008" y="1517904"/>
+            <a:ext cx="5272888" cy="4224528"/>
           </a:xfrm>
           <a:prstGeom prst="roundRect">
             <a:avLst>
-              <a:gd name="adj" fmla="val 1395"/>
+              <a:gd name="adj" fmla="val 1299"/>
             </a:avLst>
           </a:prstGeom>
           <a:solidFill>
@@ -21020,17 +21211,17 @@
         </p:nvSpPr>
         <p:spPr>
           <a:xfrm>
-            <a:off x="6507328" y="1773936"/>
-            <a:ext cx="4724248" cy="420624"/>
-          </a:xfrm>
-          <a:prstGeom prst="rect">
-            <a:avLst/>
-          </a:prstGeom>
-          <a:noFill/>
-          <a:ln/>
-        </p:spPr>
-        <p:txBody>
-          <a:bodyPr wrap="square" lIns="0" tIns="0" rIns="0" bIns="0" rtlCol="0" anchor="ctr"/>
+            <a:off x="6507328" y="1755648"/>
+            <a:ext cx="4724248" cy="629920"/>
+          </a:xfrm>
+          <a:prstGeom prst="rect">
+            <a:avLst/>
+          </a:prstGeom>
+          <a:noFill/>
+          <a:ln/>
+        </p:spPr>
+        <p:txBody>
+          <a:bodyPr wrap="square" lIns="0" tIns="0" rIns="0" bIns="0" rtlCol="0" anchor="t"/>
           <a:lstStyle/>
           <a:p>
             <a:pPr indent="0" marL="0">
@@ -21056,8 +21247,8 @@
         </p:nvSpPr>
         <p:spPr>
           <a:xfrm>
-            <a:off x="6507328" y="2322576"/>
-            <a:ext cx="4724248" cy="2889504"/>
+            <a:off x="6507328" y="2550160"/>
+            <a:ext cx="4724248" cy="3064256"/>
           </a:xfrm>
           <a:prstGeom prst="rect">
             <a:avLst/>
@@ -21204,7 +21395,7 @@
         </p:nvSpPr>
         <p:spPr>
           <a:xfrm>
-            <a:off x="685800" y="5614416"/>
+            <a:off x="685800" y="5870448"/>
             <a:ext cx="10820095" cy="365760"/>
           </a:xfrm>
           <a:prstGeom prst="rect">
@@ -21367,7 +21558,7 @@
                   <a:schemeClr val="tx1"/>
                 </a:solidFill>
               </a:rPr>
-              <a:t>21장 한 장씩 훑기 (1~11장)</a:t>
+              <a:t>21장 한눈에 보기 (1~11장)</a:t>
             </a:r>
             <a:endParaRPr lang="en-US" sz="3200" dirty="0"/>
           </a:p>
@@ -22575,7 +22766,7 @@
                   <a:schemeClr val="tx1"/>
                 </a:solidFill>
               </a:rPr>
-              <a:t>21장 한 장씩 훑기 (12~21장)</a:t>
+              <a:t>21장 한눈에 보기 (12~21장)</a:t>
             </a:r>
             <a:endParaRPr lang="en-US" sz="3200" dirty="0"/>
           </a:p>
@@ -22589,12 +22780,12 @@
         </p:nvSpPr>
         <p:spPr>
           <a:xfrm>
-            <a:off x="685800" y="1591056"/>
-            <a:ext cx="5577840" cy="786384"/>
+            <a:off x="685800" y="1536192"/>
+            <a:ext cx="5577840" cy="749808"/>
           </a:xfrm>
           <a:prstGeom prst="roundRect">
             <a:avLst>
-              <a:gd name="adj" fmla="val 6977"/>
+              <a:gd name="adj" fmla="val 7317"/>
             </a:avLst>
           </a:prstGeom>
           <a:solidFill>
@@ -22611,8 +22802,8 @@
         </p:nvSpPr>
         <p:spPr>
           <a:xfrm>
-            <a:off x="868680" y="1591056"/>
-            <a:ext cx="822960" cy="786384"/>
+            <a:off x="868680" y="1536192"/>
+            <a:ext cx="822960" cy="749808"/>
           </a:xfrm>
           <a:prstGeom prst="rect">
             <a:avLst/>
@@ -22647,8 +22838,8 @@
         </p:nvSpPr>
         <p:spPr>
           <a:xfrm>
-            <a:off x="1719072" y="1591056"/>
-            <a:ext cx="4389120" cy="786384"/>
+            <a:off x="1719072" y="1536192"/>
+            <a:ext cx="4389120" cy="749808"/>
           </a:xfrm>
           <a:prstGeom prst="rect">
             <a:avLst/>
@@ -22686,12 +22877,12 @@
         </p:nvSpPr>
         <p:spPr>
           <a:xfrm>
-            <a:off x="685800" y="2468880"/>
-            <a:ext cx="5577840" cy="786384"/>
+            <a:off x="685800" y="2359152"/>
+            <a:ext cx="5577840" cy="749808"/>
           </a:xfrm>
           <a:prstGeom prst="roundRect">
             <a:avLst>
-              <a:gd name="adj" fmla="val 6977"/>
+              <a:gd name="adj" fmla="val 7317"/>
             </a:avLst>
           </a:prstGeom>
           <a:solidFill>
@@ -22708,8 +22899,8 @@
         </p:nvSpPr>
         <p:spPr>
           <a:xfrm>
-            <a:off x="868680" y="2468880"/>
-            <a:ext cx="822960" cy="786384"/>
+            <a:off x="868680" y="2359152"/>
+            <a:ext cx="822960" cy="749808"/>
           </a:xfrm>
           <a:prstGeom prst="rect">
             <a:avLst/>
@@ -22744,8 +22935,8 @@
         </p:nvSpPr>
         <p:spPr>
           <a:xfrm>
-            <a:off x="1719072" y="2468880"/>
-            <a:ext cx="4389120" cy="786384"/>
+            <a:off x="1719072" y="2359152"/>
+            <a:ext cx="4389120" cy="749808"/>
           </a:xfrm>
           <a:prstGeom prst="rect">
             <a:avLst/>
@@ -22783,12 +22974,12 @@
         </p:nvSpPr>
         <p:spPr>
           <a:xfrm>
-            <a:off x="685800" y="3346704"/>
-            <a:ext cx="5577840" cy="786384"/>
+            <a:off x="685800" y="3182112"/>
+            <a:ext cx="5577840" cy="749808"/>
           </a:xfrm>
           <a:prstGeom prst="roundRect">
             <a:avLst>
-              <a:gd name="adj" fmla="val 6977"/>
+              <a:gd name="adj" fmla="val 7317"/>
             </a:avLst>
           </a:prstGeom>
           <a:solidFill>
@@ -22805,8 +22996,8 @@
         </p:nvSpPr>
         <p:spPr>
           <a:xfrm>
-            <a:off x="868680" y="3346704"/>
-            <a:ext cx="822960" cy="786384"/>
+            <a:off x="868680" y="3182112"/>
+            <a:ext cx="822960" cy="749808"/>
           </a:xfrm>
           <a:prstGeom prst="rect">
             <a:avLst/>
@@ -22841,8 +23032,8 @@
         </p:nvSpPr>
         <p:spPr>
           <a:xfrm>
-            <a:off x="1719072" y="3346704"/>
-            <a:ext cx="4389120" cy="786384"/>
+            <a:off x="1719072" y="3182112"/>
+            <a:ext cx="4389120" cy="749808"/>
           </a:xfrm>
           <a:prstGeom prst="rect">
             <a:avLst/>
@@ -22880,12 +23071,12 @@
         </p:nvSpPr>
         <p:spPr>
           <a:xfrm>
-            <a:off x="685800" y="4224528"/>
-            <a:ext cx="5577840" cy="786384"/>
+            <a:off x="685800" y="4005072"/>
+            <a:ext cx="5577840" cy="749808"/>
           </a:xfrm>
           <a:prstGeom prst="roundRect">
             <a:avLst>
-              <a:gd name="adj" fmla="val 6977"/>
+              <a:gd name="adj" fmla="val 7317"/>
             </a:avLst>
           </a:prstGeom>
           <a:solidFill>
@@ -22902,8 +23093,8 @@
         </p:nvSpPr>
         <p:spPr>
           <a:xfrm>
-            <a:off x="868680" y="4224528"/>
-            <a:ext cx="822960" cy="786384"/>
+            <a:off x="868680" y="4005072"/>
+            <a:ext cx="822960" cy="749808"/>
           </a:xfrm>
           <a:prstGeom prst="rect">
             <a:avLst/>
@@ -22938,8 +23129,8 @@
         </p:nvSpPr>
         <p:spPr>
           <a:xfrm>
-            <a:off x="1719072" y="4224528"/>
-            <a:ext cx="4389120" cy="786384"/>
+            <a:off x="1719072" y="4005072"/>
+            <a:ext cx="4389120" cy="749808"/>
           </a:xfrm>
           <a:prstGeom prst="rect">
             <a:avLst/>
@@ -22977,12 +23168,12 @@
         </p:nvSpPr>
         <p:spPr>
           <a:xfrm>
-            <a:off x="685800" y="5102352"/>
-            <a:ext cx="5577840" cy="786384"/>
+            <a:off x="685800" y="4828032"/>
+            <a:ext cx="5577840" cy="749808"/>
           </a:xfrm>
           <a:prstGeom prst="roundRect">
             <a:avLst>
-              <a:gd name="adj" fmla="val 6977"/>
+              <a:gd name="adj" fmla="val 7317"/>
             </a:avLst>
           </a:prstGeom>
           <a:solidFill>
@@ -22999,8 +23190,8 @@
         </p:nvSpPr>
         <p:spPr>
           <a:xfrm>
-            <a:off x="868680" y="5102352"/>
-            <a:ext cx="822960" cy="786384"/>
+            <a:off x="868680" y="4828032"/>
+            <a:ext cx="822960" cy="749808"/>
           </a:xfrm>
           <a:prstGeom prst="rect">
             <a:avLst/>
@@ -23035,8 +23226,8 @@
         </p:nvSpPr>
         <p:spPr>
           <a:xfrm>
-            <a:off x="1719072" y="5102352"/>
-            <a:ext cx="4389120" cy="786384"/>
+            <a:off x="1719072" y="4828032"/>
+            <a:ext cx="4389120" cy="749808"/>
           </a:xfrm>
           <a:prstGeom prst="rect">
             <a:avLst/>
@@ -23074,12 +23265,12 @@
         </p:nvSpPr>
         <p:spPr>
           <a:xfrm>
-            <a:off x="6473952" y="1591056"/>
-            <a:ext cx="5577840" cy="786384"/>
+            <a:off x="6473952" y="1536192"/>
+            <a:ext cx="5577840" cy="749808"/>
           </a:xfrm>
           <a:prstGeom prst="roundRect">
             <a:avLst>
-              <a:gd name="adj" fmla="val 6977"/>
+              <a:gd name="adj" fmla="val 7317"/>
             </a:avLst>
           </a:prstGeom>
           <a:solidFill>
@@ -23096,8 +23287,8 @@
         </p:nvSpPr>
         <p:spPr>
           <a:xfrm>
-            <a:off x="6656832" y="1591056"/>
-            <a:ext cx="822960" cy="786384"/>
+            <a:off x="6656832" y="1536192"/>
+            <a:ext cx="822960" cy="749808"/>
           </a:xfrm>
           <a:prstGeom prst="rect">
             <a:avLst/>
@@ -23132,8 +23323,8 @@
         </p:nvSpPr>
         <p:spPr>
           <a:xfrm>
-            <a:off x="7507224" y="1591056"/>
-            <a:ext cx="4389120" cy="786384"/>
+            <a:off x="7507224" y="1536192"/>
+            <a:ext cx="4389120" cy="749808"/>
           </a:xfrm>
           <a:prstGeom prst="rect">
             <a:avLst/>
@@ -23171,12 +23362,12 @@
         </p:nvSpPr>
         <p:spPr>
           <a:xfrm>
-            <a:off x="6473952" y="2468880"/>
-            <a:ext cx="5577840" cy="786384"/>
+            <a:off x="6473952" y="2359152"/>
+            <a:ext cx="5577840" cy="749808"/>
           </a:xfrm>
           <a:prstGeom prst="roundRect">
             <a:avLst>
-              <a:gd name="adj" fmla="val 6977"/>
+              <a:gd name="adj" fmla="val 7317"/>
             </a:avLst>
           </a:prstGeom>
           <a:solidFill>
@@ -23193,8 +23384,8 @@
         </p:nvSpPr>
         <p:spPr>
           <a:xfrm>
-            <a:off x="6656832" y="2468880"/>
-            <a:ext cx="822960" cy="786384"/>
+            <a:off x="6656832" y="2359152"/>
+            <a:ext cx="822960" cy="749808"/>
           </a:xfrm>
           <a:prstGeom prst="rect">
             <a:avLst/>
@@ -23229,8 +23420,8 @@
         </p:nvSpPr>
         <p:spPr>
           <a:xfrm>
-            <a:off x="7507224" y="2468880"/>
-            <a:ext cx="4389120" cy="786384"/>
+            <a:off x="7507224" y="2359152"/>
+            <a:ext cx="4389120" cy="749808"/>
           </a:xfrm>
           <a:prstGeom prst="rect">
             <a:avLst/>
@@ -23268,12 +23459,12 @@
         </p:nvSpPr>
         <p:spPr>
           <a:xfrm>
-            <a:off x="6473952" y="3346704"/>
-            <a:ext cx="5577840" cy="786384"/>
+            <a:off x="6473952" y="3182112"/>
+            <a:ext cx="5577840" cy="749808"/>
           </a:xfrm>
           <a:prstGeom prst="roundRect">
             <a:avLst>
-              <a:gd name="adj" fmla="val 6977"/>
+              <a:gd name="adj" fmla="val 7317"/>
             </a:avLst>
           </a:prstGeom>
           <a:solidFill>
@@ -23290,8 +23481,8 @@
         </p:nvSpPr>
         <p:spPr>
           <a:xfrm>
-            <a:off x="6656832" y="3346704"/>
-            <a:ext cx="822960" cy="786384"/>
+            <a:off x="6656832" y="3182112"/>
+            <a:ext cx="822960" cy="749808"/>
           </a:xfrm>
           <a:prstGeom prst="rect">
             <a:avLst/>
@@ -23326,8 +23517,8 @@
         </p:nvSpPr>
         <p:spPr>
           <a:xfrm>
-            <a:off x="7507224" y="3346704"/>
-            <a:ext cx="4389120" cy="786384"/>
+            <a:off x="7507224" y="3182112"/>
+            <a:ext cx="4389120" cy="749808"/>
           </a:xfrm>
           <a:prstGeom prst="rect">
             <a:avLst/>
@@ -23365,12 +23556,12 @@
         </p:nvSpPr>
         <p:spPr>
           <a:xfrm>
-            <a:off x="6473952" y="4224528"/>
-            <a:ext cx="5577840" cy="786384"/>
+            <a:off x="6473952" y="4005072"/>
+            <a:ext cx="5577840" cy="749808"/>
           </a:xfrm>
           <a:prstGeom prst="roundRect">
             <a:avLst>
-              <a:gd name="adj" fmla="val 6977"/>
+              <a:gd name="adj" fmla="val 7317"/>
             </a:avLst>
           </a:prstGeom>
           <a:solidFill>
@@ -23387,8 +23578,8 @@
         </p:nvSpPr>
         <p:spPr>
           <a:xfrm>
-            <a:off x="6656832" y="4224528"/>
-            <a:ext cx="822960" cy="786384"/>
+            <a:off x="6656832" y="4005072"/>
+            <a:ext cx="822960" cy="749808"/>
           </a:xfrm>
           <a:prstGeom prst="rect">
             <a:avLst/>
@@ -23423,8 +23614,8 @@
         </p:nvSpPr>
         <p:spPr>
           <a:xfrm>
-            <a:off x="7507224" y="4224528"/>
-            <a:ext cx="4389120" cy="786384"/>
+            <a:off x="7507224" y="4005072"/>
+            <a:ext cx="4389120" cy="749808"/>
           </a:xfrm>
           <a:prstGeom prst="rect">
             <a:avLst/>
@@ -23462,12 +23653,12 @@
         </p:nvSpPr>
         <p:spPr>
           <a:xfrm>
-            <a:off x="6473952" y="5102352"/>
-            <a:ext cx="5577840" cy="786384"/>
+            <a:off x="6473952" y="4828032"/>
+            <a:ext cx="5577840" cy="749808"/>
           </a:xfrm>
           <a:prstGeom prst="roundRect">
             <a:avLst>
-              <a:gd name="adj" fmla="val 6977"/>
+              <a:gd name="adj" fmla="val 7317"/>
             </a:avLst>
           </a:prstGeom>
           <a:solidFill>
@@ -23484,8 +23675,8 @@
         </p:nvSpPr>
         <p:spPr>
           <a:xfrm>
-            <a:off x="6656832" y="5102352"/>
-            <a:ext cx="822960" cy="786384"/>
+            <a:off x="6656832" y="4828032"/>
+            <a:ext cx="822960" cy="749808"/>
           </a:xfrm>
           <a:prstGeom prst="rect">
             <a:avLst/>
@@ -23520,8 +23711,8 @@
         </p:nvSpPr>
         <p:spPr>
           <a:xfrm>
-            <a:off x="7507224" y="5102352"/>
-            <a:ext cx="4389120" cy="786384"/>
+            <a:off x="7507224" y="4828032"/>
+            <a:ext cx="4389120" cy="749808"/>
           </a:xfrm>
           <a:prstGeom prst="rect">
             <a:avLst/>
@@ -23559,12 +23750,12 @@
         </p:nvSpPr>
         <p:spPr>
           <a:xfrm>
-            <a:off x="685800" y="5559552"/>
-            <a:ext cx="10820095" cy="548640"/>
+            <a:off x="685800" y="5705856"/>
+            <a:ext cx="10820095" cy="530352"/>
           </a:xfrm>
           <a:prstGeom prst="roundRect">
             <a:avLst>
-              <a:gd name="adj" fmla="val 16667"/>
+              <a:gd name="adj" fmla="val 17241"/>
             </a:avLst>
           </a:prstGeom>
           <a:solidFill>
@@ -23581,8 +23772,8 @@
         </p:nvSpPr>
         <p:spPr>
           <a:xfrm>
-            <a:off x="960120" y="5559552"/>
-            <a:ext cx="10271455" cy="548640"/>
+            <a:off x="960120" y="5705856"/>
+            <a:ext cx="10271455" cy="530352"/>
           </a:xfrm>
           <a:prstGeom prst="rect">
             <a:avLst/>
@@ -23788,7 +23979,7 @@
         <p:spPr>
           <a:xfrm>
             <a:off x="813816" y="1682496"/>
-            <a:ext cx="310896" cy="310896"/>
+            <a:ext cx="320040" cy="310896"/>
           </a:xfrm>
           <a:prstGeom prst="ellipse">
             <a:avLst/>
@@ -23808,7 +23999,7 @@
         <p:spPr>
           <a:xfrm>
             <a:off x="813816" y="1682496"/>
-            <a:ext cx="310896" cy="310896"/>
+            <a:ext cx="320040" cy="310896"/>
           </a:xfrm>
           <a:prstGeom prst="rect">
             <a:avLst/>
@@ -23948,7 +24139,7 @@
         <p:spPr>
           <a:xfrm>
             <a:off x="2656789" y="1682496"/>
-            <a:ext cx="310896" cy="310896"/>
+            <a:ext cx="320040" cy="310896"/>
           </a:xfrm>
           <a:prstGeom prst="ellipse">
             <a:avLst/>
@@ -23968,7 +24159,7 @@
         <p:spPr>
           <a:xfrm>
             <a:off x="2656789" y="1682496"/>
-            <a:ext cx="310896" cy="310896"/>
+            <a:ext cx="320040" cy="310896"/>
           </a:xfrm>
           <a:prstGeom prst="rect">
             <a:avLst/>
@@ -24108,7 +24299,7 @@
         <p:spPr>
           <a:xfrm>
             <a:off x="4499762" y="1682496"/>
-            <a:ext cx="310896" cy="310896"/>
+            <a:ext cx="320040" cy="310896"/>
           </a:xfrm>
           <a:prstGeom prst="ellipse">
             <a:avLst/>
@@ -24128,7 +24319,7 @@
         <p:spPr>
           <a:xfrm>
             <a:off x="4499762" y="1682496"/>
-            <a:ext cx="310896" cy="310896"/>
+            <a:ext cx="320040" cy="310896"/>
           </a:xfrm>
           <a:prstGeom prst="rect">
             <a:avLst/>
@@ -24268,7 +24459,7 @@
         <p:spPr>
           <a:xfrm>
             <a:off x="6342736" y="1682496"/>
-            <a:ext cx="310896" cy="310896"/>
+            <a:ext cx="320040" cy="310896"/>
           </a:xfrm>
           <a:prstGeom prst="ellipse">
             <a:avLst/>
@@ -24288,7 +24479,7 @@
         <p:spPr>
           <a:xfrm>
             <a:off x="6342736" y="1682496"/>
-            <a:ext cx="310896" cy="310896"/>
+            <a:ext cx="320040" cy="310896"/>
           </a:xfrm>
           <a:prstGeom prst="rect">
             <a:avLst/>
@@ -24428,7 +24619,7 @@
         <p:spPr>
           <a:xfrm>
             <a:off x="8185709" y="1682496"/>
-            <a:ext cx="310896" cy="310896"/>
+            <a:ext cx="320040" cy="310896"/>
           </a:xfrm>
           <a:prstGeom prst="ellipse">
             <a:avLst/>
@@ -24448,7 +24639,7 @@
         <p:spPr>
           <a:xfrm>
             <a:off x="8185709" y="1682496"/>
-            <a:ext cx="310896" cy="310896"/>
+            <a:ext cx="320040" cy="310896"/>
           </a:xfrm>
           <a:prstGeom prst="rect">
             <a:avLst/>
@@ -24588,7 +24779,7 @@
         <p:spPr>
           <a:xfrm>
             <a:off x="10028682" y="1682496"/>
-            <a:ext cx="310896" cy="310896"/>
+            <a:ext cx="320040" cy="310896"/>
           </a:xfrm>
           <a:prstGeom prst="ellipse">
             <a:avLst/>
@@ -24608,7 +24799,7 @@
         <p:spPr>
           <a:xfrm>
             <a:off x="10028682" y="1682496"/>
-            <a:ext cx="310896" cy="310896"/>
+            <a:ext cx="320040" cy="310896"/>
           </a:xfrm>
           <a:prstGeom prst="rect">
             <a:avLst/>
@@ -24748,7 +24939,7 @@
         <p:spPr>
           <a:xfrm>
             <a:off x="813816" y="3104388"/>
-            <a:ext cx="310896" cy="310896"/>
+            <a:ext cx="320040" cy="310896"/>
           </a:xfrm>
           <a:prstGeom prst="ellipse">
             <a:avLst/>
@@ -24768,7 +24959,7 @@
         <p:spPr>
           <a:xfrm>
             <a:off x="813816" y="3104388"/>
-            <a:ext cx="310896" cy="310896"/>
+            <a:ext cx="320040" cy="310896"/>
           </a:xfrm>
           <a:prstGeom prst="rect">
             <a:avLst/>
@@ -24908,7 +25099,7 @@
         <p:spPr>
           <a:xfrm>
             <a:off x="2656789" y="3104388"/>
-            <a:ext cx="310896" cy="310896"/>
+            <a:ext cx="320040" cy="310896"/>
           </a:xfrm>
           <a:prstGeom prst="ellipse">
             <a:avLst/>
@@ -24928,7 +25119,7 @@
         <p:spPr>
           <a:xfrm>
             <a:off x="2656789" y="3104388"/>
-            <a:ext cx="310896" cy="310896"/>
+            <a:ext cx="320040" cy="310896"/>
           </a:xfrm>
           <a:prstGeom prst="rect">
             <a:avLst/>
@@ -25068,7 +25259,7 @@
         <p:spPr>
           <a:xfrm>
             <a:off x="4499762" y="3104388"/>
-            <a:ext cx="310896" cy="310896"/>
+            <a:ext cx="320040" cy="310896"/>
           </a:xfrm>
           <a:prstGeom prst="ellipse">
             <a:avLst/>
@@ -25088,7 +25279,7 @@
         <p:spPr>
           <a:xfrm>
             <a:off x="4499762" y="3104388"/>
-            <a:ext cx="310896" cy="310896"/>
+            <a:ext cx="320040" cy="310896"/>
           </a:xfrm>
           <a:prstGeom prst="rect">
             <a:avLst/>
@@ -25228,7 +25419,7 @@
         <p:spPr>
           <a:xfrm>
             <a:off x="6342736" y="3104388"/>
-            <a:ext cx="310896" cy="310896"/>
+            <a:ext cx="320040" cy="310896"/>
           </a:xfrm>
           <a:prstGeom prst="ellipse">
             <a:avLst/>
@@ -25248,7 +25439,7 @@
         <p:spPr>
           <a:xfrm>
             <a:off x="6342736" y="3104388"/>
-            <a:ext cx="310896" cy="310896"/>
+            <a:ext cx="320040" cy="310896"/>
           </a:xfrm>
           <a:prstGeom prst="rect">
             <a:avLst/>
@@ -25388,7 +25579,7 @@
         <p:spPr>
           <a:xfrm>
             <a:off x="8185709" y="3104388"/>
-            <a:ext cx="310896" cy="310896"/>
+            <a:ext cx="320040" cy="310896"/>
           </a:xfrm>
           <a:prstGeom prst="ellipse">
             <a:avLst/>
@@ -25408,7 +25599,7 @@
         <p:spPr>
           <a:xfrm>
             <a:off x="8185709" y="3104388"/>
-            <a:ext cx="310896" cy="310896"/>
+            <a:ext cx="320040" cy="310896"/>
           </a:xfrm>
           <a:prstGeom prst="rect">
             <a:avLst/>
@@ -25577,10 +25768,12 @@
         <p:spPr>
           <a:xfrm>
             <a:off x="685800" y="5093208"/>
-            <a:ext cx="347472" cy="347472"/>
-          </a:xfrm>
-          <a:prstGeom prst="ellipse">
-            <a:avLst/>
+            <a:ext cx="375453" cy="347472"/>
+          </a:xfrm>
+          <a:prstGeom prst="roundRect">
+            <a:avLst>
+              <a:gd name="adj" fmla="val 50000"/>
+            </a:avLst>
           </a:prstGeom>
           <a:solidFill>
             <a:schemeClr val="accent1"/>
@@ -25597,7 +25790,7 @@
         <p:spPr>
           <a:xfrm>
             <a:off x="685800" y="5093208"/>
-            <a:ext cx="347472" cy="347472"/>
+            <a:ext cx="375453" cy="347472"/>
           </a:xfrm>
           <a:prstGeom prst="rect">
             <a:avLst/>
@@ -25613,14 +25806,14 @@
               <a:buNone/>
             </a:pPr>
             <a:r>
-              <a:rPr lang="en-US" sz="1400" b="1" dirty="0">
+              <a:rPr lang="en-US" sz="1300" b="1" dirty="0">
                 <a:solidFill>
                   <a:schemeClr val="bg1"/>
                 </a:solidFill>
               </a:rPr>
               <a:t>cf</a:t>
             </a:r>
-            <a:endParaRPr lang="en-US" sz="1400" dirty="0"/>
+            <a:endParaRPr lang="en-US" sz="1300" dirty="0"/>
           </a:p>
         </p:txBody>
       </p:sp>
@@ -25632,8 +25825,8 @@
         </p:nvSpPr>
         <p:spPr>
           <a:xfrm>
-            <a:off x="1161288" y="5084064"/>
-            <a:ext cx="10344607" cy="365760"/>
+            <a:off x="1189269" y="5084064"/>
+            <a:ext cx="10316627" cy="365760"/>
           </a:xfrm>
           <a:prstGeom prst="rect">
             <a:avLst/>
@@ -26706,7 +26899,7 @@
           <a:ln/>
         </p:spPr>
         <p:txBody>
-          <a:bodyPr wrap="square" lIns="0" tIns="0" rIns="0" bIns="0" rtlCol="0" anchor="ctr"/>
+          <a:bodyPr wrap="square" lIns="0" tIns="0" rIns="0" bIns="0" rtlCol="0" anchor="t"/>
           <a:lstStyle/>
           <a:p>
             <a:pPr indent="0" marL="0">
@@ -26732,8 +26925,8 @@
         </p:nvSpPr>
         <p:spPr>
           <a:xfrm>
-            <a:off x="960120" y="2267712"/>
-            <a:ext cx="4724248" cy="3621024"/>
+            <a:off x="960120" y="2304288"/>
+            <a:ext cx="4724248" cy="3712464"/>
           </a:xfrm>
           <a:prstGeom prst="rect">
             <a:avLst/>
@@ -26753,14 +26946,14 @@
               <a:buChar char="•"/>
             </a:pPr>
             <a:r>
-              <a:rPr lang="en-US" sz="1500" b="1" dirty="0">
+              <a:rPr lang="en-US" sz="1400" b="1" dirty="0">
                 <a:solidFill>
                   <a:schemeClr val="tx1"/>
                 </a:solidFill>
               </a:rPr>
               <a:t>가. 사도 요한</a:t>
             </a:r>
-            <a:endParaRPr lang="en-US" sz="1500" dirty="0"/>
+            <a:endParaRPr lang="en-US" sz="1400" dirty="0"/>
           </a:p>
           <a:p>
             <a:pPr lvl="1" indent="0" marL="0">
@@ -26770,14 +26963,14 @@
               <a:buNone/>
             </a:pPr>
             <a:r>
-              <a:rPr lang="en-US" sz="1300" dirty="0">
+              <a:rPr lang="en-US" sz="1200" dirty="0">
                 <a:solidFill>
                   <a:schemeClr val="accent3"/>
                 </a:solidFill>
               </a:rPr>
               <a:t>이 복음서의 저자는 누구인가 (질문 1~5)</a:t>
             </a:r>
-            <a:endParaRPr lang="en-US" sz="1500" dirty="0"/>
+            <a:endParaRPr lang="en-US" sz="1400" dirty="0"/>
           </a:p>
           <a:p>
             <a:pPr marL="342900" indent="-342900">
@@ -26788,14 +26981,14 @@
               <a:buChar char="•"/>
             </a:pPr>
             <a:r>
-              <a:rPr lang="en-US" sz="1500" b="1" dirty="0">
+              <a:rPr lang="en-US" sz="1400" b="1" dirty="0">
                 <a:solidFill>
                   <a:schemeClr val="tx1"/>
                 </a:solidFill>
               </a:rPr>
               <a:t>나. 요한과 예수님의 만남</a:t>
             </a:r>
-            <a:endParaRPr lang="en-US" sz="1500" dirty="0"/>
+            <a:endParaRPr lang="en-US" sz="1400" dirty="0"/>
           </a:p>
           <a:p>
             <a:pPr lvl="1" indent="0" marL="0">
@@ -26805,14 +26998,14 @@
               <a:buNone/>
             </a:pPr>
             <a:r>
-              <a:rPr lang="en-US" sz="1300" dirty="0">
+              <a:rPr lang="en-US" sz="1200" dirty="0">
                 <a:solidFill>
                   <a:schemeClr val="accent3"/>
                 </a:solidFill>
               </a:rPr>
               <a:t>포기하고 따름 (질문 6~8)</a:t>
             </a:r>
-            <a:endParaRPr lang="en-US" sz="1500" dirty="0"/>
+            <a:endParaRPr lang="en-US" sz="1400" dirty="0"/>
           </a:p>
           <a:p>
             <a:pPr marL="342900" indent="-342900">
@@ -26823,14 +27016,14 @@
               <a:buChar char="•"/>
             </a:pPr>
             <a:r>
-              <a:rPr lang="en-US" sz="1500" b="1" dirty="0">
+              <a:rPr lang="en-US" sz="1400" b="1" dirty="0">
                 <a:solidFill>
                   <a:schemeClr val="tx1"/>
                 </a:solidFill>
               </a:rPr>
               <a:t>다. 요한의 변화</a:t>
             </a:r>
-            <a:endParaRPr lang="en-US" sz="1500" dirty="0"/>
+            <a:endParaRPr lang="en-US" sz="1400" dirty="0"/>
           </a:p>
           <a:p>
             <a:pPr lvl="1" indent="0" marL="0">
@@ -26840,14 +27033,14 @@
               <a:buNone/>
             </a:pPr>
             <a:r>
-              <a:rPr lang="en-US" sz="1300" dirty="0">
+              <a:rPr lang="en-US" sz="1200" dirty="0">
                 <a:solidFill>
                   <a:schemeClr val="accent3"/>
                 </a:solidFill>
               </a:rPr>
               <a:t>모난 성품이 예수님의 성품으로 (질문 9)</a:t>
             </a:r>
-            <a:endParaRPr lang="en-US" sz="1500" dirty="0"/>
+            <a:endParaRPr lang="en-US" sz="1400" dirty="0"/>
           </a:p>
           <a:p>
             <a:pPr marL="342900" indent="-342900">
@@ -26858,14 +27051,14 @@
               <a:buChar char="•"/>
             </a:pPr>
             <a:r>
-              <a:rPr lang="en-US" sz="1500" b="1" dirty="0">
+              <a:rPr lang="en-US" sz="1400" b="1" dirty="0">
                 <a:solidFill>
                   <a:schemeClr val="tx1"/>
                 </a:solidFill>
               </a:rPr>
               <a:t>라. 요한의 증언으로서의 요한복음</a:t>
             </a:r>
-            <a:endParaRPr lang="en-US" sz="1500" dirty="0"/>
+            <a:endParaRPr lang="en-US" sz="1400" dirty="0"/>
           </a:p>
           <a:p>
             <a:pPr lvl="1" indent="0" marL="0">
@@ -26875,14 +27068,14 @@
               <a:buNone/>
             </a:pPr>
             <a:r>
-              <a:rPr lang="en-US" sz="1300" dirty="0">
+              <a:rPr lang="en-US" sz="1200" dirty="0">
                 <a:solidFill>
                   <a:schemeClr val="accent3"/>
                 </a:solidFill>
               </a:rPr>
               <a:t>직접 목격한 사실 (질문 10~12)</a:t>
             </a:r>
-            <a:endParaRPr lang="en-US" sz="1500" dirty="0"/>
+            <a:endParaRPr lang="en-US" sz="1400" dirty="0"/>
           </a:p>
           <a:p>
             <a:pPr marL="342900" indent="-342900">
@@ -26893,14 +27086,14 @@
               <a:buChar char="•"/>
             </a:pPr>
             <a:r>
-              <a:rPr lang="en-US" sz="1500" b="1" dirty="0">
+              <a:rPr lang="en-US" sz="1400" b="1" dirty="0">
                 <a:solidFill>
                   <a:schemeClr val="tx1"/>
                 </a:solidFill>
               </a:rPr>
               <a:t>마. 요한의 사역</a:t>
             </a:r>
-            <a:endParaRPr lang="en-US" sz="1500" dirty="0"/>
+            <a:endParaRPr lang="en-US" sz="1400" dirty="0"/>
           </a:p>
           <a:p>
             <a:pPr lvl="1" indent="0" marL="0">
@@ -26910,14 +27103,14 @@
               <a:buNone/>
             </a:pPr>
             <a:r>
-              <a:rPr lang="en-US" sz="1300" dirty="0">
+              <a:rPr lang="en-US" sz="1200" dirty="0">
                 <a:solidFill>
                   <a:schemeClr val="accent3"/>
                 </a:solidFill>
               </a:rPr>
               <a:t>부활을 증거함 (질문 13~17)</a:t>
             </a:r>
-            <a:endParaRPr lang="en-US" sz="1500" dirty="0"/>
+            <a:endParaRPr lang="en-US" sz="1400" dirty="0"/>
           </a:p>
           <a:p>
             <a:pPr marL="342900" indent="-342900">
@@ -26928,14 +27121,14 @@
               <a:buChar char="•"/>
             </a:pPr>
             <a:r>
-              <a:rPr lang="en-US" sz="1500" b="1" dirty="0">
+              <a:rPr lang="en-US" sz="1400" b="1" dirty="0">
                 <a:solidFill>
                   <a:schemeClr val="tx1"/>
                 </a:solidFill>
               </a:rPr>
               <a:t>바. 기록목적</a:t>
             </a:r>
-            <a:endParaRPr lang="en-US" sz="1500" dirty="0"/>
+            <a:endParaRPr lang="en-US" sz="1400" dirty="0"/>
           </a:p>
           <a:p>
             <a:pPr lvl="1" indent="0" marL="0">
@@ -26945,14 +27138,14 @@
               <a:buNone/>
             </a:pPr>
             <a:r>
-              <a:rPr lang="en-US" sz="1300" dirty="0">
+              <a:rPr lang="en-US" sz="1200" dirty="0">
                 <a:solidFill>
                   <a:schemeClr val="accent3"/>
                 </a:solidFill>
               </a:rPr>
               <a:t>예수를 믿고 생명을 얻게 함 (질문 18~21)</a:t>
             </a:r>
-            <a:endParaRPr lang="en-US" sz="1500" dirty="0"/>
+            <a:endParaRPr lang="en-US" sz="1400" dirty="0"/>
           </a:p>
         </p:txBody>
       </p:sp>
@@ -26994,16 +27187,16 @@
         <p:spPr>
           <a:xfrm>
             <a:off x="6507328" y="1719072"/>
-            <a:ext cx="4724248" cy="420624"/>
-          </a:xfrm>
-          <a:prstGeom prst="rect">
-            <a:avLst/>
-          </a:prstGeom>
-          <a:noFill/>
-          <a:ln/>
-        </p:spPr>
-        <p:txBody>
-          <a:bodyPr wrap="square" lIns="0" tIns="0" rIns="0" bIns="0" rtlCol="0" anchor="ctr"/>
+            <a:ext cx="4724248" cy="629920"/>
+          </a:xfrm>
+          <a:prstGeom prst="rect">
+            <a:avLst/>
+          </a:prstGeom>
+          <a:noFill/>
+          <a:ln/>
+        </p:spPr>
+        <p:txBody>
+          <a:bodyPr wrap="square" lIns="0" tIns="0" rIns="0" bIns="0" rtlCol="0" anchor="t"/>
           <a:lstStyle/>
           <a:p>
             <a:pPr indent="0" marL="0">
@@ -27029,8 +27222,8 @@
         </p:nvSpPr>
         <p:spPr>
           <a:xfrm>
-            <a:off x="6507328" y="2267712"/>
-            <a:ext cx="4724248" cy="3621024"/>
+            <a:off x="6507328" y="2513584"/>
+            <a:ext cx="4724248" cy="3503168"/>
           </a:xfrm>
           <a:prstGeom prst="rect">
             <a:avLst/>
@@ -27050,14 +27243,14 @@
               <a:buChar char="•"/>
             </a:pPr>
             <a:r>
-              <a:rPr lang="en-US" sz="1500" b="1" dirty="0">
+              <a:rPr lang="en-US" sz="1400" b="1" dirty="0">
                 <a:solidFill>
                   <a:schemeClr val="bg1"/>
                 </a:solidFill>
               </a:rPr>
               <a:t>가. 창조주이신 예수님 (1:1~3)</a:t>
             </a:r>
-            <a:endParaRPr lang="en-US" sz="1500" dirty="0"/>
+            <a:endParaRPr lang="en-US" sz="1400" dirty="0"/>
           </a:p>
           <a:p>
             <a:pPr lvl="1" indent="0" marL="0">
@@ -27067,14 +27260,14 @@
               <a:buNone/>
             </a:pPr>
             <a:r>
-              <a:rPr lang="en-US" sz="1300" dirty="0">
+              <a:rPr lang="en-US" sz="1200" dirty="0">
                 <a:solidFill>
                   <a:schemeClr val="accent3"/>
                 </a:solidFill>
               </a:rPr>
               <a:t>예수님은 말씀 · 말씀으로 창조 (질문 22~28)</a:t>
             </a:r>
-            <a:endParaRPr lang="en-US" sz="1500" dirty="0"/>
+            <a:endParaRPr lang="en-US" sz="1400" dirty="0"/>
           </a:p>
           <a:p>
             <a:pPr marL="342900" indent="-342900">
@@ -27085,14 +27278,14 @@
               <a:buChar char="•"/>
             </a:pPr>
             <a:r>
-              <a:rPr lang="en-US" sz="1500" b="1" dirty="0">
+              <a:rPr lang="en-US" sz="1400" b="1" dirty="0">
                 <a:solidFill>
                   <a:schemeClr val="bg1"/>
                 </a:solidFill>
               </a:rPr>
               <a:t>나. 인도자이신 예수님 (1:4~13)</a:t>
             </a:r>
-            <a:endParaRPr lang="en-US" sz="1500" dirty="0"/>
+            <a:endParaRPr lang="en-US" sz="1400" dirty="0"/>
           </a:p>
           <a:p>
             <a:pPr lvl="1" indent="0" marL="0">
@@ -27102,14 +27295,14 @@
               <a:buNone/>
             </a:pPr>
             <a:r>
-              <a:rPr lang="en-US" sz="1300" dirty="0">
+              <a:rPr lang="en-US" sz="1200" dirty="0">
                 <a:solidFill>
                   <a:schemeClr val="accent3"/>
                 </a:solidFill>
               </a:rPr>
               <a:t>빛이 어둠에 비침 (질문 29~35)</a:t>
             </a:r>
-            <a:endParaRPr lang="en-US" sz="1500" dirty="0"/>
+            <a:endParaRPr lang="en-US" sz="1400" dirty="0"/>
           </a:p>
           <a:p>
             <a:pPr marL="342900" indent="-342900">
@@ -27120,14 +27313,14 @@
               <a:buChar char="•"/>
             </a:pPr>
             <a:r>
-              <a:rPr lang="en-US" sz="1500" b="1" dirty="0">
+              <a:rPr lang="en-US" sz="1400" b="1" dirty="0">
                 <a:solidFill>
                   <a:schemeClr val="bg1"/>
                 </a:solidFill>
               </a:rPr>
               <a:t>다. 하나님이신 예수님 (1:14~18)</a:t>
             </a:r>
-            <a:endParaRPr lang="en-US" sz="1500" dirty="0"/>
+            <a:endParaRPr lang="en-US" sz="1400" dirty="0"/>
           </a:p>
           <a:p>
             <a:pPr lvl="1" indent="0" marL="0">
@@ -27137,14 +27330,14 @@
               <a:buNone/>
             </a:pPr>
             <a:r>
-              <a:rPr lang="en-US" sz="1300" dirty="0">
+              <a:rPr lang="en-US" sz="1200" dirty="0">
                 <a:solidFill>
                   <a:schemeClr val="accent3"/>
                 </a:solidFill>
               </a:rPr>
               <a:t>성육신 · 은혜 · 삼위일체 하나님 (질문 36~41)</a:t>
             </a:r>
-            <a:endParaRPr lang="en-US" sz="1500" dirty="0"/>
+            <a:endParaRPr lang="en-US" sz="1400" dirty="0"/>
           </a:p>
           <a:p>
             <a:pPr marL="342900" indent="-342900">
@@ -27155,14 +27348,14 @@
               <a:buChar char="•"/>
             </a:pPr>
             <a:r>
-              <a:rPr lang="en-US" sz="1500" b="1" dirty="0">
+              <a:rPr lang="en-US" sz="1400" b="1" dirty="0">
                 <a:solidFill>
                   <a:schemeClr val="bg1"/>
                 </a:solidFill>
               </a:rPr>
               <a:t>오늘의 흐름</a:t>
             </a:r>
-            <a:endParaRPr lang="en-US" sz="1500" dirty="0"/>
+            <a:endParaRPr lang="en-US" sz="1400" dirty="0"/>
           </a:p>
           <a:p>
             <a:pPr lvl="1" indent="0" marL="0">
@@ -27172,14 +27365,49 @@
               <a:buNone/>
             </a:pPr>
             <a:r>
-              <a:rPr lang="en-US" sz="1300" dirty="0">
+              <a:rPr lang="en-US" sz="1200" dirty="0">
                 <a:solidFill>
                   <a:schemeClr val="accent3"/>
                 </a:solidFill>
               </a:rPr>
               <a:t>저자 요한을 알고 → 그가 증언한 예수님을 만난다</a:t>
             </a:r>
-            <a:endParaRPr lang="en-US" sz="1500" dirty="0"/>
+            <a:endParaRPr lang="en-US" sz="1400" dirty="0"/>
+          </a:p>
+          <a:p>
+            <a:pPr marL="342900" indent="-342900">
+              <a:spcAft>
+                <a:spcPts val="200"/>
+              </a:spcAft>
+              <a:buSzPct val="100000"/>
+              <a:buChar char="•"/>
+            </a:pPr>
+            <a:r>
+              <a:rPr lang="en-US" sz="1400" b="1" dirty="0">
+                <a:solidFill>
+                  <a:schemeClr val="bg1"/>
+                </a:solidFill>
+              </a:rPr>
+              <a:t>핵심 질문</a:t>
+            </a:r>
+            <a:endParaRPr lang="en-US" sz="1400" dirty="0"/>
+          </a:p>
+          <a:p>
+            <a:pPr lvl="1" indent="0" marL="0">
+              <a:spcAft>
+                <a:spcPts val="900"/>
+              </a:spcAft>
+              <a:buNone/>
+            </a:pPr>
+            <a:r>
+              <a:rPr lang="en-US" sz="1200" dirty="0">
+                <a:solidFill>
+                  <a:schemeClr val="accent3"/>
+                </a:solidFill>
+              </a:rPr>
+              <a:t>“예수님은 누구신가” — 1과는 이 한 질문에 답한다</a:t>
+            </a:r>
+            <a:endParaRPr lang="en-US" sz="1400" dirty="0"/>
           </a:p>
         </p:txBody>
       </p:sp>
@@ -27369,7 +27597,7 @@
         <p:spPr>
           <a:xfrm>
             <a:off x="685800" y="1536192"/>
-            <a:ext cx="5943600" cy="1828800"/>
+            <a:ext cx="5943600" cy="1280160"/>
           </a:xfrm>
           <a:prstGeom prst="rect">
             <a:avLst/>
@@ -27407,7 +27635,7 @@
         </p:nvSpPr>
         <p:spPr>
           <a:xfrm>
-            <a:off x="685800" y="3419856"/>
+            <a:off x="685800" y="2871216"/>
             <a:ext cx="5943600" cy="365760"/>
           </a:xfrm>
           <a:prstGeom prst="rect">
@@ -27621,10 +27849,12 @@
         <p:spPr>
           <a:xfrm>
             <a:off x="685800" y="4032504"/>
-            <a:ext cx="347472" cy="347472"/>
-          </a:xfrm>
-          <a:prstGeom prst="ellipse">
-            <a:avLst/>
+            <a:ext cx="539496" cy="347472"/>
+          </a:xfrm>
+          <a:prstGeom prst="roundRect">
+            <a:avLst>
+              <a:gd name="adj" fmla="val 50000"/>
+            </a:avLst>
           </a:prstGeom>
           <a:solidFill>
             <a:schemeClr val="accent1"/>
@@ -27641,7 +27871,7 @@
         <p:spPr>
           <a:xfrm>
             <a:off x="685800" y="4032504"/>
-            <a:ext cx="347472" cy="347472"/>
+            <a:ext cx="539496" cy="347472"/>
           </a:xfrm>
           <a:prstGeom prst="rect">
             <a:avLst/>
@@ -27657,14 +27887,14 @@
               <a:buNone/>
             </a:pPr>
             <a:r>
-              <a:rPr lang="en-US" sz="1400" b="1" dirty="0">
+              <a:rPr lang="en-US" sz="1300" b="1" dirty="0">
                 <a:solidFill>
                   <a:schemeClr val="bg1"/>
                 </a:solidFill>
               </a:rPr>
               <a:t>논증</a:t>
             </a:r>
-            <a:endParaRPr lang="en-US" sz="1400" dirty="0"/>
+            <a:endParaRPr lang="en-US" sz="1300" dirty="0"/>
           </a:p>
         </p:txBody>
       </p:sp>
@@ -27676,8 +27906,8 @@
         </p:nvSpPr>
         <p:spPr>
           <a:xfrm>
-            <a:off x="1161288" y="4023360"/>
-            <a:ext cx="10344607" cy="365760"/>
+            <a:off x="1353312" y="4023360"/>
+            <a:ext cx="10152583" cy="365760"/>
           </a:xfrm>
           <a:prstGeom prst="rect">
             <a:avLst/>
@@ -28541,7 +28771,7 @@
           </p:nvPr>
         </p:nvGraphicFramePr>
         <p:xfrm>
-          <a:off x="685800" y="1517904"/>
+          <a:off x="685800" y="1481328"/>
           <a:ext cx="10820095" cy="914400"/>
         </p:xfrm>
         <a:graphic>
@@ -28553,7 +28783,7 @@
                 <a:gridCol w="3931920"/>
                 <a:gridCol w="3959352"/>
               </a:tblGrid>
-              <a:tr h="457200">
+              <a:tr h="438912">
                 <a:tc>
                   <a:txBody>
                     <a:bodyPr/>
@@ -28705,7 +28935,7 @@
                   </a:tcPr>
                 </a:tc>
               </a:tr>
-              <a:tr h="457200">
+              <a:tr h="438912">
                 <a:tc>
                   <a:txBody>
                     <a:bodyPr/>
@@ -28857,7 +29087,7 @@
                   </a:tcPr>
                 </a:tc>
               </a:tr>
-              <a:tr h="457200">
+              <a:tr h="438912">
                 <a:tc>
                   <a:txBody>
                     <a:bodyPr/>
@@ -29009,7 +29239,7 @@
                   </a:tcPr>
                 </a:tc>
               </a:tr>
-              <a:tr h="457200">
+              <a:tr h="438912">
                 <a:tc>
                   <a:txBody>
                     <a:bodyPr/>
@@ -29161,7 +29391,7 @@
                   </a:tcPr>
                 </a:tc>
               </a:tr>
-              <a:tr h="457200">
+              <a:tr h="438912">
                 <a:tc>
                   <a:txBody>
                     <a:bodyPr/>
@@ -29313,7 +29543,7 @@
                   </a:tcPr>
                 </a:tc>
               </a:tr>
-              <a:tr h="457200">
+              <a:tr h="438912">
                 <a:tc>
                   <a:txBody>
                     <a:bodyPr/>
@@ -29477,12 +29707,12 @@
         </p:nvSpPr>
         <p:spPr>
           <a:xfrm>
-            <a:off x="685800" y="4187952"/>
-            <a:ext cx="10820095" cy="713232"/>
+            <a:off x="685800" y="4315968"/>
+            <a:ext cx="10820095" cy="658368"/>
           </a:xfrm>
           <a:prstGeom prst="roundRect">
             <a:avLst>
-              <a:gd name="adj" fmla="val 12821"/>
+              <a:gd name="adj" fmla="val 13889"/>
             </a:avLst>
           </a:prstGeom>
           <a:solidFill>
@@ -29499,8 +29729,8 @@
         </p:nvSpPr>
         <p:spPr>
           <a:xfrm>
-            <a:off x="960120" y="4187952"/>
-            <a:ext cx="10271455" cy="713232"/>
+            <a:off x="960120" y="4315968"/>
+            <a:ext cx="10271455" cy="658368"/>
           </a:xfrm>
           <a:prstGeom prst="rect">
             <a:avLst/>
@@ -29516,14 +29746,14 @@
               <a:buNone/>
             </a:pPr>
             <a:r>
-              <a:rPr lang="en-US" sz="1600" b="1" dirty="0">
+              <a:rPr lang="en-US" sz="1700" b="1" dirty="0">
                 <a:solidFill>
                   <a:schemeClr val="accent6"/>
                 </a:solidFill>
               </a:rPr>
-              <a:t>남는 제자  ·  야고보(요한의 형제) · 요한 · 바돌로매 · 마태 · 야고보(알패오의 아들) · 시몬(셀롯) — 6명</a:t>
-            </a:r>
-            <a:endParaRPr lang="en-US" sz="1600" dirty="0"/>
+              <a:t>남는 제자 6명  ·  야고보 · 요한 · 바돌로매 · 마태 · 야고보(알패오) · 시몬(셀롯)</a:t>
+            </a:r>
+            <a:endParaRPr lang="en-US" sz="1700" dirty="0"/>
           </a:p>
         </p:txBody>
       </p:sp>
@@ -29535,8 +29765,8 @@
         </p:nvSpPr>
         <p:spPr>
           <a:xfrm>
-            <a:off x="685800" y="5084064"/>
-            <a:ext cx="10820095" cy="914400"/>
+            <a:off x="685800" y="5175504"/>
+            <a:ext cx="10820095" cy="960120"/>
           </a:xfrm>
           <a:prstGeom prst="rect">
             <a:avLst/>
@@ -29770,12 +30000,12 @@
         </p:nvSpPr>
         <p:spPr>
           <a:xfrm>
-            <a:off x="685800" y="1975104"/>
-            <a:ext cx="3448202" cy="2743200"/>
+            <a:off x="685800" y="1938528"/>
+            <a:ext cx="3448202" cy="2926080"/>
           </a:xfrm>
           <a:prstGeom prst="roundRect">
             <a:avLst>
-              <a:gd name="adj" fmla="val 2000"/>
+              <a:gd name="adj" fmla="val 1875"/>
             </a:avLst>
           </a:prstGeom>
           <a:solidFill>
@@ -29799,7 +30029,7 @@
         </p:nvSpPr>
         <p:spPr>
           <a:xfrm>
-            <a:off x="923544" y="2212848"/>
+            <a:off x="923544" y="2176272"/>
             <a:ext cx="457200" cy="457200"/>
           </a:xfrm>
           <a:prstGeom prst="ellipse">
@@ -29819,7 +30049,7 @@
         </p:nvSpPr>
         <p:spPr>
           <a:xfrm>
-            <a:off x="923544" y="2212848"/>
+            <a:off x="923544" y="2176272"/>
             <a:ext cx="457200" cy="457200"/>
           </a:xfrm>
           <a:prstGeom prst="rect">
@@ -29855,7 +30085,7 @@
         </p:nvSpPr>
         <p:spPr>
           <a:xfrm>
-            <a:off x="923544" y="2798064"/>
+            <a:off x="923544" y="2761488"/>
             <a:ext cx="2972714" cy="416052"/>
           </a:xfrm>
           <a:prstGeom prst="rect">
@@ -29891,8 +30121,8 @@
         </p:nvSpPr>
         <p:spPr>
           <a:xfrm>
-            <a:off x="923544" y="3287268"/>
-            <a:ext cx="2972714" cy="929640"/>
+            <a:off x="923544" y="3250692"/>
+            <a:ext cx="2972714" cy="1039368"/>
           </a:xfrm>
           <a:prstGeom prst="rect">
             <a:avLst/>
@@ -29947,8 +30177,8 @@
         </p:nvSpPr>
         <p:spPr>
           <a:xfrm>
-            <a:off x="923544" y="4253484"/>
-            <a:ext cx="2972714" cy="263652"/>
+            <a:off x="923544" y="4326636"/>
+            <a:ext cx="2972714" cy="336804"/>
           </a:xfrm>
           <a:prstGeom prst="rect">
             <a:avLst/>
@@ -29983,12 +30213,12 @@
         </p:nvSpPr>
         <p:spPr>
           <a:xfrm>
-            <a:off x="4371746" y="1975104"/>
-            <a:ext cx="3448202" cy="2743200"/>
+            <a:off x="4371746" y="1938528"/>
+            <a:ext cx="3448202" cy="2926080"/>
           </a:xfrm>
           <a:prstGeom prst="roundRect">
             <a:avLst>
-              <a:gd name="adj" fmla="val 2000"/>
+              <a:gd name="adj" fmla="val 1875"/>
             </a:avLst>
           </a:prstGeom>
           <a:solidFill>
@@ -30012,7 +30242,7 @@
         </p:nvSpPr>
         <p:spPr>
           <a:xfrm>
-            <a:off x="4609490" y="2212848"/>
+            <a:off x="4609490" y="2176272"/>
             <a:ext cx="457200" cy="457200"/>
           </a:xfrm>
           <a:prstGeom prst="ellipse">
@@ -30032,7 +30262,7 @@
         </p:nvSpPr>
         <p:spPr>
           <a:xfrm>
-            <a:off x="4609490" y="2212848"/>
+            <a:off x="4609490" y="2176272"/>
             <a:ext cx="457200" cy="457200"/>
           </a:xfrm>
           <a:prstGeom prst="rect">
@@ -30068,7 +30298,7 @@
         </p:nvSpPr>
         <p:spPr>
           <a:xfrm>
-            <a:off x="4609490" y="2798064"/>
+            <a:off x="4609490" y="2761488"/>
             <a:ext cx="2972714" cy="416052"/>
           </a:xfrm>
           <a:prstGeom prst="rect">
@@ -30104,8 +30334,8 @@
         </p:nvSpPr>
         <p:spPr>
           <a:xfrm>
-            <a:off x="4609490" y="3287268"/>
-            <a:ext cx="2972714" cy="929640"/>
+            <a:off x="4609490" y="3250692"/>
+            <a:ext cx="2972714" cy="1039368"/>
           </a:xfrm>
           <a:prstGeom prst="rect">
             <a:avLst/>
@@ -30160,8 +30390,8 @@
         </p:nvSpPr>
         <p:spPr>
           <a:xfrm>
-            <a:off x="4609490" y="4253484"/>
-            <a:ext cx="2972714" cy="263652"/>
+            <a:off x="4609490" y="4326636"/>
+            <a:ext cx="2972714" cy="336804"/>
           </a:xfrm>
           <a:prstGeom prst="rect">
             <a:avLst/>
@@ -30196,12 +30426,12 @@
         </p:nvSpPr>
         <p:spPr>
           <a:xfrm>
-            <a:off x="8057693" y="1975104"/>
-            <a:ext cx="3448202" cy="2743200"/>
+            <a:off x="8057693" y="1938528"/>
+            <a:ext cx="3448202" cy="2926080"/>
           </a:xfrm>
           <a:prstGeom prst="roundRect">
             <a:avLst>
-              <a:gd name="adj" fmla="val 2000"/>
+              <a:gd name="adj" fmla="val 1875"/>
             </a:avLst>
           </a:prstGeom>
           <a:solidFill>
@@ -30225,7 +30455,7 @@
         </p:nvSpPr>
         <p:spPr>
           <a:xfrm>
-            <a:off x="8295437" y="2212848"/>
+            <a:off x="8295437" y="2176272"/>
             <a:ext cx="457200" cy="457200"/>
           </a:xfrm>
           <a:prstGeom prst="ellipse">
@@ -30245,7 +30475,7 @@
         </p:nvSpPr>
         <p:spPr>
           <a:xfrm>
-            <a:off x="8295437" y="2212848"/>
+            <a:off x="8295437" y="2176272"/>
             <a:ext cx="457200" cy="457200"/>
           </a:xfrm>
           <a:prstGeom prst="rect">
@@ -30281,7 +30511,7 @@
         </p:nvSpPr>
         <p:spPr>
           <a:xfrm>
-            <a:off x="8295437" y="2798064"/>
+            <a:off x="8295437" y="2761488"/>
             <a:ext cx="2972714" cy="416052"/>
           </a:xfrm>
           <a:prstGeom prst="rect">
@@ -30317,8 +30547,8 @@
         </p:nvSpPr>
         <p:spPr>
           <a:xfrm>
-            <a:off x="8295437" y="3287268"/>
-            <a:ext cx="2972714" cy="929640"/>
+            <a:off x="8295437" y="3250692"/>
+            <a:ext cx="2972714" cy="1039368"/>
           </a:xfrm>
           <a:prstGeom prst="rect">
             <a:avLst/>
@@ -30373,8 +30603,8 @@
         </p:nvSpPr>
         <p:spPr>
           <a:xfrm>
-            <a:off x="8295437" y="4253484"/>
-            <a:ext cx="2972714" cy="263652"/>
+            <a:off x="8295437" y="4326636"/>
+            <a:ext cx="2972714" cy="336804"/>
           </a:xfrm>
           <a:prstGeom prst="rect">
             <a:avLst/>
@@ -30409,12 +30639,12 @@
         </p:nvSpPr>
         <p:spPr>
           <a:xfrm>
-            <a:off x="685800" y="4846320"/>
-            <a:ext cx="10820095" cy="914400"/>
+            <a:off x="685800" y="4992624"/>
+            <a:ext cx="10820095" cy="868680"/>
           </a:xfrm>
           <a:prstGeom prst="roundRect">
             <a:avLst>
-              <a:gd name="adj" fmla="val 10000"/>
+              <a:gd name="adj" fmla="val 10526"/>
             </a:avLst>
           </a:prstGeom>
           <a:solidFill>
@@ -30431,8 +30661,8 @@
         </p:nvSpPr>
         <p:spPr>
           <a:xfrm>
-            <a:off x="960120" y="4846320"/>
-            <a:ext cx="10271455" cy="914400"/>
+            <a:off x="960120" y="4992624"/>
+            <a:ext cx="10271455" cy="868680"/>
           </a:xfrm>
           <a:prstGeom prst="rect">
             <a:avLst/>
@@ -31367,7 +31597,7 @@
                   <a:schemeClr val="accent3"/>
                 </a:solidFill>
               </a:rPr>
-              <a:t>요한복음 (1장 전반)</a:t>
+              <a:t>요한복음</a:t>
             </a:r>
             <a:endParaRPr lang="en-US" sz="1300" dirty="0"/>
           </a:p>
@@ -31827,7 +32057,7 @@
         </p:nvSpPr>
         <p:spPr>
           <a:xfrm>
-            <a:off x="685800" y="1572768"/>
+            <a:off x="685800" y="1554480"/>
             <a:ext cx="3448202" cy="1984248"/>
           </a:xfrm>
           <a:prstGeom prst="roundRect">
@@ -31856,11 +32086,13 @@
         </p:nvSpPr>
         <p:spPr>
           <a:xfrm>
-            <a:off x="923544" y="1810512"/>
-            <a:ext cx="402336" cy="402336"/>
-          </a:xfrm>
-          <a:prstGeom prst="ellipse">
-            <a:avLst/>
+            <a:off x="923544" y="1792224"/>
+            <a:ext cx="539496" cy="402336"/>
+          </a:xfrm>
+          <a:prstGeom prst="roundRect">
+            <a:avLst>
+              <a:gd name="adj" fmla="val 50000"/>
+            </a:avLst>
           </a:prstGeom>
           <a:solidFill>
             <a:schemeClr val="accent1"/>
@@ -31876,8 +32108,8 @@
         </p:nvSpPr>
         <p:spPr>
           <a:xfrm>
-            <a:off x="923544" y="1810512"/>
-            <a:ext cx="402336" cy="402336"/>
+            <a:off x="923544" y="1792224"/>
+            <a:ext cx="539496" cy="402336"/>
           </a:xfrm>
           <a:prstGeom prst="rect">
             <a:avLst/>
@@ -31912,7 +32144,7 @@
         </p:nvSpPr>
         <p:spPr>
           <a:xfrm>
-            <a:off x="923544" y="2340864"/>
+            <a:off x="923544" y="2322576"/>
             <a:ext cx="2972714" cy="272034"/>
           </a:xfrm>
           <a:prstGeom prst="rect">
@@ -31948,7 +32180,7 @@
         </p:nvSpPr>
         <p:spPr>
           <a:xfrm>
-            <a:off x="923544" y="2686050"/>
+            <a:off x="923544" y="2667762"/>
             <a:ext cx="2972714" cy="633222"/>
           </a:xfrm>
           <a:prstGeom prst="rect">
@@ -32004,7 +32236,7 @@
         </p:nvSpPr>
         <p:spPr>
           <a:xfrm>
-            <a:off x="4371746" y="1572768"/>
+            <a:off x="4371746" y="1554480"/>
             <a:ext cx="3448202" cy="1984248"/>
           </a:xfrm>
           <a:prstGeom prst="roundRect">
@@ -32033,11 +32265,13 @@
         </p:nvSpPr>
         <p:spPr>
           <a:xfrm>
-            <a:off x="4609490" y="1810512"/>
-            <a:ext cx="402336" cy="402336"/>
-          </a:xfrm>
-          <a:prstGeom prst="ellipse">
-            <a:avLst/>
+            <a:off x="4609490" y="1792224"/>
+            <a:ext cx="539496" cy="402336"/>
+          </a:xfrm>
+          <a:prstGeom prst="roundRect">
+            <a:avLst>
+              <a:gd name="adj" fmla="val 50000"/>
+            </a:avLst>
           </a:prstGeom>
           <a:solidFill>
             <a:schemeClr val="accent1"/>
@@ -32053,8 +32287,8 @@
         </p:nvSpPr>
         <p:spPr>
           <a:xfrm>
-            <a:off x="4609490" y="1810512"/>
-            <a:ext cx="402336" cy="402336"/>
+            <a:off x="4609490" y="1792224"/>
+            <a:ext cx="539496" cy="402336"/>
           </a:xfrm>
           <a:prstGeom prst="rect">
             <a:avLst/>
@@ -32089,7 +32323,7 @@
         </p:nvSpPr>
         <p:spPr>
           <a:xfrm>
-            <a:off x="4609490" y="2340864"/>
+            <a:off x="4609490" y="2322576"/>
             <a:ext cx="2972714" cy="272034"/>
           </a:xfrm>
           <a:prstGeom prst="rect">
@@ -32125,7 +32359,7 @@
         </p:nvSpPr>
         <p:spPr>
           <a:xfrm>
-            <a:off x="4609490" y="2686050"/>
+            <a:off x="4609490" y="2667762"/>
             <a:ext cx="2972714" cy="633222"/>
           </a:xfrm>
           <a:prstGeom prst="rect">
@@ -32181,7 +32415,7 @@
         </p:nvSpPr>
         <p:spPr>
           <a:xfrm>
-            <a:off x="8057693" y="1572768"/>
+            <a:off x="8057693" y="1554480"/>
             <a:ext cx="3448202" cy="1984248"/>
           </a:xfrm>
           <a:prstGeom prst="roundRect">
@@ -32210,11 +32444,13 @@
         </p:nvSpPr>
         <p:spPr>
           <a:xfrm>
-            <a:off x="8295437" y="1810512"/>
-            <a:ext cx="402336" cy="402336"/>
-          </a:xfrm>
-          <a:prstGeom prst="ellipse">
-            <a:avLst/>
+            <a:off x="8295437" y="1792224"/>
+            <a:ext cx="539496" cy="402336"/>
+          </a:xfrm>
+          <a:prstGeom prst="roundRect">
+            <a:avLst>
+              <a:gd name="adj" fmla="val 50000"/>
+            </a:avLst>
           </a:prstGeom>
           <a:solidFill>
             <a:schemeClr val="accent1"/>
@@ -32230,8 +32466,8 @@
         </p:nvSpPr>
         <p:spPr>
           <a:xfrm>
-            <a:off x="8295437" y="1810512"/>
-            <a:ext cx="402336" cy="402336"/>
+            <a:off x="8295437" y="1792224"/>
+            <a:ext cx="539496" cy="402336"/>
           </a:xfrm>
           <a:prstGeom prst="rect">
             <a:avLst/>
@@ -32266,7 +32502,7 @@
         </p:nvSpPr>
         <p:spPr>
           <a:xfrm>
-            <a:off x="8295437" y="2340864"/>
+            <a:off x="8295437" y="2322576"/>
             <a:ext cx="2972714" cy="272034"/>
           </a:xfrm>
           <a:prstGeom prst="rect">
@@ -32302,7 +32538,7 @@
         </p:nvSpPr>
         <p:spPr>
           <a:xfrm>
-            <a:off x="8295437" y="2686050"/>
+            <a:off x="8295437" y="2667762"/>
             <a:ext cx="2972714" cy="633222"/>
           </a:xfrm>
           <a:prstGeom prst="rect">
@@ -32327,7 +32563,7 @@
                   <a:schemeClr val="accent3"/>
                 </a:solidFill>
               </a:rPr>
-              <a:t>요 1:35~40 · 세례요한의 증언을 듣고</a:t>
+              <a:t>요 1:35~40</a:t>
             </a:r>
             <a:endParaRPr lang="en-US" sz="1350" dirty="0"/>
           </a:p>
@@ -32344,7 +32580,7 @@
                   <a:schemeClr val="accent3"/>
                 </a:solidFill>
               </a:rPr>
-              <a:t>예수님을 따라갔다 (오후 10시의 만남)</a:t>
+              <a:t>세례요한의 증언을 듣고 따라갔다</a:t>
             </a:r>
             <a:endParaRPr lang="en-US" sz="1350" dirty="0"/>
           </a:p>
@@ -32358,7 +32594,7 @@
         </p:nvSpPr>
         <p:spPr>
           <a:xfrm>
-            <a:off x="685800" y="3794760"/>
+            <a:off x="685800" y="3776472"/>
             <a:ext cx="3448202" cy="1984248"/>
           </a:xfrm>
           <a:prstGeom prst="roundRect">
@@ -32387,11 +32623,13 @@
         </p:nvSpPr>
         <p:spPr>
           <a:xfrm>
-            <a:off x="923544" y="4032504"/>
-            <a:ext cx="402336" cy="402336"/>
-          </a:xfrm>
-          <a:prstGeom prst="ellipse">
-            <a:avLst/>
+            <a:off x="923544" y="4014216"/>
+            <a:ext cx="539496" cy="402336"/>
+          </a:xfrm>
+          <a:prstGeom prst="roundRect">
+            <a:avLst>
+              <a:gd name="adj" fmla="val 50000"/>
+            </a:avLst>
           </a:prstGeom>
           <a:solidFill>
             <a:schemeClr val="accent1"/>
@@ -32407,8 +32645,8 @@
         </p:nvSpPr>
         <p:spPr>
           <a:xfrm>
-            <a:off x="923544" y="4032504"/>
-            <a:ext cx="402336" cy="402336"/>
+            <a:off x="923544" y="4014216"/>
+            <a:ext cx="539496" cy="402336"/>
           </a:xfrm>
           <a:prstGeom prst="rect">
             <a:avLst/>
@@ -32443,7 +32681,7 @@
         </p:nvSpPr>
         <p:spPr>
           <a:xfrm>
-            <a:off x="923544" y="4562856"/>
+            <a:off x="923544" y="4544568"/>
             <a:ext cx="2972714" cy="272034"/>
           </a:xfrm>
           <a:prstGeom prst="rect">
@@ -32479,7 +32717,7 @@
         </p:nvSpPr>
         <p:spPr>
           <a:xfrm>
-            <a:off x="923544" y="4908042"/>
+            <a:off x="923544" y="4889754"/>
             <a:ext cx="2972714" cy="633222"/>
           </a:xfrm>
           <a:prstGeom prst="rect">
@@ -32535,7 +32773,7 @@
         </p:nvSpPr>
         <p:spPr>
           <a:xfrm>
-            <a:off x="4371746" y="3794760"/>
+            <a:off x="4371746" y="3776472"/>
             <a:ext cx="3448202" cy="1984248"/>
           </a:xfrm>
           <a:prstGeom prst="roundRect">
@@ -32564,11 +32802,13 @@
         </p:nvSpPr>
         <p:spPr>
           <a:xfrm>
-            <a:off x="4609490" y="4032504"/>
-            <a:ext cx="402336" cy="402336"/>
-          </a:xfrm>
-          <a:prstGeom prst="ellipse">
-            <a:avLst/>
+            <a:off x="4609490" y="4014216"/>
+            <a:ext cx="539496" cy="402336"/>
+          </a:xfrm>
+          <a:prstGeom prst="roundRect">
+            <a:avLst>
+              <a:gd name="adj" fmla="val 50000"/>
+            </a:avLst>
           </a:prstGeom>
           <a:solidFill>
             <a:schemeClr val="accent1"/>
@@ -32584,8 +32824,8 @@
         </p:nvSpPr>
         <p:spPr>
           <a:xfrm>
-            <a:off x="4609490" y="4032504"/>
-            <a:ext cx="402336" cy="402336"/>
+            <a:off x="4609490" y="4014216"/>
+            <a:ext cx="539496" cy="402336"/>
           </a:xfrm>
           <a:prstGeom prst="rect">
             <a:avLst/>
@@ -32620,7 +32860,7 @@
         </p:nvSpPr>
         <p:spPr>
           <a:xfrm>
-            <a:off x="4609490" y="4562856"/>
+            <a:off x="4609490" y="4544568"/>
             <a:ext cx="2972714" cy="272034"/>
           </a:xfrm>
           <a:prstGeom prst="rect">
@@ -32656,7 +32896,7 @@
         </p:nvSpPr>
         <p:spPr>
           <a:xfrm>
-            <a:off x="4609490" y="4908042"/>
+            <a:off x="4609490" y="4889754"/>
             <a:ext cx="2972714" cy="633222"/>
           </a:xfrm>
           <a:prstGeom prst="rect">
@@ -32712,7 +32952,7 @@
         </p:nvSpPr>
         <p:spPr>
           <a:xfrm>
-            <a:off x="8057693" y="3794760"/>
+            <a:off x="8057693" y="3776472"/>
             <a:ext cx="3448202" cy="1984248"/>
           </a:xfrm>
           <a:prstGeom prst="roundRect">
@@ -32741,11 +32981,13 @@
         </p:nvSpPr>
         <p:spPr>
           <a:xfrm>
-            <a:off x="8295437" y="4032504"/>
-            <a:ext cx="402336" cy="402336"/>
-          </a:xfrm>
-          <a:prstGeom prst="ellipse">
-            <a:avLst/>
+            <a:off x="8295437" y="4014216"/>
+            <a:ext cx="539496" cy="402336"/>
+          </a:xfrm>
+          <a:prstGeom prst="roundRect">
+            <a:avLst>
+              <a:gd name="adj" fmla="val 50000"/>
+            </a:avLst>
           </a:prstGeom>
           <a:solidFill>
             <a:schemeClr val="accent1"/>
@@ -32761,8 +33003,8 @@
         </p:nvSpPr>
         <p:spPr>
           <a:xfrm>
-            <a:off x="8295437" y="4032504"/>
-            <a:ext cx="402336" cy="402336"/>
+            <a:off x="8295437" y="4014216"/>
+            <a:ext cx="539496" cy="402336"/>
           </a:xfrm>
           <a:prstGeom prst="rect">
             <a:avLst/>
@@ -32797,7 +33039,7 @@
         </p:nvSpPr>
         <p:spPr>
           <a:xfrm>
-            <a:off x="8295437" y="4562856"/>
+            <a:off x="8295437" y="4544568"/>
             <a:ext cx="2972714" cy="272034"/>
           </a:xfrm>
           <a:prstGeom prst="rect">
@@ -32833,7 +33075,7 @@
         </p:nvSpPr>
         <p:spPr>
           <a:xfrm>
-            <a:off x="8295437" y="4908042"/>
+            <a:off x="8295437" y="4889754"/>
             <a:ext cx="2972714" cy="633222"/>
           </a:xfrm>
           <a:prstGeom prst="rect">
@@ -32875,7 +33117,7 @@
                   <a:schemeClr val="accent3"/>
                 </a:solidFill>
               </a:rPr>
-              <a:t>밧모섬 유배 중 계시를 받아 기록했다</a:t>
+              <a:t>밧모섬 유배 중 계시를 받아 기록</a:t>
             </a:r>
             <a:endParaRPr lang="en-US" sz="1350" dirty="0"/>
           </a:p>
@@ -32889,8 +33131,8 @@
         </p:nvSpPr>
         <p:spPr>
           <a:xfrm>
-            <a:off x="685800" y="5888736"/>
-            <a:ext cx="10820095" cy="365760"/>
+            <a:off x="685800" y="5907024"/>
+            <a:ext cx="10820095" cy="347472"/>
           </a:xfrm>
           <a:prstGeom prst="rect">
             <a:avLst/>
@@ -32906,14 +33148,14 @@
               <a:buNone/>
             </a:pPr>
             <a:r>
-              <a:rPr lang="en-US" sz="1300" dirty="0">
-                <a:solidFill>
-                  <a:schemeClr val="accent3"/>
-                </a:solidFill>
-              </a:rPr>
-              <a:t>※ 요한복음을 읽는다는 것은, 예수님의 이모의 아들이자 십자가 아래 끝까지 서 있던 제자의 증언을 듣는 일입니다.</a:t>
-            </a:r>
-            <a:endParaRPr lang="en-US" sz="1300" dirty="0"/>
+              <a:rPr lang="en-US" sz="1350" b="1" dirty="0">
+                <a:solidFill>
+                  <a:schemeClr val="accent5"/>
+                </a:solidFill>
+              </a:rPr>
+              <a:t>요한복음을 읽는다는 것은, 예수님의 이모의 아들이자 십자가 아래 끝까지 서 있던 제자의 증언을 듣는 일입니다.</a:t>
+            </a:r>
+            <a:endParaRPr lang="en-US" sz="1350" dirty="0"/>
           </a:p>
         </p:txBody>
       </p:sp>
@@ -33103,7 +33345,7 @@
         <p:spPr>
           <a:xfrm>
             <a:off x="685800" y="1499616"/>
-            <a:ext cx="6675120" cy="1371600"/>
+            <a:ext cx="6400800" cy="1371600"/>
           </a:xfrm>
           <a:prstGeom prst="rect">
             <a:avLst/>
@@ -33142,7 +33384,7 @@
         <p:spPr>
           <a:xfrm>
             <a:off x="685800" y="2926080"/>
-            <a:ext cx="6675120" cy="365760"/>
+            <a:ext cx="6400800" cy="365760"/>
           </a:xfrm>
           <a:prstGeom prst="rect">
             <a:avLst/>
@@ -33263,12 +33505,12 @@
         </p:nvSpPr>
         <p:spPr>
           <a:xfrm>
-            <a:off x="685800" y="3566160"/>
-            <a:ext cx="3448202" cy="2103120"/>
+            <a:off x="685800" y="3529584"/>
+            <a:ext cx="3448202" cy="2231136"/>
           </a:xfrm>
           <a:prstGeom prst="roundRect">
             <a:avLst>
-              <a:gd name="adj" fmla="val 2609"/>
+              <a:gd name="adj" fmla="val 2459"/>
             </a:avLst>
           </a:prstGeom>
           <a:solidFill>
@@ -33292,7 +33534,7 @@
         </p:nvSpPr>
         <p:spPr>
           <a:xfrm>
-            <a:off x="923544" y="3803904"/>
+            <a:off x="923544" y="3767328"/>
             <a:ext cx="365760" cy="365760"/>
           </a:xfrm>
           <a:prstGeom prst="ellipse">
@@ -33312,7 +33554,7 @@
         </p:nvSpPr>
         <p:spPr>
           <a:xfrm>
-            <a:off x="923544" y="3803904"/>
+            <a:off x="923544" y="3767328"/>
             <a:ext cx="365760" cy="365760"/>
           </a:xfrm>
           <a:prstGeom prst="rect">
@@ -33348,7 +33590,7 @@
         </p:nvSpPr>
         <p:spPr>
           <a:xfrm>
-            <a:off x="923544" y="4297680"/>
+            <a:off x="923544" y="4261104"/>
             <a:ext cx="2972714" cy="256032"/>
           </a:xfrm>
           <a:prstGeom prst="rect">
@@ -33384,8 +33626,8 @@
         </p:nvSpPr>
         <p:spPr>
           <a:xfrm>
-            <a:off x="923544" y="4626864"/>
-            <a:ext cx="2972714" cy="804672"/>
+            <a:off x="923544" y="4590288"/>
+            <a:ext cx="2972714" cy="932688"/>
           </a:xfrm>
           <a:prstGeom prst="rect">
             <a:avLst/>
@@ -33440,12 +33682,12 @@
         </p:nvSpPr>
         <p:spPr>
           <a:xfrm>
-            <a:off x="4371746" y="3566160"/>
-            <a:ext cx="3448202" cy="2103120"/>
+            <a:off x="4371746" y="3529584"/>
+            <a:ext cx="3448202" cy="2231136"/>
           </a:xfrm>
           <a:prstGeom prst="roundRect">
             <a:avLst>
-              <a:gd name="adj" fmla="val 2609"/>
+              <a:gd name="adj" fmla="val 2459"/>
             </a:avLst>
           </a:prstGeom>
           <a:solidFill>
@@ -33469,7 +33711,7 @@
         </p:nvSpPr>
         <p:spPr>
           <a:xfrm>
-            <a:off x="4609490" y="3803904"/>
+            <a:off x="4609490" y="3767328"/>
             <a:ext cx="365760" cy="365760"/>
           </a:xfrm>
           <a:prstGeom prst="ellipse">
@@ -33489,7 +33731,7 @@
         </p:nvSpPr>
         <p:spPr>
           <a:xfrm>
-            <a:off x="4609490" y="3803904"/>
+            <a:off x="4609490" y="3767328"/>
             <a:ext cx="365760" cy="365760"/>
           </a:xfrm>
           <a:prstGeom prst="rect">
@@ -33525,7 +33767,7 @@
         </p:nvSpPr>
         <p:spPr>
           <a:xfrm>
-            <a:off x="4609490" y="4297680"/>
+            <a:off x="4609490" y="4261104"/>
             <a:ext cx="2972714" cy="256032"/>
           </a:xfrm>
           <a:prstGeom prst="rect">
@@ -33561,8 +33803,8 @@
         </p:nvSpPr>
         <p:spPr>
           <a:xfrm>
-            <a:off x="4609490" y="4626864"/>
-            <a:ext cx="2972714" cy="804672"/>
+            <a:off x="4609490" y="4590288"/>
+            <a:ext cx="2972714" cy="932688"/>
           </a:xfrm>
           <a:prstGeom prst="rect">
             <a:avLst/>
@@ -33634,12 +33876,12 @@
         </p:nvSpPr>
         <p:spPr>
           <a:xfrm>
-            <a:off x="8057693" y="3566160"/>
-            <a:ext cx="3448202" cy="2103120"/>
+            <a:off x="8057693" y="3529584"/>
+            <a:ext cx="3448202" cy="2231136"/>
           </a:xfrm>
           <a:prstGeom prst="roundRect">
             <a:avLst>
-              <a:gd name="adj" fmla="val 2609"/>
+              <a:gd name="adj" fmla="val 2459"/>
             </a:avLst>
           </a:prstGeom>
           <a:solidFill>
@@ -33663,7 +33905,7 @@
         </p:nvSpPr>
         <p:spPr>
           <a:xfrm>
-            <a:off x="8295437" y="3803904"/>
+            <a:off x="8295437" y="3767328"/>
             <a:ext cx="365760" cy="365760"/>
           </a:xfrm>
           <a:prstGeom prst="ellipse">
@@ -33683,7 +33925,7 @@
         </p:nvSpPr>
         <p:spPr>
           <a:xfrm>
-            <a:off x="8295437" y="3803904"/>
+            <a:off x="8295437" y="3767328"/>
             <a:ext cx="365760" cy="365760"/>
           </a:xfrm>
           <a:prstGeom prst="rect">
@@ -33719,7 +33961,7 @@
         </p:nvSpPr>
         <p:spPr>
           <a:xfrm>
-            <a:off x="8295437" y="4297680"/>
+            <a:off x="8295437" y="4261104"/>
             <a:ext cx="2972714" cy="256032"/>
           </a:xfrm>
           <a:prstGeom prst="rect">
@@ -33755,8 +33997,8 @@
         </p:nvSpPr>
         <p:spPr>
           <a:xfrm>
-            <a:off x="8295437" y="4626864"/>
-            <a:ext cx="2972714" cy="804672"/>
+            <a:off x="8295437" y="4590288"/>
+            <a:ext cx="2972714" cy="932688"/>
           </a:xfrm>
           <a:prstGeom prst="rect">
             <a:avLst/>
@@ -34662,7 +34904,7 @@
         <p:spPr>
           <a:xfrm>
             <a:off x="923544" y="2662047"/>
-            <a:ext cx="2051228" cy="1426845"/>
+            <a:ext cx="2051228" cy="1353693"/>
           </a:xfrm>
           <a:prstGeom prst="rect">
             <a:avLst/>
@@ -34717,8 +34959,8 @@
         </p:nvSpPr>
         <p:spPr>
           <a:xfrm>
-            <a:off x="923544" y="4125468"/>
-            <a:ext cx="2051228" cy="263652"/>
+            <a:off x="923544" y="4052316"/>
+            <a:ext cx="2051228" cy="336804"/>
           </a:xfrm>
           <a:prstGeom prst="rect">
             <a:avLst/>
@@ -34875,7 +35117,7 @@
         <p:spPr>
           <a:xfrm>
             <a:off x="3688004" y="2910078"/>
-            <a:ext cx="2051228" cy="1178814"/>
+            <a:ext cx="2051228" cy="1105662"/>
           </a:xfrm>
           <a:prstGeom prst="rect">
             <a:avLst/>
@@ -34930,8 +35172,8 @@
         </p:nvSpPr>
         <p:spPr>
           <a:xfrm>
-            <a:off x="3688004" y="4125468"/>
-            <a:ext cx="2051228" cy="263652"/>
+            <a:off x="3688004" y="4052316"/>
+            <a:ext cx="2051228" cy="336804"/>
           </a:xfrm>
           <a:prstGeom prst="rect">
             <a:avLst/>
@@ -35088,7 +35330,7 @@
         <p:spPr>
           <a:xfrm>
             <a:off x="6452464" y="2910078"/>
-            <a:ext cx="2051228" cy="1178814"/>
+            <a:ext cx="2051228" cy="1105662"/>
           </a:xfrm>
           <a:prstGeom prst="rect">
             <a:avLst/>
@@ -35143,8 +35385,8 @@
         </p:nvSpPr>
         <p:spPr>
           <a:xfrm>
-            <a:off x="6452464" y="4125468"/>
-            <a:ext cx="2051228" cy="263652"/>
+            <a:off x="6452464" y="4052316"/>
+            <a:ext cx="2051228" cy="336804"/>
           </a:xfrm>
           <a:prstGeom prst="rect">
             <a:avLst/>
@@ -35301,7 +35543,7 @@
         <p:spPr>
           <a:xfrm>
             <a:off x="9216923" y="2910078"/>
-            <a:ext cx="2051228" cy="1178814"/>
+            <a:ext cx="2051228" cy="1105662"/>
           </a:xfrm>
           <a:prstGeom prst="rect">
             <a:avLst/>
@@ -35356,8 +35598,8 @@
         </p:nvSpPr>
         <p:spPr>
           <a:xfrm>
-            <a:off x="9216923" y="4125468"/>
-            <a:ext cx="2051228" cy="263652"/>
+            <a:off x="9216923" y="4052316"/>
+            <a:ext cx="2051228" cy="336804"/>
           </a:xfrm>
           <a:prstGeom prst="rect">
             <a:avLst/>
@@ -35644,7 +35886,7 @@
           <a:ln/>
         </p:spPr>
         <p:txBody>
-          <a:bodyPr wrap="square" lIns="0" tIns="0" rIns="0" bIns="0" rtlCol="0" anchor="ctr"/>
+          <a:bodyPr wrap="square" lIns="0" tIns="0" rIns="0" bIns="0" rtlCol="0" anchor="t"/>
           <a:lstStyle/>
           <a:p>
             <a:pPr indent="0" marL="0">
@@ -35670,8 +35912,8 @@
         </p:nvSpPr>
         <p:spPr>
           <a:xfrm>
-            <a:off x="960120" y="2286000"/>
-            <a:ext cx="2468880" cy="2432304"/>
+            <a:off x="960120" y="2322576"/>
+            <a:ext cx="2468880" cy="2523744"/>
           </a:xfrm>
           <a:prstGeom prst="rect">
             <a:avLst/>
@@ -35803,7 +36045,7 @@
           <a:ln/>
         </p:spPr>
         <p:txBody>
-          <a:bodyPr wrap="square" lIns="0" tIns="0" rIns="0" bIns="0" rtlCol="0" anchor="ctr"/>
+          <a:bodyPr wrap="square" lIns="0" tIns="0" rIns="0" bIns="0" rtlCol="0" anchor="t"/>
           <a:lstStyle/>
           <a:p>
             <a:pPr indent="0" marL="0">
@@ -35829,8 +36071,8 @@
         </p:nvSpPr>
         <p:spPr>
           <a:xfrm>
-            <a:off x="4251960" y="2286000"/>
-            <a:ext cx="2468880" cy="2432304"/>
+            <a:off x="4251960" y="2322576"/>
+            <a:ext cx="2468880" cy="2523744"/>
           </a:xfrm>
           <a:prstGeom prst="rect">
             <a:avLst/>
@@ -37342,10 +37584,12 @@
         <p:spPr>
           <a:xfrm>
             <a:off x="685800" y="3465576"/>
-            <a:ext cx="347472" cy="347472"/>
-          </a:xfrm>
-          <a:prstGeom prst="ellipse">
-            <a:avLst/>
+            <a:ext cx="375453" cy="347472"/>
+          </a:xfrm>
+          <a:prstGeom prst="roundRect">
+            <a:avLst>
+              <a:gd name="adj" fmla="val 50000"/>
+            </a:avLst>
           </a:prstGeom>
           <a:solidFill>
             <a:schemeClr val="accent1"/>
@@ -37362,7 +37606,7 @@
         <p:spPr>
           <a:xfrm>
             <a:off x="685800" y="3465576"/>
-            <a:ext cx="347472" cy="347472"/>
+            <a:ext cx="375453" cy="347472"/>
           </a:xfrm>
           <a:prstGeom prst="rect">
             <a:avLst/>
@@ -37378,14 +37622,14 @@
               <a:buNone/>
             </a:pPr>
             <a:r>
-              <a:rPr lang="en-US" sz="1400" b="1" dirty="0">
+              <a:rPr lang="en-US" sz="1300" b="1" dirty="0">
                 <a:solidFill>
                   <a:schemeClr val="bg1"/>
                 </a:solidFill>
               </a:rPr>
               <a:t>12</a:t>
             </a:r>
-            <a:endParaRPr lang="en-US" sz="1400" dirty="0"/>
+            <a:endParaRPr lang="en-US" sz="1300" dirty="0"/>
           </a:p>
         </p:txBody>
       </p:sp>
@@ -37397,8 +37641,8 @@
         </p:nvSpPr>
         <p:spPr>
           <a:xfrm>
-            <a:off x="1161288" y="3456432"/>
-            <a:ext cx="10344607" cy="365760"/>
+            <a:off x="1189269" y="3456432"/>
+            <a:ext cx="10316627" cy="365760"/>
           </a:xfrm>
           <a:prstGeom prst="rect">
             <a:avLst/>
@@ -37433,12 +37677,12 @@
         </p:nvSpPr>
         <p:spPr>
           <a:xfrm>
-            <a:off x="685800" y="3968496"/>
-            <a:ext cx="2526716" cy="1600200"/>
+            <a:off x="685800" y="3895344"/>
+            <a:ext cx="2526716" cy="1737360"/>
           </a:xfrm>
           <a:prstGeom prst="roundRect">
             <a:avLst>
-              <a:gd name="adj" fmla="val 3429"/>
+              <a:gd name="adj" fmla="val 3158"/>
             </a:avLst>
           </a:prstGeom>
           <a:solidFill>
@@ -37462,7 +37706,7 @@
         </p:nvSpPr>
         <p:spPr>
           <a:xfrm>
-            <a:off x="923544" y="4206240"/>
+            <a:off x="923544" y="4133088"/>
             <a:ext cx="2051228" cy="272034"/>
           </a:xfrm>
           <a:prstGeom prst="rect">
@@ -37498,8 +37742,8 @@
         </p:nvSpPr>
         <p:spPr>
           <a:xfrm>
-            <a:off x="923544" y="4551426"/>
-            <a:ext cx="2051228" cy="779526"/>
+            <a:off x="923544" y="4478274"/>
+            <a:ext cx="2051228" cy="916686"/>
           </a:xfrm>
           <a:prstGeom prst="rect">
             <a:avLst/>
@@ -37554,12 +37798,12 @@
         </p:nvSpPr>
         <p:spPr>
           <a:xfrm>
-            <a:off x="3450260" y="3968496"/>
-            <a:ext cx="2526716" cy="1600200"/>
+            <a:off x="3450260" y="3895344"/>
+            <a:ext cx="2526716" cy="1737360"/>
           </a:xfrm>
           <a:prstGeom prst="roundRect">
             <a:avLst>
-              <a:gd name="adj" fmla="val 3429"/>
+              <a:gd name="adj" fmla="val 3158"/>
             </a:avLst>
           </a:prstGeom>
           <a:solidFill>
@@ -37583,7 +37827,7 @@
         </p:nvSpPr>
         <p:spPr>
           <a:xfrm>
-            <a:off x="3688004" y="4206240"/>
+            <a:off x="3688004" y="4133088"/>
             <a:ext cx="2051228" cy="272034"/>
           </a:xfrm>
           <a:prstGeom prst="rect">
@@ -37619,8 +37863,8 @@
         </p:nvSpPr>
         <p:spPr>
           <a:xfrm>
-            <a:off x="3688004" y="4551426"/>
-            <a:ext cx="2051228" cy="779526"/>
+            <a:off x="3688004" y="4478274"/>
+            <a:ext cx="2051228" cy="916686"/>
           </a:xfrm>
           <a:prstGeom prst="rect">
             <a:avLst/>
@@ -37692,12 +37936,12 @@
         </p:nvSpPr>
         <p:spPr>
           <a:xfrm>
-            <a:off x="6214720" y="3968496"/>
-            <a:ext cx="2526716" cy="1600200"/>
+            <a:off x="6214720" y="3895344"/>
+            <a:ext cx="2526716" cy="1737360"/>
           </a:xfrm>
           <a:prstGeom prst="roundRect">
             <a:avLst>
-              <a:gd name="adj" fmla="val 3429"/>
+              <a:gd name="adj" fmla="val 3158"/>
             </a:avLst>
           </a:prstGeom>
           <a:solidFill>
@@ -37721,7 +37965,7 @@
         </p:nvSpPr>
         <p:spPr>
           <a:xfrm>
-            <a:off x="6452464" y="4206240"/>
+            <a:off x="6452464" y="4133088"/>
             <a:ext cx="2051228" cy="272034"/>
           </a:xfrm>
           <a:prstGeom prst="rect">
@@ -37757,8 +38001,8 @@
         </p:nvSpPr>
         <p:spPr>
           <a:xfrm>
-            <a:off x="6452464" y="4551426"/>
-            <a:ext cx="2051228" cy="779526"/>
+            <a:off x="6452464" y="4478274"/>
+            <a:ext cx="2051228" cy="916686"/>
           </a:xfrm>
           <a:prstGeom prst="rect">
             <a:avLst/>
@@ -37830,12 +38074,12 @@
         </p:nvSpPr>
         <p:spPr>
           <a:xfrm>
-            <a:off x="8979179" y="3968496"/>
-            <a:ext cx="2526716" cy="1600200"/>
+            <a:off x="8979179" y="3895344"/>
+            <a:ext cx="2526716" cy="1737360"/>
           </a:xfrm>
           <a:prstGeom prst="roundRect">
             <a:avLst>
-              <a:gd name="adj" fmla="val 3429"/>
+              <a:gd name="adj" fmla="val 3158"/>
             </a:avLst>
           </a:prstGeom>
           <a:solidFill>
@@ -37859,7 +38103,7 @@
         </p:nvSpPr>
         <p:spPr>
           <a:xfrm>
-            <a:off x="9216923" y="4206240"/>
+            <a:off x="9216923" y="4133088"/>
             <a:ext cx="2051228" cy="272034"/>
           </a:xfrm>
           <a:prstGeom prst="rect">
@@ -37895,8 +38139,8 @@
         </p:nvSpPr>
         <p:spPr>
           <a:xfrm>
-            <a:off x="9216923" y="4551426"/>
-            <a:ext cx="2051228" cy="779526"/>
+            <a:off x="9216923" y="4478274"/>
+            <a:ext cx="2051228" cy="916686"/>
           </a:xfrm>
           <a:prstGeom prst="rect">
             <a:avLst/>
@@ -37951,12 +38195,12 @@
         </p:nvSpPr>
         <p:spPr>
           <a:xfrm>
-            <a:off x="685800" y="5669280"/>
-            <a:ext cx="10820095" cy="548640"/>
+            <a:off x="685800" y="5724144"/>
+            <a:ext cx="10820095" cy="512064"/>
           </a:xfrm>
           <a:prstGeom prst="roundRect">
             <a:avLst>
-              <a:gd name="adj" fmla="val 16667"/>
+              <a:gd name="adj" fmla="val 17857"/>
             </a:avLst>
           </a:prstGeom>
           <a:solidFill>
@@ -37973,8 +38217,8 @@
         </p:nvSpPr>
         <p:spPr>
           <a:xfrm>
-            <a:off x="960120" y="5669280"/>
-            <a:ext cx="10271455" cy="548640"/>
+            <a:off x="960120" y="5724144"/>
+            <a:ext cx="10271455" cy="512064"/>
           </a:xfrm>
           <a:prstGeom prst="rect">
             <a:avLst/>
@@ -38186,12 +38430,12 @@
         </p:nvSpPr>
         <p:spPr>
           <a:xfrm>
-            <a:off x="685800" y="1572768"/>
-            <a:ext cx="2526716" cy="2468880"/>
+            <a:off x="685800" y="1554480"/>
+            <a:ext cx="2526716" cy="2743200"/>
           </a:xfrm>
           <a:prstGeom prst="roundRect">
             <a:avLst>
-              <a:gd name="adj" fmla="val 2222"/>
+              <a:gd name="adj" fmla="val 2171"/>
             </a:avLst>
           </a:prstGeom>
           <a:solidFill>
@@ -38215,7 +38459,7 @@
         </p:nvSpPr>
         <p:spPr>
           <a:xfrm>
-            <a:off x="923544" y="1810512"/>
+            <a:off x="923544" y="1792224"/>
             <a:ext cx="402336" cy="402336"/>
           </a:xfrm>
           <a:prstGeom prst="ellipse">
@@ -38235,7 +38479,7 @@
         </p:nvSpPr>
         <p:spPr>
           <a:xfrm>
-            <a:off x="923544" y="1810512"/>
+            <a:off x="923544" y="1792224"/>
             <a:ext cx="402336" cy="402336"/>
           </a:xfrm>
           <a:prstGeom prst="rect">
@@ -38271,7 +38515,7 @@
         </p:nvSpPr>
         <p:spPr>
           <a:xfrm>
-            <a:off x="923544" y="2340864"/>
+            <a:off x="923544" y="2322576"/>
             <a:ext cx="2051228" cy="256032"/>
           </a:xfrm>
           <a:prstGeom prst="rect">
@@ -38307,8 +38551,8 @@
         </p:nvSpPr>
         <p:spPr>
           <a:xfrm>
-            <a:off x="923544" y="2670048"/>
-            <a:ext cx="2051228" cy="870204"/>
+            <a:off x="923544" y="2651760"/>
+            <a:ext cx="2051228" cy="1071372"/>
           </a:xfrm>
           <a:prstGeom prst="rect">
             <a:avLst/>
@@ -38363,8 +38607,8 @@
         </p:nvSpPr>
         <p:spPr>
           <a:xfrm>
-            <a:off x="923544" y="3576828"/>
-            <a:ext cx="2051228" cy="263652"/>
+            <a:off x="923544" y="3759708"/>
+            <a:ext cx="2051228" cy="336804"/>
           </a:xfrm>
           <a:prstGeom prst="rect">
             <a:avLst/>
@@ -38399,12 +38643,12 @@
         </p:nvSpPr>
         <p:spPr>
           <a:xfrm>
-            <a:off x="3450260" y="1572768"/>
-            <a:ext cx="2526716" cy="2468880"/>
+            <a:off x="3450260" y="1554480"/>
+            <a:ext cx="2526716" cy="2743200"/>
           </a:xfrm>
           <a:prstGeom prst="roundRect">
             <a:avLst>
-              <a:gd name="adj" fmla="val 2222"/>
+              <a:gd name="adj" fmla="val 2171"/>
             </a:avLst>
           </a:prstGeom>
           <a:solidFill>
@@ -38428,7 +38672,7 @@
         </p:nvSpPr>
         <p:spPr>
           <a:xfrm>
-            <a:off x="3688004" y="1810512"/>
+            <a:off x="3688004" y="1792224"/>
             <a:ext cx="402336" cy="402336"/>
           </a:xfrm>
           <a:prstGeom prst="ellipse">
@@ -38448,7 +38692,7 @@
         </p:nvSpPr>
         <p:spPr>
           <a:xfrm>
-            <a:off x="3688004" y="1810512"/>
+            <a:off x="3688004" y="1792224"/>
             <a:ext cx="402336" cy="402336"/>
           </a:xfrm>
           <a:prstGeom prst="rect">
@@ -38484,7 +38728,7 @@
         </p:nvSpPr>
         <p:spPr>
           <a:xfrm>
-            <a:off x="3688004" y="2340864"/>
+            <a:off x="3688004" y="2322576"/>
             <a:ext cx="2051228" cy="256032"/>
           </a:xfrm>
           <a:prstGeom prst="rect">
@@ -38520,8 +38764,8 @@
         </p:nvSpPr>
         <p:spPr>
           <a:xfrm>
-            <a:off x="3688004" y="2670048"/>
-            <a:ext cx="2051228" cy="870204"/>
+            <a:off x="3688004" y="2651760"/>
+            <a:ext cx="2051228" cy="1071372"/>
           </a:xfrm>
           <a:prstGeom prst="rect">
             <a:avLst/>
@@ -38576,8 +38820,8 @@
         </p:nvSpPr>
         <p:spPr>
           <a:xfrm>
-            <a:off x="3688004" y="3576828"/>
-            <a:ext cx="2051228" cy="263652"/>
+            <a:off x="3688004" y="3759708"/>
+            <a:ext cx="2051228" cy="336804"/>
           </a:xfrm>
           <a:prstGeom prst="rect">
             <a:avLst/>
@@ -38612,12 +38856,12 @@
         </p:nvSpPr>
         <p:spPr>
           <a:xfrm>
-            <a:off x="6214720" y="1572768"/>
-            <a:ext cx="2526716" cy="2468880"/>
+            <a:off x="6214720" y="1554480"/>
+            <a:ext cx="2526716" cy="2743200"/>
           </a:xfrm>
           <a:prstGeom prst="roundRect">
             <a:avLst>
-              <a:gd name="adj" fmla="val 2222"/>
+              <a:gd name="adj" fmla="val 2171"/>
             </a:avLst>
           </a:prstGeom>
           <a:solidFill>
@@ -38641,7 +38885,7 @@
         </p:nvSpPr>
         <p:spPr>
           <a:xfrm>
-            <a:off x="6452464" y="1810512"/>
+            <a:off x="6452464" y="1792224"/>
             <a:ext cx="402336" cy="402336"/>
           </a:xfrm>
           <a:prstGeom prst="ellipse">
@@ -38661,7 +38905,7 @@
         </p:nvSpPr>
         <p:spPr>
           <a:xfrm>
-            <a:off x="6452464" y="1810512"/>
+            <a:off x="6452464" y="1792224"/>
             <a:ext cx="402336" cy="402336"/>
           </a:xfrm>
           <a:prstGeom prst="rect">
@@ -38697,7 +38941,7 @@
         </p:nvSpPr>
         <p:spPr>
           <a:xfrm>
-            <a:off x="6452464" y="2340864"/>
+            <a:off x="6452464" y="2322576"/>
             <a:ext cx="2051228" cy="256032"/>
           </a:xfrm>
           <a:prstGeom prst="rect">
@@ -38733,8 +38977,8 @@
         </p:nvSpPr>
         <p:spPr>
           <a:xfrm>
-            <a:off x="6452464" y="2670048"/>
-            <a:ext cx="2051228" cy="870204"/>
+            <a:off x="6452464" y="2651760"/>
+            <a:ext cx="2051228" cy="1071372"/>
           </a:xfrm>
           <a:prstGeom prst="rect">
             <a:avLst/>
@@ -38789,8 +39033,8 @@
         </p:nvSpPr>
         <p:spPr>
           <a:xfrm>
-            <a:off x="6452464" y="3576828"/>
-            <a:ext cx="2051228" cy="263652"/>
+            <a:off x="6452464" y="3759708"/>
+            <a:ext cx="2051228" cy="336804"/>
           </a:xfrm>
           <a:prstGeom prst="rect">
             <a:avLst/>
@@ -38825,12 +39069,12 @@
         </p:nvSpPr>
         <p:spPr>
           <a:xfrm>
-            <a:off x="8979179" y="1572768"/>
-            <a:ext cx="2526716" cy="2468880"/>
+            <a:off x="8979179" y="1554480"/>
+            <a:ext cx="2526716" cy="2743200"/>
           </a:xfrm>
           <a:prstGeom prst="roundRect">
             <a:avLst>
-              <a:gd name="adj" fmla="val 2222"/>
+              <a:gd name="adj" fmla="val 2171"/>
             </a:avLst>
           </a:prstGeom>
           <a:solidFill>
@@ -38854,7 +39098,7 @@
         </p:nvSpPr>
         <p:spPr>
           <a:xfrm>
-            <a:off x="9216923" y="1810512"/>
+            <a:off x="9216923" y="1792224"/>
             <a:ext cx="402336" cy="402336"/>
           </a:xfrm>
           <a:prstGeom prst="ellipse">
@@ -38874,7 +39118,7 @@
         </p:nvSpPr>
         <p:spPr>
           <a:xfrm>
-            <a:off x="9216923" y="1810512"/>
+            <a:off x="9216923" y="1792224"/>
             <a:ext cx="402336" cy="402336"/>
           </a:xfrm>
           <a:prstGeom prst="rect">
@@ -38910,8 +39154,8 @@
         </p:nvSpPr>
         <p:spPr>
           <a:xfrm>
-            <a:off x="9216923" y="2340864"/>
-            <a:ext cx="2051228" cy="256032"/>
+            <a:off x="9216923" y="2322576"/>
+            <a:ext cx="2051228" cy="512064"/>
           </a:xfrm>
           <a:prstGeom prst="rect">
             <a:avLst/>
@@ -38946,8 +39190,8 @@
         </p:nvSpPr>
         <p:spPr>
           <a:xfrm>
-            <a:off x="9216923" y="2670048"/>
-            <a:ext cx="2051228" cy="870204"/>
+            <a:off x="9216923" y="2907792"/>
+            <a:ext cx="2051228" cy="815340"/>
           </a:xfrm>
           <a:prstGeom prst="rect">
             <a:avLst/>
@@ -39002,8 +39246,8 @@
         </p:nvSpPr>
         <p:spPr>
           <a:xfrm>
-            <a:off x="9216923" y="3576828"/>
-            <a:ext cx="2051228" cy="263652"/>
+            <a:off x="9216923" y="3759708"/>
+            <a:ext cx="2051228" cy="336804"/>
           </a:xfrm>
           <a:prstGeom prst="rect">
             <a:avLst/>
@@ -39038,11 +39282,13 @@
         </p:nvSpPr>
         <p:spPr>
           <a:xfrm>
-            <a:off x="685800" y="4233672"/>
-            <a:ext cx="347472" cy="347472"/>
-          </a:xfrm>
-          <a:prstGeom prst="ellipse">
-            <a:avLst/>
+            <a:off x="685800" y="4471416"/>
+            <a:ext cx="375453" cy="347472"/>
+          </a:xfrm>
+          <a:prstGeom prst="roundRect">
+            <a:avLst>
+              <a:gd name="adj" fmla="val 50000"/>
+            </a:avLst>
           </a:prstGeom>
           <a:solidFill>
             <a:schemeClr val="accent1"/>
@@ -39058,8 +39304,8 @@
         </p:nvSpPr>
         <p:spPr>
           <a:xfrm>
-            <a:off x="685800" y="4233672"/>
-            <a:ext cx="347472" cy="347472"/>
+            <a:off x="685800" y="4471416"/>
+            <a:ext cx="375453" cy="347472"/>
           </a:xfrm>
           <a:prstGeom prst="rect">
             <a:avLst/>
@@ -39075,14 +39321,14 @@
               <a:buNone/>
             </a:pPr>
             <a:r>
-              <a:rPr lang="en-US" sz="1400" b="1" dirty="0">
+              <a:rPr lang="en-US" sz="1300" b="1" dirty="0">
                 <a:solidFill>
                   <a:schemeClr val="bg1"/>
                 </a:solidFill>
               </a:rPr>
               <a:t>17</a:t>
             </a:r>
-            <a:endParaRPr lang="en-US" sz="1400" dirty="0"/>
+            <a:endParaRPr lang="en-US" sz="1300" dirty="0"/>
           </a:p>
         </p:txBody>
       </p:sp>
@@ -39094,8 +39340,8 @@
         </p:nvSpPr>
         <p:spPr>
           <a:xfrm>
-            <a:off x="1161288" y="4224528"/>
-            <a:ext cx="10344607" cy="365760"/>
+            <a:off x="1189269" y="4462272"/>
+            <a:ext cx="10316627" cy="365760"/>
           </a:xfrm>
           <a:prstGeom prst="rect">
             <a:avLst/>
@@ -39130,8 +39376,8 @@
         </p:nvSpPr>
         <p:spPr>
           <a:xfrm>
-            <a:off x="685800" y="4754880"/>
-            <a:ext cx="10820095" cy="1325880"/>
+            <a:off x="685800" y="4974336"/>
+            <a:ext cx="10820095" cy="1280160"/>
           </a:xfrm>
           <a:prstGeom prst="rect">
             <a:avLst/>
@@ -39151,31 +39397,31 @@
               <a:buChar char="•"/>
             </a:pPr>
             <a:r>
-              <a:rPr lang="en-US" sz="1600" b="1" dirty="0">
+              <a:rPr lang="en-US" sz="1500" b="1" dirty="0">
                 <a:solidFill>
                   <a:schemeClr val="tx1"/>
                 </a:solidFill>
               </a:rPr>
               <a:t>그 증언이 ‘진실’이라는 것</a:t>
             </a:r>
-            <a:endParaRPr lang="en-US" sz="1600" dirty="0"/>
+            <a:endParaRPr lang="en-US" sz="1500" dirty="0"/>
           </a:p>
           <a:p>
             <a:pPr lvl="1" indent="0" marL="0">
               <a:spcAft>
-                <a:spcPts val="1000"/>
+                <a:spcPts val="900"/>
               </a:spcAft>
               <a:buNone/>
             </a:pPr>
             <a:r>
-              <a:rPr lang="en-US" sz="1400" dirty="0">
+              <a:rPr lang="en-US" sz="1300" dirty="0">
                 <a:solidFill>
                   <a:schemeClr val="accent3"/>
                 </a:solidFill>
               </a:rPr>
               <a:t>요한은 자신이 목격한 것을 전했고 기록했으며, 그것 때문에 해받는 것을 기꺼이 감수했다</a:t>
             </a:r>
-            <a:endParaRPr lang="en-US" sz="1600" dirty="0"/>
+            <a:endParaRPr lang="en-US" sz="1500" dirty="0"/>
           </a:p>
           <a:p>
             <a:pPr marL="342900" indent="-342900">
@@ -39186,31 +39432,31 @@
               <a:buChar char="•"/>
             </a:pPr>
             <a:r>
-              <a:rPr lang="en-US" sz="1600" b="1" dirty="0">
+              <a:rPr lang="en-US" sz="1500" b="1" dirty="0">
                 <a:solidFill>
                   <a:schemeClr val="tx1"/>
                 </a:solidFill>
               </a:rPr>
               <a:t>거짓을 위해 목숨을 걸 사람은 없다</a:t>
             </a:r>
-            <a:endParaRPr lang="en-US" sz="1600" dirty="0"/>
+            <a:endParaRPr lang="en-US" sz="1500" dirty="0"/>
           </a:p>
           <a:p>
             <a:pPr lvl="1" indent="0" marL="0">
               <a:spcAft>
-                <a:spcPts val="1000"/>
+                <a:spcPts val="900"/>
               </a:spcAft>
               <a:buNone/>
             </a:pPr>
             <a:r>
-              <a:rPr lang="en-US" sz="1400" dirty="0">
+              <a:rPr lang="en-US" sz="1300" dirty="0">
                 <a:solidFill>
                   <a:schemeClr val="accent3"/>
                 </a:solidFill>
               </a:rPr>
               <a:t>핍박을 감수한 증언은, 그가 전하고 기록한 것이 진실임을 보여주는 객관적인 증거다</a:t>
             </a:r>
-            <a:endParaRPr lang="en-US" sz="1600" dirty="0"/>
+            <a:endParaRPr lang="en-US" sz="1500" dirty="0"/>
           </a:p>
         </p:txBody>
       </p:sp>
@@ -40056,10 +40302,12 @@
         <p:spPr>
           <a:xfrm>
             <a:off x="685800" y="3429000"/>
-            <a:ext cx="347472" cy="347472"/>
-          </a:xfrm>
-          <a:prstGeom prst="ellipse">
-            <a:avLst/>
+            <a:ext cx="361188" cy="347472"/>
+          </a:xfrm>
+          <a:prstGeom prst="roundRect">
+            <a:avLst>
+              <a:gd name="adj" fmla="val 50000"/>
+            </a:avLst>
           </a:prstGeom>
           <a:solidFill>
             <a:schemeClr val="accent1"/>
@@ -40076,7 +40324,7 @@
         <p:spPr>
           <a:xfrm>
             <a:off x="685800" y="3429000"/>
-            <a:ext cx="347472" cy="347472"/>
+            <a:ext cx="361188" cy="347472"/>
           </a:xfrm>
           <a:prstGeom prst="rect">
             <a:avLst/>
@@ -40092,14 +40340,14 @@
               <a:buNone/>
             </a:pPr>
             <a:r>
-              <a:rPr lang="en-US" sz="1400" b="1" dirty="0">
+              <a:rPr lang="en-US" sz="1300" b="1" dirty="0">
                 <a:solidFill>
                   <a:schemeClr val="bg1"/>
                 </a:solidFill>
               </a:rPr>
               <a:t>뜻</a:t>
             </a:r>
-            <a:endParaRPr lang="en-US" sz="1400" dirty="0"/>
+            <a:endParaRPr lang="en-US" sz="1300" dirty="0"/>
           </a:p>
         </p:txBody>
       </p:sp>
@@ -40111,8 +40359,8 @@
         </p:nvSpPr>
         <p:spPr>
           <a:xfrm>
-            <a:off x="1161288" y="3419856"/>
-            <a:ext cx="10344607" cy="365760"/>
+            <a:off x="1175004" y="3419856"/>
+            <a:ext cx="10330891" cy="365760"/>
           </a:xfrm>
           <a:prstGeom prst="rect">
             <a:avLst/>
@@ -40147,12 +40395,12 @@
         </p:nvSpPr>
         <p:spPr>
           <a:xfrm>
-            <a:off x="685800" y="3858768"/>
-            <a:ext cx="3448202" cy="2011680"/>
+            <a:off x="685800" y="3822192"/>
+            <a:ext cx="3448202" cy="1920240"/>
           </a:xfrm>
           <a:prstGeom prst="roundRect">
             <a:avLst>
-              <a:gd name="adj" fmla="val 2727"/>
+              <a:gd name="adj" fmla="val 2857"/>
             </a:avLst>
           </a:prstGeom>
           <a:solidFill>
@@ -40176,7 +40424,7 @@
         </p:nvSpPr>
         <p:spPr>
           <a:xfrm>
-            <a:off x="923544" y="4096512"/>
+            <a:off x="923544" y="4059936"/>
             <a:ext cx="402336" cy="402336"/>
           </a:xfrm>
           <a:prstGeom prst="ellipse">
@@ -40196,7 +40444,7 @@
         </p:nvSpPr>
         <p:spPr>
           <a:xfrm>
-            <a:off x="923544" y="4096512"/>
+            <a:off x="923544" y="4059936"/>
             <a:ext cx="402336" cy="402336"/>
           </a:xfrm>
           <a:prstGeom prst="rect">
@@ -40232,7 +40480,7 @@
         </p:nvSpPr>
         <p:spPr>
           <a:xfrm>
-            <a:off x="923544" y="4626864"/>
+            <a:off x="923544" y="4590288"/>
             <a:ext cx="2972714" cy="272034"/>
           </a:xfrm>
           <a:prstGeom prst="rect">
@@ -40268,8 +40516,8 @@
         </p:nvSpPr>
         <p:spPr>
           <a:xfrm>
-            <a:off x="923544" y="4972050"/>
-            <a:ext cx="2972714" cy="660654"/>
+            <a:off x="923544" y="4935474"/>
+            <a:ext cx="2972714" cy="569214"/>
           </a:xfrm>
           <a:prstGeom prst="rect">
             <a:avLst/>
@@ -40293,7 +40541,7 @@
                   <a:schemeClr val="accent3"/>
                 </a:solidFill>
               </a:rPr>
-              <a:t>하나님과 동일한 본성을 지니셨다는 뜻</a:t>
+              <a:t>하나님과 동일한 본성을 지니심</a:t>
             </a:r>
             <a:endParaRPr lang="en-US" sz="1400" dirty="0"/>
           </a:p>
@@ -40310,7 +40558,7 @@
                   <a:schemeClr val="accent3"/>
                 </a:solidFill>
               </a:rPr>
-              <a:t>피조물이 아니라 하나님 자신이시다</a:t>
+              <a:t>피조물이 아니라 하나님 자신</a:t>
             </a:r>
             <a:endParaRPr lang="en-US" sz="1400" dirty="0"/>
           </a:p>
@@ -40324,12 +40572,12 @@
         </p:nvSpPr>
         <p:spPr>
           <a:xfrm>
-            <a:off x="4371746" y="3858768"/>
-            <a:ext cx="3448202" cy="2011680"/>
+            <a:off x="4371746" y="3822192"/>
+            <a:ext cx="3448202" cy="1920240"/>
           </a:xfrm>
           <a:prstGeom prst="roundRect">
             <a:avLst>
-              <a:gd name="adj" fmla="val 2727"/>
+              <a:gd name="adj" fmla="val 2857"/>
             </a:avLst>
           </a:prstGeom>
           <a:solidFill>
@@ -40353,7 +40601,7 @@
         </p:nvSpPr>
         <p:spPr>
           <a:xfrm>
-            <a:off x="4609490" y="4096512"/>
+            <a:off x="4609490" y="4059936"/>
             <a:ext cx="402336" cy="402336"/>
           </a:xfrm>
           <a:prstGeom prst="ellipse">
@@ -40373,7 +40621,7 @@
         </p:nvSpPr>
         <p:spPr>
           <a:xfrm>
-            <a:off x="4609490" y="4096512"/>
+            <a:off x="4609490" y="4059936"/>
             <a:ext cx="402336" cy="402336"/>
           </a:xfrm>
           <a:prstGeom prst="rect">
@@ -40409,7 +40657,7 @@
         </p:nvSpPr>
         <p:spPr>
           <a:xfrm>
-            <a:off x="4609490" y="4626864"/>
+            <a:off x="4609490" y="4590288"/>
             <a:ext cx="2972714" cy="272034"/>
           </a:xfrm>
           <a:prstGeom prst="rect">
@@ -40445,8 +40693,8 @@
         </p:nvSpPr>
         <p:spPr>
           <a:xfrm>
-            <a:off x="4609490" y="4972050"/>
-            <a:ext cx="2972714" cy="660654"/>
+            <a:off x="4609490" y="4935474"/>
+            <a:ext cx="2972714" cy="569214"/>
           </a:xfrm>
           <a:prstGeom prst="rect">
             <a:avLst/>
@@ -40487,7 +40735,7 @@
                   <a:schemeClr val="accent3"/>
                 </a:solidFill>
               </a:rPr>
-              <a:t>왕 · 제사장 · 선지자로 세우심을 받은 분</a:t>
+              <a:t>왕 · 제사장 · 선지자로 세우신 분</a:t>
             </a:r>
             <a:endParaRPr lang="en-US" sz="1400" dirty="0"/>
           </a:p>
@@ -40501,12 +40749,12 @@
         </p:nvSpPr>
         <p:spPr>
           <a:xfrm>
-            <a:off x="8057693" y="3858768"/>
-            <a:ext cx="3448202" cy="2011680"/>
+            <a:off x="8057693" y="3822192"/>
+            <a:ext cx="3448202" cy="1920240"/>
           </a:xfrm>
           <a:prstGeom prst="roundRect">
             <a:avLst>
-              <a:gd name="adj" fmla="val 2727"/>
+              <a:gd name="adj" fmla="val 2857"/>
             </a:avLst>
           </a:prstGeom>
           <a:solidFill>
@@ -40530,7 +40778,7 @@
         </p:nvSpPr>
         <p:spPr>
           <a:xfrm>
-            <a:off x="8295437" y="4096512"/>
+            <a:off x="8295437" y="4059936"/>
             <a:ext cx="402336" cy="402336"/>
           </a:xfrm>
           <a:prstGeom prst="ellipse">
@@ -40550,7 +40798,7 @@
         </p:nvSpPr>
         <p:spPr>
           <a:xfrm>
-            <a:off x="8295437" y="4096512"/>
+            <a:off x="8295437" y="4059936"/>
             <a:ext cx="402336" cy="402336"/>
           </a:xfrm>
           <a:prstGeom prst="rect">
@@ -40586,7 +40834,7 @@
         </p:nvSpPr>
         <p:spPr>
           <a:xfrm>
-            <a:off x="8295437" y="4626864"/>
+            <a:off x="8295437" y="4590288"/>
             <a:ext cx="2972714" cy="272034"/>
           </a:xfrm>
           <a:prstGeom prst="rect">
@@ -40622,8 +40870,8 @@
         </p:nvSpPr>
         <p:spPr>
           <a:xfrm>
-            <a:off x="8295437" y="4972050"/>
-            <a:ext cx="2972714" cy="660654"/>
+            <a:off x="8295437" y="4935474"/>
+            <a:ext cx="2972714" cy="569214"/>
           </a:xfrm>
           <a:prstGeom prst="rect">
             <a:avLst/>
@@ -40664,7 +40912,7 @@
                   <a:schemeClr val="accent3"/>
                 </a:solidFill>
               </a:rPr>
-              <a:t>→ 죄 사함 · 구원 · 하나님의 자녀가 됨</a:t>
+              <a:t>→ 죄 사함 · 구원 · 하나님의 자녀</a:t>
             </a:r>
             <a:endParaRPr lang="en-US" sz="1400" dirty="0"/>
           </a:p>
@@ -40678,7 +40926,7 @@
         </p:nvSpPr>
         <p:spPr>
           <a:xfrm>
-            <a:off x="685800" y="5943600"/>
+            <a:off x="685800" y="5852160"/>
             <a:ext cx="10820095" cy="347472"/>
           </a:xfrm>
           <a:prstGeom prst="rect">
@@ -44123,10 +44371,12 @@
         <p:spPr>
           <a:xfrm>
             <a:off x="685800" y="3392424"/>
-            <a:ext cx="347472" cy="347472"/>
-          </a:xfrm>
-          <a:prstGeom prst="ellipse">
-            <a:avLst/>
+            <a:ext cx="375453" cy="347472"/>
+          </a:xfrm>
+          <a:prstGeom prst="roundRect">
+            <a:avLst>
+              <a:gd name="adj" fmla="val 50000"/>
+            </a:avLst>
           </a:prstGeom>
           <a:solidFill>
             <a:schemeClr val="accent1"/>
@@ -44143,7 +44393,7 @@
         <p:spPr>
           <a:xfrm>
             <a:off x="685800" y="3392424"/>
-            <a:ext cx="347472" cy="347472"/>
+            <a:ext cx="375453" cy="347472"/>
           </a:xfrm>
           <a:prstGeom prst="rect">
             <a:avLst/>
@@ -44159,14 +44409,14 @@
               <a:buNone/>
             </a:pPr>
             <a:r>
-              <a:rPr lang="en-US" sz="1400" b="1" dirty="0">
+              <a:rPr lang="en-US" sz="1300" b="1" dirty="0">
                 <a:solidFill>
                   <a:schemeClr val="bg1"/>
                 </a:solidFill>
               </a:rPr>
               <a:t>23</a:t>
             </a:r>
-            <a:endParaRPr lang="en-US" sz="1400" dirty="0"/>
+            <a:endParaRPr lang="en-US" sz="1300" dirty="0"/>
           </a:p>
         </p:txBody>
       </p:sp>
@@ -44178,8 +44428,8 @@
         </p:nvSpPr>
         <p:spPr>
           <a:xfrm>
-            <a:off x="1161288" y="3383280"/>
-            <a:ext cx="10344607" cy="365760"/>
+            <a:off x="1189269" y="3383280"/>
+            <a:ext cx="10316627" cy="365760"/>
           </a:xfrm>
           <a:prstGeom prst="rect">
             <a:avLst/>
@@ -44214,12 +44464,12 @@
         </p:nvSpPr>
         <p:spPr>
           <a:xfrm>
-            <a:off x="685800" y="3822192"/>
-            <a:ext cx="3448202" cy="1737360"/>
+            <a:off x="685800" y="3785616"/>
+            <a:ext cx="3448202" cy="1938528"/>
           </a:xfrm>
           <a:prstGeom prst="roundRect">
             <a:avLst>
-              <a:gd name="adj" fmla="val 3158"/>
+              <a:gd name="adj" fmla="val 2830"/>
             </a:avLst>
           </a:prstGeom>
           <a:solidFill>
@@ -44243,8 +44493,8 @@
         </p:nvSpPr>
         <p:spPr>
           <a:xfrm>
-            <a:off x="923544" y="4059936"/>
-            <a:ext cx="2972714" cy="256032"/>
+            <a:off x="923544" y="4023360"/>
+            <a:ext cx="2972714" cy="240030"/>
           </a:xfrm>
           <a:prstGeom prst="rect">
             <a:avLst/>
@@ -44260,14 +44510,14 @@
               <a:buNone/>
             </a:pPr>
             <a:r>
-              <a:rPr lang="en-US" sz="1600" b="1" dirty="0">
+              <a:rPr lang="en-US" sz="1500" b="1" dirty="0">
                 <a:solidFill>
                   <a:schemeClr val="tx1"/>
                 </a:solidFill>
               </a:rPr>
               <a:t>하나님을 알려주시기 때문</a:t>
             </a:r>
-            <a:endParaRPr lang="en-US" sz="1600" dirty="0"/>
+            <a:endParaRPr lang="en-US" sz="1500" dirty="0"/>
           </a:p>
         </p:txBody>
       </p:sp>
@@ -44279,8 +44529,8 @@
         </p:nvSpPr>
         <p:spPr>
           <a:xfrm>
-            <a:off x="923544" y="4389120"/>
-            <a:ext cx="2972714" cy="932688"/>
+            <a:off x="923544" y="4336542"/>
+            <a:ext cx="2972714" cy="1149858"/>
           </a:xfrm>
           <a:prstGeom prst="rect">
             <a:avLst/>
@@ -44352,12 +44602,12 @@
         </p:nvSpPr>
         <p:spPr>
           <a:xfrm>
-            <a:off x="4371746" y="3822192"/>
-            <a:ext cx="3448202" cy="1737360"/>
+            <a:off x="4371746" y="3785616"/>
+            <a:ext cx="3448202" cy="1938528"/>
           </a:xfrm>
           <a:prstGeom prst="roundRect">
             <a:avLst>
-              <a:gd name="adj" fmla="val 3158"/>
+              <a:gd name="adj" fmla="val 2830"/>
             </a:avLst>
           </a:prstGeom>
           <a:solidFill>
@@ -44381,8 +44631,8 @@
         </p:nvSpPr>
         <p:spPr>
           <a:xfrm>
-            <a:off x="4609490" y="4059936"/>
-            <a:ext cx="2972714" cy="256032"/>
+            <a:off x="4609490" y="4023360"/>
+            <a:ext cx="2972714" cy="240030"/>
           </a:xfrm>
           <a:prstGeom prst="rect">
             <a:avLst/>
@@ -44398,14 +44648,14 @@
               <a:buNone/>
             </a:pPr>
             <a:r>
-              <a:rPr lang="en-US" sz="1600" b="1" dirty="0">
+              <a:rPr lang="en-US" sz="1500" b="1" dirty="0">
                 <a:solidFill>
                   <a:schemeClr val="tx1"/>
                 </a:solidFill>
               </a:rPr>
               <a:t>하나님이 먼저 행동하셨기 때문</a:t>
             </a:r>
-            <a:endParaRPr lang="en-US" sz="1600" dirty="0"/>
+            <a:endParaRPr lang="en-US" sz="1500" dirty="0"/>
           </a:p>
         </p:txBody>
       </p:sp>
@@ -44417,8 +44667,8 @@
         </p:nvSpPr>
         <p:spPr>
           <a:xfrm>
-            <a:off x="4609490" y="4389120"/>
-            <a:ext cx="2972714" cy="932688"/>
+            <a:off x="4609490" y="4336542"/>
+            <a:ext cx="2972714" cy="1149858"/>
           </a:xfrm>
           <a:prstGeom prst="rect">
             <a:avLst/>
@@ -44442,7 +44692,7 @@
                   <a:schemeClr val="accent3"/>
                 </a:solidFill>
               </a:rPr>
-              <a:t>우리 편에서 하나님을 만나는 것은 불가능하다.</a:t>
+              <a:t>우리 편에서 하나님을 만날 수 없다.</a:t>
             </a:r>
             <a:endParaRPr lang="en-US" sz="1350" dirty="0"/>
           </a:p>
@@ -44459,7 +44709,7 @@
                   <a:schemeClr val="accent3"/>
                 </a:solidFill>
               </a:rPr>
-              <a:t>그래서 하나님께서 먼저 말씀을 주셨다.</a:t>
+              <a:t>그래서 하나님이 먼저 말씀을 주셨다.</a:t>
             </a:r>
             <a:endParaRPr lang="en-US" sz="1350" dirty="0"/>
           </a:p>
@@ -44473,12 +44723,12 @@
         </p:nvSpPr>
         <p:spPr>
           <a:xfrm>
-            <a:off x="8057693" y="3822192"/>
-            <a:ext cx="3448202" cy="1737360"/>
+            <a:off x="8057693" y="3785616"/>
+            <a:ext cx="3448202" cy="1938528"/>
           </a:xfrm>
           <a:prstGeom prst="roundRect">
             <a:avLst>
-              <a:gd name="adj" fmla="val 3158"/>
+              <a:gd name="adj" fmla="val 2830"/>
             </a:avLst>
           </a:prstGeom>
           <a:solidFill>
@@ -44502,8 +44752,8 @@
         </p:nvSpPr>
         <p:spPr>
           <a:xfrm>
-            <a:off x="8295437" y="4059936"/>
-            <a:ext cx="2972714" cy="256032"/>
+            <a:off x="8295437" y="4023360"/>
+            <a:ext cx="2972714" cy="240030"/>
           </a:xfrm>
           <a:prstGeom prst="rect">
             <a:avLst/>
@@ -44519,14 +44769,14 @@
               <a:buNone/>
             </a:pPr>
             <a:r>
-              <a:rPr lang="en-US" sz="1600" b="1" dirty="0">
+              <a:rPr lang="en-US" sz="1500" b="1" dirty="0">
                 <a:solidFill>
                   <a:schemeClr val="tx1"/>
                 </a:solidFill>
               </a:rPr>
               <a:t>하나님을 떠오르게 하시기 때문</a:t>
             </a:r>
-            <a:endParaRPr lang="en-US" sz="1600" dirty="0"/>
+            <a:endParaRPr lang="en-US" sz="1500" dirty="0"/>
           </a:p>
         </p:txBody>
       </p:sp>
@@ -44538,8 +44788,8 @@
         </p:nvSpPr>
         <p:spPr>
           <a:xfrm>
-            <a:off x="8295437" y="4389120"/>
-            <a:ext cx="2972714" cy="932688"/>
+            <a:off x="8295437" y="4336542"/>
+            <a:ext cx="2972714" cy="1149858"/>
           </a:xfrm>
           <a:prstGeom prst="rect">
             <a:avLst/>
@@ -44563,7 +44813,7 @@
                   <a:schemeClr val="accent3"/>
                 </a:solidFill>
               </a:rPr>
-              <a:t>말씀을 들으면 말하는 분이 떠오른다.</a:t>
+              <a:t>말씀을 들으면 말하는 분이 떠오른다</a:t>
             </a:r>
             <a:endParaRPr lang="en-US" sz="1350" dirty="0"/>
           </a:p>
@@ -44605,36 +44855,14 @@
       </p:sp>
       <p:sp>
         <p:nvSpPr>
-          <p:cNvPr id="23" name="keyline"/>
-          <p:cNvSpPr/>
-          <p:nvPr/>
-        </p:nvSpPr>
-        <p:spPr>
-          <a:xfrm>
-            <a:off x="685800" y="5650992"/>
-            <a:ext cx="10820095" cy="548640"/>
-          </a:xfrm>
-          <a:prstGeom prst="roundRect">
-            <a:avLst>
-              <a:gd name="adj" fmla="val 16667"/>
-            </a:avLst>
-          </a:prstGeom>
-          <a:solidFill>
-            <a:schemeClr val="tx2"/>
-          </a:solidFill>
-          <a:ln/>
-        </p:spPr>
-      </p:sp>
-      <p:sp>
-        <p:nvSpPr>
-          <p:cNvPr id="24" name="keyline-text"/>
-          <p:cNvSpPr txBox="1"/>
-          <p:nvPr/>
-        </p:nvSpPr>
-        <p:spPr>
-          <a:xfrm>
-            <a:off x="960120" y="5650992"/>
-            <a:ext cx="10271455" cy="548640"/>
+          <p:cNvPr id="23" name="note"/>
+          <p:cNvSpPr txBox="1"/>
+          <p:nvPr/>
+        </p:nvSpPr>
+        <p:spPr>
+          <a:xfrm>
+            <a:off x="685800" y="5833872"/>
+            <a:ext cx="10820095" cy="347472"/>
           </a:xfrm>
           <a:prstGeom prst="rect">
             <a:avLst/>
@@ -44650,20 +44878,20 @@
               <a:buNone/>
             </a:pPr>
             <a:r>
-              <a:rPr lang="en-US" sz="1600" b="1" dirty="0">
-                <a:solidFill>
-                  <a:schemeClr val="accent6"/>
+              <a:rPr lang="en-US" sz="1500" b="1" dirty="0">
+                <a:solidFill>
+                  <a:schemeClr val="accent5"/>
                 </a:solidFill>
               </a:rPr>
               <a:t>말씀 = 하나님을 설명하는 가장 정확한 단어. 예수님을 보면 하나님이 보입니다 (14:9)</a:t>
             </a:r>
-            <a:endParaRPr lang="en-US" sz="1600" dirty="0"/>
-          </a:p>
-        </p:txBody>
-      </p:sp>
-      <p:sp>
-        <p:nvSpPr>
-          <p:cNvPr id="25" name="Text 0"/>
+            <a:endParaRPr lang="en-US" sz="1500" dirty="0"/>
+          </a:p>
+        </p:txBody>
+      </p:sp>
+      <p:sp>
+        <p:nvSpPr>
+          <p:cNvPr id="24" name="Text 0"/>
           <p:cNvSpPr/>
           <p:nvPr>
             <p:ph idx="101" type="body" hasCustomPrompt="1"/>
@@ -44881,7 +45109,7 @@
                   <a:schemeClr val="bg1"/>
                 </a:solidFill>
               </a:rPr>
-              <a:t>27</a:t>
+              <a:t>①</a:t>
             </a:r>
             <a:endParaRPr lang="en-US" sz="1300" dirty="0"/>
           </a:p>
@@ -44932,7 +45160,7 @@
         <p:spPr>
           <a:xfrm>
             <a:off x="923544" y="2649474"/>
-            <a:ext cx="2972714" cy="488442"/>
+            <a:ext cx="2972714" cy="752094"/>
           </a:xfrm>
           <a:prstGeom prst="rect">
             <a:avLst/>
@@ -44977,47 +45205,28 @@
             </a:r>
             <a:endParaRPr lang="en-US" sz="1400" dirty="0"/>
           </a:p>
-        </p:txBody>
-      </p:sp>
-      <p:sp>
-        <p:nvSpPr>
-          <p:cNvPr id="8" name="card-0-foot"/>
-          <p:cNvSpPr txBox="1"/>
-          <p:nvPr/>
-        </p:nvSpPr>
-        <p:spPr>
-          <a:xfrm>
-            <a:off x="923544" y="3174492"/>
-            <a:ext cx="2972714" cy="263652"/>
-          </a:xfrm>
-          <a:prstGeom prst="rect">
-            <a:avLst/>
-          </a:prstGeom>
-          <a:noFill/>
-          <a:ln/>
-        </p:spPr>
-        <p:txBody>
-          <a:bodyPr wrap="square" lIns="0" tIns="0" rIns="0" bIns="0" rtlCol="0" anchor="b"/>
-          <a:lstStyle/>
-          <a:p>
-            <a:pPr indent="0" marL="0">
-              <a:buNone/>
-            </a:pPr>
-            <a:r>
-              <a:rPr lang="en-US" sz="1200" b="1" dirty="0">
-                <a:solidFill>
-                  <a:schemeClr val="accent1"/>
-                </a:solidFill>
-              </a:rPr>
-              <a:t>질문 27 · 모습 ①</a:t>
-            </a:r>
-            <a:endParaRPr lang="en-US" sz="1200" dirty="0"/>
-          </a:p>
-        </p:txBody>
-      </p:sp>
-      <p:sp>
-        <p:nvSpPr>
-          <p:cNvPr id="9" name="card-1"/>
+          <a:p>
+            <a:pPr indent="0" marL="0">
+              <a:lnSpc>
+                <a:spcPct val="122000"/>
+              </a:lnSpc>
+              <a:buNone/>
+            </a:pPr>
+            <a:r>
+              <a:rPr lang="en-US" sz="1400" dirty="0">
+                <a:solidFill>
+                  <a:schemeClr val="accent3"/>
+                </a:solidFill>
+              </a:rPr>
+              <a:t>(질문 27)</a:t>
+            </a:r>
+            <a:endParaRPr lang="en-US" sz="1400" dirty="0"/>
+          </a:p>
+        </p:txBody>
+      </p:sp>
+      <p:sp>
+        <p:nvSpPr>
+          <p:cNvPr id="8" name="card-1"/>
           <p:cNvSpPr/>
           <p:nvPr/>
         </p:nvSpPr>
@@ -45046,7 +45255,7 @@
       </p:sp>
       <p:sp>
         <p:nvSpPr>
-          <p:cNvPr id="10" name="card-1-badge"/>
+          <p:cNvPr id="9" name="card-1-badge"/>
           <p:cNvSpPr/>
           <p:nvPr/>
         </p:nvSpPr>
@@ -45066,7 +45275,7 @@
       </p:sp>
       <p:sp>
         <p:nvSpPr>
-          <p:cNvPr id="11" name="card-1-badge-text"/>
+          <p:cNvPr id="10" name="card-1-badge-text"/>
           <p:cNvSpPr txBox="1"/>
           <p:nvPr/>
         </p:nvSpPr>
@@ -45094,7 +45303,7 @@
                   <a:schemeClr val="bg1"/>
                 </a:solidFill>
               </a:rPr>
-              <a:t>24</a:t>
+              <a:t>②</a:t>
             </a:r>
             <a:endParaRPr lang="en-US" sz="1300" dirty="0"/>
           </a:p>
@@ -45102,7 +45311,7 @@
       </p:sp>
       <p:sp>
         <p:nvSpPr>
-          <p:cNvPr id="12" name="card-1-head"/>
+          <p:cNvPr id="11" name="card-1-head"/>
           <p:cNvSpPr txBox="1"/>
           <p:nvPr/>
         </p:nvSpPr>
@@ -45138,14 +45347,14 @@
       </p:sp>
       <p:sp>
         <p:nvSpPr>
-          <p:cNvPr id="13" name="card-1-body"/>
+          <p:cNvPr id="12" name="card-1-body"/>
           <p:cNvSpPr txBox="1"/>
           <p:nvPr/>
         </p:nvSpPr>
         <p:spPr>
           <a:xfrm>
             <a:off x="4609490" y="2649474"/>
-            <a:ext cx="2972714" cy="488442"/>
+            <a:ext cx="2972714" cy="752094"/>
           </a:xfrm>
           <a:prstGeom prst="rect">
             <a:avLst/>
@@ -45186,51 +45395,32 @@
                   <a:schemeClr val="accent3"/>
                 </a:solidFill>
               </a:rPr>
-              <a:t>→ 구분된 인격, 친밀한 관계</a:t>
+              <a:t>→ 구분된 인격 · 친밀한 관계</a:t>
             </a:r>
             <a:endParaRPr lang="en-US" sz="1400" dirty="0"/>
           </a:p>
-        </p:txBody>
-      </p:sp>
-      <p:sp>
-        <p:nvSpPr>
-          <p:cNvPr id="14" name="card-1-foot"/>
-          <p:cNvSpPr txBox="1"/>
-          <p:nvPr/>
-        </p:nvSpPr>
-        <p:spPr>
-          <a:xfrm>
-            <a:off x="4609490" y="3174492"/>
-            <a:ext cx="2972714" cy="263652"/>
-          </a:xfrm>
-          <a:prstGeom prst="rect">
-            <a:avLst/>
-          </a:prstGeom>
-          <a:noFill/>
-          <a:ln/>
-        </p:spPr>
-        <p:txBody>
-          <a:bodyPr wrap="square" lIns="0" tIns="0" rIns="0" bIns="0" rtlCol="0" anchor="b"/>
-          <a:lstStyle/>
-          <a:p>
-            <a:pPr indent="0" marL="0">
-              <a:buNone/>
-            </a:pPr>
-            <a:r>
-              <a:rPr lang="en-US" sz="1200" b="1" dirty="0">
-                <a:solidFill>
-                  <a:schemeClr val="accent1"/>
-                </a:solidFill>
-              </a:rPr>
-              <a:t>질문 24</a:t>
-            </a:r>
-            <a:endParaRPr lang="en-US" sz="1200" dirty="0"/>
-          </a:p>
-        </p:txBody>
-      </p:sp>
-      <p:sp>
-        <p:nvSpPr>
-          <p:cNvPr id="15" name="card-2"/>
+          <a:p>
+            <a:pPr indent="0" marL="0">
+              <a:lnSpc>
+                <a:spcPct val="122000"/>
+              </a:lnSpc>
+              <a:buNone/>
+            </a:pPr>
+            <a:r>
+              <a:rPr lang="en-US" sz="1400" dirty="0">
+                <a:solidFill>
+                  <a:schemeClr val="accent3"/>
+                </a:solidFill>
+              </a:rPr>
+              <a:t>(질문 24)</a:t>
+            </a:r>
+            <a:endParaRPr lang="en-US" sz="1400" dirty="0"/>
+          </a:p>
+        </p:txBody>
+      </p:sp>
+      <p:sp>
+        <p:nvSpPr>
+          <p:cNvPr id="13" name="card-2"/>
           <p:cNvSpPr/>
           <p:nvPr/>
         </p:nvSpPr>
@@ -45259,7 +45449,7 @@
       </p:sp>
       <p:sp>
         <p:nvSpPr>
-          <p:cNvPr id="16" name="card-2-badge"/>
+          <p:cNvPr id="14" name="card-2-badge"/>
           <p:cNvSpPr/>
           <p:nvPr/>
         </p:nvSpPr>
@@ -45279,7 +45469,7 @@
       </p:sp>
       <p:sp>
         <p:nvSpPr>
-          <p:cNvPr id="17" name="card-2-badge-text"/>
+          <p:cNvPr id="15" name="card-2-badge-text"/>
           <p:cNvSpPr txBox="1"/>
           <p:nvPr/>
         </p:nvSpPr>
@@ -45307,7 +45497,7 @@
                   <a:schemeClr val="bg1"/>
                 </a:solidFill>
               </a:rPr>
-              <a:t>25</a:t>
+              <a:t>③</a:t>
             </a:r>
             <a:endParaRPr lang="en-US" sz="1300" dirty="0"/>
           </a:p>
@@ -45315,7 +45505,7 @@
       </p:sp>
       <p:sp>
         <p:nvSpPr>
-          <p:cNvPr id="18" name="card-2-head"/>
+          <p:cNvPr id="16" name="card-2-head"/>
           <p:cNvSpPr txBox="1"/>
           <p:nvPr/>
         </p:nvSpPr>
@@ -45343,7 +45533,7 @@
                   <a:schemeClr val="tx1"/>
                 </a:solidFill>
               </a:rPr>
-              <a:t>이 말씀은 곧 하나님이시니라</a:t>
+              <a:t>말씀은 곧 하나님이시니라</a:t>
             </a:r>
             <a:endParaRPr lang="en-US" sz="1700" dirty="0"/>
           </a:p>
@@ -45351,14 +45541,14 @@
       </p:sp>
       <p:sp>
         <p:nvSpPr>
-          <p:cNvPr id="19" name="card-2-body"/>
+          <p:cNvPr id="17" name="card-2-body"/>
           <p:cNvSpPr txBox="1"/>
           <p:nvPr/>
         </p:nvSpPr>
         <p:spPr>
           <a:xfrm>
             <a:off x="8295437" y="2649474"/>
-            <a:ext cx="2972714" cy="488442"/>
+            <a:ext cx="2972714" cy="752094"/>
           </a:xfrm>
           <a:prstGeom prst="rect">
             <a:avLst/>
@@ -45403,57 +45593,40 @@
             </a:r>
             <a:endParaRPr lang="en-US" sz="1400" dirty="0"/>
           </a:p>
-        </p:txBody>
-      </p:sp>
-      <p:sp>
-        <p:nvSpPr>
-          <p:cNvPr id="20" name="card-2-foot"/>
-          <p:cNvSpPr txBox="1"/>
-          <p:nvPr/>
-        </p:nvSpPr>
-        <p:spPr>
-          <a:xfrm>
-            <a:off x="8295437" y="3174492"/>
-            <a:ext cx="2972714" cy="263652"/>
-          </a:xfrm>
-          <a:prstGeom prst="rect">
-            <a:avLst/>
-          </a:prstGeom>
-          <a:noFill/>
-          <a:ln/>
-        </p:spPr>
-        <p:txBody>
-          <a:bodyPr wrap="square" lIns="0" tIns="0" rIns="0" bIns="0" rtlCol="0" anchor="b"/>
-          <a:lstStyle/>
-          <a:p>
-            <a:pPr indent="0" marL="0">
-              <a:buNone/>
-            </a:pPr>
-            <a:r>
-              <a:rPr lang="en-US" sz="1200" b="1" dirty="0">
-                <a:solidFill>
-                  <a:schemeClr val="accent1"/>
-                </a:solidFill>
-              </a:rPr>
-              <a:t>질문 25</a:t>
-            </a:r>
-            <a:endParaRPr lang="en-US" sz="1200" dirty="0"/>
-          </a:p>
-        </p:txBody>
-      </p:sp>
-      <p:sp>
-        <p:nvSpPr>
-          <p:cNvPr id="21" name="subhead-badge"/>
+          <a:p>
+            <a:pPr indent="0" marL="0">
+              <a:lnSpc>
+                <a:spcPct val="122000"/>
+              </a:lnSpc>
+              <a:buNone/>
+            </a:pPr>
+            <a:r>
+              <a:rPr lang="en-US" sz="1400" dirty="0">
+                <a:solidFill>
+                  <a:schemeClr val="accent3"/>
+                </a:solidFill>
+              </a:rPr>
+              <a:t>(질문 25)</a:t>
+            </a:r>
+            <a:endParaRPr lang="en-US" sz="1400" dirty="0"/>
+          </a:p>
+        </p:txBody>
+      </p:sp>
+      <p:sp>
+        <p:nvSpPr>
+          <p:cNvPr id="18" name="subhead-badge"/>
           <p:cNvSpPr/>
           <p:nvPr/>
         </p:nvSpPr>
         <p:spPr>
           <a:xfrm>
             <a:off x="685800" y="3703320"/>
-            <a:ext cx="347472" cy="347472"/>
-          </a:xfrm>
-          <a:prstGeom prst="ellipse">
-            <a:avLst/>
+            <a:ext cx="375453" cy="347472"/>
+          </a:xfrm>
+          <a:prstGeom prst="roundRect">
+            <a:avLst>
+              <a:gd name="adj" fmla="val 50000"/>
+            </a:avLst>
           </a:prstGeom>
           <a:solidFill>
             <a:schemeClr val="accent1"/>
@@ -45463,14 +45636,14 @@
       </p:sp>
       <p:sp>
         <p:nvSpPr>
-          <p:cNvPr id="22" name="subhead-badge-text"/>
+          <p:cNvPr id="19" name="subhead-badge-text"/>
           <p:cNvSpPr txBox="1"/>
           <p:nvPr/>
         </p:nvSpPr>
         <p:spPr>
           <a:xfrm>
             <a:off x="685800" y="3703320"/>
-            <a:ext cx="347472" cy="347472"/>
+            <a:ext cx="375453" cy="347472"/>
           </a:xfrm>
           <a:prstGeom prst="rect">
             <a:avLst/>
@@ -45486,27 +45659,27 @@
               <a:buNone/>
             </a:pPr>
             <a:r>
-              <a:rPr lang="en-US" sz="1400" b="1" dirty="0">
+              <a:rPr lang="en-US" sz="1300" b="1" dirty="0">
                 <a:solidFill>
                   <a:schemeClr val="bg1"/>
                 </a:solidFill>
               </a:rPr>
               <a:t>26</a:t>
             </a:r>
-            <a:endParaRPr lang="en-US" sz="1400" dirty="0"/>
-          </a:p>
-        </p:txBody>
-      </p:sp>
-      <p:sp>
-        <p:nvSpPr>
-          <p:cNvPr id="23" name="subhead-text"/>
-          <p:cNvSpPr txBox="1"/>
-          <p:nvPr/>
-        </p:nvSpPr>
-        <p:spPr>
-          <a:xfrm>
-            <a:off x="1161288" y="3694176"/>
-            <a:ext cx="10344607" cy="365760"/>
+            <a:endParaRPr lang="en-US" sz="1300" dirty="0"/>
+          </a:p>
+        </p:txBody>
+      </p:sp>
+      <p:sp>
+        <p:nvSpPr>
+          <p:cNvPr id="20" name="subhead-text"/>
+          <p:cNvSpPr txBox="1"/>
+          <p:nvPr/>
+        </p:nvSpPr>
+        <p:spPr>
+          <a:xfrm>
+            <a:off x="1189269" y="3694176"/>
+            <a:ext cx="10316627" cy="365760"/>
           </a:xfrm>
           <a:prstGeom prst="rect">
             <a:avLst/>
@@ -45535,7 +45708,7 @@
       </p:sp>
       <p:sp>
         <p:nvSpPr>
-          <p:cNvPr id="24" name="cmp-0"/>
+          <p:cNvPr id="21" name="cmp-0"/>
           <p:cNvSpPr/>
           <p:nvPr/>
         </p:nvSpPr>
@@ -45564,7 +45737,7 @@
       </p:sp>
       <p:sp>
         <p:nvSpPr>
-          <p:cNvPr id="25" name="cmp-0-head"/>
+          <p:cNvPr id="22" name="cmp-0-head"/>
           <p:cNvSpPr txBox="1"/>
           <p:nvPr/>
         </p:nvSpPr>
@@ -45580,7 +45753,7 @@
           <a:ln/>
         </p:spPr>
         <p:txBody>
-          <a:bodyPr wrap="square" lIns="0" tIns="0" rIns="0" bIns="0" rtlCol="0" anchor="ctr"/>
+          <a:bodyPr wrap="square" lIns="0" tIns="0" rIns="0" bIns="0" rtlCol="0" anchor="t"/>
           <a:lstStyle/>
           <a:p>
             <a:pPr indent="0" marL="0">
@@ -45600,14 +45773,14 @@
       </p:sp>
       <p:sp>
         <p:nvSpPr>
-          <p:cNvPr id="26" name="cmp-0-items"/>
-          <p:cNvSpPr txBox="1"/>
-          <p:nvPr/>
-        </p:nvSpPr>
-        <p:spPr>
-          <a:xfrm>
-            <a:off x="960120" y="4882896"/>
-            <a:ext cx="4724248" cy="969264"/>
+          <p:cNvPr id="23" name="cmp-0-items"/>
+          <p:cNvSpPr txBox="1"/>
+          <p:nvPr/>
+        </p:nvSpPr>
+        <p:spPr>
+          <a:xfrm>
+            <a:off x="960120" y="4919472"/>
+            <a:ext cx="4724248" cy="1060704"/>
           </a:xfrm>
           <a:prstGeom prst="rect">
             <a:avLst/>
@@ -45658,7 +45831,7 @@
       </p:sp>
       <p:sp>
         <p:nvSpPr>
-          <p:cNvPr id="27" name="cmp-1"/>
+          <p:cNvPr id="24" name="cmp-1"/>
           <p:cNvSpPr/>
           <p:nvPr/>
         </p:nvSpPr>
@@ -45687,7 +45860,7 @@
       </p:sp>
       <p:sp>
         <p:nvSpPr>
-          <p:cNvPr id="28" name="cmp-1-head"/>
+          <p:cNvPr id="25" name="cmp-1-head"/>
           <p:cNvSpPr txBox="1"/>
           <p:nvPr/>
         </p:nvSpPr>
@@ -45703,7 +45876,7 @@
           <a:ln/>
         </p:spPr>
         <p:txBody>
-          <a:bodyPr wrap="square" lIns="0" tIns="0" rIns="0" bIns="0" rtlCol="0" anchor="ctr"/>
+          <a:bodyPr wrap="square" lIns="0" tIns="0" rIns="0" bIns="0" rtlCol="0" anchor="t"/>
           <a:lstStyle/>
           <a:p>
             <a:pPr indent="0" marL="0">
@@ -45723,14 +45896,14 @@
       </p:sp>
       <p:sp>
         <p:nvSpPr>
-          <p:cNvPr id="29" name="cmp-1-items"/>
-          <p:cNvSpPr txBox="1"/>
-          <p:nvPr/>
-        </p:nvSpPr>
-        <p:spPr>
-          <a:xfrm>
-            <a:off x="6507328" y="4882896"/>
-            <a:ext cx="4724248" cy="969264"/>
+          <p:cNvPr id="26" name="cmp-1-items"/>
+          <p:cNvSpPr txBox="1"/>
+          <p:nvPr/>
+        </p:nvSpPr>
+        <p:spPr>
+          <a:xfrm>
+            <a:off x="6507328" y="4919472"/>
+            <a:ext cx="4724248" cy="1060704"/>
           </a:xfrm>
           <a:prstGeom prst="rect">
             <a:avLst/>
@@ -45781,7 +45954,7 @@
       </p:sp>
       <p:sp>
         <p:nvSpPr>
-          <p:cNvPr id="31" name="Text 0"/>
+          <p:cNvPr id="28" name="Text 0"/>
           <p:cNvSpPr/>
           <p:nvPr>
             <p:ph idx="101" type="body" hasCustomPrompt="1"/>
@@ -47858,10 +48031,12 @@
         <p:spPr>
           <a:xfrm>
             <a:off x="4609490" y="1755648"/>
-            <a:ext cx="402336" cy="402336"/>
-          </a:xfrm>
-          <a:prstGeom prst="ellipse">
-            <a:avLst/>
+            <a:ext cx="539496" cy="402336"/>
+          </a:xfrm>
+          <a:prstGeom prst="roundRect">
+            <a:avLst>
+              <a:gd name="adj" fmla="val 50000"/>
+            </a:avLst>
           </a:prstGeom>
           <a:solidFill>
             <a:schemeClr val="accent1"/>
@@ -47878,7 +48053,7 @@
         <p:spPr>
           <a:xfrm>
             <a:off x="4609490" y="1755648"/>
-            <a:ext cx="402336" cy="402336"/>
+            <a:ext cx="539496" cy="402336"/>
           </a:xfrm>
           <a:prstGeom prst="rect">
             <a:avLst/>
@@ -48200,10 +48375,12 @@
         <p:spPr>
           <a:xfrm>
             <a:off x="685800" y="3867912"/>
-            <a:ext cx="347472" cy="347472"/>
-          </a:xfrm>
-          <a:prstGeom prst="ellipse">
-            <a:avLst/>
+            <a:ext cx="539496" cy="347472"/>
+          </a:xfrm>
+          <a:prstGeom prst="roundRect">
+            <a:avLst>
+              <a:gd name="adj" fmla="val 50000"/>
+            </a:avLst>
           </a:prstGeom>
           <a:solidFill>
             <a:schemeClr val="accent1"/>
@@ -48220,7 +48397,7 @@
         <p:spPr>
           <a:xfrm>
             <a:off x="685800" y="3867912"/>
-            <a:ext cx="347472" cy="347472"/>
+            <a:ext cx="539496" cy="347472"/>
           </a:xfrm>
           <a:prstGeom prst="rect">
             <a:avLst/>
@@ -48236,14 +48413,14 @@
               <a:buNone/>
             </a:pPr>
             <a:r>
-              <a:rPr lang="en-US" sz="1400" b="1" dirty="0">
+              <a:rPr lang="en-US" sz="1300" b="1" dirty="0">
                 <a:solidFill>
                   <a:schemeClr val="bg1"/>
                 </a:solidFill>
               </a:rPr>
               <a:t>흐름</a:t>
             </a:r>
-            <a:endParaRPr lang="en-US" sz="1400" dirty="0"/>
+            <a:endParaRPr lang="en-US" sz="1300" dirty="0"/>
           </a:p>
         </p:txBody>
       </p:sp>
@@ -48255,8 +48432,8 @@
         </p:nvSpPr>
         <p:spPr>
           <a:xfrm>
-            <a:off x="1161288" y="3858768"/>
-            <a:ext cx="10344607" cy="365760"/>
+            <a:off x="1353312" y="3858768"/>
+            <a:ext cx="10152583" cy="365760"/>
           </a:xfrm>
           <a:prstGeom prst="rect">
             <a:avLst/>
@@ -49113,12 +49290,12 @@
         </p:nvSpPr>
         <p:spPr>
           <a:xfrm>
-            <a:off x="685800" y="1499616"/>
-            <a:ext cx="5272888" cy="2377440"/>
+            <a:off x="685800" y="1481328"/>
+            <a:ext cx="5272888" cy="2468880"/>
           </a:xfrm>
           <a:prstGeom prst="roundRect">
             <a:avLst>
-              <a:gd name="adj" fmla="val 2308"/>
+              <a:gd name="adj" fmla="val 2222"/>
             </a:avLst>
           </a:prstGeom>
           <a:solidFill>
@@ -49142,7 +49319,7 @@
         </p:nvSpPr>
         <p:spPr>
           <a:xfrm>
-            <a:off x="960120" y="1737360"/>
+            <a:off x="960120" y="1719072"/>
             <a:ext cx="4724248" cy="420624"/>
           </a:xfrm>
           <a:prstGeom prst="rect">
@@ -49152,7 +49329,7 @@
           <a:ln/>
         </p:spPr>
         <p:txBody>
-          <a:bodyPr wrap="square" lIns="0" tIns="0" rIns="0" bIns="0" rtlCol="0" anchor="ctr"/>
+          <a:bodyPr wrap="square" lIns="0" tIns="0" rIns="0" bIns="0" rtlCol="0" anchor="t"/>
           <a:lstStyle/>
           <a:p>
             <a:pPr indent="0" marL="0">
@@ -49178,8 +49355,8 @@
         </p:nvSpPr>
         <p:spPr>
           <a:xfrm>
-            <a:off x="960120" y="2286000"/>
-            <a:ext cx="4724248" cy="1335024"/>
+            <a:off x="960120" y="2304288"/>
+            <a:ext cx="4724248" cy="1517904"/>
           </a:xfrm>
           <a:prstGeom prst="rect">
             <a:avLst/>
@@ -49270,12 +49447,12 @@
         </p:nvSpPr>
         <p:spPr>
           <a:xfrm>
-            <a:off x="6233008" y="1499616"/>
-            <a:ext cx="5272888" cy="2377440"/>
+            <a:off x="6233008" y="1481328"/>
+            <a:ext cx="5272888" cy="2468880"/>
           </a:xfrm>
           <a:prstGeom prst="roundRect">
             <a:avLst>
-              <a:gd name="adj" fmla="val 2308"/>
+              <a:gd name="adj" fmla="val 2222"/>
             </a:avLst>
           </a:prstGeom>
           <a:solidFill>
@@ -49299,17 +49476,17 @@
         </p:nvSpPr>
         <p:spPr>
           <a:xfrm>
-            <a:off x="6507328" y="1737360"/>
-            <a:ext cx="4724248" cy="420624"/>
-          </a:xfrm>
-          <a:prstGeom prst="rect">
-            <a:avLst/>
-          </a:prstGeom>
-          <a:noFill/>
-          <a:ln/>
-        </p:spPr>
-        <p:txBody>
-          <a:bodyPr wrap="square" lIns="0" tIns="0" rIns="0" bIns="0" rtlCol="0" anchor="ctr"/>
+            <a:off x="6507328" y="1719072"/>
+            <a:ext cx="4724248" cy="629920"/>
+          </a:xfrm>
+          <a:prstGeom prst="rect">
+            <a:avLst/>
+          </a:prstGeom>
+          <a:noFill/>
+          <a:ln/>
+        </p:spPr>
+        <p:txBody>
+          <a:bodyPr wrap="square" lIns="0" tIns="0" rIns="0" bIns="0" rtlCol="0" anchor="t"/>
           <a:lstStyle/>
           <a:p>
             <a:pPr indent="0" marL="0">
@@ -49335,8 +49512,8 @@
         </p:nvSpPr>
         <p:spPr>
           <a:xfrm>
-            <a:off x="6507328" y="2286000"/>
-            <a:ext cx="4724248" cy="1335024"/>
+            <a:off x="6507328" y="2513584"/>
+            <a:ext cx="4724248" cy="1308608"/>
           </a:xfrm>
           <a:prstGeom prst="rect">
             <a:avLst/>
@@ -49427,11 +49604,13 @@
         </p:nvSpPr>
         <p:spPr>
           <a:xfrm>
-            <a:off x="685800" y="3977640"/>
-            <a:ext cx="347472" cy="347472"/>
-          </a:xfrm>
-          <a:prstGeom prst="ellipse">
-            <a:avLst/>
+            <a:off x="685800" y="4050792"/>
+            <a:ext cx="375453" cy="347472"/>
+          </a:xfrm>
+          <a:prstGeom prst="roundRect">
+            <a:avLst>
+              <a:gd name="adj" fmla="val 50000"/>
+            </a:avLst>
           </a:prstGeom>
           <a:solidFill>
             <a:schemeClr val="accent1"/>
@@ -49447,8 +49626,8 @@
         </p:nvSpPr>
         <p:spPr>
           <a:xfrm>
-            <a:off x="685800" y="3977640"/>
-            <a:ext cx="347472" cy="347472"/>
+            <a:off x="685800" y="4050792"/>
+            <a:ext cx="375453" cy="347472"/>
           </a:xfrm>
           <a:prstGeom prst="rect">
             <a:avLst/>
@@ -49464,14 +49643,14 @@
               <a:buNone/>
             </a:pPr>
             <a:r>
-              <a:rPr lang="en-US" sz="1400" b="1" dirty="0">
+              <a:rPr lang="en-US" sz="1300" b="1" dirty="0">
                 <a:solidFill>
                   <a:schemeClr val="bg1"/>
                 </a:solidFill>
               </a:rPr>
               <a:t>34</a:t>
             </a:r>
-            <a:endParaRPr lang="en-US" sz="1400" dirty="0"/>
+            <a:endParaRPr lang="en-US" sz="1300" dirty="0"/>
           </a:p>
         </p:txBody>
       </p:sp>
@@ -49483,8 +49662,8 @@
         </p:nvSpPr>
         <p:spPr>
           <a:xfrm>
-            <a:off x="1161288" y="3968496"/>
-            <a:ext cx="10344607" cy="365760"/>
+            <a:off x="1189269" y="4041648"/>
+            <a:ext cx="10316627" cy="365760"/>
           </a:xfrm>
           <a:prstGeom prst="rect">
             <a:avLst/>
@@ -49519,7 +49698,7 @@
         </p:nvSpPr>
         <p:spPr>
           <a:xfrm>
-            <a:off x="685800" y="4389120"/>
+            <a:off x="685800" y="4462272"/>
             <a:ext cx="2526716" cy="1691640"/>
           </a:xfrm>
           <a:prstGeom prst="roundRect">
@@ -49548,7 +49727,7 @@
         </p:nvSpPr>
         <p:spPr>
           <a:xfrm>
-            <a:off x="868680" y="4572000"/>
+            <a:off x="868680" y="4645152"/>
             <a:ext cx="365760" cy="365760"/>
           </a:xfrm>
           <a:prstGeom prst="ellipse">
@@ -49568,7 +49747,7 @@
         </p:nvSpPr>
         <p:spPr>
           <a:xfrm>
-            <a:off x="868680" y="4572000"/>
+            <a:off x="868680" y="4645152"/>
             <a:ext cx="365760" cy="365760"/>
           </a:xfrm>
           <a:prstGeom prst="rect">
@@ -49604,7 +49783,7 @@
         </p:nvSpPr>
         <p:spPr>
           <a:xfrm>
-            <a:off x="868680" y="5065776"/>
+            <a:off x="868680" y="5138928"/>
             <a:ext cx="2160956" cy="240030"/>
           </a:xfrm>
           <a:prstGeom prst="rect">
@@ -49626,7 +49805,7 @@
                   <a:schemeClr val="tx1"/>
                 </a:solidFill>
               </a:rPr>
-              <a:t>혈통으로 나지 아니하고</a:t>
+              <a:t>혈통이 아니라</a:t>
             </a:r>
             <a:endParaRPr lang="en-US" sz="1500" dirty="0"/>
           </a:p>
@@ -49640,7 +49819,7 @@
         </p:nvSpPr>
         <p:spPr>
           <a:xfrm>
-            <a:off x="868680" y="5378958"/>
+            <a:off x="868680" y="5452110"/>
             <a:ext cx="2160956" cy="518922"/>
           </a:xfrm>
           <a:prstGeom prst="rect">
@@ -49679,7 +49858,7 @@
         </p:nvSpPr>
         <p:spPr>
           <a:xfrm>
-            <a:off x="3450260" y="4389120"/>
+            <a:off x="3450260" y="4462272"/>
             <a:ext cx="2526716" cy="1691640"/>
           </a:xfrm>
           <a:prstGeom prst="roundRect">
@@ -49708,7 +49887,7 @@
         </p:nvSpPr>
         <p:spPr>
           <a:xfrm>
-            <a:off x="3633140" y="4572000"/>
+            <a:off x="3633140" y="4645152"/>
             <a:ext cx="365760" cy="365760"/>
           </a:xfrm>
           <a:prstGeom prst="ellipse">
@@ -49728,7 +49907,7 @@
         </p:nvSpPr>
         <p:spPr>
           <a:xfrm>
-            <a:off x="3633140" y="4572000"/>
+            <a:off x="3633140" y="4645152"/>
             <a:ext cx="365760" cy="365760"/>
           </a:xfrm>
           <a:prstGeom prst="rect">
@@ -49764,7 +49943,7 @@
         </p:nvSpPr>
         <p:spPr>
           <a:xfrm>
-            <a:off x="3633140" y="5065776"/>
+            <a:off x="3633140" y="5138928"/>
             <a:ext cx="2160956" cy="240030"/>
           </a:xfrm>
           <a:prstGeom prst="rect">
@@ -49786,7 +49965,7 @@
                   <a:schemeClr val="tx1"/>
                 </a:solidFill>
               </a:rPr>
-              <a:t>육정으로 나지 아니하고</a:t>
+              <a:t>육정이 아니라</a:t>
             </a:r>
             <a:endParaRPr lang="en-US" sz="1500" dirty="0"/>
           </a:p>
@@ -49800,7 +49979,7 @@
         </p:nvSpPr>
         <p:spPr>
           <a:xfrm>
-            <a:off x="3633140" y="5378958"/>
+            <a:off x="3633140" y="5452110"/>
             <a:ext cx="2160956" cy="518922"/>
           </a:xfrm>
           <a:prstGeom prst="rect">
@@ -49839,7 +50018,7 @@
         </p:nvSpPr>
         <p:spPr>
           <a:xfrm>
-            <a:off x="6214720" y="4389120"/>
+            <a:off x="6214720" y="4462272"/>
             <a:ext cx="2526716" cy="1691640"/>
           </a:xfrm>
           <a:prstGeom prst="roundRect">
@@ -49868,7 +50047,7 @@
         </p:nvSpPr>
         <p:spPr>
           <a:xfrm>
-            <a:off x="6397600" y="4572000"/>
+            <a:off x="6397600" y="4645152"/>
             <a:ext cx="365760" cy="365760"/>
           </a:xfrm>
           <a:prstGeom prst="ellipse">
@@ -49888,7 +50067,7 @@
         </p:nvSpPr>
         <p:spPr>
           <a:xfrm>
-            <a:off x="6397600" y="4572000"/>
+            <a:off x="6397600" y="4645152"/>
             <a:ext cx="365760" cy="365760"/>
           </a:xfrm>
           <a:prstGeom prst="rect">
@@ -49924,7 +50103,7 @@
         </p:nvSpPr>
         <p:spPr>
           <a:xfrm>
-            <a:off x="6397600" y="5065776"/>
+            <a:off x="6397600" y="5138928"/>
             <a:ext cx="2160956" cy="240030"/>
           </a:xfrm>
           <a:prstGeom prst="rect">
@@ -49946,7 +50125,7 @@
                   <a:schemeClr val="tx1"/>
                 </a:solidFill>
               </a:rPr>
-              <a:t>사람의 뜻으로 나지 않고</a:t>
+              <a:t>사람의 뜻이 아니라</a:t>
             </a:r>
             <a:endParaRPr lang="en-US" sz="1500" dirty="0"/>
           </a:p>
@@ -49960,7 +50139,7 @@
         </p:nvSpPr>
         <p:spPr>
           <a:xfrm>
-            <a:off x="6397600" y="5378958"/>
+            <a:off x="6397600" y="5452110"/>
             <a:ext cx="2160956" cy="518922"/>
           </a:xfrm>
           <a:prstGeom prst="rect">
@@ -49999,7 +50178,7 @@
         </p:nvSpPr>
         <p:spPr>
           <a:xfrm>
-            <a:off x="8979179" y="4389120"/>
+            <a:off x="8979179" y="4462272"/>
             <a:ext cx="2526716" cy="1691640"/>
           </a:xfrm>
           <a:prstGeom prst="roundRect">
@@ -50028,7 +50207,7 @@
         </p:nvSpPr>
         <p:spPr>
           <a:xfrm>
-            <a:off x="9162059" y="4572000"/>
+            <a:off x="9162059" y="4645152"/>
             <a:ext cx="365760" cy="365760"/>
           </a:xfrm>
           <a:prstGeom prst="ellipse">
@@ -50048,7 +50227,7 @@
         </p:nvSpPr>
         <p:spPr>
           <a:xfrm>
-            <a:off x="9162059" y="4572000"/>
+            <a:off x="9162059" y="4645152"/>
             <a:ext cx="365760" cy="365760"/>
           </a:xfrm>
           <a:prstGeom prst="rect">
@@ -50084,7 +50263,7 @@
         </p:nvSpPr>
         <p:spPr>
           <a:xfrm>
-            <a:off x="9162059" y="5065776"/>
+            <a:off x="9162059" y="5138928"/>
             <a:ext cx="2160956" cy="240030"/>
           </a:xfrm>
           <a:prstGeom prst="rect">
@@ -50106,7 +50285,7 @@
                   <a:schemeClr val="tx1"/>
                 </a:solidFill>
               </a:rPr>
-              <a:t>오직 하나님께로 난 자들</a:t>
+              <a:t>오직 하나님께로 난 자</a:t>
             </a:r>
             <a:endParaRPr lang="en-US" sz="1500" dirty="0"/>
           </a:p>
@@ -50120,8 +50299,8 @@
         </p:nvSpPr>
         <p:spPr>
           <a:xfrm>
-            <a:off x="9162059" y="5378958"/>
-            <a:ext cx="2160956" cy="263207"/>
+            <a:off x="9162059" y="5452110"/>
+            <a:ext cx="2160956" cy="190055"/>
           </a:xfrm>
           <a:prstGeom prst="rect">
             <a:avLst/>
@@ -50160,7 +50339,7 @@
         <p:spPr>
           <a:xfrm>
             <a:off x="9162059" y="5678742"/>
-            <a:ext cx="2160956" cy="255714"/>
+            <a:ext cx="2160956" cy="328867"/>
           </a:xfrm>
           <a:prstGeom prst="rect">
             <a:avLst/>
@@ -50181,7 +50360,7 @@
                   <a:schemeClr val="accent1"/>
                 </a:solidFill>
               </a:rPr>
-              <a:t>35. 자녀 됨의 근원은 예수님</a:t>
+              <a:t>근원은 예수님 (35)</a:t>
             </a:r>
             <a:endParaRPr lang="en-US" sz="1150" dirty="0"/>
           </a:p>
@@ -50458,7 +50637,7 @@
         <p:spPr>
           <a:xfrm>
             <a:off x="923544" y="2702052"/>
-            <a:ext cx="2051228" cy="1203960"/>
+            <a:ext cx="2051228" cy="1130808"/>
           </a:xfrm>
           <a:prstGeom prst="rect">
             <a:avLst/>
@@ -50496,8 +50675,8 @@
         </p:nvSpPr>
         <p:spPr>
           <a:xfrm>
-            <a:off x="923544" y="3942588"/>
-            <a:ext cx="2051228" cy="263652"/>
+            <a:off x="923544" y="3869436"/>
+            <a:ext cx="2051228" cy="336804"/>
           </a:xfrm>
           <a:prstGeom prst="rect">
             <a:avLst/>
@@ -50654,7 +50833,7 @@
         <p:spPr>
           <a:xfrm>
             <a:off x="3688004" y="2702052"/>
-            <a:ext cx="2051228" cy="1203960"/>
+            <a:ext cx="2051228" cy="1130808"/>
           </a:xfrm>
           <a:prstGeom prst="rect">
             <a:avLst/>
@@ -50692,8 +50871,8 @@
         </p:nvSpPr>
         <p:spPr>
           <a:xfrm>
-            <a:off x="3688004" y="3942588"/>
-            <a:ext cx="2051228" cy="263652"/>
+            <a:off x="3688004" y="3869436"/>
+            <a:ext cx="2051228" cy="336804"/>
           </a:xfrm>
           <a:prstGeom prst="rect">
             <a:avLst/>
@@ -50850,7 +51029,7 @@
         <p:spPr>
           <a:xfrm>
             <a:off x="6452464" y="2702052"/>
-            <a:ext cx="2051228" cy="1203960"/>
+            <a:ext cx="2051228" cy="1130808"/>
           </a:xfrm>
           <a:prstGeom prst="rect">
             <a:avLst/>
@@ -50888,8 +51067,8 @@
         </p:nvSpPr>
         <p:spPr>
           <a:xfrm>
-            <a:off x="6452464" y="3942588"/>
-            <a:ext cx="2051228" cy="263652"/>
+            <a:off x="6452464" y="3869436"/>
+            <a:ext cx="2051228" cy="336804"/>
           </a:xfrm>
           <a:prstGeom prst="rect">
             <a:avLst/>
@@ -51046,7 +51225,7 @@
         <p:spPr>
           <a:xfrm>
             <a:off x="9216923" y="2702052"/>
-            <a:ext cx="2051228" cy="1203960"/>
+            <a:ext cx="2051228" cy="1130808"/>
           </a:xfrm>
           <a:prstGeom prst="rect">
             <a:avLst/>
@@ -51101,8 +51280,8 @@
         </p:nvSpPr>
         <p:spPr>
           <a:xfrm>
-            <a:off x="9216923" y="3942588"/>
-            <a:ext cx="2051228" cy="263652"/>
+            <a:off x="9216923" y="3869436"/>
+            <a:ext cx="2051228" cy="336804"/>
           </a:xfrm>
           <a:prstGeom prst="rect">
             <a:avLst/>
@@ -52307,10 +52486,12 @@
         <p:spPr>
           <a:xfrm>
             <a:off x="685800" y="2660904"/>
-            <a:ext cx="347472" cy="347472"/>
-          </a:xfrm>
-          <a:prstGeom prst="ellipse">
-            <a:avLst/>
+            <a:ext cx="375453" cy="347472"/>
+          </a:xfrm>
+          <a:prstGeom prst="roundRect">
+            <a:avLst>
+              <a:gd name="adj" fmla="val 50000"/>
+            </a:avLst>
           </a:prstGeom>
           <a:solidFill>
             <a:schemeClr val="accent1"/>
@@ -52327,7 +52508,7 @@
         <p:spPr>
           <a:xfrm>
             <a:off x="685800" y="2660904"/>
-            <a:ext cx="347472" cy="347472"/>
+            <a:ext cx="375453" cy="347472"/>
           </a:xfrm>
           <a:prstGeom prst="rect">
             <a:avLst/>
@@ -52343,14 +52524,14 @@
               <a:buNone/>
             </a:pPr>
             <a:r>
-              <a:rPr lang="en-US" sz="1400" b="1" dirty="0">
+              <a:rPr lang="en-US" sz="1300" b="1" dirty="0">
                 <a:solidFill>
                   <a:schemeClr val="bg1"/>
                 </a:solidFill>
               </a:rPr>
               <a:t>37</a:t>
             </a:r>
-            <a:endParaRPr lang="en-US" sz="1400" dirty="0"/>
+            <a:endParaRPr lang="en-US" sz="1300" dirty="0"/>
           </a:p>
         </p:txBody>
       </p:sp>
@@ -52362,8 +52543,8 @@
         </p:nvSpPr>
         <p:spPr>
           <a:xfrm>
-            <a:off x="1161288" y="2651760"/>
-            <a:ext cx="10344607" cy="365760"/>
+            <a:off x="1189269" y="2651760"/>
+            <a:ext cx="10316627" cy="365760"/>
           </a:xfrm>
           <a:prstGeom prst="rect">
             <a:avLst/>
@@ -52437,7 +52618,7 @@
           <a:ln/>
         </p:spPr>
         <p:txBody>
-          <a:bodyPr wrap="square" lIns="0" tIns="0" rIns="0" bIns="0" rtlCol="0" anchor="ctr"/>
+          <a:bodyPr wrap="square" lIns="0" tIns="0" rIns="0" bIns="0" rtlCol="0" anchor="t"/>
           <a:lstStyle/>
           <a:p>
             <a:pPr indent="0" marL="0">
@@ -52463,8 +52644,8 @@
         </p:nvSpPr>
         <p:spPr>
           <a:xfrm>
-            <a:off x="960120" y="3950208"/>
-            <a:ext cx="4724248" cy="1609344"/>
+            <a:off x="960120" y="3986784"/>
+            <a:ext cx="4724248" cy="1700784"/>
           </a:xfrm>
           <a:prstGeom prst="rect">
             <a:avLst/>
@@ -52578,7 +52759,7 @@
           <a:ln/>
         </p:spPr>
         <p:txBody>
-          <a:bodyPr wrap="square" lIns="0" tIns="0" rIns="0" bIns="0" rtlCol="0" anchor="ctr"/>
+          <a:bodyPr wrap="square" lIns="0" tIns="0" rIns="0" bIns="0" rtlCol="0" anchor="t"/>
           <a:lstStyle/>
           <a:p>
             <a:pPr indent="0" marL="0">
@@ -52604,8 +52785,8 @@
         </p:nvSpPr>
         <p:spPr>
           <a:xfrm>
-            <a:off x="6507328" y="3950208"/>
-            <a:ext cx="4724248" cy="1609344"/>
+            <a:off x="6507328" y="3986784"/>
+            <a:ext cx="4724248" cy="1700784"/>
           </a:xfrm>
           <a:prstGeom prst="rect">
             <a:avLst/>
@@ -53007,7 +53188,7 @@
           <a:ln/>
         </p:spPr>
         <p:txBody>
-          <a:bodyPr wrap="square" lIns="0" tIns="0" rIns="0" bIns="0" rtlCol="0" anchor="ctr"/>
+          <a:bodyPr wrap="square" lIns="0" tIns="0" rIns="0" bIns="0" rtlCol="0" anchor="t"/>
           <a:lstStyle/>
           <a:p>
             <a:pPr indent="0" marL="0">
@@ -53033,8 +53214,8 @@
         </p:nvSpPr>
         <p:spPr>
           <a:xfrm>
-            <a:off x="960120" y="3310128"/>
-            <a:ext cx="4724248" cy="1426464"/>
+            <a:off x="960120" y="3346704"/>
+            <a:ext cx="4724248" cy="1517904"/>
           </a:xfrm>
           <a:prstGeom prst="rect">
             <a:avLst/>
@@ -53164,7 +53345,7 @@
           <a:ln/>
         </p:spPr>
         <p:txBody>
-          <a:bodyPr wrap="square" lIns="0" tIns="0" rIns="0" bIns="0" rtlCol="0" anchor="ctr"/>
+          <a:bodyPr wrap="square" lIns="0" tIns="0" rIns="0" bIns="0" rtlCol="0" anchor="t"/>
           <a:lstStyle/>
           <a:p>
             <a:pPr indent="0" marL="0">
@@ -53190,8 +53371,8 @@
         </p:nvSpPr>
         <p:spPr>
           <a:xfrm>
-            <a:off x="6507328" y="3310128"/>
-            <a:ext cx="4724248" cy="1426464"/>
+            <a:off x="6507328" y="3346704"/>
+            <a:ext cx="4724248" cy="1517904"/>
           </a:xfrm>
           <a:prstGeom prst="rect">
             <a:avLst/>
@@ -54641,10 +54822,12 @@
         <p:spPr>
           <a:xfrm>
             <a:off x="4609490" y="2523744"/>
-            <a:ext cx="402336" cy="402336"/>
-          </a:xfrm>
-          <a:prstGeom prst="ellipse">
-            <a:avLst/>
+            <a:ext cx="471739" cy="402336"/>
+          </a:xfrm>
+          <a:prstGeom prst="roundRect">
+            <a:avLst>
+              <a:gd name="adj" fmla="val 50000"/>
+            </a:avLst>
           </a:prstGeom>
           <a:solidFill>
             <a:schemeClr val="accent1"/>
@@ -54661,7 +54844,7 @@
         <p:spPr>
           <a:xfrm>
             <a:off x="4609490" y="2523744"/>
-            <a:ext cx="402336" cy="402336"/>
+            <a:ext cx="471739" cy="402336"/>
           </a:xfrm>
           <a:prstGeom prst="rect">
             <a:avLst/>
@@ -54844,10 +55027,12 @@
         <p:spPr>
           <a:xfrm>
             <a:off x="8295437" y="2523744"/>
-            <a:ext cx="402336" cy="402336"/>
-          </a:xfrm>
-          <a:prstGeom prst="ellipse">
-            <a:avLst/>
+            <a:ext cx="471739" cy="402336"/>
+          </a:xfrm>
+          <a:prstGeom prst="roundRect">
+            <a:avLst>
+              <a:gd name="adj" fmla="val 50000"/>
+            </a:avLst>
           </a:prstGeom>
           <a:solidFill>
             <a:schemeClr val="accent1"/>
@@ -54864,7 +55049,7 @@
         <p:spPr>
           <a:xfrm>
             <a:off x="8295437" y="2523744"/>
-            <a:ext cx="402336" cy="402336"/>
+            <a:ext cx="471739" cy="402336"/>
           </a:xfrm>
           <a:prstGeom prst="rect">
             <a:avLst/>
@@ -55585,14 +55770,14 @@
               <a:buNone/>
             </a:pPr>
             <a:r>
-              <a:rPr lang="en-US" sz="1400" b="1" dirty="0">
+              <a:rPr lang="en-US" sz="1300" b="1" dirty="0">
                 <a:solidFill>
                   <a:schemeClr val="bg1"/>
                 </a:solidFill>
               </a:rPr>
               <a:t>3</a:t>
             </a:r>
-            <a:endParaRPr lang="en-US" sz="1400" dirty="0"/>
+            <a:endParaRPr lang="en-US" sz="1300" dirty="0"/>
           </a:p>
         </p:txBody>
       </p:sp>
@@ -55640,12 +55825,12 @@
         </p:nvSpPr>
         <p:spPr>
           <a:xfrm>
-            <a:off x="685800" y="3877056"/>
-            <a:ext cx="1605229" cy="1645920"/>
+            <a:off x="685800" y="3840480"/>
+            <a:ext cx="1605229" cy="1572768"/>
           </a:xfrm>
           <a:prstGeom prst="roundRect">
             <a:avLst>
-              <a:gd name="adj" fmla="val 3418"/>
+              <a:gd name="adj" fmla="val 3488"/>
             </a:avLst>
           </a:prstGeom>
           <a:solidFill>
@@ -55669,7 +55854,7 @@
         </p:nvSpPr>
         <p:spPr>
           <a:xfrm>
-            <a:off x="850392" y="4041648"/>
+            <a:off x="850392" y="4005072"/>
             <a:ext cx="1276045" cy="216027"/>
           </a:xfrm>
           <a:prstGeom prst="rect">
@@ -55705,8 +55890,8 @@
         </p:nvSpPr>
         <p:spPr>
           <a:xfrm>
-            <a:off x="850392" y="4330827"/>
-            <a:ext cx="1276045" cy="1027557"/>
+            <a:off x="850392" y="4294251"/>
+            <a:ext cx="1276045" cy="954405"/>
           </a:xfrm>
           <a:prstGeom prst="rect">
             <a:avLst/>
@@ -55730,7 +55915,7 @@
                   <a:schemeClr val="accent3"/>
                 </a:solidFill>
               </a:rPr>
-              <a:t>떡 · 빛 · 문 · 목자</a:t>
+              <a:t>떡 빛 문 목자</a:t>
             </a:r>
             <a:endParaRPr lang="en-US" sz="1200" dirty="0"/>
           </a:p>
@@ -55747,7 +55932,41 @@
                   <a:schemeClr val="accent3"/>
                 </a:solidFill>
               </a:rPr>
-              <a:t>부활생명 · 길진리생명 · 포도나무</a:t>
+              <a:t>부활생명</a:t>
+            </a:r>
+            <a:endParaRPr lang="en-US" sz="1200" dirty="0"/>
+          </a:p>
+          <a:p>
+            <a:pPr indent="0" marL="0">
+              <a:lnSpc>
+                <a:spcPct val="122000"/>
+              </a:lnSpc>
+              <a:buNone/>
+            </a:pPr>
+            <a:r>
+              <a:rPr lang="en-US" sz="1200" dirty="0">
+                <a:solidFill>
+                  <a:schemeClr val="accent3"/>
+                </a:solidFill>
+              </a:rPr>
+              <a:t>길진리생명</a:t>
+            </a:r>
+            <a:endParaRPr lang="en-US" sz="1200" dirty="0"/>
+          </a:p>
+          <a:p>
+            <a:pPr indent="0" marL="0">
+              <a:lnSpc>
+                <a:spcPct val="122000"/>
+              </a:lnSpc>
+              <a:buNone/>
+            </a:pPr>
+            <a:r>
+              <a:rPr lang="en-US" sz="1200" dirty="0">
+                <a:solidFill>
+                  <a:schemeClr val="accent3"/>
+                </a:solidFill>
+              </a:rPr>
+              <a:t>포도나무</a:t>
             </a:r>
             <a:endParaRPr lang="en-US" sz="1200" dirty="0"/>
           </a:p>
@@ -55761,12 +55980,12 @@
         </p:nvSpPr>
         <p:spPr>
           <a:xfrm>
-            <a:off x="2528773" y="3877056"/>
-            <a:ext cx="1605229" cy="1645920"/>
+            <a:off x="2528773" y="3840480"/>
+            <a:ext cx="1605229" cy="1572768"/>
           </a:xfrm>
           <a:prstGeom prst="roundRect">
             <a:avLst>
-              <a:gd name="adj" fmla="val 3418"/>
+              <a:gd name="adj" fmla="val 3488"/>
             </a:avLst>
           </a:prstGeom>
           <a:solidFill>
@@ -55790,7 +56009,7 @@
         </p:nvSpPr>
         <p:spPr>
           <a:xfrm>
-            <a:off x="2693365" y="4041648"/>
+            <a:off x="2693365" y="4005072"/>
             <a:ext cx="1276045" cy="216027"/>
           </a:xfrm>
           <a:prstGeom prst="rect">
@@ -55826,8 +56045,8 @@
         </p:nvSpPr>
         <p:spPr>
           <a:xfrm>
-            <a:off x="2693365" y="4330827"/>
-            <a:ext cx="1276045" cy="1027557"/>
+            <a:off x="2693365" y="4294251"/>
+            <a:ext cx="1276045" cy="954405"/>
           </a:xfrm>
           <a:prstGeom prst="rect">
             <a:avLst/>
@@ -55882,12 +56101,12 @@
         </p:nvSpPr>
         <p:spPr>
           <a:xfrm>
-            <a:off x="4371746" y="3877056"/>
-            <a:ext cx="1605229" cy="1645920"/>
+            <a:off x="4371746" y="3840480"/>
+            <a:ext cx="1605229" cy="1572768"/>
           </a:xfrm>
           <a:prstGeom prst="roundRect">
             <a:avLst>
-              <a:gd name="adj" fmla="val 3418"/>
+              <a:gd name="adj" fmla="val 3488"/>
             </a:avLst>
           </a:prstGeom>
           <a:solidFill>
@@ -55911,7 +56130,7 @@
         </p:nvSpPr>
         <p:spPr>
           <a:xfrm>
-            <a:off x="4536338" y="4041648"/>
+            <a:off x="4536338" y="4005072"/>
             <a:ext cx="1276045" cy="216027"/>
           </a:xfrm>
           <a:prstGeom prst="rect">
@@ -55947,8 +56166,8 @@
         </p:nvSpPr>
         <p:spPr>
           <a:xfrm>
-            <a:off x="4536338" y="4330827"/>
-            <a:ext cx="1276045" cy="1027557"/>
+            <a:off x="4536338" y="4294251"/>
+            <a:ext cx="1276045" cy="954405"/>
           </a:xfrm>
           <a:prstGeom prst="rect">
             <a:avLst/>
@@ -56003,12 +56222,12 @@
         </p:nvSpPr>
         <p:spPr>
           <a:xfrm>
-            <a:off x="6214720" y="3877056"/>
-            <a:ext cx="1605229" cy="1645920"/>
+            <a:off x="6214720" y="3840480"/>
+            <a:ext cx="1605229" cy="1572768"/>
           </a:xfrm>
           <a:prstGeom prst="roundRect">
             <a:avLst>
-              <a:gd name="adj" fmla="val 3418"/>
+              <a:gd name="adj" fmla="val 3488"/>
             </a:avLst>
           </a:prstGeom>
           <a:solidFill>
@@ -56032,7 +56251,7 @@
         </p:nvSpPr>
         <p:spPr>
           <a:xfrm>
-            <a:off x="6379312" y="4041648"/>
+            <a:off x="6379312" y="4005072"/>
             <a:ext cx="1276045" cy="216027"/>
           </a:xfrm>
           <a:prstGeom prst="rect">
@@ -56068,8 +56287,8 @@
         </p:nvSpPr>
         <p:spPr>
           <a:xfrm>
-            <a:off x="6379312" y="4330827"/>
-            <a:ext cx="1276045" cy="1027557"/>
+            <a:off x="6379312" y="4294251"/>
+            <a:ext cx="1276045" cy="954405"/>
           </a:xfrm>
           <a:prstGeom prst="rect">
             <a:avLst/>
@@ -56124,12 +56343,12 @@
         </p:nvSpPr>
         <p:spPr>
           <a:xfrm>
-            <a:off x="8057693" y="3877056"/>
-            <a:ext cx="1605229" cy="1645920"/>
+            <a:off x="8057693" y="3840480"/>
+            <a:ext cx="1605229" cy="1572768"/>
           </a:xfrm>
           <a:prstGeom prst="roundRect">
             <a:avLst>
-              <a:gd name="adj" fmla="val 3418"/>
+              <a:gd name="adj" fmla="val 3488"/>
             </a:avLst>
           </a:prstGeom>
           <a:solidFill>
@@ -56153,7 +56372,7 @@
         </p:nvSpPr>
         <p:spPr>
           <a:xfrm>
-            <a:off x="8222285" y="4041648"/>
+            <a:off x="8222285" y="4005072"/>
             <a:ext cx="1276045" cy="216027"/>
           </a:xfrm>
           <a:prstGeom prst="rect">
@@ -56189,8 +56408,8 @@
         </p:nvSpPr>
         <p:spPr>
           <a:xfrm>
-            <a:off x="8222285" y="4330827"/>
-            <a:ext cx="1276045" cy="1027557"/>
+            <a:off x="8222285" y="4294251"/>
+            <a:ext cx="1276045" cy="954405"/>
           </a:xfrm>
           <a:prstGeom prst="rect">
             <a:avLst/>
@@ -56214,7 +56433,24 @@
                   <a:schemeClr val="accent3"/>
                 </a:solidFill>
               </a:rPr>
-              <a:t>가 왕 베 오 물 실 나</a:t>
+              <a:t>가왕베</a:t>
+            </a:r>
+            <a:endParaRPr lang="en-US" sz="1200" dirty="0"/>
+          </a:p>
+          <a:p>
+            <a:pPr indent="0" marL="0">
+              <a:lnSpc>
+                <a:spcPct val="122000"/>
+              </a:lnSpc>
+              <a:buNone/>
+            </a:pPr>
+            <a:r>
+              <a:rPr lang="en-US" sz="1200" dirty="0">
+                <a:solidFill>
+                  <a:schemeClr val="accent3"/>
+                </a:solidFill>
+              </a:rPr>
+              <a:t>오물실나</a:t>
             </a:r>
             <a:endParaRPr lang="en-US" sz="1200" dirty="0"/>
           </a:p>
@@ -56228,12 +56464,12 @@
         </p:nvSpPr>
         <p:spPr>
           <a:xfrm>
-            <a:off x="9900666" y="3877056"/>
-            <a:ext cx="1605229" cy="1645920"/>
+            <a:off x="9900666" y="3840480"/>
+            <a:ext cx="1605229" cy="1572768"/>
           </a:xfrm>
           <a:prstGeom prst="roundRect">
             <a:avLst>
-              <a:gd name="adj" fmla="val 3418"/>
+              <a:gd name="adj" fmla="val 3488"/>
             </a:avLst>
           </a:prstGeom>
           <a:solidFill>
@@ -56257,7 +56493,7 @@
         </p:nvSpPr>
         <p:spPr>
           <a:xfrm>
-            <a:off x="10065258" y="4041648"/>
+            <a:off x="10065258" y="4005072"/>
             <a:ext cx="1276045" cy="216027"/>
           </a:xfrm>
           <a:prstGeom prst="rect">
@@ -56293,8 +56529,8 @@
         </p:nvSpPr>
         <p:spPr>
           <a:xfrm>
-            <a:off x="10065258" y="4330827"/>
-            <a:ext cx="1276045" cy="1027557"/>
+            <a:off x="10065258" y="4294251"/>
+            <a:ext cx="1276045" cy="954405"/>
           </a:xfrm>
           <a:prstGeom prst="rect">
             <a:avLst/>
@@ -56318,7 +56554,7 @@
                   <a:schemeClr val="accent3"/>
                 </a:solidFill>
               </a:rPr>
-              <a:t>명절마다 예루살렘으로</a:t>
+              <a:t>명절마다</a:t>
             </a:r>
             <a:endParaRPr lang="en-US" sz="1200" dirty="0"/>
           </a:p>
@@ -56335,7 +56571,7 @@
                   <a:schemeClr val="accent3"/>
                 </a:solidFill>
               </a:rPr>
-              <a:t>올라가심 (공관복음은</a:t>
+              <a:t>예루살렘으로</a:t>
             </a:r>
             <a:endParaRPr lang="en-US" sz="1200" dirty="0"/>
           </a:p>
@@ -56352,7 +56588,7 @@
                   <a:schemeClr val="accent3"/>
                 </a:solidFill>
               </a:rPr>
-              <a:t>갈릴리 중심)</a:t>
+              <a:t>올라가심</a:t>
             </a:r>
             <a:endParaRPr lang="en-US" sz="1200" dirty="0"/>
           </a:p>
@@ -56366,7 +56602,7 @@
         </p:nvSpPr>
         <p:spPr>
           <a:xfrm>
-            <a:off x="685800" y="5632704"/>
+            <a:off x="685800" y="5596128"/>
             <a:ext cx="10820095" cy="512064"/>
           </a:xfrm>
           <a:prstGeom prst="roundRect">
@@ -56388,7 +56624,7 @@
         </p:nvSpPr>
         <p:spPr>
           <a:xfrm>
-            <a:off x="960120" y="5632704"/>
+            <a:off x="960120" y="5596128"/>
             <a:ext cx="10271455" cy="512064"/>
           </a:xfrm>
           <a:prstGeom prst="rect">
@@ -56565,12 +56801,12 @@
         </p:nvSpPr>
         <p:spPr>
           <a:xfrm>
-            <a:off x="685800" y="1572768"/>
-            <a:ext cx="2526716" cy="2468880"/>
+            <a:off x="685800" y="1554480"/>
+            <a:ext cx="2526716" cy="2743200"/>
           </a:xfrm>
           <a:prstGeom prst="roundRect">
             <a:avLst>
-              <a:gd name="adj" fmla="val 2222"/>
+              <a:gd name="adj" fmla="val 2171"/>
             </a:avLst>
           </a:prstGeom>
           <a:solidFill>
@@ -56594,7 +56830,7 @@
         </p:nvSpPr>
         <p:spPr>
           <a:xfrm>
-            <a:off x="923544" y="1810512"/>
+            <a:off x="923544" y="1792224"/>
             <a:ext cx="402336" cy="402336"/>
           </a:xfrm>
           <a:prstGeom prst="ellipse">
@@ -56614,7 +56850,7 @@
         </p:nvSpPr>
         <p:spPr>
           <a:xfrm>
-            <a:off x="923544" y="1810512"/>
+            <a:off x="923544" y="1792224"/>
             <a:ext cx="402336" cy="402336"/>
           </a:xfrm>
           <a:prstGeom prst="rect">
@@ -56650,7 +56886,7 @@
         </p:nvSpPr>
         <p:spPr>
           <a:xfrm>
-            <a:off x="923544" y="2340864"/>
+            <a:off x="923544" y="2322576"/>
             <a:ext cx="2051228" cy="288036"/>
           </a:xfrm>
           <a:prstGeom prst="rect">
@@ -56686,8 +56922,8 @@
         </p:nvSpPr>
         <p:spPr>
           <a:xfrm>
-            <a:off x="923544" y="2702052"/>
-            <a:ext cx="2051228" cy="838200"/>
+            <a:off x="923544" y="2683764"/>
+            <a:ext cx="2051228" cy="1039368"/>
           </a:xfrm>
           <a:prstGeom prst="rect">
             <a:avLst/>
@@ -56742,8 +56978,8 @@
         </p:nvSpPr>
         <p:spPr>
           <a:xfrm>
-            <a:off x="923544" y="3576828"/>
-            <a:ext cx="2051228" cy="263652"/>
+            <a:off x="923544" y="3759708"/>
+            <a:ext cx="2051228" cy="336804"/>
           </a:xfrm>
           <a:prstGeom prst="rect">
             <a:avLst/>
@@ -56778,12 +57014,12 @@
         </p:nvSpPr>
         <p:spPr>
           <a:xfrm>
-            <a:off x="3450260" y="1572768"/>
-            <a:ext cx="2526716" cy="2468880"/>
+            <a:off x="3450260" y="1554480"/>
+            <a:ext cx="2526716" cy="2743200"/>
           </a:xfrm>
           <a:prstGeom prst="roundRect">
             <a:avLst>
-              <a:gd name="adj" fmla="val 2222"/>
+              <a:gd name="adj" fmla="val 2171"/>
             </a:avLst>
           </a:prstGeom>
           <a:solidFill>
@@ -56807,7 +57043,7 @@
         </p:nvSpPr>
         <p:spPr>
           <a:xfrm>
-            <a:off x="3688004" y="1810512"/>
+            <a:off x="3688004" y="1792224"/>
             <a:ext cx="402336" cy="402336"/>
           </a:xfrm>
           <a:prstGeom prst="ellipse">
@@ -56827,7 +57063,7 @@
         </p:nvSpPr>
         <p:spPr>
           <a:xfrm>
-            <a:off x="3688004" y="1810512"/>
+            <a:off x="3688004" y="1792224"/>
             <a:ext cx="402336" cy="402336"/>
           </a:xfrm>
           <a:prstGeom prst="rect">
@@ -56863,7 +57099,7 @@
         </p:nvSpPr>
         <p:spPr>
           <a:xfrm>
-            <a:off x="3688004" y="2340864"/>
+            <a:off x="3688004" y="2322576"/>
             <a:ext cx="2051228" cy="288036"/>
           </a:xfrm>
           <a:prstGeom prst="rect">
@@ -56899,8 +57135,8 @@
         </p:nvSpPr>
         <p:spPr>
           <a:xfrm>
-            <a:off x="3688004" y="2702052"/>
-            <a:ext cx="2051228" cy="838200"/>
+            <a:off x="3688004" y="2683764"/>
+            <a:ext cx="2051228" cy="1039368"/>
           </a:xfrm>
           <a:prstGeom prst="rect">
             <a:avLst/>
@@ -56955,8 +57191,8 @@
         </p:nvSpPr>
         <p:spPr>
           <a:xfrm>
-            <a:off x="3688004" y="3576828"/>
-            <a:ext cx="2051228" cy="263652"/>
+            <a:off x="3688004" y="3759708"/>
+            <a:ext cx="2051228" cy="336804"/>
           </a:xfrm>
           <a:prstGeom prst="rect">
             <a:avLst/>
@@ -56991,12 +57227,12 @@
         </p:nvSpPr>
         <p:spPr>
           <a:xfrm>
-            <a:off x="6214720" y="1572768"/>
-            <a:ext cx="2526716" cy="2468880"/>
+            <a:off x="6214720" y="1554480"/>
+            <a:ext cx="2526716" cy="2743200"/>
           </a:xfrm>
           <a:prstGeom prst="roundRect">
             <a:avLst>
-              <a:gd name="adj" fmla="val 2222"/>
+              <a:gd name="adj" fmla="val 2171"/>
             </a:avLst>
           </a:prstGeom>
           <a:solidFill>
@@ -57020,7 +57256,7 @@
         </p:nvSpPr>
         <p:spPr>
           <a:xfrm>
-            <a:off x="6452464" y="1810512"/>
+            <a:off x="6452464" y="1792224"/>
             <a:ext cx="402336" cy="402336"/>
           </a:xfrm>
           <a:prstGeom prst="ellipse">
@@ -57040,7 +57276,7 @@
         </p:nvSpPr>
         <p:spPr>
           <a:xfrm>
-            <a:off x="6452464" y="1810512"/>
+            <a:off x="6452464" y="1792224"/>
             <a:ext cx="402336" cy="402336"/>
           </a:xfrm>
           <a:prstGeom prst="rect">
@@ -57076,7 +57312,7 @@
         </p:nvSpPr>
         <p:spPr>
           <a:xfrm>
-            <a:off x="6452464" y="2340864"/>
+            <a:off x="6452464" y="2322576"/>
             <a:ext cx="2051228" cy="288036"/>
           </a:xfrm>
           <a:prstGeom prst="rect">
@@ -57112,8 +57348,8 @@
         </p:nvSpPr>
         <p:spPr>
           <a:xfrm>
-            <a:off x="6452464" y="2702052"/>
-            <a:ext cx="2051228" cy="838200"/>
+            <a:off x="6452464" y="2683764"/>
+            <a:ext cx="2051228" cy="1039368"/>
           </a:xfrm>
           <a:prstGeom prst="rect">
             <a:avLst/>
@@ -57168,8 +57404,8 @@
         </p:nvSpPr>
         <p:spPr>
           <a:xfrm>
-            <a:off x="6452464" y="3576828"/>
-            <a:ext cx="2051228" cy="263652"/>
+            <a:off x="6452464" y="3759708"/>
+            <a:ext cx="2051228" cy="336804"/>
           </a:xfrm>
           <a:prstGeom prst="rect">
             <a:avLst/>
@@ -57204,12 +57440,12 @@
         </p:nvSpPr>
         <p:spPr>
           <a:xfrm>
-            <a:off x="8979179" y="1572768"/>
-            <a:ext cx="2526716" cy="2468880"/>
+            <a:off x="8979179" y="1554480"/>
+            <a:ext cx="2526716" cy="2743200"/>
           </a:xfrm>
           <a:prstGeom prst="roundRect">
             <a:avLst>
-              <a:gd name="adj" fmla="val 2222"/>
+              <a:gd name="adj" fmla="val 2171"/>
             </a:avLst>
           </a:prstGeom>
           <a:solidFill>
@@ -57233,7 +57469,7 @@
         </p:nvSpPr>
         <p:spPr>
           <a:xfrm>
-            <a:off x="9216923" y="1810512"/>
+            <a:off x="9216923" y="1792224"/>
             <a:ext cx="402336" cy="402336"/>
           </a:xfrm>
           <a:prstGeom prst="ellipse">
@@ -57253,7 +57489,7 @@
         </p:nvSpPr>
         <p:spPr>
           <a:xfrm>
-            <a:off x="9216923" y="1810512"/>
+            <a:off x="9216923" y="1792224"/>
             <a:ext cx="402336" cy="402336"/>
           </a:xfrm>
           <a:prstGeom prst="rect">
@@ -57289,7 +57525,7 @@
         </p:nvSpPr>
         <p:spPr>
           <a:xfrm>
-            <a:off x="9216923" y="2340864"/>
+            <a:off x="9216923" y="2322576"/>
             <a:ext cx="2051228" cy="288036"/>
           </a:xfrm>
           <a:prstGeom prst="rect">
@@ -57325,8 +57561,8 @@
         </p:nvSpPr>
         <p:spPr>
           <a:xfrm>
-            <a:off x="9216923" y="2702052"/>
-            <a:ext cx="2051228" cy="838200"/>
+            <a:off x="9216923" y="2683764"/>
+            <a:ext cx="2051228" cy="1039368"/>
           </a:xfrm>
           <a:prstGeom prst="rect">
             <a:avLst/>
@@ -57381,8 +57617,8 @@
         </p:nvSpPr>
         <p:spPr>
           <a:xfrm>
-            <a:off x="9216923" y="3576828"/>
-            <a:ext cx="2051228" cy="263652"/>
+            <a:off x="9216923" y="3759708"/>
+            <a:ext cx="2051228" cy="336804"/>
           </a:xfrm>
           <a:prstGeom prst="rect">
             <a:avLst/>
@@ -57417,8 +57653,8 @@
         </p:nvSpPr>
         <p:spPr>
           <a:xfrm>
-            <a:off x="685800" y="4261104"/>
-            <a:ext cx="10789920" cy="1097280"/>
+            <a:off x="685800" y="4572000"/>
+            <a:ext cx="10789920" cy="640080"/>
           </a:xfrm>
           <a:prstGeom prst="rect">
             <a:avLst/>
@@ -57437,14 +57673,14 @@
               <a:buNone/>
             </a:pPr>
             <a:r>
-              <a:rPr lang="en-US" sz="1900" i="1" dirty="0">
+              <a:rPr lang="en-US" sz="2100" i="1" dirty="0">
                 <a:solidFill>
                   <a:schemeClr val="tx1"/>
                 </a:solidFill>
               </a:rPr>
               <a:t>“영접하는 자 곧 그 이름을 믿는 자들에게는 하나님의 자녀가 되는 권세를 주셨으니”</a:t>
             </a:r>
-            <a:endParaRPr lang="en-US" sz="1900" dirty="0"/>
+            <a:endParaRPr lang="en-US" sz="2100" dirty="0"/>
           </a:p>
         </p:txBody>
       </p:sp>
@@ -57456,7 +57692,7 @@
         </p:nvSpPr>
         <p:spPr>
           <a:xfrm>
-            <a:off x="685800" y="5413248"/>
+            <a:off x="685800" y="5266944"/>
             <a:ext cx="10789920" cy="365760"/>
           </a:xfrm>
           <a:prstGeom prst="rect">
@@ -57810,11 +58046,11 @@
         <p:spPr>
           <a:xfrm>
             <a:off x="685800" y="1536192"/>
-            <a:ext cx="5577840" cy="676656"/>
+            <a:ext cx="5577840" cy="713232"/>
           </a:xfrm>
           <a:prstGeom prst="roundRect">
             <a:avLst>
-              <a:gd name="adj" fmla="val 8108"/>
+              <a:gd name="adj" fmla="val 7692"/>
             </a:avLst>
           </a:prstGeom>
           <a:solidFill>
@@ -57868,7 +58104,7 @@
         <p:spPr>
           <a:xfrm>
             <a:off x="868680" y="1865376"/>
-            <a:ext cx="5212080" cy="274320"/>
+            <a:ext cx="5212080" cy="310896"/>
           </a:xfrm>
           <a:prstGeom prst="rect">
             <a:avLst/>
@@ -57906,7 +58142,7 @@
         </p:nvSpPr>
         <p:spPr>
           <a:xfrm>
-            <a:off x="685800" y="2340864"/>
+            <a:off x="685800" y="2377440"/>
             <a:ext cx="5577840" cy="914400"/>
           </a:xfrm>
           <a:prstGeom prst="roundRect">
@@ -57928,7 +58164,7 @@
         </p:nvSpPr>
         <p:spPr>
           <a:xfrm>
-            <a:off x="868680" y="2414016"/>
+            <a:off x="868680" y="2450592"/>
             <a:ext cx="5212080" cy="274320"/>
           </a:xfrm>
           <a:prstGeom prst="rect">
@@ -57964,7 +58200,7 @@
         </p:nvSpPr>
         <p:spPr>
           <a:xfrm>
-            <a:off x="868680" y="2670048"/>
+            <a:off x="868680" y="2706624"/>
             <a:ext cx="5212080" cy="512064"/>
           </a:xfrm>
           <a:prstGeom prst="rect">
@@ -58020,12 +58256,12 @@
         </p:nvSpPr>
         <p:spPr>
           <a:xfrm>
-            <a:off x="685800" y="3383280"/>
-            <a:ext cx="5577840" cy="676656"/>
+            <a:off x="685800" y="3419856"/>
+            <a:ext cx="5577840" cy="713232"/>
           </a:xfrm>
           <a:prstGeom prst="roundRect">
             <a:avLst>
-              <a:gd name="adj" fmla="val 8108"/>
+              <a:gd name="adj" fmla="val 7692"/>
             </a:avLst>
           </a:prstGeom>
           <a:solidFill>
@@ -58042,7 +58278,7 @@
         </p:nvSpPr>
         <p:spPr>
           <a:xfrm>
-            <a:off x="868680" y="3456432"/>
+            <a:off x="868680" y="3493008"/>
             <a:ext cx="5212080" cy="274320"/>
           </a:xfrm>
           <a:prstGeom prst="rect">
@@ -58078,8 +58314,8 @@
         </p:nvSpPr>
         <p:spPr>
           <a:xfrm>
-            <a:off x="868680" y="3712464"/>
-            <a:ext cx="5212080" cy="274320"/>
+            <a:off x="868680" y="3749040"/>
+            <a:ext cx="5212080" cy="310896"/>
           </a:xfrm>
           <a:prstGeom prst="rect">
             <a:avLst/>
@@ -58117,12 +58353,12 @@
         </p:nvSpPr>
         <p:spPr>
           <a:xfrm>
-            <a:off x="685800" y="4187952"/>
-            <a:ext cx="5577840" cy="676656"/>
+            <a:off x="685800" y="4261104"/>
+            <a:ext cx="5577840" cy="713232"/>
           </a:xfrm>
           <a:prstGeom prst="roundRect">
             <a:avLst>
-              <a:gd name="adj" fmla="val 8108"/>
+              <a:gd name="adj" fmla="val 7692"/>
             </a:avLst>
           </a:prstGeom>
           <a:solidFill>
@@ -58139,7 +58375,7 @@
         </p:nvSpPr>
         <p:spPr>
           <a:xfrm>
-            <a:off x="868680" y="4261104"/>
+            <a:off x="868680" y="4334256"/>
             <a:ext cx="5212080" cy="274320"/>
           </a:xfrm>
           <a:prstGeom prst="rect">
@@ -58175,8 +58411,8 @@
         </p:nvSpPr>
         <p:spPr>
           <a:xfrm>
-            <a:off x="868680" y="4517136"/>
-            <a:ext cx="5212080" cy="274320"/>
+            <a:off x="868680" y="4590288"/>
+            <a:ext cx="5212080" cy="310896"/>
           </a:xfrm>
           <a:prstGeom prst="rect">
             <a:avLst/>
@@ -58215,11 +58451,11 @@
         <p:spPr>
           <a:xfrm>
             <a:off x="6473952" y="1536192"/>
-            <a:ext cx="5577840" cy="676656"/>
+            <a:ext cx="5577840" cy="603504"/>
           </a:xfrm>
           <a:prstGeom prst="roundRect">
             <a:avLst>
-              <a:gd name="adj" fmla="val 8108"/>
+              <a:gd name="adj" fmla="val 9091"/>
             </a:avLst>
           </a:prstGeom>
           <a:solidFill>
@@ -58273,7 +58509,7 @@
         <p:spPr>
           <a:xfrm>
             <a:off x="6656832" y="1865376"/>
-            <a:ext cx="5212080" cy="274320"/>
+            <a:ext cx="5212080" cy="201168"/>
           </a:xfrm>
           <a:prstGeom prst="rect">
             <a:avLst/>
@@ -58311,12 +58547,12 @@
         </p:nvSpPr>
         <p:spPr>
           <a:xfrm>
-            <a:off x="6473952" y="2340864"/>
-            <a:ext cx="5577840" cy="676656"/>
+            <a:off x="6473952" y="2267712"/>
+            <a:ext cx="5577840" cy="603504"/>
           </a:xfrm>
           <a:prstGeom prst="roundRect">
             <a:avLst>
-              <a:gd name="adj" fmla="val 8108"/>
+              <a:gd name="adj" fmla="val 9091"/>
             </a:avLst>
           </a:prstGeom>
           <a:solidFill>
@@ -58333,7 +58569,7 @@
         </p:nvSpPr>
         <p:spPr>
           <a:xfrm>
-            <a:off x="6656832" y="2414016"/>
+            <a:off x="6656832" y="2340864"/>
             <a:ext cx="5212080" cy="274320"/>
           </a:xfrm>
           <a:prstGeom prst="rect">
@@ -58369,8 +58605,8 @@
         </p:nvSpPr>
         <p:spPr>
           <a:xfrm>
-            <a:off x="6656832" y="2670048"/>
-            <a:ext cx="5212080" cy="274320"/>
+            <a:off x="6656832" y="2596896"/>
+            <a:ext cx="5212080" cy="201168"/>
           </a:xfrm>
           <a:prstGeom prst="rect">
             <a:avLst/>
@@ -58408,12 +58644,12 @@
         </p:nvSpPr>
         <p:spPr>
           <a:xfrm>
-            <a:off x="6473952" y="3145536"/>
-            <a:ext cx="5577840" cy="676656"/>
+            <a:off x="6473952" y="2999232"/>
+            <a:ext cx="5577840" cy="603504"/>
           </a:xfrm>
           <a:prstGeom prst="roundRect">
             <a:avLst>
-              <a:gd name="adj" fmla="val 8108"/>
+              <a:gd name="adj" fmla="val 9091"/>
             </a:avLst>
           </a:prstGeom>
           <a:solidFill>
@@ -58430,7 +58666,7 @@
         </p:nvSpPr>
         <p:spPr>
           <a:xfrm>
-            <a:off x="6656832" y="3218688"/>
+            <a:off x="6656832" y="3072384"/>
             <a:ext cx="5212080" cy="274320"/>
           </a:xfrm>
           <a:prstGeom prst="rect">
@@ -58466,8 +58702,8 @@
         </p:nvSpPr>
         <p:spPr>
           <a:xfrm>
-            <a:off x="6656832" y="3474720"/>
-            <a:ext cx="5212080" cy="274320"/>
+            <a:off x="6656832" y="3328416"/>
+            <a:ext cx="5212080" cy="201168"/>
           </a:xfrm>
           <a:prstGeom prst="rect">
             <a:avLst/>
@@ -58505,12 +58741,12 @@
         </p:nvSpPr>
         <p:spPr>
           <a:xfrm>
-            <a:off x="6473952" y="3950208"/>
-            <a:ext cx="5577840" cy="676656"/>
+            <a:off x="6473952" y="3730752"/>
+            <a:ext cx="5577840" cy="603504"/>
           </a:xfrm>
           <a:prstGeom prst="roundRect">
             <a:avLst>
-              <a:gd name="adj" fmla="val 8108"/>
+              <a:gd name="adj" fmla="val 9091"/>
             </a:avLst>
           </a:prstGeom>
           <a:solidFill>
@@ -58527,7 +58763,7 @@
         </p:nvSpPr>
         <p:spPr>
           <a:xfrm>
-            <a:off x="6656832" y="4023360"/>
+            <a:off x="6656832" y="3803904"/>
             <a:ext cx="5212080" cy="274320"/>
           </a:xfrm>
           <a:prstGeom prst="rect">
@@ -58563,8 +58799,8 @@
         </p:nvSpPr>
         <p:spPr>
           <a:xfrm>
-            <a:off x="6656832" y="4279392"/>
-            <a:ext cx="5212080" cy="274320"/>
+            <a:off x="6656832" y="4059936"/>
+            <a:ext cx="5212080" cy="201168"/>
           </a:xfrm>
           <a:prstGeom prst="rect">
             <a:avLst/>
@@ -58602,12 +58838,12 @@
         </p:nvSpPr>
         <p:spPr>
           <a:xfrm>
-            <a:off x="6473952" y="4754880"/>
-            <a:ext cx="5577840" cy="676656"/>
+            <a:off x="6473952" y="4462272"/>
+            <a:ext cx="5577840" cy="603504"/>
           </a:xfrm>
           <a:prstGeom prst="roundRect">
             <a:avLst>
-              <a:gd name="adj" fmla="val 8108"/>
+              <a:gd name="adj" fmla="val 9091"/>
             </a:avLst>
           </a:prstGeom>
           <a:solidFill>
@@ -58624,7 +58860,7 @@
         </p:nvSpPr>
         <p:spPr>
           <a:xfrm>
-            <a:off x="6656832" y="4828032"/>
+            <a:off x="6656832" y="4535424"/>
             <a:ext cx="5212080" cy="274320"/>
           </a:xfrm>
           <a:prstGeom prst="rect">
@@ -58660,8 +58896,8 @@
         </p:nvSpPr>
         <p:spPr>
           <a:xfrm>
-            <a:off x="6656832" y="5084064"/>
-            <a:ext cx="5212080" cy="274320"/>
+            <a:off x="6656832" y="4791456"/>
+            <a:ext cx="5212080" cy="201168"/>
           </a:xfrm>
           <a:prstGeom prst="rect">
             <a:avLst/>
@@ -58699,12 +58935,12 @@
         </p:nvSpPr>
         <p:spPr>
           <a:xfrm>
-            <a:off x="6473952" y="5559552"/>
-            <a:ext cx="5577840" cy="676656"/>
+            <a:off x="6473952" y="5193792"/>
+            <a:ext cx="5577840" cy="603504"/>
           </a:xfrm>
           <a:prstGeom prst="roundRect">
             <a:avLst>
-              <a:gd name="adj" fmla="val 8108"/>
+              <a:gd name="adj" fmla="val 9091"/>
             </a:avLst>
           </a:prstGeom>
           <a:solidFill>
@@ -58721,7 +58957,7 @@
         </p:nvSpPr>
         <p:spPr>
           <a:xfrm>
-            <a:off x="6656832" y="5632704"/>
+            <a:off x="6656832" y="5266944"/>
             <a:ext cx="5212080" cy="274320"/>
           </a:xfrm>
           <a:prstGeom prst="rect">
@@ -58757,8 +58993,8 @@
         </p:nvSpPr>
         <p:spPr>
           <a:xfrm>
-            <a:off x="6656832" y="5888736"/>
-            <a:ext cx="5212080" cy="274320"/>
+            <a:off x="6656832" y="5522976"/>
+            <a:ext cx="5212080" cy="201168"/>
           </a:xfrm>
           <a:prstGeom prst="rect">
             <a:avLst/>
@@ -58796,7 +59032,7 @@
         </p:nvSpPr>
         <p:spPr>
           <a:xfrm>
-            <a:off x="6473952" y="5760720"/>
+            <a:off x="685800" y="5193792"/>
             <a:ext cx="5577840" cy="329184"/>
           </a:xfrm>
           <a:prstGeom prst="rect">
@@ -60606,10 +60842,12 @@
         <p:spPr>
           <a:xfrm>
             <a:off x="685800" y="4910328"/>
-            <a:ext cx="347472" cy="347472"/>
-          </a:xfrm>
-          <a:prstGeom prst="ellipse">
-            <a:avLst/>
+            <a:ext cx="375453" cy="347472"/>
+          </a:xfrm>
+          <a:prstGeom prst="roundRect">
+            <a:avLst>
+              <a:gd name="adj" fmla="val 50000"/>
+            </a:avLst>
           </a:prstGeom>
           <a:solidFill>
             <a:schemeClr val="accent1"/>
@@ -60626,7 +60864,7 @@
         <p:spPr>
           <a:xfrm>
             <a:off x="685800" y="4910328"/>
-            <a:ext cx="347472" cy="347472"/>
+            <a:ext cx="375453" cy="347472"/>
           </a:xfrm>
           <a:prstGeom prst="rect">
             <a:avLst/>
@@ -60642,14 +60880,14 @@
               <a:buNone/>
             </a:pPr>
             <a:r>
-              <a:rPr lang="en-US" sz="1400" b="1" dirty="0">
+              <a:rPr lang="en-US" sz="1300" b="1" dirty="0">
                 <a:solidFill>
                   <a:schemeClr val="bg1"/>
                 </a:solidFill>
               </a:rPr>
               <a:t>cf</a:t>
             </a:r>
-            <a:endParaRPr lang="en-US" sz="1400" dirty="0"/>
+            <a:endParaRPr lang="en-US" sz="1300" dirty="0"/>
           </a:p>
         </p:txBody>
       </p:sp>
@@ -60661,8 +60899,8 @@
         </p:nvSpPr>
         <p:spPr>
           <a:xfrm>
-            <a:off x="1161288" y="4901184"/>
-            <a:ext cx="10344607" cy="365760"/>
+            <a:off x="1189269" y="4901184"/>
+            <a:ext cx="10316627" cy="365760"/>
           </a:xfrm>
           <a:prstGeom prst="rect">
             <a:avLst/>

--- a/dist/요한복음_1강_영광을_만나기_위한_준비.pptx
+++ b/dist/요한복음_1강_영광을_만나기_위한_준비.pptx
@@ -166,7 +166,7 @@
   <p:extLst>
     <p:ext uri="{521415D9-36F7-43E2-AB2F-B90AF26B5E84}">
       <p14:sectionLst xmlns:p14="http://schemas.microsoft.com/office/powerpoint/2010/main">
-        <p14:section name="오리엔테이션" id="{259bf60d-900c-1b49-2578-852634c02635}">
+        <p14:section name="오리엔테이션" id="{6a3a258a-a223-7696-3547-281b0ff65045}">
           <p14:sldIdLst>
             <p14:sldId id="256"/>
             <p14:sldId id="257"/>
@@ -178,7 +178,7 @@
             <p14:sldId id="263"/>
           </p14:sldIdLst>
         </p14:section>
-        <p14:section name="요한복음 분석" id="{119c23d2-4124-5017-72bc-818f6897561c}">
+        <p14:section name="요한복음 분석" id="{7e1a14cc-b8af-5dd6-c80f-d08aaa17019d}">
           <p14:sldIdLst>
             <p14:sldId id="264"/>
             <p14:sldId id="265"/>
@@ -198,7 +198,7 @@
             <p14:sldId id="279"/>
           </p14:sldIdLst>
         </p14:section>
-        <p14:section name="1과 · 예수님에 대한 증언" id="{12dcd7f3-0c82-b606-836a-ac9c96f47c90}">
+        <p14:section name="1과 · 예수님에 대한 증언" id="{405c18ee-789c-cb72-0764-ef0d2a965d92}">
           <p14:sldIdLst>
             <p14:sldId id="280"/>
             <p14:sldId id="281"/>
@@ -218,7 +218,7 @@
             <p14:sldId id="295"/>
           </p14:sldIdLst>
         </p14:section>
-        <p14:section name="1과 · 하나님에 대한 증언" id="{323f61d0-1dc8-c8c1-72b7-5be2486c7f7d}">
+        <p14:section name="1과 · 하나님에 대한 증언" id="{f227b6a4-fc02-c134-03cb-7c434877197e}">
           <p14:sldIdLst>
             <p14:sldId id="296"/>
             <p14:sldId id="297"/>
@@ -237,14 +237,14 @@
             <p14:sldId id="310"/>
           </p14:sldIdLst>
         </p14:section>
-        <p14:section name="마무리" id="{064b5681-e0f1-7598-b221-1967b37e3aa6}">
+        <p14:section name="마무리" id="{3104a066-b785-8dfd-488f-cc3e85b81271}">
           <p14:sldIdLst>
             <p14:sldId id="311"/>
             <p14:sldId id="312"/>
             <p14:sldId id="313"/>
           </p14:sldIdLst>
         </p14:section>
-        <p14:section name="부록" id="{1aa4c20a-ab3d-fd06-059f-666ccb69f58d}">
+        <p14:section name="부록" id="{76afa65c-6f6d-63d5-43b6-a755ba6bbdf2}">
           <p14:sldIdLst>
             <p14:sldId id="314"/>
             <p14:sldId id="315"/>
@@ -10421,7 +10421,7 @@
         <p:spPr>
           <a:xfrm>
             <a:off x="923544" y="2740914"/>
-            <a:ext cx="2051228" cy="1119378"/>
+            <a:ext cx="2051228" cy="1046226"/>
           </a:xfrm>
           <a:prstGeom prst="rect">
             <a:avLst/>
@@ -10476,8 +10476,8 @@
         </p:nvSpPr>
         <p:spPr>
           <a:xfrm>
-            <a:off x="923544" y="3896868"/>
-            <a:ext cx="2051228" cy="336804"/>
+            <a:off x="923544" y="3823716"/>
+            <a:ext cx="2051228" cy="409956"/>
           </a:xfrm>
           <a:prstGeom prst="rect">
             <a:avLst/>
@@ -10634,7 +10634,7 @@
         <p:spPr>
           <a:xfrm>
             <a:off x="3688004" y="2740914"/>
-            <a:ext cx="2051228" cy="1119378"/>
+            <a:ext cx="2051228" cy="1046226"/>
           </a:xfrm>
           <a:prstGeom prst="rect">
             <a:avLst/>
@@ -10689,8 +10689,8 @@
         </p:nvSpPr>
         <p:spPr>
           <a:xfrm>
-            <a:off x="3688004" y="3896868"/>
-            <a:ext cx="2051228" cy="336804"/>
+            <a:off x="3688004" y="3823716"/>
+            <a:ext cx="2051228" cy="409956"/>
           </a:xfrm>
           <a:prstGeom prst="rect">
             <a:avLst/>
@@ -10849,7 +10849,7 @@
         <p:spPr>
           <a:xfrm>
             <a:off x="6452464" y="2740914"/>
-            <a:ext cx="2051228" cy="1119378"/>
+            <a:ext cx="2051228" cy="1046226"/>
           </a:xfrm>
           <a:prstGeom prst="rect">
             <a:avLst/>
@@ -10904,8 +10904,8 @@
         </p:nvSpPr>
         <p:spPr>
           <a:xfrm>
-            <a:off x="6452464" y="3896868"/>
-            <a:ext cx="2051228" cy="336804"/>
+            <a:off x="6452464" y="3823716"/>
+            <a:ext cx="2051228" cy="409956"/>
           </a:xfrm>
           <a:prstGeom prst="rect">
             <a:avLst/>
@@ -11064,7 +11064,7 @@
         <p:spPr>
           <a:xfrm>
             <a:off x="9216923" y="2740914"/>
-            <a:ext cx="2051228" cy="1119378"/>
+            <a:ext cx="2051228" cy="1046226"/>
           </a:xfrm>
           <a:prstGeom prst="rect">
             <a:avLst/>
@@ -11119,8 +11119,8 @@
         </p:nvSpPr>
         <p:spPr>
           <a:xfrm>
-            <a:off x="9216923" y="3896868"/>
-            <a:ext cx="2051228" cy="336804"/>
+            <a:off x="9216923" y="3823716"/>
+            <a:ext cx="2051228" cy="409956"/>
           </a:xfrm>
           <a:prstGeom prst="rect">
             <a:avLst/>
@@ -15542,11 +15542,11 @@
         <p:spPr>
           <a:xfrm>
             <a:off x="685800" y="1517904"/>
-            <a:ext cx="2526716" cy="1687068"/>
+            <a:ext cx="2526716" cy="1673352"/>
           </a:xfrm>
           <a:prstGeom prst="roundRect">
             <a:avLst>
-              <a:gd name="adj" fmla="val 3252"/>
+              <a:gd name="adj" fmla="val 3279"/>
             </a:avLst>
           </a:prstGeom>
           <a:solidFill>
@@ -15663,7 +15663,7 @@
         <p:spPr>
           <a:xfrm>
             <a:off x="886968" y="2596896"/>
-            <a:ext cx="2124380" cy="406908"/>
+            <a:ext cx="2124380" cy="393192"/>
           </a:xfrm>
           <a:prstGeom prst="rect">
             <a:avLst/>
@@ -15719,11 +15719,11 @@
         <p:spPr>
           <a:xfrm>
             <a:off x="3450260" y="1517904"/>
-            <a:ext cx="2526716" cy="1687068"/>
+            <a:ext cx="2526716" cy="1673352"/>
           </a:xfrm>
           <a:prstGeom prst="roundRect">
             <a:avLst>
-              <a:gd name="adj" fmla="val 3252"/>
+              <a:gd name="adj" fmla="val 3279"/>
             </a:avLst>
           </a:prstGeom>
           <a:solidFill>
@@ -15840,7 +15840,7 @@
         <p:spPr>
           <a:xfrm>
             <a:off x="3651428" y="2596896"/>
-            <a:ext cx="2124380" cy="406908"/>
+            <a:ext cx="2124380" cy="393192"/>
           </a:xfrm>
           <a:prstGeom prst="rect">
             <a:avLst/>
@@ -15896,11 +15896,11 @@
         <p:spPr>
           <a:xfrm>
             <a:off x="6214720" y="1517904"/>
-            <a:ext cx="2526716" cy="1687068"/>
+            <a:ext cx="2526716" cy="1673352"/>
           </a:xfrm>
           <a:prstGeom prst="roundRect">
             <a:avLst>
-              <a:gd name="adj" fmla="val 3252"/>
+              <a:gd name="adj" fmla="val 3279"/>
             </a:avLst>
           </a:prstGeom>
           <a:solidFill>
@@ -16017,7 +16017,7 @@
         <p:spPr>
           <a:xfrm>
             <a:off x="6415888" y="2596896"/>
-            <a:ext cx="2124380" cy="406908"/>
+            <a:ext cx="2124380" cy="393192"/>
           </a:xfrm>
           <a:prstGeom prst="rect">
             <a:avLst/>
@@ -16073,11 +16073,11 @@
         <p:spPr>
           <a:xfrm>
             <a:off x="8979179" y="1517904"/>
-            <a:ext cx="2526716" cy="1687068"/>
+            <a:ext cx="2526716" cy="1673352"/>
           </a:xfrm>
           <a:prstGeom prst="roundRect">
             <a:avLst>
-              <a:gd name="adj" fmla="val 3252"/>
+              <a:gd name="adj" fmla="val 3279"/>
             </a:avLst>
           </a:prstGeom>
           <a:solidFill>
@@ -16194,7 +16194,7 @@
         <p:spPr>
           <a:xfrm>
             <a:off x="9180347" y="2596896"/>
-            <a:ext cx="2124380" cy="406908"/>
+            <a:ext cx="2124380" cy="393192"/>
           </a:xfrm>
           <a:prstGeom prst="rect">
             <a:avLst/>
@@ -16249,12 +16249,12 @@
         </p:nvSpPr>
         <p:spPr>
           <a:xfrm>
-            <a:off x="685800" y="3442716"/>
-            <a:ext cx="2526716" cy="1687068"/>
+            <a:off x="685800" y="3429000"/>
+            <a:ext cx="2526716" cy="1673352"/>
           </a:xfrm>
           <a:prstGeom prst="roundRect">
             <a:avLst>
-              <a:gd name="adj" fmla="val 3252"/>
+              <a:gd name="adj" fmla="val 3279"/>
             </a:avLst>
           </a:prstGeom>
           <a:solidFill>
@@ -16278,7 +16278,7 @@
         </p:nvSpPr>
         <p:spPr>
           <a:xfrm>
-            <a:off x="886968" y="3643884"/>
+            <a:off x="886968" y="3630168"/>
             <a:ext cx="420624" cy="420624"/>
           </a:xfrm>
           <a:prstGeom prst="ellipse">
@@ -16298,7 +16298,7 @@
         </p:nvSpPr>
         <p:spPr>
           <a:xfrm>
-            <a:off x="886968" y="3643884"/>
+            <a:off x="886968" y="3630168"/>
             <a:ext cx="420624" cy="420624"/>
           </a:xfrm>
           <a:prstGeom prst="rect">
@@ -16334,7 +16334,7 @@
         </p:nvSpPr>
         <p:spPr>
           <a:xfrm>
-            <a:off x="886968" y="4192524"/>
+            <a:off x="886968" y="4178808"/>
             <a:ext cx="2124380" cy="256032"/>
           </a:xfrm>
           <a:prstGeom prst="rect">
@@ -16370,8 +16370,8 @@
         </p:nvSpPr>
         <p:spPr>
           <a:xfrm>
-            <a:off x="886968" y="4521708"/>
-            <a:ext cx="2124380" cy="406908"/>
+            <a:off x="886968" y="4507992"/>
+            <a:ext cx="2124380" cy="393192"/>
           </a:xfrm>
           <a:prstGeom prst="rect">
             <a:avLst/>
@@ -16426,12 +16426,12 @@
         </p:nvSpPr>
         <p:spPr>
           <a:xfrm>
-            <a:off x="3450260" y="3442716"/>
-            <a:ext cx="2526716" cy="1687068"/>
+            <a:off x="3450260" y="3429000"/>
+            <a:ext cx="2526716" cy="1673352"/>
           </a:xfrm>
           <a:prstGeom prst="roundRect">
             <a:avLst>
-              <a:gd name="adj" fmla="val 3252"/>
+              <a:gd name="adj" fmla="val 3279"/>
             </a:avLst>
           </a:prstGeom>
           <a:solidFill>
@@ -16455,7 +16455,7 @@
         </p:nvSpPr>
         <p:spPr>
           <a:xfrm>
-            <a:off x="3651428" y="3643884"/>
+            <a:off x="3651428" y="3630168"/>
             <a:ext cx="420624" cy="420624"/>
           </a:xfrm>
           <a:prstGeom prst="ellipse">
@@ -16475,7 +16475,7 @@
         </p:nvSpPr>
         <p:spPr>
           <a:xfrm>
-            <a:off x="3651428" y="3643884"/>
+            <a:off x="3651428" y="3630168"/>
             <a:ext cx="420624" cy="420624"/>
           </a:xfrm>
           <a:prstGeom prst="rect">
@@ -16511,7 +16511,7 @@
         </p:nvSpPr>
         <p:spPr>
           <a:xfrm>
-            <a:off x="3651428" y="4192524"/>
+            <a:off x="3651428" y="4178808"/>
             <a:ext cx="2124380" cy="256032"/>
           </a:xfrm>
           <a:prstGeom prst="rect">
@@ -16547,8 +16547,8 @@
         </p:nvSpPr>
         <p:spPr>
           <a:xfrm>
-            <a:off x="3651428" y="4521708"/>
-            <a:ext cx="2124380" cy="406908"/>
+            <a:off x="3651428" y="4507992"/>
+            <a:ext cx="2124380" cy="393192"/>
           </a:xfrm>
           <a:prstGeom prst="rect">
             <a:avLst/>
@@ -16603,12 +16603,12 @@
         </p:nvSpPr>
         <p:spPr>
           <a:xfrm>
-            <a:off x="6214720" y="3442716"/>
-            <a:ext cx="2526716" cy="1687068"/>
+            <a:off x="6214720" y="3429000"/>
+            <a:ext cx="2526716" cy="1673352"/>
           </a:xfrm>
           <a:prstGeom prst="roundRect">
             <a:avLst>
-              <a:gd name="adj" fmla="val 3252"/>
+              <a:gd name="adj" fmla="val 3279"/>
             </a:avLst>
           </a:prstGeom>
           <a:solidFill>
@@ -16632,7 +16632,7 @@
         </p:nvSpPr>
         <p:spPr>
           <a:xfrm>
-            <a:off x="6415888" y="3643884"/>
+            <a:off x="6415888" y="3630168"/>
             <a:ext cx="420624" cy="420624"/>
           </a:xfrm>
           <a:prstGeom prst="ellipse">
@@ -16652,7 +16652,7 @@
         </p:nvSpPr>
         <p:spPr>
           <a:xfrm>
-            <a:off x="6415888" y="3643884"/>
+            <a:off x="6415888" y="3630168"/>
             <a:ext cx="420624" cy="420624"/>
           </a:xfrm>
           <a:prstGeom prst="rect">
@@ -16688,7 +16688,7 @@
         </p:nvSpPr>
         <p:spPr>
           <a:xfrm>
-            <a:off x="6415888" y="4192524"/>
+            <a:off x="6415888" y="4178808"/>
             <a:ext cx="2124380" cy="256032"/>
           </a:xfrm>
           <a:prstGeom prst="rect">
@@ -16724,8 +16724,8 @@
         </p:nvSpPr>
         <p:spPr>
           <a:xfrm>
-            <a:off x="6415888" y="4521708"/>
-            <a:ext cx="2124380" cy="406908"/>
+            <a:off x="6415888" y="4507992"/>
+            <a:ext cx="2124380" cy="393192"/>
           </a:xfrm>
           <a:prstGeom prst="rect">
             <a:avLst/>
@@ -16780,12 +16780,12 @@
         </p:nvSpPr>
         <p:spPr>
           <a:xfrm>
-            <a:off x="8979179" y="3442716"/>
-            <a:ext cx="2526716" cy="1687068"/>
+            <a:off x="8979179" y="3429000"/>
+            <a:ext cx="2526716" cy="1673352"/>
           </a:xfrm>
           <a:prstGeom prst="roundRect">
             <a:avLst>
-              <a:gd name="adj" fmla="val 3252"/>
+              <a:gd name="adj" fmla="val 3279"/>
             </a:avLst>
           </a:prstGeom>
           <a:solidFill>
@@ -16809,7 +16809,7 @@
         </p:nvSpPr>
         <p:spPr>
           <a:xfrm>
-            <a:off x="9180347" y="3643884"/>
+            <a:off x="9180347" y="3630168"/>
             <a:ext cx="420624" cy="420624"/>
           </a:xfrm>
           <a:prstGeom prst="ellipse">
@@ -16829,7 +16829,7 @@
         </p:nvSpPr>
         <p:spPr>
           <a:xfrm>
-            <a:off x="9180347" y="3643884"/>
+            <a:off x="9180347" y="3630168"/>
             <a:ext cx="420624" cy="420624"/>
           </a:xfrm>
           <a:prstGeom prst="rect">
@@ -16865,7 +16865,7 @@
         </p:nvSpPr>
         <p:spPr>
           <a:xfrm>
-            <a:off x="9180347" y="4192524"/>
+            <a:off x="9180347" y="4178808"/>
             <a:ext cx="2124380" cy="256032"/>
           </a:xfrm>
           <a:prstGeom prst="rect">
@@ -16901,8 +16901,8 @@
         </p:nvSpPr>
         <p:spPr>
           <a:xfrm>
-            <a:off x="9180347" y="4521708"/>
-            <a:ext cx="2124380" cy="406908"/>
+            <a:off x="9180347" y="4507992"/>
+            <a:ext cx="2124380" cy="393192"/>
           </a:xfrm>
           <a:prstGeom prst="rect">
             <a:avLst/>
@@ -17171,11 +17171,11 @@
         <p:spPr>
           <a:xfrm>
             <a:off x="685800" y="1517904"/>
-            <a:ext cx="2526716" cy="1687068"/>
+            <a:ext cx="2526716" cy="1673352"/>
           </a:xfrm>
           <a:prstGeom prst="roundRect">
             <a:avLst>
-              <a:gd name="adj" fmla="val 3252"/>
+              <a:gd name="adj" fmla="val 3279"/>
             </a:avLst>
           </a:prstGeom>
           <a:solidFill>
@@ -17292,7 +17292,7 @@
         <p:spPr>
           <a:xfrm>
             <a:off x="886968" y="2596896"/>
-            <a:ext cx="2124380" cy="406908"/>
+            <a:ext cx="2124380" cy="393192"/>
           </a:xfrm>
           <a:prstGeom prst="rect">
             <a:avLst/>
@@ -17348,11 +17348,11 @@
         <p:spPr>
           <a:xfrm>
             <a:off x="3450260" y="1517904"/>
-            <a:ext cx="2526716" cy="1687068"/>
+            <a:ext cx="2526716" cy="1673352"/>
           </a:xfrm>
           <a:prstGeom prst="roundRect">
             <a:avLst>
-              <a:gd name="adj" fmla="val 3252"/>
+              <a:gd name="adj" fmla="val 3279"/>
             </a:avLst>
           </a:prstGeom>
           <a:solidFill>
@@ -17469,7 +17469,7 @@
         <p:spPr>
           <a:xfrm>
             <a:off x="3651428" y="2596896"/>
-            <a:ext cx="2124380" cy="406908"/>
+            <a:ext cx="2124380" cy="393192"/>
           </a:xfrm>
           <a:prstGeom prst="rect">
             <a:avLst/>
@@ -17525,11 +17525,11 @@
         <p:spPr>
           <a:xfrm>
             <a:off x="6214720" y="1517904"/>
-            <a:ext cx="2526716" cy="1687068"/>
+            <a:ext cx="2526716" cy="1673352"/>
           </a:xfrm>
           <a:prstGeom prst="roundRect">
             <a:avLst>
-              <a:gd name="adj" fmla="val 3252"/>
+              <a:gd name="adj" fmla="val 3279"/>
             </a:avLst>
           </a:prstGeom>
           <a:solidFill>
@@ -17646,7 +17646,7 @@
         <p:spPr>
           <a:xfrm>
             <a:off x="6415888" y="2596896"/>
-            <a:ext cx="2124380" cy="406908"/>
+            <a:ext cx="2124380" cy="393192"/>
           </a:xfrm>
           <a:prstGeom prst="rect">
             <a:avLst/>
@@ -17702,11 +17702,11 @@
         <p:spPr>
           <a:xfrm>
             <a:off x="8979179" y="1517904"/>
-            <a:ext cx="2526716" cy="1687068"/>
+            <a:ext cx="2526716" cy="1673352"/>
           </a:xfrm>
           <a:prstGeom prst="roundRect">
             <a:avLst>
-              <a:gd name="adj" fmla="val 3252"/>
+              <a:gd name="adj" fmla="val 3279"/>
             </a:avLst>
           </a:prstGeom>
           <a:solidFill>
@@ -17823,7 +17823,7 @@
         <p:spPr>
           <a:xfrm>
             <a:off x="9180347" y="2596896"/>
-            <a:ext cx="2124380" cy="406908"/>
+            <a:ext cx="2124380" cy="393192"/>
           </a:xfrm>
           <a:prstGeom prst="rect">
             <a:avLst/>
@@ -17878,12 +17878,12 @@
         </p:nvSpPr>
         <p:spPr>
           <a:xfrm>
-            <a:off x="685800" y="3442716"/>
-            <a:ext cx="2526716" cy="1687068"/>
+            <a:off x="685800" y="3429000"/>
+            <a:ext cx="2526716" cy="1673352"/>
           </a:xfrm>
           <a:prstGeom prst="roundRect">
             <a:avLst>
-              <a:gd name="adj" fmla="val 3252"/>
+              <a:gd name="adj" fmla="val 3279"/>
             </a:avLst>
           </a:prstGeom>
           <a:solidFill>
@@ -17907,7 +17907,7 @@
         </p:nvSpPr>
         <p:spPr>
           <a:xfrm>
-            <a:off x="886968" y="3643884"/>
+            <a:off x="886968" y="3630168"/>
             <a:ext cx="420624" cy="420624"/>
           </a:xfrm>
           <a:prstGeom prst="ellipse">
@@ -17927,7 +17927,7 @@
         </p:nvSpPr>
         <p:spPr>
           <a:xfrm>
-            <a:off x="886968" y="3643884"/>
+            <a:off x="886968" y="3630168"/>
             <a:ext cx="420624" cy="420624"/>
           </a:xfrm>
           <a:prstGeom prst="rect">
@@ -17963,7 +17963,7 @@
         </p:nvSpPr>
         <p:spPr>
           <a:xfrm>
-            <a:off x="886968" y="4192524"/>
+            <a:off x="886968" y="4178808"/>
             <a:ext cx="2124380" cy="256032"/>
           </a:xfrm>
           <a:prstGeom prst="rect">
@@ -17999,8 +17999,8 @@
         </p:nvSpPr>
         <p:spPr>
           <a:xfrm>
-            <a:off x="886968" y="4521708"/>
-            <a:ext cx="2124380" cy="406908"/>
+            <a:off x="886968" y="4507992"/>
+            <a:ext cx="2124380" cy="393192"/>
           </a:xfrm>
           <a:prstGeom prst="rect">
             <a:avLst/>
@@ -18055,12 +18055,12 @@
         </p:nvSpPr>
         <p:spPr>
           <a:xfrm>
-            <a:off x="3450260" y="3442716"/>
-            <a:ext cx="2526716" cy="1687068"/>
+            <a:off x="3450260" y="3429000"/>
+            <a:ext cx="2526716" cy="1673352"/>
           </a:xfrm>
           <a:prstGeom prst="roundRect">
             <a:avLst>
-              <a:gd name="adj" fmla="val 3252"/>
+              <a:gd name="adj" fmla="val 3279"/>
             </a:avLst>
           </a:prstGeom>
           <a:solidFill>
@@ -18084,7 +18084,7 @@
         </p:nvSpPr>
         <p:spPr>
           <a:xfrm>
-            <a:off x="3651428" y="3643884"/>
+            <a:off x="3651428" y="3630168"/>
             <a:ext cx="420624" cy="420624"/>
           </a:xfrm>
           <a:prstGeom prst="ellipse">
@@ -18104,7 +18104,7 @@
         </p:nvSpPr>
         <p:spPr>
           <a:xfrm>
-            <a:off x="3651428" y="3643884"/>
+            <a:off x="3651428" y="3630168"/>
             <a:ext cx="420624" cy="420624"/>
           </a:xfrm>
           <a:prstGeom prst="rect">
@@ -18140,7 +18140,7 @@
         </p:nvSpPr>
         <p:spPr>
           <a:xfrm>
-            <a:off x="3651428" y="4192524"/>
+            <a:off x="3651428" y="4178808"/>
             <a:ext cx="2124380" cy="256032"/>
           </a:xfrm>
           <a:prstGeom prst="rect">
@@ -18176,8 +18176,8 @@
         </p:nvSpPr>
         <p:spPr>
           <a:xfrm>
-            <a:off x="3651428" y="4521708"/>
-            <a:ext cx="2124380" cy="406908"/>
+            <a:off x="3651428" y="4507992"/>
+            <a:ext cx="2124380" cy="393192"/>
           </a:xfrm>
           <a:prstGeom prst="rect">
             <a:avLst/>
@@ -18232,12 +18232,12 @@
         </p:nvSpPr>
         <p:spPr>
           <a:xfrm>
-            <a:off x="6214720" y="3442716"/>
-            <a:ext cx="2526716" cy="1687068"/>
+            <a:off x="6214720" y="3429000"/>
+            <a:ext cx="2526716" cy="1673352"/>
           </a:xfrm>
           <a:prstGeom prst="roundRect">
             <a:avLst>
-              <a:gd name="adj" fmla="val 3252"/>
+              <a:gd name="adj" fmla="val 3279"/>
             </a:avLst>
           </a:prstGeom>
           <a:solidFill>
@@ -18261,7 +18261,7 @@
         </p:nvSpPr>
         <p:spPr>
           <a:xfrm>
-            <a:off x="6415888" y="3643884"/>
+            <a:off x="6415888" y="3630168"/>
             <a:ext cx="420624" cy="420624"/>
           </a:xfrm>
           <a:prstGeom prst="ellipse">
@@ -18281,7 +18281,7 @@
         </p:nvSpPr>
         <p:spPr>
           <a:xfrm>
-            <a:off x="6415888" y="3643884"/>
+            <a:off x="6415888" y="3630168"/>
             <a:ext cx="420624" cy="420624"/>
           </a:xfrm>
           <a:prstGeom prst="rect">
@@ -18317,7 +18317,7 @@
         </p:nvSpPr>
         <p:spPr>
           <a:xfrm>
-            <a:off x="6415888" y="4192524"/>
+            <a:off x="6415888" y="4178808"/>
             <a:ext cx="2124380" cy="256032"/>
           </a:xfrm>
           <a:prstGeom prst="rect">
@@ -18353,8 +18353,8 @@
         </p:nvSpPr>
         <p:spPr>
           <a:xfrm>
-            <a:off x="6415888" y="4521708"/>
-            <a:ext cx="2124380" cy="406908"/>
+            <a:off x="6415888" y="4507992"/>
+            <a:ext cx="2124380" cy="393192"/>
           </a:xfrm>
           <a:prstGeom prst="rect">
             <a:avLst/>
@@ -18409,12 +18409,12 @@
         </p:nvSpPr>
         <p:spPr>
           <a:xfrm>
-            <a:off x="8979179" y="3442716"/>
-            <a:ext cx="2526716" cy="1687068"/>
+            <a:off x="8979179" y="3429000"/>
+            <a:ext cx="2526716" cy="1673352"/>
           </a:xfrm>
           <a:prstGeom prst="roundRect">
             <a:avLst>
-              <a:gd name="adj" fmla="val 3252"/>
+              <a:gd name="adj" fmla="val 3279"/>
             </a:avLst>
           </a:prstGeom>
           <a:solidFill>
@@ -18438,7 +18438,7 @@
         </p:nvSpPr>
         <p:spPr>
           <a:xfrm>
-            <a:off x="9180347" y="3643884"/>
+            <a:off x="9180347" y="3630168"/>
             <a:ext cx="420624" cy="420624"/>
           </a:xfrm>
           <a:prstGeom prst="ellipse">
@@ -18458,7 +18458,7 @@
         </p:nvSpPr>
         <p:spPr>
           <a:xfrm>
-            <a:off x="9180347" y="3643884"/>
+            <a:off x="9180347" y="3630168"/>
             <a:ext cx="420624" cy="420624"/>
           </a:xfrm>
           <a:prstGeom prst="rect">
@@ -18494,7 +18494,7 @@
         </p:nvSpPr>
         <p:spPr>
           <a:xfrm>
-            <a:off x="9180347" y="4192524"/>
+            <a:off x="9180347" y="4178808"/>
             <a:ext cx="2124380" cy="256032"/>
           </a:xfrm>
           <a:prstGeom prst="rect">
@@ -18530,8 +18530,8 @@
         </p:nvSpPr>
         <p:spPr>
           <a:xfrm>
-            <a:off x="9180347" y="4521708"/>
-            <a:ext cx="2124380" cy="406908"/>
+            <a:off x="9180347" y="4507992"/>
+            <a:ext cx="2124380" cy="393192"/>
           </a:xfrm>
           <a:prstGeom prst="rect">
             <a:avLst/>
@@ -20674,36 +20674,14 @@
       </p:sp>
       <p:sp>
         <p:nvSpPr>
-          <p:cNvPr id="4" name="dot-badge"/>
-          <p:cNvSpPr/>
-          <p:nvPr/>
-        </p:nvSpPr>
-        <p:spPr>
-          <a:xfrm>
-            <a:off x="685800" y="4041648"/>
-            <a:ext cx="182880" cy="91440"/>
-          </a:xfrm>
-          <a:prstGeom prst="roundRect">
-            <a:avLst>
-              <a:gd name="adj" fmla="val 50000"/>
-            </a:avLst>
-          </a:prstGeom>
-          <a:solidFill>
-            <a:schemeClr val="accent1"/>
-          </a:solidFill>
-          <a:ln/>
-        </p:spPr>
-      </p:sp>
-      <p:sp>
-        <p:nvSpPr>
-          <p:cNvPr id="5" name="dot-badge-text"/>
-          <p:cNvSpPr txBox="1"/>
-          <p:nvPr/>
-        </p:nvSpPr>
-        <p:spPr>
-          <a:xfrm>
-            <a:off x="685800" y="4041648"/>
-            <a:ext cx="182880" cy="91440"/>
+          <p:cNvPr id="4" name="teacher"/>
+          <p:cNvSpPr txBox="1"/>
+          <p:nvPr/>
+        </p:nvSpPr>
+        <p:spPr>
+          <a:xfrm>
+            <a:off x="685800" y="3931920"/>
+            <a:ext cx="5486400" cy="365760"/>
           </a:xfrm>
           <a:prstGeom prst="rect">
             <a:avLst/>
@@ -20715,34 +20693,6 @@
           <a:bodyPr wrap="square" lIns="0" tIns="0" rIns="0" bIns="0" rtlCol="0" anchor="ctr"/>
           <a:lstStyle/>
           <a:p>
-            <a:pPr algn="ctr" indent="0" marL="0">
-              <a:buNone/>
-            </a:pPr>
-            <a:endParaRPr lang="en-US" sz="300" dirty="0"/>
-          </a:p>
-        </p:txBody>
-      </p:sp>
-      <p:sp>
-        <p:nvSpPr>
-          <p:cNvPr id="6" name="teacher"/>
-          <p:cNvSpPr txBox="1"/>
-          <p:nvPr/>
-        </p:nvSpPr>
-        <p:spPr>
-          <a:xfrm>
-            <a:off x="905256" y="3913632"/>
-            <a:ext cx="5486400" cy="365760"/>
-          </a:xfrm>
-          <a:prstGeom prst="rect">
-            <a:avLst/>
-          </a:prstGeom>
-          <a:noFill/>
-          <a:ln/>
-        </p:spPr>
-        <p:txBody>
-          <a:bodyPr wrap="square" lIns="0" tIns="0" rIns="0" bIns="0" rtlCol="0" anchor="ctr"/>
-          <a:lstStyle/>
-          <a:p>
             <a:pPr indent="0" marL="0">
               <a:buNone/>
             </a:pPr>
@@ -20760,7 +20710,7 @@
       </p:sp>
       <p:sp>
         <p:nvSpPr>
-          <p:cNvPr id="8" name="Text 0"/>
+          <p:cNvPr id="6" name="Text 0"/>
           <p:cNvSpPr/>
           <p:nvPr>
             <p:ph idx="100" type="title" hasCustomPrompt="1"/>
@@ -20790,7 +20740,7 @@
       </p:sp>
       <p:sp>
         <p:nvSpPr>
-          <p:cNvPr id="9" name="Text 0"/>
+          <p:cNvPr id="7" name="Text 0"/>
           <p:cNvSpPr/>
           <p:nvPr>
             <p:ph idx="101" type="body" hasCustomPrompt="1"/>
@@ -23950,11 +23900,11 @@
         <p:spPr>
           <a:xfrm>
             <a:off x="685800" y="1554480"/>
-            <a:ext cx="1605229" cy="1184148"/>
+            <a:ext cx="1605229" cy="1170432"/>
           </a:xfrm>
           <a:prstGeom prst="roundRect">
             <a:avLst>
-              <a:gd name="adj" fmla="val 4633"/>
+              <a:gd name="adj" fmla="val 4688"/>
             </a:avLst>
           </a:prstGeom>
           <a:solidFill>
@@ -24071,7 +24021,7 @@
         <p:spPr>
           <a:xfrm>
             <a:off x="813816" y="2402586"/>
-            <a:ext cx="1349197" cy="208026"/>
+            <a:ext cx="1349197" cy="194310"/>
           </a:xfrm>
           <a:prstGeom prst="rect">
             <a:avLst/>
@@ -24110,11 +24060,11 @@
         <p:spPr>
           <a:xfrm>
             <a:off x="2528773" y="1554480"/>
-            <a:ext cx="1605229" cy="1184148"/>
+            <a:ext cx="1605229" cy="1170432"/>
           </a:xfrm>
           <a:prstGeom prst="roundRect">
             <a:avLst>
-              <a:gd name="adj" fmla="val 4633"/>
+              <a:gd name="adj" fmla="val 4688"/>
             </a:avLst>
           </a:prstGeom>
           <a:solidFill>
@@ -24231,7 +24181,7 @@
         <p:spPr>
           <a:xfrm>
             <a:off x="2656789" y="2402586"/>
-            <a:ext cx="1349197" cy="208026"/>
+            <a:ext cx="1349197" cy="194310"/>
           </a:xfrm>
           <a:prstGeom prst="rect">
             <a:avLst/>
@@ -24270,11 +24220,11 @@
         <p:spPr>
           <a:xfrm>
             <a:off x="4371746" y="1554480"/>
-            <a:ext cx="1605229" cy="1184148"/>
+            <a:ext cx="1605229" cy="1170432"/>
           </a:xfrm>
           <a:prstGeom prst="roundRect">
             <a:avLst>
-              <a:gd name="adj" fmla="val 4633"/>
+              <a:gd name="adj" fmla="val 4688"/>
             </a:avLst>
           </a:prstGeom>
           <a:solidFill>
@@ -24391,7 +24341,7 @@
         <p:spPr>
           <a:xfrm>
             <a:off x="4499762" y="2402586"/>
-            <a:ext cx="1349197" cy="208026"/>
+            <a:ext cx="1349197" cy="194310"/>
           </a:xfrm>
           <a:prstGeom prst="rect">
             <a:avLst/>
@@ -24430,11 +24380,11 @@
         <p:spPr>
           <a:xfrm>
             <a:off x="6214720" y="1554480"/>
-            <a:ext cx="1605229" cy="1184148"/>
+            <a:ext cx="1605229" cy="1170432"/>
           </a:xfrm>
           <a:prstGeom prst="roundRect">
             <a:avLst>
-              <a:gd name="adj" fmla="val 4633"/>
+              <a:gd name="adj" fmla="val 4688"/>
             </a:avLst>
           </a:prstGeom>
           <a:solidFill>
@@ -24551,7 +24501,7 @@
         <p:spPr>
           <a:xfrm>
             <a:off x="6342736" y="2402586"/>
-            <a:ext cx="1349197" cy="208026"/>
+            <a:ext cx="1349197" cy="194310"/>
           </a:xfrm>
           <a:prstGeom prst="rect">
             <a:avLst/>
@@ -24590,11 +24540,11 @@
         <p:spPr>
           <a:xfrm>
             <a:off x="8057693" y="1554480"/>
-            <a:ext cx="1605229" cy="1184148"/>
+            <a:ext cx="1605229" cy="1170432"/>
           </a:xfrm>
           <a:prstGeom prst="roundRect">
             <a:avLst>
-              <a:gd name="adj" fmla="val 4633"/>
+              <a:gd name="adj" fmla="val 4688"/>
             </a:avLst>
           </a:prstGeom>
           <a:solidFill>
@@ -24711,7 +24661,7 @@
         <p:spPr>
           <a:xfrm>
             <a:off x="8185709" y="2402586"/>
-            <a:ext cx="1349197" cy="208026"/>
+            <a:ext cx="1349197" cy="194310"/>
           </a:xfrm>
           <a:prstGeom prst="rect">
             <a:avLst/>
@@ -24750,11 +24700,11 @@
         <p:spPr>
           <a:xfrm>
             <a:off x="9900666" y="1554480"/>
-            <a:ext cx="1605229" cy="1184148"/>
+            <a:ext cx="1605229" cy="1170432"/>
           </a:xfrm>
           <a:prstGeom prst="roundRect">
             <a:avLst>
-              <a:gd name="adj" fmla="val 4633"/>
+              <a:gd name="adj" fmla="val 4688"/>
             </a:avLst>
           </a:prstGeom>
           <a:solidFill>
@@ -24871,7 +24821,7 @@
         <p:spPr>
           <a:xfrm>
             <a:off x="10028682" y="2402586"/>
-            <a:ext cx="1349197" cy="208026"/>
+            <a:ext cx="1349197" cy="194310"/>
           </a:xfrm>
           <a:prstGeom prst="rect">
             <a:avLst/>
@@ -24909,12 +24859,12 @@
         </p:nvSpPr>
         <p:spPr>
           <a:xfrm>
-            <a:off x="685800" y="2976372"/>
-            <a:ext cx="1605229" cy="1184148"/>
+            <a:off x="685800" y="2962656"/>
+            <a:ext cx="1605229" cy="1170432"/>
           </a:xfrm>
           <a:prstGeom prst="roundRect">
             <a:avLst>
-              <a:gd name="adj" fmla="val 4633"/>
+              <a:gd name="adj" fmla="val 4688"/>
             </a:avLst>
           </a:prstGeom>
           <a:solidFill>
@@ -24938,7 +24888,7 @@
         </p:nvSpPr>
         <p:spPr>
           <a:xfrm>
-            <a:off x="813816" y="3104388"/>
+            <a:off x="813816" y="3090672"/>
             <a:ext cx="320040" cy="310896"/>
           </a:xfrm>
           <a:prstGeom prst="ellipse">
@@ -24958,7 +24908,7 @@
         </p:nvSpPr>
         <p:spPr>
           <a:xfrm>
-            <a:off x="813816" y="3104388"/>
+            <a:off x="813816" y="3090672"/>
             <a:ext cx="320040" cy="310896"/>
           </a:xfrm>
           <a:prstGeom prst="rect">
@@ -24994,7 +24944,7 @@
         </p:nvSpPr>
         <p:spPr>
           <a:xfrm>
-            <a:off x="813816" y="3543300"/>
+            <a:off x="813816" y="3529584"/>
             <a:ext cx="1349197" cy="208026"/>
           </a:xfrm>
           <a:prstGeom prst="rect">
@@ -25030,8 +24980,8 @@
         </p:nvSpPr>
         <p:spPr>
           <a:xfrm>
-            <a:off x="813816" y="3824478"/>
-            <a:ext cx="1349197" cy="208026"/>
+            <a:off x="813816" y="3810762"/>
+            <a:ext cx="1349197" cy="194310"/>
           </a:xfrm>
           <a:prstGeom prst="rect">
             <a:avLst/>
@@ -25069,12 +25019,12 @@
         </p:nvSpPr>
         <p:spPr>
           <a:xfrm>
-            <a:off x="2528773" y="2976372"/>
-            <a:ext cx="1605229" cy="1184148"/>
+            <a:off x="2528773" y="2962656"/>
+            <a:ext cx="1605229" cy="1170432"/>
           </a:xfrm>
           <a:prstGeom prst="roundRect">
             <a:avLst>
-              <a:gd name="adj" fmla="val 4633"/>
+              <a:gd name="adj" fmla="val 4688"/>
             </a:avLst>
           </a:prstGeom>
           <a:solidFill>
@@ -25098,7 +25048,7 @@
         </p:nvSpPr>
         <p:spPr>
           <a:xfrm>
-            <a:off x="2656789" y="3104388"/>
+            <a:off x="2656789" y="3090672"/>
             <a:ext cx="320040" cy="310896"/>
           </a:xfrm>
           <a:prstGeom prst="ellipse">
@@ -25118,7 +25068,7 @@
         </p:nvSpPr>
         <p:spPr>
           <a:xfrm>
-            <a:off x="2656789" y="3104388"/>
+            <a:off x="2656789" y="3090672"/>
             <a:ext cx="320040" cy="310896"/>
           </a:xfrm>
           <a:prstGeom prst="rect">
@@ -25154,7 +25104,7 @@
         </p:nvSpPr>
         <p:spPr>
           <a:xfrm>
-            <a:off x="2656789" y="3543300"/>
+            <a:off x="2656789" y="3529584"/>
             <a:ext cx="1349197" cy="208026"/>
           </a:xfrm>
           <a:prstGeom prst="rect">
@@ -25190,8 +25140,8 @@
         </p:nvSpPr>
         <p:spPr>
           <a:xfrm>
-            <a:off x="2656789" y="3824478"/>
-            <a:ext cx="1349197" cy="208026"/>
+            <a:off x="2656789" y="3810762"/>
+            <a:ext cx="1349197" cy="194310"/>
           </a:xfrm>
           <a:prstGeom prst="rect">
             <a:avLst/>
@@ -25229,12 +25179,12 @@
         </p:nvSpPr>
         <p:spPr>
           <a:xfrm>
-            <a:off x="4371746" y="2976372"/>
-            <a:ext cx="1605229" cy="1184148"/>
+            <a:off x="4371746" y="2962656"/>
+            <a:ext cx="1605229" cy="1170432"/>
           </a:xfrm>
           <a:prstGeom prst="roundRect">
             <a:avLst>
-              <a:gd name="adj" fmla="val 4633"/>
+              <a:gd name="adj" fmla="val 4688"/>
             </a:avLst>
           </a:prstGeom>
           <a:solidFill>
@@ -25258,7 +25208,7 @@
         </p:nvSpPr>
         <p:spPr>
           <a:xfrm>
-            <a:off x="4499762" y="3104388"/>
+            <a:off x="4499762" y="3090672"/>
             <a:ext cx="320040" cy="310896"/>
           </a:xfrm>
           <a:prstGeom prst="ellipse">
@@ -25278,7 +25228,7 @@
         </p:nvSpPr>
         <p:spPr>
           <a:xfrm>
-            <a:off x="4499762" y="3104388"/>
+            <a:off x="4499762" y="3090672"/>
             <a:ext cx="320040" cy="310896"/>
           </a:xfrm>
           <a:prstGeom prst="rect">
@@ -25314,7 +25264,7 @@
         </p:nvSpPr>
         <p:spPr>
           <a:xfrm>
-            <a:off x="4499762" y="3543300"/>
+            <a:off x="4499762" y="3529584"/>
             <a:ext cx="1349197" cy="208026"/>
           </a:xfrm>
           <a:prstGeom prst="rect">
@@ -25350,8 +25300,8 @@
         </p:nvSpPr>
         <p:spPr>
           <a:xfrm>
-            <a:off x="4499762" y="3824478"/>
-            <a:ext cx="1349197" cy="208026"/>
+            <a:off x="4499762" y="3810762"/>
+            <a:ext cx="1349197" cy="194310"/>
           </a:xfrm>
           <a:prstGeom prst="rect">
             <a:avLst/>
@@ -25389,12 +25339,12 @@
         </p:nvSpPr>
         <p:spPr>
           <a:xfrm>
-            <a:off x="6214720" y="2976372"/>
-            <a:ext cx="1605229" cy="1184148"/>
+            <a:off x="6214720" y="2962656"/>
+            <a:ext cx="1605229" cy="1170432"/>
           </a:xfrm>
           <a:prstGeom prst="roundRect">
             <a:avLst>
-              <a:gd name="adj" fmla="val 4633"/>
+              <a:gd name="adj" fmla="val 4688"/>
             </a:avLst>
           </a:prstGeom>
           <a:solidFill>
@@ -25418,7 +25368,7 @@
         </p:nvSpPr>
         <p:spPr>
           <a:xfrm>
-            <a:off x="6342736" y="3104388"/>
+            <a:off x="6342736" y="3090672"/>
             <a:ext cx="320040" cy="310896"/>
           </a:xfrm>
           <a:prstGeom prst="ellipse">
@@ -25438,7 +25388,7 @@
         </p:nvSpPr>
         <p:spPr>
           <a:xfrm>
-            <a:off x="6342736" y="3104388"/>
+            <a:off x="6342736" y="3090672"/>
             <a:ext cx="320040" cy="310896"/>
           </a:xfrm>
           <a:prstGeom prst="rect">
@@ -25474,7 +25424,7 @@
         </p:nvSpPr>
         <p:spPr>
           <a:xfrm>
-            <a:off x="6342736" y="3543300"/>
+            <a:off x="6342736" y="3529584"/>
             <a:ext cx="1349197" cy="208026"/>
           </a:xfrm>
           <a:prstGeom prst="rect">
@@ -25510,8 +25460,8 @@
         </p:nvSpPr>
         <p:spPr>
           <a:xfrm>
-            <a:off x="6342736" y="3824478"/>
-            <a:ext cx="1349197" cy="208026"/>
+            <a:off x="6342736" y="3810762"/>
+            <a:ext cx="1349197" cy="194310"/>
           </a:xfrm>
           <a:prstGeom prst="rect">
             <a:avLst/>
@@ -25549,12 +25499,12 @@
         </p:nvSpPr>
         <p:spPr>
           <a:xfrm>
-            <a:off x="8057693" y="2976372"/>
-            <a:ext cx="1605229" cy="1184148"/>
+            <a:off x="8057693" y="2962656"/>
+            <a:ext cx="1605229" cy="1170432"/>
           </a:xfrm>
           <a:prstGeom prst="roundRect">
             <a:avLst>
-              <a:gd name="adj" fmla="val 4633"/>
+              <a:gd name="adj" fmla="val 4688"/>
             </a:avLst>
           </a:prstGeom>
           <a:solidFill>
@@ -25578,7 +25528,7 @@
         </p:nvSpPr>
         <p:spPr>
           <a:xfrm>
-            <a:off x="8185709" y="3104388"/>
+            <a:off x="8185709" y="3090672"/>
             <a:ext cx="320040" cy="310896"/>
           </a:xfrm>
           <a:prstGeom prst="ellipse">
@@ -25598,7 +25548,7 @@
         </p:nvSpPr>
         <p:spPr>
           <a:xfrm>
-            <a:off x="8185709" y="3104388"/>
+            <a:off x="8185709" y="3090672"/>
             <a:ext cx="320040" cy="310896"/>
           </a:xfrm>
           <a:prstGeom prst="rect">
@@ -25634,7 +25584,7 @@
         </p:nvSpPr>
         <p:spPr>
           <a:xfrm>
-            <a:off x="8185709" y="3543300"/>
+            <a:off x="8185709" y="3529584"/>
             <a:ext cx="1349197" cy="208026"/>
           </a:xfrm>
           <a:prstGeom prst="rect">
@@ -25670,8 +25620,8 @@
         </p:nvSpPr>
         <p:spPr>
           <a:xfrm>
-            <a:off x="8185709" y="3824478"/>
-            <a:ext cx="1349197" cy="208026"/>
+            <a:off x="8185709" y="3810762"/>
+            <a:ext cx="1349197" cy="194310"/>
           </a:xfrm>
           <a:prstGeom prst="rect">
             <a:avLst/>
@@ -28068,7 +28018,7 @@
                   <a:schemeClr val="accent1"/>
                 </a:solidFill>
               </a:rPr>
-              <a:t>▶</a:t>
+              <a:t>▸</a:t>
             </a:r>
             <a:endParaRPr lang="en-US" sz="1500" dirty="0"/>
           </a:p>
@@ -28208,7 +28158,7 @@
                   <a:schemeClr val="accent1"/>
                 </a:solidFill>
               </a:rPr>
-              <a:t>▶</a:t>
+              <a:t>▸</a:t>
             </a:r>
             <a:endParaRPr lang="en-US" sz="1500" dirty="0"/>
           </a:p>
@@ -28365,7 +28315,7 @@
                   <a:schemeClr val="accent1"/>
                 </a:solidFill>
               </a:rPr>
-              <a:t>▶</a:t>
+              <a:t>▸</a:t>
             </a:r>
             <a:endParaRPr lang="en-US" sz="1500" dirty="0"/>
           </a:p>
@@ -28505,7 +28455,7 @@
                   <a:schemeClr val="accent1"/>
                 </a:solidFill>
               </a:rPr>
-              <a:t>▶</a:t>
+              <a:t>▸</a:t>
             </a:r>
             <a:endParaRPr lang="en-US" sz="1500" dirty="0"/>
           </a:p>
@@ -30001,11 +29951,11 @@
         <p:spPr>
           <a:xfrm>
             <a:off x="685800" y="1938528"/>
-            <a:ext cx="3448202" cy="2926080"/>
+            <a:ext cx="3448202" cy="2889504"/>
           </a:xfrm>
           <a:prstGeom prst="roundRect">
             <a:avLst>
-              <a:gd name="adj" fmla="val 1875"/>
+              <a:gd name="adj" fmla="val 1899"/>
             </a:avLst>
           </a:prstGeom>
           <a:solidFill>
@@ -30122,7 +30072,7 @@
         <p:spPr>
           <a:xfrm>
             <a:off x="923544" y="3250692"/>
-            <a:ext cx="2972714" cy="1039368"/>
+            <a:ext cx="2972714" cy="929640"/>
           </a:xfrm>
           <a:prstGeom prst="rect">
             <a:avLst/>
@@ -30177,8 +30127,8 @@
         </p:nvSpPr>
         <p:spPr>
           <a:xfrm>
-            <a:off x="923544" y="4326636"/>
-            <a:ext cx="2972714" cy="336804"/>
+            <a:off x="923544" y="4216908"/>
+            <a:ext cx="2972714" cy="409956"/>
           </a:xfrm>
           <a:prstGeom prst="rect">
             <a:avLst/>
@@ -30214,11 +30164,11 @@
         <p:spPr>
           <a:xfrm>
             <a:off x="4371746" y="1938528"/>
-            <a:ext cx="3448202" cy="2926080"/>
+            <a:ext cx="3448202" cy="2889504"/>
           </a:xfrm>
           <a:prstGeom prst="roundRect">
             <a:avLst>
-              <a:gd name="adj" fmla="val 1875"/>
+              <a:gd name="adj" fmla="val 1899"/>
             </a:avLst>
           </a:prstGeom>
           <a:solidFill>
@@ -30335,7 +30285,7 @@
         <p:spPr>
           <a:xfrm>
             <a:off x="4609490" y="3250692"/>
-            <a:ext cx="2972714" cy="1039368"/>
+            <a:ext cx="2972714" cy="929640"/>
           </a:xfrm>
           <a:prstGeom prst="rect">
             <a:avLst/>
@@ -30359,7 +30309,7 @@
                   <a:schemeClr val="accent3"/>
                 </a:solidFill>
               </a:rPr>
-              <a:t>일찍이 순교했다 (행 12:2, AD 44년경)</a:t>
+              <a:t>일찍이 순교했다 (행 12:2)</a:t>
             </a:r>
             <a:endParaRPr lang="en-US" sz="1400" dirty="0"/>
           </a:p>
@@ -30390,8 +30340,8 @@
         </p:nvSpPr>
         <p:spPr>
           <a:xfrm>
-            <a:off x="4609490" y="4326636"/>
-            <a:ext cx="2972714" cy="336804"/>
+            <a:off x="4609490" y="4216908"/>
+            <a:ext cx="2972714" cy="409956"/>
           </a:xfrm>
           <a:prstGeom prst="rect">
             <a:avLst/>
@@ -30427,11 +30377,11 @@
         <p:spPr>
           <a:xfrm>
             <a:off x="8057693" y="1938528"/>
-            <a:ext cx="3448202" cy="2926080"/>
+            <a:ext cx="3448202" cy="2889504"/>
           </a:xfrm>
           <a:prstGeom prst="roundRect">
             <a:avLst>
-              <a:gd name="adj" fmla="val 1875"/>
+              <a:gd name="adj" fmla="val 1899"/>
             </a:avLst>
           </a:prstGeom>
           <a:solidFill>
@@ -30548,7 +30498,7 @@
         <p:spPr>
           <a:xfrm>
             <a:off x="8295437" y="3250692"/>
-            <a:ext cx="2972714" cy="1039368"/>
+            <a:ext cx="2972714" cy="929640"/>
           </a:xfrm>
           <a:prstGeom prst="rect">
             <a:avLst/>
@@ -30603,8 +30553,8 @@
         </p:nvSpPr>
         <p:spPr>
           <a:xfrm>
-            <a:off x="8295437" y="4326636"/>
-            <a:ext cx="2972714" cy="336804"/>
+            <a:off x="8295437" y="4216908"/>
+            <a:ext cx="2972714" cy="409956"/>
           </a:xfrm>
           <a:prstGeom prst="rect">
             <a:avLst/>
@@ -34904,7 +34854,7 @@
         <p:spPr>
           <a:xfrm>
             <a:off x="923544" y="2662047"/>
-            <a:ext cx="2051228" cy="1353693"/>
+            <a:ext cx="2051228" cy="1280541"/>
           </a:xfrm>
           <a:prstGeom prst="rect">
             <a:avLst/>
@@ -34959,8 +34909,8 @@
         </p:nvSpPr>
         <p:spPr>
           <a:xfrm>
-            <a:off x="923544" y="4052316"/>
-            <a:ext cx="2051228" cy="336804"/>
+            <a:off x="923544" y="3979164"/>
+            <a:ext cx="2051228" cy="409956"/>
           </a:xfrm>
           <a:prstGeom prst="rect">
             <a:avLst/>
@@ -35117,7 +35067,7 @@
         <p:spPr>
           <a:xfrm>
             <a:off x="3688004" y="2910078"/>
-            <a:ext cx="2051228" cy="1105662"/>
+            <a:ext cx="2051228" cy="1032510"/>
           </a:xfrm>
           <a:prstGeom prst="rect">
             <a:avLst/>
@@ -35172,8 +35122,8 @@
         </p:nvSpPr>
         <p:spPr>
           <a:xfrm>
-            <a:off x="3688004" y="4052316"/>
-            <a:ext cx="2051228" cy="336804"/>
+            <a:off x="3688004" y="3979164"/>
+            <a:ext cx="2051228" cy="409956"/>
           </a:xfrm>
           <a:prstGeom prst="rect">
             <a:avLst/>
@@ -35330,7 +35280,7 @@
         <p:spPr>
           <a:xfrm>
             <a:off x="6452464" y="2910078"/>
-            <a:ext cx="2051228" cy="1105662"/>
+            <a:ext cx="2051228" cy="1032510"/>
           </a:xfrm>
           <a:prstGeom prst="rect">
             <a:avLst/>
@@ -35385,8 +35335,8 @@
         </p:nvSpPr>
         <p:spPr>
           <a:xfrm>
-            <a:off x="6452464" y="4052316"/>
-            <a:ext cx="2051228" cy="336804"/>
+            <a:off x="6452464" y="3979164"/>
+            <a:ext cx="2051228" cy="409956"/>
           </a:xfrm>
           <a:prstGeom prst="rect">
             <a:avLst/>
@@ -35543,7 +35493,7 @@
         <p:spPr>
           <a:xfrm>
             <a:off x="9216923" y="2910078"/>
-            <a:ext cx="2051228" cy="1105662"/>
+            <a:ext cx="2051228" cy="1032510"/>
           </a:xfrm>
           <a:prstGeom prst="rect">
             <a:avLst/>
@@ -35598,8 +35548,8 @@
         </p:nvSpPr>
         <p:spPr>
           <a:xfrm>
-            <a:off x="9216923" y="4052316"/>
-            <a:ext cx="2051228" cy="336804"/>
+            <a:off x="9216923" y="3979164"/>
+            <a:ext cx="2051228" cy="409956"/>
           </a:xfrm>
           <a:prstGeom prst="rect">
             <a:avLst/>
@@ -35956,7 +35906,7 @@
                   <a:schemeClr val="tx1"/>
                 </a:solidFill>
               </a:rPr>
-              <a:t>권세에 민감하다 (좌우편에 서기)</a:t>
+              <a:t>권세에 민감하다 — 좌우편에 서기</a:t>
             </a:r>
             <a:endParaRPr lang="en-US" sz="1500" dirty="0"/>
           </a:p>
@@ -37677,12 +37627,12 @@
         </p:nvSpPr>
         <p:spPr>
           <a:xfrm>
-            <a:off x="685800" y="3895344"/>
-            <a:ext cx="2526716" cy="1737360"/>
+            <a:off x="685800" y="3822192"/>
+            <a:ext cx="2526716" cy="1700784"/>
           </a:xfrm>
           <a:prstGeom prst="roundRect">
             <a:avLst>
-              <a:gd name="adj" fmla="val 3158"/>
+              <a:gd name="adj" fmla="val 3226"/>
             </a:avLst>
           </a:prstGeom>
           <a:solidFill>
@@ -37706,7 +37656,7 @@
         </p:nvSpPr>
         <p:spPr>
           <a:xfrm>
-            <a:off x="923544" y="4133088"/>
+            <a:off x="923544" y="4059936"/>
             <a:ext cx="2051228" cy="272034"/>
           </a:xfrm>
           <a:prstGeom prst="rect">
@@ -37742,8 +37692,8 @@
         </p:nvSpPr>
         <p:spPr>
           <a:xfrm>
-            <a:off x="923544" y="4478274"/>
-            <a:ext cx="2051228" cy="916686"/>
+            <a:off x="923544" y="4405122"/>
+            <a:ext cx="2051228" cy="880110"/>
           </a:xfrm>
           <a:prstGeom prst="rect">
             <a:avLst/>
@@ -37798,12 +37748,12 @@
         </p:nvSpPr>
         <p:spPr>
           <a:xfrm>
-            <a:off x="3450260" y="3895344"/>
-            <a:ext cx="2526716" cy="1737360"/>
+            <a:off x="3450260" y="3822192"/>
+            <a:ext cx="2526716" cy="1700784"/>
           </a:xfrm>
           <a:prstGeom prst="roundRect">
             <a:avLst>
-              <a:gd name="adj" fmla="val 3158"/>
+              <a:gd name="adj" fmla="val 3226"/>
             </a:avLst>
           </a:prstGeom>
           <a:solidFill>
@@ -37827,7 +37777,7 @@
         </p:nvSpPr>
         <p:spPr>
           <a:xfrm>
-            <a:off x="3688004" y="4133088"/>
+            <a:off x="3688004" y="4059936"/>
             <a:ext cx="2051228" cy="272034"/>
           </a:xfrm>
           <a:prstGeom prst="rect">
@@ -37863,8 +37813,8 @@
         </p:nvSpPr>
         <p:spPr>
           <a:xfrm>
-            <a:off x="3688004" y="4478274"/>
-            <a:ext cx="2051228" cy="916686"/>
+            <a:off x="3688004" y="4405122"/>
+            <a:ext cx="2051228" cy="880110"/>
           </a:xfrm>
           <a:prstGeom prst="rect">
             <a:avLst/>
@@ -37936,12 +37886,12 @@
         </p:nvSpPr>
         <p:spPr>
           <a:xfrm>
-            <a:off x="6214720" y="3895344"/>
-            <a:ext cx="2526716" cy="1737360"/>
+            <a:off x="6214720" y="3822192"/>
+            <a:ext cx="2526716" cy="1700784"/>
           </a:xfrm>
           <a:prstGeom prst="roundRect">
             <a:avLst>
-              <a:gd name="adj" fmla="val 3158"/>
+              <a:gd name="adj" fmla="val 3226"/>
             </a:avLst>
           </a:prstGeom>
           <a:solidFill>
@@ -37965,7 +37915,7 @@
         </p:nvSpPr>
         <p:spPr>
           <a:xfrm>
-            <a:off x="6452464" y="4133088"/>
+            <a:off x="6452464" y="4059936"/>
             <a:ext cx="2051228" cy="272034"/>
           </a:xfrm>
           <a:prstGeom prst="rect">
@@ -38001,8 +37951,8 @@
         </p:nvSpPr>
         <p:spPr>
           <a:xfrm>
-            <a:off x="6452464" y="4478274"/>
-            <a:ext cx="2051228" cy="916686"/>
+            <a:off x="6452464" y="4405122"/>
+            <a:ext cx="2051228" cy="880110"/>
           </a:xfrm>
           <a:prstGeom prst="rect">
             <a:avLst/>
@@ -38074,12 +38024,12 @@
         </p:nvSpPr>
         <p:spPr>
           <a:xfrm>
-            <a:off x="8979179" y="3895344"/>
-            <a:ext cx="2526716" cy="1737360"/>
+            <a:off x="8979179" y="3822192"/>
+            <a:ext cx="2526716" cy="1700784"/>
           </a:xfrm>
           <a:prstGeom prst="roundRect">
             <a:avLst>
-              <a:gd name="adj" fmla="val 3158"/>
+              <a:gd name="adj" fmla="val 3226"/>
             </a:avLst>
           </a:prstGeom>
           <a:solidFill>
@@ -38103,7 +38053,7 @@
         </p:nvSpPr>
         <p:spPr>
           <a:xfrm>
-            <a:off x="9216923" y="4133088"/>
+            <a:off x="9216923" y="4059936"/>
             <a:ext cx="2051228" cy="272034"/>
           </a:xfrm>
           <a:prstGeom prst="rect">
@@ -38139,8 +38089,8 @@
         </p:nvSpPr>
         <p:spPr>
           <a:xfrm>
-            <a:off x="9216923" y="4478274"/>
-            <a:ext cx="2051228" cy="916686"/>
+            <a:off x="9216923" y="4405122"/>
+            <a:ext cx="2051228" cy="880110"/>
           </a:xfrm>
           <a:prstGeom prst="rect">
             <a:avLst/>
@@ -38195,12 +38145,12 @@
         </p:nvSpPr>
         <p:spPr>
           <a:xfrm>
-            <a:off x="685800" y="5724144"/>
-            <a:ext cx="10820095" cy="512064"/>
+            <a:off x="685800" y="5687568"/>
+            <a:ext cx="10820095" cy="530352"/>
           </a:xfrm>
           <a:prstGeom prst="roundRect">
             <a:avLst>
-              <a:gd name="adj" fmla="val 17857"/>
+              <a:gd name="adj" fmla="val 17241"/>
             </a:avLst>
           </a:prstGeom>
           <a:solidFill>
@@ -38217,8 +38167,8 @@
         </p:nvSpPr>
         <p:spPr>
           <a:xfrm>
-            <a:off x="960120" y="5724144"/>
-            <a:ext cx="10271455" cy="512064"/>
+            <a:off x="960120" y="5687568"/>
+            <a:ext cx="10271455" cy="530352"/>
           </a:xfrm>
           <a:prstGeom prst="rect">
             <a:avLst/>
@@ -38431,7 +38381,7 @@
         <p:spPr>
           <a:xfrm>
             <a:off x="685800" y="1554480"/>
-            <a:ext cx="2526716" cy="2743200"/>
+            <a:ext cx="2526716" cy="2834640"/>
           </a:xfrm>
           <a:prstGeom prst="roundRect">
             <a:avLst>
@@ -38552,7 +38502,7 @@
         <p:spPr>
           <a:xfrm>
             <a:off x="923544" y="2651760"/>
-            <a:ext cx="2051228" cy="1071372"/>
+            <a:ext cx="2051228" cy="1089660"/>
           </a:xfrm>
           <a:prstGeom prst="rect">
             <a:avLst/>
@@ -38607,8 +38557,8 @@
         </p:nvSpPr>
         <p:spPr>
           <a:xfrm>
-            <a:off x="923544" y="3759708"/>
-            <a:ext cx="2051228" cy="336804"/>
+            <a:off x="923544" y="3777996"/>
+            <a:ext cx="2051228" cy="409956"/>
           </a:xfrm>
           <a:prstGeom prst="rect">
             <a:avLst/>
@@ -38644,7 +38594,7 @@
         <p:spPr>
           <a:xfrm>
             <a:off x="3450260" y="1554480"/>
-            <a:ext cx="2526716" cy="2743200"/>
+            <a:ext cx="2526716" cy="2834640"/>
           </a:xfrm>
           <a:prstGeom prst="roundRect">
             <a:avLst>
@@ -38765,7 +38715,7 @@
         <p:spPr>
           <a:xfrm>
             <a:off x="3688004" y="2651760"/>
-            <a:ext cx="2051228" cy="1071372"/>
+            <a:ext cx="2051228" cy="1089660"/>
           </a:xfrm>
           <a:prstGeom prst="rect">
             <a:avLst/>
@@ -38820,8 +38770,8 @@
         </p:nvSpPr>
         <p:spPr>
           <a:xfrm>
-            <a:off x="3688004" y="3759708"/>
-            <a:ext cx="2051228" cy="336804"/>
+            <a:off x="3688004" y="3777996"/>
+            <a:ext cx="2051228" cy="409956"/>
           </a:xfrm>
           <a:prstGeom prst="rect">
             <a:avLst/>
@@ -38857,7 +38807,7 @@
         <p:spPr>
           <a:xfrm>
             <a:off x="6214720" y="1554480"/>
-            <a:ext cx="2526716" cy="2743200"/>
+            <a:ext cx="2526716" cy="2834640"/>
           </a:xfrm>
           <a:prstGeom prst="roundRect">
             <a:avLst>
@@ -38978,7 +38928,7 @@
         <p:spPr>
           <a:xfrm>
             <a:off x="6452464" y="2651760"/>
-            <a:ext cx="2051228" cy="1071372"/>
+            <a:ext cx="2051228" cy="1089660"/>
           </a:xfrm>
           <a:prstGeom prst="rect">
             <a:avLst/>
@@ -39033,8 +38983,8 @@
         </p:nvSpPr>
         <p:spPr>
           <a:xfrm>
-            <a:off x="6452464" y="3759708"/>
-            <a:ext cx="2051228" cy="336804"/>
+            <a:off x="6452464" y="3777996"/>
+            <a:ext cx="2051228" cy="409956"/>
           </a:xfrm>
           <a:prstGeom prst="rect">
             <a:avLst/>
@@ -39070,7 +39020,7 @@
         <p:spPr>
           <a:xfrm>
             <a:off x="8979179" y="1554480"/>
-            <a:ext cx="2526716" cy="2743200"/>
+            <a:ext cx="2526716" cy="2834640"/>
           </a:xfrm>
           <a:prstGeom prst="roundRect">
             <a:avLst>
@@ -39191,7 +39141,7 @@
         <p:spPr>
           <a:xfrm>
             <a:off x="9216923" y="2907792"/>
-            <a:ext cx="2051228" cy="815340"/>
+            <a:ext cx="2051228" cy="833628"/>
           </a:xfrm>
           <a:prstGeom prst="rect">
             <a:avLst/>
@@ -39246,8 +39196,8 @@
         </p:nvSpPr>
         <p:spPr>
           <a:xfrm>
-            <a:off x="9216923" y="3759708"/>
-            <a:ext cx="2051228" cy="336804"/>
+            <a:off x="9216923" y="3777996"/>
+            <a:ext cx="2051228" cy="409956"/>
           </a:xfrm>
           <a:prstGeom prst="rect">
             <a:avLst/>
@@ -39282,7 +39232,7 @@
         </p:nvSpPr>
         <p:spPr>
           <a:xfrm>
-            <a:off x="685800" y="4471416"/>
+            <a:off x="685800" y="4562856"/>
             <a:ext cx="375453" cy="347472"/>
           </a:xfrm>
           <a:prstGeom prst="roundRect">
@@ -39304,7 +39254,7 @@
         </p:nvSpPr>
         <p:spPr>
           <a:xfrm>
-            <a:off x="685800" y="4471416"/>
+            <a:off x="685800" y="4562856"/>
             <a:ext cx="375453" cy="347472"/>
           </a:xfrm>
           <a:prstGeom prst="rect">
@@ -39340,7 +39290,7 @@
         </p:nvSpPr>
         <p:spPr>
           <a:xfrm>
-            <a:off x="1189269" y="4462272"/>
+            <a:off x="1189269" y="4553712"/>
             <a:ext cx="10316627" cy="365760"/>
           </a:xfrm>
           <a:prstGeom prst="rect">
@@ -39376,8 +39326,8 @@
         </p:nvSpPr>
         <p:spPr>
           <a:xfrm>
-            <a:off x="685800" y="4974336"/>
-            <a:ext cx="10820095" cy="1280160"/>
+            <a:off x="685800" y="5065776"/>
+            <a:ext cx="10820095" cy="1188720"/>
           </a:xfrm>
           <a:prstGeom prst="rect">
             <a:avLst/>
@@ -39397,31 +39347,31 @@
               <a:buChar char="•"/>
             </a:pPr>
             <a:r>
-              <a:rPr lang="en-US" sz="1500" b="1" dirty="0">
+              <a:rPr lang="en-US" sz="1400" b="1" dirty="0">
                 <a:solidFill>
                   <a:schemeClr val="tx1"/>
                 </a:solidFill>
               </a:rPr>
               <a:t>그 증언이 ‘진실’이라는 것</a:t>
             </a:r>
-            <a:endParaRPr lang="en-US" sz="1500" dirty="0"/>
+            <a:endParaRPr lang="en-US" sz="1400" dirty="0"/>
           </a:p>
           <a:p>
             <a:pPr lvl="1" indent="0" marL="0">
               <a:spcAft>
-                <a:spcPts val="900"/>
+                <a:spcPts val="800"/>
               </a:spcAft>
               <a:buNone/>
             </a:pPr>
             <a:r>
-              <a:rPr lang="en-US" sz="1300" dirty="0">
+              <a:rPr lang="en-US" sz="1200" dirty="0">
                 <a:solidFill>
                   <a:schemeClr val="accent3"/>
                 </a:solidFill>
               </a:rPr>
               <a:t>요한은 자신이 목격한 것을 전했고 기록했으며, 그것 때문에 해받는 것을 기꺼이 감수했다</a:t>
             </a:r>
-            <a:endParaRPr lang="en-US" sz="1500" dirty="0"/>
+            <a:endParaRPr lang="en-US" sz="1400" dirty="0"/>
           </a:p>
           <a:p>
             <a:pPr marL="342900" indent="-342900">
@@ -39432,31 +39382,31 @@
               <a:buChar char="•"/>
             </a:pPr>
             <a:r>
-              <a:rPr lang="en-US" sz="1500" b="1" dirty="0">
+              <a:rPr lang="en-US" sz="1400" b="1" dirty="0">
                 <a:solidFill>
                   <a:schemeClr val="tx1"/>
                 </a:solidFill>
               </a:rPr>
               <a:t>거짓을 위해 목숨을 걸 사람은 없다</a:t>
             </a:r>
-            <a:endParaRPr lang="en-US" sz="1500" dirty="0"/>
+            <a:endParaRPr lang="en-US" sz="1400" dirty="0"/>
           </a:p>
           <a:p>
             <a:pPr lvl="1" indent="0" marL="0">
               <a:spcAft>
-                <a:spcPts val="900"/>
+                <a:spcPts val="800"/>
               </a:spcAft>
               <a:buNone/>
             </a:pPr>
             <a:r>
-              <a:rPr lang="en-US" sz="1300" dirty="0">
+              <a:rPr lang="en-US" sz="1200" dirty="0">
                 <a:solidFill>
                   <a:schemeClr val="accent3"/>
                 </a:solidFill>
               </a:rPr>
               <a:t>핍박을 감수한 증언은, 그가 전하고 기록한 것이 진실임을 보여주는 객관적인 증거다</a:t>
             </a:r>
-            <a:endParaRPr lang="en-US" sz="1500" dirty="0"/>
+            <a:endParaRPr lang="en-US" sz="1400" dirty="0"/>
           </a:p>
         </p:txBody>
       </p:sp>
@@ -45946,7 +45896,7 @@
                   <a:schemeClr val="bg1"/>
                 </a:solidFill>
               </a:rPr>
-              <a:t>아버지와 아들은 서로 사랑하고 대화하신다 (17장)</a:t>
+              <a:t>17장에서 아버지와 아들은 서로 사랑하고 대화하신다</a:t>
             </a:r>
             <a:endParaRPr lang="en-US" sz="1500" dirty="0"/>
           </a:p>
@@ -48611,7 +48561,7 @@
                   <a:schemeClr val="accent1"/>
                 </a:solidFill>
               </a:rPr>
-              <a:t>▶</a:t>
+              <a:t>▸</a:t>
             </a:r>
             <a:endParaRPr lang="en-US" sz="1500" dirty="0"/>
           </a:p>
@@ -48768,7 +48718,7 @@
                   <a:schemeClr val="accent1"/>
                 </a:solidFill>
               </a:rPr>
-              <a:t>▶</a:t>
+              <a:t>▸</a:t>
             </a:r>
             <a:endParaRPr lang="en-US" sz="1500" dirty="0"/>
           </a:p>
@@ -48925,7 +48875,7 @@
                   <a:schemeClr val="accent1"/>
                 </a:solidFill>
               </a:rPr>
-              <a:t>▶</a:t>
+              <a:t>▸</a:t>
             </a:r>
             <a:endParaRPr lang="en-US" sz="1500" dirty="0"/>
           </a:p>
@@ -49290,12 +49240,12 @@
         </p:nvSpPr>
         <p:spPr>
           <a:xfrm>
-            <a:off x="685800" y="1481328"/>
-            <a:ext cx="5272888" cy="2468880"/>
+            <a:off x="685800" y="1463040"/>
+            <a:ext cx="5272888" cy="2432304"/>
           </a:xfrm>
           <a:prstGeom prst="roundRect">
             <a:avLst>
-              <a:gd name="adj" fmla="val 2222"/>
+              <a:gd name="adj" fmla="val 2256"/>
             </a:avLst>
           </a:prstGeom>
           <a:solidFill>
@@ -49319,7 +49269,7 @@
         </p:nvSpPr>
         <p:spPr>
           <a:xfrm>
-            <a:off x="960120" y="1719072"/>
+            <a:off x="960120" y="1700784"/>
             <a:ext cx="4724248" cy="420624"/>
           </a:xfrm>
           <a:prstGeom prst="rect">
@@ -49355,8 +49305,8 @@
         </p:nvSpPr>
         <p:spPr>
           <a:xfrm>
-            <a:off x="960120" y="2304288"/>
-            <a:ext cx="4724248" cy="1517904"/>
+            <a:off x="960120" y="2286000"/>
+            <a:ext cx="4724248" cy="1481328"/>
           </a:xfrm>
           <a:prstGeom prst="rect">
             <a:avLst/>
@@ -49381,7 +49331,7 @@
                   <a:schemeClr val="tx1"/>
                 </a:solidFill>
               </a:rPr>
-              <a:t>빛에 대해 증언함으로 예수님을 믿게 하는 것</a:t>
+              <a:t>빛에 대해 증언해 예수님을 믿게 하는 것</a:t>
             </a:r>
             <a:endParaRPr lang="en-US" sz="1500" dirty="0"/>
           </a:p>
@@ -49447,12 +49397,12 @@
         </p:nvSpPr>
         <p:spPr>
           <a:xfrm>
-            <a:off x="6233008" y="1481328"/>
-            <a:ext cx="5272888" cy="2468880"/>
+            <a:off x="6233008" y="1463040"/>
+            <a:ext cx="5272888" cy="2432304"/>
           </a:xfrm>
           <a:prstGeom prst="roundRect">
             <a:avLst>
-              <a:gd name="adj" fmla="val 2222"/>
+              <a:gd name="adj" fmla="val 2256"/>
             </a:avLst>
           </a:prstGeom>
           <a:solidFill>
@@ -49476,7 +49426,7 @@
         </p:nvSpPr>
         <p:spPr>
           <a:xfrm>
-            <a:off x="6507328" y="1719072"/>
+            <a:off x="6507328" y="1700784"/>
             <a:ext cx="4724248" cy="629920"/>
           </a:xfrm>
           <a:prstGeom prst="rect">
@@ -49512,8 +49462,8 @@
         </p:nvSpPr>
         <p:spPr>
           <a:xfrm>
-            <a:off x="6507328" y="2513584"/>
-            <a:ext cx="4724248" cy="1308608"/>
+            <a:off x="6507328" y="2495296"/>
+            <a:ext cx="4724248" cy="1272032"/>
           </a:xfrm>
           <a:prstGeom prst="rect">
             <a:avLst/>
@@ -49604,7 +49554,7 @@
         </p:nvSpPr>
         <p:spPr>
           <a:xfrm>
-            <a:off x="685800" y="4050792"/>
+            <a:off x="685800" y="3959352"/>
             <a:ext cx="375453" cy="347472"/>
           </a:xfrm>
           <a:prstGeom prst="roundRect">
@@ -49626,7 +49576,7 @@
         </p:nvSpPr>
         <p:spPr>
           <a:xfrm>
-            <a:off x="685800" y="4050792"/>
+            <a:off x="685800" y="3959352"/>
             <a:ext cx="375453" cy="347472"/>
           </a:xfrm>
           <a:prstGeom prst="rect">
@@ -49662,7 +49612,7 @@
         </p:nvSpPr>
         <p:spPr>
           <a:xfrm>
-            <a:off x="1189269" y="4041648"/>
+            <a:off x="1189269" y="3950208"/>
             <a:ext cx="10316627" cy="365760"/>
           </a:xfrm>
           <a:prstGeom prst="rect">
@@ -49698,12 +49648,12 @@
         </p:nvSpPr>
         <p:spPr>
           <a:xfrm>
-            <a:off x="685800" y="4462272"/>
-            <a:ext cx="2526716" cy="1691640"/>
+            <a:off x="685800" y="4370832"/>
+            <a:ext cx="2526716" cy="1810512"/>
           </a:xfrm>
           <a:prstGeom prst="roundRect">
             <a:avLst>
-              <a:gd name="adj" fmla="val 3243"/>
+              <a:gd name="adj" fmla="val 3030"/>
             </a:avLst>
           </a:prstGeom>
           <a:solidFill>
@@ -49727,7 +49677,7 @@
         </p:nvSpPr>
         <p:spPr>
           <a:xfrm>
-            <a:off x="868680" y="4645152"/>
+            <a:off x="868680" y="4553712"/>
             <a:ext cx="365760" cy="365760"/>
           </a:xfrm>
           <a:prstGeom prst="ellipse">
@@ -49747,7 +49697,7 @@
         </p:nvSpPr>
         <p:spPr>
           <a:xfrm>
-            <a:off x="868680" y="4645152"/>
+            <a:off x="868680" y="4553712"/>
             <a:ext cx="365760" cy="365760"/>
           </a:xfrm>
           <a:prstGeom prst="rect">
@@ -49783,7 +49733,7 @@
         </p:nvSpPr>
         <p:spPr>
           <a:xfrm>
-            <a:off x="868680" y="5138928"/>
+            <a:off x="868680" y="5047488"/>
             <a:ext cx="2160956" cy="240030"/>
           </a:xfrm>
           <a:prstGeom prst="rect">
@@ -49819,8 +49769,8 @@
         </p:nvSpPr>
         <p:spPr>
           <a:xfrm>
-            <a:off x="868680" y="5452110"/>
-            <a:ext cx="2160956" cy="518922"/>
+            <a:off x="868680" y="5360670"/>
+            <a:ext cx="2160956" cy="637794"/>
           </a:xfrm>
           <a:prstGeom prst="rect">
             <a:avLst/>
@@ -49858,12 +49808,12 @@
         </p:nvSpPr>
         <p:spPr>
           <a:xfrm>
-            <a:off x="3450260" y="4462272"/>
-            <a:ext cx="2526716" cy="1691640"/>
+            <a:off x="3450260" y="4370832"/>
+            <a:ext cx="2526716" cy="1810512"/>
           </a:xfrm>
           <a:prstGeom prst="roundRect">
             <a:avLst>
-              <a:gd name="adj" fmla="val 3243"/>
+              <a:gd name="adj" fmla="val 3030"/>
             </a:avLst>
           </a:prstGeom>
           <a:solidFill>
@@ -49887,7 +49837,7 @@
         </p:nvSpPr>
         <p:spPr>
           <a:xfrm>
-            <a:off x="3633140" y="4645152"/>
+            <a:off x="3633140" y="4553712"/>
             <a:ext cx="365760" cy="365760"/>
           </a:xfrm>
           <a:prstGeom prst="ellipse">
@@ -49907,7 +49857,7 @@
         </p:nvSpPr>
         <p:spPr>
           <a:xfrm>
-            <a:off x="3633140" y="4645152"/>
+            <a:off x="3633140" y="4553712"/>
             <a:ext cx="365760" cy="365760"/>
           </a:xfrm>
           <a:prstGeom prst="rect">
@@ -49943,7 +49893,7 @@
         </p:nvSpPr>
         <p:spPr>
           <a:xfrm>
-            <a:off x="3633140" y="5138928"/>
+            <a:off x="3633140" y="5047488"/>
             <a:ext cx="2160956" cy="240030"/>
           </a:xfrm>
           <a:prstGeom prst="rect">
@@ -49979,8 +49929,8 @@
         </p:nvSpPr>
         <p:spPr>
           <a:xfrm>
-            <a:off x="3633140" y="5452110"/>
-            <a:ext cx="2160956" cy="518922"/>
+            <a:off x="3633140" y="5360670"/>
+            <a:ext cx="2160956" cy="637794"/>
           </a:xfrm>
           <a:prstGeom prst="rect">
             <a:avLst/>
@@ -50018,12 +49968,12 @@
         </p:nvSpPr>
         <p:spPr>
           <a:xfrm>
-            <a:off x="6214720" y="4462272"/>
-            <a:ext cx="2526716" cy="1691640"/>
+            <a:off x="6214720" y="4370832"/>
+            <a:ext cx="2526716" cy="1810512"/>
           </a:xfrm>
           <a:prstGeom prst="roundRect">
             <a:avLst>
-              <a:gd name="adj" fmla="val 3243"/>
+              <a:gd name="adj" fmla="val 3030"/>
             </a:avLst>
           </a:prstGeom>
           <a:solidFill>
@@ -50047,7 +49997,7 @@
         </p:nvSpPr>
         <p:spPr>
           <a:xfrm>
-            <a:off x="6397600" y="4645152"/>
+            <a:off x="6397600" y="4553712"/>
             <a:ext cx="365760" cy="365760"/>
           </a:xfrm>
           <a:prstGeom prst="ellipse">
@@ -50067,7 +50017,7 @@
         </p:nvSpPr>
         <p:spPr>
           <a:xfrm>
-            <a:off x="6397600" y="4645152"/>
+            <a:off x="6397600" y="4553712"/>
             <a:ext cx="365760" cy="365760"/>
           </a:xfrm>
           <a:prstGeom prst="rect">
@@ -50103,7 +50053,7 @@
         </p:nvSpPr>
         <p:spPr>
           <a:xfrm>
-            <a:off x="6397600" y="5138928"/>
+            <a:off x="6397600" y="5047488"/>
             <a:ext cx="2160956" cy="240030"/>
           </a:xfrm>
           <a:prstGeom prst="rect">
@@ -50139,8 +50089,8 @@
         </p:nvSpPr>
         <p:spPr>
           <a:xfrm>
-            <a:off x="6397600" y="5452110"/>
-            <a:ext cx="2160956" cy="518922"/>
+            <a:off x="6397600" y="5360670"/>
+            <a:ext cx="2160956" cy="637794"/>
           </a:xfrm>
           <a:prstGeom prst="rect">
             <a:avLst/>
@@ -50178,12 +50128,12 @@
         </p:nvSpPr>
         <p:spPr>
           <a:xfrm>
-            <a:off x="8979179" y="4462272"/>
-            <a:ext cx="2526716" cy="1691640"/>
+            <a:off x="8979179" y="4370832"/>
+            <a:ext cx="2526716" cy="1810512"/>
           </a:xfrm>
           <a:prstGeom prst="roundRect">
             <a:avLst>
-              <a:gd name="adj" fmla="val 3243"/>
+              <a:gd name="adj" fmla="val 3030"/>
             </a:avLst>
           </a:prstGeom>
           <a:solidFill>
@@ -50207,7 +50157,7 @@
         </p:nvSpPr>
         <p:spPr>
           <a:xfrm>
-            <a:off x="9162059" y="4645152"/>
+            <a:off x="9162059" y="4553712"/>
             <a:ext cx="365760" cy="365760"/>
           </a:xfrm>
           <a:prstGeom prst="ellipse">
@@ -50227,7 +50177,7 @@
         </p:nvSpPr>
         <p:spPr>
           <a:xfrm>
-            <a:off x="9162059" y="4645152"/>
+            <a:off x="9162059" y="4553712"/>
             <a:ext cx="365760" cy="365760"/>
           </a:xfrm>
           <a:prstGeom prst="rect">
@@ -50263,7 +50213,7 @@
         </p:nvSpPr>
         <p:spPr>
           <a:xfrm>
-            <a:off x="9162059" y="5138928"/>
+            <a:off x="9162059" y="5047488"/>
             <a:ext cx="2160956" cy="240030"/>
           </a:xfrm>
           <a:prstGeom prst="rect">
@@ -50299,8 +50249,8 @@
         </p:nvSpPr>
         <p:spPr>
           <a:xfrm>
-            <a:off x="9162059" y="5452110"/>
-            <a:ext cx="2160956" cy="190055"/>
+            <a:off x="9162059" y="5360670"/>
+            <a:ext cx="2160956" cy="235775"/>
           </a:xfrm>
           <a:prstGeom prst="rect">
             <a:avLst/>
@@ -50338,8 +50288,8 @@
         </p:nvSpPr>
         <p:spPr>
           <a:xfrm>
-            <a:off x="9162059" y="5678742"/>
-            <a:ext cx="2160956" cy="328867"/>
+            <a:off x="9162059" y="5633022"/>
+            <a:ext cx="2160956" cy="402019"/>
           </a:xfrm>
           <a:prstGeom prst="rect">
             <a:avLst/>
@@ -50637,7 +50587,7 @@
         <p:spPr>
           <a:xfrm>
             <a:off x="923544" y="2702052"/>
-            <a:ext cx="2051228" cy="1130808"/>
+            <a:ext cx="2051228" cy="1057656"/>
           </a:xfrm>
           <a:prstGeom prst="rect">
             <a:avLst/>
@@ -50675,8 +50625,8 @@
         </p:nvSpPr>
         <p:spPr>
           <a:xfrm>
-            <a:off x="923544" y="3869436"/>
-            <a:ext cx="2051228" cy="336804"/>
+            <a:off x="923544" y="3796284"/>
+            <a:ext cx="2051228" cy="409956"/>
           </a:xfrm>
           <a:prstGeom prst="rect">
             <a:avLst/>
@@ -50833,7 +50783,7 @@
         <p:spPr>
           <a:xfrm>
             <a:off x="3688004" y="2702052"/>
-            <a:ext cx="2051228" cy="1130808"/>
+            <a:ext cx="2051228" cy="1057656"/>
           </a:xfrm>
           <a:prstGeom prst="rect">
             <a:avLst/>
@@ -50871,8 +50821,8 @@
         </p:nvSpPr>
         <p:spPr>
           <a:xfrm>
-            <a:off x="3688004" y="3869436"/>
-            <a:ext cx="2051228" cy="336804"/>
+            <a:off x="3688004" y="3796284"/>
+            <a:ext cx="2051228" cy="409956"/>
           </a:xfrm>
           <a:prstGeom prst="rect">
             <a:avLst/>
@@ -51029,7 +50979,7 @@
         <p:spPr>
           <a:xfrm>
             <a:off x="6452464" y="2702052"/>
-            <a:ext cx="2051228" cy="1130808"/>
+            <a:ext cx="2051228" cy="1057656"/>
           </a:xfrm>
           <a:prstGeom prst="rect">
             <a:avLst/>
@@ -51067,8 +51017,8 @@
         </p:nvSpPr>
         <p:spPr>
           <a:xfrm>
-            <a:off x="6452464" y="3869436"/>
-            <a:ext cx="2051228" cy="336804"/>
+            <a:off x="6452464" y="3796284"/>
+            <a:ext cx="2051228" cy="409956"/>
           </a:xfrm>
           <a:prstGeom prst="rect">
             <a:avLst/>
@@ -51225,7 +51175,7 @@
         <p:spPr>
           <a:xfrm>
             <a:off x="9216923" y="2702052"/>
-            <a:ext cx="2051228" cy="1130808"/>
+            <a:ext cx="2051228" cy="1057656"/>
           </a:xfrm>
           <a:prstGeom prst="rect">
             <a:avLst/>
@@ -51280,8 +51230,8 @@
         </p:nvSpPr>
         <p:spPr>
           <a:xfrm>
-            <a:off x="9216923" y="3869436"/>
-            <a:ext cx="2051228" cy="336804"/>
+            <a:off x="9216923" y="3796284"/>
+            <a:ext cx="2051228" cy="409956"/>
           </a:xfrm>
           <a:prstGeom prst="rect">
             <a:avLst/>
@@ -53150,11 +53100,11 @@
         <p:spPr>
           <a:xfrm>
             <a:off x="685800" y="2523744"/>
-            <a:ext cx="5272888" cy="2468880"/>
+            <a:ext cx="5272888" cy="2432304"/>
           </a:xfrm>
           <a:prstGeom prst="roundRect">
             <a:avLst>
-              <a:gd name="adj" fmla="val 2222"/>
+              <a:gd name="adj" fmla="val 2256"/>
             </a:avLst>
           </a:prstGeom>
           <a:solidFill>
@@ -53215,7 +53165,7 @@
         <p:spPr>
           <a:xfrm>
             <a:off x="960120" y="3346704"/>
-            <a:ext cx="4724248" cy="1517904"/>
+            <a:ext cx="4724248" cy="1481328"/>
           </a:xfrm>
           <a:prstGeom prst="rect">
             <a:avLst/>
@@ -53307,11 +53257,11 @@
         <p:spPr>
           <a:xfrm>
             <a:off x="6233008" y="2523744"/>
-            <a:ext cx="5272888" cy="2468880"/>
+            <a:ext cx="5272888" cy="2432304"/>
           </a:xfrm>
           <a:prstGeom prst="roundRect">
             <a:avLst>
-              <a:gd name="adj" fmla="val 2222"/>
+              <a:gd name="adj" fmla="val 2256"/>
             </a:avLst>
           </a:prstGeom>
           <a:solidFill>
@@ -53372,7 +53322,7 @@
         <p:spPr>
           <a:xfrm>
             <a:off x="6507328" y="3346704"/>
-            <a:ext cx="4724248" cy="1517904"/>
+            <a:ext cx="4724248" cy="1481328"/>
           </a:xfrm>
           <a:prstGeom prst="rect">
             <a:avLst/>
@@ -56191,7 +56141,7 @@
                   <a:schemeClr val="accent3"/>
                 </a:solidFill>
               </a:rPr>
-              <a:t>‘영광’이라는 표현이 많다</a:t>
+              <a:t>‘영광’이라는</a:t>
             </a:r>
             <a:endParaRPr lang="en-US" sz="1200" dirty="0"/>
           </a:p>
@@ -56208,7 +56158,24 @@
                   <a:schemeClr val="accent3"/>
                 </a:solidFill>
               </a:rPr>
-              <a:t>대표적으로 1:14과 17장</a:t>
+              <a:t>표현이 많다</a:t>
+            </a:r>
+            <a:endParaRPr lang="en-US" sz="1200" dirty="0"/>
+          </a:p>
+          <a:p>
+            <a:pPr indent="0" marL="0">
+              <a:lnSpc>
+                <a:spcPct val="122000"/>
+              </a:lnSpc>
+              <a:buNone/>
+            </a:pPr>
+            <a:r>
+              <a:rPr lang="en-US" sz="1200" dirty="0">
+                <a:solidFill>
+                  <a:schemeClr val="accent3"/>
+                </a:solidFill>
+              </a:rPr>
+              <a:t>1:14 · 17장</a:t>
             </a:r>
             <a:endParaRPr lang="en-US" sz="1200" dirty="0"/>
           </a:p>
@@ -56923,7 +56890,7 @@
         <p:spPr>
           <a:xfrm>
             <a:off x="923544" y="2683764"/>
-            <a:ext cx="2051228" cy="1039368"/>
+            <a:ext cx="2051228" cy="966216"/>
           </a:xfrm>
           <a:prstGeom prst="rect">
             <a:avLst/>
@@ -56978,8 +56945,8 @@
         </p:nvSpPr>
         <p:spPr>
           <a:xfrm>
-            <a:off x="923544" y="3759708"/>
-            <a:ext cx="2051228" cy="336804"/>
+            <a:off x="923544" y="3686556"/>
+            <a:ext cx="2051228" cy="409956"/>
           </a:xfrm>
           <a:prstGeom prst="rect">
             <a:avLst/>
@@ -57136,7 +57103,7 @@
         <p:spPr>
           <a:xfrm>
             <a:off x="3688004" y="2683764"/>
-            <a:ext cx="2051228" cy="1039368"/>
+            <a:ext cx="2051228" cy="966216"/>
           </a:xfrm>
           <a:prstGeom prst="rect">
             <a:avLst/>
@@ -57191,8 +57158,8 @@
         </p:nvSpPr>
         <p:spPr>
           <a:xfrm>
-            <a:off x="3688004" y="3759708"/>
-            <a:ext cx="2051228" cy="336804"/>
+            <a:off x="3688004" y="3686556"/>
+            <a:ext cx="2051228" cy="409956"/>
           </a:xfrm>
           <a:prstGeom prst="rect">
             <a:avLst/>
@@ -57349,7 +57316,7 @@
         <p:spPr>
           <a:xfrm>
             <a:off x="6452464" y="2683764"/>
-            <a:ext cx="2051228" cy="1039368"/>
+            <a:ext cx="2051228" cy="966216"/>
           </a:xfrm>
           <a:prstGeom prst="rect">
             <a:avLst/>
@@ -57404,8 +57371,8 @@
         </p:nvSpPr>
         <p:spPr>
           <a:xfrm>
-            <a:off x="6452464" y="3759708"/>
-            <a:ext cx="2051228" cy="336804"/>
+            <a:off x="6452464" y="3686556"/>
+            <a:ext cx="2051228" cy="409956"/>
           </a:xfrm>
           <a:prstGeom prst="rect">
             <a:avLst/>
@@ -57562,7 +57529,7 @@
         <p:spPr>
           <a:xfrm>
             <a:off x="9216923" y="2683764"/>
-            <a:ext cx="2051228" cy="1039368"/>
+            <a:ext cx="2051228" cy="966216"/>
           </a:xfrm>
           <a:prstGeom prst="rect">
             <a:avLst/>
@@ -57617,8 +57584,8 @@
         </p:nvSpPr>
         <p:spPr>
           <a:xfrm>
-            <a:off x="9216923" y="3759708"/>
-            <a:ext cx="2051228" cy="336804"/>
+            <a:off x="9216923" y="3686556"/>
+            <a:ext cx="2051228" cy="409956"/>
           </a:xfrm>
           <a:prstGeom prst="rect">
             <a:avLst/>
@@ -60935,12 +60902,12 @@
         </p:nvSpPr>
         <p:spPr>
           <a:xfrm>
-            <a:off x="685800" y="5321808"/>
-            <a:ext cx="3448202" cy="914400"/>
+            <a:off x="685800" y="5248656"/>
+            <a:ext cx="3448202" cy="877824"/>
           </a:xfrm>
           <a:prstGeom prst="roundRect">
             <a:avLst>
-              <a:gd name="adj" fmla="val 6000"/>
+              <a:gd name="adj" fmla="val 6250"/>
             </a:avLst>
           </a:prstGeom>
           <a:solidFill>
@@ -60964,7 +60931,7 @@
         </p:nvSpPr>
         <p:spPr>
           <a:xfrm>
-            <a:off x="850392" y="5486400"/>
+            <a:off x="850392" y="5413248"/>
             <a:ext cx="3119018" cy="224028"/>
           </a:xfrm>
           <a:prstGeom prst="rect">
@@ -61000,8 +60967,8 @@
         </p:nvSpPr>
         <p:spPr>
           <a:xfrm>
-            <a:off x="850392" y="5783580"/>
-            <a:ext cx="3119018" cy="288036"/>
+            <a:off x="850392" y="5710428"/>
+            <a:ext cx="3119018" cy="251460"/>
           </a:xfrm>
           <a:prstGeom prst="rect">
             <a:avLst/>
@@ -61039,12 +61006,12 @@
         </p:nvSpPr>
         <p:spPr>
           <a:xfrm>
-            <a:off x="4371746" y="5321808"/>
-            <a:ext cx="3448202" cy="914400"/>
+            <a:off x="4371746" y="5248656"/>
+            <a:ext cx="3448202" cy="877824"/>
           </a:xfrm>
           <a:prstGeom prst="roundRect">
             <a:avLst>
-              <a:gd name="adj" fmla="val 6000"/>
+              <a:gd name="adj" fmla="val 6250"/>
             </a:avLst>
           </a:prstGeom>
           <a:solidFill>
@@ -61068,7 +61035,7 @@
         </p:nvSpPr>
         <p:spPr>
           <a:xfrm>
-            <a:off x="4536338" y="5486400"/>
+            <a:off x="4536338" y="5413248"/>
             <a:ext cx="3119018" cy="224028"/>
           </a:xfrm>
           <a:prstGeom prst="rect">
@@ -61104,8 +61071,8 @@
         </p:nvSpPr>
         <p:spPr>
           <a:xfrm>
-            <a:off x="4536338" y="5783580"/>
-            <a:ext cx="3119018" cy="288036"/>
+            <a:off x="4536338" y="5710428"/>
+            <a:ext cx="3119018" cy="251460"/>
           </a:xfrm>
           <a:prstGeom prst="rect">
             <a:avLst/>
@@ -61143,12 +61110,12 @@
         </p:nvSpPr>
         <p:spPr>
           <a:xfrm>
-            <a:off x="8057693" y="5321808"/>
-            <a:ext cx="3448202" cy="914400"/>
+            <a:off x="8057693" y="5248656"/>
+            <a:ext cx="3448202" cy="877824"/>
           </a:xfrm>
           <a:prstGeom prst="roundRect">
             <a:avLst>
-              <a:gd name="adj" fmla="val 6000"/>
+              <a:gd name="adj" fmla="val 6250"/>
             </a:avLst>
           </a:prstGeom>
           <a:solidFill>
@@ -61172,7 +61139,7 @@
         </p:nvSpPr>
         <p:spPr>
           <a:xfrm>
-            <a:off x="8222285" y="5486400"/>
+            <a:off x="8222285" y="5413248"/>
             <a:ext cx="3119018" cy="224028"/>
           </a:xfrm>
           <a:prstGeom prst="rect">
@@ -61208,8 +61175,8 @@
         </p:nvSpPr>
         <p:spPr>
           <a:xfrm>
-            <a:off x="8222285" y="5783580"/>
-            <a:ext cx="3119018" cy="288036"/>
+            <a:off x="8222285" y="5710428"/>
+            <a:ext cx="3119018" cy="251460"/>
           </a:xfrm>
           <a:prstGeom prst="rect">
             <a:avLst/>

--- a/dist/요한복음_1강_영광을_만나기_위한_준비.pptx
+++ b/dist/요한복음_1강_영광을_만나기_위한_준비.pptx
@@ -150,7 +150,7 @@
   <p:extLst>
     <p:ext uri="{521415D9-36F7-43E2-AB2F-B90AF26B5E84}">
       <p14:sectionLst xmlns:p14="http://schemas.microsoft.com/office/powerpoint/2010/main">
-        <p14:section name="오리엔테이션" id="{31cbc5df-5dc1-c329-198e-3c1313b25f4e}">
+        <p14:section name="오리엔테이션" id="{601c6a86-ea19-65ac-bc60-8a5c779375e5}">
           <p14:sldIdLst>
             <p14:sldId id="256"/>
             <p14:sldId id="257"/>
@@ -159,7 +159,7 @@
             <p14:sldId id="260"/>
           </p14:sldIdLst>
         </p14:section>
-        <p14:section name="요한복음 분석" id="{ba301042-ae04-b162-cb3a-0fa7d558c6e1}">
+        <p14:section name="요한복음 분석" id="{a15abed9-6805-2391-b828-ce3d05f41886}">
           <p14:sldIdLst>
             <p14:sldId id="261"/>
             <p14:sldId id="262"/>
@@ -175,7 +175,7 @@
             <p14:sldId id="272"/>
           </p14:sldIdLst>
         </p14:section>
-        <p14:section name="1과 · 예수님에 대한 증언" id="{5a435a58-9b78-0b58-569c-96ccaef60b0c}">
+        <p14:section name="1과 · 예수님에 대한 증언" id="{c7d09d15-4cf1-5aa1-90f7-5aec37b57f30}">
           <p14:sldIdLst>
             <p14:sldId id="273"/>
             <p14:sldId id="274"/>
@@ -191,7 +191,7 @@
             <p14:sldId id="284"/>
           </p14:sldIdLst>
         </p14:section>
-        <p14:section name="1과 · 하나님에 대한 증언" id="{f7d4df3c-12ef-b863-241a-876af3465f20}">
+        <p14:section name="1과 · 하나님에 대한 증언" id="{7b0ca741-21aa-de4b-9344-d3d2ee68e955}">
           <p14:sldIdLst>
             <p14:sldId id="285"/>
             <p14:sldId id="286"/>
@@ -206,14 +206,14 @@
             <p14:sldId id="295"/>
           </p14:sldIdLst>
         </p14:section>
-        <p14:section name="마무리" id="{b11ab725-3f35-7012-c396-9b4ccbf0aba9}">
+        <p14:section name="마무리" id="{b4a073d2-7d66-7460-dde7-2c8c9ba9f188}">
           <p14:sldIdLst>
             <p14:sldId id="296"/>
             <p14:sldId id="297"/>
             <p14:sldId id="298"/>
           </p14:sldIdLst>
         </p14:section>
-        <p14:section name="부록" id="{1a001d4a-f3d2-702c-deb1-96879791253b}">
+        <p14:section name="부록" id="{33c3e133-e0bd-40e7-80f7-4485553e0b8d}">
           <p14:sldIdLst>
             <p14:sldId id="299"/>
           </p14:sldIdLst>
@@ -7892,12 +7892,12 @@
         </p:nvSpPr>
         <p:spPr>
           <a:xfrm>
-            <a:off x="685800" y="1920240"/>
-            <a:ext cx="3448202" cy="1920240"/>
+            <a:off x="685800" y="1865376"/>
+            <a:ext cx="3448202" cy="1874520"/>
           </a:xfrm>
           <a:prstGeom prst="roundRect">
             <a:avLst>
-              <a:gd name="adj" fmla="val 2857"/>
+              <a:gd name="adj" fmla="val 2927"/>
             </a:avLst>
           </a:prstGeom>
           <a:solidFill>
@@ -7921,7 +7921,7 @@
         </p:nvSpPr>
         <p:spPr>
           <a:xfrm>
-            <a:off x="923544" y="2157984"/>
+            <a:off x="923544" y="2103120"/>
             <a:ext cx="566928" cy="420624"/>
           </a:xfrm>
           <a:prstGeom prst="roundRect">
@@ -7943,7 +7943,7 @@
         </p:nvSpPr>
         <p:spPr>
           <a:xfrm>
-            <a:off x="923544" y="2157984"/>
+            <a:off x="923544" y="2103120"/>
             <a:ext cx="566928" cy="420624"/>
           </a:xfrm>
           <a:prstGeom prst="rect">
@@ -7982,7 +7982,7 @@
         </p:nvSpPr>
         <p:spPr>
           <a:xfrm>
-            <a:off x="923544" y="2706624"/>
+            <a:off x="923544" y="2651760"/>
             <a:ext cx="2972714" cy="352044"/>
           </a:xfrm>
           <a:prstGeom prst="rect">
@@ -8021,8 +8021,8 @@
         </p:nvSpPr>
         <p:spPr>
           <a:xfrm>
-            <a:off x="923544" y="3131820"/>
-            <a:ext cx="2972714" cy="470916"/>
+            <a:off x="923544" y="3076956"/>
+            <a:ext cx="2972714" cy="425196"/>
           </a:xfrm>
           <a:prstGeom prst="rect">
             <a:avLst/>
@@ -8083,12 +8083,12 @@
         </p:nvSpPr>
         <p:spPr>
           <a:xfrm>
-            <a:off x="4371746" y="1920240"/>
-            <a:ext cx="3448202" cy="1920240"/>
+            <a:off x="4371746" y="1865376"/>
+            <a:ext cx="3448202" cy="1874520"/>
           </a:xfrm>
           <a:prstGeom prst="roundRect">
             <a:avLst>
-              <a:gd name="adj" fmla="val 2857"/>
+              <a:gd name="adj" fmla="val 2927"/>
             </a:avLst>
           </a:prstGeom>
           <a:solidFill>
@@ -8112,7 +8112,7 @@
         </p:nvSpPr>
         <p:spPr>
           <a:xfrm>
-            <a:off x="4609490" y="2157984"/>
+            <a:off x="4609490" y="2103120"/>
             <a:ext cx="566928" cy="420624"/>
           </a:xfrm>
           <a:prstGeom prst="roundRect">
@@ -8134,7 +8134,7 @@
         </p:nvSpPr>
         <p:spPr>
           <a:xfrm>
-            <a:off x="4609490" y="2157984"/>
+            <a:off x="4609490" y="2103120"/>
             <a:ext cx="566928" cy="420624"/>
           </a:xfrm>
           <a:prstGeom prst="rect">
@@ -8173,7 +8173,7 @@
         </p:nvSpPr>
         <p:spPr>
           <a:xfrm>
-            <a:off x="4609490" y="2706624"/>
+            <a:off x="4609490" y="2651760"/>
             <a:ext cx="2972714" cy="352044"/>
           </a:xfrm>
           <a:prstGeom prst="rect">
@@ -8212,8 +8212,8 @@
         </p:nvSpPr>
         <p:spPr>
           <a:xfrm>
-            <a:off x="4609490" y="3131820"/>
-            <a:ext cx="2972714" cy="470916"/>
+            <a:off x="4609490" y="3076956"/>
+            <a:ext cx="2972714" cy="425196"/>
           </a:xfrm>
           <a:prstGeom prst="rect">
             <a:avLst/>
@@ -8274,12 +8274,12 @@
         </p:nvSpPr>
         <p:spPr>
           <a:xfrm>
-            <a:off x="8057693" y="1920240"/>
-            <a:ext cx="3448202" cy="1920240"/>
+            <a:off x="8057693" y="1865376"/>
+            <a:ext cx="3448202" cy="1874520"/>
           </a:xfrm>
           <a:prstGeom prst="roundRect">
             <a:avLst>
-              <a:gd name="adj" fmla="val 2857"/>
+              <a:gd name="adj" fmla="val 2927"/>
             </a:avLst>
           </a:prstGeom>
           <a:solidFill>
@@ -8303,7 +8303,7 @@
         </p:nvSpPr>
         <p:spPr>
           <a:xfrm>
-            <a:off x="8295437" y="2157984"/>
+            <a:off x="8295437" y="2103120"/>
             <a:ext cx="566928" cy="420624"/>
           </a:xfrm>
           <a:prstGeom prst="roundRect">
@@ -8325,7 +8325,7 @@
         </p:nvSpPr>
         <p:spPr>
           <a:xfrm>
-            <a:off x="8295437" y="2157984"/>
+            <a:off x="8295437" y="2103120"/>
             <a:ext cx="566928" cy="420624"/>
           </a:xfrm>
           <a:prstGeom prst="rect">
@@ -8364,7 +8364,7 @@
         </p:nvSpPr>
         <p:spPr>
           <a:xfrm>
-            <a:off x="8295437" y="2706624"/>
+            <a:off x="8295437" y="2651760"/>
             <a:ext cx="2972714" cy="352044"/>
           </a:xfrm>
           <a:prstGeom prst="rect">
@@ -8403,8 +8403,8 @@
         </p:nvSpPr>
         <p:spPr>
           <a:xfrm>
-            <a:off x="8295437" y="3131820"/>
-            <a:ext cx="2972714" cy="470916"/>
+            <a:off x="8295437" y="3076956"/>
+            <a:ext cx="2972714" cy="425196"/>
           </a:xfrm>
           <a:prstGeom prst="rect">
             <a:avLst/>
@@ -8465,7 +8465,7 @@
         </p:nvSpPr>
         <p:spPr>
           <a:xfrm>
-            <a:off x="685800" y="3977640"/>
+            <a:off x="685800" y="3831336"/>
             <a:ext cx="347472" cy="347472"/>
           </a:xfrm>
           <a:prstGeom prst="ellipse">
@@ -8485,7 +8485,7 @@
         </p:nvSpPr>
         <p:spPr>
           <a:xfrm>
-            <a:off x="685800" y="3977640"/>
+            <a:off x="685800" y="3831336"/>
             <a:ext cx="347472" cy="347472"/>
           </a:xfrm>
           <a:prstGeom prst="rect">
@@ -8524,7 +8524,7 @@
         </p:nvSpPr>
         <p:spPr>
           <a:xfrm>
-            <a:off x="1161288" y="3968496"/>
+            <a:off x="1161288" y="3822192"/>
             <a:ext cx="10344607" cy="365760"/>
           </a:xfrm>
           <a:prstGeom prst="rect">
@@ -8570,7 +8570,7 @@
           </p:nvPr>
         </p:nvGraphicFramePr>
         <p:xfrm>
-          <a:off x="685800" y="4443984"/>
+          <a:off x="685800" y="4224528"/>
           <a:ext cx="10820095" cy="914400"/>
         </p:xfrm>
         <a:graphic>
@@ -18817,8 +18817,8 @@
         </p:nvSpPr>
         <p:spPr>
           <a:xfrm>
-            <a:off x="6473952" y="5815584"/>
-            <a:ext cx="5577840" cy="347472"/>
+            <a:off x="685800" y="5833872"/>
+            <a:ext cx="5577840" cy="310896"/>
           </a:xfrm>
           <a:prstGeom prst="rect">
             <a:avLst/>
@@ -18842,7 +18842,7 @@
                 <a:ea typeface="맑은 고딕" pitchFamily="34" charset="-122"/>
                 <a:cs typeface="맑은 고딕" pitchFamily="34" charset="-120"/>
               </a:rPr>
-              <a:t>13~17장(다락방 강화) 다섯 장이 ‘2~3시간’을 다룹니다 — 요한이 가장 공들인 대목입니다.</a:t>
+              <a:t>13~17장(다락방 강화) 다섯 장이 ‘2~3시간’을 다룹니다</a:t>
             </a:r>
             <a:endParaRPr lang="en-US" sz="1250" dirty="0"/>
           </a:p>
@@ -19100,12 +19100,12 @@
         </p:nvSpPr>
         <p:spPr>
           <a:xfrm>
-            <a:off x="685800" y="1901952"/>
-            <a:ext cx="1605229" cy="1124712"/>
+            <a:off x="685800" y="1865376"/>
+            <a:ext cx="1605229" cy="1106424"/>
           </a:xfrm>
           <a:prstGeom prst="roundRect">
             <a:avLst>
-              <a:gd name="adj" fmla="val 4878"/>
+              <a:gd name="adj" fmla="val 4959"/>
             </a:avLst>
           </a:prstGeom>
           <a:solidFill>
@@ -19129,7 +19129,7 @@
         </p:nvSpPr>
         <p:spPr>
           <a:xfrm>
-            <a:off x="804672" y="2020824"/>
+            <a:off x="804672" y="1984248"/>
             <a:ext cx="320040" cy="292608"/>
           </a:xfrm>
           <a:prstGeom prst="roundRect">
@@ -19151,7 +19151,7 @@
         </p:nvSpPr>
         <p:spPr>
           <a:xfrm>
-            <a:off x="804672" y="2020824"/>
+            <a:off x="804672" y="1984248"/>
             <a:ext cx="320040" cy="292608"/>
           </a:xfrm>
           <a:prstGeom prst="rect">
@@ -19190,7 +19190,7 @@
         </p:nvSpPr>
         <p:spPr>
           <a:xfrm>
-            <a:off x="804672" y="2441448"/>
+            <a:off x="804672" y="2404872"/>
             <a:ext cx="1367485" cy="200025"/>
           </a:xfrm>
           <a:prstGeom prst="rect">
@@ -19229,8 +19229,8 @@
         </p:nvSpPr>
         <p:spPr>
           <a:xfrm>
-            <a:off x="804672" y="2714625"/>
-            <a:ext cx="1367485" cy="193167"/>
+            <a:off x="804672" y="2678049"/>
+            <a:ext cx="1367485" cy="182880"/>
           </a:xfrm>
           <a:prstGeom prst="rect">
             <a:avLst/>
@@ -19271,12 +19271,12 @@
         </p:nvSpPr>
         <p:spPr>
           <a:xfrm>
-            <a:off x="2528773" y="1901952"/>
-            <a:ext cx="1605229" cy="1124712"/>
+            <a:off x="2528773" y="1865376"/>
+            <a:ext cx="1605229" cy="1106424"/>
           </a:xfrm>
           <a:prstGeom prst="roundRect">
             <a:avLst>
-              <a:gd name="adj" fmla="val 4878"/>
+              <a:gd name="adj" fmla="val 4959"/>
             </a:avLst>
           </a:prstGeom>
           <a:solidFill>
@@ -19300,7 +19300,7 @@
         </p:nvSpPr>
         <p:spPr>
           <a:xfrm>
-            <a:off x="2647645" y="2020824"/>
+            <a:off x="2647645" y="1984248"/>
             <a:ext cx="320040" cy="292608"/>
           </a:xfrm>
           <a:prstGeom prst="roundRect">
@@ -19322,7 +19322,7 @@
         </p:nvSpPr>
         <p:spPr>
           <a:xfrm>
-            <a:off x="2647645" y="2020824"/>
+            <a:off x="2647645" y="1984248"/>
             <a:ext cx="320040" cy="292608"/>
           </a:xfrm>
           <a:prstGeom prst="rect">
@@ -19361,7 +19361,7 @@
         </p:nvSpPr>
         <p:spPr>
           <a:xfrm>
-            <a:off x="2647645" y="2441448"/>
+            <a:off x="2647645" y="2404872"/>
             <a:ext cx="1367485" cy="200025"/>
           </a:xfrm>
           <a:prstGeom prst="rect">
@@ -19400,8 +19400,8 @@
         </p:nvSpPr>
         <p:spPr>
           <a:xfrm>
-            <a:off x="2647645" y="2714625"/>
-            <a:ext cx="1367485" cy="193167"/>
+            <a:off x="2647645" y="2678049"/>
+            <a:ext cx="1367485" cy="182880"/>
           </a:xfrm>
           <a:prstGeom prst="rect">
             <a:avLst/>
@@ -19442,12 +19442,12 @@
         </p:nvSpPr>
         <p:spPr>
           <a:xfrm>
-            <a:off x="4371746" y="1901952"/>
-            <a:ext cx="1605229" cy="1124712"/>
+            <a:off x="4371746" y="1865376"/>
+            <a:ext cx="1605229" cy="1106424"/>
           </a:xfrm>
           <a:prstGeom prst="roundRect">
             <a:avLst>
-              <a:gd name="adj" fmla="val 4878"/>
+              <a:gd name="adj" fmla="val 4959"/>
             </a:avLst>
           </a:prstGeom>
           <a:solidFill>
@@ -19471,7 +19471,7 @@
         </p:nvSpPr>
         <p:spPr>
           <a:xfrm>
-            <a:off x="4490618" y="2020824"/>
+            <a:off x="4490618" y="1984248"/>
             <a:ext cx="320040" cy="292608"/>
           </a:xfrm>
           <a:prstGeom prst="roundRect">
@@ -19493,7 +19493,7 @@
         </p:nvSpPr>
         <p:spPr>
           <a:xfrm>
-            <a:off x="4490618" y="2020824"/>
+            <a:off x="4490618" y="1984248"/>
             <a:ext cx="320040" cy="292608"/>
           </a:xfrm>
           <a:prstGeom prst="rect">
@@ -19532,7 +19532,7 @@
         </p:nvSpPr>
         <p:spPr>
           <a:xfrm>
-            <a:off x="4490618" y="2441448"/>
+            <a:off x="4490618" y="2404872"/>
             <a:ext cx="1367485" cy="200025"/>
           </a:xfrm>
           <a:prstGeom prst="rect">
@@ -19571,8 +19571,8 @@
         </p:nvSpPr>
         <p:spPr>
           <a:xfrm>
-            <a:off x="4490618" y="2714625"/>
-            <a:ext cx="1367485" cy="193167"/>
+            <a:off x="4490618" y="2678049"/>
+            <a:ext cx="1367485" cy="182880"/>
           </a:xfrm>
           <a:prstGeom prst="rect">
             <a:avLst/>
@@ -19613,12 +19613,12 @@
         </p:nvSpPr>
         <p:spPr>
           <a:xfrm>
-            <a:off x="6214720" y="1901952"/>
-            <a:ext cx="1605229" cy="1124712"/>
+            <a:off x="6214720" y="1865376"/>
+            <a:ext cx="1605229" cy="1106424"/>
           </a:xfrm>
           <a:prstGeom prst="roundRect">
             <a:avLst>
-              <a:gd name="adj" fmla="val 4878"/>
+              <a:gd name="adj" fmla="val 4959"/>
             </a:avLst>
           </a:prstGeom>
           <a:solidFill>
@@ -19642,7 +19642,7 @@
         </p:nvSpPr>
         <p:spPr>
           <a:xfrm>
-            <a:off x="6333592" y="2020824"/>
+            <a:off x="6333592" y="1984248"/>
             <a:ext cx="320040" cy="292608"/>
           </a:xfrm>
           <a:prstGeom prst="roundRect">
@@ -19664,7 +19664,7 @@
         </p:nvSpPr>
         <p:spPr>
           <a:xfrm>
-            <a:off x="6333592" y="2020824"/>
+            <a:off x="6333592" y="1984248"/>
             <a:ext cx="320040" cy="292608"/>
           </a:xfrm>
           <a:prstGeom prst="rect">
@@ -19703,7 +19703,7 @@
         </p:nvSpPr>
         <p:spPr>
           <a:xfrm>
-            <a:off x="6333592" y="2441448"/>
+            <a:off x="6333592" y="2404872"/>
             <a:ext cx="1367485" cy="200025"/>
           </a:xfrm>
           <a:prstGeom prst="rect">
@@ -19742,8 +19742,8 @@
         </p:nvSpPr>
         <p:spPr>
           <a:xfrm>
-            <a:off x="6333592" y="2714625"/>
-            <a:ext cx="1367485" cy="193167"/>
+            <a:off x="6333592" y="2678049"/>
+            <a:ext cx="1367485" cy="182880"/>
           </a:xfrm>
           <a:prstGeom prst="rect">
             <a:avLst/>
@@ -19784,12 +19784,12 @@
         </p:nvSpPr>
         <p:spPr>
           <a:xfrm>
-            <a:off x="8057693" y="1901952"/>
-            <a:ext cx="1605229" cy="1124712"/>
+            <a:off x="8057693" y="1865376"/>
+            <a:ext cx="1605229" cy="1106424"/>
           </a:xfrm>
           <a:prstGeom prst="roundRect">
             <a:avLst>
-              <a:gd name="adj" fmla="val 4878"/>
+              <a:gd name="adj" fmla="val 4959"/>
             </a:avLst>
           </a:prstGeom>
           <a:solidFill>
@@ -19813,7 +19813,7 @@
         </p:nvSpPr>
         <p:spPr>
           <a:xfrm>
-            <a:off x="8176565" y="2020824"/>
+            <a:off x="8176565" y="1984248"/>
             <a:ext cx="320040" cy="292608"/>
           </a:xfrm>
           <a:prstGeom prst="roundRect">
@@ -19835,7 +19835,7 @@
         </p:nvSpPr>
         <p:spPr>
           <a:xfrm>
-            <a:off x="8176565" y="2020824"/>
+            <a:off x="8176565" y="1984248"/>
             <a:ext cx="320040" cy="292608"/>
           </a:xfrm>
           <a:prstGeom prst="rect">
@@ -19874,7 +19874,7 @@
         </p:nvSpPr>
         <p:spPr>
           <a:xfrm>
-            <a:off x="8176565" y="2441448"/>
+            <a:off x="8176565" y="2404872"/>
             <a:ext cx="1367485" cy="200025"/>
           </a:xfrm>
           <a:prstGeom prst="rect">
@@ -19913,8 +19913,8 @@
         </p:nvSpPr>
         <p:spPr>
           <a:xfrm>
-            <a:off x="8176565" y="2714625"/>
-            <a:ext cx="1367485" cy="193167"/>
+            <a:off x="8176565" y="2678049"/>
+            <a:ext cx="1367485" cy="182880"/>
           </a:xfrm>
           <a:prstGeom prst="rect">
             <a:avLst/>
@@ -19955,12 +19955,12 @@
         </p:nvSpPr>
         <p:spPr>
           <a:xfrm>
-            <a:off x="9900666" y="1901952"/>
-            <a:ext cx="1605229" cy="1124712"/>
+            <a:off x="9900666" y="1865376"/>
+            <a:ext cx="1605229" cy="1106424"/>
           </a:xfrm>
           <a:prstGeom prst="roundRect">
             <a:avLst>
-              <a:gd name="adj" fmla="val 4878"/>
+              <a:gd name="adj" fmla="val 4959"/>
             </a:avLst>
           </a:prstGeom>
           <a:solidFill>
@@ -19984,7 +19984,7 @@
         </p:nvSpPr>
         <p:spPr>
           <a:xfrm>
-            <a:off x="10019538" y="2020824"/>
+            <a:off x="10019538" y="1984248"/>
             <a:ext cx="320040" cy="292608"/>
           </a:xfrm>
           <a:prstGeom prst="roundRect">
@@ -20006,7 +20006,7 @@
         </p:nvSpPr>
         <p:spPr>
           <a:xfrm>
-            <a:off x="10019538" y="2020824"/>
+            <a:off x="10019538" y="1984248"/>
             <a:ext cx="320040" cy="292608"/>
           </a:xfrm>
           <a:prstGeom prst="rect">
@@ -20045,7 +20045,7 @@
         </p:nvSpPr>
         <p:spPr>
           <a:xfrm>
-            <a:off x="10019538" y="2441448"/>
+            <a:off x="10019538" y="2404872"/>
             <a:ext cx="1367485" cy="200025"/>
           </a:xfrm>
           <a:prstGeom prst="rect">
@@ -20084,8 +20084,8 @@
         </p:nvSpPr>
         <p:spPr>
           <a:xfrm>
-            <a:off x="10019538" y="2714625"/>
-            <a:ext cx="1367485" cy="193167"/>
+            <a:off x="10019538" y="2678049"/>
+            <a:ext cx="1367485" cy="182880"/>
           </a:xfrm>
           <a:prstGeom prst="rect">
             <a:avLst/>
@@ -20126,12 +20126,12 @@
         </p:nvSpPr>
         <p:spPr>
           <a:xfrm>
-            <a:off x="685800" y="3264408"/>
-            <a:ext cx="1605229" cy="1124712"/>
+            <a:off x="685800" y="3209544"/>
+            <a:ext cx="1605229" cy="1106424"/>
           </a:xfrm>
           <a:prstGeom prst="roundRect">
             <a:avLst>
-              <a:gd name="adj" fmla="val 4878"/>
+              <a:gd name="adj" fmla="val 4959"/>
             </a:avLst>
           </a:prstGeom>
           <a:solidFill>
@@ -20155,7 +20155,7 @@
         </p:nvSpPr>
         <p:spPr>
           <a:xfrm>
-            <a:off x="804672" y="3383280"/>
+            <a:off x="804672" y="3328416"/>
             <a:ext cx="320040" cy="292608"/>
           </a:xfrm>
           <a:prstGeom prst="roundRect">
@@ -20177,7 +20177,7 @@
         </p:nvSpPr>
         <p:spPr>
           <a:xfrm>
-            <a:off x="804672" y="3383280"/>
+            <a:off x="804672" y="3328416"/>
             <a:ext cx="320040" cy="292608"/>
           </a:xfrm>
           <a:prstGeom prst="rect">
@@ -20216,7 +20216,7 @@
         </p:nvSpPr>
         <p:spPr>
           <a:xfrm>
-            <a:off x="804672" y="3803904"/>
+            <a:off x="804672" y="3749040"/>
             <a:ext cx="1367485" cy="200025"/>
           </a:xfrm>
           <a:prstGeom prst="rect">
@@ -20255,8 +20255,8 @@
         </p:nvSpPr>
         <p:spPr>
           <a:xfrm>
-            <a:off x="804672" y="4077081"/>
-            <a:ext cx="1367485" cy="193167"/>
+            <a:off x="804672" y="4022217"/>
+            <a:ext cx="1367485" cy="182880"/>
           </a:xfrm>
           <a:prstGeom prst="rect">
             <a:avLst/>
@@ -20297,12 +20297,12 @@
         </p:nvSpPr>
         <p:spPr>
           <a:xfrm>
-            <a:off x="2528773" y="3264408"/>
-            <a:ext cx="1605229" cy="1124712"/>
+            <a:off x="2528773" y="3209544"/>
+            <a:ext cx="1605229" cy="1106424"/>
           </a:xfrm>
           <a:prstGeom prst="roundRect">
             <a:avLst>
-              <a:gd name="adj" fmla="val 4878"/>
+              <a:gd name="adj" fmla="val 4959"/>
             </a:avLst>
           </a:prstGeom>
           <a:solidFill>
@@ -20326,7 +20326,7 @@
         </p:nvSpPr>
         <p:spPr>
           <a:xfrm>
-            <a:off x="2647645" y="3383280"/>
+            <a:off x="2647645" y="3328416"/>
             <a:ext cx="320040" cy="292608"/>
           </a:xfrm>
           <a:prstGeom prst="roundRect">
@@ -20348,7 +20348,7 @@
         </p:nvSpPr>
         <p:spPr>
           <a:xfrm>
-            <a:off x="2647645" y="3383280"/>
+            <a:off x="2647645" y="3328416"/>
             <a:ext cx="320040" cy="292608"/>
           </a:xfrm>
           <a:prstGeom prst="rect">
@@ -20387,7 +20387,7 @@
         </p:nvSpPr>
         <p:spPr>
           <a:xfrm>
-            <a:off x="2647645" y="3803904"/>
+            <a:off x="2647645" y="3749040"/>
             <a:ext cx="1367485" cy="200025"/>
           </a:xfrm>
           <a:prstGeom prst="rect">
@@ -20426,8 +20426,8 @@
         </p:nvSpPr>
         <p:spPr>
           <a:xfrm>
-            <a:off x="2647645" y="4077081"/>
-            <a:ext cx="1367485" cy="193167"/>
+            <a:off x="2647645" y="4022217"/>
+            <a:ext cx="1367485" cy="182880"/>
           </a:xfrm>
           <a:prstGeom prst="rect">
             <a:avLst/>
@@ -20468,12 +20468,12 @@
         </p:nvSpPr>
         <p:spPr>
           <a:xfrm>
-            <a:off x="4371746" y="3264408"/>
-            <a:ext cx="1605229" cy="1124712"/>
+            <a:off x="4371746" y="3209544"/>
+            <a:ext cx="1605229" cy="1106424"/>
           </a:xfrm>
           <a:prstGeom prst="roundRect">
             <a:avLst>
-              <a:gd name="adj" fmla="val 4878"/>
+              <a:gd name="adj" fmla="val 4959"/>
             </a:avLst>
           </a:prstGeom>
           <a:solidFill>
@@ -20497,7 +20497,7 @@
         </p:nvSpPr>
         <p:spPr>
           <a:xfrm>
-            <a:off x="4490618" y="3383280"/>
+            <a:off x="4490618" y="3328416"/>
             <a:ext cx="320040" cy="292608"/>
           </a:xfrm>
           <a:prstGeom prst="roundRect">
@@ -20519,7 +20519,7 @@
         </p:nvSpPr>
         <p:spPr>
           <a:xfrm>
-            <a:off x="4490618" y="3383280"/>
+            <a:off x="4490618" y="3328416"/>
             <a:ext cx="320040" cy="292608"/>
           </a:xfrm>
           <a:prstGeom prst="rect">
@@ -20558,7 +20558,7 @@
         </p:nvSpPr>
         <p:spPr>
           <a:xfrm>
-            <a:off x="4490618" y="3803904"/>
+            <a:off x="4490618" y="3749040"/>
             <a:ext cx="1367485" cy="200025"/>
           </a:xfrm>
           <a:prstGeom prst="rect">
@@ -20597,8 +20597,8 @@
         </p:nvSpPr>
         <p:spPr>
           <a:xfrm>
-            <a:off x="4490618" y="4077081"/>
-            <a:ext cx="1367485" cy="193167"/>
+            <a:off x="4490618" y="4022217"/>
+            <a:ext cx="1367485" cy="182880"/>
           </a:xfrm>
           <a:prstGeom prst="rect">
             <a:avLst/>
@@ -20639,12 +20639,12 @@
         </p:nvSpPr>
         <p:spPr>
           <a:xfrm>
-            <a:off x="6214720" y="3264408"/>
-            <a:ext cx="1605229" cy="1124712"/>
+            <a:off x="6214720" y="3209544"/>
+            <a:ext cx="1605229" cy="1106424"/>
           </a:xfrm>
           <a:prstGeom prst="roundRect">
             <a:avLst>
-              <a:gd name="adj" fmla="val 4878"/>
+              <a:gd name="adj" fmla="val 4959"/>
             </a:avLst>
           </a:prstGeom>
           <a:solidFill>
@@ -20668,7 +20668,7 @@
         </p:nvSpPr>
         <p:spPr>
           <a:xfrm>
-            <a:off x="6333592" y="3383280"/>
+            <a:off x="6333592" y="3328416"/>
             <a:ext cx="320040" cy="292608"/>
           </a:xfrm>
           <a:prstGeom prst="roundRect">
@@ -20690,7 +20690,7 @@
         </p:nvSpPr>
         <p:spPr>
           <a:xfrm>
-            <a:off x="6333592" y="3383280"/>
+            <a:off x="6333592" y="3328416"/>
             <a:ext cx="320040" cy="292608"/>
           </a:xfrm>
           <a:prstGeom prst="rect">
@@ -20729,7 +20729,7 @@
         </p:nvSpPr>
         <p:spPr>
           <a:xfrm>
-            <a:off x="6333592" y="3803904"/>
+            <a:off x="6333592" y="3749040"/>
             <a:ext cx="1367485" cy="200025"/>
           </a:xfrm>
           <a:prstGeom prst="rect">
@@ -20768,8 +20768,8 @@
         </p:nvSpPr>
         <p:spPr>
           <a:xfrm>
-            <a:off x="6333592" y="4077081"/>
-            <a:ext cx="1367485" cy="193167"/>
+            <a:off x="6333592" y="4022217"/>
+            <a:ext cx="1367485" cy="182880"/>
           </a:xfrm>
           <a:prstGeom prst="rect">
             <a:avLst/>
@@ -20810,12 +20810,12 @@
         </p:nvSpPr>
         <p:spPr>
           <a:xfrm>
-            <a:off x="8057693" y="3264408"/>
-            <a:ext cx="1605229" cy="1124712"/>
+            <a:off x="8057693" y="3209544"/>
+            <a:ext cx="1605229" cy="1106424"/>
           </a:xfrm>
           <a:prstGeom prst="roundRect">
             <a:avLst>
-              <a:gd name="adj" fmla="val 4878"/>
+              <a:gd name="adj" fmla="val 4959"/>
             </a:avLst>
           </a:prstGeom>
           <a:solidFill>
@@ -20839,7 +20839,7 @@
         </p:nvSpPr>
         <p:spPr>
           <a:xfrm>
-            <a:off x="8176565" y="3383280"/>
+            <a:off x="8176565" y="3328416"/>
             <a:ext cx="320040" cy="292608"/>
           </a:xfrm>
           <a:prstGeom prst="roundRect">
@@ -20861,7 +20861,7 @@
         </p:nvSpPr>
         <p:spPr>
           <a:xfrm>
-            <a:off x="8176565" y="3383280"/>
+            <a:off x="8176565" y="3328416"/>
             <a:ext cx="320040" cy="292608"/>
           </a:xfrm>
           <a:prstGeom prst="rect">
@@ -20900,7 +20900,7 @@
         </p:nvSpPr>
         <p:spPr>
           <a:xfrm>
-            <a:off x="8176565" y="3803904"/>
+            <a:off x="8176565" y="3749040"/>
             <a:ext cx="1367485" cy="200025"/>
           </a:xfrm>
           <a:prstGeom prst="rect">
@@ -20939,8 +20939,8 @@
         </p:nvSpPr>
         <p:spPr>
           <a:xfrm>
-            <a:off x="8176565" y="4077081"/>
-            <a:ext cx="1367485" cy="193167"/>
+            <a:off x="8176565" y="4022217"/>
+            <a:ext cx="1367485" cy="182880"/>
           </a:xfrm>
           <a:prstGeom prst="rect">
             <a:avLst/>
@@ -20981,7 +20981,7 @@
         </p:nvSpPr>
         <p:spPr>
           <a:xfrm>
-            <a:off x="685800" y="4544568"/>
+            <a:off x="685800" y="4416552"/>
             <a:ext cx="539496" cy="347472"/>
           </a:xfrm>
           <a:prstGeom prst="roundRect">
@@ -21003,7 +21003,7 @@
         </p:nvSpPr>
         <p:spPr>
           <a:xfrm>
-            <a:off x="685800" y="4544568"/>
+            <a:off x="685800" y="4416552"/>
             <a:ext cx="539496" cy="347472"/>
           </a:xfrm>
           <a:prstGeom prst="rect">
@@ -21042,7 +21042,7 @@
         </p:nvSpPr>
         <p:spPr>
           <a:xfrm>
-            <a:off x="1353312" y="4535424"/>
+            <a:off x="1353312" y="4407408"/>
             <a:ext cx="10152583" cy="365760"/>
           </a:xfrm>
           <a:prstGeom prst="rect">
@@ -21081,12 +21081,12 @@
         </p:nvSpPr>
         <p:spPr>
           <a:xfrm>
-            <a:off x="685800" y="4992624"/>
-            <a:ext cx="10820095" cy="365760"/>
+            <a:off x="685800" y="4809744"/>
+            <a:ext cx="10820095" cy="347472"/>
           </a:xfrm>
           <a:prstGeom prst="roundRect">
             <a:avLst>
-              <a:gd name="adj" fmla="val 20000"/>
+              <a:gd name="adj" fmla="val 21053"/>
             </a:avLst>
           </a:prstGeom>
           <a:solidFill>
@@ -21103,8 +21103,8 @@
         </p:nvSpPr>
         <p:spPr>
           <a:xfrm>
-            <a:off x="923544" y="4992624"/>
-            <a:ext cx="2194560" cy="365760"/>
+            <a:off x="923544" y="4809744"/>
+            <a:ext cx="2194560" cy="347472"/>
           </a:xfrm>
           <a:prstGeom prst="rect">
             <a:avLst/>
@@ -21142,8 +21142,8 @@
         </p:nvSpPr>
         <p:spPr>
           <a:xfrm>
-            <a:off x="3246120" y="4992624"/>
-            <a:ext cx="8046720" cy="365760"/>
+            <a:off x="3246120" y="4809744"/>
+            <a:ext cx="8046720" cy="347472"/>
           </a:xfrm>
           <a:prstGeom prst="rect">
             <a:avLst/>
@@ -21181,12 +21181,12 @@
         </p:nvSpPr>
         <p:spPr>
           <a:xfrm>
-            <a:off x="685800" y="5413248"/>
-            <a:ext cx="10820095" cy="365760"/>
+            <a:off x="685800" y="5193792"/>
+            <a:ext cx="10820095" cy="347472"/>
           </a:xfrm>
           <a:prstGeom prst="roundRect">
             <a:avLst>
-              <a:gd name="adj" fmla="val 20000"/>
+              <a:gd name="adj" fmla="val 21053"/>
             </a:avLst>
           </a:prstGeom>
           <a:solidFill>
@@ -21203,8 +21203,8 @@
         </p:nvSpPr>
         <p:spPr>
           <a:xfrm>
-            <a:off x="923544" y="5413248"/>
-            <a:ext cx="2194560" cy="365760"/>
+            <a:off x="923544" y="5193792"/>
+            <a:ext cx="2194560" cy="347472"/>
           </a:xfrm>
           <a:prstGeom prst="rect">
             <a:avLst/>
@@ -21242,8 +21242,8 @@
         </p:nvSpPr>
         <p:spPr>
           <a:xfrm>
-            <a:off x="3246120" y="5413248"/>
-            <a:ext cx="8046720" cy="365760"/>
+            <a:off x="3246120" y="5193792"/>
+            <a:ext cx="8046720" cy="347472"/>
           </a:xfrm>
           <a:prstGeom prst="rect">
             <a:avLst/>
@@ -21281,12 +21281,12 @@
         </p:nvSpPr>
         <p:spPr>
           <a:xfrm>
-            <a:off x="685800" y="5833872"/>
-            <a:ext cx="10820095" cy="365760"/>
+            <a:off x="685800" y="5577840"/>
+            <a:ext cx="10820095" cy="347472"/>
           </a:xfrm>
           <a:prstGeom prst="roundRect">
             <a:avLst>
-              <a:gd name="adj" fmla="val 20000"/>
+              <a:gd name="adj" fmla="val 21053"/>
             </a:avLst>
           </a:prstGeom>
           <a:solidFill>
@@ -21303,8 +21303,8 @@
         </p:nvSpPr>
         <p:spPr>
           <a:xfrm>
-            <a:off x="923544" y="5833872"/>
-            <a:ext cx="2194560" cy="365760"/>
+            <a:off x="923544" y="5577840"/>
+            <a:ext cx="2194560" cy="347472"/>
           </a:xfrm>
           <a:prstGeom prst="rect">
             <a:avLst/>
@@ -21342,8 +21342,8 @@
         </p:nvSpPr>
         <p:spPr>
           <a:xfrm>
-            <a:off x="3246120" y="5833872"/>
-            <a:ext cx="8046720" cy="365760"/>
+            <a:off x="3246120" y="5577840"/>
+            <a:ext cx="8046720" cy="347472"/>
           </a:xfrm>
           <a:prstGeom prst="rect">
             <a:avLst/>
@@ -21381,12 +21381,12 @@
         </p:nvSpPr>
         <p:spPr>
           <a:xfrm>
-            <a:off x="685800" y="6254496"/>
-            <a:ext cx="10820095" cy="365760"/>
+            <a:off x="685800" y="5961888"/>
+            <a:ext cx="10820095" cy="347472"/>
           </a:xfrm>
           <a:prstGeom prst="roundRect">
             <a:avLst>
-              <a:gd name="adj" fmla="val 20000"/>
+              <a:gd name="adj" fmla="val 21053"/>
             </a:avLst>
           </a:prstGeom>
           <a:solidFill>
@@ -21403,8 +21403,8 @@
         </p:nvSpPr>
         <p:spPr>
           <a:xfrm>
-            <a:off x="923544" y="6254496"/>
-            <a:ext cx="2194560" cy="365760"/>
+            <a:off x="923544" y="5961888"/>
+            <a:ext cx="2194560" cy="347472"/>
           </a:xfrm>
           <a:prstGeom prst="rect">
             <a:avLst/>
@@ -21442,8 +21442,8 @@
         </p:nvSpPr>
         <p:spPr>
           <a:xfrm>
-            <a:off x="3246120" y="6254496"/>
-            <a:ext cx="8046720" cy="365760"/>
+            <a:off x="3246120" y="5961888"/>
+            <a:ext cx="8046720" cy="347472"/>
           </a:xfrm>
           <a:prstGeom prst="rect">
             <a:avLst/>
@@ -22942,7 +22942,27 @@
                 <a:ea typeface="맑은 고딕" pitchFamily="34" charset="-122"/>
                 <a:cs typeface="맑은 고딕" pitchFamily="34" charset="-120"/>
               </a:rPr>
-              <a:t>저자 · 구조 · 완전수 7</a:t>
+              <a:t>저자 · 구조</a:t>
+            </a:r>
+            <a:endParaRPr lang="en-US" sz="1250" dirty="0"/>
+          </a:p>
+          <a:p>
+            <a:pPr algn="ctr" indent="0" marL="0">
+              <a:lnSpc>
+                <a:spcPct val="118000"/>
+              </a:lnSpc>
+              <a:buNone/>
+            </a:pPr>
+            <a:r>
+              <a:rPr lang="en-US" sz="1250" dirty="0">
+                <a:solidFill>
+                  <a:schemeClr val="accent3"/>
+                </a:solidFill>
+                <a:latin typeface="맑은 고딕" pitchFamily="34" charset="0"/>
+                <a:ea typeface="맑은 고딕" pitchFamily="34" charset="-122"/>
+                <a:cs typeface="맑은 고딕" pitchFamily="34" charset="-120"/>
+              </a:rPr>
+              <a:t>완전수 7</a:t>
             </a:r>
             <a:endParaRPr lang="en-US" sz="1250" dirty="0"/>
           </a:p>
@@ -24798,7 +24818,7 @@
                 <a:ea typeface="맑은 고딕" pitchFamily="34" charset="-122"/>
                 <a:cs typeface="맑은 고딕" pitchFamily="34" charset="-120"/>
               </a:rPr>
-              <a:t>이름이 밝혀진 제자 제외</a:t>
+              <a:t>이름이 밝혀진 제자</a:t>
             </a:r>
             <a:endParaRPr lang="en-US" sz="1500" dirty="0"/>
           </a:p>
@@ -24840,7 +24860,7 @@
                 <a:ea typeface="맑은 고딕" pitchFamily="34" charset="-122"/>
                 <a:cs typeface="맑은 고딕" pitchFamily="34" charset="-120"/>
               </a:rPr>
-              <a:t>빌립(6:7) · 베드로 · 안드레(6:8)</a:t>
+              <a:t>빌립 · 베드로 · 안드레</a:t>
             </a:r>
             <a:endParaRPr lang="en-US" sz="1200" dirty="0"/>
           </a:p>
@@ -24860,7 +24880,7 @@
                 <a:ea typeface="맑은 고딕" pitchFamily="34" charset="-122"/>
                 <a:cs typeface="맑은 고딕" pitchFamily="34" charset="-120"/>
               </a:rPr>
-              <a:t>도마(11:16) · 유다(14:22) · 가룟 유다</a:t>
+              <a:t>도마 · 유다 · 가룟 유다</a:t>
             </a:r>
             <a:endParaRPr lang="en-US" sz="1200" dirty="0"/>
           </a:p>
@@ -25760,7 +25780,27 @@
                 <a:ea typeface="맑은 고딕" pitchFamily="34" charset="-122"/>
                 <a:cs typeface="맑은 고딕" pitchFamily="34" charset="-120"/>
               </a:rPr>
-              <a:t>어머니는 살로메 — 예수님의 이모 (요 19:25)</a:t>
+              <a:t>어머니는 살로메</a:t>
+            </a:r>
+            <a:endParaRPr lang="en-US" sz="1350" dirty="0"/>
+          </a:p>
+          <a:p>
+            <a:pPr indent="0" marL="0">
+              <a:lnSpc>
+                <a:spcPct val="122000"/>
+              </a:lnSpc>
+              <a:buNone/>
+            </a:pPr>
+            <a:r>
+              <a:rPr lang="en-US" sz="1350" dirty="0">
+                <a:solidFill>
+                  <a:schemeClr val="accent3"/>
+                </a:solidFill>
+                <a:latin typeface="맑은 고딕" pitchFamily="34" charset="0"/>
+                <a:ea typeface="맑은 고딕" pitchFamily="34" charset="-122"/>
+                <a:cs typeface="맑은 고딕" pitchFamily="34" charset="-120"/>
+              </a:rPr>
+              <a:t>— 예수님의 이모 (요 19:25)</a:t>
             </a:r>
             <a:endParaRPr lang="en-US" sz="1350" dirty="0"/>
           </a:p>
@@ -31114,7 +31154,7 @@
                 <a:ea typeface="맑은 고딕" pitchFamily="34" charset="-122"/>
                 <a:cs typeface="맑은 고딕" pitchFamily="34" charset="-120"/>
               </a:rPr>
-              <a:t>알아본 제자 (20:19~20, 21:7)</a:t>
+              <a:t>알아본 제자 (20:19~20)</a:t>
             </a:r>
             <a:endParaRPr lang="en-US" sz="1350" dirty="0"/>
           </a:p>
@@ -39696,8 +39736,8 @@
         </p:nvSpPr>
         <p:spPr>
           <a:xfrm>
-            <a:off x="685800" y="1463040"/>
-            <a:ext cx="10789920" cy="457200"/>
+            <a:off x="685800" y="1426464"/>
+            <a:ext cx="10789920" cy="658368"/>
           </a:xfrm>
           <a:prstGeom prst="rect">
             <a:avLst/>
@@ -39738,7 +39778,7 @@
         </p:nvSpPr>
         <p:spPr>
           <a:xfrm>
-            <a:off x="685800" y="1975104"/>
+            <a:off x="685800" y="2139696"/>
             <a:ext cx="10789920" cy="365760"/>
           </a:xfrm>
           <a:prstGeom prst="rect">
@@ -39777,12 +39817,12 @@
         </p:nvSpPr>
         <p:spPr>
           <a:xfrm>
-            <a:off x="685800" y="2542032"/>
-            <a:ext cx="3448202" cy="1956816"/>
+            <a:off x="685800" y="2615184"/>
+            <a:ext cx="3448202" cy="1993392"/>
           </a:xfrm>
           <a:prstGeom prst="roundRect">
             <a:avLst>
-              <a:gd name="adj" fmla="val 2804"/>
+              <a:gd name="adj" fmla="val 2752"/>
             </a:avLst>
           </a:prstGeom>
           <a:solidFill>
@@ -39806,7 +39846,7 @@
         </p:nvSpPr>
         <p:spPr>
           <a:xfrm>
-            <a:off x="923544" y="2779776"/>
+            <a:off x="923544" y="2852928"/>
             <a:ext cx="402336" cy="402336"/>
           </a:xfrm>
           <a:prstGeom prst="ellipse">
@@ -39826,7 +39866,7 @@
         </p:nvSpPr>
         <p:spPr>
           <a:xfrm>
-            <a:off x="923544" y="2779776"/>
+            <a:off x="923544" y="2852928"/>
             <a:ext cx="402336" cy="402336"/>
           </a:xfrm>
           <a:prstGeom prst="rect">
@@ -39865,7 +39905,7 @@
         </p:nvSpPr>
         <p:spPr>
           <a:xfrm>
-            <a:off x="923544" y="3310128"/>
+            <a:off x="923544" y="3383280"/>
             <a:ext cx="2972714" cy="256032"/>
           </a:xfrm>
           <a:prstGeom prst="rect">
@@ -39904,8 +39944,8 @@
         </p:nvSpPr>
         <p:spPr>
           <a:xfrm>
-            <a:off x="923544" y="3639312"/>
-            <a:ext cx="2972714" cy="621792"/>
+            <a:off x="923544" y="3712464"/>
+            <a:ext cx="2972714" cy="658368"/>
           </a:xfrm>
           <a:prstGeom prst="rect">
             <a:avLst/>
@@ -39946,12 +39986,12 @@
         </p:nvSpPr>
         <p:spPr>
           <a:xfrm>
-            <a:off x="4371746" y="2542032"/>
-            <a:ext cx="3448202" cy="1956816"/>
+            <a:off x="4371746" y="2615184"/>
+            <a:ext cx="3448202" cy="1993392"/>
           </a:xfrm>
           <a:prstGeom prst="roundRect">
             <a:avLst>
-              <a:gd name="adj" fmla="val 2804"/>
+              <a:gd name="adj" fmla="val 2752"/>
             </a:avLst>
           </a:prstGeom>
           <a:solidFill>
@@ -39975,7 +40015,7 @@
         </p:nvSpPr>
         <p:spPr>
           <a:xfrm>
-            <a:off x="4609490" y="2779776"/>
+            <a:off x="4609490" y="2852928"/>
             <a:ext cx="539496" cy="402336"/>
           </a:xfrm>
           <a:prstGeom prst="roundRect">
@@ -39997,7 +40037,7 @@
         </p:nvSpPr>
         <p:spPr>
           <a:xfrm>
-            <a:off x="4609490" y="2779776"/>
+            <a:off x="4609490" y="2852928"/>
             <a:ext cx="539496" cy="402336"/>
           </a:xfrm>
           <a:prstGeom prst="rect">
@@ -40036,7 +40076,7 @@
         </p:nvSpPr>
         <p:spPr>
           <a:xfrm>
-            <a:off x="4609490" y="3310128"/>
+            <a:off x="4609490" y="3383280"/>
             <a:ext cx="2972714" cy="256032"/>
           </a:xfrm>
           <a:prstGeom prst="rect">
@@ -40075,8 +40115,8 @@
         </p:nvSpPr>
         <p:spPr>
           <a:xfrm>
-            <a:off x="4609490" y="3639312"/>
-            <a:ext cx="2972714" cy="621792"/>
+            <a:off x="4609490" y="3712464"/>
+            <a:ext cx="2972714" cy="658368"/>
           </a:xfrm>
           <a:prstGeom prst="rect">
             <a:avLst/>
@@ -40157,12 +40197,12 @@
         </p:nvSpPr>
         <p:spPr>
           <a:xfrm>
-            <a:off x="8057693" y="2542032"/>
-            <a:ext cx="3448202" cy="1956816"/>
+            <a:off x="8057693" y="2615184"/>
+            <a:ext cx="3448202" cy="1993392"/>
           </a:xfrm>
           <a:prstGeom prst="roundRect">
             <a:avLst>
-              <a:gd name="adj" fmla="val 2804"/>
+              <a:gd name="adj" fmla="val 2752"/>
             </a:avLst>
           </a:prstGeom>
           <a:solidFill>
@@ -40186,7 +40226,7 @@
         </p:nvSpPr>
         <p:spPr>
           <a:xfrm>
-            <a:off x="8295437" y="2779776"/>
+            <a:off x="8295437" y="2852928"/>
             <a:ext cx="402336" cy="402336"/>
           </a:xfrm>
           <a:prstGeom prst="ellipse">
@@ -40206,7 +40246,7 @@
         </p:nvSpPr>
         <p:spPr>
           <a:xfrm>
-            <a:off x="8295437" y="2779776"/>
+            <a:off x="8295437" y="2852928"/>
             <a:ext cx="402336" cy="402336"/>
           </a:xfrm>
           <a:prstGeom prst="rect">
@@ -40245,7 +40285,7 @@
         </p:nvSpPr>
         <p:spPr>
           <a:xfrm>
-            <a:off x="8295437" y="3310128"/>
+            <a:off x="8295437" y="3383280"/>
             <a:ext cx="2972714" cy="256032"/>
           </a:xfrm>
           <a:prstGeom prst="rect">
@@ -40284,8 +40324,8 @@
         </p:nvSpPr>
         <p:spPr>
           <a:xfrm>
-            <a:off x="8295437" y="3639312"/>
-            <a:ext cx="2972714" cy="621792"/>
+            <a:off x="8295437" y="3712464"/>
+            <a:ext cx="2972714" cy="658368"/>
           </a:xfrm>
           <a:prstGeom prst="rect">
             <a:avLst/>
@@ -40346,12 +40386,12 @@
         </p:nvSpPr>
         <p:spPr>
           <a:xfrm>
-            <a:off x="685800" y="4663440"/>
-            <a:ext cx="2416988" cy="1225296"/>
+            <a:off x="685800" y="4700016"/>
+            <a:ext cx="2416988" cy="1133856"/>
           </a:xfrm>
           <a:prstGeom prst="roundRect">
             <a:avLst>
-              <a:gd name="adj" fmla="val 4478"/>
+              <a:gd name="adj" fmla="val 4839"/>
             </a:avLst>
           </a:prstGeom>
           <a:solidFill>
@@ -40375,7 +40415,7 @@
         </p:nvSpPr>
         <p:spPr>
           <a:xfrm>
-            <a:off x="832104" y="4846320"/>
+            <a:off x="832104" y="4882896"/>
             <a:ext cx="2124380" cy="384048"/>
           </a:xfrm>
           <a:prstGeom prst="rect">
@@ -40414,8 +40454,8 @@
         </p:nvSpPr>
         <p:spPr>
           <a:xfrm>
-            <a:off x="813816" y="5266944"/>
-            <a:ext cx="2160956" cy="457200"/>
+            <a:off x="813816" y="5303520"/>
+            <a:ext cx="2160956" cy="365760"/>
           </a:xfrm>
           <a:prstGeom prst="rect">
             <a:avLst/>
@@ -40476,7 +40516,7 @@
         </p:nvSpPr>
         <p:spPr>
           <a:xfrm>
-            <a:off x="3102788" y="5074920"/>
+            <a:off x="3102788" y="5065776"/>
             <a:ext cx="384048" cy="402336"/>
           </a:xfrm>
           <a:prstGeom prst="rect">
@@ -40515,12 +40555,12 @@
         </p:nvSpPr>
         <p:spPr>
           <a:xfrm>
-            <a:off x="3486836" y="4663440"/>
-            <a:ext cx="2416988" cy="1225296"/>
+            <a:off x="3486836" y="4700016"/>
+            <a:ext cx="2416988" cy="1133856"/>
           </a:xfrm>
           <a:prstGeom prst="roundRect">
             <a:avLst>
-              <a:gd name="adj" fmla="val 4478"/>
+              <a:gd name="adj" fmla="val 4839"/>
             </a:avLst>
           </a:prstGeom>
           <a:solidFill>
@@ -40544,7 +40584,7 @@
         </p:nvSpPr>
         <p:spPr>
           <a:xfrm>
-            <a:off x="3633140" y="4846320"/>
+            <a:off x="3633140" y="4882896"/>
             <a:ext cx="2124380" cy="384048"/>
           </a:xfrm>
           <a:prstGeom prst="rect">
@@ -40583,8 +40623,8 @@
         </p:nvSpPr>
         <p:spPr>
           <a:xfrm>
-            <a:off x="3614852" y="5266944"/>
-            <a:ext cx="2160956" cy="457200"/>
+            <a:off x="3614852" y="5303520"/>
+            <a:ext cx="2160956" cy="365760"/>
           </a:xfrm>
           <a:prstGeom prst="rect">
             <a:avLst/>
@@ -40645,7 +40685,7 @@
         </p:nvSpPr>
         <p:spPr>
           <a:xfrm>
-            <a:off x="5903824" y="5074920"/>
+            <a:off x="5903824" y="5065776"/>
             <a:ext cx="384048" cy="402336"/>
           </a:xfrm>
           <a:prstGeom prst="rect">
@@ -40684,12 +40724,12 @@
         </p:nvSpPr>
         <p:spPr>
           <a:xfrm>
-            <a:off x="6287872" y="4663440"/>
-            <a:ext cx="2416988" cy="1225296"/>
+            <a:off x="6287872" y="4700016"/>
+            <a:ext cx="2416988" cy="1133856"/>
           </a:xfrm>
           <a:prstGeom prst="roundRect">
             <a:avLst>
-              <a:gd name="adj" fmla="val 4478"/>
+              <a:gd name="adj" fmla="val 4839"/>
             </a:avLst>
           </a:prstGeom>
           <a:solidFill>
@@ -40713,7 +40753,7 @@
         </p:nvSpPr>
         <p:spPr>
           <a:xfrm>
-            <a:off x="6434176" y="4846320"/>
+            <a:off x="6434176" y="4882896"/>
             <a:ext cx="2124380" cy="384048"/>
           </a:xfrm>
           <a:prstGeom prst="rect">
@@ -40752,8 +40792,8 @@
         </p:nvSpPr>
         <p:spPr>
           <a:xfrm>
-            <a:off x="6415888" y="5266944"/>
-            <a:ext cx="2160956" cy="457200"/>
+            <a:off x="6415888" y="5303520"/>
+            <a:ext cx="2160956" cy="365760"/>
           </a:xfrm>
           <a:prstGeom prst="rect">
             <a:avLst/>
@@ -40814,7 +40854,7 @@
         </p:nvSpPr>
         <p:spPr>
           <a:xfrm>
-            <a:off x="8704859" y="5074920"/>
+            <a:off x="8704859" y="5065776"/>
             <a:ext cx="384048" cy="402336"/>
           </a:xfrm>
           <a:prstGeom prst="rect">
@@ -40853,12 +40893,12 @@
         </p:nvSpPr>
         <p:spPr>
           <a:xfrm>
-            <a:off x="9088907" y="4663440"/>
-            <a:ext cx="2416988" cy="1225296"/>
+            <a:off x="9088907" y="4700016"/>
+            <a:ext cx="2416988" cy="1133856"/>
           </a:xfrm>
           <a:prstGeom prst="roundRect">
             <a:avLst>
-              <a:gd name="adj" fmla="val 4478"/>
+              <a:gd name="adj" fmla="val 4839"/>
             </a:avLst>
           </a:prstGeom>
           <a:solidFill>
@@ -40882,7 +40922,7 @@
         </p:nvSpPr>
         <p:spPr>
           <a:xfrm>
-            <a:off x="9235211" y="4846320"/>
+            <a:off x="9235211" y="4882896"/>
             <a:ext cx="2124380" cy="384048"/>
           </a:xfrm>
           <a:prstGeom prst="rect">
@@ -40921,8 +40961,8 @@
         </p:nvSpPr>
         <p:spPr>
           <a:xfrm>
-            <a:off x="9216923" y="5266944"/>
-            <a:ext cx="2160956" cy="457200"/>
+            <a:off x="9216923" y="5303520"/>
+            <a:ext cx="2160956" cy="365760"/>
           </a:xfrm>
           <a:prstGeom prst="rect">
             <a:avLst/>
@@ -40983,7 +41023,7 @@
         </p:nvSpPr>
         <p:spPr>
           <a:xfrm>
-            <a:off x="685800" y="5961888"/>
+            <a:off x="685800" y="5925312"/>
             <a:ext cx="10820095" cy="329184"/>
           </a:xfrm>
           <a:prstGeom prst="rect">
@@ -42549,12 +42589,12 @@
         </p:nvSpPr>
         <p:spPr>
           <a:xfrm>
-            <a:off x="685800" y="2286000"/>
-            <a:ext cx="3448202" cy="2834640"/>
+            <a:off x="685800" y="2212848"/>
+            <a:ext cx="3448202" cy="3072384"/>
           </a:xfrm>
           <a:prstGeom prst="roundRect">
             <a:avLst>
-              <a:gd name="adj" fmla="val 1935"/>
+              <a:gd name="adj" fmla="val 1786"/>
             </a:avLst>
           </a:prstGeom>
           <a:solidFill>
@@ -42578,7 +42618,7 @@
         </p:nvSpPr>
         <p:spPr>
           <a:xfrm>
-            <a:off x="923544" y="2523744"/>
+            <a:off x="923544" y="2450592"/>
             <a:ext cx="402336" cy="402336"/>
           </a:xfrm>
           <a:prstGeom prst="ellipse">
@@ -42598,7 +42638,7 @@
         </p:nvSpPr>
         <p:spPr>
           <a:xfrm>
-            <a:off x="923544" y="2523744"/>
+            <a:off x="923544" y="2450592"/>
             <a:ext cx="402336" cy="402336"/>
           </a:xfrm>
           <a:prstGeom prst="rect">
@@ -42637,7 +42677,7 @@
         </p:nvSpPr>
         <p:spPr>
           <a:xfrm>
-            <a:off x="923544" y="3054096"/>
+            <a:off x="923544" y="2980944"/>
             <a:ext cx="2972714" cy="608076"/>
           </a:xfrm>
           <a:prstGeom prst="rect">
@@ -42676,8 +42716,8 @@
         </p:nvSpPr>
         <p:spPr>
           <a:xfrm>
-            <a:off x="923544" y="3735324"/>
-            <a:ext cx="2972714" cy="1147572"/>
+            <a:off x="923544" y="3662172"/>
+            <a:ext cx="2972714" cy="1385316"/>
           </a:xfrm>
           <a:prstGeom prst="rect">
             <a:avLst/>
@@ -42787,12 +42827,12 @@
         </p:nvSpPr>
         <p:spPr>
           <a:xfrm>
-            <a:off x="4371746" y="2286000"/>
-            <a:ext cx="3448202" cy="2834640"/>
+            <a:off x="4371746" y="2212848"/>
+            <a:ext cx="3448202" cy="3072384"/>
           </a:xfrm>
           <a:prstGeom prst="roundRect">
             <a:avLst>
-              <a:gd name="adj" fmla="val 1935"/>
+              <a:gd name="adj" fmla="val 1786"/>
             </a:avLst>
           </a:prstGeom>
           <a:solidFill>
@@ -42816,7 +42856,7 @@
         </p:nvSpPr>
         <p:spPr>
           <a:xfrm>
-            <a:off x="4609490" y="2523744"/>
+            <a:off x="4609490" y="2450592"/>
             <a:ext cx="402336" cy="402336"/>
           </a:xfrm>
           <a:prstGeom prst="ellipse">
@@ -42836,7 +42876,7 @@
         </p:nvSpPr>
         <p:spPr>
           <a:xfrm>
-            <a:off x="4609490" y="2523744"/>
+            <a:off x="4609490" y="2450592"/>
             <a:ext cx="402336" cy="402336"/>
           </a:xfrm>
           <a:prstGeom prst="rect">
@@ -42875,7 +42915,7 @@
         </p:nvSpPr>
         <p:spPr>
           <a:xfrm>
-            <a:off x="4609490" y="3054096"/>
+            <a:off x="4609490" y="2980944"/>
             <a:ext cx="2972714" cy="608076"/>
           </a:xfrm>
           <a:prstGeom prst="rect">
@@ -42914,8 +42954,8 @@
         </p:nvSpPr>
         <p:spPr>
           <a:xfrm>
-            <a:off x="4609490" y="3735324"/>
-            <a:ext cx="2972714" cy="1147572"/>
+            <a:off x="4609490" y="3662172"/>
+            <a:ext cx="2972714" cy="1385316"/>
           </a:xfrm>
           <a:prstGeom prst="rect">
             <a:avLst/>
@@ -43025,12 +43065,12 @@
         </p:nvSpPr>
         <p:spPr>
           <a:xfrm>
-            <a:off x="8057693" y="2286000"/>
-            <a:ext cx="3448202" cy="2834640"/>
+            <a:off x="8057693" y="2212848"/>
+            <a:ext cx="3448202" cy="3072384"/>
           </a:xfrm>
           <a:prstGeom prst="roundRect">
             <a:avLst>
-              <a:gd name="adj" fmla="val 1935"/>
+              <a:gd name="adj" fmla="val 1786"/>
             </a:avLst>
           </a:prstGeom>
           <a:solidFill>
@@ -43054,7 +43094,7 @@
         </p:nvSpPr>
         <p:spPr>
           <a:xfrm>
-            <a:off x="8295437" y="2523744"/>
+            <a:off x="8295437" y="2450592"/>
             <a:ext cx="402336" cy="402336"/>
           </a:xfrm>
           <a:prstGeom prst="ellipse">
@@ -43074,7 +43114,7 @@
         </p:nvSpPr>
         <p:spPr>
           <a:xfrm>
-            <a:off x="8295437" y="2523744"/>
+            <a:off x="8295437" y="2450592"/>
             <a:ext cx="402336" cy="402336"/>
           </a:xfrm>
           <a:prstGeom prst="rect">
@@ -43113,7 +43153,7 @@
         </p:nvSpPr>
         <p:spPr>
           <a:xfrm>
-            <a:off x="8295437" y="3054096"/>
+            <a:off x="8295437" y="2980944"/>
             <a:ext cx="2972714" cy="608076"/>
           </a:xfrm>
           <a:prstGeom prst="rect">
@@ -43152,8 +43192,8 @@
         </p:nvSpPr>
         <p:spPr>
           <a:xfrm>
-            <a:off x="8295437" y="3735324"/>
-            <a:ext cx="2972714" cy="1147572"/>
+            <a:off x="8295437" y="3662172"/>
+            <a:ext cx="2972714" cy="1385316"/>
           </a:xfrm>
           <a:prstGeom prst="rect">
             <a:avLst/>
@@ -43243,7 +43283,7 @@
         </p:nvSpPr>
         <p:spPr>
           <a:xfrm>
-            <a:off x="685800" y="5358384"/>
+            <a:off x="685800" y="5413248"/>
             <a:ext cx="7315200" cy="365760"/>
           </a:xfrm>
           <a:prstGeom prst="rect">
@@ -43465,8 +43505,8 @@
         </p:nvSpPr>
         <p:spPr>
           <a:xfrm>
-            <a:off x="685800" y="1463040"/>
-            <a:ext cx="10789920" cy="548640"/>
+            <a:off x="685800" y="1444752"/>
+            <a:ext cx="10789920" cy="731520"/>
           </a:xfrm>
           <a:prstGeom prst="rect">
             <a:avLst/>
@@ -43507,7 +43547,7 @@
         </p:nvSpPr>
         <p:spPr>
           <a:xfrm>
-            <a:off x="685800" y="2066544"/>
+            <a:off x="685800" y="2231136"/>
             <a:ext cx="10789920" cy="365760"/>
           </a:xfrm>
           <a:prstGeom prst="rect">
@@ -43546,12 +43586,12 @@
         </p:nvSpPr>
         <p:spPr>
           <a:xfrm>
-            <a:off x="685800" y="2633472"/>
-            <a:ext cx="10820095" cy="603504"/>
+            <a:off x="685800" y="2779776"/>
+            <a:ext cx="10820095" cy="566928"/>
           </a:xfrm>
           <a:prstGeom prst="roundRect">
             <a:avLst>
-              <a:gd name="adj" fmla="val 15152"/>
+              <a:gd name="adj" fmla="val 16129"/>
             </a:avLst>
           </a:prstGeom>
           <a:solidFill>
@@ -43568,8 +43608,8 @@
         </p:nvSpPr>
         <p:spPr>
           <a:xfrm>
-            <a:off x="960120" y="2633472"/>
-            <a:ext cx="10271455" cy="603504"/>
+            <a:off x="960120" y="2779776"/>
+            <a:ext cx="10271455" cy="566928"/>
           </a:xfrm>
           <a:prstGeom prst="rect">
             <a:avLst/>
@@ -43607,7 +43647,7 @@
         </p:nvSpPr>
         <p:spPr>
           <a:xfrm>
-            <a:off x="685800" y="3429000"/>
+            <a:off x="685800" y="3557016"/>
             <a:ext cx="375453" cy="347472"/>
           </a:xfrm>
           <a:prstGeom prst="roundRect">
@@ -43629,7 +43669,7 @@
         </p:nvSpPr>
         <p:spPr>
           <a:xfrm>
-            <a:off x="685800" y="3429000"/>
+            <a:off x="685800" y="3557016"/>
             <a:ext cx="375453" cy="347472"/>
           </a:xfrm>
           <a:prstGeom prst="rect">
@@ -43668,7 +43708,7 @@
         </p:nvSpPr>
         <p:spPr>
           <a:xfrm>
-            <a:off x="1189269" y="3419856"/>
+            <a:off x="1189269" y="3547872"/>
             <a:ext cx="10316627" cy="365760"/>
           </a:xfrm>
           <a:prstGeom prst="rect">
@@ -43707,12 +43747,12 @@
         </p:nvSpPr>
         <p:spPr>
           <a:xfrm>
-            <a:off x="685800" y="3840480"/>
-            <a:ext cx="5272888" cy="2011680"/>
+            <a:off x="685800" y="3931920"/>
+            <a:ext cx="5272888" cy="1975104"/>
           </a:xfrm>
           <a:prstGeom prst="roundRect">
             <a:avLst>
-              <a:gd name="adj" fmla="val 2727"/>
+              <a:gd name="adj" fmla="val 2778"/>
             </a:avLst>
           </a:prstGeom>
           <a:solidFill>
@@ -43736,7 +43776,7 @@
         </p:nvSpPr>
         <p:spPr>
           <a:xfrm>
-            <a:off x="960120" y="4078224"/>
+            <a:off x="960120" y="4169664"/>
             <a:ext cx="4724248" cy="420624"/>
           </a:xfrm>
           <a:prstGeom prst="rect">
@@ -43775,8 +43815,8 @@
         </p:nvSpPr>
         <p:spPr>
           <a:xfrm>
-            <a:off x="960120" y="4663440"/>
-            <a:ext cx="4724248" cy="1060704"/>
+            <a:off x="960120" y="4754880"/>
+            <a:ext cx="4724248" cy="1024128"/>
           </a:xfrm>
           <a:prstGeom prst="rect">
             <a:avLst/>
@@ -43796,7 +43836,7 @@
               <a:buChar char="•"/>
             </a:pPr>
             <a:r>
-              <a:rPr lang="en-US" sz="1400" dirty="0">
+              <a:rPr lang="en-US" sz="1350" dirty="0">
                 <a:solidFill>
                   <a:schemeClr val="tx1"/>
                 </a:solidFill>
@@ -43806,7 +43846,7 @@
               </a:rPr>
               <a:t>하나님으로서의 영광 그 자체 (빌 2:6)</a:t>
             </a:r>
-            <a:endParaRPr lang="en-US" sz="1400" dirty="0"/>
+            <a:endParaRPr lang="en-US" sz="1350" dirty="0"/>
           </a:p>
           <a:p>
             <a:pPr marL="342900" indent="-342900">
@@ -43817,7 +43857,7 @@
               <a:buChar char="•"/>
             </a:pPr>
             <a:r>
-              <a:rPr lang="en-US" sz="1400" dirty="0">
+              <a:rPr lang="en-US" sz="1350" dirty="0">
                 <a:solidFill>
                   <a:schemeClr val="tx1"/>
                 </a:solidFill>
@@ -43827,7 +43867,7 @@
               </a:rPr>
               <a:t>신적 특권 — 전능·전지의 사용</a:t>
             </a:r>
-            <a:endParaRPr lang="en-US" sz="1400" dirty="0"/>
+            <a:endParaRPr lang="en-US" sz="1350" dirty="0"/>
           </a:p>
           <a:p>
             <a:pPr marL="342900" indent="-342900">
@@ -43838,7 +43878,7 @@
               <a:buChar char="•"/>
             </a:pPr>
             <a:r>
-              <a:rPr lang="en-US" sz="1400" dirty="0">
+              <a:rPr lang="en-US" sz="1350" dirty="0">
                 <a:solidFill>
                   <a:schemeClr val="tx1"/>
                 </a:solidFill>
@@ -43848,7 +43888,7 @@
               </a:rPr>
               <a:t>하나님과의 깊은 관계성</a:t>
             </a:r>
-            <a:endParaRPr lang="en-US" sz="1400" dirty="0"/>
+            <a:endParaRPr lang="en-US" sz="1350" dirty="0"/>
           </a:p>
         </p:txBody>
       </p:sp>
@@ -43860,12 +43900,12 @@
         </p:nvSpPr>
         <p:spPr>
           <a:xfrm>
-            <a:off x="6233008" y="3840480"/>
-            <a:ext cx="5272888" cy="2011680"/>
+            <a:off x="6233008" y="3931920"/>
+            <a:ext cx="5272888" cy="1975104"/>
           </a:xfrm>
           <a:prstGeom prst="roundRect">
             <a:avLst>
-              <a:gd name="adj" fmla="val 2727"/>
+              <a:gd name="adj" fmla="val 2778"/>
             </a:avLst>
           </a:prstGeom>
           <a:solidFill>
@@ -43889,7 +43929,7 @@
         </p:nvSpPr>
         <p:spPr>
           <a:xfrm>
-            <a:off x="6507328" y="4078224"/>
+            <a:off x="6507328" y="4169664"/>
             <a:ext cx="4724248" cy="420624"/>
           </a:xfrm>
           <a:prstGeom prst="rect">
@@ -43928,8 +43968,8 @@
         </p:nvSpPr>
         <p:spPr>
           <a:xfrm>
-            <a:off x="6507328" y="4663440"/>
-            <a:ext cx="4724248" cy="1060704"/>
+            <a:off x="6507328" y="4754880"/>
+            <a:ext cx="4724248" cy="1024128"/>
           </a:xfrm>
           <a:prstGeom prst="rect">
             <a:avLst/>
@@ -43949,7 +43989,7 @@
               <a:buChar char="•"/>
             </a:pPr>
             <a:r>
-              <a:rPr lang="en-US" sz="1400" dirty="0">
+              <a:rPr lang="en-US" sz="1350" dirty="0">
                 <a:solidFill>
                   <a:schemeClr val="bg1"/>
                 </a:solidFill>
@@ -43959,7 +43999,7 @@
               </a:rPr>
               <a:t>자녀가 되는 권세를 주기 위해 (1:12)</a:t>
             </a:r>
-            <a:endParaRPr lang="en-US" sz="1400" dirty="0"/>
+            <a:endParaRPr lang="en-US" sz="1350" dirty="0"/>
           </a:p>
           <a:p>
             <a:pPr marL="342900" indent="-342900">
@@ -43970,7 +44010,7 @@
               <a:buChar char="•"/>
             </a:pPr>
             <a:r>
-              <a:rPr lang="en-US" sz="1400" dirty="0">
+              <a:rPr lang="en-US" sz="1350" dirty="0">
                 <a:solidFill>
                   <a:schemeClr val="bg1"/>
                 </a:solidFill>
@@ -43980,7 +44020,7 @@
               </a:rPr>
               <a:t>구원의 놀라운 은혜를 주기 위해</a:t>
             </a:r>
-            <a:endParaRPr lang="en-US" sz="1400" dirty="0"/>
+            <a:endParaRPr lang="en-US" sz="1350" dirty="0"/>
           </a:p>
           <a:p>
             <a:pPr marL="342900" indent="-342900">
@@ -43991,7 +44031,7 @@
               <a:buChar char="•"/>
             </a:pPr>
             <a:r>
-              <a:rPr lang="en-US" sz="1400" dirty="0">
+              <a:rPr lang="en-US" sz="1350" dirty="0">
                 <a:solidFill>
                   <a:schemeClr val="bg1"/>
                 </a:solidFill>
@@ -44001,7 +44041,7 @@
               </a:rPr>
               <a:t>“자기를 비워 종의 형체를 가지사” (빌 2:7)</a:t>
             </a:r>
-            <a:endParaRPr lang="en-US" sz="1400" dirty="0"/>
+            <a:endParaRPr lang="en-US" sz="1350" dirty="0"/>
           </a:p>
         </p:txBody>
       </p:sp>
@@ -46213,7 +46253,27 @@
                 <a:ea typeface="맑은 고딕" pitchFamily="34" charset="-122"/>
                 <a:cs typeface="맑은 고딕" pitchFamily="34" charset="-120"/>
               </a:rPr>
-              <a:t>출석 60% · 과제 30% · 시험 10%</a:t>
+              <a:t>출석 60% · 과제 30%</a:t>
+            </a:r>
+            <a:endParaRPr lang="en-US" sz="1300" dirty="0"/>
+          </a:p>
+          <a:p>
+            <a:pPr indent="0" marL="0">
+              <a:lnSpc>
+                <a:spcPct val="122000"/>
+              </a:lnSpc>
+              <a:buNone/>
+            </a:pPr>
+            <a:r>
+              <a:rPr lang="en-US" sz="1300" dirty="0">
+                <a:solidFill>
+                  <a:schemeClr val="accent3"/>
+                </a:solidFill>
+                <a:latin typeface="맑은 고딕" pitchFamily="34" charset="0"/>
+                <a:ea typeface="맑은 고딕" pitchFamily="34" charset="-122"/>
+                <a:cs typeface="맑은 고딕" pitchFamily="34" charset="-120"/>
+              </a:rPr>
+              <a:t>시험 10%</a:t>
             </a:r>
             <a:endParaRPr lang="en-US" sz="1300" dirty="0"/>
           </a:p>
@@ -46343,7 +46403,27 @@
                 <a:ea typeface="맑은 고딕" pitchFamily="34" charset="-122"/>
                 <a:cs typeface="맑은 고딕" pitchFamily="34" charset="-120"/>
               </a:rPr>
-              <a:t>지각 20분 이상 2회 = 결석 1회</a:t>
+              <a:t>지각 20분 이상</a:t>
+            </a:r>
+            <a:endParaRPr lang="en-US" sz="1300" dirty="0"/>
+          </a:p>
+          <a:p>
+            <a:pPr indent="0" marL="0">
+              <a:lnSpc>
+                <a:spcPct val="122000"/>
+              </a:lnSpc>
+              <a:buNone/>
+            </a:pPr>
+            <a:r>
+              <a:rPr lang="en-US" sz="1300" dirty="0">
+                <a:solidFill>
+                  <a:schemeClr val="accent3"/>
+                </a:solidFill>
+                <a:latin typeface="맑은 고딕" pitchFamily="34" charset="0"/>
+                <a:ea typeface="맑은 고딕" pitchFamily="34" charset="-122"/>
+                <a:cs typeface="맑은 고딕" pitchFamily="34" charset="-120"/>
+              </a:rPr>
+              <a:t>2회 = 결석 1회</a:t>
             </a:r>
             <a:endParaRPr lang="en-US" sz="1300" dirty="0"/>
           </a:p>
@@ -51146,6 +51226,252 @@
         <p:spPr>
           <a:xfrm>
             <a:off x="685800" y="1499616"/>
+            <a:ext cx="5577840" cy="841248"/>
+          </a:xfrm>
+          <a:prstGeom prst="roundRect">
+            <a:avLst>
+              <a:gd name="adj" fmla="val 6522"/>
+            </a:avLst>
+          </a:prstGeom>
+          <a:solidFill>
+            <a:schemeClr val="bg2"/>
+          </a:solidFill>
+          <a:ln/>
+        </p:spPr>
+      </p:sp>
+      <p:sp>
+        <p:nvSpPr>
+          <p:cNvPr id="4" name="ap-0.75-0-k"/>
+          <p:cNvSpPr txBox="1"/>
+          <p:nvPr/>
+        </p:nvSpPr>
+        <p:spPr>
+          <a:xfrm>
+            <a:off x="868680" y="1554480"/>
+            <a:ext cx="5212080" cy="256032"/>
+          </a:xfrm>
+          <a:prstGeom prst="rect">
+            <a:avLst/>
+          </a:prstGeom>
+          <a:noFill/>
+          <a:ln/>
+        </p:spPr>
+        <p:txBody>
+          <a:bodyPr wrap="square" lIns="0" tIns="0" rIns="0" bIns="0" rtlCol="0" anchor="ctr"/>
+          <a:lstStyle/>
+          <a:p>
+            <a:pPr indent="0" marL="0">
+              <a:buNone/>
+            </a:pPr>
+            <a:r>
+              <a:rPr lang="en-US" sz="1250" b="1" dirty="0">
+                <a:solidFill>
+                  <a:schemeClr val="accent1"/>
+                </a:solidFill>
+                <a:latin typeface="맑은 고딕" pitchFamily="34" charset="0"/>
+                <a:ea typeface="맑은 고딕" pitchFamily="34" charset="-122"/>
+                <a:cs typeface="맑은 고딕" pitchFamily="34" charset="-120"/>
+              </a:rPr>
+              <a:t>성령의 상징</a:t>
+            </a:r>
+            <a:endParaRPr lang="en-US" sz="1250" dirty="0"/>
+          </a:p>
+        </p:txBody>
+      </p:sp>
+      <p:sp>
+        <p:nvSpPr>
+          <p:cNvPr id="5" name="ap-0.75-0-v"/>
+          <p:cNvSpPr txBox="1"/>
+          <p:nvPr/>
+        </p:nvSpPr>
+        <p:spPr>
+          <a:xfrm>
+            <a:off x="868680" y="1810512"/>
+            <a:ext cx="5212080" cy="457200"/>
+          </a:xfrm>
+          <a:prstGeom prst="rect">
+            <a:avLst/>
+          </a:prstGeom>
+          <a:noFill/>
+          <a:ln/>
+        </p:spPr>
+        <p:txBody>
+          <a:bodyPr wrap="square" lIns="0" tIns="0" rIns="0" bIns="0" rtlCol="0" anchor="t"/>
+          <a:lstStyle/>
+          <a:p>
+            <a:pPr indent="0" marL="0">
+              <a:lnSpc>
+                <a:spcPct val="114000"/>
+              </a:lnSpc>
+              <a:buNone/>
+            </a:pPr>
+            <a:r>
+              <a:rPr lang="en-US" sz="1150" dirty="0">
+                <a:solidFill>
+                  <a:schemeClr val="tx1"/>
+                </a:solidFill>
+                <a:latin typeface="맑은 고딕" pitchFamily="34" charset="0"/>
+                <a:ea typeface="맑은 고딕" pitchFamily="34" charset="-122"/>
+                <a:cs typeface="맑은 고딕" pitchFamily="34" charset="-120"/>
+              </a:rPr>
+              <a:t>바람(3장) · 비둘기(1:32) · 물(7장)</a:t>
+            </a:r>
+            <a:endParaRPr lang="en-US" sz="1150" dirty="0"/>
+          </a:p>
+          <a:p>
+            <a:pPr indent="0" marL="0">
+              <a:lnSpc>
+                <a:spcPct val="114000"/>
+              </a:lnSpc>
+              <a:buNone/>
+            </a:pPr>
+            <a:r>
+              <a:rPr lang="en-US" sz="1150" dirty="0">
+                <a:solidFill>
+                  <a:schemeClr val="tx1"/>
+                </a:solidFill>
+                <a:latin typeface="맑은 고딕" pitchFamily="34" charset="0"/>
+                <a:ea typeface="맑은 고딕" pitchFamily="34" charset="-122"/>
+                <a:cs typeface="맑은 고딕" pitchFamily="34" charset="-120"/>
+              </a:rPr>
+              <a:t>기름(눅 4장) · 인(엡 1장) · 불(행 2장)</a:t>
+            </a:r>
+            <a:endParaRPr lang="en-US" sz="1150" dirty="0"/>
+          </a:p>
+        </p:txBody>
+      </p:sp>
+      <p:sp>
+        <p:nvSpPr>
+          <p:cNvPr id="6" name="ap-0.75-1"/>
+          <p:cNvSpPr/>
+          <p:nvPr/>
+        </p:nvSpPr>
+        <p:spPr>
+          <a:xfrm>
+            <a:off x="685800" y="2459736"/>
+            <a:ext cx="5577840" cy="841248"/>
+          </a:xfrm>
+          <a:prstGeom prst="roundRect">
+            <a:avLst>
+              <a:gd name="adj" fmla="val 6522"/>
+            </a:avLst>
+          </a:prstGeom>
+          <a:solidFill>
+            <a:schemeClr val="bg2"/>
+          </a:solidFill>
+          <a:ln/>
+        </p:spPr>
+      </p:sp>
+      <p:sp>
+        <p:nvSpPr>
+          <p:cNvPr id="7" name="ap-0.75-1-k"/>
+          <p:cNvSpPr txBox="1"/>
+          <p:nvPr/>
+        </p:nvSpPr>
+        <p:spPr>
+          <a:xfrm>
+            <a:off x="868680" y="2514600"/>
+            <a:ext cx="5212080" cy="256032"/>
+          </a:xfrm>
+          <a:prstGeom prst="rect">
+            <a:avLst/>
+          </a:prstGeom>
+          <a:noFill/>
+          <a:ln/>
+        </p:spPr>
+        <p:txBody>
+          <a:bodyPr wrap="square" lIns="0" tIns="0" rIns="0" bIns="0" rtlCol="0" anchor="ctr"/>
+          <a:lstStyle/>
+          <a:p>
+            <a:pPr indent="0" marL="0">
+              <a:buNone/>
+            </a:pPr>
+            <a:r>
+              <a:rPr lang="en-US" sz="1250" b="1" dirty="0">
+                <a:solidFill>
+                  <a:schemeClr val="accent1"/>
+                </a:solidFill>
+                <a:latin typeface="맑은 고딕" pitchFamily="34" charset="0"/>
+                <a:ea typeface="맑은 고딕" pitchFamily="34" charset="-122"/>
+                <a:cs typeface="맑은 고딕" pitchFamily="34" charset="-120"/>
+              </a:rPr>
+              <a:t>안식일 치유 6</a:t>
+            </a:r>
+            <a:endParaRPr lang="en-US" sz="1250" dirty="0"/>
+          </a:p>
+        </p:txBody>
+      </p:sp>
+      <p:sp>
+        <p:nvSpPr>
+          <p:cNvPr id="8" name="ap-0.75-1-v"/>
+          <p:cNvSpPr txBox="1"/>
+          <p:nvPr/>
+        </p:nvSpPr>
+        <p:spPr>
+          <a:xfrm>
+            <a:off x="868680" y="2770632"/>
+            <a:ext cx="5212080" cy="457200"/>
+          </a:xfrm>
+          <a:prstGeom prst="rect">
+            <a:avLst/>
+          </a:prstGeom>
+          <a:noFill/>
+          <a:ln/>
+        </p:spPr>
+        <p:txBody>
+          <a:bodyPr wrap="square" lIns="0" tIns="0" rIns="0" bIns="0" rtlCol="0" anchor="t"/>
+          <a:lstStyle/>
+          <a:p>
+            <a:pPr indent="0" marL="0">
+              <a:lnSpc>
+                <a:spcPct val="114000"/>
+              </a:lnSpc>
+              <a:buNone/>
+            </a:pPr>
+            <a:r>
+              <a:rPr lang="en-US" sz="1150" dirty="0">
+                <a:solidFill>
+                  <a:schemeClr val="tx1"/>
+                </a:solidFill>
+                <a:latin typeface="맑은 고딕" pitchFamily="34" charset="0"/>
+                <a:ea typeface="맑은 고딕" pitchFamily="34" charset="-122"/>
+                <a:cs typeface="맑은 고딕" pitchFamily="34" charset="-120"/>
+              </a:rPr>
+              <a:t>손 마른 자 · 꼬부라진 여인(눅 13) · 수종병자(눅 14)</a:t>
+            </a:r>
+            <a:endParaRPr lang="en-US" sz="1150" dirty="0"/>
+          </a:p>
+          <a:p>
+            <a:pPr indent="0" marL="0">
+              <a:lnSpc>
+                <a:spcPct val="114000"/>
+              </a:lnSpc>
+              <a:buNone/>
+            </a:pPr>
+            <a:r>
+              <a:rPr lang="en-US" sz="1150" dirty="0">
+                <a:solidFill>
+                  <a:schemeClr val="tx1"/>
+                </a:solidFill>
+                <a:latin typeface="맑은 고딕" pitchFamily="34" charset="0"/>
+                <a:ea typeface="맑은 고딕" pitchFamily="34" charset="-122"/>
+                <a:cs typeface="맑은 고딕" pitchFamily="34" charset="-120"/>
+              </a:rPr>
+              <a:t>베데스다 병자(요 5) · 실로암 맹인(요 9) · 가버나움 회당 축귀</a:t>
+            </a:r>
+            <a:endParaRPr lang="en-US" sz="1150" dirty="0"/>
+          </a:p>
+        </p:txBody>
+      </p:sp>
+      <p:sp>
+        <p:nvSpPr>
+          <p:cNvPr id="9" name="ap-0.75-2"/>
+          <p:cNvSpPr/>
+          <p:nvPr/>
+        </p:nvSpPr>
+        <p:spPr>
+          <a:xfrm>
+            <a:off x="685800" y="3419856"/>
             <a:ext cx="5577840" cy="621792"/>
           </a:xfrm>
           <a:prstGeom prst="roundRect">
@@ -51161,13 +51487,13 @@
       </p:sp>
       <p:sp>
         <p:nvSpPr>
-          <p:cNvPr id="4" name="ap-0.75-0-k"/>
-          <p:cNvSpPr txBox="1"/>
-          <p:nvPr/>
-        </p:nvSpPr>
-        <p:spPr>
-          <a:xfrm>
-            <a:off x="868680" y="1554480"/>
+          <p:cNvPr id="10" name="ap-0.75-2-k"/>
+          <p:cNvSpPr txBox="1"/>
+          <p:nvPr/>
+        </p:nvSpPr>
+        <p:spPr>
+          <a:xfrm>
+            <a:off x="868680" y="3474720"/>
             <a:ext cx="5212080" cy="256032"/>
           </a:xfrm>
           <a:prstGeom prst="rect">
@@ -51192,7 +51518,7 @@
                 <a:ea typeface="맑은 고딕" pitchFamily="34" charset="-122"/>
                 <a:cs typeface="맑은 고딕" pitchFamily="34" charset="-120"/>
               </a:rPr>
-              <a:t>성령의 상징</a:t>
+              <a:t>“다시는 죄를 범하지 말라”</a:t>
             </a:r>
             <a:endParaRPr lang="en-US" sz="1250" dirty="0"/>
           </a:p>
@@ -51200,13 +51526,13 @@
       </p:sp>
       <p:sp>
         <p:nvSpPr>
-          <p:cNvPr id="5" name="ap-0.75-0-v"/>
-          <p:cNvSpPr txBox="1"/>
-          <p:nvPr/>
-        </p:nvSpPr>
-        <p:spPr>
-          <a:xfrm>
-            <a:off x="868680" y="1810512"/>
+          <p:cNvPr id="11" name="ap-0.75-2-v"/>
+          <p:cNvSpPr txBox="1"/>
+          <p:nvPr/>
+        </p:nvSpPr>
+        <p:spPr>
+          <a:xfrm>
+            <a:off x="868680" y="3730752"/>
             <a:ext cx="5212080" cy="237744"/>
           </a:xfrm>
           <a:prstGeom prst="rect">
@@ -51234,7 +51560,7 @@
                 <a:ea typeface="맑은 고딕" pitchFamily="34" charset="-122"/>
                 <a:cs typeface="맑은 고딕" pitchFamily="34" charset="-120"/>
               </a:rPr>
-              <a:t>바람(3장) · 비둘기(1:32) · 물(7장) · 기름(눅 4장) · 인(엡 1장) · 불(행 2장)</a:t>
+              <a:t>간음한 여인(요 8:11) · 베데스다 못가 병자(요 5:14)</a:t>
             </a:r>
             <a:endParaRPr lang="en-US" sz="1150" dirty="0"/>
           </a:p>
@@ -51242,13 +51568,116 @@
       </p:sp>
       <p:sp>
         <p:nvSpPr>
-          <p:cNvPr id="6" name="ap-0.75-1"/>
+          <p:cNvPr id="12" name="ap-0.75-3"/>
           <p:cNvSpPr/>
           <p:nvPr/>
         </p:nvSpPr>
         <p:spPr>
           <a:xfrm>
-            <a:off x="685800" y="2240280"/>
+            <a:off x="685800" y="4160520"/>
+            <a:ext cx="5577840" cy="621792"/>
+          </a:xfrm>
+          <a:prstGeom prst="roundRect">
+            <a:avLst>
+              <a:gd name="adj" fmla="val 8824"/>
+            </a:avLst>
+          </a:prstGeom>
+          <a:solidFill>
+            <a:schemeClr val="bg2"/>
+          </a:solidFill>
+          <a:ln/>
+        </p:spPr>
+      </p:sp>
+      <p:sp>
+        <p:nvSpPr>
+          <p:cNvPr id="13" name="ap-0.75-3-k"/>
+          <p:cNvSpPr txBox="1"/>
+          <p:nvPr/>
+        </p:nvSpPr>
+        <p:spPr>
+          <a:xfrm>
+            <a:off x="868680" y="4215384"/>
+            <a:ext cx="5212080" cy="256032"/>
+          </a:xfrm>
+          <a:prstGeom prst="rect">
+            <a:avLst/>
+          </a:prstGeom>
+          <a:noFill/>
+          <a:ln/>
+        </p:spPr>
+        <p:txBody>
+          <a:bodyPr wrap="square" lIns="0" tIns="0" rIns="0" bIns="0" rtlCol="0" anchor="ctr"/>
+          <a:lstStyle/>
+          <a:p>
+            <a:pPr indent="0" marL="0">
+              <a:buNone/>
+            </a:pPr>
+            <a:r>
+              <a:rPr lang="en-US" sz="1250" b="1" dirty="0">
+                <a:solidFill>
+                  <a:schemeClr val="accent1"/>
+                </a:solidFill>
+                <a:latin typeface="맑은 고딕" pitchFamily="34" charset="0"/>
+                <a:ea typeface="맑은 고딕" pitchFamily="34" charset="-122"/>
+                <a:cs typeface="맑은 고딕" pitchFamily="34" charset="-120"/>
+              </a:rPr>
+              <a:t>출교(쫓아냄)</a:t>
+            </a:r>
+            <a:endParaRPr lang="en-US" sz="1250" dirty="0"/>
+          </a:p>
+        </p:txBody>
+      </p:sp>
+      <p:sp>
+        <p:nvSpPr>
+          <p:cNvPr id="14" name="ap-0.75-3-v"/>
+          <p:cNvSpPr txBox="1"/>
+          <p:nvPr/>
+        </p:nvSpPr>
+        <p:spPr>
+          <a:xfrm>
+            <a:off x="868680" y="4471416"/>
+            <a:ext cx="5212080" cy="237744"/>
+          </a:xfrm>
+          <a:prstGeom prst="rect">
+            <a:avLst/>
+          </a:prstGeom>
+          <a:noFill/>
+          <a:ln/>
+        </p:spPr>
+        <p:txBody>
+          <a:bodyPr wrap="square" lIns="0" tIns="0" rIns="0" bIns="0" rtlCol="0" anchor="t"/>
+          <a:lstStyle/>
+          <a:p>
+            <a:pPr indent="0" marL="0">
+              <a:lnSpc>
+                <a:spcPct val="114000"/>
+              </a:lnSpc>
+              <a:buNone/>
+            </a:pPr>
+            <a:r>
+              <a:rPr lang="en-US" sz="1150" dirty="0">
+                <a:solidFill>
+                  <a:schemeClr val="tx1"/>
+                </a:solidFill>
+                <a:latin typeface="맑은 고딕" pitchFamily="34" charset="0"/>
+                <a:ea typeface="맑은 고딕" pitchFamily="34" charset="-122"/>
+                <a:cs typeface="맑은 고딕" pitchFamily="34" charset="-120"/>
+              </a:rPr>
+              <a:t>9:22 · 12:42 · 16:2 — 당시 유대 공동체의 실제 위협</a:t>
+            </a:r>
+            <a:endParaRPr lang="en-US" sz="1150" dirty="0"/>
+          </a:p>
+        </p:txBody>
+      </p:sp>
+      <p:sp>
+        <p:nvSpPr>
+          <p:cNvPr id="15" name="ap-0.75-4"/>
+          <p:cNvSpPr/>
+          <p:nvPr/>
+        </p:nvSpPr>
+        <p:spPr>
+          <a:xfrm>
+            <a:off x="685800" y="4901184"/>
             <a:ext cx="5577840" cy="841248"/>
           </a:xfrm>
           <a:prstGeom prst="roundRect">
@@ -51264,13 +51693,13 @@
       </p:sp>
       <p:sp>
         <p:nvSpPr>
-          <p:cNvPr id="7" name="ap-0.75-1-k"/>
-          <p:cNvSpPr txBox="1"/>
-          <p:nvPr/>
-        </p:nvSpPr>
-        <p:spPr>
-          <a:xfrm>
-            <a:off x="868680" y="2295144"/>
+          <p:cNvPr id="16" name="ap-0.75-4-k"/>
+          <p:cNvSpPr txBox="1"/>
+          <p:nvPr/>
+        </p:nvSpPr>
+        <p:spPr>
+          <a:xfrm>
+            <a:off x="868680" y="4956048"/>
             <a:ext cx="5212080" cy="256032"/>
           </a:xfrm>
           <a:prstGeom prst="rect">
@@ -51295,7 +51724,7 @@
                 <a:ea typeface="맑은 고딕" pitchFamily="34" charset="-122"/>
                 <a:cs typeface="맑은 고딕" pitchFamily="34" charset="-120"/>
               </a:rPr>
-              <a:t>안식일 치유 6</a:t>
+              <a:t>대조 구도</a:t>
             </a:r>
             <a:endParaRPr lang="en-US" sz="1250" dirty="0"/>
           </a:p>
@@ -51303,13 +51732,13 @@
       </p:sp>
       <p:sp>
         <p:nvSpPr>
-          <p:cNvPr id="8" name="ap-0.75-1-v"/>
-          <p:cNvSpPr txBox="1"/>
-          <p:nvPr/>
-        </p:nvSpPr>
-        <p:spPr>
-          <a:xfrm>
-            <a:off x="868680" y="2551176"/>
+          <p:cNvPr id="17" name="ap-0.75-4-v"/>
+          <p:cNvSpPr txBox="1"/>
+          <p:nvPr/>
+        </p:nvSpPr>
+        <p:spPr>
+          <a:xfrm>
+            <a:off x="868680" y="5212080"/>
             <a:ext cx="5212080" cy="457200"/>
           </a:xfrm>
           <a:prstGeom prst="rect">
@@ -51337,7 +51766,7 @@
                 <a:ea typeface="맑은 고딕" pitchFamily="34" charset="-122"/>
                 <a:cs typeface="맑은 고딕" pitchFamily="34" charset="-120"/>
               </a:rPr>
-              <a:t>손 마른 자 · 꼬부라진 여인(눅 13) · 수종병자(눅 14)</a:t>
+              <a:t>빛 / 어두움 (1장) · 하늘 / 땅, 영 / 육 (3장)</a:t>
             </a:r>
             <a:endParaRPr lang="en-US" sz="1150" dirty="0"/>
           </a:p>
@@ -51357,336 +51786,7 @@
                 <a:ea typeface="맑은 고딕" pitchFamily="34" charset="-122"/>
                 <a:cs typeface="맑은 고딕" pitchFamily="34" charset="-120"/>
               </a:rPr>
-              <a:t>베데스다 병자(요 5) · 실로암 맹인(요 9) · 가버나움 회당 축귀</a:t>
-            </a:r>
-            <a:endParaRPr lang="en-US" sz="1150" dirty="0"/>
-          </a:p>
-        </p:txBody>
-      </p:sp>
-      <p:sp>
-        <p:nvSpPr>
-          <p:cNvPr id="9" name="ap-0.75-2"/>
-          <p:cNvSpPr/>
-          <p:nvPr/>
-        </p:nvSpPr>
-        <p:spPr>
-          <a:xfrm>
-            <a:off x="685800" y="3200400"/>
-            <a:ext cx="5577840" cy="621792"/>
-          </a:xfrm>
-          <a:prstGeom prst="roundRect">
-            <a:avLst>
-              <a:gd name="adj" fmla="val 8824"/>
-            </a:avLst>
-          </a:prstGeom>
-          <a:solidFill>
-            <a:schemeClr val="bg2"/>
-          </a:solidFill>
-          <a:ln/>
-        </p:spPr>
-      </p:sp>
-      <p:sp>
-        <p:nvSpPr>
-          <p:cNvPr id="10" name="ap-0.75-2-k"/>
-          <p:cNvSpPr txBox="1"/>
-          <p:nvPr/>
-        </p:nvSpPr>
-        <p:spPr>
-          <a:xfrm>
-            <a:off x="868680" y="3255264"/>
-            <a:ext cx="5212080" cy="256032"/>
-          </a:xfrm>
-          <a:prstGeom prst="rect">
-            <a:avLst/>
-          </a:prstGeom>
-          <a:noFill/>
-          <a:ln/>
-        </p:spPr>
-        <p:txBody>
-          <a:bodyPr wrap="square" lIns="0" tIns="0" rIns="0" bIns="0" rtlCol="0" anchor="ctr"/>
-          <a:lstStyle/>
-          <a:p>
-            <a:pPr indent="0" marL="0">
-              <a:buNone/>
-            </a:pPr>
-            <a:r>
-              <a:rPr lang="en-US" sz="1250" b="1" dirty="0">
-                <a:solidFill>
-                  <a:schemeClr val="accent1"/>
-                </a:solidFill>
-                <a:latin typeface="맑은 고딕" pitchFamily="34" charset="0"/>
-                <a:ea typeface="맑은 고딕" pitchFamily="34" charset="-122"/>
-                <a:cs typeface="맑은 고딕" pitchFamily="34" charset="-120"/>
-              </a:rPr>
-              <a:t>“다시는 죄를 범하지 말라”</a:t>
-            </a:r>
-            <a:endParaRPr lang="en-US" sz="1250" dirty="0"/>
-          </a:p>
-        </p:txBody>
-      </p:sp>
-      <p:sp>
-        <p:nvSpPr>
-          <p:cNvPr id="11" name="ap-0.75-2-v"/>
-          <p:cNvSpPr txBox="1"/>
-          <p:nvPr/>
-        </p:nvSpPr>
-        <p:spPr>
-          <a:xfrm>
-            <a:off x="868680" y="3511296"/>
-            <a:ext cx="5212080" cy="237744"/>
-          </a:xfrm>
-          <a:prstGeom prst="rect">
-            <a:avLst/>
-          </a:prstGeom>
-          <a:noFill/>
-          <a:ln/>
-        </p:spPr>
-        <p:txBody>
-          <a:bodyPr wrap="square" lIns="0" tIns="0" rIns="0" bIns="0" rtlCol="0" anchor="t"/>
-          <a:lstStyle/>
-          <a:p>
-            <a:pPr indent="0" marL="0">
-              <a:lnSpc>
-                <a:spcPct val="114000"/>
-              </a:lnSpc>
-              <a:buNone/>
-            </a:pPr>
-            <a:r>
-              <a:rPr lang="en-US" sz="1150" dirty="0">
-                <a:solidFill>
-                  <a:schemeClr val="tx1"/>
-                </a:solidFill>
-                <a:latin typeface="맑은 고딕" pitchFamily="34" charset="0"/>
-                <a:ea typeface="맑은 고딕" pitchFamily="34" charset="-122"/>
-                <a:cs typeface="맑은 고딕" pitchFamily="34" charset="-120"/>
-              </a:rPr>
-              <a:t>간음한 여인(요 8:11) · 베데스다 못가 병자(요 5:14)</a:t>
-            </a:r>
-            <a:endParaRPr lang="en-US" sz="1150" dirty="0"/>
-          </a:p>
-        </p:txBody>
-      </p:sp>
-      <p:sp>
-        <p:nvSpPr>
-          <p:cNvPr id="12" name="ap-0.75-3"/>
-          <p:cNvSpPr/>
-          <p:nvPr/>
-        </p:nvSpPr>
-        <p:spPr>
-          <a:xfrm>
-            <a:off x="685800" y="3941064"/>
-            <a:ext cx="5577840" cy="621792"/>
-          </a:xfrm>
-          <a:prstGeom prst="roundRect">
-            <a:avLst>
-              <a:gd name="adj" fmla="val 8824"/>
-            </a:avLst>
-          </a:prstGeom>
-          <a:solidFill>
-            <a:schemeClr val="bg2"/>
-          </a:solidFill>
-          <a:ln/>
-        </p:spPr>
-      </p:sp>
-      <p:sp>
-        <p:nvSpPr>
-          <p:cNvPr id="13" name="ap-0.75-3-k"/>
-          <p:cNvSpPr txBox="1"/>
-          <p:nvPr/>
-        </p:nvSpPr>
-        <p:spPr>
-          <a:xfrm>
-            <a:off x="868680" y="3995928"/>
-            <a:ext cx="5212080" cy="256032"/>
-          </a:xfrm>
-          <a:prstGeom prst="rect">
-            <a:avLst/>
-          </a:prstGeom>
-          <a:noFill/>
-          <a:ln/>
-        </p:spPr>
-        <p:txBody>
-          <a:bodyPr wrap="square" lIns="0" tIns="0" rIns="0" bIns="0" rtlCol="0" anchor="ctr"/>
-          <a:lstStyle/>
-          <a:p>
-            <a:pPr indent="0" marL="0">
-              <a:buNone/>
-            </a:pPr>
-            <a:r>
-              <a:rPr lang="en-US" sz="1250" b="1" dirty="0">
-                <a:solidFill>
-                  <a:schemeClr val="accent1"/>
-                </a:solidFill>
-                <a:latin typeface="맑은 고딕" pitchFamily="34" charset="0"/>
-                <a:ea typeface="맑은 고딕" pitchFamily="34" charset="-122"/>
-                <a:cs typeface="맑은 고딕" pitchFamily="34" charset="-120"/>
-              </a:rPr>
-              <a:t>출교(쫓아냄)</a:t>
-            </a:r>
-            <a:endParaRPr lang="en-US" sz="1250" dirty="0"/>
-          </a:p>
-        </p:txBody>
-      </p:sp>
-      <p:sp>
-        <p:nvSpPr>
-          <p:cNvPr id="14" name="ap-0.75-3-v"/>
-          <p:cNvSpPr txBox="1"/>
-          <p:nvPr/>
-        </p:nvSpPr>
-        <p:spPr>
-          <a:xfrm>
-            <a:off x="868680" y="4251960"/>
-            <a:ext cx="5212080" cy="237744"/>
-          </a:xfrm>
-          <a:prstGeom prst="rect">
-            <a:avLst/>
-          </a:prstGeom>
-          <a:noFill/>
-          <a:ln/>
-        </p:spPr>
-        <p:txBody>
-          <a:bodyPr wrap="square" lIns="0" tIns="0" rIns="0" bIns="0" rtlCol="0" anchor="t"/>
-          <a:lstStyle/>
-          <a:p>
-            <a:pPr indent="0" marL="0">
-              <a:lnSpc>
-                <a:spcPct val="114000"/>
-              </a:lnSpc>
-              <a:buNone/>
-            </a:pPr>
-            <a:r>
-              <a:rPr lang="en-US" sz="1150" dirty="0">
-                <a:solidFill>
-                  <a:schemeClr val="tx1"/>
-                </a:solidFill>
-                <a:latin typeface="맑은 고딕" pitchFamily="34" charset="0"/>
-                <a:ea typeface="맑은 고딕" pitchFamily="34" charset="-122"/>
-                <a:cs typeface="맑은 고딕" pitchFamily="34" charset="-120"/>
-              </a:rPr>
-              <a:t>9:22 · 12:42 · 16:2 — 당시 유대 공동체의 실제 위협</a:t>
-            </a:r>
-            <a:endParaRPr lang="en-US" sz="1150" dirty="0"/>
-          </a:p>
-        </p:txBody>
-      </p:sp>
-      <p:sp>
-        <p:nvSpPr>
-          <p:cNvPr id="15" name="ap-0.75-4"/>
-          <p:cNvSpPr/>
-          <p:nvPr/>
-        </p:nvSpPr>
-        <p:spPr>
-          <a:xfrm>
-            <a:off x="685800" y="4681728"/>
-            <a:ext cx="5577840" cy="841248"/>
-          </a:xfrm>
-          <a:prstGeom prst="roundRect">
-            <a:avLst>
-              <a:gd name="adj" fmla="val 6522"/>
-            </a:avLst>
-          </a:prstGeom>
-          <a:solidFill>
-            <a:schemeClr val="bg2"/>
-          </a:solidFill>
-          <a:ln/>
-        </p:spPr>
-      </p:sp>
-      <p:sp>
-        <p:nvSpPr>
-          <p:cNvPr id="16" name="ap-0.75-4-k"/>
-          <p:cNvSpPr txBox="1"/>
-          <p:nvPr/>
-        </p:nvSpPr>
-        <p:spPr>
-          <a:xfrm>
-            <a:off x="868680" y="4736592"/>
-            <a:ext cx="5212080" cy="256032"/>
-          </a:xfrm>
-          <a:prstGeom prst="rect">
-            <a:avLst/>
-          </a:prstGeom>
-          <a:noFill/>
-          <a:ln/>
-        </p:spPr>
-        <p:txBody>
-          <a:bodyPr wrap="square" lIns="0" tIns="0" rIns="0" bIns="0" rtlCol="0" anchor="ctr"/>
-          <a:lstStyle/>
-          <a:p>
-            <a:pPr indent="0" marL="0">
-              <a:buNone/>
-            </a:pPr>
-            <a:r>
-              <a:rPr lang="en-US" sz="1250" b="1" dirty="0">
-                <a:solidFill>
-                  <a:schemeClr val="accent1"/>
-                </a:solidFill>
-                <a:latin typeface="맑은 고딕" pitchFamily="34" charset="0"/>
-                <a:ea typeface="맑은 고딕" pitchFamily="34" charset="-122"/>
-                <a:cs typeface="맑은 고딕" pitchFamily="34" charset="-120"/>
-              </a:rPr>
-              <a:t>대조 구도</a:t>
-            </a:r>
-            <a:endParaRPr lang="en-US" sz="1250" dirty="0"/>
-          </a:p>
-        </p:txBody>
-      </p:sp>
-      <p:sp>
-        <p:nvSpPr>
-          <p:cNvPr id="17" name="ap-0.75-4-v"/>
-          <p:cNvSpPr txBox="1"/>
-          <p:nvPr/>
-        </p:nvSpPr>
-        <p:spPr>
-          <a:xfrm>
-            <a:off x="868680" y="4992624"/>
-            <a:ext cx="5212080" cy="457200"/>
-          </a:xfrm>
-          <a:prstGeom prst="rect">
-            <a:avLst/>
-          </a:prstGeom>
-          <a:noFill/>
-          <a:ln/>
-        </p:spPr>
-        <p:txBody>
-          <a:bodyPr wrap="square" lIns="0" tIns="0" rIns="0" bIns="0" rtlCol="0" anchor="t"/>
-          <a:lstStyle/>
-          <a:p>
-            <a:pPr indent="0" marL="0">
-              <a:lnSpc>
-                <a:spcPct val="114000"/>
-              </a:lnSpc>
-              <a:buNone/>
-            </a:pPr>
-            <a:r>
-              <a:rPr lang="en-US" sz="1150" dirty="0">
-                <a:solidFill>
-                  <a:schemeClr val="tx1"/>
-                </a:solidFill>
-                <a:latin typeface="맑은 고딕" pitchFamily="34" charset="0"/>
-                <a:ea typeface="맑은 고딕" pitchFamily="34" charset="-122"/>
-                <a:cs typeface="맑은 고딕" pitchFamily="34" charset="-120"/>
-              </a:rPr>
-              <a:t>빛 ↔ 어두움(1장) · 하늘 ↔ 땅, 영 ↔ 육(3장)</a:t>
-            </a:r>
-            <a:endParaRPr lang="en-US" sz="1150" dirty="0"/>
-          </a:p>
-          <a:p>
-            <a:pPr indent="0" marL="0">
-              <a:lnSpc>
-                <a:spcPct val="114000"/>
-              </a:lnSpc>
-              <a:buNone/>
-            </a:pPr>
-            <a:r>
-              <a:rPr lang="en-US" sz="1150" dirty="0">
-                <a:solidFill>
-                  <a:schemeClr val="tx1"/>
-                </a:solidFill>
-                <a:latin typeface="맑은 고딕" pitchFamily="34" charset="0"/>
-                <a:ea typeface="맑은 고딕" pitchFamily="34" charset="-122"/>
-                <a:cs typeface="맑은 고딕" pitchFamily="34" charset="-120"/>
-              </a:rPr>
-              <a:t>진리 ↔ 거짓(8장) · 자유 ↔ 종(8장)</a:t>
+              <a:t>진리 / 거짓 (8장) · 자유 / 종 (8장)</a:t>
             </a:r>
             <a:endParaRPr lang="en-US" sz="1150" dirty="0"/>
           </a:p>

--- a/dist/요한복음_1강_영광을_만나기_위한_준비.pptx
+++ b/dist/요한복음_1강_영광을_만나기_위한_준비.pptx
@@ -154,7 +154,7 @@
   <p:extLst>
     <p:ext uri="{521415D9-36F7-43E2-AB2F-B90AF26B5E84}">
       <p14:sectionLst xmlns:p14="http://schemas.microsoft.com/office/powerpoint/2010/main">
-        <p14:section name="오리엔테이션" id="{bd3f4ed9-cd35-e158-4d7b-5883b946282c}">
+        <p14:section name="오리엔테이션" id="{84c34fe5-60c7-6708-e8b6-f2792afde8a2}">
           <p14:sldIdLst>
             <p14:sldId id="256"/>
             <p14:sldId id="257"/>
@@ -164,7 +164,7 @@
             <p14:sldId id="261"/>
           </p14:sldIdLst>
         </p14:section>
-        <p14:section name="요한복음 분석" id="{4ac6893f-f79c-2171-a0d4-ab26bfaccae3}">
+        <p14:section name="요한복음 분석" id="{2ff442a3-7462-9d12-0802-b5ff8e259e71}">
           <p14:sldIdLst>
             <p14:sldId id="262"/>
             <p14:sldId id="263"/>
@@ -181,7 +181,7 @@
             <p14:sldId id="274"/>
           </p14:sldIdLst>
         </p14:section>
-        <p14:section name="1과 · 예수님에 대한 증언" id="{5d4a32d0-ce50-2b3f-6466-62b5cb9f795f}">
+        <p14:section name="1과 · 예수님에 대한 증언" id="{1245fbad-52b5-186c-bd2d-131cf202c5d8}">
           <p14:sldIdLst>
             <p14:sldId id="275"/>
             <p14:sldId id="276"/>
@@ -197,7 +197,7 @@
             <p14:sldId id="286"/>
           </p14:sldIdLst>
         </p14:section>
-        <p14:section name="1과 · 하나님에 대한 증언" id="{5350ef73-e2cb-68e4-c170-2814e9389298}">
+        <p14:section name="1과 · 하나님에 대한 증언" id="{b86581ec-8ada-b636-8937-bd719120fed1}">
           <p14:sldIdLst>
             <p14:sldId id="287"/>
             <p14:sldId id="288"/>
@@ -213,7 +213,7 @@
             <p14:sldId id="298"/>
           </p14:sldIdLst>
         </p14:section>
-        <p14:section name="마무리" id="{266d78ec-682c-8269-e606-a6e558d5fae2}">
+        <p14:section name="마무리" id="{9b011055-2876-5666-3580-ae5bae2b979b}">
           <p14:sldIdLst>
             <p14:sldId id="299"/>
             <p14:sldId id="300"/>
@@ -221,7 +221,7 @@
             <p14:sldId id="302"/>
           </p14:sldIdLst>
         </p14:section>
-        <p14:section name="부록" id="{36cc25e6-c4f0-f619-9d1e-59a33a812986}">
+        <p14:section name="부록" id="{dd35af60-ef6c-120c-fcf8-0f10557ec601}">
           <p14:sldIdLst>
             <p14:sldId id="303"/>
           </p14:sldIdLst>
@@ -7529,7 +7529,7 @@
         <p:spPr>
           <a:xfrm>
             <a:off x="923544" y="1865376"/>
-            <a:ext cx="649224" cy="512064"/>
+            <a:ext cx="704088" cy="512064"/>
           </a:xfrm>
           <a:prstGeom prst="roundRect">
             <a:avLst>
@@ -7551,7 +7551,7 @@
         <p:spPr>
           <a:xfrm>
             <a:off x="923544" y="1865376"/>
-            <a:ext cx="649224" cy="512064"/>
+            <a:ext cx="704088" cy="512064"/>
           </a:xfrm>
           <a:prstGeom prst="rect">
             <a:avLst/>
@@ -7567,7 +7567,7 @@
               <a:buNone/>
             </a:pPr>
             <a:r>
-              <a:rPr lang="en-US" sz="1700" b="1" dirty="0">
+              <a:rPr lang="en-US" sz="1900" b="1" dirty="0">
                 <a:solidFill>
                   <a:schemeClr val="bg1"/>
                 </a:solidFill>
@@ -7577,7 +7577,7 @@
               </a:rPr>
               <a:t>영광</a:t>
             </a:r>
-            <a:endParaRPr lang="en-US" sz="1700" dirty="0"/>
+            <a:endParaRPr lang="en-US" sz="1900" dirty="0"/>
           </a:p>
         </p:txBody>
       </p:sp>
@@ -7795,7 +7795,7 @@
               <a:buNone/>
             </a:pPr>
             <a:r>
-              <a:rPr lang="en-US" sz="1700" b="1" dirty="0">
+              <a:rPr lang="en-US" sz="1900" b="1" dirty="0">
                 <a:solidFill>
                   <a:schemeClr val="bg1"/>
                 </a:solidFill>
@@ -7805,7 +7805,7 @@
               </a:rPr>
               <a:t>영</a:t>
             </a:r>
-            <a:endParaRPr lang="en-US" sz="1700" dirty="0"/>
+            <a:endParaRPr lang="en-US" sz="1900" dirty="0"/>
           </a:p>
         </p:txBody>
       </p:sp>
@@ -7987,7 +7987,7 @@
         <p:spPr>
           <a:xfrm>
             <a:off x="6452464" y="1865376"/>
-            <a:ext cx="649224" cy="512064"/>
+            <a:ext cx="704088" cy="512064"/>
           </a:xfrm>
           <a:prstGeom prst="roundRect">
             <a:avLst>
@@ -8009,7 +8009,7 @@
         <p:spPr>
           <a:xfrm>
             <a:off x="6452464" y="1865376"/>
-            <a:ext cx="649224" cy="512064"/>
+            <a:ext cx="704088" cy="512064"/>
           </a:xfrm>
           <a:prstGeom prst="rect">
             <a:avLst/>
@@ -8025,7 +8025,7 @@
               <a:buNone/>
             </a:pPr>
             <a:r>
-              <a:rPr lang="en-US" sz="1700" b="1" dirty="0">
+              <a:rPr lang="en-US" sz="1900" b="1" dirty="0">
                 <a:solidFill>
                   <a:schemeClr val="bg1"/>
                 </a:solidFill>
@@ -8035,7 +8035,7 @@
               </a:rPr>
               <a:t>믿음</a:t>
             </a:r>
-            <a:endParaRPr lang="en-US" sz="1700" dirty="0"/>
+            <a:endParaRPr lang="en-US" sz="1900" dirty="0"/>
           </a:p>
         </p:txBody>
       </p:sp>
@@ -8217,7 +8217,7 @@
         <p:spPr>
           <a:xfrm>
             <a:off x="9216923" y="1865376"/>
-            <a:ext cx="649224" cy="512064"/>
+            <a:ext cx="704088" cy="512064"/>
           </a:xfrm>
           <a:prstGeom prst="roundRect">
             <a:avLst>
@@ -8239,7 +8239,7 @@
         <p:spPr>
           <a:xfrm>
             <a:off x="9216923" y="1865376"/>
-            <a:ext cx="649224" cy="512064"/>
+            <a:ext cx="704088" cy="512064"/>
           </a:xfrm>
           <a:prstGeom prst="rect">
             <a:avLst/>
@@ -8255,7 +8255,7 @@
               <a:buNone/>
             </a:pPr>
             <a:r>
-              <a:rPr lang="en-US" sz="1700" b="1" dirty="0">
+              <a:rPr lang="en-US" sz="1900" b="1" dirty="0">
                 <a:solidFill>
                   <a:schemeClr val="bg1"/>
                 </a:solidFill>
@@ -8265,7 +8265,7 @@
               </a:rPr>
               <a:t>사랑</a:t>
             </a:r>
-            <a:endParaRPr lang="en-US" sz="1700" dirty="0"/>
+            <a:endParaRPr lang="en-US" sz="1900" dirty="0"/>
           </a:p>
         </p:txBody>
       </p:sp>
@@ -8417,13 +8417,11 @@
         </p:nvSpPr>
         <p:spPr>
           <a:xfrm>
-            <a:off x="685800" y="4709160"/>
-            <a:ext cx="361188" cy="347472"/>
-          </a:xfrm>
-          <a:prstGeom prst="roundRect">
-            <a:avLst>
-              <a:gd name="adj" fmla="val 50000"/>
-            </a:avLst>
+            <a:off x="685800" y="4681728"/>
+            <a:ext cx="420624" cy="420624"/>
+          </a:xfrm>
+          <a:prstGeom prst="ellipse">
+            <a:avLst/>
           </a:prstGeom>
           <a:solidFill>
             <a:schemeClr val="accent1"/>
@@ -8439,8 +8437,8 @@
         </p:nvSpPr>
         <p:spPr>
           <a:xfrm>
-            <a:off x="685800" y="4709160"/>
-            <a:ext cx="361188" cy="347472"/>
+            <a:off x="685800" y="4681728"/>
+            <a:ext cx="420624" cy="420624"/>
           </a:xfrm>
           <a:prstGeom prst="rect">
             <a:avLst/>
@@ -8456,7 +8454,7 @@
               <a:buNone/>
             </a:pPr>
             <a:r>
-              <a:rPr lang="en-US" sz="1300" b="1" dirty="0">
+              <a:rPr lang="en-US" sz="1500" b="1" dirty="0">
                 <a:solidFill>
                   <a:schemeClr val="bg1"/>
                 </a:solidFill>
@@ -8466,7 +8464,7 @@
               </a:rPr>
               <a:t>왜</a:t>
             </a:r>
-            <a:endParaRPr lang="en-US" sz="1300" dirty="0"/>
+            <a:endParaRPr lang="en-US" sz="1500" dirty="0"/>
           </a:p>
         </p:txBody>
       </p:sp>
@@ -8478,8 +8476,8 @@
         </p:nvSpPr>
         <p:spPr>
           <a:xfrm>
-            <a:off x="1175004" y="4700016"/>
-            <a:ext cx="10330891" cy="365760"/>
+            <a:off x="1252728" y="4700016"/>
+            <a:ext cx="10253167" cy="365760"/>
           </a:xfrm>
           <a:prstGeom prst="rect">
             <a:avLst/>
@@ -8755,7 +8753,7 @@
         <p:spPr>
           <a:xfrm>
             <a:off x="923544" y="1865376"/>
-            <a:ext cx="649224" cy="512064"/>
+            <a:ext cx="704088" cy="512064"/>
           </a:xfrm>
           <a:prstGeom prst="roundRect">
             <a:avLst>
@@ -8777,7 +8775,7 @@
         <p:spPr>
           <a:xfrm>
             <a:off x="923544" y="1865376"/>
-            <a:ext cx="649224" cy="512064"/>
+            <a:ext cx="704088" cy="512064"/>
           </a:xfrm>
           <a:prstGeom prst="rect">
             <a:avLst/>
@@ -8793,7 +8791,7 @@
               <a:buNone/>
             </a:pPr>
             <a:r>
-              <a:rPr lang="en-US" sz="1700" b="1" dirty="0">
+              <a:rPr lang="en-US" sz="1900" b="1" dirty="0">
                 <a:solidFill>
                   <a:schemeClr val="bg1"/>
                 </a:solidFill>
@@ -8803,7 +8801,7 @@
               </a:rPr>
               <a:t>증거</a:t>
             </a:r>
-            <a:endParaRPr lang="en-US" sz="1700" dirty="0"/>
+            <a:endParaRPr lang="en-US" sz="1900" dirty="0"/>
           </a:p>
         </p:txBody>
       </p:sp>
@@ -8995,7 +8993,7 @@
         <p:spPr>
           <a:xfrm>
             <a:off x="4609490" y="1865376"/>
-            <a:ext cx="649224" cy="512064"/>
+            <a:ext cx="704088" cy="512064"/>
           </a:xfrm>
           <a:prstGeom prst="roundRect">
             <a:avLst>
@@ -9017,7 +9015,7 @@
         <p:spPr>
           <a:xfrm>
             <a:off x="4609490" y="1865376"/>
-            <a:ext cx="649224" cy="512064"/>
+            <a:ext cx="704088" cy="512064"/>
           </a:xfrm>
           <a:prstGeom prst="rect">
             <a:avLst/>
@@ -9033,7 +9031,7 @@
               <a:buNone/>
             </a:pPr>
             <a:r>
-              <a:rPr lang="en-US" sz="1700" b="1" dirty="0">
+              <a:rPr lang="en-US" sz="1900" b="1" dirty="0">
                 <a:solidFill>
                   <a:schemeClr val="bg1"/>
                 </a:solidFill>
@@ -9043,7 +9041,7 @@
               </a:rPr>
               <a:t>교훈</a:t>
             </a:r>
-            <a:endParaRPr lang="en-US" sz="1700" dirty="0"/>
+            <a:endParaRPr lang="en-US" sz="1900" dirty="0"/>
           </a:p>
         </p:txBody>
       </p:sp>
@@ -9235,7 +9233,7 @@
         <p:spPr>
           <a:xfrm>
             <a:off x="8295437" y="1865376"/>
-            <a:ext cx="649224" cy="512064"/>
+            <a:ext cx="704088" cy="512064"/>
           </a:xfrm>
           <a:prstGeom prst="roundRect">
             <a:avLst>
@@ -9257,7 +9255,7 @@
         <p:spPr>
           <a:xfrm>
             <a:off x="8295437" y="1865376"/>
-            <a:ext cx="649224" cy="512064"/>
+            <a:ext cx="704088" cy="512064"/>
           </a:xfrm>
           <a:prstGeom prst="rect">
             <a:avLst/>
@@ -9273,7 +9271,7 @@
               <a:buNone/>
             </a:pPr>
             <a:r>
-              <a:rPr lang="en-US" sz="1700" b="1" dirty="0">
+              <a:rPr lang="en-US" sz="1900" b="1" dirty="0">
                 <a:solidFill>
                   <a:schemeClr val="bg1"/>
                 </a:solidFill>
@@ -9283,7 +9281,7 @@
               </a:rPr>
               <a:t>영광</a:t>
             </a:r>
-            <a:endParaRPr lang="en-US" sz="1700" dirty="0"/>
+            <a:endParaRPr lang="en-US" sz="1900" dirty="0"/>
           </a:p>
         </p:txBody>
       </p:sp>
@@ -9733,7 +9731,7 @@
               <a:buNone/>
             </a:pPr>
             <a:r>
-              <a:rPr lang="en-US" sz="1500" b="1" dirty="0">
+              <a:rPr lang="en-US" sz="1700" b="1" dirty="0">
                 <a:solidFill>
                   <a:schemeClr val="bg1"/>
                 </a:solidFill>
@@ -9743,7 +9741,7 @@
               </a:rPr>
               <a:t>1</a:t>
             </a:r>
-            <a:endParaRPr lang="en-US" sz="1500" dirty="0"/>
+            <a:endParaRPr lang="en-US" sz="1700" dirty="0"/>
           </a:p>
         </p:txBody>
       </p:sp>
@@ -9902,7 +9900,7 @@
               <a:buNone/>
             </a:pPr>
             <a:r>
-              <a:rPr lang="en-US" sz="1500" b="1" dirty="0">
+              <a:rPr lang="en-US" sz="1700" b="1" dirty="0">
                 <a:solidFill>
                   <a:schemeClr val="bg1"/>
                 </a:solidFill>
@@ -9912,7 +9910,7 @@
               </a:rPr>
               <a:t>2</a:t>
             </a:r>
-            <a:endParaRPr lang="en-US" sz="1500" dirty="0"/>
+            <a:endParaRPr lang="en-US" sz="1700" dirty="0"/>
           </a:p>
         </p:txBody>
       </p:sp>
@@ -10071,7 +10069,7 @@
               <a:buNone/>
             </a:pPr>
             <a:r>
-              <a:rPr lang="en-US" sz="1500" b="1" dirty="0">
+              <a:rPr lang="en-US" sz="1700" b="1" dirty="0">
                 <a:solidFill>
                   <a:schemeClr val="bg1"/>
                 </a:solidFill>
@@ -10081,7 +10079,7 @@
               </a:rPr>
               <a:t>3</a:t>
             </a:r>
-            <a:endParaRPr lang="en-US" sz="1500" dirty="0"/>
+            <a:endParaRPr lang="en-US" sz="1700" dirty="0"/>
           </a:p>
         </p:txBody>
       </p:sp>
@@ -10240,7 +10238,7 @@
               <a:buNone/>
             </a:pPr>
             <a:r>
-              <a:rPr lang="en-US" sz="1500" b="1" dirty="0">
+              <a:rPr lang="en-US" sz="1700" b="1" dirty="0">
                 <a:solidFill>
                   <a:schemeClr val="bg1"/>
                 </a:solidFill>
@@ -10250,7 +10248,7 @@
               </a:rPr>
               <a:t>4</a:t>
             </a:r>
-            <a:endParaRPr lang="en-US" sz="1500" dirty="0"/>
+            <a:endParaRPr lang="en-US" sz="1700" dirty="0"/>
           </a:p>
         </p:txBody>
       </p:sp>
@@ -10409,7 +10407,7 @@
               <a:buNone/>
             </a:pPr>
             <a:r>
-              <a:rPr lang="en-US" sz="1500" b="1" dirty="0">
+              <a:rPr lang="en-US" sz="1700" b="1" dirty="0">
                 <a:solidFill>
                   <a:schemeClr val="bg1"/>
                 </a:solidFill>
@@ -10419,7 +10417,7 @@
               </a:rPr>
               <a:t>5</a:t>
             </a:r>
-            <a:endParaRPr lang="en-US" sz="1500" dirty="0"/>
+            <a:endParaRPr lang="en-US" sz="1700" dirty="0"/>
           </a:p>
         </p:txBody>
       </p:sp>
@@ -10578,7 +10576,7 @@
               <a:buNone/>
             </a:pPr>
             <a:r>
-              <a:rPr lang="en-US" sz="1500" b="1" dirty="0">
+              <a:rPr lang="en-US" sz="1700" b="1" dirty="0">
                 <a:solidFill>
                   <a:schemeClr val="bg1"/>
                 </a:solidFill>
@@ -10588,7 +10586,7 @@
               </a:rPr>
               <a:t>6</a:t>
             </a:r>
-            <a:endParaRPr lang="en-US" sz="1500" dirty="0"/>
+            <a:endParaRPr lang="en-US" sz="1700" dirty="0"/>
           </a:p>
         </p:txBody>
       </p:sp>
@@ -10747,7 +10745,7 @@
               <a:buNone/>
             </a:pPr>
             <a:r>
-              <a:rPr lang="en-US" sz="1500" b="1" dirty="0">
+              <a:rPr lang="en-US" sz="1700" b="1" dirty="0">
                 <a:solidFill>
                   <a:schemeClr val="bg1"/>
                 </a:solidFill>
@@ -10757,7 +10755,7 @@
               </a:rPr>
               <a:t>7</a:t>
             </a:r>
-            <a:endParaRPr lang="en-US" sz="1500" dirty="0"/>
+            <a:endParaRPr lang="en-US" sz="1700" dirty="0"/>
           </a:p>
         </p:txBody>
       </p:sp>
@@ -10916,7 +10914,7 @@
               <a:buNone/>
             </a:pPr>
             <a:r>
-              <a:rPr lang="en-US" sz="1500" b="1" dirty="0">
+              <a:rPr lang="en-US" sz="1700" b="1" dirty="0">
                 <a:solidFill>
                   <a:schemeClr val="bg1"/>
                 </a:solidFill>
@@ -10926,7 +10924,7 @@
               </a:rPr>
               <a:t>8</a:t>
             </a:r>
-            <a:endParaRPr lang="en-US" sz="1500" dirty="0"/>
+            <a:endParaRPr lang="en-US" sz="1700" dirty="0"/>
           </a:p>
         </p:txBody>
       </p:sp>
@@ -11268,7 +11266,7 @@
               <a:buNone/>
             </a:pPr>
             <a:r>
-              <a:rPr lang="en-US" sz="1500" b="1" dirty="0">
+              <a:rPr lang="en-US" sz="1700" b="1" dirty="0">
                 <a:solidFill>
                   <a:schemeClr val="bg1"/>
                 </a:solidFill>
@@ -11278,7 +11276,7 @@
               </a:rPr>
               <a:t>가</a:t>
             </a:r>
-            <a:endParaRPr lang="en-US" sz="1500" dirty="0"/>
+            <a:endParaRPr lang="en-US" sz="1700" dirty="0"/>
           </a:p>
         </p:txBody>
       </p:sp>
@@ -11457,7 +11455,7 @@
               <a:buNone/>
             </a:pPr>
             <a:r>
-              <a:rPr lang="en-US" sz="1500" b="1" dirty="0">
+              <a:rPr lang="en-US" sz="1700" b="1" dirty="0">
                 <a:solidFill>
                   <a:schemeClr val="bg1"/>
                 </a:solidFill>
@@ -11467,7 +11465,7 @@
               </a:rPr>
               <a:t>왕</a:t>
             </a:r>
-            <a:endParaRPr lang="en-US" sz="1500" dirty="0"/>
+            <a:endParaRPr lang="en-US" sz="1700" dirty="0"/>
           </a:p>
         </p:txBody>
       </p:sp>
@@ -11646,7 +11644,7 @@
               <a:buNone/>
             </a:pPr>
             <a:r>
-              <a:rPr lang="en-US" sz="1500" b="1" dirty="0">
+              <a:rPr lang="en-US" sz="1700" b="1" dirty="0">
                 <a:solidFill>
                   <a:schemeClr val="bg1"/>
                 </a:solidFill>
@@ -11656,7 +11654,7 @@
               </a:rPr>
               <a:t>베</a:t>
             </a:r>
-            <a:endParaRPr lang="en-US" sz="1500" dirty="0"/>
+            <a:endParaRPr lang="en-US" sz="1700" dirty="0"/>
           </a:p>
         </p:txBody>
       </p:sp>
@@ -11835,7 +11833,7 @@
               <a:buNone/>
             </a:pPr>
             <a:r>
-              <a:rPr lang="en-US" sz="1500" b="1" dirty="0">
+              <a:rPr lang="en-US" sz="1700" b="1" dirty="0">
                 <a:solidFill>
                   <a:schemeClr val="bg1"/>
                 </a:solidFill>
@@ -11845,7 +11843,7 @@
               </a:rPr>
               <a:t>오</a:t>
             </a:r>
-            <a:endParaRPr lang="en-US" sz="1500" dirty="0"/>
+            <a:endParaRPr lang="en-US" sz="1700" dirty="0"/>
           </a:p>
         </p:txBody>
       </p:sp>
@@ -12024,7 +12022,7 @@
               <a:buNone/>
             </a:pPr>
             <a:r>
-              <a:rPr lang="en-US" sz="1500" b="1" dirty="0">
+              <a:rPr lang="en-US" sz="1700" b="1" dirty="0">
                 <a:solidFill>
                   <a:schemeClr val="bg1"/>
                 </a:solidFill>
@@ -12034,7 +12032,7 @@
               </a:rPr>
               <a:t>물</a:t>
             </a:r>
-            <a:endParaRPr lang="en-US" sz="1500" dirty="0"/>
+            <a:endParaRPr lang="en-US" sz="1700" dirty="0"/>
           </a:p>
         </p:txBody>
       </p:sp>
@@ -12213,7 +12211,7 @@
               <a:buNone/>
             </a:pPr>
             <a:r>
-              <a:rPr lang="en-US" sz="1500" b="1" dirty="0">
+              <a:rPr lang="en-US" sz="1700" b="1" dirty="0">
                 <a:solidFill>
                   <a:schemeClr val="bg1"/>
                 </a:solidFill>
@@ -12223,7 +12221,7 @@
               </a:rPr>
               <a:t>실</a:t>
             </a:r>
-            <a:endParaRPr lang="en-US" sz="1500" dirty="0"/>
+            <a:endParaRPr lang="en-US" sz="1700" dirty="0"/>
           </a:p>
         </p:txBody>
       </p:sp>
@@ -12402,7 +12400,7 @@
               <a:buNone/>
             </a:pPr>
             <a:r>
-              <a:rPr lang="en-US" sz="1500" b="1" dirty="0">
+              <a:rPr lang="en-US" sz="1700" b="1" dirty="0">
                 <a:solidFill>
                   <a:schemeClr val="bg1"/>
                 </a:solidFill>
@@ -12412,7 +12410,7 @@
               </a:rPr>
               <a:t>나</a:t>
             </a:r>
-            <a:endParaRPr lang="en-US" sz="1500" dirty="0"/>
+            <a:endParaRPr lang="en-US" sz="1700" dirty="0"/>
           </a:p>
         </p:txBody>
       </p:sp>
@@ -12591,7 +12589,7 @@
               <a:buNone/>
             </a:pPr>
             <a:r>
-              <a:rPr lang="en-US" sz="1500" b="1" dirty="0">
+              <a:rPr lang="en-US" sz="1700" b="1" dirty="0">
                 <a:solidFill>
                   <a:schemeClr val="bg1"/>
                 </a:solidFill>
@@ -12601,7 +12599,7 @@
               </a:rPr>
               <a:t>+</a:t>
             </a:r>
-            <a:endParaRPr lang="en-US" sz="1500" dirty="0"/>
+            <a:endParaRPr lang="en-US" sz="1700" dirty="0"/>
           </a:p>
         </p:txBody>
       </p:sp>
@@ -12963,7 +12961,7 @@
               <a:buNone/>
             </a:pPr>
             <a:r>
-              <a:rPr lang="en-US" sz="1500" b="1" dirty="0">
+              <a:rPr lang="en-US" sz="1700" b="1" dirty="0">
                 <a:solidFill>
                   <a:schemeClr val="bg1"/>
                 </a:solidFill>
@@ -12973,7 +12971,7 @@
               </a:rPr>
               <a:t>생</a:t>
             </a:r>
-            <a:endParaRPr lang="en-US" sz="1500" dirty="0"/>
+            <a:endParaRPr lang="en-US" sz="1700" dirty="0"/>
           </a:p>
         </p:txBody>
       </p:sp>
@@ -13152,7 +13150,7 @@
               <a:buNone/>
             </a:pPr>
             <a:r>
-              <a:rPr lang="en-US" sz="1500" b="1" dirty="0">
+              <a:rPr lang="en-US" sz="1700" b="1" dirty="0">
                 <a:solidFill>
                   <a:schemeClr val="bg1"/>
                 </a:solidFill>
@@ -13162,7 +13160,7 @@
               </a:rPr>
               <a:t>세</a:t>
             </a:r>
-            <a:endParaRPr lang="en-US" sz="1500" dirty="0"/>
+            <a:endParaRPr lang="en-US" sz="1700" dirty="0"/>
           </a:p>
         </p:txBody>
       </p:sp>
@@ -13341,7 +13339,7 @@
               <a:buNone/>
             </a:pPr>
             <a:r>
-              <a:rPr lang="en-US" sz="1500" b="1" dirty="0">
+              <a:rPr lang="en-US" sz="1700" b="1" dirty="0">
                 <a:solidFill>
                   <a:schemeClr val="bg1"/>
                 </a:solidFill>
@@ -13351,7 +13349,7 @@
               </a:rPr>
               <a:t>양</a:t>
             </a:r>
-            <a:endParaRPr lang="en-US" sz="1500" dirty="0"/>
+            <a:endParaRPr lang="en-US" sz="1700" dirty="0"/>
           </a:p>
         </p:txBody>
       </p:sp>
@@ -13530,7 +13528,7 @@
               <a:buNone/>
             </a:pPr>
             <a:r>
-              <a:rPr lang="en-US" sz="1500" b="1" dirty="0">
+              <a:rPr lang="en-US" sz="1700" b="1" dirty="0">
                 <a:solidFill>
                   <a:schemeClr val="bg1"/>
                 </a:solidFill>
@@ -13540,7 +13538,7 @@
               </a:rPr>
               <a:t>선</a:t>
             </a:r>
-            <a:endParaRPr lang="en-US" sz="1500" dirty="0"/>
+            <a:endParaRPr lang="en-US" sz="1700" dirty="0"/>
           </a:p>
         </p:txBody>
       </p:sp>
@@ -13719,7 +13717,7 @@
               <a:buNone/>
             </a:pPr>
             <a:r>
-              <a:rPr lang="en-US" sz="1500" b="1" dirty="0">
+              <a:rPr lang="en-US" sz="1700" b="1" dirty="0">
                 <a:solidFill>
                   <a:schemeClr val="bg1"/>
                 </a:solidFill>
@@ -13729,7 +13727,7 @@
               </a:rPr>
               <a:t>부</a:t>
             </a:r>
-            <a:endParaRPr lang="en-US" sz="1500" dirty="0"/>
+            <a:endParaRPr lang="en-US" sz="1700" dirty="0"/>
           </a:p>
         </p:txBody>
       </p:sp>
@@ -13908,7 +13906,7 @@
               <a:buNone/>
             </a:pPr>
             <a:r>
-              <a:rPr lang="en-US" sz="1500" b="1" dirty="0">
+              <a:rPr lang="en-US" sz="1700" b="1" dirty="0">
                 <a:solidFill>
                   <a:schemeClr val="bg1"/>
                 </a:solidFill>
@@ -13918,7 +13916,7 @@
               </a:rPr>
               <a:t>길</a:t>
             </a:r>
-            <a:endParaRPr lang="en-US" sz="1500" dirty="0"/>
+            <a:endParaRPr lang="en-US" sz="1700" dirty="0"/>
           </a:p>
         </p:txBody>
       </p:sp>
@@ -14097,7 +14095,7 @@
               <a:buNone/>
             </a:pPr>
             <a:r>
-              <a:rPr lang="en-US" sz="1500" b="1" dirty="0">
+              <a:rPr lang="en-US" sz="1700" b="1" dirty="0">
                 <a:solidFill>
                   <a:schemeClr val="bg1"/>
                 </a:solidFill>
@@ -14107,7 +14105,7 @@
               </a:rPr>
               <a:t>참</a:t>
             </a:r>
-            <a:endParaRPr lang="en-US" sz="1500" dirty="0"/>
+            <a:endParaRPr lang="en-US" sz="1700" dirty="0"/>
           </a:p>
         </p:txBody>
       </p:sp>
@@ -14286,7 +14284,7 @@
               <a:buNone/>
             </a:pPr>
             <a:r>
-              <a:rPr lang="en-US" sz="1500" b="1" dirty="0">
+              <a:rPr lang="en-US" sz="1700" b="1" dirty="0">
                 <a:solidFill>
                   <a:schemeClr val="bg1"/>
                 </a:solidFill>
@@ -14296,7 +14294,7 @@
               </a:rPr>
               <a:t>!</a:t>
             </a:r>
-            <a:endParaRPr lang="en-US" sz="1500" dirty="0"/>
+            <a:endParaRPr lang="en-US" sz="1700" dirty="0"/>
           </a:p>
         </p:txBody>
       </p:sp>
@@ -14621,7 +14619,7 @@
                         <a:buNone/>
                       </a:pPr>
                       <a:r>
-                        <a:rPr lang="en-US" sz="1300" b="1" dirty="0">
+                        <a:rPr lang="en-US" sz="1600" b="1" dirty="0">
                           <a:solidFill>
                             <a:schemeClr val="bg1"/>
                           </a:solidFill>
@@ -14631,7 +14629,7 @@
                         </a:rPr>
                         <a:t>증인</a:t>
                       </a:r>
-                      <a:endParaRPr lang="en-US" sz="1300" dirty="0">
+                      <a:endParaRPr lang="en-US" sz="1600" dirty="0">
                         <a:latin typeface="맑은 고딕" charset="0"/>
                         <a:ea typeface="맑은 고딕" charset="0"/>
                         <a:cs typeface="맑은 고딕" charset="0"/>
@@ -14671,7 +14669,7 @@
                         <a:buNone/>
                       </a:pPr>
                       <a:r>
-                        <a:rPr lang="en-US" sz="1300" b="1" dirty="0">
+                        <a:rPr lang="en-US" sz="1600" b="1" dirty="0">
                           <a:solidFill>
                             <a:schemeClr val="bg1"/>
                           </a:solidFill>
@@ -14681,7 +14679,7 @@
                         </a:rPr>
                         <a:t>본문</a:t>
                       </a:r>
-                      <a:endParaRPr lang="en-US" sz="1300" dirty="0">
+                      <a:endParaRPr lang="en-US" sz="1600" dirty="0">
                         <a:latin typeface="맑은 고딕" charset="0"/>
                         <a:ea typeface="맑은 고딕" charset="0"/>
                         <a:cs typeface="맑은 고딕" charset="0"/>
@@ -14721,7 +14719,7 @@
                         <a:buNone/>
                       </a:pPr>
                       <a:r>
-                        <a:rPr lang="en-US" sz="1300" b="1" dirty="0">
+                        <a:rPr lang="en-US" sz="1600" b="1" dirty="0">
                           <a:solidFill>
                             <a:schemeClr val="bg1"/>
                           </a:solidFill>
@@ -14731,7 +14729,7 @@
                         </a:rPr>
                         <a:t>고백</a:t>
                       </a:r>
-                      <a:endParaRPr lang="en-US" sz="1300" dirty="0">
+                      <a:endParaRPr lang="en-US" sz="1600" dirty="0">
                         <a:latin typeface="맑은 고딕" charset="0"/>
                         <a:ea typeface="맑은 고딕" charset="0"/>
                         <a:cs typeface="맑은 고딕" charset="0"/>
@@ -18983,7 +18981,7 @@
         <p:spPr>
           <a:xfrm>
             <a:off x="841248" y="1764792"/>
-            <a:ext cx="365760" cy="365760"/>
+            <a:ext cx="374904" cy="365760"/>
           </a:xfrm>
           <a:prstGeom prst="ellipse">
             <a:avLst/>
@@ -19003,7 +19001,7 @@
         <p:spPr>
           <a:xfrm>
             <a:off x="841248" y="1764792"/>
-            <a:ext cx="365760" cy="365760"/>
+            <a:ext cx="374904" cy="365760"/>
           </a:xfrm>
           <a:prstGeom prst="rect">
             <a:avLst/>
@@ -19019,7 +19017,7 @@
               <a:buNone/>
             </a:pPr>
             <a:r>
-              <a:rPr lang="en-US" sz="1200" b="1" dirty="0">
+              <a:rPr lang="en-US" sz="1400" b="1" dirty="0">
                 <a:solidFill>
                   <a:schemeClr val="bg1"/>
                 </a:solidFill>
@@ -19029,7 +19027,7 @@
               </a:rPr>
               <a:t>가</a:t>
             </a:r>
-            <a:endParaRPr lang="en-US" sz="1200" dirty="0"/>
+            <a:endParaRPr lang="en-US" sz="1400" dirty="0"/>
           </a:p>
         </p:txBody>
       </p:sp>
@@ -19152,7 +19150,7 @@
         <p:spPr>
           <a:xfrm>
             <a:off x="2684221" y="1764792"/>
-            <a:ext cx="365760" cy="365760"/>
+            <a:ext cx="374904" cy="365760"/>
           </a:xfrm>
           <a:prstGeom prst="ellipse">
             <a:avLst/>
@@ -19172,7 +19170,7 @@
         <p:spPr>
           <a:xfrm>
             <a:off x="2684221" y="1764792"/>
-            <a:ext cx="365760" cy="365760"/>
+            <a:ext cx="374904" cy="365760"/>
           </a:xfrm>
           <a:prstGeom prst="rect">
             <a:avLst/>
@@ -19188,7 +19186,7 @@
               <a:buNone/>
             </a:pPr>
             <a:r>
-              <a:rPr lang="en-US" sz="1200" b="1" dirty="0">
+              <a:rPr lang="en-US" sz="1400" b="1" dirty="0">
                 <a:solidFill>
                   <a:schemeClr val="bg1"/>
                 </a:solidFill>
@@ -19198,7 +19196,7 @@
               </a:rPr>
               <a:t>니</a:t>
             </a:r>
-            <a:endParaRPr lang="en-US" sz="1200" dirty="0"/>
+            <a:endParaRPr lang="en-US" sz="1400" dirty="0"/>
           </a:p>
         </p:txBody>
       </p:sp>
@@ -19321,7 +19319,7 @@
         <p:spPr>
           <a:xfrm>
             <a:off x="4527194" y="1764792"/>
-            <a:ext cx="365760" cy="365760"/>
+            <a:ext cx="374904" cy="365760"/>
           </a:xfrm>
           <a:prstGeom prst="ellipse">
             <a:avLst/>
@@ -19341,7 +19339,7 @@
         <p:spPr>
           <a:xfrm>
             <a:off x="4527194" y="1764792"/>
-            <a:ext cx="365760" cy="365760"/>
+            <a:ext cx="374904" cy="365760"/>
           </a:xfrm>
           <a:prstGeom prst="rect">
             <a:avLst/>
@@ -19357,7 +19355,7 @@
               <a:buNone/>
             </a:pPr>
             <a:r>
-              <a:rPr lang="en-US" sz="1200" b="1" dirty="0">
+              <a:rPr lang="en-US" sz="1400" b="1" dirty="0">
                 <a:solidFill>
                   <a:schemeClr val="bg1"/>
                 </a:solidFill>
@@ -19367,7 +19365,7 @@
               </a:rPr>
               <a:t>수</a:t>
             </a:r>
-            <a:endParaRPr lang="en-US" sz="1200" dirty="0"/>
+            <a:endParaRPr lang="en-US" sz="1400" dirty="0"/>
           </a:p>
         </p:txBody>
       </p:sp>
@@ -19490,7 +19488,7 @@
         <p:spPr>
           <a:xfrm>
             <a:off x="6370168" y="1764792"/>
-            <a:ext cx="365760" cy="365760"/>
+            <a:ext cx="374904" cy="365760"/>
           </a:xfrm>
           <a:prstGeom prst="ellipse">
             <a:avLst/>
@@ -19510,7 +19508,7 @@
         <p:spPr>
           <a:xfrm>
             <a:off x="6370168" y="1764792"/>
-            <a:ext cx="365760" cy="365760"/>
+            <a:ext cx="374904" cy="365760"/>
           </a:xfrm>
           <a:prstGeom prst="rect">
             <a:avLst/>
@@ -19526,7 +19524,7 @@
               <a:buNone/>
             </a:pPr>
             <a:r>
-              <a:rPr lang="en-US" sz="1200" b="1" dirty="0">
+              <a:rPr lang="en-US" sz="1400" b="1" dirty="0">
                 <a:solidFill>
                   <a:schemeClr val="bg1"/>
                 </a:solidFill>
@@ -19536,7 +19534,7 @@
               </a:rPr>
               <a:t>베</a:t>
             </a:r>
-            <a:endParaRPr lang="en-US" sz="1200" dirty="0"/>
+            <a:endParaRPr lang="en-US" sz="1400" dirty="0"/>
           </a:p>
         </p:txBody>
       </p:sp>
@@ -19659,7 +19657,7 @@
         <p:spPr>
           <a:xfrm>
             <a:off x="8213141" y="1764792"/>
-            <a:ext cx="365760" cy="365760"/>
+            <a:ext cx="374904" cy="365760"/>
           </a:xfrm>
           <a:prstGeom prst="ellipse">
             <a:avLst/>
@@ -19679,7 +19677,7 @@
         <p:spPr>
           <a:xfrm>
             <a:off x="8213141" y="1764792"/>
-            <a:ext cx="365760" cy="365760"/>
+            <a:ext cx="374904" cy="365760"/>
           </a:xfrm>
           <a:prstGeom prst="rect">
             <a:avLst/>
@@ -19695,7 +19693,7 @@
               <a:buNone/>
             </a:pPr>
             <a:r>
-              <a:rPr lang="en-US" sz="1200" b="1" dirty="0">
+              <a:rPr lang="en-US" sz="1400" b="1" dirty="0">
                 <a:solidFill>
                   <a:schemeClr val="bg1"/>
                 </a:solidFill>
@@ -19705,7 +19703,7 @@
               </a:rPr>
               <a:t>초</a:t>
             </a:r>
-            <a:endParaRPr lang="en-US" sz="1200" dirty="0"/>
+            <a:endParaRPr lang="en-US" sz="1400" dirty="0"/>
           </a:p>
         </p:txBody>
       </p:sp>
@@ -19828,7 +19826,7 @@
         <p:spPr>
           <a:xfrm>
             <a:off x="10056114" y="1764792"/>
-            <a:ext cx="365760" cy="365760"/>
+            <a:ext cx="374904" cy="365760"/>
           </a:xfrm>
           <a:prstGeom prst="ellipse">
             <a:avLst/>
@@ -19848,7 +19846,7 @@
         <p:spPr>
           <a:xfrm>
             <a:off x="10056114" y="1764792"/>
-            <a:ext cx="365760" cy="365760"/>
+            <a:ext cx="374904" cy="365760"/>
           </a:xfrm>
           <a:prstGeom prst="rect">
             <a:avLst/>
@@ -19864,7 +19862,7 @@
               <a:buNone/>
             </a:pPr>
             <a:r>
-              <a:rPr lang="en-US" sz="1200" b="1" dirty="0">
+              <a:rPr lang="en-US" sz="1400" b="1" dirty="0">
                 <a:solidFill>
                   <a:schemeClr val="bg1"/>
                 </a:solidFill>
@@ -19874,7 +19872,7 @@
               </a:rPr>
               <a:t>간</a:t>
             </a:r>
-            <a:endParaRPr lang="en-US" sz="1200" dirty="0"/>
+            <a:endParaRPr lang="en-US" sz="1400" dirty="0"/>
           </a:p>
         </p:txBody>
       </p:sp>
@@ -19997,7 +19995,7 @@
         <p:spPr>
           <a:xfrm>
             <a:off x="841248" y="3611880"/>
-            <a:ext cx="365760" cy="365760"/>
+            <a:ext cx="374904" cy="365760"/>
           </a:xfrm>
           <a:prstGeom prst="ellipse">
             <a:avLst/>
@@ -20017,7 +20015,7 @@
         <p:spPr>
           <a:xfrm>
             <a:off x="841248" y="3611880"/>
-            <a:ext cx="365760" cy="365760"/>
+            <a:ext cx="374904" cy="365760"/>
           </a:xfrm>
           <a:prstGeom prst="rect">
             <a:avLst/>
@@ -20033,7 +20031,7 @@
               <a:buNone/>
             </a:pPr>
             <a:r>
-              <a:rPr lang="en-US" sz="1200" b="1" dirty="0">
+              <a:rPr lang="en-US" sz="1400" b="1" dirty="0">
                 <a:solidFill>
                   <a:schemeClr val="bg1"/>
                 </a:solidFill>
@@ -20043,7 +20041,7 @@
               </a:rPr>
               <a:t>실</a:t>
             </a:r>
-            <a:endParaRPr lang="en-US" sz="1200" dirty="0"/>
+            <a:endParaRPr lang="en-US" sz="1400" dirty="0"/>
           </a:p>
         </p:txBody>
       </p:sp>
@@ -20166,7 +20164,7 @@
         <p:spPr>
           <a:xfrm>
             <a:off x="2684221" y="3611880"/>
-            <a:ext cx="365760" cy="365760"/>
+            <a:ext cx="374904" cy="365760"/>
           </a:xfrm>
           <a:prstGeom prst="ellipse">
             <a:avLst/>
@@ -20186,7 +20184,7 @@
         <p:spPr>
           <a:xfrm>
             <a:off x="2684221" y="3611880"/>
-            <a:ext cx="365760" cy="365760"/>
+            <a:ext cx="374904" cy="365760"/>
           </a:xfrm>
           <a:prstGeom prst="rect">
             <a:avLst/>
@@ -20202,7 +20200,7 @@
               <a:buNone/>
             </a:pPr>
             <a:r>
-              <a:rPr lang="en-US" sz="1200" b="1" dirty="0">
+              <a:rPr lang="en-US" sz="1400" b="1" dirty="0">
                 <a:solidFill>
                   <a:schemeClr val="bg1"/>
                 </a:solidFill>
@@ -20212,7 +20210,7 @@
               </a:rPr>
               <a:t>나</a:t>
             </a:r>
-            <a:endParaRPr lang="en-US" sz="1200" dirty="0"/>
+            <a:endParaRPr lang="en-US" sz="1400" dirty="0"/>
           </a:p>
         </p:txBody>
       </p:sp>
@@ -20335,7 +20333,7 @@
         <p:spPr>
           <a:xfrm>
             <a:off x="4527194" y="3611880"/>
-            <a:ext cx="365760" cy="365760"/>
+            <a:ext cx="374904" cy="365760"/>
           </a:xfrm>
           <a:prstGeom prst="ellipse">
             <a:avLst/>
@@ -20355,7 +20353,7 @@
         <p:spPr>
           <a:xfrm>
             <a:off x="4527194" y="3611880"/>
-            <a:ext cx="365760" cy="365760"/>
+            <a:ext cx="374904" cy="365760"/>
           </a:xfrm>
           <a:prstGeom prst="rect">
             <a:avLst/>
@@ -20371,7 +20369,7 @@
               <a:buNone/>
             </a:pPr>
             <a:r>
-              <a:rPr lang="en-US" sz="1200" b="1" dirty="0">
+              <a:rPr lang="en-US" sz="1400" b="1" dirty="0">
                 <a:solidFill>
                   <a:schemeClr val="bg1"/>
                 </a:solidFill>
@@ -20381,7 +20379,7 @@
               </a:rPr>
               <a:t>세</a:t>
             </a:r>
-            <a:endParaRPr lang="en-US" sz="1200" dirty="0"/>
+            <a:endParaRPr lang="en-US" sz="1400" dirty="0"/>
           </a:p>
         </p:txBody>
       </p:sp>
@@ -20504,7 +20502,7 @@
         <p:spPr>
           <a:xfrm>
             <a:off x="6370168" y="3611880"/>
-            <a:ext cx="365760" cy="365760"/>
+            <a:ext cx="374904" cy="365760"/>
           </a:xfrm>
           <a:prstGeom prst="ellipse">
             <a:avLst/>
@@ -20524,7 +20522,7 @@
         <p:spPr>
           <a:xfrm>
             <a:off x="6370168" y="3611880"/>
-            <a:ext cx="365760" cy="365760"/>
+            <a:ext cx="374904" cy="365760"/>
           </a:xfrm>
           <a:prstGeom prst="rect">
             <a:avLst/>
@@ -20540,7 +20538,7 @@
               <a:buNone/>
             </a:pPr>
             <a:r>
-              <a:rPr lang="en-US" sz="1200" b="1" dirty="0">
+              <a:rPr lang="en-US" sz="1400" b="1" dirty="0">
                 <a:solidFill>
                   <a:schemeClr val="bg1"/>
                 </a:solidFill>
@@ -20550,7 +20548,7 @@
               </a:rPr>
               <a:t>보</a:t>
             </a:r>
-            <a:endParaRPr lang="en-US" sz="1200" dirty="0"/>
+            <a:endParaRPr lang="en-US" sz="1400" dirty="0"/>
           </a:p>
         </p:txBody>
       </p:sp>
@@ -20673,7 +20671,7 @@
         <p:spPr>
           <a:xfrm>
             <a:off x="8213141" y="3611880"/>
-            <a:ext cx="365760" cy="365760"/>
+            <a:ext cx="374904" cy="365760"/>
           </a:xfrm>
           <a:prstGeom prst="ellipse">
             <a:avLst/>
@@ -20693,7 +20691,7 @@
         <p:spPr>
           <a:xfrm>
             <a:off x="8213141" y="3611880"/>
-            <a:ext cx="365760" cy="365760"/>
+            <a:ext cx="374904" cy="365760"/>
           </a:xfrm>
           <a:prstGeom prst="rect">
             <a:avLst/>
@@ -20709,7 +20707,7 @@
               <a:buNone/>
             </a:pPr>
             <a:r>
-              <a:rPr lang="en-US" sz="1200" b="1" dirty="0">
+              <a:rPr lang="en-US" sz="1400" b="1" dirty="0">
                 <a:solidFill>
                   <a:schemeClr val="bg1"/>
                 </a:solidFill>
@@ -20719,7 +20717,7 @@
               </a:rPr>
               <a:t>대</a:t>
             </a:r>
-            <a:endParaRPr lang="en-US" sz="1200" dirty="0"/>
+            <a:endParaRPr lang="en-US" sz="1400" dirty="0"/>
           </a:p>
         </p:txBody>
       </p:sp>
@@ -22855,8 +22853,8 @@
         </p:nvSpPr>
         <p:spPr>
           <a:xfrm>
-            <a:off x="685800" y="3136392"/>
-            <a:ext cx="717804" cy="347472"/>
+            <a:off x="685800" y="3108960"/>
+            <a:ext cx="800100" cy="420624"/>
           </a:xfrm>
           <a:prstGeom prst="roundRect">
             <a:avLst>
@@ -22877,8 +22875,8 @@
         </p:nvSpPr>
         <p:spPr>
           <a:xfrm>
-            <a:off x="685800" y="3136392"/>
-            <a:ext cx="717804" cy="347472"/>
+            <a:off x="685800" y="3108960"/>
+            <a:ext cx="800100" cy="420624"/>
           </a:xfrm>
           <a:prstGeom prst="rect">
             <a:avLst/>
@@ -22894,7 +22892,7 @@
               <a:buNone/>
             </a:pPr>
             <a:r>
-              <a:rPr lang="en-US" sz="1300" b="1" dirty="0">
+              <a:rPr lang="en-US" sz="1500" b="1" dirty="0">
                 <a:solidFill>
                   <a:schemeClr val="bg1"/>
                 </a:solidFill>
@@ -22904,7 +22902,7 @@
               </a:rPr>
               <a:t>소거법</a:t>
             </a:r>
-            <a:endParaRPr lang="en-US" sz="1300" dirty="0"/>
+            <a:endParaRPr lang="en-US" sz="1500" dirty="0"/>
           </a:p>
         </p:txBody>
       </p:sp>
@@ -22916,8 +22914,8 @@
         </p:nvSpPr>
         <p:spPr>
           <a:xfrm>
-            <a:off x="1531620" y="3127248"/>
-            <a:ext cx="9974275" cy="365760"/>
+            <a:off x="1650492" y="3127248"/>
+            <a:ext cx="9855403" cy="365760"/>
           </a:xfrm>
           <a:prstGeom prst="rect">
             <a:avLst/>
@@ -23936,7 +23934,7 @@
         <p:spPr>
           <a:xfrm>
             <a:off x="923544" y="1810512"/>
-            <a:ext cx="539496" cy="402336"/>
+            <a:ext cx="594360" cy="402336"/>
           </a:xfrm>
           <a:prstGeom prst="roundRect">
             <a:avLst>
@@ -23958,7 +23956,7 @@
         <p:spPr>
           <a:xfrm>
             <a:off x="923544" y="1810512"/>
-            <a:ext cx="539496" cy="402336"/>
+            <a:ext cx="594360" cy="402336"/>
           </a:xfrm>
           <a:prstGeom prst="rect">
             <a:avLst/>
@@ -23974,7 +23972,7 @@
               <a:buNone/>
             </a:pPr>
             <a:r>
-              <a:rPr lang="en-US" sz="1300" b="1" dirty="0">
+              <a:rPr lang="en-US" sz="1500" b="1" dirty="0">
                 <a:solidFill>
                   <a:schemeClr val="bg1"/>
                 </a:solidFill>
@@ -23984,7 +23982,7 @@
               </a:rPr>
               <a:t>가족</a:t>
             </a:r>
-            <a:endParaRPr lang="en-US" sz="1300" dirty="0"/>
+            <a:endParaRPr lang="en-US" sz="1500" dirty="0"/>
           </a:p>
         </p:txBody>
       </p:sp>
@@ -24147,7 +24145,7 @@
         <p:spPr>
           <a:xfrm>
             <a:off x="4609490" y="1810512"/>
-            <a:ext cx="539496" cy="402336"/>
+            <a:ext cx="594360" cy="402336"/>
           </a:xfrm>
           <a:prstGeom prst="roundRect">
             <a:avLst>
@@ -24169,7 +24167,7 @@
         <p:spPr>
           <a:xfrm>
             <a:off x="4609490" y="1810512"/>
-            <a:ext cx="539496" cy="402336"/>
+            <a:ext cx="594360" cy="402336"/>
           </a:xfrm>
           <a:prstGeom prst="rect">
             <a:avLst/>
@@ -24185,7 +24183,7 @@
               <a:buNone/>
             </a:pPr>
             <a:r>
-              <a:rPr lang="en-US" sz="1300" b="1" dirty="0">
+              <a:rPr lang="en-US" sz="1500" b="1" dirty="0">
                 <a:solidFill>
                   <a:schemeClr val="bg1"/>
                 </a:solidFill>
@@ -24195,7 +24193,7 @@
               </a:rPr>
               <a:t>형제</a:t>
             </a:r>
-            <a:endParaRPr lang="en-US" sz="1300" dirty="0"/>
+            <a:endParaRPr lang="en-US" sz="1500" dirty="0"/>
           </a:p>
         </p:txBody>
       </p:sp>
@@ -24338,7 +24336,7 @@
         <p:spPr>
           <a:xfrm>
             <a:off x="8295437" y="1810512"/>
-            <a:ext cx="539496" cy="402336"/>
+            <a:ext cx="594360" cy="402336"/>
           </a:xfrm>
           <a:prstGeom prst="roundRect">
             <a:avLst>
@@ -24360,7 +24358,7 @@
         <p:spPr>
           <a:xfrm>
             <a:off x="8295437" y="1810512"/>
-            <a:ext cx="539496" cy="402336"/>
+            <a:ext cx="594360" cy="402336"/>
           </a:xfrm>
           <a:prstGeom prst="rect">
             <a:avLst/>
@@ -24376,7 +24374,7 @@
               <a:buNone/>
             </a:pPr>
             <a:r>
-              <a:rPr lang="en-US" sz="1300" b="1" dirty="0">
+              <a:rPr lang="en-US" sz="1500" b="1" dirty="0">
                 <a:solidFill>
                   <a:schemeClr val="bg1"/>
                 </a:solidFill>
@@ -24386,7 +24384,7 @@
               </a:rPr>
               <a:t>출발</a:t>
             </a:r>
-            <a:endParaRPr lang="en-US" sz="1300" dirty="0"/>
+            <a:endParaRPr lang="en-US" sz="1500" dirty="0"/>
           </a:p>
         </p:txBody>
       </p:sp>
@@ -24529,7 +24527,7 @@
         <p:spPr>
           <a:xfrm>
             <a:off x="923544" y="4261104"/>
-            <a:ext cx="539496" cy="402336"/>
+            <a:ext cx="594360" cy="402336"/>
           </a:xfrm>
           <a:prstGeom prst="roundRect">
             <a:avLst>
@@ -24551,7 +24549,7 @@
         <p:spPr>
           <a:xfrm>
             <a:off x="923544" y="4261104"/>
-            <a:ext cx="539496" cy="402336"/>
+            <a:ext cx="594360" cy="402336"/>
           </a:xfrm>
           <a:prstGeom prst="rect">
             <a:avLst/>
@@ -24567,7 +24565,7 @@
               <a:buNone/>
             </a:pPr>
             <a:r>
-              <a:rPr lang="en-US" sz="1300" b="1" dirty="0">
+              <a:rPr lang="en-US" sz="1500" b="1" dirty="0">
                 <a:solidFill>
                   <a:schemeClr val="bg1"/>
                 </a:solidFill>
@@ -24577,7 +24575,7 @@
               </a:rPr>
               <a:t>맡음</a:t>
             </a:r>
-            <a:endParaRPr lang="en-US" sz="1300" dirty="0"/>
+            <a:endParaRPr lang="en-US" sz="1500" dirty="0"/>
           </a:p>
         </p:txBody>
       </p:sp>
@@ -24720,7 +24718,7 @@
         <p:spPr>
           <a:xfrm>
             <a:off x="4609490" y="4261104"/>
-            <a:ext cx="539496" cy="402336"/>
+            <a:ext cx="594360" cy="402336"/>
           </a:xfrm>
           <a:prstGeom prst="roundRect">
             <a:avLst>
@@ -24742,7 +24740,7 @@
         <p:spPr>
           <a:xfrm>
             <a:off x="4609490" y="4261104"/>
-            <a:ext cx="539496" cy="402336"/>
+            <a:ext cx="594360" cy="402336"/>
           </a:xfrm>
           <a:prstGeom prst="rect">
             <a:avLst/>
@@ -24758,7 +24756,7 @@
               <a:buNone/>
             </a:pPr>
             <a:r>
-              <a:rPr lang="en-US" sz="1300" b="1" dirty="0">
+              <a:rPr lang="en-US" sz="1500" b="1" dirty="0">
                 <a:solidFill>
                   <a:schemeClr val="bg1"/>
                 </a:solidFill>
@@ -24768,7 +24766,7 @@
               </a:rPr>
               <a:t>교회</a:t>
             </a:r>
-            <a:endParaRPr lang="en-US" sz="1300" dirty="0"/>
+            <a:endParaRPr lang="en-US" sz="1500" dirty="0"/>
           </a:p>
         </p:txBody>
       </p:sp>
@@ -24911,7 +24909,7 @@
         <p:spPr>
           <a:xfrm>
             <a:off x="8295437" y="4261104"/>
-            <a:ext cx="539496" cy="402336"/>
+            <a:ext cx="594360" cy="402336"/>
           </a:xfrm>
           <a:prstGeom prst="roundRect">
             <a:avLst>
@@ -24933,7 +24931,7 @@
         <p:spPr>
           <a:xfrm>
             <a:off x="8295437" y="4261104"/>
-            <a:ext cx="539496" cy="402336"/>
+            <a:ext cx="594360" cy="402336"/>
           </a:xfrm>
           <a:prstGeom prst="rect">
             <a:avLst/>
@@ -24949,7 +24947,7 @@
               <a:buNone/>
             </a:pPr>
             <a:r>
-              <a:rPr lang="en-US" sz="1300" b="1" dirty="0">
+              <a:rPr lang="en-US" sz="1500" b="1" dirty="0">
                 <a:solidFill>
                   <a:schemeClr val="bg1"/>
                 </a:solidFill>
@@ -24959,7 +24957,7 @@
               </a:rPr>
               <a:t>기록</a:t>
             </a:r>
-            <a:endParaRPr lang="en-US" sz="1300" dirty="0"/>
+            <a:endParaRPr lang="en-US" sz="1500" dirty="0"/>
           </a:p>
         </p:txBody>
       </p:sp>
@@ -25402,7 +25400,7 @@
               <a:buNone/>
             </a:pPr>
             <a:r>
-              <a:rPr lang="en-US" sz="1300" b="1" dirty="0">
+              <a:rPr lang="en-US" sz="1500" b="1" dirty="0">
                 <a:solidFill>
                   <a:schemeClr val="bg1"/>
                 </a:solidFill>
@@ -25412,7 +25410,7 @@
               </a:rPr>
               <a:t>6</a:t>
             </a:r>
-            <a:endParaRPr lang="en-US" sz="1300" dirty="0"/>
+            <a:endParaRPr lang="en-US" sz="1500" dirty="0"/>
           </a:p>
         </p:txBody>
       </p:sp>
@@ -25611,7 +25609,7 @@
               <a:buNone/>
             </a:pPr>
             <a:r>
-              <a:rPr lang="en-US" sz="1300" b="1" dirty="0">
+              <a:rPr lang="en-US" sz="1500" b="1" dirty="0">
                 <a:solidFill>
                   <a:schemeClr val="bg1"/>
                 </a:solidFill>
@@ -25621,7 +25619,7 @@
               </a:rPr>
               <a:t>7</a:t>
             </a:r>
-            <a:endParaRPr lang="en-US" sz="1300" dirty="0"/>
+            <a:endParaRPr lang="en-US" sz="1500" dirty="0"/>
           </a:p>
         </p:txBody>
       </p:sp>
@@ -25820,7 +25818,7 @@
               <a:buNone/>
             </a:pPr>
             <a:r>
-              <a:rPr lang="en-US" sz="1300" b="1" dirty="0">
+              <a:rPr lang="en-US" sz="1500" b="1" dirty="0">
                 <a:solidFill>
                   <a:schemeClr val="bg1"/>
                 </a:solidFill>
@@ -25830,7 +25828,7 @@
               </a:rPr>
               <a:t>8</a:t>
             </a:r>
-            <a:endParaRPr lang="en-US" sz="1300" dirty="0"/>
+            <a:endParaRPr lang="en-US" sz="1500" dirty="0"/>
           </a:p>
         </p:txBody>
       </p:sp>
@@ -26219,7 +26217,7 @@
         <p:spPr>
           <a:xfrm>
             <a:off x="923544" y="2615184"/>
-            <a:ext cx="402336" cy="402336"/>
+            <a:ext cx="405079" cy="402336"/>
           </a:xfrm>
           <a:prstGeom prst="ellipse">
             <a:avLst/>
@@ -26239,7 +26237,7 @@
         <p:spPr>
           <a:xfrm>
             <a:off x="923544" y="2615184"/>
-            <a:ext cx="402336" cy="402336"/>
+            <a:ext cx="405079" cy="402336"/>
           </a:xfrm>
           <a:prstGeom prst="rect">
             <a:avLst/>
@@ -26255,7 +26253,7 @@
               <a:buNone/>
             </a:pPr>
             <a:r>
-              <a:rPr lang="en-US" sz="1300" b="1" dirty="0">
+              <a:rPr lang="en-US" sz="1500" b="1" dirty="0">
                 <a:solidFill>
                   <a:schemeClr val="bg1"/>
                 </a:solidFill>
@@ -26265,7 +26263,7 @@
               </a:rPr>
               <a:t>Q1</a:t>
             </a:r>
-            <a:endParaRPr lang="en-US" sz="1300" dirty="0"/>
+            <a:endParaRPr lang="en-US" sz="1500" dirty="0"/>
           </a:p>
         </p:txBody>
       </p:sp>
@@ -26408,7 +26406,7 @@
         <p:spPr>
           <a:xfrm>
             <a:off x="6452464" y="2615184"/>
-            <a:ext cx="402336" cy="402336"/>
+            <a:ext cx="405079" cy="402336"/>
           </a:xfrm>
           <a:prstGeom prst="ellipse">
             <a:avLst/>
@@ -26428,7 +26426,7 @@
         <p:spPr>
           <a:xfrm>
             <a:off x="6452464" y="2615184"/>
-            <a:ext cx="402336" cy="402336"/>
+            <a:ext cx="405079" cy="402336"/>
           </a:xfrm>
           <a:prstGeom prst="rect">
             <a:avLst/>
@@ -26444,7 +26442,7 @@
               <a:buNone/>
             </a:pPr>
             <a:r>
-              <a:rPr lang="en-US" sz="1300" b="1" dirty="0">
+              <a:rPr lang="en-US" sz="1500" b="1" dirty="0">
                 <a:solidFill>
                   <a:schemeClr val="bg1"/>
                 </a:solidFill>
@@ -26454,7 +26452,7 @@
               </a:rPr>
               <a:t>Q2</a:t>
             </a:r>
-            <a:endParaRPr lang="en-US" sz="1300" dirty="0"/>
+            <a:endParaRPr lang="en-US" sz="1500" dirty="0"/>
           </a:p>
         </p:txBody>
       </p:sp>
@@ -26875,7 +26873,7 @@
               <a:buNone/>
             </a:pPr>
             <a:r>
-              <a:rPr lang="en-US" sz="1300" b="1" dirty="0">
+              <a:rPr lang="en-US" sz="1500" b="1" dirty="0">
                 <a:solidFill>
                   <a:schemeClr val="bg1"/>
                 </a:solidFill>
@@ -26885,7 +26883,7 @@
               </a:rPr>
               <a:t>1</a:t>
             </a:r>
-            <a:endParaRPr lang="en-US" sz="1300" dirty="0"/>
+            <a:endParaRPr lang="en-US" sz="1500" dirty="0"/>
           </a:p>
         </p:txBody>
       </p:sp>
@@ -27103,7 +27101,7 @@
               <a:buNone/>
             </a:pPr>
             <a:r>
-              <a:rPr lang="en-US" sz="1300" b="1" dirty="0">
+              <a:rPr lang="en-US" sz="1500" b="1" dirty="0">
                 <a:solidFill>
                   <a:schemeClr val="bg1"/>
                 </a:solidFill>
@@ -27113,7 +27111,7 @@
               </a:rPr>
               <a:t>2</a:t>
             </a:r>
-            <a:endParaRPr lang="en-US" sz="1300" dirty="0"/>
+            <a:endParaRPr lang="en-US" sz="1500" dirty="0"/>
           </a:p>
         </p:txBody>
       </p:sp>
@@ -27331,7 +27329,7 @@
               <a:buNone/>
             </a:pPr>
             <a:r>
-              <a:rPr lang="en-US" sz="1300" b="1" dirty="0">
+              <a:rPr lang="en-US" sz="1500" b="1" dirty="0">
                 <a:solidFill>
                   <a:schemeClr val="bg1"/>
                 </a:solidFill>
@@ -27341,7 +27339,7 @@
               </a:rPr>
               <a:t>3</a:t>
             </a:r>
-            <a:endParaRPr lang="en-US" sz="1300" dirty="0"/>
+            <a:endParaRPr lang="en-US" sz="1500" dirty="0"/>
           </a:p>
         </p:txBody>
       </p:sp>
@@ -27559,7 +27557,7 @@
               <a:buNone/>
             </a:pPr>
             <a:r>
-              <a:rPr lang="en-US" sz="1300" b="1" dirty="0">
+              <a:rPr lang="en-US" sz="1500" b="1" dirty="0">
                 <a:solidFill>
                   <a:schemeClr val="bg1"/>
                 </a:solidFill>
@@ -27569,7 +27567,7 @@
               </a:rPr>
               <a:t>4</a:t>
             </a:r>
-            <a:endParaRPr lang="en-US" sz="1300" dirty="0"/>
+            <a:endParaRPr lang="en-US" sz="1500" dirty="0"/>
           </a:p>
         </p:txBody>
       </p:sp>
@@ -28581,7 +28579,7 @@
         <p:spPr>
           <a:xfrm>
             <a:off x="923544" y="1847088"/>
-            <a:ext cx="402336" cy="402336"/>
+            <a:ext cx="405079" cy="402336"/>
           </a:xfrm>
           <a:prstGeom prst="ellipse">
             <a:avLst/>
@@ -28601,7 +28599,7 @@
         <p:spPr>
           <a:xfrm>
             <a:off x="923544" y="1847088"/>
-            <a:ext cx="402336" cy="402336"/>
+            <a:ext cx="405079" cy="402336"/>
           </a:xfrm>
           <a:prstGeom prst="rect">
             <a:avLst/>
@@ -28617,7 +28615,7 @@
               <a:buNone/>
             </a:pPr>
             <a:r>
-              <a:rPr lang="en-US" sz="1300" b="1" dirty="0">
+              <a:rPr lang="en-US" sz="1500" b="1" dirty="0">
                 <a:solidFill>
                   <a:schemeClr val="bg1"/>
                 </a:solidFill>
@@ -28627,7 +28625,7 @@
               </a:rPr>
               <a:t>10</a:t>
             </a:r>
-            <a:endParaRPr lang="en-US" sz="1300" dirty="0"/>
+            <a:endParaRPr lang="en-US" sz="1500" dirty="0"/>
           </a:p>
         </p:txBody>
       </p:sp>
@@ -28790,7 +28788,7 @@
         <p:spPr>
           <a:xfrm>
             <a:off x="6452464" y="1847088"/>
-            <a:ext cx="402336" cy="402336"/>
+            <a:ext cx="405079" cy="402336"/>
           </a:xfrm>
           <a:prstGeom prst="ellipse">
             <a:avLst/>
@@ -28810,7 +28808,7 @@
         <p:spPr>
           <a:xfrm>
             <a:off x="6452464" y="1847088"/>
-            <a:ext cx="402336" cy="402336"/>
+            <a:ext cx="405079" cy="402336"/>
           </a:xfrm>
           <a:prstGeom prst="rect">
             <a:avLst/>
@@ -28826,7 +28824,7 @@
               <a:buNone/>
             </a:pPr>
             <a:r>
-              <a:rPr lang="en-US" sz="1300" b="1" dirty="0">
+              <a:rPr lang="en-US" sz="1500" b="1" dirty="0">
                 <a:solidFill>
                   <a:schemeClr val="bg1"/>
                 </a:solidFill>
@@ -28836,7 +28834,7 @@
               </a:rPr>
               <a:t>11</a:t>
             </a:r>
-            <a:endParaRPr lang="en-US" sz="1300" dirty="0"/>
+            <a:endParaRPr lang="en-US" sz="1500" dirty="0"/>
           </a:p>
         </p:txBody>
       </p:sp>
@@ -28969,13 +28967,11 @@
         </p:nvSpPr>
         <p:spPr>
           <a:xfrm>
-            <a:off x="685800" y="4050792"/>
-            <a:ext cx="375453" cy="347472"/>
-          </a:xfrm>
-          <a:prstGeom prst="roundRect">
-            <a:avLst>
-              <a:gd name="adj" fmla="val 50000"/>
-            </a:avLst>
+            <a:off x="685800" y="4023360"/>
+            <a:ext cx="420624" cy="420624"/>
+          </a:xfrm>
+          <a:prstGeom prst="ellipse">
+            <a:avLst/>
           </a:prstGeom>
           <a:solidFill>
             <a:schemeClr val="accent1"/>
@@ -28991,8 +28987,8 @@
         </p:nvSpPr>
         <p:spPr>
           <a:xfrm>
-            <a:off x="685800" y="4050792"/>
-            <a:ext cx="375453" cy="347472"/>
+            <a:off x="685800" y="4023360"/>
+            <a:ext cx="420624" cy="420624"/>
           </a:xfrm>
           <a:prstGeom prst="rect">
             <a:avLst/>
@@ -29008,7 +29004,7 @@
               <a:buNone/>
             </a:pPr>
             <a:r>
-              <a:rPr lang="en-US" sz="1300" b="1" dirty="0">
+              <a:rPr lang="en-US" sz="1500" b="1" dirty="0">
                 <a:solidFill>
                   <a:schemeClr val="bg1"/>
                 </a:solidFill>
@@ -29018,7 +29014,7 @@
               </a:rPr>
               <a:t>12</a:t>
             </a:r>
-            <a:endParaRPr lang="en-US" sz="1300" dirty="0"/>
+            <a:endParaRPr lang="en-US" sz="1500" dirty="0"/>
           </a:p>
         </p:txBody>
       </p:sp>
@@ -29030,8 +29026,8 @@
         </p:nvSpPr>
         <p:spPr>
           <a:xfrm>
-            <a:off x="1189269" y="4041648"/>
-            <a:ext cx="10316627" cy="365760"/>
+            <a:off x="1255471" y="4041648"/>
+            <a:ext cx="10250424" cy="365760"/>
           </a:xfrm>
           <a:prstGeom prst="rect">
             <a:avLst/>
@@ -29802,7 +29798,7 @@
         <p:spPr>
           <a:xfrm>
             <a:off x="923544" y="1847088"/>
-            <a:ext cx="402336" cy="402336"/>
+            <a:ext cx="405079" cy="402336"/>
           </a:xfrm>
           <a:prstGeom prst="ellipse">
             <a:avLst/>
@@ -29822,7 +29818,7 @@
         <p:spPr>
           <a:xfrm>
             <a:off x="923544" y="1847088"/>
-            <a:ext cx="402336" cy="402336"/>
+            <a:ext cx="405079" cy="402336"/>
           </a:xfrm>
           <a:prstGeom prst="rect">
             <a:avLst/>
@@ -29838,7 +29834,7 @@
               <a:buNone/>
             </a:pPr>
             <a:r>
-              <a:rPr lang="en-US" sz="1300" b="1" dirty="0">
+              <a:rPr lang="en-US" sz="1500" b="1" dirty="0">
                 <a:solidFill>
                   <a:schemeClr val="bg1"/>
                 </a:solidFill>
@@ -29848,7 +29844,7 @@
               </a:rPr>
               <a:t>13</a:t>
             </a:r>
-            <a:endParaRPr lang="en-US" sz="1300" dirty="0"/>
+            <a:endParaRPr lang="en-US" sz="1500" dirty="0"/>
           </a:p>
         </p:txBody>
       </p:sp>
@@ -29991,7 +29987,7 @@
         <p:spPr>
           <a:xfrm>
             <a:off x="3688004" y="1847088"/>
-            <a:ext cx="402336" cy="402336"/>
+            <a:ext cx="405079" cy="402336"/>
           </a:xfrm>
           <a:prstGeom prst="ellipse">
             <a:avLst/>
@@ -30011,7 +30007,7 @@
         <p:spPr>
           <a:xfrm>
             <a:off x="3688004" y="1847088"/>
-            <a:ext cx="402336" cy="402336"/>
+            <a:ext cx="405079" cy="402336"/>
           </a:xfrm>
           <a:prstGeom prst="rect">
             <a:avLst/>
@@ -30027,7 +30023,7 @@
               <a:buNone/>
             </a:pPr>
             <a:r>
-              <a:rPr lang="en-US" sz="1300" b="1" dirty="0">
+              <a:rPr lang="en-US" sz="1500" b="1" dirty="0">
                 <a:solidFill>
                   <a:schemeClr val="bg1"/>
                 </a:solidFill>
@@ -30037,7 +30033,7 @@
               </a:rPr>
               <a:t>14</a:t>
             </a:r>
-            <a:endParaRPr lang="en-US" sz="1300" dirty="0"/>
+            <a:endParaRPr lang="en-US" sz="1500" dirty="0"/>
           </a:p>
         </p:txBody>
       </p:sp>
@@ -30180,7 +30176,7 @@
         <p:spPr>
           <a:xfrm>
             <a:off x="6452464" y="1847088"/>
-            <a:ext cx="402336" cy="402336"/>
+            <a:ext cx="405079" cy="402336"/>
           </a:xfrm>
           <a:prstGeom prst="ellipse">
             <a:avLst/>
@@ -30200,7 +30196,7 @@
         <p:spPr>
           <a:xfrm>
             <a:off x="6452464" y="1847088"/>
-            <a:ext cx="402336" cy="402336"/>
+            <a:ext cx="405079" cy="402336"/>
           </a:xfrm>
           <a:prstGeom prst="rect">
             <a:avLst/>
@@ -30216,7 +30212,7 @@
               <a:buNone/>
             </a:pPr>
             <a:r>
-              <a:rPr lang="en-US" sz="1300" b="1" dirty="0">
+              <a:rPr lang="en-US" sz="1500" b="1" dirty="0">
                 <a:solidFill>
                   <a:schemeClr val="bg1"/>
                 </a:solidFill>
@@ -30226,7 +30222,7 @@
               </a:rPr>
               <a:t>15</a:t>
             </a:r>
-            <a:endParaRPr lang="en-US" sz="1300" dirty="0"/>
+            <a:endParaRPr lang="en-US" sz="1500" dirty="0"/>
           </a:p>
         </p:txBody>
       </p:sp>
@@ -30369,7 +30365,7 @@
         <p:spPr>
           <a:xfrm>
             <a:off x="9216923" y="1847088"/>
-            <a:ext cx="402336" cy="402336"/>
+            <a:ext cx="405079" cy="402336"/>
           </a:xfrm>
           <a:prstGeom prst="ellipse">
             <a:avLst/>
@@ -30389,7 +30385,7 @@
         <p:spPr>
           <a:xfrm>
             <a:off x="9216923" y="1847088"/>
-            <a:ext cx="402336" cy="402336"/>
+            <a:ext cx="405079" cy="402336"/>
           </a:xfrm>
           <a:prstGeom prst="rect">
             <a:avLst/>
@@ -30405,7 +30401,7 @@
               <a:buNone/>
             </a:pPr>
             <a:r>
-              <a:rPr lang="en-US" sz="1300" b="1" dirty="0">
+              <a:rPr lang="en-US" sz="1500" b="1" dirty="0">
                 <a:solidFill>
                   <a:schemeClr val="bg1"/>
                 </a:solidFill>
@@ -30415,7 +30411,7 @@
               </a:rPr>
               <a:t>16</a:t>
             </a:r>
-            <a:endParaRPr lang="en-US" sz="1300" dirty="0"/>
+            <a:endParaRPr lang="en-US" sz="1500" dirty="0"/>
           </a:p>
         </p:txBody>
       </p:sp>
@@ -30858,7 +30854,7 @@
               <a:buNone/>
             </a:pPr>
             <a:r>
-              <a:rPr lang="en-US" sz="1300" b="1" dirty="0">
+              <a:rPr lang="en-US" sz="1500" b="1" dirty="0">
                 <a:solidFill>
                   <a:schemeClr val="bg1"/>
                 </a:solidFill>
@@ -30868,7 +30864,7 @@
               </a:rPr>
               <a:t>①</a:t>
             </a:r>
-            <a:endParaRPr lang="en-US" sz="1300" dirty="0"/>
+            <a:endParaRPr lang="en-US" sz="1500" dirty="0"/>
           </a:p>
         </p:txBody>
       </p:sp>
@@ -31076,7 +31072,7 @@
               <a:buNone/>
             </a:pPr>
             <a:r>
-              <a:rPr lang="en-US" sz="1300" b="1" dirty="0">
+              <a:rPr lang="en-US" sz="1500" b="1" dirty="0">
                 <a:solidFill>
                   <a:schemeClr val="bg1"/>
                 </a:solidFill>
@@ -31086,7 +31082,7 @@
               </a:rPr>
               <a:t>②</a:t>
             </a:r>
-            <a:endParaRPr lang="en-US" sz="1300" dirty="0"/>
+            <a:endParaRPr lang="en-US" sz="1500" dirty="0"/>
           </a:p>
         </p:txBody>
       </p:sp>
@@ -31285,7 +31281,7 @@
               <a:buNone/>
             </a:pPr>
             <a:r>
-              <a:rPr lang="en-US" sz="1300" b="1" dirty="0">
+              <a:rPr lang="en-US" sz="1500" b="1" dirty="0">
                 <a:solidFill>
                   <a:schemeClr val="bg1"/>
                 </a:solidFill>
@@ -31295,7 +31291,7 @@
               </a:rPr>
               <a:t>③</a:t>
             </a:r>
-            <a:endParaRPr lang="en-US" sz="1300" dirty="0"/>
+            <a:endParaRPr lang="en-US" sz="1500" dirty="0"/>
           </a:p>
         </p:txBody>
       </p:sp>
@@ -31738,7 +31734,7 @@
               <a:buNone/>
             </a:pPr>
             <a:r>
-              <a:rPr lang="en-US" sz="1300" b="1" dirty="0">
+              <a:rPr lang="en-US" sz="1500" b="1" dirty="0">
                 <a:solidFill>
                   <a:schemeClr val="bg1"/>
                 </a:solidFill>
@@ -31748,7 +31744,7 @@
               </a:rPr>
               <a:t>①</a:t>
             </a:r>
-            <a:endParaRPr lang="en-US" sz="1300" dirty="0"/>
+            <a:endParaRPr lang="en-US" sz="1500" dirty="0"/>
           </a:p>
         </p:txBody>
       </p:sp>
@@ -31927,7 +31923,7 @@
               <a:buNone/>
             </a:pPr>
             <a:r>
-              <a:rPr lang="en-US" sz="1300" b="1" dirty="0">
+              <a:rPr lang="en-US" sz="1500" b="1" dirty="0">
                 <a:solidFill>
                   <a:schemeClr val="bg1"/>
                 </a:solidFill>
@@ -31937,7 +31933,7 @@
               </a:rPr>
               <a:t>②</a:t>
             </a:r>
-            <a:endParaRPr lang="en-US" sz="1300" dirty="0"/>
+            <a:endParaRPr lang="en-US" sz="1500" dirty="0"/>
           </a:p>
         </p:txBody>
       </p:sp>
@@ -32050,13 +32046,11 @@
         </p:nvSpPr>
         <p:spPr>
           <a:xfrm>
-            <a:off x="685800" y="3666744"/>
-            <a:ext cx="361188" cy="347472"/>
-          </a:xfrm>
-          <a:prstGeom prst="roundRect">
-            <a:avLst>
-              <a:gd name="adj" fmla="val 50000"/>
-            </a:avLst>
+            <a:off x="685800" y="3639312"/>
+            <a:ext cx="420624" cy="420624"/>
+          </a:xfrm>
+          <a:prstGeom prst="ellipse">
+            <a:avLst/>
           </a:prstGeom>
           <a:solidFill>
             <a:schemeClr val="accent1"/>
@@ -32072,8 +32066,8 @@
         </p:nvSpPr>
         <p:spPr>
           <a:xfrm>
-            <a:off x="685800" y="3666744"/>
-            <a:ext cx="361188" cy="347472"/>
+            <a:off x="685800" y="3639312"/>
+            <a:ext cx="420624" cy="420624"/>
           </a:xfrm>
           <a:prstGeom prst="rect">
             <a:avLst/>
@@ -32089,7 +32083,7 @@
               <a:buNone/>
             </a:pPr>
             <a:r>
-              <a:rPr lang="en-US" sz="1300" b="1" dirty="0">
+              <a:rPr lang="en-US" sz="1500" b="1" dirty="0">
                 <a:solidFill>
                   <a:schemeClr val="bg1"/>
                 </a:solidFill>
@@ -32099,7 +32093,7 @@
               </a:rPr>
               <a:t>뜻</a:t>
             </a:r>
-            <a:endParaRPr lang="en-US" sz="1300" dirty="0"/>
+            <a:endParaRPr lang="en-US" sz="1500" dirty="0"/>
           </a:p>
         </p:txBody>
       </p:sp>
@@ -32111,8 +32105,8 @@
         </p:nvSpPr>
         <p:spPr>
           <a:xfrm>
-            <a:off x="1175004" y="3657600"/>
-            <a:ext cx="10330891" cy="365760"/>
+            <a:off x="1252728" y="3657600"/>
+            <a:ext cx="10253167" cy="365760"/>
           </a:xfrm>
           <a:prstGeom prst="rect">
             <a:avLst/>
@@ -32180,7 +32174,7 @@
         <p:spPr>
           <a:xfrm>
             <a:off x="923544" y="4352544"/>
-            <a:ext cx="402336" cy="402336"/>
+            <a:ext cx="405079" cy="402336"/>
           </a:xfrm>
           <a:prstGeom prst="ellipse">
             <a:avLst/>
@@ -32200,7 +32194,7 @@
         <p:spPr>
           <a:xfrm>
             <a:off x="923544" y="4352544"/>
-            <a:ext cx="402336" cy="402336"/>
+            <a:ext cx="405079" cy="402336"/>
           </a:xfrm>
           <a:prstGeom prst="rect">
             <a:avLst/>
@@ -32216,7 +32210,7 @@
               <a:buNone/>
             </a:pPr>
             <a:r>
-              <a:rPr lang="en-US" sz="1300" b="1" dirty="0">
+              <a:rPr lang="en-US" sz="1500" b="1" dirty="0">
                 <a:solidFill>
                   <a:schemeClr val="bg1"/>
                 </a:solidFill>
@@ -32226,7 +32220,7 @@
               </a:rPr>
               <a:t>19</a:t>
             </a:r>
-            <a:endParaRPr lang="en-US" sz="1300" dirty="0"/>
+            <a:endParaRPr lang="en-US" sz="1500" dirty="0"/>
           </a:p>
         </p:txBody>
       </p:sp>
@@ -32369,7 +32363,7 @@
         <p:spPr>
           <a:xfrm>
             <a:off x="4609490" y="4352544"/>
-            <a:ext cx="402336" cy="402336"/>
+            <a:ext cx="405079" cy="402336"/>
           </a:xfrm>
           <a:prstGeom prst="ellipse">
             <a:avLst/>
@@ -32389,7 +32383,7 @@
         <p:spPr>
           <a:xfrm>
             <a:off x="4609490" y="4352544"/>
-            <a:ext cx="402336" cy="402336"/>
+            <a:ext cx="405079" cy="402336"/>
           </a:xfrm>
           <a:prstGeom prst="rect">
             <a:avLst/>
@@ -32405,7 +32399,7 @@
               <a:buNone/>
             </a:pPr>
             <a:r>
-              <a:rPr lang="en-US" sz="1300" b="1" dirty="0">
+              <a:rPr lang="en-US" sz="1500" b="1" dirty="0">
                 <a:solidFill>
                   <a:schemeClr val="bg1"/>
                 </a:solidFill>
@@ -32415,7 +32409,7 @@
               </a:rPr>
               <a:t>20</a:t>
             </a:r>
-            <a:endParaRPr lang="en-US" sz="1300" dirty="0"/>
+            <a:endParaRPr lang="en-US" sz="1500" dirty="0"/>
           </a:p>
         </p:txBody>
       </p:sp>
@@ -32558,7 +32552,7 @@
         <p:spPr>
           <a:xfrm>
             <a:off x="8295437" y="4352544"/>
-            <a:ext cx="402336" cy="402336"/>
+            <a:ext cx="405079" cy="402336"/>
           </a:xfrm>
           <a:prstGeom prst="ellipse">
             <a:avLst/>
@@ -32578,7 +32572,7 @@
         <p:spPr>
           <a:xfrm>
             <a:off x="8295437" y="4352544"/>
-            <a:ext cx="402336" cy="402336"/>
+            <a:ext cx="405079" cy="402336"/>
           </a:xfrm>
           <a:prstGeom prst="rect">
             <a:avLst/>
@@ -32594,7 +32588,7 @@
               <a:buNone/>
             </a:pPr>
             <a:r>
-              <a:rPr lang="en-US" sz="1300" b="1" dirty="0">
+              <a:rPr lang="en-US" sz="1500" b="1" dirty="0">
                 <a:solidFill>
                   <a:schemeClr val="bg1"/>
                 </a:solidFill>
@@ -32604,7 +32598,7 @@
               </a:rPr>
               <a:t>21</a:t>
             </a:r>
-            <a:endParaRPr lang="en-US" sz="1300" dirty="0"/>
+            <a:endParaRPr lang="en-US" sz="1500" dirty="0"/>
           </a:p>
         </p:txBody>
       </p:sp>
@@ -32932,7 +32926,7 @@
         <p:spPr>
           <a:xfrm>
             <a:off x="923544" y="2615184"/>
-            <a:ext cx="402336" cy="402336"/>
+            <a:ext cx="405079" cy="402336"/>
           </a:xfrm>
           <a:prstGeom prst="ellipse">
             <a:avLst/>
@@ -32952,7 +32946,7 @@
         <p:spPr>
           <a:xfrm>
             <a:off x="923544" y="2615184"/>
-            <a:ext cx="402336" cy="402336"/>
+            <a:ext cx="405079" cy="402336"/>
           </a:xfrm>
           <a:prstGeom prst="rect">
             <a:avLst/>
@@ -32968,7 +32962,7 @@
               <a:buNone/>
             </a:pPr>
             <a:r>
-              <a:rPr lang="en-US" sz="1300" b="1" dirty="0">
+              <a:rPr lang="en-US" sz="1500" b="1" dirty="0">
                 <a:solidFill>
                   <a:schemeClr val="bg1"/>
                 </a:solidFill>
@@ -32978,7 +32972,7 @@
               </a:rPr>
               <a:t>Q3</a:t>
             </a:r>
-            <a:endParaRPr lang="en-US" sz="1300" dirty="0"/>
+            <a:endParaRPr lang="en-US" sz="1500" dirty="0"/>
           </a:p>
         </p:txBody>
       </p:sp>
@@ -33170,7 +33164,7 @@
         <p:spPr>
           <a:xfrm>
             <a:off x="4609490" y="2615184"/>
-            <a:ext cx="402336" cy="402336"/>
+            <a:ext cx="405079" cy="402336"/>
           </a:xfrm>
           <a:prstGeom prst="ellipse">
             <a:avLst/>
@@ -33190,7 +33184,7 @@
         <p:spPr>
           <a:xfrm>
             <a:off x="4609490" y="2615184"/>
-            <a:ext cx="402336" cy="402336"/>
+            <a:ext cx="405079" cy="402336"/>
           </a:xfrm>
           <a:prstGeom prst="rect">
             <a:avLst/>
@@ -33206,7 +33200,7 @@
               <a:buNone/>
             </a:pPr>
             <a:r>
-              <a:rPr lang="en-US" sz="1300" b="1" dirty="0">
+              <a:rPr lang="en-US" sz="1500" b="1" dirty="0">
                 <a:solidFill>
                   <a:schemeClr val="bg1"/>
                 </a:solidFill>
@@ -33216,7 +33210,7 @@
               </a:rPr>
               <a:t>Q4</a:t>
             </a:r>
-            <a:endParaRPr lang="en-US" sz="1300" dirty="0"/>
+            <a:endParaRPr lang="en-US" sz="1500" dirty="0"/>
           </a:p>
         </p:txBody>
       </p:sp>
@@ -33408,7 +33402,7 @@
         <p:spPr>
           <a:xfrm>
             <a:off x="8295437" y="2615184"/>
-            <a:ext cx="402336" cy="402336"/>
+            <a:ext cx="405079" cy="402336"/>
           </a:xfrm>
           <a:prstGeom prst="ellipse">
             <a:avLst/>
@@ -33428,7 +33422,7 @@
         <p:spPr>
           <a:xfrm>
             <a:off x="8295437" y="2615184"/>
-            <a:ext cx="402336" cy="402336"/>
+            <a:ext cx="405079" cy="402336"/>
           </a:xfrm>
           <a:prstGeom prst="rect">
             <a:avLst/>
@@ -33444,7 +33438,7 @@
               <a:buNone/>
             </a:pPr>
             <a:r>
-              <a:rPr lang="en-US" sz="1300" b="1" dirty="0">
+              <a:rPr lang="en-US" sz="1500" b="1" dirty="0">
                 <a:solidFill>
                   <a:schemeClr val="bg1"/>
                 </a:solidFill>
@@ -33454,7 +33448,7 @@
               </a:rPr>
               <a:t>Q5</a:t>
             </a:r>
-            <a:endParaRPr lang="en-US" sz="1300" dirty="0"/>
+            <a:endParaRPr lang="en-US" sz="1500" dirty="0"/>
           </a:p>
         </p:txBody>
       </p:sp>
@@ -34333,13 +34327,11 @@
         </p:nvSpPr>
         <p:spPr>
           <a:xfrm>
-            <a:off x="685800" y="2734056"/>
-            <a:ext cx="375453" cy="347472"/>
-          </a:xfrm>
-          <a:prstGeom prst="roundRect">
-            <a:avLst>
-              <a:gd name="adj" fmla="val 50000"/>
-            </a:avLst>
+            <a:off x="685800" y="2706624"/>
+            <a:ext cx="420624" cy="420624"/>
+          </a:xfrm>
+          <a:prstGeom prst="ellipse">
+            <a:avLst/>
           </a:prstGeom>
           <a:solidFill>
             <a:schemeClr val="accent1"/>
@@ -34355,8 +34347,8 @@
         </p:nvSpPr>
         <p:spPr>
           <a:xfrm>
-            <a:off x="685800" y="2734056"/>
-            <a:ext cx="375453" cy="347472"/>
+            <a:off x="685800" y="2706624"/>
+            <a:ext cx="420624" cy="420624"/>
           </a:xfrm>
           <a:prstGeom prst="rect">
             <a:avLst/>
@@ -34372,7 +34364,7 @@
               <a:buNone/>
             </a:pPr>
             <a:r>
-              <a:rPr lang="en-US" sz="1300" b="1" dirty="0">
+              <a:rPr lang="en-US" sz="1500" b="1" dirty="0">
                 <a:solidFill>
                   <a:schemeClr val="bg1"/>
                 </a:solidFill>
@@ -34382,7 +34374,7 @@
               </a:rPr>
               <a:t>23</a:t>
             </a:r>
-            <a:endParaRPr lang="en-US" sz="1300" dirty="0"/>
+            <a:endParaRPr lang="en-US" sz="1500" dirty="0"/>
           </a:p>
         </p:txBody>
       </p:sp>
@@ -34394,8 +34386,8 @@
         </p:nvSpPr>
         <p:spPr>
           <a:xfrm>
-            <a:off x="1189269" y="2724912"/>
-            <a:ext cx="10316627" cy="365760"/>
+            <a:off x="1255471" y="2724912"/>
+            <a:ext cx="10250424" cy="365760"/>
           </a:xfrm>
           <a:prstGeom prst="rect">
             <a:avLst/>
@@ -35111,7 +35103,7 @@
               <a:buNone/>
             </a:pPr>
             <a:r>
-              <a:rPr lang="en-US" sz="1300" b="1" dirty="0">
+              <a:rPr lang="en-US" sz="1500" b="1" dirty="0">
                 <a:solidFill>
                   <a:schemeClr val="bg1"/>
                 </a:solidFill>
@@ -35121,7 +35113,7 @@
               </a:rPr>
               <a:t>①</a:t>
             </a:r>
-            <a:endParaRPr lang="en-US" sz="1300" dirty="0"/>
+            <a:endParaRPr lang="en-US" sz="1500" dirty="0"/>
           </a:p>
         </p:txBody>
       </p:sp>
@@ -35339,7 +35331,7 @@
               <a:buNone/>
             </a:pPr>
             <a:r>
-              <a:rPr lang="en-US" sz="1300" b="1" dirty="0">
+              <a:rPr lang="en-US" sz="1500" b="1" dirty="0">
                 <a:solidFill>
                   <a:schemeClr val="bg1"/>
                 </a:solidFill>
@@ -35349,7 +35341,7 @@
               </a:rPr>
               <a:t>②</a:t>
             </a:r>
-            <a:endParaRPr lang="en-US" sz="1300" dirty="0"/>
+            <a:endParaRPr lang="en-US" sz="1500" dirty="0"/>
           </a:p>
         </p:txBody>
       </p:sp>
@@ -35567,7 +35559,7 @@
               <a:buNone/>
             </a:pPr>
             <a:r>
-              <a:rPr lang="en-US" sz="1300" b="1" dirty="0">
+              <a:rPr lang="en-US" sz="1500" b="1" dirty="0">
                 <a:solidFill>
                   <a:schemeClr val="bg1"/>
                 </a:solidFill>
@@ -35577,7 +35569,7 @@
               </a:rPr>
               <a:t>③</a:t>
             </a:r>
-            <a:endParaRPr lang="en-US" sz="1300" dirty="0"/>
+            <a:endParaRPr lang="en-US" sz="1500" dirty="0"/>
           </a:p>
         </p:txBody>
       </p:sp>
@@ -35729,13 +35721,11 @@
         </p:nvSpPr>
         <p:spPr>
           <a:xfrm>
-            <a:off x="685800" y="4434840"/>
-            <a:ext cx="375453" cy="347472"/>
-          </a:xfrm>
-          <a:prstGeom prst="roundRect">
-            <a:avLst>
-              <a:gd name="adj" fmla="val 50000"/>
-            </a:avLst>
+            <a:off x="685800" y="4407408"/>
+            <a:ext cx="420624" cy="420624"/>
+          </a:xfrm>
+          <a:prstGeom prst="ellipse">
+            <a:avLst/>
           </a:prstGeom>
           <a:solidFill>
             <a:schemeClr val="accent1"/>
@@ -35751,8 +35741,8 @@
         </p:nvSpPr>
         <p:spPr>
           <a:xfrm>
-            <a:off x="685800" y="4434840"/>
-            <a:ext cx="375453" cy="347472"/>
+            <a:off x="685800" y="4407408"/>
+            <a:ext cx="420624" cy="420624"/>
           </a:xfrm>
           <a:prstGeom prst="rect">
             <a:avLst/>
@@ -35768,7 +35758,7 @@
               <a:buNone/>
             </a:pPr>
             <a:r>
-              <a:rPr lang="en-US" sz="1300" b="1" dirty="0">
+              <a:rPr lang="en-US" sz="1500" b="1" dirty="0">
                 <a:solidFill>
                   <a:schemeClr val="bg1"/>
                 </a:solidFill>
@@ -35778,7 +35768,7 @@
               </a:rPr>
               <a:t>26</a:t>
             </a:r>
-            <a:endParaRPr lang="en-US" sz="1300" dirty="0"/>
+            <a:endParaRPr lang="en-US" sz="1500" dirty="0"/>
           </a:p>
         </p:txBody>
       </p:sp>
@@ -35790,8 +35780,8 @@
         </p:nvSpPr>
         <p:spPr>
           <a:xfrm>
-            <a:off x="1189269" y="4425696"/>
-            <a:ext cx="10316627" cy="365760"/>
+            <a:off x="1255471" y="4425696"/>
+            <a:ext cx="10250424" cy="365760"/>
           </a:xfrm>
           <a:prstGeom prst="rect">
             <a:avLst/>
@@ -36300,7 +36290,7 @@
               <a:buNone/>
             </a:pPr>
             <a:r>
-              <a:rPr lang="en-US" sz="1700" b="1" dirty="0">
+              <a:rPr lang="en-US" sz="2000" b="1" dirty="0">
                 <a:solidFill>
                   <a:schemeClr val="bg1"/>
                 </a:solidFill>
@@ -36310,7 +36300,7 @@
               </a:rPr>
               <a:t>①</a:t>
             </a:r>
-            <a:endParaRPr lang="en-US" sz="1700" dirty="0"/>
+            <a:endParaRPr lang="en-US" sz="2000" dirty="0"/>
           </a:p>
         </p:txBody>
       </p:sp>
@@ -36567,7 +36557,7 @@
               <a:buNone/>
             </a:pPr>
             <a:r>
-              <a:rPr lang="en-US" sz="1700" b="1" dirty="0">
+              <a:rPr lang="en-US" sz="2000" b="1" dirty="0">
                 <a:solidFill>
                   <a:schemeClr val="bg1"/>
                 </a:solidFill>
@@ -36577,7 +36567,7 @@
               </a:rPr>
               <a:t>②</a:t>
             </a:r>
-            <a:endParaRPr lang="en-US" sz="1700" dirty="0"/>
+            <a:endParaRPr lang="en-US" sz="2000" dirty="0"/>
           </a:p>
         </p:txBody>
       </p:sp>
@@ -37123,7 +37113,7 @@
         <p:spPr>
           <a:xfrm>
             <a:off x="923544" y="3273552"/>
-            <a:ext cx="402336" cy="402336"/>
+            <a:ext cx="405079" cy="402336"/>
           </a:xfrm>
           <a:prstGeom prst="ellipse">
             <a:avLst/>
@@ -37143,7 +37133,7 @@
         <p:spPr>
           <a:xfrm>
             <a:off x="923544" y="3273552"/>
-            <a:ext cx="402336" cy="402336"/>
+            <a:ext cx="405079" cy="402336"/>
           </a:xfrm>
           <a:prstGeom prst="rect">
             <a:avLst/>
@@ -37159,7 +37149,7 @@
               <a:buNone/>
             </a:pPr>
             <a:r>
-              <a:rPr lang="en-US" sz="1300" b="1" dirty="0">
+              <a:rPr lang="en-US" sz="1500" b="1" dirty="0">
                 <a:solidFill>
                   <a:schemeClr val="bg1"/>
                 </a:solidFill>
@@ -37169,7 +37159,7 @@
               </a:rPr>
               <a:t>29</a:t>
             </a:r>
-            <a:endParaRPr lang="en-US" sz="1300" dirty="0"/>
+            <a:endParaRPr lang="en-US" sz="1500" dirty="0"/>
           </a:p>
         </p:txBody>
       </p:sp>
@@ -37292,7 +37282,7 @@
         <p:spPr>
           <a:xfrm>
             <a:off x="4609490" y="3273552"/>
-            <a:ext cx="539496" cy="402336"/>
+            <a:ext cx="594360" cy="402336"/>
           </a:xfrm>
           <a:prstGeom prst="roundRect">
             <a:avLst>
@@ -37314,7 +37304,7 @@
         <p:spPr>
           <a:xfrm>
             <a:off x="4609490" y="3273552"/>
-            <a:ext cx="539496" cy="402336"/>
+            <a:ext cx="594360" cy="402336"/>
           </a:xfrm>
           <a:prstGeom prst="rect">
             <a:avLst/>
@@ -37330,7 +37320,7 @@
               <a:buNone/>
             </a:pPr>
             <a:r>
-              <a:rPr lang="en-US" sz="1300" b="1" dirty="0">
+              <a:rPr lang="en-US" sz="1500" b="1" dirty="0">
                 <a:solidFill>
                   <a:schemeClr val="bg1"/>
                 </a:solidFill>
@@ -37340,7 +37330,7 @@
               </a:rPr>
               <a:t>기능</a:t>
             </a:r>
-            <a:endParaRPr lang="en-US" sz="1300" dirty="0"/>
+            <a:endParaRPr lang="en-US" sz="1500" dirty="0"/>
           </a:p>
         </p:txBody>
       </p:sp>
@@ -37503,7 +37493,7 @@
         <p:spPr>
           <a:xfrm>
             <a:off x="8295437" y="3273552"/>
-            <a:ext cx="402336" cy="402336"/>
+            <a:ext cx="405079" cy="402336"/>
           </a:xfrm>
           <a:prstGeom prst="ellipse">
             <a:avLst/>
@@ -37523,7 +37513,7 @@
         <p:spPr>
           <a:xfrm>
             <a:off x="8295437" y="3273552"/>
-            <a:ext cx="402336" cy="402336"/>
+            <a:ext cx="405079" cy="402336"/>
           </a:xfrm>
           <a:prstGeom prst="rect">
             <a:avLst/>
@@ -37539,7 +37529,7 @@
               <a:buNone/>
             </a:pPr>
             <a:r>
-              <a:rPr lang="en-US" sz="1300" b="1" dirty="0">
+              <a:rPr lang="en-US" sz="1500" b="1" dirty="0">
                 <a:solidFill>
                   <a:schemeClr val="bg1"/>
                 </a:solidFill>
@@ -37549,7 +37539,7 @@
               </a:rPr>
               <a:t>30</a:t>
             </a:r>
-            <a:endParaRPr lang="en-US" sz="1300" dirty="0"/>
+            <a:endParaRPr lang="en-US" sz="1500" dirty="0"/>
           </a:p>
         </p:txBody>
       </p:sp>
@@ -38523,8 +38513,8 @@
         </p:nvSpPr>
         <p:spPr>
           <a:xfrm>
-            <a:off x="685800" y="3520440"/>
-            <a:ext cx="664312" cy="347472"/>
+            <a:off x="685800" y="3493008"/>
+            <a:ext cx="738378" cy="420624"/>
           </a:xfrm>
           <a:prstGeom prst="roundRect">
             <a:avLst>
@@ -38545,8 +38535,8 @@
         </p:nvSpPr>
         <p:spPr>
           <a:xfrm>
-            <a:off x="685800" y="3520440"/>
-            <a:ext cx="664312" cy="347472"/>
+            <a:off x="685800" y="3493008"/>
+            <a:ext cx="738378" cy="420624"/>
           </a:xfrm>
           <a:prstGeom prst="rect">
             <a:avLst/>
@@ -38562,7 +38552,7 @@
               <a:buNone/>
             </a:pPr>
             <a:r>
-              <a:rPr lang="en-US" sz="1300" b="1" dirty="0">
+              <a:rPr lang="en-US" sz="1500" b="1" dirty="0">
                 <a:solidFill>
                   <a:schemeClr val="bg1"/>
                 </a:solidFill>
@@ -38572,7 +38562,7 @@
               </a:rPr>
               <a:t>31~33</a:t>
             </a:r>
-            <a:endParaRPr lang="en-US" sz="1300" dirty="0"/>
+            <a:endParaRPr lang="en-US" sz="1500" dirty="0"/>
           </a:p>
         </p:txBody>
       </p:sp>
@@ -38584,8 +38574,8 @@
         </p:nvSpPr>
         <p:spPr>
           <a:xfrm>
-            <a:off x="1478128" y="3511296"/>
-            <a:ext cx="10027768" cy="365760"/>
+            <a:off x="1588770" y="3511296"/>
+            <a:ext cx="9917125" cy="365760"/>
           </a:xfrm>
           <a:prstGeom prst="rect">
             <a:avLst/>
@@ -38689,7 +38679,7 @@
               <a:buNone/>
             </a:pPr>
             <a:r>
-              <a:rPr lang="en-US" sz="1300" b="1" dirty="0">
+              <a:rPr lang="en-US" sz="1500" b="1" dirty="0">
                 <a:solidFill>
                   <a:schemeClr val="bg1"/>
                 </a:solidFill>
@@ -38699,7 +38689,7 @@
               </a:rPr>
               <a:t>✕</a:t>
             </a:r>
-            <a:endParaRPr lang="en-US" sz="1300" dirty="0"/>
+            <a:endParaRPr lang="en-US" sz="1500" dirty="0"/>
           </a:p>
         </p:txBody>
       </p:sp>
@@ -38858,7 +38848,7 @@
               <a:buNone/>
             </a:pPr>
             <a:r>
-              <a:rPr lang="en-US" sz="1300" b="1" dirty="0">
+              <a:rPr lang="en-US" sz="1500" b="1" dirty="0">
                 <a:solidFill>
                   <a:schemeClr val="bg1"/>
                 </a:solidFill>
@@ -38868,7 +38858,7 @@
               </a:rPr>
               <a:t>✕</a:t>
             </a:r>
-            <a:endParaRPr lang="en-US" sz="1300" dirty="0"/>
+            <a:endParaRPr lang="en-US" sz="1500" dirty="0"/>
           </a:p>
         </p:txBody>
       </p:sp>
@@ -39027,7 +39017,7 @@
               <a:buNone/>
             </a:pPr>
             <a:r>
-              <a:rPr lang="en-US" sz="1300" b="1" dirty="0">
+              <a:rPr lang="en-US" sz="1500" b="1" dirty="0">
                 <a:solidFill>
                   <a:schemeClr val="bg1"/>
                 </a:solidFill>
@@ -39037,7 +39027,7 @@
               </a:rPr>
               <a:t>✕</a:t>
             </a:r>
-            <a:endParaRPr lang="en-US" sz="1300" dirty="0"/>
+            <a:endParaRPr lang="en-US" sz="1500" dirty="0"/>
           </a:p>
         </p:txBody>
       </p:sp>
@@ -39196,7 +39186,7 @@
               <a:buNone/>
             </a:pPr>
             <a:r>
-              <a:rPr lang="en-US" sz="1300" b="1" dirty="0">
+              <a:rPr lang="en-US" sz="1500" b="1" dirty="0">
                 <a:solidFill>
                   <a:schemeClr val="bg1"/>
                 </a:solidFill>
@@ -39206,7 +39196,7 @@
               </a:rPr>
               <a:t>○</a:t>
             </a:r>
-            <a:endParaRPr lang="en-US" sz="1300" dirty="0"/>
+            <a:endParaRPr lang="en-US" sz="1500" dirty="0"/>
           </a:p>
         </p:txBody>
       </p:sp>
@@ -39553,7 +39543,7 @@
         <p:spPr>
           <a:xfrm>
             <a:off x="923544" y="2615184"/>
-            <a:ext cx="402336" cy="402336"/>
+            <a:ext cx="405079" cy="402336"/>
           </a:xfrm>
           <a:prstGeom prst="ellipse">
             <a:avLst/>
@@ -39573,7 +39563,7 @@
         <p:spPr>
           <a:xfrm>
             <a:off x="923544" y="2615184"/>
-            <a:ext cx="402336" cy="402336"/>
+            <a:ext cx="405079" cy="402336"/>
           </a:xfrm>
           <a:prstGeom prst="rect">
             <a:avLst/>
@@ -39589,7 +39579,7 @@
               <a:buNone/>
             </a:pPr>
             <a:r>
-              <a:rPr lang="en-US" sz="1300" b="1" dirty="0">
+              <a:rPr lang="en-US" sz="1500" b="1" dirty="0">
                 <a:solidFill>
                   <a:schemeClr val="bg1"/>
                 </a:solidFill>
@@ -39599,7 +39589,7 @@
               </a:rPr>
               <a:t>Q6</a:t>
             </a:r>
-            <a:endParaRPr lang="en-US" sz="1300" dirty="0"/>
+            <a:endParaRPr lang="en-US" sz="1500" dirty="0"/>
           </a:p>
         </p:txBody>
       </p:sp>
@@ -39762,7 +39752,7 @@
         <p:spPr>
           <a:xfrm>
             <a:off x="4609490" y="2615184"/>
-            <a:ext cx="402336" cy="402336"/>
+            <a:ext cx="405079" cy="402336"/>
           </a:xfrm>
           <a:prstGeom prst="ellipse">
             <a:avLst/>
@@ -39782,7 +39772,7 @@
         <p:spPr>
           <a:xfrm>
             <a:off x="4609490" y="2615184"/>
-            <a:ext cx="402336" cy="402336"/>
+            <a:ext cx="405079" cy="402336"/>
           </a:xfrm>
           <a:prstGeom prst="rect">
             <a:avLst/>
@@ -39798,7 +39788,7 @@
               <a:buNone/>
             </a:pPr>
             <a:r>
-              <a:rPr lang="en-US" sz="1300" b="1" dirty="0">
+              <a:rPr lang="en-US" sz="1500" b="1" dirty="0">
                 <a:solidFill>
                   <a:schemeClr val="bg1"/>
                 </a:solidFill>
@@ -39808,7 +39798,7 @@
               </a:rPr>
               <a:t>Q7</a:t>
             </a:r>
-            <a:endParaRPr lang="en-US" sz="1300" dirty="0"/>
+            <a:endParaRPr lang="en-US" sz="1500" dirty="0"/>
           </a:p>
         </p:txBody>
       </p:sp>
@@ -40000,7 +39990,7 @@
         <p:spPr>
           <a:xfrm>
             <a:off x="8295437" y="2615184"/>
-            <a:ext cx="402336" cy="402336"/>
+            <a:ext cx="405079" cy="402336"/>
           </a:xfrm>
           <a:prstGeom prst="ellipse">
             <a:avLst/>
@@ -40020,7 +40010,7 @@
         <p:spPr>
           <a:xfrm>
             <a:off x="8295437" y="2615184"/>
-            <a:ext cx="402336" cy="402336"/>
+            <a:ext cx="405079" cy="402336"/>
           </a:xfrm>
           <a:prstGeom prst="rect">
             <a:avLst/>
@@ -40036,7 +40026,7 @@
               <a:buNone/>
             </a:pPr>
             <a:r>
-              <a:rPr lang="en-US" sz="1300" b="1" dirty="0">
+              <a:rPr lang="en-US" sz="1500" b="1" dirty="0">
                 <a:solidFill>
                   <a:schemeClr val="bg1"/>
                 </a:solidFill>
@@ -40046,7 +40036,7 @@
               </a:rPr>
               <a:t>Q8</a:t>
             </a:r>
-            <a:endParaRPr lang="en-US" sz="1300" dirty="0"/>
+            <a:endParaRPr lang="en-US" sz="1500" dirty="0"/>
           </a:p>
         </p:txBody>
       </p:sp>
@@ -40421,7 +40411,7 @@
                         <a:buNone/>
                       </a:pPr>
                       <a:r>
-                        <a:rPr lang="en-US" sz="1300" b="1" dirty="0">
+                        <a:rPr lang="en-US" sz="1600" b="1" dirty="0">
                           <a:solidFill>
                             <a:schemeClr val="bg1"/>
                           </a:solidFill>
@@ -40431,7 +40421,7 @@
                         </a:rPr>
                         <a:t>주차</a:t>
                       </a:r>
-                      <a:endParaRPr lang="en-US" sz="1300" dirty="0">
+                      <a:endParaRPr lang="en-US" sz="1600" dirty="0">
                         <a:latin typeface="맑은 고딕" charset="0"/>
                         <a:ea typeface="맑은 고딕" charset="0"/>
                         <a:cs typeface="맑은 고딕" charset="0"/>
@@ -40471,7 +40461,7 @@
                         <a:buNone/>
                       </a:pPr>
                       <a:r>
-                        <a:rPr lang="en-US" sz="1300" b="1" dirty="0">
+                        <a:rPr lang="en-US" sz="1600" b="1" dirty="0">
                           <a:solidFill>
                             <a:schemeClr val="bg1"/>
                           </a:solidFill>
@@ -40481,7 +40471,7 @@
                         </a:rPr>
                         <a:t>단원</a:t>
                       </a:r>
-                      <a:endParaRPr lang="en-US" sz="1300" dirty="0">
+                      <a:endParaRPr lang="en-US" sz="1600" dirty="0">
                         <a:latin typeface="맑은 고딕" charset="0"/>
                         <a:ea typeface="맑은 고딕" charset="0"/>
                         <a:cs typeface="맑은 고딕" charset="0"/>
@@ -40521,7 +40511,7 @@
                         <a:buNone/>
                       </a:pPr>
                       <a:r>
-                        <a:rPr lang="en-US" sz="1300" b="1" dirty="0">
+                        <a:rPr lang="en-US" sz="1600" b="1" dirty="0">
                           <a:solidFill>
                             <a:schemeClr val="bg1"/>
                           </a:solidFill>
@@ -40531,7 +40521,7 @@
                         </a:rPr>
                         <a:t>본문</a:t>
                       </a:r>
-                      <a:endParaRPr lang="en-US" sz="1300" dirty="0">
+                      <a:endParaRPr lang="en-US" sz="1600" dirty="0">
                         <a:latin typeface="맑은 고딕" charset="0"/>
                         <a:ea typeface="맑은 고딕" charset="0"/>
                         <a:cs typeface="맑은 고딕" charset="0"/>
@@ -40571,7 +40561,7 @@
                         <a:buNone/>
                       </a:pPr>
                       <a:r>
-                        <a:rPr lang="en-US" sz="1300" b="1" dirty="0">
+                        <a:rPr lang="en-US" sz="1600" b="1" dirty="0">
                           <a:solidFill>
                             <a:schemeClr val="bg1"/>
                           </a:solidFill>
@@ -40581,7 +40571,7 @@
                         </a:rPr>
                         <a:t>과제</a:t>
                       </a:r>
-                      <a:endParaRPr lang="en-US" sz="1300" dirty="0">
+                      <a:endParaRPr lang="en-US" sz="1600" dirty="0">
                         <a:latin typeface="맑은 고딕" charset="0"/>
                         <a:ea typeface="맑은 고딕" charset="0"/>
                         <a:cs typeface="맑은 고딕" charset="0"/>
@@ -42514,13 +42504,11 @@
         </p:nvSpPr>
         <p:spPr>
           <a:xfrm>
-            <a:off x="685800" y="3282696"/>
-            <a:ext cx="375453" cy="347472"/>
-          </a:xfrm>
-          <a:prstGeom prst="roundRect">
-            <a:avLst>
-              <a:gd name="adj" fmla="val 50000"/>
-            </a:avLst>
+            <a:off x="685800" y="3255264"/>
+            <a:ext cx="420624" cy="420624"/>
+          </a:xfrm>
+          <a:prstGeom prst="ellipse">
+            <a:avLst/>
           </a:prstGeom>
           <a:solidFill>
             <a:schemeClr val="accent1"/>
@@ -42536,8 +42524,8 @@
         </p:nvSpPr>
         <p:spPr>
           <a:xfrm>
-            <a:off x="685800" y="3282696"/>
-            <a:ext cx="375453" cy="347472"/>
+            <a:off x="685800" y="3255264"/>
+            <a:ext cx="420624" cy="420624"/>
           </a:xfrm>
           <a:prstGeom prst="rect">
             <a:avLst/>
@@ -42553,7 +42541,7 @@
               <a:buNone/>
             </a:pPr>
             <a:r>
-              <a:rPr lang="en-US" sz="1300" b="1" dirty="0">
+              <a:rPr lang="en-US" sz="1500" b="1" dirty="0">
                 <a:solidFill>
                   <a:schemeClr val="bg1"/>
                 </a:solidFill>
@@ -42563,7 +42551,7 @@
               </a:rPr>
               <a:t>37</a:t>
             </a:r>
-            <a:endParaRPr lang="en-US" sz="1300" dirty="0"/>
+            <a:endParaRPr lang="en-US" sz="1500" dirty="0"/>
           </a:p>
         </p:txBody>
       </p:sp>
@@ -42575,8 +42563,8 @@
         </p:nvSpPr>
         <p:spPr>
           <a:xfrm>
-            <a:off x="1189269" y="3273552"/>
-            <a:ext cx="10316627" cy="365760"/>
+            <a:off x="1255471" y="3273552"/>
+            <a:ext cx="10250424" cy="365760"/>
           </a:xfrm>
           <a:prstGeom prst="rect">
             <a:avLst/>
@@ -43881,7 +43869,7 @@
               <a:buNone/>
             </a:pPr>
             <a:r>
-              <a:rPr lang="en-US" sz="1300" b="1" dirty="0">
+              <a:rPr lang="en-US" sz="1500" b="1" dirty="0">
                 <a:solidFill>
                   <a:schemeClr val="bg1"/>
                 </a:solidFill>
@@ -43891,7 +43879,7 @@
               </a:rPr>
               <a:t>①</a:t>
             </a:r>
-            <a:endParaRPr lang="en-US" sz="1300" dirty="0"/>
+            <a:endParaRPr lang="en-US" sz="1500" dirty="0"/>
           </a:p>
         </p:txBody>
       </p:sp>
@@ -44090,7 +44078,7 @@
               <a:buNone/>
             </a:pPr>
             <a:r>
-              <a:rPr lang="en-US" sz="1300" b="1" dirty="0">
+              <a:rPr lang="en-US" sz="1500" b="1" dirty="0">
                 <a:solidFill>
                   <a:schemeClr val="bg1"/>
                 </a:solidFill>
@@ -44100,7 +44088,7 @@
               </a:rPr>
               <a:t>②</a:t>
             </a:r>
-            <a:endParaRPr lang="en-US" sz="1300" dirty="0"/>
+            <a:endParaRPr lang="en-US" sz="1500" dirty="0"/>
           </a:p>
         </p:txBody>
       </p:sp>
@@ -44299,7 +44287,7 @@
               <a:buNone/>
             </a:pPr>
             <a:r>
-              <a:rPr lang="en-US" sz="1300" b="1" dirty="0">
+              <a:rPr lang="en-US" sz="1500" b="1" dirty="0">
                 <a:solidFill>
                   <a:schemeClr val="bg1"/>
                 </a:solidFill>
@@ -44309,7 +44297,7 @@
               </a:rPr>
               <a:t>③</a:t>
             </a:r>
-            <a:endParaRPr lang="en-US" sz="1300" dirty="0"/>
+            <a:endParaRPr lang="en-US" sz="1500" dirty="0"/>
           </a:p>
         </p:txBody>
       </p:sp>
@@ -44696,7 +44684,7 @@
         <p:spPr>
           <a:xfrm>
             <a:off x="923544" y="2615184"/>
-            <a:ext cx="402336" cy="402336"/>
+            <a:ext cx="405079" cy="402336"/>
           </a:xfrm>
           <a:prstGeom prst="ellipse">
             <a:avLst/>
@@ -44716,7 +44704,7 @@
         <p:spPr>
           <a:xfrm>
             <a:off x="923544" y="2615184"/>
-            <a:ext cx="402336" cy="402336"/>
+            <a:ext cx="405079" cy="402336"/>
           </a:xfrm>
           <a:prstGeom prst="rect">
             <a:avLst/>
@@ -44732,7 +44720,7 @@
               <a:buNone/>
             </a:pPr>
             <a:r>
-              <a:rPr lang="en-US" sz="1300" b="1" dirty="0">
+              <a:rPr lang="en-US" sz="1500" b="1" dirty="0">
                 <a:solidFill>
                   <a:schemeClr val="bg1"/>
                 </a:solidFill>
@@ -44742,7 +44730,7 @@
               </a:rPr>
               <a:t>Q9</a:t>
             </a:r>
-            <a:endParaRPr lang="en-US" sz="1300" dirty="0"/>
+            <a:endParaRPr lang="en-US" sz="1500" dirty="0"/>
           </a:p>
         </p:txBody>
       </p:sp>
@@ -44934,7 +44922,7 @@
         <p:spPr>
           <a:xfrm>
             <a:off x="4609490" y="2615184"/>
-            <a:ext cx="471739" cy="402336"/>
+            <a:ext cx="516179" cy="402336"/>
           </a:xfrm>
           <a:prstGeom prst="roundRect">
             <a:avLst>
@@ -44956,7 +44944,7 @@
         <p:spPr>
           <a:xfrm>
             <a:off x="4609490" y="2615184"/>
-            <a:ext cx="471739" cy="402336"/>
+            <a:ext cx="516179" cy="402336"/>
           </a:xfrm>
           <a:prstGeom prst="rect">
             <a:avLst/>
@@ -44972,7 +44960,7 @@
               <a:buNone/>
             </a:pPr>
             <a:r>
-              <a:rPr lang="en-US" sz="1300" b="1" dirty="0">
+              <a:rPr lang="en-US" sz="1500" b="1" dirty="0">
                 <a:solidFill>
                   <a:schemeClr val="bg1"/>
                 </a:solidFill>
@@ -44982,7 +44970,7 @@
               </a:rPr>
               <a:t>Q10</a:t>
             </a:r>
-            <a:endParaRPr lang="en-US" sz="1300" dirty="0"/>
+            <a:endParaRPr lang="en-US" sz="1500" dirty="0"/>
           </a:p>
         </p:txBody>
       </p:sp>
@@ -45174,7 +45162,7 @@
         <p:spPr>
           <a:xfrm>
             <a:off x="8295437" y="2615184"/>
-            <a:ext cx="471739" cy="402336"/>
+            <a:ext cx="516179" cy="402336"/>
           </a:xfrm>
           <a:prstGeom prst="roundRect">
             <a:avLst>
@@ -45196,7 +45184,7 @@
         <p:spPr>
           <a:xfrm>
             <a:off x="8295437" y="2615184"/>
-            <a:ext cx="471739" cy="402336"/>
+            <a:ext cx="516179" cy="402336"/>
           </a:xfrm>
           <a:prstGeom prst="rect">
             <a:avLst/>
@@ -45212,7 +45200,7 @@
               <a:buNone/>
             </a:pPr>
             <a:r>
-              <a:rPr lang="en-US" sz="1300" b="1" dirty="0">
+              <a:rPr lang="en-US" sz="1500" b="1" dirty="0">
                 <a:solidFill>
                   <a:schemeClr val="bg1"/>
                 </a:solidFill>
@@ -45222,7 +45210,7 @@
               </a:rPr>
               <a:t>Q11</a:t>
             </a:r>
-            <a:endParaRPr lang="en-US" sz="1300" dirty="0"/>
+            <a:endParaRPr lang="en-US" sz="1500" dirty="0"/>
           </a:p>
         </p:txBody>
       </p:sp>
@@ -45613,7 +45601,7 @@
               <a:buNone/>
             </a:pPr>
             <a:r>
-              <a:rPr lang="en-US" sz="1300" b="1" dirty="0">
+              <a:rPr lang="en-US" sz="1500" b="1" dirty="0">
                 <a:solidFill>
                   <a:schemeClr val="bg1"/>
                 </a:solidFill>
@@ -45623,7 +45611,7 @@
               </a:rPr>
               <a:t>1</a:t>
             </a:r>
-            <a:endParaRPr lang="en-US" sz="1300" dirty="0"/>
+            <a:endParaRPr lang="en-US" sz="1500" dirty="0"/>
           </a:p>
         </p:txBody>
       </p:sp>
@@ -45802,7 +45790,7 @@
               <a:buNone/>
             </a:pPr>
             <a:r>
-              <a:rPr lang="en-US" sz="1300" b="1" dirty="0">
+              <a:rPr lang="en-US" sz="1500" b="1" dirty="0">
                 <a:solidFill>
                   <a:schemeClr val="bg1"/>
                 </a:solidFill>
@@ -45812,7 +45800,7 @@
               </a:rPr>
               <a:t>2</a:t>
             </a:r>
-            <a:endParaRPr lang="en-US" sz="1300" dirty="0"/>
+            <a:endParaRPr lang="en-US" sz="1500" dirty="0"/>
           </a:p>
         </p:txBody>
       </p:sp>
@@ -45925,8 +45913,8 @@
         </p:nvSpPr>
         <p:spPr>
           <a:xfrm>
-            <a:off x="685800" y="3886200"/>
-            <a:ext cx="347472" cy="347472"/>
+            <a:off x="685800" y="3858768"/>
+            <a:ext cx="420624" cy="420624"/>
           </a:xfrm>
           <a:prstGeom prst="ellipse">
             <a:avLst/>
@@ -45945,8 +45933,8 @@
         </p:nvSpPr>
         <p:spPr>
           <a:xfrm>
-            <a:off x="685800" y="3886200"/>
-            <a:ext cx="347472" cy="347472"/>
+            <a:off x="685800" y="3858768"/>
+            <a:ext cx="420624" cy="420624"/>
           </a:xfrm>
           <a:prstGeom prst="rect">
             <a:avLst/>
@@ -45962,7 +45950,7 @@
               <a:buNone/>
             </a:pPr>
             <a:r>
-              <a:rPr lang="en-US" sz="1300" b="1" dirty="0">
+              <a:rPr lang="en-US" sz="1500" b="1" dirty="0">
                 <a:solidFill>
                   <a:schemeClr val="bg1"/>
                 </a:solidFill>
@@ -45972,7 +45960,7 @@
               </a:rPr>
               <a:t>3</a:t>
             </a:r>
-            <a:endParaRPr lang="en-US" sz="1300" dirty="0"/>
+            <a:endParaRPr lang="en-US" sz="1500" dirty="0"/>
           </a:p>
         </p:txBody>
       </p:sp>
@@ -45984,8 +45972,8 @@
         </p:nvSpPr>
         <p:spPr>
           <a:xfrm>
-            <a:off x="1161288" y="3877056"/>
-            <a:ext cx="10344607" cy="365760"/>
+            <a:off x="1252728" y="3877056"/>
+            <a:ext cx="10253167" cy="365760"/>
           </a:xfrm>
           <a:prstGeom prst="rect">
             <a:avLst/>
@@ -47792,7 +47780,7 @@
               <a:buNone/>
             </a:pPr>
             <a:r>
-              <a:rPr lang="en-US" sz="1300" b="1" dirty="0">
+              <a:rPr lang="en-US" sz="1500" b="1" dirty="0">
                 <a:solidFill>
                   <a:schemeClr val="bg1"/>
                 </a:solidFill>
@@ -47802,7 +47790,7 @@
               </a:rPr>
               <a:t>1</a:t>
             </a:r>
-            <a:endParaRPr lang="en-US" sz="1300" dirty="0"/>
+            <a:endParaRPr lang="en-US" sz="1500" dirty="0"/>
           </a:p>
         </p:txBody>
       </p:sp>
@@ -48020,7 +48008,7 @@
               <a:buNone/>
             </a:pPr>
             <a:r>
-              <a:rPr lang="en-US" sz="1300" b="1" dirty="0">
+              <a:rPr lang="en-US" sz="1500" b="1" dirty="0">
                 <a:solidFill>
                   <a:schemeClr val="bg1"/>
                 </a:solidFill>
@@ -48030,7 +48018,7 @@
               </a:rPr>
               <a:t>2</a:t>
             </a:r>
-            <a:endParaRPr lang="en-US" sz="1300" dirty="0"/>
+            <a:endParaRPr lang="en-US" sz="1500" dirty="0"/>
           </a:p>
         </p:txBody>
       </p:sp>
@@ -48248,7 +48236,7 @@
               <a:buNone/>
             </a:pPr>
             <a:r>
-              <a:rPr lang="en-US" sz="1300" b="1" dirty="0">
+              <a:rPr lang="en-US" sz="1500" b="1" dirty="0">
                 <a:solidFill>
                   <a:schemeClr val="bg1"/>
                 </a:solidFill>
@@ -48258,7 +48246,7 @@
               </a:rPr>
               <a:t>3</a:t>
             </a:r>
-            <a:endParaRPr lang="en-US" sz="1300" dirty="0"/>
+            <a:endParaRPr lang="en-US" sz="1500" dirty="0"/>
           </a:p>
         </p:txBody>
       </p:sp>
@@ -48456,7 +48444,7 @@
               <a:buNone/>
             </a:pPr>
             <a:r>
-              <a:rPr lang="en-US" sz="1300" b="1" dirty="0">
+              <a:rPr lang="en-US" sz="1500" b="1" dirty="0">
                 <a:solidFill>
                   <a:schemeClr val="bg1"/>
                 </a:solidFill>
@@ -48466,7 +48454,7 @@
               </a:rPr>
               <a:t>4</a:t>
             </a:r>
-            <a:endParaRPr lang="en-US" sz="1300" dirty="0"/>
+            <a:endParaRPr lang="en-US" sz="1500" dirty="0"/>
           </a:p>
         </p:txBody>
       </p:sp>
@@ -50145,8 +50133,8 @@
         </p:nvSpPr>
         <p:spPr>
           <a:xfrm>
-            <a:off x="685800" y="1545336"/>
-            <a:ext cx="539496" cy="347472"/>
+            <a:off x="685800" y="1517904"/>
+            <a:ext cx="594360" cy="420624"/>
           </a:xfrm>
           <a:prstGeom prst="roundRect">
             <a:avLst>
@@ -50167,8 +50155,8 @@
         </p:nvSpPr>
         <p:spPr>
           <a:xfrm>
-            <a:off x="685800" y="1545336"/>
-            <a:ext cx="539496" cy="347472"/>
+            <a:off x="685800" y="1517904"/>
+            <a:ext cx="594360" cy="420624"/>
           </a:xfrm>
           <a:prstGeom prst="rect">
             <a:avLst/>
@@ -50184,7 +50172,7 @@
               <a:buNone/>
             </a:pPr>
             <a:r>
-              <a:rPr lang="en-US" sz="1300" b="1" dirty="0">
+              <a:rPr lang="en-US" sz="1500" b="1" dirty="0">
                 <a:solidFill>
                   <a:schemeClr val="bg1"/>
                 </a:solidFill>
@@ -50194,7 +50182,7 @@
               </a:rPr>
               <a:t>수료</a:t>
             </a:r>
-            <a:endParaRPr lang="en-US" sz="1300" dirty="0"/>
+            <a:endParaRPr lang="en-US" sz="1500" dirty="0"/>
           </a:p>
         </p:txBody>
       </p:sp>
@@ -50206,8 +50194,8 @@
         </p:nvSpPr>
         <p:spPr>
           <a:xfrm>
-            <a:off x="1353312" y="1536192"/>
-            <a:ext cx="4910328" cy="365760"/>
+            <a:off x="1444752" y="1536192"/>
+            <a:ext cx="4818888" cy="365760"/>
           </a:xfrm>
           <a:prstGeom prst="rect">
             <a:avLst/>
@@ -50786,8 +50774,8 @@
         </p:nvSpPr>
         <p:spPr>
           <a:xfrm>
-            <a:off x="6473952" y="1545336"/>
-            <a:ext cx="539496" cy="347472"/>
+            <a:off x="6473952" y="1517904"/>
+            <a:ext cx="594360" cy="420624"/>
           </a:xfrm>
           <a:prstGeom prst="roundRect">
             <a:avLst>
@@ -50808,8 +50796,8 @@
         </p:nvSpPr>
         <p:spPr>
           <a:xfrm>
-            <a:off x="6473952" y="1545336"/>
-            <a:ext cx="539496" cy="347472"/>
+            <a:off x="6473952" y="1517904"/>
+            <a:ext cx="594360" cy="420624"/>
           </a:xfrm>
           <a:prstGeom prst="rect">
             <a:avLst/>
@@ -50825,7 +50813,7 @@
               <a:buNone/>
             </a:pPr>
             <a:r>
-              <a:rPr lang="en-US" sz="1300" b="1" dirty="0">
+              <a:rPr lang="en-US" sz="1500" b="1" dirty="0">
                 <a:solidFill>
                   <a:schemeClr val="bg1"/>
                 </a:solidFill>
@@ -50835,7 +50823,7 @@
               </a:rPr>
               <a:t>진행</a:t>
             </a:r>
-            <a:endParaRPr lang="en-US" sz="1300" dirty="0"/>
+            <a:endParaRPr lang="en-US" sz="1500" dirty="0"/>
           </a:p>
         </p:txBody>
       </p:sp>
@@ -50847,8 +50835,8 @@
         </p:nvSpPr>
         <p:spPr>
           <a:xfrm>
-            <a:off x="7141464" y="1536192"/>
-            <a:ext cx="4910328" cy="365760"/>
+            <a:off x="7232904" y="1536192"/>
+            <a:ext cx="4818888" cy="365760"/>
           </a:xfrm>
           <a:prstGeom prst="rect">
             <a:avLst/>
@@ -51752,7 +51740,7 @@
               <a:buNone/>
             </a:pPr>
             <a:r>
-              <a:rPr lang="en-US" sz="1300" b="1" dirty="0">
+              <a:rPr lang="en-US" sz="1500" b="1" dirty="0">
                 <a:solidFill>
                   <a:schemeClr val="bg1"/>
                 </a:solidFill>
@@ -51762,7 +51750,7 @@
               </a:rPr>
               <a:t>1</a:t>
             </a:r>
-            <a:endParaRPr lang="en-US" sz="1300" dirty="0"/>
+            <a:endParaRPr lang="en-US" sz="1500" dirty="0"/>
           </a:p>
         </p:txBody>
       </p:sp>
@@ -51961,7 +51949,7 @@
               <a:buNone/>
             </a:pPr>
             <a:r>
-              <a:rPr lang="en-US" sz="1300" b="1" dirty="0">
+              <a:rPr lang="en-US" sz="1500" b="1" dirty="0">
                 <a:solidFill>
                   <a:schemeClr val="bg1"/>
                 </a:solidFill>
@@ -51971,7 +51959,7 @@
               </a:rPr>
               <a:t>2</a:t>
             </a:r>
-            <a:endParaRPr lang="en-US" sz="1300" dirty="0"/>
+            <a:endParaRPr lang="en-US" sz="1500" dirty="0"/>
           </a:p>
         </p:txBody>
       </p:sp>
@@ -52170,7 +52158,7 @@
               <a:buNone/>
             </a:pPr>
             <a:r>
-              <a:rPr lang="en-US" sz="1300" b="1" dirty="0">
+              <a:rPr lang="en-US" sz="1500" b="1" dirty="0">
                 <a:solidFill>
                   <a:schemeClr val="bg1"/>
                 </a:solidFill>
@@ -52180,7 +52168,7 @@
               </a:rPr>
               <a:t>3</a:t>
             </a:r>
-            <a:endParaRPr lang="en-US" sz="1300" dirty="0"/>
+            <a:endParaRPr lang="en-US" sz="1500" dirty="0"/>
           </a:p>
         </p:txBody>
       </p:sp>
@@ -53164,13 +53152,11 @@
         </p:nvSpPr>
         <p:spPr>
           <a:xfrm>
-            <a:off x="685800" y="3794760"/>
-            <a:ext cx="361188" cy="347472"/>
-          </a:xfrm>
-          <a:prstGeom prst="roundRect">
-            <a:avLst>
-              <a:gd name="adj" fmla="val 50000"/>
-            </a:avLst>
+            <a:off x="685800" y="3767328"/>
+            <a:ext cx="420624" cy="420624"/>
+          </a:xfrm>
+          <a:prstGeom prst="ellipse">
+            <a:avLst/>
           </a:prstGeom>
           <a:solidFill>
             <a:schemeClr val="accent1"/>
@@ -53186,8 +53172,8 @@
         </p:nvSpPr>
         <p:spPr>
           <a:xfrm>
-            <a:off x="685800" y="3794760"/>
-            <a:ext cx="361188" cy="347472"/>
+            <a:off x="685800" y="3767328"/>
+            <a:ext cx="420624" cy="420624"/>
           </a:xfrm>
           <a:prstGeom prst="rect">
             <a:avLst/>
@@ -53203,7 +53189,7 @@
               <a:buNone/>
             </a:pPr>
             <a:r>
-              <a:rPr lang="en-US" sz="1300" b="1" dirty="0">
+              <a:rPr lang="en-US" sz="1500" b="1" dirty="0">
                 <a:solidFill>
                   <a:schemeClr val="bg1"/>
                 </a:solidFill>
@@ -53213,7 +53199,7 @@
               </a:rPr>
               <a:t>왜</a:t>
             </a:r>
-            <a:endParaRPr lang="en-US" sz="1300" dirty="0"/>
+            <a:endParaRPr lang="en-US" sz="1500" dirty="0"/>
           </a:p>
         </p:txBody>
       </p:sp>
@@ -53225,8 +53211,8 @@
         </p:nvSpPr>
         <p:spPr>
           <a:xfrm>
-            <a:off x="1175004" y="3785616"/>
-            <a:ext cx="10330891" cy="365760"/>
+            <a:off x="1252728" y="3785616"/>
+            <a:ext cx="10253167" cy="365760"/>
           </a:xfrm>
           <a:prstGeom prst="rect">
             <a:avLst/>
@@ -53945,7 +53931,7 @@
               <a:buNone/>
             </a:pPr>
             <a:r>
-              <a:rPr lang="en-US" sz="1300" b="1" dirty="0">
+              <a:rPr lang="en-US" sz="1500" b="1" dirty="0">
                 <a:solidFill>
                   <a:schemeClr val="bg1"/>
                 </a:solidFill>
@@ -53955,7 +53941,7 @@
               </a:rPr>
               <a:t>①</a:t>
             </a:r>
-            <a:endParaRPr lang="en-US" sz="1300" dirty="0"/>
+            <a:endParaRPr lang="en-US" sz="1500" dirty="0"/>
           </a:p>
         </p:txBody>
       </p:sp>
@@ -54134,7 +54120,7 @@
               <a:buNone/>
             </a:pPr>
             <a:r>
-              <a:rPr lang="en-US" sz="1300" b="1" dirty="0">
+              <a:rPr lang="en-US" sz="1500" b="1" dirty="0">
                 <a:solidFill>
                   <a:schemeClr val="bg1"/>
                 </a:solidFill>
@@ -54144,7 +54130,7 @@
               </a:rPr>
               <a:t>②</a:t>
             </a:r>
-            <a:endParaRPr lang="en-US" sz="1300" dirty="0"/>
+            <a:endParaRPr lang="en-US" sz="1500" dirty="0"/>
           </a:p>
         </p:txBody>
       </p:sp>

--- a/dist/요한복음_1강_영광을_만나기_위한_준비.pptx
+++ b/dist/요한복음_1강_영광을_만나기_위한_준비.pptx
@@ -154,7 +154,7 @@
   <p:extLst>
     <p:ext uri="{521415D9-36F7-43E2-AB2F-B90AF26B5E84}">
       <p14:sectionLst xmlns:p14="http://schemas.microsoft.com/office/powerpoint/2010/main">
-        <p14:section name="오리엔테이션" id="{84c34fe5-60c7-6708-e8b6-f2792afde8a2}">
+        <p14:section name="오리엔테이션" id="{32dd01dd-efe0-53bd-b7de-7bbc3e85372d}">
           <p14:sldIdLst>
             <p14:sldId id="256"/>
             <p14:sldId id="257"/>
@@ -164,7 +164,7 @@
             <p14:sldId id="261"/>
           </p14:sldIdLst>
         </p14:section>
-        <p14:section name="요한복음 분석" id="{2ff442a3-7462-9d12-0802-b5ff8e259e71}">
+        <p14:section name="요한복음 분석" id="{5e005e2c-dbda-c2e5-110f-53b762a9bd48}">
           <p14:sldIdLst>
             <p14:sldId id="262"/>
             <p14:sldId id="263"/>
@@ -181,7 +181,7 @@
             <p14:sldId id="274"/>
           </p14:sldIdLst>
         </p14:section>
-        <p14:section name="1과 · 예수님에 대한 증언" id="{1245fbad-52b5-186c-bd2d-131cf202c5d8}">
+        <p14:section name="1과 · 예수님에 대한 증언" id="{2085e0e6-8adc-1bee-4fd7-cded5fb90731}">
           <p14:sldIdLst>
             <p14:sldId id="275"/>
             <p14:sldId id="276"/>
@@ -197,7 +197,7 @@
             <p14:sldId id="286"/>
           </p14:sldIdLst>
         </p14:section>
-        <p14:section name="1과 · 하나님에 대한 증언" id="{b86581ec-8ada-b636-8937-bd719120fed1}">
+        <p14:section name="1과 · 하나님에 대한 증언" id="{78d000d0-7421-91ad-568b-4b4c037ba168}">
           <p14:sldIdLst>
             <p14:sldId id="287"/>
             <p14:sldId id="288"/>
@@ -213,7 +213,7 @@
             <p14:sldId id="298"/>
           </p14:sldIdLst>
         </p14:section>
-        <p14:section name="마무리" id="{9b011055-2876-5666-3580-ae5bae2b979b}">
+        <p14:section name="마무리" id="{6e927ba5-bba7-cf6a-cdfb-afb265593ce8}">
           <p14:sldIdLst>
             <p14:sldId id="299"/>
             <p14:sldId id="300"/>
@@ -221,7 +221,7 @@
             <p14:sldId id="302"/>
           </p14:sldIdLst>
         </p14:section>
-        <p14:section name="부록" id="{dd35af60-ef6c-120c-fcf8-0f10557ec601}">
+        <p14:section name="부록" id="{0787bcad-ca72-38ce-5023-3694ad001635}">
           <p14:sldIdLst>
             <p14:sldId id="303"/>
           </p14:sldIdLst>
@@ -9923,7 +9923,7 @@
         <p:spPr>
           <a:xfrm>
             <a:off x="3688004" y="2414016"/>
-            <a:ext cx="2051228" cy="304038"/>
+            <a:ext cx="2051228" cy="608076"/>
           </a:xfrm>
           <a:prstGeom prst="rect">
             <a:avLst/>
@@ -9961,8 +9961,8 @@
         </p:nvSpPr>
         <p:spPr>
           <a:xfrm>
-            <a:off x="3688004" y="2791206"/>
-            <a:ext cx="2051228" cy="601218"/>
+            <a:off x="3688004" y="3095244"/>
+            <a:ext cx="2051228" cy="297180"/>
           </a:xfrm>
           <a:prstGeom prst="rect">
             <a:avLst/>
@@ -10261,7 +10261,7 @@
         <p:spPr>
           <a:xfrm>
             <a:off x="9216923" y="2414016"/>
-            <a:ext cx="2051228" cy="304038"/>
+            <a:ext cx="2051228" cy="608076"/>
           </a:xfrm>
           <a:prstGeom prst="rect">
             <a:avLst/>
@@ -10299,8 +10299,8 @@
         </p:nvSpPr>
         <p:spPr>
           <a:xfrm>
-            <a:off x="9216923" y="2791206"/>
-            <a:ext cx="2051228" cy="601218"/>
+            <a:off x="9216923" y="3095244"/>
+            <a:ext cx="2051228" cy="297180"/>
           </a:xfrm>
           <a:prstGeom prst="rect">
             <a:avLst/>
@@ -10430,7 +10430,7 @@
         <p:spPr>
           <a:xfrm>
             <a:off x="923544" y="4690872"/>
-            <a:ext cx="2051228" cy="304038"/>
+            <a:ext cx="2051228" cy="608076"/>
           </a:xfrm>
           <a:prstGeom prst="rect">
             <a:avLst/>
@@ -10468,8 +10468,8 @@
         </p:nvSpPr>
         <p:spPr>
           <a:xfrm>
-            <a:off x="923544" y="5068062"/>
-            <a:ext cx="2051228" cy="601218"/>
+            <a:off x="923544" y="5372100"/>
+            <a:ext cx="2051228" cy="297180"/>
           </a:xfrm>
           <a:prstGeom prst="rect">
             <a:avLst/>
@@ -10768,7 +10768,7 @@
         <p:spPr>
           <a:xfrm>
             <a:off x="6452464" y="4690872"/>
-            <a:ext cx="2051228" cy="304038"/>
+            <a:ext cx="2051228" cy="608076"/>
           </a:xfrm>
           <a:prstGeom prst="rect">
             <a:avLst/>
@@ -10806,8 +10806,8 @@
         </p:nvSpPr>
         <p:spPr>
           <a:xfrm>
-            <a:off x="6452464" y="5068062"/>
-            <a:ext cx="2051228" cy="601218"/>
+            <a:off x="6452464" y="5372100"/>
+            <a:ext cx="2051228" cy="297180"/>
           </a:xfrm>
           <a:prstGeom prst="rect">
             <a:avLst/>
@@ -10937,7 +10937,7 @@
         <p:spPr>
           <a:xfrm>
             <a:off x="9216923" y="4690872"/>
-            <a:ext cx="2051228" cy="304038"/>
+            <a:ext cx="2051228" cy="608076"/>
           </a:xfrm>
           <a:prstGeom prst="rect">
             <a:avLst/>
@@ -10975,8 +10975,8 @@
         </p:nvSpPr>
         <p:spPr>
           <a:xfrm>
-            <a:off x="9216923" y="5068062"/>
-            <a:ext cx="2051228" cy="601218"/>
+            <a:off x="9216923" y="5372100"/>
+            <a:ext cx="2051228" cy="297180"/>
           </a:xfrm>
           <a:prstGeom prst="rect">
             <a:avLst/>
@@ -14597,7 +14597,7 @@
           </p:nvPr>
         </p:nvGraphicFramePr>
         <p:xfrm>
-          <a:off x="685800" y="1645920"/>
+          <a:off x="685800" y="1609344"/>
           <a:ext cx="10820095" cy="914400"/>
         </p:xfrm>
         <a:graphic>
@@ -14609,7 +14609,7 @@
                 <a:gridCol w="1828800"/>
                 <a:gridCol w="6336792"/>
               </a:tblGrid>
-              <a:tr h="512064">
+              <a:tr h="457200">
                 <a:tc>
                   <a:txBody>
                     <a:bodyPr/>
@@ -14761,7 +14761,7 @@
                   </a:tcPr>
                 </a:tc>
               </a:tr>
-              <a:tr h="512064">
+              <a:tr h="457200">
                 <a:tc>
                   <a:txBody>
                     <a:bodyPr/>
@@ -14913,7 +14913,7 @@
                   </a:tcPr>
                 </a:tc>
               </a:tr>
-              <a:tr h="512064">
+              <a:tr h="457200">
                 <a:tc>
                   <a:txBody>
                     <a:bodyPr/>
@@ -15065,7 +15065,7 @@
                   </a:tcPr>
                 </a:tc>
               </a:tr>
-              <a:tr h="512064">
+              <a:tr h="457200">
                 <a:tc>
                   <a:txBody>
                     <a:bodyPr/>
@@ -15217,7 +15217,7 @@
                   </a:tcPr>
                 </a:tc>
               </a:tr>
-              <a:tr h="512064">
+              <a:tr h="457200">
                 <a:tc>
                   <a:txBody>
                     <a:bodyPr/>
@@ -15369,7 +15369,7 @@
                   </a:tcPr>
                 </a:tc>
               </a:tr>
-              <a:tr h="512064">
+              <a:tr h="457200">
                 <a:tc>
                   <a:txBody>
                     <a:bodyPr/>
@@ -15521,7 +15521,7 @@
                   </a:tcPr>
                 </a:tc>
               </a:tr>
-              <a:tr h="512064">
+              <a:tr h="457200">
                 <a:tc>
                   <a:txBody>
                     <a:bodyPr/>
@@ -15673,7 +15673,7 @@
                   </a:tcPr>
                 </a:tc>
               </a:tr>
-              <a:tr h="512064">
+              <a:tr h="457200">
                 <a:tc>
                   <a:txBody>
                     <a:bodyPr/>
@@ -15837,12 +15837,12 @@
         </p:nvSpPr>
         <p:spPr>
           <a:xfrm>
-            <a:off x="685800" y="5486400"/>
-            <a:ext cx="10820095" cy="731520"/>
+            <a:off x="685800" y="5577840"/>
+            <a:ext cx="10820095" cy="640080"/>
           </a:xfrm>
           <a:prstGeom prst="roundRect">
             <a:avLst>
-              <a:gd name="adj" fmla="val 12500"/>
+              <a:gd name="adj" fmla="val 14286"/>
             </a:avLst>
           </a:prstGeom>
           <a:solidFill>
@@ -15859,8 +15859,8 @@
         </p:nvSpPr>
         <p:spPr>
           <a:xfrm>
-            <a:off x="960120" y="5486400"/>
-            <a:ext cx="10271455" cy="731520"/>
+            <a:off x="960120" y="5577840"/>
+            <a:ext cx="10271455" cy="640080"/>
           </a:xfrm>
           <a:prstGeom prst="rect">
             <a:avLst/>
@@ -18951,8 +18951,8 @@
         </p:nvSpPr>
         <p:spPr>
           <a:xfrm>
-            <a:off x="685800" y="1609344"/>
-            <a:ext cx="1605229" cy="1609344"/>
+            <a:off x="685800" y="1591056"/>
+            <a:ext cx="1605229" cy="1664208"/>
           </a:xfrm>
           <a:prstGeom prst="roundRect">
             <a:avLst>
@@ -18980,8 +18980,8 @@
         </p:nvSpPr>
         <p:spPr>
           <a:xfrm>
-            <a:off x="841248" y="1764792"/>
-            <a:ext cx="374904" cy="365760"/>
+            <a:off x="832104" y="1737360"/>
+            <a:ext cx="384048" cy="384048"/>
           </a:xfrm>
           <a:prstGeom prst="ellipse">
             <a:avLst/>
@@ -19000,8 +19000,8 @@
         </p:nvSpPr>
         <p:spPr>
           <a:xfrm>
-            <a:off x="841248" y="1764792"/>
-            <a:ext cx="374904" cy="365760"/>
+            <a:off x="832104" y="1737360"/>
+            <a:ext cx="384048" cy="384048"/>
           </a:xfrm>
           <a:prstGeom prst="rect">
             <a:avLst/>
@@ -19039,8 +19039,8 @@
         </p:nvSpPr>
         <p:spPr>
           <a:xfrm>
-            <a:off x="841248" y="2258568"/>
-            <a:ext cx="1294333" cy="480060"/>
+            <a:off x="832104" y="2249424"/>
+            <a:ext cx="1312621" cy="512064"/>
           </a:xfrm>
           <a:prstGeom prst="rect">
             <a:avLst/>
@@ -19056,7 +19056,7 @@
               <a:buNone/>
             </a:pPr>
             <a:r>
-              <a:rPr lang="en-US" sz="1500" b="1" dirty="0">
+              <a:rPr lang="en-US" sz="1600" b="1" dirty="0">
                 <a:solidFill>
                   <a:schemeClr val="tx1"/>
                 </a:solidFill>
@@ -19066,7 +19066,7 @@
               </a:rPr>
               <a:t>가나 혼인잔치</a:t>
             </a:r>
-            <a:endParaRPr lang="en-US" sz="1500" dirty="0"/>
+            <a:endParaRPr lang="en-US" sz="1600" dirty="0"/>
           </a:p>
         </p:txBody>
       </p:sp>
@@ -19078,8 +19078,8 @@
         </p:nvSpPr>
         <p:spPr>
           <a:xfrm>
-            <a:off x="841248" y="2811780"/>
-            <a:ext cx="1294333" cy="251460"/>
+            <a:off x="832104" y="2834640"/>
+            <a:ext cx="1312621" cy="274320"/>
           </a:xfrm>
           <a:prstGeom prst="rect">
             <a:avLst/>
@@ -19098,7 +19098,7 @@
               <a:buNone/>
             </a:pPr>
             <a:r>
-              <a:rPr lang="en-US" sz="1400" dirty="0">
+              <a:rPr lang="en-US" sz="1500" dirty="0">
                 <a:solidFill>
                   <a:schemeClr val="accent3"/>
                 </a:solidFill>
@@ -19108,7 +19108,7 @@
               </a:rPr>
               <a:t>2장</a:t>
             </a:r>
-            <a:endParaRPr lang="en-US" sz="1400" dirty="0"/>
+            <a:endParaRPr lang="en-US" sz="1500" dirty="0"/>
           </a:p>
         </p:txBody>
       </p:sp>
@@ -19120,8 +19120,8 @@
         </p:nvSpPr>
         <p:spPr>
           <a:xfrm>
-            <a:off x="2528773" y="1609344"/>
-            <a:ext cx="1605229" cy="1609344"/>
+            <a:off x="2528773" y="1591056"/>
+            <a:ext cx="1605229" cy="1664208"/>
           </a:xfrm>
           <a:prstGeom prst="roundRect">
             <a:avLst>
@@ -19149,8 +19149,8 @@
         </p:nvSpPr>
         <p:spPr>
           <a:xfrm>
-            <a:off x="2684221" y="1764792"/>
-            <a:ext cx="374904" cy="365760"/>
+            <a:off x="2675077" y="1737360"/>
+            <a:ext cx="384048" cy="384048"/>
           </a:xfrm>
           <a:prstGeom prst="ellipse">
             <a:avLst/>
@@ -19169,8 +19169,8 @@
         </p:nvSpPr>
         <p:spPr>
           <a:xfrm>
-            <a:off x="2684221" y="1764792"/>
-            <a:ext cx="374904" cy="365760"/>
+            <a:off x="2675077" y="1737360"/>
+            <a:ext cx="384048" cy="384048"/>
           </a:xfrm>
           <a:prstGeom prst="rect">
             <a:avLst/>
@@ -19208,8 +19208,8 @@
         </p:nvSpPr>
         <p:spPr>
           <a:xfrm>
-            <a:off x="2684221" y="2258568"/>
-            <a:ext cx="1294333" cy="240030"/>
+            <a:off x="2675077" y="2249424"/>
+            <a:ext cx="1312621" cy="512064"/>
           </a:xfrm>
           <a:prstGeom prst="rect">
             <a:avLst/>
@@ -19225,7 +19225,7 @@
               <a:buNone/>
             </a:pPr>
             <a:r>
-              <a:rPr lang="en-US" sz="1500" b="1" dirty="0">
+              <a:rPr lang="en-US" sz="1600" b="1" dirty="0">
                 <a:solidFill>
                   <a:schemeClr val="tx1"/>
                 </a:solidFill>
@@ -19235,7 +19235,7 @@
               </a:rPr>
               <a:t>니고데모</a:t>
             </a:r>
-            <a:endParaRPr lang="en-US" sz="1500" dirty="0"/>
+            <a:endParaRPr lang="en-US" sz="1600" dirty="0"/>
           </a:p>
         </p:txBody>
       </p:sp>
@@ -19247,8 +19247,8 @@
         </p:nvSpPr>
         <p:spPr>
           <a:xfrm>
-            <a:off x="2684221" y="2571750"/>
-            <a:ext cx="1294333" cy="491490"/>
+            <a:off x="2675077" y="2834640"/>
+            <a:ext cx="1312621" cy="274320"/>
           </a:xfrm>
           <a:prstGeom prst="rect">
             <a:avLst/>
@@ -19267,7 +19267,7 @@
               <a:buNone/>
             </a:pPr>
             <a:r>
-              <a:rPr lang="en-US" sz="1400" dirty="0">
+              <a:rPr lang="en-US" sz="1500" dirty="0">
                 <a:solidFill>
                   <a:schemeClr val="accent3"/>
                 </a:solidFill>
@@ -19277,7 +19277,7 @@
               </a:rPr>
               <a:t>3 · 7 · 19장</a:t>
             </a:r>
-            <a:endParaRPr lang="en-US" sz="1400" dirty="0"/>
+            <a:endParaRPr lang="en-US" sz="1500" dirty="0"/>
           </a:p>
         </p:txBody>
       </p:sp>
@@ -19289,8 +19289,8 @@
         </p:nvSpPr>
         <p:spPr>
           <a:xfrm>
-            <a:off x="4371746" y="1609344"/>
-            <a:ext cx="1605229" cy="1609344"/>
+            <a:off x="4371746" y="1591056"/>
+            <a:ext cx="1605229" cy="1664208"/>
           </a:xfrm>
           <a:prstGeom prst="roundRect">
             <a:avLst>
@@ -19318,8 +19318,8 @@
         </p:nvSpPr>
         <p:spPr>
           <a:xfrm>
-            <a:off x="4527194" y="1764792"/>
-            <a:ext cx="374904" cy="365760"/>
+            <a:off x="4518050" y="1737360"/>
+            <a:ext cx="384048" cy="384048"/>
           </a:xfrm>
           <a:prstGeom prst="ellipse">
             <a:avLst/>
@@ -19338,8 +19338,8 @@
         </p:nvSpPr>
         <p:spPr>
           <a:xfrm>
-            <a:off x="4527194" y="1764792"/>
-            <a:ext cx="374904" cy="365760"/>
+            <a:off x="4518050" y="1737360"/>
+            <a:ext cx="384048" cy="384048"/>
           </a:xfrm>
           <a:prstGeom prst="rect">
             <a:avLst/>
@@ -19377,8 +19377,8 @@
         </p:nvSpPr>
         <p:spPr>
           <a:xfrm>
-            <a:off x="4527194" y="2258568"/>
-            <a:ext cx="1294333" cy="240030"/>
+            <a:off x="4518050" y="2249424"/>
+            <a:ext cx="1312621" cy="512064"/>
           </a:xfrm>
           <a:prstGeom prst="rect">
             <a:avLst/>
@@ -19394,7 +19394,7 @@
               <a:buNone/>
             </a:pPr>
             <a:r>
-              <a:rPr lang="en-US" sz="1500" b="1" dirty="0">
+              <a:rPr lang="en-US" sz="1600" b="1" dirty="0">
                 <a:solidFill>
                   <a:schemeClr val="tx1"/>
                 </a:solidFill>
@@ -19404,7 +19404,7 @@
               </a:rPr>
               <a:t>수가성 여인</a:t>
             </a:r>
-            <a:endParaRPr lang="en-US" sz="1500" dirty="0"/>
+            <a:endParaRPr lang="en-US" sz="1600" dirty="0"/>
           </a:p>
         </p:txBody>
       </p:sp>
@@ -19416,8 +19416,8 @@
         </p:nvSpPr>
         <p:spPr>
           <a:xfrm>
-            <a:off x="4527194" y="2571750"/>
-            <a:ext cx="1294333" cy="491490"/>
+            <a:off x="4518050" y="2834640"/>
+            <a:ext cx="1312621" cy="274320"/>
           </a:xfrm>
           <a:prstGeom prst="rect">
             <a:avLst/>
@@ -19436,7 +19436,7 @@
               <a:buNone/>
             </a:pPr>
             <a:r>
-              <a:rPr lang="en-US" sz="1400" dirty="0">
+              <a:rPr lang="en-US" sz="1500" dirty="0">
                 <a:solidFill>
                   <a:schemeClr val="accent3"/>
                 </a:solidFill>
@@ -19446,7 +19446,7 @@
               </a:rPr>
               <a:t>4장</a:t>
             </a:r>
-            <a:endParaRPr lang="en-US" sz="1400" dirty="0"/>
+            <a:endParaRPr lang="en-US" sz="1500" dirty="0"/>
           </a:p>
         </p:txBody>
       </p:sp>
@@ -19458,8 +19458,8 @@
         </p:nvSpPr>
         <p:spPr>
           <a:xfrm>
-            <a:off x="6214720" y="1609344"/>
-            <a:ext cx="1605229" cy="1609344"/>
+            <a:off x="6214720" y="1591056"/>
+            <a:ext cx="1605229" cy="1664208"/>
           </a:xfrm>
           <a:prstGeom prst="roundRect">
             <a:avLst>
@@ -19487,8 +19487,8 @@
         </p:nvSpPr>
         <p:spPr>
           <a:xfrm>
-            <a:off x="6370168" y="1764792"/>
-            <a:ext cx="374904" cy="365760"/>
+            <a:off x="6361024" y="1737360"/>
+            <a:ext cx="384048" cy="384048"/>
           </a:xfrm>
           <a:prstGeom prst="ellipse">
             <a:avLst/>
@@ -19507,8 +19507,8 @@
         </p:nvSpPr>
         <p:spPr>
           <a:xfrm>
-            <a:off x="6370168" y="1764792"/>
-            <a:ext cx="374904" cy="365760"/>
+            <a:off x="6361024" y="1737360"/>
+            <a:ext cx="384048" cy="384048"/>
           </a:xfrm>
           <a:prstGeom prst="rect">
             <a:avLst/>
@@ -19546,8 +19546,8 @@
         </p:nvSpPr>
         <p:spPr>
           <a:xfrm>
-            <a:off x="6370168" y="2258568"/>
-            <a:ext cx="1294333" cy="480060"/>
+            <a:off x="6361024" y="2249424"/>
+            <a:ext cx="1312621" cy="512064"/>
           </a:xfrm>
           <a:prstGeom prst="rect">
             <a:avLst/>
@@ -19563,7 +19563,7 @@
               <a:buNone/>
             </a:pPr>
             <a:r>
-              <a:rPr lang="en-US" sz="1500" b="1" dirty="0">
+              <a:rPr lang="en-US" sz="1600" b="1" dirty="0">
                 <a:solidFill>
                   <a:schemeClr val="tx1"/>
                 </a:solidFill>
@@ -19573,7 +19573,7 @@
               </a:rPr>
               <a:t>베데스다 병자</a:t>
             </a:r>
-            <a:endParaRPr lang="en-US" sz="1500" dirty="0"/>
+            <a:endParaRPr lang="en-US" sz="1600" dirty="0"/>
           </a:p>
         </p:txBody>
       </p:sp>
@@ -19585,8 +19585,8 @@
         </p:nvSpPr>
         <p:spPr>
           <a:xfrm>
-            <a:off x="6370168" y="2811780"/>
-            <a:ext cx="1294333" cy="251460"/>
+            <a:off x="6361024" y="2834640"/>
+            <a:ext cx="1312621" cy="274320"/>
           </a:xfrm>
           <a:prstGeom prst="rect">
             <a:avLst/>
@@ -19605,7 +19605,7 @@
               <a:buNone/>
             </a:pPr>
             <a:r>
-              <a:rPr lang="en-US" sz="1400" dirty="0">
+              <a:rPr lang="en-US" sz="1500" dirty="0">
                 <a:solidFill>
                   <a:schemeClr val="accent3"/>
                 </a:solidFill>
@@ -19615,7 +19615,7 @@
               </a:rPr>
               <a:t>5장</a:t>
             </a:r>
-            <a:endParaRPr lang="en-US" sz="1400" dirty="0"/>
+            <a:endParaRPr lang="en-US" sz="1500" dirty="0"/>
           </a:p>
         </p:txBody>
       </p:sp>
@@ -19627,8 +19627,8 @@
         </p:nvSpPr>
         <p:spPr>
           <a:xfrm>
-            <a:off x="8057693" y="1609344"/>
-            <a:ext cx="1605229" cy="1609344"/>
+            <a:off x="8057693" y="1591056"/>
+            <a:ext cx="1605229" cy="1664208"/>
           </a:xfrm>
           <a:prstGeom prst="roundRect">
             <a:avLst>
@@ -19656,8 +19656,8 @@
         </p:nvSpPr>
         <p:spPr>
           <a:xfrm>
-            <a:off x="8213141" y="1764792"/>
-            <a:ext cx="374904" cy="365760"/>
+            <a:off x="8203997" y="1737360"/>
+            <a:ext cx="384048" cy="384048"/>
           </a:xfrm>
           <a:prstGeom prst="ellipse">
             <a:avLst/>
@@ -19676,8 +19676,8 @@
         </p:nvSpPr>
         <p:spPr>
           <a:xfrm>
-            <a:off x="8213141" y="1764792"/>
-            <a:ext cx="374904" cy="365760"/>
+            <a:off x="8203997" y="1737360"/>
+            <a:ext cx="384048" cy="384048"/>
           </a:xfrm>
           <a:prstGeom prst="rect">
             <a:avLst/>
@@ -19715,8 +19715,8 @@
         </p:nvSpPr>
         <p:spPr>
           <a:xfrm>
-            <a:off x="8213141" y="2258568"/>
-            <a:ext cx="1294333" cy="240030"/>
+            <a:off x="8203997" y="2249424"/>
+            <a:ext cx="1312621" cy="512064"/>
           </a:xfrm>
           <a:prstGeom prst="rect">
             <a:avLst/>
@@ -19732,7 +19732,7 @@
               <a:buNone/>
             </a:pPr>
             <a:r>
-              <a:rPr lang="en-US" sz="1500" b="1" dirty="0">
+              <a:rPr lang="en-US" sz="1600" b="1" dirty="0">
                 <a:solidFill>
                   <a:schemeClr val="tx1"/>
                 </a:solidFill>
@@ -19742,7 +19742,7 @@
               </a:rPr>
               <a:t>초막절</a:t>
             </a:r>
-            <a:endParaRPr lang="en-US" sz="1500" dirty="0"/>
+            <a:endParaRPr lang="en-US" sz="1600" dirty="0"/>
           </a:p>
         </p:txBody>
       </p:sp>
@@ -19754,8 +19754,8 @@
         </p:nvSpPr>
         <p:spPr>
           <a:xfrm>
-            <a:off x="8213141" y="2571750"/>
-            <a:ext cx="1294333" cy="491490"/>
+            <a:off x="8203997" y="2834640"/>
+            <a:ext cx="1312621" cy="274320"/>
           </a:xfrm>
           <a:prstGeom prst="rect">
             <a:avLst/>
@@ -19774,7 +19774,7 @@
               <a:buNone/>
             </a:pPr>
             <a:r>
-              <a:rPr lang="en-US" sz="1400" dirty="0">
+              <a:rPr lang="en-US" sz="1500" dirty="0">
                 <a:solidFill>
                   <a:schemeClr val="accent3"/>
                 </a:solidFill>
@@ -19784,7 +19784,7 @@
               </a:rPr>
               <a:t>7장</a:t>
             </a:r>
-            <a:endParaRPr lang="en-US" sz="1400" dirty="0"/>
+            <a:endParaRPr lang="en-US" sz="1500" dirty="0"/>
           </a:p>
         </p:txBody>
       </p:sp>
@@ -19796,8 +19796,8 @@
         </p:nvSpPr>
         <p:spPr>
           <a:xfrm>
-            <a:off x="9900666" y="1609344"/>
-            <a:ext cx="1605229" cy="1609344"/>
+            <a:off x="9900666" y="1591056"/>
+            <a:ext cx="1605229" cy="1664208"/>
           </a:xfrm>
           <a:prstGeom prst="roundRect">
             <a:avLst>
@@ -19825,8 +19825,8 @@
         </p:nvSpPr>
         <p:spPr>
           <a:xfrm>
-            <a:off x="10056114" y="1764792"/>
-            <a:ext cx="374904" cy="365760"/>
+            <a:off x="10046970" y="1737360"/>
+            <a:ext cx="384048" cy="384048"/>
           </a:xfrm>
           <a:prstGeom prst="ellipse">
             <a:avLst/>
@@ -19845,8 +19845,8 @@
         </p:nvSpPr>
         <p:spPr>
           <a:xfrm>
-            <a:off x="10056114" y="1764792"/>
-            <a:ext cx="374904" cy="365760"/>
+            <a:off x="10046970" y="1737360"/>
+            <a:ext cx="384048" cy="384048"/>
           </a:xfrm>
           <a:prstGeom prst="rect">
             <a:avLst/>
@@ -19884,8 +19884,8 @@
         </p:nvSpPr>
         <p:spPr>
           <a:xfrm>
-            <a:off x="10056114" y="2258568"/>
-            <a:ext cx="1294333" cy="240030"/>
+            <a:off x="10046970" y="2249424"/>
+            <a:ext cx="1312621" cy="512064"/>
           </a:xfrm>
           <a:prstGeom prst="rect">
             <a:avLst/>
@@ -19901,7 +19901,7 @@
               <a:buNone/>
             </a:pPr>
             <a:r>
-              <a:rPr lang="en-US" sz="1500" b="1" dirty="0">
+              <a:rPr lang="en-US" sz="1600" b="1" dirty="0">
                 <a:solidFill>
                   <a:schemeClr val="tx1"/>
                 </a:solidFill>
@@ -19911,7 +19911,7 @@
               </a:rPr>
               <a:t>간음한 여인</a:t>
             </a:r>
-            <a:endParaRPr lang="en-US" sz="1500" dirty="0"/>
+            <a:endParaRPr lang="en-US" sz="1600" dirty="0"/>
           </a:p>
         </p:txBody>
       </p:sp>
@@ -19923,8 +19923,8 @@
         </p:nvSpPr>
         <p:spPr>
           <a:xfrm>
-            <a:off x="10056114" y="2571750"/>
-            <a:ext cx="1294333" cy="491490"/>
+            <a:off x="10046970" y="2834640"/>
+            <a:ext cx="1312621" cy="274320"/>
           </a:xfrm>
           <a:prstGeom prst="rect">
             <a:avLst/>
@@ -19943,7 +19943,7 @@
               <a:buNone/>
             </a:pPr>
             <a:r>
-              <a:rPr lang="en-US" sz="1400" dirty="0">
+              <a:rPr lang="en-US" sz="1500" dirty="0">
                 <a:solidFill>
                   <a:schemeClr val="accent3"/>
                 </a:solidFill>
@@ -19953,7 +19953,7 @@
               </a:rPr>
               <a:t>8장</a:t>
             </a:r>
-            <a:endParaRPr lang="en-US" sz="1400" dirty="0"/>
+            <a:endParaRPr lang="en-US" sz="1500" dirty="0"/>
           </a:p>
         </p:txBody>
       </p:sp>
@@ -19965,8 +19965,8 @@
         </p:nvSpPr>
         <p:spPr>
           <a:xfrm>
-            <a:off x="685800" y="3456432"/>
-            <a:ext cx="1605229" cy="1609344"/>
+            <a:off x="685800" y="3493008"/>
+            <a:ext cx="1605229" cy="1664208"/>
           </a:xfrm>
           <a:prstGeom prst="roundRect">
             <a:avLst>
@@ -19994,8 +19994,8 @@
         </p:nvSpPr>
         <p:spPr>
           <a:xfrm>
-            <a:off x="841248" y="3611880"/>
-            <a:ext cx="374904" cy="365760"/>
+            <a:off x="832104" y="3639312"/>
+            <a:ext cx="384048" cy="384048"/>
           </a:xfrm>
           <a:prstGeom prst="ellipse">
             <a:avLst/>
@@ -20014,8 +20014,8 @@
         </p:nvSpPr>
         <p:spPr>
           <a:xfrm>
-            <a:off x="841248" y="3611880"/>
-            <a:ext cx="374904" cy="365760"/>
+            <a:off x="832104" y="3639312"/>
+            <a:ext cx="384048" cy="384048"/>
           </a:xfrm>
           <a:prstGeom prst="rect">
             <a:avLst/>
@@ -20053,8 +20053,8 @@
         </p:nvSpPr>
         <p:spPr>
           <a:xfrm>
-            <a:off x="841248" y="4105656"/>
-            <a:ext cx="1294333" cy="240030"/>
+            <a:off x="832104" y="4151376"/>
+            <a:ext cx="1312621" cy="512064"/>
           </a:xfrm>
           <a:prstGeom prst="rect">
             <a:avLst/>
@@ -20070,7 +20070,7 @@
               <a:buNone/>
             </a:pPr>
             <a:r>
-              <a:rPr lang="en-US" sz="1500" b="1" dirty="0">
+              <a:rPr lang="en-US" sz="1600" b="1" dirty="0">
                 <a:solidFill>
                   <a:schemeClr val="tx1"/>
                 </a:solidFill>
@@ -20080,7 +20080,7 @@
               </a:rPr>
               <a:t>실로암 맹인</a:t>
             </a:r>
-            <a:endParaRPr lang="en-US" sz="1500" dirty="0"/>
+            <a:endParaRPr lang="en-US" sz="1600" dirty="0"/>
           </a:p>
         </p:txBody>
       </p:sp>
@@ -20092,8 +20092,8 @@
         </p:nvSpPr>
         <p:spPr>
           <a:xfrm>
-            <a:off x="841248" y="4418838"/>
-            <a:ext cx="1294333" cy="491490"/>
+            <a:off x="832104" y="4736592"/>
+            <a:ext cx="1312621" cy="274320"/>
           </a:xfrm>
           <a:prstGeom prst="rect">
             <a:avLst/>
@@ -20112,7 +20112,7 @@
               <a:buNone/>
             </a:pPr>
             <a:r>
-              <a:rPr lang="en-US" sz="1400" dirty="0">
+              <a:rPr lang="en-US" sz="1500" dirty="0">
                 <a:solidFill>
                   <a:schemeClr val="accent3"/>
                 </a:solidFill>
@@ -20122,7 +20122,7 @@
               </a:rPr>
               <a:t>9장</a:t>
             </a:r>
-            <a:endParaRPr lang="en-US" sz="1400" dirty="0"/>
+            <a:endParaRPr lang="en-US" sz="1500" dirty="0"/>
           </a:p>
         </p:txBody>
       </p:sp>
@@ -20134,8 +20134,8 @@
         </p:nvSpPr>
         <p:spPr>
           <a:xfrm>
-            <a:off x="2528773" y="3456432"/>
-            <a:ext cx="1605229" cy="1609344"/>
+            <a:off x="2528773" y="3493008"/>
+            <a:ext cx="1605229" cy="1664208"/>
           </a:xfrm>
           <a:prstGeom prst="roundRect">
             <a:avLst>
@@ -20163,8 +20163,8 @@
         </p:nvSpPr>
         <p:spPr>
           <a:xfrm>
-            <a:off x="2684221" y="3611880"/>
-            <a:ext cx="374904" cy="365760"/>
+            <a:off x="2675077" y="3639312"/>
+            <a:ext cx="384048" cy="384048"/>
           </a:xfrm>
           <a:prstGeom prst="ellipse">
             <a:avLst/>
@@ -20183,8 +20183,8 @@
         </p:nvSpPr>
         <p:spPr>
           <a:xfrm>
-            <a:off x="2684221" y="3611880"/>
-            <a:ext cx="374904" cy="365760"/>
+            <a:off x="2675077" y="3639312"/>
+            <a:ext cx="384048" cy="384048"/>
           </a:xfrm>
           <a:prstGeom prst="rect">
             <a:avLst/>
@@ -20222,8 +20222,8 @@
         </p:nvSpPr>
         <p:spPr>
           <a:xfrm>
-            <a:off x="2684221" y="4105656"/>
-            <a:ext cx="1294333" cy="240030"/>
+            <a:off x="2675077" y="4151376"/>
+            <a:ext cx="1312621" cy="512064"/>
           </a:xfrm>
           <a:prstGeom prst="rect">
             <a:avLst/>
@@ -20239,7 +20239,7 @@
               <a:buNone/>
             </a:pPr>
             <a:r>
-              <a:rPr lang="en-US" sz="1500" b="1" dirty="0">
+              <a:rPr lang="en-US" sz="1600" b="1" dirty="0">
                 <a:solidFill>
                   <a:schemeClr val="tx1"/>
                 </a:solidFill>
@@ -20249,7 +20249,7 @@
               </a:rPr>
               <a:t>나사로 살림</a:t>
             </a:r>
-            <a:endParaRPr lang="en-US" sz="1500" dirty="0"/>
+            <a:endParaRPr lang="en-US" sz="1600" dirty="0"/>
           </a:p>
         </p:txBody>
       </p:sp>
@@ -20261,8 +20261,8 @@
         </p:nvSpPr>
         <p:spPr>
           <a:xfrm>
-            <a:off x="2684221" y="4418838"/>
-            <a:ext cx="1294333" cy="491490"/>
+            <a:off x="2675077" y="4736592"/>
+            <a:ext cx="1312621" cy="274320"/>
           </a:xfrm>
           <a:prstGeom prst="rect">
             <a:avLst/>
@@ -20281,7 +20281,7 @@
               <a:buNone/>
             </a:pPr>
             <a:r>
-              <a:rPr lang="en-US" sz="1400" dirty="0">
+              <a:rPr lang="en-US" sz="1500" dirty="0">
                 <a:solidFill>
                   <a:schemeClr val="accent3"/>
                 </a:solidFill>
@@ -20291,7 +20291,7 @@
               </a:rPr>
               <a:t>11장</a:t>
             </a:r>
-            <a:endParaRPr lang="en-US" sz="1400" dirty="0"/>
+            <a:endParaRPr lang="en-US" sz="1500" dirty="0"/>
           </a:p>
         </p:txBody>
       </p:sp>
@@ -20303,8 +20303,8 @@
         </p:nvSpPr>
         <p:spPr>
           <a:xfrm>
-            <a:off x="4371746" y="3456432"/>
-            <a:ext cx="1605229" cy="1609344"/>
+            <a:off x="4371746" y="3493008"/>
+            <a:ext cx="1605229" cy="1664208"/>
           </a:xfrm>
           <a:prstGeom prst="roundRect">
             <a:avLst>
@@ -20332,8 +20332,8 @@
         </p:nvSpPr>
         <p:spPr>
           <a:xfrm>
-            <a:off x="4527194" y="3611880"/>
-            <a:ext cx="374904" cy="365760"/>
+            <a:off x="4518050" y="3639312"/>
+            <a:ext cx="384048" cy="384048"/>
           </a:xfrm>
           <a:prstGeom prst="ellipse">
             <a:avLst/>
@@ -20352,8 +20352,8 @@
         </p:nvSpPr>
         <p:spPr>
           <a:xfrm>
-            <a:off x="4527194" y="3611880"/>
-            <a:ext cx="374904" cy="365760"/>
+            <a:off x="4518050" y="3639312"/>
+            <a:ext cx="384048" cy="384048"/>
           </a:xfrm>
           <a:prstGeom prst="rect">
             <a:avLst/>
@@ -20391,8 +20391,8 @@
         </p:nvSpPr>
         <p:spPr>
           <a:xfrm>
-            <a:off x="4527194" y="4105656"/>
-            <a:ext cx="1294333" cy="240030"/>
+            <a:off x="4518050" y="4151376"/>
+            <a:ext cx="1312621" cy="512064"/>
           </a:xfrm>
           <a:prstGeom prst="rect">
             <a:avLst/>
@@ -20408,7 +20408,7 @@
               <a:buNone/>
             </a:pPr>
             <a:r>
-              <a:rPr lang="en-US" sz="1500" b="1" dirty="0">
+              <a:rPr lang="en-US" sz="1600" b="1" dirty="0">
                 <a:solidFill>
                   <a:schemeClr val="tx1"/>
                 </a:solidFill>
@@ -20418,7 +20418,7 @@
               </a:rPr>
               <a:t>세족식</a:t>
             </a:r>
-            <a:endParaRPr lang="en-US" sz="1500" dirty="0"/>
+            <a:endParaRPr lang="en-US" sz="1600" dirty="0"/>
           </a:p>
         </p:txBody>
       </p:sp>
@@ -20430,8 +20430,8 @@
         </p:nvSpPr>
         <p:spPr>
           <a:xfrm>
-            <a:off x="4527194" y="4418838"/>
-            <a:ext cx="1294333" cy="491490"/>
+            <a:off x="4518050" y="4736592"/>
+            <a:ext cx="1312621" cy="274320"/>
           </a:xfrm>
           <a:prstGeom prst="rect">
             <a:avLst/>
@@ -20450,7 +20450,7 @@
               <a:buNone/>
             </a:pPr>
             <a:r>
-              <a:rPr lang="en-US" sz="1400" dirty="0">
+              <a:rPr lang="en-US" sz="1500" dirty="0">
                 <a:solidFill>
                   <a:schemeClr val="accent3"/>
                 </a:solidFill>
@@ -20460,7 +20460,7 @@
               </a:rPr>
               <a:t>13장</a:t>
             </a:r>
-            <a:endParaRPr lang="en-US" sz="1400" dirty="0"/>
+            <a:endParaRPr lang="en-US" sz="1500" dirty="0"/>
           </a:p>
         </p:txBody>
       </p:sp>
@@ -20472,8 +20472,8 @@
         </p:nvSpPr>
         <p:spPr>
           <a:xfrm>
-            <a:off x="6214720" y="3456432"/>
-            <a:ext cx="1605229" cy="1609344"/>
+            <a:off x="6214720" y="3493008"/>
+            <a:ext cx="1605229" cy="1664208"/>
           </a:xfrm>
           <a:prstGeom prst="roundRect">
             <a:avLst>
@@ -20501,8 +20501,8 @@
         </p:nvSpPr>
         <p:spPr>
           <a:xfrm>
-            <a:off x="6370168" y="3611880"/>
-            <a:ext cx="374904" cy="365760"/>
+            <a:off x="6361024" y="3639312"/>
+            <a:ext cx="384048" cy="384048"/>
           </a:xfrm>
           <a:prstGeom prst="ellipse">
             <a:avLst/>
@@ -20521,8 +20521,8 @@
         </p:nvSpPr>
         <p:spPr>
           <a:xfrm>
-            <a:off x="6370168" y="3611880"/>
-            <a:ext cx="374904" cy="365760"/>
+            <a:off x="6361024" y="3639312"/>
+            <a:ext cx="384048" cy="384048"/>
           </a:xfrm>
           <a:prstGeom prst="rect">
             <a:avLst/>
@@ -20560,8 +20560,8 @@
         </p:nvSpPr>
         <p:spPr>
           <a:xfrm>
-            <a:off x="6370168" y="4105656"/>
-            <a:ext cx="1294333" cy="240030"/>
+            <a:off x="6361024" y="4151376"/>
+            <a:ext cx="1312621" cy="512064"/>
           </a:xfrm>
           <a:prstGeom prst="rect">
             <a:avLst/>
@@ -20577,7 +20577,7 @@
               <a:buNone/>
             </a:pPr>
             <a:r>
-              <a:rPr lang="en-US" sz="1500" b="1" dirty="0">
+              <a:rPr lang="en-US" sz="1600" b="1" dirty="0">
                 <a:solidFill>
                   <a:schemeClr val="tx1"/>
                 </a:solidFill>
@@ -20587,7 +20587,7 @@
               </a:rPr>
               <a:t>보혜사</a:t>
             </a:r>
-            <a:endParaRPr lang="en-US" sz="1500" dirty="0"/>
+            <a:endParaRPr lang="en-US" sz="1600" dirty="0"/>
           </a:p>
         </p:txBody>
       </p:sp>
@@ -20599,8 +20599,8 @@
         </p:nvSpPr>
         <p:spPr>
           <a:xfrm>
-            <a:off x="6370168" y="4418838"/>
-            <a:ext cx="1294333" cy="491490"/>
+            <a:off x="6361024" y="4736592"/>
+            <a:ext cx="1312621" cy="274320"/>
           </a:xfrm>
           <a:prstGeom prst="rect">
             <a:avLst/>
@@ -20619,7 +20619,7 @@
               <a:buNone/>
             </a:pPr>
             <a:r>
-              <a:rPr lang="en-US" sz="1400" dirty="0">
+              <a:rPr lang="en-US" sz="1500" dirty="0">
                 <a:solidFill>
                   <a:schemeClr val="accent3"/>
                 </a:solidFill>
@@ -20629,7 +20629,7 @@
               </a:rPr>
               <a:t>14~16장</a:t>
             </a:r>
-            <a:endParaRPr lang="en-US" sz="1400" dirty="0"/>
+            <a:endParaRPr lang="en-US" sz="1500" dirty="0"/>
           </a:p>
         </p:txBody>
       </p:sp>
@@ -20641,8 +20641,8 @@
         </p:nvSpPr>
         <p:spPr>
           <a:xfrm>
-            <a:off x="8057693" y="3456432"/>
-            <a:ext cx="1605229" cy="1609344"/>
+            <a:off x="8057693" y="3493008"/>
+            <a:ext cx="1605229" cy="1664208"/>
           </a:xfrm>
           <a:prstGeom prst="roundRect">
             <a:avLst>
@@ -20670,8 +20670,8 @@
         </p:nvSpPr>
         <p:spPr>
           <a:xfrm>
-            <a:off x="8213141" y="3611880"/>
-            <a:ext cx="374904" cy="365760"/>
+            <a:off x="8203997" y="3639312"/>
+            <a:ext cx="384048" cy="384048"/>
           </a:xfrm>
           <a:prstGeom prst="ellipse">
             <a:avLst/>
@@ -20690,8 +20690,8 @@
         </p:nvSpPr>
         <p:spPr>
           <a:xfrm>
-            <a:off x="8213141" y="3611880"/>
-            <a:ext cx="374904" cy="365760"/>
+            <a:off x="8203997" y="3639312"/>
+            <a:ext cx="384048" cy="384048"/>
           </a:xfrm>
           <a:prstGeom prst="rect">
             <a:avLst/>
@@ -20729,8 +20729,8 @@
         </p:nvSpPr>
         <p:spPr>
           <a:xfrm>
-            <a:off x="8213141" y="4105656"/>
-            <a:ext cx="1294333" cy="480060"/>
+            <a:off x="8203997" y="4151376"/>
+            <a:ext cx="1312621" cy="512064"/>
           </a:xfrm>
           <a:prstGeom prst="rect">
             <a:avLst/>
@@ -20746,7 +20746,7 @@
               <a:buNone/>
             </a:pPr>
             <a:r>
-              <a:rPr lang="en-US" sz="1500" b="1" dirty="0">
+              <a:rPr lang="en-US" sz="1600" b="1" dirty="0">
                 <a:solidFill>
                   <a:schemeClr val="tx1"/>
                 </a:solidFill>
@@ -20756,7 +20756,7 @@
               </a:rPr>
               <a:t>대제사장 기도</a:t>
             </a:r>
-            <a:endParaRPr lang="en-US" sz="1500" dirty="0"/>
+            <a:endParaRPr lang="en-US" sz="1600" dirty="0"/>
           </a:p>
         </p:txBody>
       </p:sp>
@@ -20768,8 +20768,8 @@
         </p:nvSpPr>
         <p:spPr>
           <a:xfrm>
-            <a:off x="8213141" y="4658868"/>
-            <a:ext cx="1294333" cy="251460"/>
+            <a:off x="8203997" y="4736592"/>
+            <a:ext cx="1312621" cy="274320"/>
           </a:xfrm>
           <a:prstGeom prst="rect">
             <a:avLst/>
@@ -20788,7 +20788,7 @@
               <a:buNone/>
             </a:pPr>
             <a:r>
-              <a:rPr lang="en-US" sz="1400" dirty="0">
+              <a:rPr lang="en-US" sz="1500" dirty="0">
                 <a:solidFill>
                   <a:schemeClr val="accent3"/>
                 </a:solidFill>
@@ -20798,7 +20798,7 @@
               </a:rPr>
               <a:t>17장</a:t>
             </a:r>
-            <a:endParaRPr lang="en-US" sz="1400" dirty="0"/>
+            <a:endParaRPr lang="en-US" sz="1500" dirty="0"/>
           </a:p>
         </p:txBody>
       </p:sp>
@@ -25334,12 +25334,12 @@
         </p:nvSpPr>
         <p:spPr>
           <a:xfrm>
-            <a:off x="685800" y="3127248"/>
-            <a:ext cx="3448202" cy="2542032"/>
+            <a:off x="685800" y="3108960"/>
+            <a:ext cx="3448202" cy="2505456"/>
           </a:xfrm>
           <a:prstGeom prst="roundRect">
             <a:avLst>
-              <a:gd name="adj" fmla="val 2158"/>
+              <a:gd name="adj" fmla="val 2190"/>
             </a:avLst>
           </a:prstGeom>
           <a:solidFill>
@@ -25363,7 +25363,7 @@
         </p:nvSpPr>
         <p:spPr>
           <a:xfrm>
-            <a:off x="923544" y="3364992"/>
+            <a:off x="923544" y="3346704"/>
             <a:ext cx="402336" cy="402336"/>
           </a:xfrm>
           <a:prstGeom prst="ellipse">
@@ -25383,7 +25383,7 @@
         </p:nvSpPr>
         <p:spPr>
           <a:xfrm>
-            <a:off x="923544" y="3364992"/>
+            <a:off x="923544" y="3346704"/>
             <a:ext cx="402336" cy="402336"/>
           </a:xfrm>
           <a:prstGeom prst="rect">
@@ -25422,7 +25422,7 @@
         </p:nvSpPr>
         <p:spPr>
           <a:xfrm>
-            <a:off x="923544" y="3895344"/>
+            <a:off x="923544" y="3877056"/>
             <a:ext cx="2972714" cy="336042"/>
           </a:xfrm>
           <a:prstGeom prst="rect">
@@ -25461,8 +25461,8 @@
         </p:nvSpPr>
         <p:spPr>
           <a:xfrm>
-            <a:off x="923544" y="4304538"/>
-            <a:ext cx="2972714" cy="1126998"/>
+            <a:off x="923544" y="4286250"/>
+            <a:ext cx="2972714" cy="1090422"/>
           </a:xfrm>
           <a:prstGeom prst="rect">
             <a:avLst/>
@@ -25543,12 +25543,12 @@
         </p:nvSpPr>
         <p:spPr>
           <a:xfrm>
-            <a:off x="4371746" y="3127248"/>
-            <a:ext cx="3448202" cy="2542032"/>
+            <a:off x="4371746" y="3108960"/>
+            <a:ext cx="3448202" cy="2505456"/>
           </a:xfrm>
           <a:prstGeom prst="roundRect">
             <a:avLst>
-              <a:gd name="adj" fmla="val 2158"/>
+              <a:gd name="adj" fmla="val 2190"/>
             </a:avLst>
           </a:prstGeom>
           <a:solidFill>
@@ -25572,7 +25572,7 @@
         </p:nvSpPr>
         <p:spPr>
           <a:xfrm>
-            <a:off x="4609490" y="3364992"/>
+            <a:off x="4609490" y="3346704"/>
             <a:ext cx="402336" cy="402336"/>
           </a:xfrm>
           <a:prstGeom prst="ellipse">
@@ -25592,7 +25592,7 @@
         </p:nvSpPr>
         <p:spPr>
           <a:xfrm>
-            <a:off x="4609490" y="3364992"/>
+            <a:off x="4609490" y="3346704"/>
             <a:ext cx="402336" cy="402336"/>
           </a:xfrm>
           <a:prstGeom prst="rect">
@@ -25631,7 +25631,7 @@
         </p:nvSpPr>
         <p:spPr>
           <a:xfrm>
-            <a:off x="4609490" y="3895344"/>
+            <a:off x="4609490" y="3877056"/>
             <a:ext cx="2972714" cy="336042"/>
           </a:xfrm>
           <a:prstGeom prst="rect">
@@ -25670,8 +25670,8 @@
         </p:nvSpPr>
         <p:spPr>
           <a:xfrm>
-            <a:off x="4609490" y="4304538"/>
-            <a:ext cx="2972714" cy="1126998"/>
+            <a:off x="4609490" y="4286250"/>
+            <a:ext cx="2972714" cy="1090422"/>
           </a:xfrm>
           <a:prstGeom prst="rect">
             <a:avLst/>
@@ -25752,12 +25752,12 @@
         </p:nvSpPr>
         <p:spPr>
           <a:xfrm>
-            <a:off x="8057693" y="3127248"/>
-            <a:ext cx="3448202" cy="2542032"/>
+            <a:off x="8057693" y="3108960"/>
+            <a:ext cx="3448202" cy="2505456"/>
           </a:xfrm>
           <a:prstGeom prst="roundRect">
             <a:avLst>
-              <a:gd name="adj" fmla="val 2158"/>
+              <a:gd name="adj" fmla="val 2190"/>
             </a:avLst>
           </a:prstGeom>
           <a:solidFill>
@@ -25781,7 +25781,7 @@
         </p:nvSpPr>
         <p:spPr>
           <a:xfrm>
-            <a:off x="8295437" y="3364992"/>
+            <a:off x="8295437" y="3346704"/>
             <a:ext cx="402336" cy="402336"/>
           </a:xfrm>
           <a:prstGeom prst="ellipse">
@@ -25801,7 +25801,7 @@
         </p:nvSpPr>
         <p:spPr>
           <a:xfrm>
-            <a:off x="8295437" y="3364992"/>
+            <a:off x="8295437" y="3346704"/>
             <a:ext cx="402336" cy="402336"/>
           </a:xfrm>
           <a:prstGeom prst="rect">
@@ -25840,7 +25840,7 @@
         </p:nvSpPr>
         <p:spPr>
           <a:xfrm>
-            <a:off x="8295437" y="3895344"/>
+            <a:off x="8295437" y="3877056"/>
             <a:ext cx="2972714" cy="336042"/>
           </a:xfrm>
           <a:prstGeom prst="rect">
@@ -25879,8 +25879,8 @@
         </p:nvSpPr>
         <p:spPr>
           <a:xfrm>
-            <a:off x="8295437" y="4304538"/>
-            <a:ext cx="2972714" cy="1126998"/>
+            <a:off x="8295437" y="4286250"/>
+            <a:ext cx="2972714" cy="1090422"/>
           </a:xfrm>
           <a:prstGeom prst="rect">
             <a:avLst/>
@@ -25942,11 +25942,11 @@
         <p:spPr>
           <a:xfrm>
             <a:off x="685800" y="5779008"/>
-            <a:ext cx="10820095" cy="457200"/>
+            <a:ext cx="10820095" cy="438912"/>
           </a:xfrm>
           <a:prstGeom prst="roundRect">
             <a:avLst>
-              <a:gd name="adj" fmla="val 20000"/>
+              <a:gd name="adj" fmla="val 20833"/>
             </a:avLst>
           </a:prstGeom>
           <a:solidFill>
@@ -25964,7 +25964,7 @@
         <p:spPr>
           <a:xfrm>
             <a:off x="960120" y="5779008"/>
-            <a:ext cx="10271455" cy="457200"/>
+            <a:ext cx="10271455" cy="438912"/>
           </a:xfrm>
           <a:prstGeom prst="rect">
             <a:avLst/>
@@ -28038,7 +28038,7 @@
                 <a:ea typeface="맑은 고딕" pitchFamily="34" charset="-122"/>
                 <a:cs typeface="맑은 고딕" pitchFamily="34" charset="-120"/>
               </a:rPr>
-              <a:t>급하다 · 목소리가 크다</a:t>
+              <a:t>급하고 목소리가 크다</a:t>
             </a:r>
             <a:endParaRPr lang="en-US" sz="1800" dirty="0"/>
           </a:p>
@@ -28212,7 +28212,7 @@
                 <a:ea typeface="맑은 고딕" pitchFamily="34" charset="-122"/>
                 <a:cs typeface="맑은 고딕" pitchFamily="34" charset="-120"/>
               </a:rPr>
-              <a:t>예수님의 성품을 닮아 갔다</a:t>
+              <a:t>예수님을 닮아 갔다</a:t>
             </a:r>
             <a:endParaRPr lang="en-US" sz="1800" dirty="0"/>
           </a:p>
@@ -28233,7 +28233,7 @@
                 <a:ea typeface="맑은 고딕" pitchFamily="34" charset="-122"/>
                 <a:cs typeface="맑은 고딕" pitchFamily="34" charset="-120"/>
               </a:rPr>
-              <a:t>사랑을 가장 중요하게 여겼다</a:t>
+              <a:t>사랑을 중요하게 여겼다</a:t>
             </a:r>
             <a:endParaRPr lang="en-US" sz="1800" dirty="0"/>
           </a:p>
@@ -28254,7 +28254,7 @@
                 <a:ea typeface="맑은 고딕" pitchFamily="34" charset="-122"/>
                 <a:cs typeface="맑은 고딕" pitchFamily="34" charset="-120"/>
               </a:rPr>
-              <a:t>‘서로 사랑하라’ 새 계명</a:t>
+              <a:t>새 계명 : 서로 사랑하라</a:t>
             </a:r>
             <a:endParaRPr lang="en-US" sz="1800" dirty="0"/>
           </a:p>
@@ -28275,7 +28275,7 @@
                 <a:ea typeface="맑은 고딕" pitchFamily="34" charset="-122"/>
                 <a:cs typeface="맑은 고딕" pitchFamily="34" charset="-120"/>
               </a:rPr>
-              <a:t>마침내 사랑의 사도가 되었다</a:t>
+              <a:t>사랑의 사도가 되었다</a:t>
             </a:r>
             <a:endParaRPr lang="en-US" sz="1800" dirty="0"/>
           </a:p>
@@ -29857,7 +29857,7 @@
         <p:spPr>
           <a:xfrm>
             <a:off x="923544" y="2377440"/>
-            <a:ext cx="2051228" cy="304038"/>
+            <a:ext cx="2051228" cy="608076"/>
           </a:xfrm>
           <a:prstGeom prst="rect">
             <a:avLst/>
@@ -29895,8 +29895,8 @@
         </p:nvSpPr>
         <p:spPr>
           <a:xfrm>
-            <a:off x="923544" y="2754630"/>
-            <a:ext cx="2051228" cy="1469898"/>
+            <a:off x="923544" y="3058668"/>
+            <a:ext cx="2051228" cy="1165860"/>
           </a:xfrm>
           <a:prstGeom prst="rect">
             <a:avLst/>
@@ -30046,7 +30046,7 @@
         <p:spPr>
           <a:xfrm>
             <a:off x="3688004" y="2377440"/>
-            <a:ext cx="2051228" cy="304038"/>
+            <a:ext cx="2051228" cy="608076"/>
           </a:xfrm>
           <a:prstGeom prst="rect">
             <a:avLst/>
@@ -30084,8 +30084,8 @@
         </p:nvSpPr>
         <p:spPr>
           <a:xfrm>
-            <a:off x="3688004" y="2754630"/>
-            <a:ext cx="2051228" cy="1469898"/>
+            <a:off x="3688004" y="3058668"/>
+            <a:ext cx="2051228" cy="1165860"/>
           </a:xfrm>
           <a:prstGeom prst="rect">
             <a:avLst/>
@@ -30235,7 +30235,7 @@
         <p:spPr>
           <a:xfrm>
             <a:off x="6452464" y="2377440"/>
-            <a:ext cx="2051228" cy="304038"/>
+            <a:ext cx="2051228" cy="608076"/>
           </a:xfrm>
           <a:prstGeom prst="rect">
             <a:avLst/>
@@ -30273,8 +30273,8 @@
         </p:nvSpPr>
         <p:spPr>
           <a:xfrm>
-            <a:off x="6452464" y="2754630"/>
-            <a:ext cx="2051228" cy="1469898"/>
+            <a:off x="6452464" y="3058668"/>
+            <a:ext cx="2051228" cy="1165860"/>
           </a:xfrm>
           <a:prstGeom prst="rect">
             <a:avLst/>
@@ -30877,7 +30877,7 @@
         <p:spPr>
           <a:xfrm>
             <a:off x="923544" y="2395728"/>
-            <a:ext cx="2972714" cy="352044"/>
+            <a:ext cx="2972714" cy="704088"/>
           </a:xfrm>
           <a:prstGeom prst="rect">
             <a:avLst/>
@@ -30915,8 +30915,8 @@
         </p:nvSpPr>
         <p:spPr>
           <a:xfrm>
-            <a:off x="923544" y="2820924"/>
-            <a:ext cx="2972714" cy="1769364"/>
+            <a:off x="923544" y="3172968"/>
+            <a:ext cx="2972714" cy="1417320"/>
           </a:xfrm>
           <a:prstGeom prst="rect">
             <a:avLst/>
@@ -31304,7 +31304,7 @@
         <p:spPr>
           <a:xfrm>
             <a:off x="8295437" y="2395728"/>
-            <a:ext cx="2972714" cy="352044"/>
+            <a:ext cx="2972714" cy="704088"/>
           </a:xfrm>
           <a:prstGeom prst="rect">
             <a:avLst/>
@@ -31342,8 +31342,8 @@
         </p:nvSpPr>
         <p:spPr>
           <a:xfrm>
-            <a:off x="8295437" y="2820924"/>
-            <a:ext cx="2972714" cy="1769364"/>
+            <a:off x="8295437" y="3172968"/>
+            <a:ext cx="2972714" cy="1417320"/>
           </a:xfrm>
           <a:prstGeom prst="rect">
             <a:avLst/>
@@ -31668,7 +31668,7 @@
         </p:nvSpPr>
         <p:spPr>
           <a:xfrm>
-            <a:off x="685800" y="1554480"/>
+            <a:off x="685800" y="1536192"/>
             <a:ext cx="5291176" cy="2011680"/>
           </a:xfrm>
           <a:prstGeom prst="roundRect">
@@ -31697,7 +31697,7 @@
         </p:nvSpPr>
         <p:spPr>
           <a:xfrm>
-            <a:off x="923544" y="1792224"/>
+            <a:off x="923544" y="1773936"/>
             <a:ext cx="402336" cy="402336"/>
           </a:xfrm>
           <a:prstGeom prst="ellipse">
@@ -31717,7 +31717,7 @@
         </p:nvSpPr>
         <p:spPr>
           <a:xfrm>
-            <a:off x="923544" y="1792224"/>
+            <a:off x="923544" y="1773936"/>
             <a:ext cx="402336" cy="402336"/>
           </a:xfrm>
           <a:prstGeom prst="rect">
@@ -31756,7 +31756,7 @@
         </p:nvSpPr>
         <p:spPr>
           <a:xfrm>
-            <a:off x="923544" y="2322576"/>
+            <a:off x="923544" y="2304288"/>
             <a:ext cx="4815688" cy="352044"/>
           </a:xfrm>
           <a:prstGeom prst="rect">
@@ -31795,7 +31795,7 @@
         </p:nvSpPr>
         <p:spPr>
           <a:xfrm>
-            <a:off x="923544" y="2747772"/>
+            <a:off x="923544" y="2729484"/>
             <a:ext cx="4815688" cy="580644"/>
           </a:xfrm>
           <a:prstGeom prst="rect">
@@ -31857,7 +31857,7 @@
         </p:nvSpPr>
         <p:spPr>
           <a:xfrm>
-            <a:off x="6214720" y="1554480"/>
+            <a:off x="6214720" y="1536192"/>
             <a:ext cx="5291176" cy="2011680"/>
           </a:xfrm>
           <a:prstGeom prst="roundRect">
@@ -31886,7 +31886,7 @@
         </p:nvSpPr>
         <p:spPr>
           <a:xfrm>
-            <a:off x="6452464" y="1792224"/>
+            <a:off x="6452464" y="1773936"/>
             <a:ext cx="402336" cy="402336"/>
           </a:xfrm>
           <a:prstGeom prst="ellipse">
@@ -31906,7 +31906,7 @@
         </p:nvSpPr>
         <p:spPr>
           <a:xfrm>
-            <a:off x="6452464" y="1792224"/>
+            <a:off x="6452464" y="1773936"/>
             <a:ext cx="402336" cy="402336"/>
           </a:xfrm>
           <a:prstGeom prst="rect">
@@ -31945,7 +31945,7 @@
         </p:nvSpPr>
         <p:spPr>
           <a:xfrm>
-            <a:off x="6452464" y="2322576"/>
+            <a:off x="6452464" y="2304288"/>
             <a:ext cx="4815688" cy="352044"/>
           </a:xfrm>
           <a:prstGeom prst="rect">
@@ -31984,7 +31984,7 @@
         </p:nvSpPr>
         <p:spPr>
           <a:xfrm>
-            <a:off x="6452464" y="2747772"/>
+            <a:off x="6452464" y="2729484"/>
             <a:ext cx="4815688" cy="580644"/>
           </a:xfrm>
           <a:prstGeom prst="rect">
@@ -32046,7 +32046,7 @@
         </p:nvSpPr>
         <p:spPr>
           <a:xfrm>
-            <a:off x="685800" y="3639312"/>
+            <a:off x="685800" y="3749040"/>
             <a:ext cx="420624" cy="420624"/>
           </a:xfrm>
           <a:prstGeom prst="ellipse">
@@ -32066,7 +32066,7 @@
         </p:nvSpPr>
         <p:spPr>
           <a:xfrm>
-            <a:off x="685800" y="3639312"/>
+            <a:off x="685800" y="3749040"/>
             <a:ext cx="420624" cy="420624"/>
           </a:xfrm>
           <a:prstGeom prst="rect">
@@ -32105,7 +32105,7 @@
         </p:nvSpPr>
         <p:spPr>
           <a:xfrm>
-            <a:off x="1252728" y="3657600"/>
+            <a:off x="1252728" y="3767328"/>
             <a:ext cx="10253167" cy="365760"/>
           </a:xfrm>
           <a:prstGeom prst="rect">
@@ -32144,7 +32144,7 @@
         </p:nvSpPr>
         <p:spPr>
           <a:xfrm>
-            <a:off x="685800" y="4114800"/>
+            <a:off x="685800" y="4206240"/>
             <a:ext cx="3448202" cy="2011680"/>
           </a:xfrm>
           <a:prstGeom prst="roundRect">
@@ -32173,7 +32173,7 @@
         </p:nvSpPr>
         <p:spPr>
           <a:xfrm>
-            <a:off x="923544" y="4352544"/>
+            <a:off x="923544" y="4443984"/>
             <a:ext cx="405079" cy="402336"/>
           </a:xfrm>
           <a:prstGeom prst="ellipse">
@@ -32193,7 +32193,7 @@
         </p:nvSpPr>
         <p:spPr>
           <a:xfrm>
-            <a:off x="923544" y="4352544"/>
+            <a:off x="923544" y="4443984"/>
             <a:ext cx="405079" cy="402336"/>
           </a:xfrm>
           <a:prstGeom prst="rect">
@@ -32232,7 +32232,7 @@
         </p:nvSpPr>
         <p:spPr>
           <a:xfrm>
-            <a:off x="923544" y="4882896"/>
+            <a:off x="923544" y="4974336"/>
             <a:ext cx="2972714" cy="336042"/>
           </a:xfrm>
           <a:prstGeom prst="rect">
@@ -32271,7 +32271,7 @@
         </p:nvSpPr>
         <p:spPr>
           <a:xfrm>
-            <a:off x="923544" y="5292090"/>
+            <a:off x="923544" y="5383530"/>
             <a:ext cx="2972714" cy="596646"/>
           </a:xfrm>
           <a:prstGeom prst="rect">
@@ -32333,7 +32333,7 @@
         </p:nvSpPr>
         <p:spPr>
           <a:xfrm>
-            <a:off x="4371746" y="4114800"/>
+            <a:off x="4371746" y="4206240"/>
             <a:ext cx="3448202" cy="2011680"/>
           </a:xfrm>
           <a:prstGeom prst="roundRect">
@@ -32362,7 +32362,7 @@
         </p:nvSpPr>
         <p:spPr>
           <a:xfrm>
-            <a:off x="4609490" y="4352544"/>
+            <a:off x="4609490" y="4443984"/>
             <a:ext cx="405079" cy="402336"/>
           </a:xfrm>
           <a:prstGeom prst="ellipse">
@@ -32382,7 +32382,7 @@
         </p:nvSpPr>
         <p:spPr>
           <a:xfrm>
-            <a:off x="4609490" y="4352544"/>
+            <a:off x="4609490" y="4443984"/>
             <a:ext cx="405079" cy="402336"/>
           </a:xfrm>
           <a:prstGeom prst="rect">
@@ -32421,7 +32421,7 @@
         </p:nvSpPr>
         <p:spPr>
           <a:xfrm>
-            <a:off x="4609490" y="4882896"/>
+            <a:off x="4609490" y="4974336"/>
             <a:ext cx="2972714" cy="336042"/>
           </a:xfrm>
           <a:prstGeom prst="rect">
@@ -32460,7 +32460,7 @@
         </p:nvSpPr>
         <p:spPr>
           <a:xfrm>
-            <a:off x="4609490" y="5292090"/>
+            <a:off x="4609490" y="5383530"/>
             <a:ext cx="2972714" cy="596646"/>
           </a:xfrm>
           <a:prstGeom prst="rect">
@@ -32522,7 +32522,7 @@
         </p:nvSpPr>
         <p:spPr>
           <a:xfrm>
-            <a:off x="8057693" y="4114800"/>
+            <a:off x="8057693" y="4206240"/>
             <a:ext cx="3448202" cy="2011680"/>
           </a:xfrm>
           <a:prstGeom prst="roundRect">
@@ -32551,7 +32551,7 @@
         </p:nvSpPr>
         <p:spPr>
           <a:xfrm>
-            <a:off x="8295437" y="4352544"/>
+            <a:off x="8295437" y="4443984"/>
             <a:ext cx="405079" cy="402336"/>
           </a:xfrm>
           <a:prstGeom prst="ellipse">
@@ -32571,7 +32571,7 @@
         </p:nvSpPr>
         <p:spPr>
           <a:xfrm>
-            <a:off x="8295437" y="4352544"/>
+            <a:off x="8295437" y="4443984"/>
             <a:ext cx="405079" cy="402336"/>
           </a:xfrm>
           <a:prstGeom prst="rect">
@@ -32610,7 +32610,7 @@
         </p:nvSpPr>
         <p:spPr>
           <a:xfrm>
-            <a:off x="8295437" y="4882896"/>
+            <a:off x="8295437" y="4974336"/>
             <a:ext cx="2972714" cy="336042"/>
           </a:xfrm>
           <a:prstGeom prst="rect">
@@ -32649,7 +32649,7 @@
         </p:nvSpPr>
         <p:spPr>
           <a:xfrm>
-            <a:off x="8295437" y="5292090"/>
+            <a:off x="8295437" y="5383530"/>
             <a:ext cx="2972714" cy="596646"/>
           </a:xfrm>
           <a:prstGeom prst="rect">
@@ -34455,7 +34455,7 @@
         <p:spPr>
           <a:xfrm>
             <a:off x="923544" y="3547872"/>
-            <a:ext cx="2972714" cy="320040"/>
+            <a:ext cx="2972714" cy="640080"/>
           </a:xfrm>
           <a:prstGeom prst="rect">
             <a:avLst/>
@@ -34493,8 +34493,8 @@
         </p:nvSpPr>
         <p:spPr>
           <a:xfrm>
-            <a:off x="923544" y="3941064"/>
-            <a:ext cx="2972714" cy="1234440"/>
+            <a:off x="923544" y="4261104"/>
+            <a:ext cx="2972714" cy="914400"/>
           </a:xfrm>
           <a:prstGeom prst="rect">
             <a:avLst/>
@@ -35126,7 +35126,7 @@
         <p:spPr>
           <a:xfrm>
             <a:off x="923544" y="2340864"/>
-            <a:ext cx="2972714" cy="320040"/>
+            <a:ext cx="2972714" cy="640080"/>
           </a:xfrm>
           <a:prstGeom prst="rect">
             <a:avLst/>
@@ -35164,8 +35164,8 @@
         </p:nvSpPr>
         <p:spPr>
           <a:xfrm>
-            <a:off x="923544" y="2734056"/>
-            <a:ext cx="2972714" cy="878649"/>
+            <a:off x="923544" y="3054096"/>
+            <a:ext cx="2972714" cy="558610"/>
           </a:xfrm>
           <a:prstGeom prst="rect">
             <a:avLst/>
@@ -35354,7 +35354,7 @@
         <p:spPr>
           <a:xfrm>
             <a:off x="4609490" y="2340864"/>
-            <a:ext cx="2972714" cy="320040"/>
+            <a:ext cx="2972714" cy="640080"/>
           </a:xfrm>
           <a:prstGeom prst="rect">
             <a:avLst/>
@@ -35392,8 +35392,8 @@
         </p:nvSpPr>
         <p:spPr>
           <a:xfrm>
-            <a:off x="4609490" y="2734056"/>
-            <a:ext cx="2972714" cy="878649"/>
+            <a:off x="4609490" y="3054096"/>
+            <a:ext cx="2972714" cy="558610"/>
           </a:xfrm>
           <a:prstGeom prst="rect">
             <a:avLst/>
@@ -36224,12 +36224,12 @@
         </p:nvSpPr>
         <p:spPr>
           <a:xfrm>
-            <a:off x="685800" y="1591056"/>
-            <a:ext cx="5291176" cy="3712464"/>
+            <a:off x="685800" y="1572768"/>
+            <a:ext cx="5291176" cy="3931920"/>
           </a:xfrm>
           <a:prstGeom prst="roundRect">
             <a:avLst>
-              <a:gd name="adj" fmla="val 1478"/>
+              <a:gd name="adj" fmla="val 1395"/>
             </a:avLst>
           </a:prstGeom>
           <a:solidFill>
@@ -36253,7 +36253,7 @@
         </p:nvSpPr>
         <p:spPr>
           <a:xfrm>
-            <a:off x="923544" y="1828800"/>
+            <a:off x="923544" y="1810512"/>
             <a:ext cx="530352" cy="530352"/>
           </a:xfrm>
           <a:prstGeom prst="ellipse">
@@ -36273,7 +36273,7 @@
         </p:nvSpPr>
         <p:spPr>
           <a:xfrm>
-            <a:off x="923544" y="1828800"/>
+            <a:off x="923544" y="1810512"/>
             <a:ext cx="530352" cy="530352"/>
           </a:xfrm>
           <a:prstGeom prst="rect">
@@ -36312,7 +36312,7 @@
         </p:nvSpPr>
         <p:spPr>
           <a:xfrm>
-            <a:off x="923544" y="2487168"/>
+            <a:off x="923544" y="2468880"/>
             <a:ext cx="4815688" cy="448056"/>
           </a:xfrm>
           <a:prstGeom prst="rect">
@@ -36351,8 +36351,8 @@
         </p:nvSpPr>
         <p:spPr>
           <a:xfrm>
-            <a:off x="923544" y="3008376"/>
-            <a:ext cx="4815688" cy="2057400"/>
+            <a:off x="923544" y="2990088"/>
+            <a:ext cx="4815688" cy="2276856"/>
           </a:xfrm>
           <a:prstGeom prst="rect">
             <a:avLst/>
@@ -36491,12 +36491,12 @@
         </p:nvSpPr>
         <p:spPr>
           <a:xfrm>
-            <a:off x="6214720" y="1591056"/>
-            <a:ext cx="5291176" cy="3712464"/>
+            <a:off x="6214720" y="1572768"/>
+            <a:ext cx="5291176" cy="3931920"/>
           </a:xfrm>
           <a:prstGeom prst="roundRect">
             <a:avLst>
-              <a:gd name="adj" fmla="val 1478"/>
+              <a:gd name="adj" fmla="val 1395"/>
             </a:avLst>
           </a:prstGeom>
           <a:solidFill>
@@ -36520,7 +36520,7 @@
         </p:nvSpPr>
         <p:spPr>
           <a:xfrm>
-            <a:off x="6452464" y="1828800"/>
+            <a:off x="6452464" y="1810512"/>
             <a:ext cx="530352" cy="530352"/>
           </a:xfrm>
           <a:prstGeom prst="ellipse">
@@ -36540,7 +36540,7 @@
         </p:nvSpPr>
         <p:spPr>
           <a:xfrm>
-            <a:off x="6452464" y="1828800"/>
+            <a:off x="6452464" y="1810512"/>
             <a:ext cx="530352" cy="530352"/>
           </a:xfrm>
           <a:prstGeom prst="rect">
@@ -36579,7 +36579,7 @@
         </p:nvSpPr>
         <p:spPr>
           <a:xfrm>
-            <a:off x="6452464" y="2487168"/>
+            <a:off x="6452464" y="2468880"/>
             <a:ext cx="4815688" cy="448056"/>
           </a:xfrm>
           <a:prstGeom prst="rect">
@@ -36618,8 +36618,8 @@
         </p:nvSpPr>
         <p:spPr>
           <a:xfrm>
-            <a:off x="6452464" y="3008376"/>
-            <a:ext cx="4815688" cy="2057400"/>
+            <a:off x="6452464" y="2990088"/>
+            <a:ext cx="4815688" cy="2276856"/>
           </a:xfrm>
           <a:prstGeom prst="rect">
             <a:avLst/>
@@ -36758,12 +36758,12 @@
         </p:nvSpPr>
         <p:spPr>
           <a:xfrm>
-            <a:off x="685800" y="5468112"/>
-            <a:ext cx="10820095" cy="768096"/>
+            <a:off x="685800" y="5669280"/>
+            <a:ext cx="10820095" cy="566928"/>
           </a:xfrm>
           <a:prstGeom prst="roundRect">
             <a:avLst>
-              <a:gd name="adj" fmla="val 11905"/>
+              <a:gd name="adj" fmla="val 16129"/>
             </a:avLst>
           </a:prstGeom>
           <a:solidFill>
@@ -36780,8 +36780,8 @@
         </p:nvSpPr>
         <p:spPr>
           <a:xfrm>
-            <a:off x="960120" y="5468112"/>
-            <a:ext cx="10271455" cy="768096"/>
+            <a:off x="960120" y="5669280"/>
+            <a:ext cx="10271455" cy="566928"/>
           </a:xfrm>
           <a:prstGeom prst="rect">
             <a:avLst/>
@@ -46011,8 +46011,8 @@
         </p:nvSpPr>
         <p:spPr>
           <a:xfrm>
-            <a:off x="685800" y="4443984"/>
-            <a:ext cx="1605229" cy="1773936"/>
+            <a:off x="685800" y="4389120"/>
+            <a:ext cx="1605229" cy="1828800"/>
           </a:xfrm>
           <a:prstGeom prst="roundRect">
             <a:avLst>
@@ -46040,8 +46040,8 @@
         </p:nvSpPr>
         <p:spPr>
           <a:xfrm>
-            <a:off x="850392" y="4608576"/>
-            <a:ext cx="1276045" cy="480060"/>
+            <a:off x="841248" y="4544568"/>
+            <a:ext cx="1294333" cy="512064"/>
           </a:xfrm>
           <a:prstGeom prst="rect">
             <a:avLst/>
@@ -46057,7 +46057,7 @@
               <a:buNone/>
             </a:pPr>
             <a:r>
-              <a:rPr lang="en-US" sz="1500" b="1" dirty="0">
+              <a:rPr lang="en-US" sz="1600" b="1" dirty="0">
                 <a:solidFill>
                   <a:schemeClr val="tx1"/>
                 </a:solidFill>
@@ -46067,7 +46067,7 @@
               </a:rPr>
               <a:t>일곱 자기선언</a:t>
             </a:r>
-            <a:endParaRPr lang="en-US" sz="1500" dirty="0"/>
+            <a:endParaRPr lang="en-US" sz="1600" dirty="0"/>
           </a:p>
         </p:txBody>
       </p:sp>
@@ -46079,8 +46079,8 @@
         </p:nvSpPr>
         <p:spPr>
           <a:xfrm>
-            <a:off x="850392" y="5161788"/>
-            <a:ext cx="1276045" cy="891540"/>
+            <a:off x="841248" y="5129784"/>
+            <a:ext cx="1294333" cy="932688"/>
           </a:xfrm>
           <a:prstGeom prst="rect">
             <a:avLst/>
@@ -46099,7 +46099,7 @@
               <a:buNone/>
             </a:pPr>
             <a:r>
-              <a:rPr lang="en-US" sz="1400" dirty="0">
+              <a:rPr lang="en-US" sz="1500" dirty="0">
                 <a:solidFill>
                   <a:schemeClr val="accent3"/>
                 </a:solidFill>
@@ -46109,7 +46109,7 @@
               </a:rPr>
               <a:t>떡 빛 문 목자</a:t>
             </a:r>
-            <a:endParaRPr lang="en-US" sz="1400" dirty="0"/>
+            <a:endParaRPr lang="en-US" sz="1500" dirty="0"/>
           </a:p>
           <a:p>
             <a:pPr indent="0" marL="0">
@@ -46119,7 +46119,7 @@
               <a:buNone/>
             </a:pPr>
             <a:r>
-              <a:rPr lang="en-US" sz="1400" dirty="0">
+              <a:rPr lang="en-US" sz="1500" dirty="0">
                 <a:solidFill>
                   <a:schemeClr val="accent3"/>
                 </a:solidFill>
@@ -46129,7 +46129,7 @@
               </a:rPr>
               <a:t>부활 길 포도나무</a:t>
             </a:r>
-            <a:endParaRPr lang="en-US" sz="1400" dirty="0"/>
+            <a:endParaRPr lang="en-US" sz="1500" dirty="0"/>
           </a:p>
         </p:txBody>
       </p:sp>
@@ -46141,8 +46141,8 @@
         </p:nvSpPr>
         <p:spPr>
           <a:xfrm>
-            <a:off x="2528773" y="4443984"/>
-            <a:ext cx="1605229" cy="1773936"/>
+            <a:off x="2528773" y="4389120"/>
+            <a:ext cx="1605229" cy="1828800"/>
           </a:xfrm>
           <a:prstGeom prst="roundRect">
             <a:avLst>
@@ -46170,8 +46170,8 @@
         </p:nvSpPr>
         <p:spPr>
           <a:xfrm>
-            <a:off x="2693365" y="4608576"/>
-            <a:ext cx="1276045" cy="480060"/>
+            <a:off x="2684221" y="4544568"/>
+            <a:ext cx="1294333" cy="512064"/>
           </a:xfrm>
           <a:prstGeom prst="rect">
             <a:avLst/>
@@ -46187,7 +46187,7 @@
               <a:buNone/>
             </a:pPr>
             <a:r>
-              <a:rPr lang="en-US" sz="1500" b="1" dirty="0">
+              <a:rPr lang="en-US" sz="1600" b="1" dirty="0">
                 <a:solidFill>
                   <a:schemeClr val="tx1"/>
                 </a:solidFill>
@@ -46197,7 +46197,7 @@
               </a:rPr>
               <a:t>성령의 복음서</a:t>
             </a:r>
-            <a:endParaRPr lang="en-US" sz="1500" dirty="0"/>
+            <a:endParaRPr lang="en-US" sz="1600" dirty="0"/>
           </a:p>
         </p:txBody>
       </p:sp>
@@ -46209,8 +46209,8 @@
         </p:nvSpPr>
         <p:spPr>
           <a:xfrm>
-            <a:off x="2693365" y="5161788"/>
-            <a:ext cx="1276045" cy="891540"/>
+            <a:off x="2684221" y="5129784"/>
+            <a:ext cx="1294333" cy="932688"/>
           </a:xfrm>
           <a:prstGeom prst="rect">
             <a:avLst/>
@@ -46229,7 +46229,7 @@
               <a:buNone/>
             </a:pPr>
             <a:r>
-              <a:rPr lang="en-US" sz="1400" dirty="0">
+              <a:rPr lang="en-US" sz="1500" dirty="0">
                 <a:solidFill>
                   <a:schemeClr val="accent3"/>
                 </a:solidFill>
@@ -46239,7 +46239,7 @@
               </a:rPr>
               <a:t>하나님은 영이시다</a:t>
             </a:r>
-            <a:endParaRPr lang="en-US" sz="1400" dirty="0"/>
+            <a:endParaRPr lang="en-US" sz="1500" dirty="0"/>
           </a:p>
         </p:txBody>
       </p:sp>
@@ -46251,8 +46251,8 @@
         </p:nvSpPr>
         <p:spPr>
           <a:xfrm>
-            <a:off x="4371746" y="4443984"/>
-            <a:ext cx="1605229" cy="1773936"/>
+            <a:off x="4371746" y="4389120"/>
+            <a:ext cx="1605229" cy="1828800"/>
           </a:xfrm>
           <a:prstGeom prst="roundRect">
             <a:avLst>
@@ -46280,8 +46280,8 @@
         </p:nvSpPr>
         <p:spPr>
           <a:xfrm>
-            <a:off x="4536338" y="4608576"/>
-            <a:ext cx="1276045" cy="480060"/>
+            <a:off x="4527194" y="4544568"/>
+            <a:ext cx="1294333" cy="512064"/>
           </a:xfrm>
           <a:prstGeom prst="rect">
             <a:avLst/>
@@ -46297,7 +46297,7 @@
               <a:buNone/>
             </a:pPr>
             <a:r>
-              <a:rPr lang="en-US" sz="1500" b="1" dirty="0">
+              <a:rPr lang="en-US" sz="1600" b="1" dirty="0">
                 <a:solidFill>
                   <a:schemeClr val="tx1"/>
                 </a:solidFill>
@@ -46307,7 +46307,7 @@
               </a:rPr>
               <a:t>영광의 복음서</a:t>
             </a:r>
-            <a:endParaRPr lang="en-US" sz="1500" dirty="0"/>
+            <a:endParaRPr lang="en-US" sz="1600" dirty="0"/>
           </a:p>
         </p:txBody>
       </p:sp>
@@ -46319,8 +46319,8 @@
         </p:nvSpPr>
         <p:spPr>
           <a:xfrm>
-            <a:off x="4536338" y="5161788"/>
-            <a:ext cx="1276045" cy="891540"/>
+            <a:off x="4527194" y="5129784"/>
+            <a:ext cx="1294333" cy="932688"/>
           </a:xfrm>
           <a:prstGeom prst="rect">
             <a:avLst/>
@@ -46339,7 +46339,7 @@
               <a:buNone/>
             </a:pPr>
             <a:r>
-              <a:rPr lang="en-US" sz="1400" dirty="0">
+              <a:rPr lang="en-US" sz="1500" dirty="0">
                 <a:solidFill>
                   <a:schemeClr val="accent3"/>
                 </a:solidFill>
@@ -46349,7 +46349,7 @@
               </a:rPr>
               <a:t>1:14 · 17장</a:t>
             </a:r>
-            <a:endParaRPr lang="en-US" sz="1400" dirty="0"/>
+            <a:endParaRPr lang="en-US" sz="1500" dirty="0"/>
           </a:p>
         </p:txBody>
       </p:sp>
@@ -46361,8 +46361,8 @@
         </p:nvSpPr>
         <p:spPr>
           <a:xfrm>
-            <a:off x="6214720" y="4443984"/>
-            <a:ext cx="1605229" cy="1773936"/>
+            <a:off x="6214720" y="4389120"/>
+            <a:ext cx="1605229" cy="1828800"/>
           </a:xfrm>
           <a:prstGeom prst="roundRect">
             <a:avLst>
@@ -46390,8 +46390,8 @@
         </p:nvSpPr>
         <p:spPr>
           <a:xfrm>
-            <a:off x="6379312" y="4608576"/>
-            <a:ext cx="1276045" cy="480060"/>
+            <a:off x="6370168" y="4544568"/>
+            <a:ext cx="1294333" cy="512064"/>
           </a:xfrm>
           <a:prstGeom prst="rect">
             <a:avLst/>
@@ -46407,7 +46407,7 @@
               <a:buNone/>
             </a:pPr>
             <a:r>
-              <a:rPr lang="en-US" sz="1500" b="1" dirty="0">
+              <a:rPr lang="en-US" sz="1600" b="1" dirty="0">
                 <a:solidFill>
                   <a:schemeClr val="tx1"/>
                 </a:solidFill>
@@ -46417,7 +46417,7 @@
               </a:rPr>
               <a:t>사랑의 복음서</a:t>
             </a:r>
-            <a:endParaRPr lang="en-US" sz="1500" dirty="0"/>
+            <a:endParaRPr lang="en-US" sz="1600" dirty="0"/>
           </a:p>
         </p:txBody>
       </p:sp>
@@ -46429,8 +46429,8 @@
         </p:nvSpPr>
         <p:spPr>
           <a:xfrm>
-            <a:off x="6379312" y="5161788"/>
-            <a:ext cx="1276045" cy="891540"/>
+            <a:off x="6370168" y="5129784"/>
+            <a:ext cx="1294333" cy="932688"/>
           </a:xfrm>
           <a:prstGeom prst="rect">
             <a:avLst/>
@@ -46449,7 +46449,7 @@
               <a:buNone/>
             </a:pPr>
             <a:r>
-              <a:rPr lang="en-US" sz="1400" dirty="0">
+              <a:rPr lang="en-US" sz="1500" dirty="0">
                 <a:solidFill>
                   <a:schemeClr val="accent3"/>
                 </a:solidFill>
@@ -46459,7 +46459,7 @@
               </a:rPr>
               <a:t>서로 사랑하라</a:t>
             </a:r>
-            <a:endParaRPr lang="en-US" sz="1400" dirty="0"/>
+            <a:endParaRPr lang="en-US" sz="1500" dirty="0"/>
           </a:p>
         </p:txBody>
       </p:sp>
@@ -46471,8 +46471,8 @@
         </p:nvSpPr>
         <p:spPr>
           <a:xfrm>
-            <a:off x="8057693" y="4443984"/>
-            <a:ext cx="1605229" cy="1773936"/>
+            <a:off x="8057693" y="4389120"/>
+            <a:ext cx="1605229" cy="1828800"/>
           </a:xfrm>
           <a:prstGeom prst="roundRect">
             <a:avLst>
@@ -46500,8 +46500,8 @@
         </p:nvSpPr>
         <p:spPr>
           <a:xfrm>
-            <a:off x="8222285" y="4608576"/>
-            <a:ext cx="1276045" cy="240030"/>
+            <a:off x="8213141" y="4544568"/>
+            <a:ext cx="1294333" cy="512064"/>
           </a:xfrm>
           <a:prstGeom prst="rect">
             <a:avLst/>
@@ -46517,7 +46517,7 @@
               <a:buNone/>
             </a:pPr>
             <a:r>
-              <a:rPr lang="en-US" sz="1500" b="1" dirty="0">
+              <a:rPr lang="en-US" sz="1600" b="1" dirty="0">
                 <a:solidFill>
                   <a:schemeClr val="tx1"/>
                 </a:solidFill>
@@ -46527,7 +46527,7 @@
               </a:rPr>
               <a:t>일곱 표적</a:t>
             </a:r>
-            <a:endParaRPr lang="en-US" sz="1500" dirty="0"/>
+            <a:endParaRPr lang="en-US" sz="1600" dirty="0"/>
           </a:p>
         </p:txBody>
       </p:sp>
@@ -46539,8 +46539,8 @@
         </p:nvSpPr>
         <p:spPr>
           <a:xfrm>
-            <a:off x="8222285" y="4921758"/>
-            <a:ext cx="1276045" cy="1131570"/>
+            <a:off x="8213141" y="5129784"/>
+            <a:ext cx="1294333" cy="932688"/>
           </a:xfrm>
           <a:prstGeom prst="rect">
             <a:avLst/>
@@ -46559,7 +46559,7 @@
               <a:buNone/>
             </a:pPr>
             <a:r>
-              <a:rPr lang="en-US" sz="1400" dirty="0">
+              <a:rPr lang="en-US" sz="1500" dirty="0">
                 <a:solidFill>
                   <a:schemeClr val="accent3"/>
                 </a:solidFill>
@@ -46569,7 +46569,7 @@
               </a:rPr>
               <a:t>가왕베</a:t>
             </a:r>
-            <a:endParaRPr lang="en-US" sz="1400" dirty="0"/>
+            <a:endParaRPr lang="en-US" sz="1500" dirty="0"/>
           </a:p>
           <a:p>
             <a:pPr indent="0" marL="0">
@@ -46579,7 +46579,7 @@
               <a:buNone/>
             </a:pPr>
             <a:r>
-              <a:rPr lang="en-US" sz="1400" dirty="0">
+              <a:rPr lang="en-US" sz="1500" dirty="0">
                 <a:solidFill>
                   <a:schemeClr val="accent3"/>
                 </a:solidFill>
@@ -46589,7 +46589,7 @@
               </a:rPr>
               <a:t>오물실나</a:t>
             </a:r>
-            <a:endParaRPr lang="en-US" sz="1400" dirty="0"/>
+            <a:endParaRPr lang="en-US" sz="1500" dirty="0"/>
           </a:p>
         </p:txBody>
       </p:sp>
@@ -46601,8 +46601,8 @@
         </p:nvSpPr>
         <p:spPr>
           <a:xfrm>
-            <a:off x="9900666" y="4443984"/>
-            <a:ext cx="1605229" cy="1773936"/>
+            <a:off x="9900666" y="4389120"/>
+            <a:ext cx="1605229" cy="1828800"/>
           </a:xfrm>
           <a:prstGeom prst="roundRect">
             <a:avLst>
@@ -46630,8 +46630,8 @@
         </p:nvSpPr>
         <p:spPr>
           <a:xfrm>
-            <a:off x="10065258" y="4608576"/>
-            <a:ext cx="1276045" cy="480060"/>
+            <a:off x="10056114" y="4544568"/>
+            <a:ext cx="1294333" cy="512064"/>
           </a:xfrm>
           <a:prstGeom prst="rect">
             <a:avLst/>
@@ -46647,7 +46647,7 @@
               <a:buNone/>
             </a:pPr>
             <a:r>
-              <a:rPr lang="en-US" sz="1500" b="1" dirty="0">
+              <a:rPr lang="en-US" sz="1600" b="1" dirty="0">
                 <a:solidFill>
                   <a:schemeClr val="tx1"/>
                 </a:solidFill>
@@ -46657,7 +46657,7 @@
               </a:rPr>
               <a:t>유대 중심 사역</a:t>
             </a:r>
-            <a:endParaRPr lang="en-US" sz="1500" dirty="0"/>
+            <a:endParaRPr lang="en-US" sz="1600" dirty="0"/>
           </a:p>
         </p:txBody>
       </p:sp>
@@ -46669,8 +46669,8 @@
         </p:nvSpPr>
         <p:spPr>
           <a:xfrm>
-            <a:off x="10065258" y="5161788"/>
-            <a:ext cx="1276045" cy="891540"/>
+            <a:off x="10056114" y="5129784"/>
+            <a:ext cx="1294333" cy="932688"/>
           </a:xfrm>
           <a:prstGeom prst="rect">
             <a:avLst/>
@@ -46689,7 +46689,7 @@
               <a:buNone/>
             </a:pPr>
             <a:r>
-              <a:rPr lang="en-US" sz="1400" dirty="0">
+              <a:rPr lang="en-US" sz="1500" dirty="0">
                 <a:solidFill>
                   <a:schemeClr val="accent3"/>
                 </a:solidFill>
@@ -46699,7 +46699,7 @@
               </a:rPr>
               <a:t>명절마다</a:t>
             </a:r>
-            <a:endParaRPr lang="en-US" sz="1400" dirty="0"/>
+            <a:endParaRPr lang="en-US" sz="1500" dirty="0"/>
           </a:p>
           <a:p>
             <a:pPr indent="0" marL="0">
@@ -46709,7 +46709,7 @@
               <a:buNone/>
             </a:pPr>
             <a:r>
-              <a:rPr lang="en-US" sz="1400" dirty="0">
+              <a:rPr lang="en-US" sz="1500" dirty="0">
                 <a:solidFill>
                   <a:schemeClr val="accent3"/>
                 </a:solidFill>
@@ -46719,7 +46719,7 @@
               </a:rPr>
               <a:t>예루살렘으로</a:t>
             </a:r>
-            <a:endParaRPr lang="en-US" sz="1400" dirty="0"/>
+            <a:endParaRPr lang="en-US" sz="1500" dirty="0"/>
           </a:p>
         </p:txBody>
       </p:sp>
@@ -49023,11 +49023,11 @@
         <p:spPr>
           <a:xfrm>
             <a:off x="685800" y="1609344"/>
-            <a:ext cx="5577840" cy="914400"/>
+            <a:ext cx="5577840" cy="804672"/>
           </a:xfrm>
           <a:prstGeom prst="roundRect">
             <a:avLst>
-              <a:gd name="adj" fmla="val 6000"/>
+              <a:gd name="adj" fmla="val 6818"/>
             </a:avLst>
           </a:prstGeom>
           <a:solidFill>
@@ -49044,8 +49044,8 @@
         </p:nvSpPr>
         <p:spPr>
           <a:xfrm>
-            <a:off x="923544" y="1719072"/>
-            <a:ext cx="5120640" cy="365760"/>
+            <a:off x="923544" y="1691640"/>
+            <a:ext cx="5120640" cy="329184"/>
           </a:xfrm>
           <a:prstGeom prst="rect">
             <a:avLst/>
@@ -49083,8 +49083,8 @@
         </p:nvSpPr>
         <p:spPr>
           <a:xfrm>
-            <a:off x="923544" y="2084832"/>
-            <a:ext cx="5120640" cy="329184"/>
+            <a:off x="923544" y="2029968"/>
+            <a:ext cx="5120640" cy="301752"/>
           </a:xfrm>
           <a:prstGeom prst="rect">
             <a:avLst/>
@@ -49125,12 +49125,12 @@
         </p:nvSpPr>
         <p:spPr>
           <a:xfrm>
-            <a:off x="685800" y="2670048"/>
-            <a:ext cx="5577840" cy="1188720"/>
+            <a:off x="685800" y="2532888"/>
+            <a:ext cx="5577840" cy="1042416"/>
           </a:xfrm>
           <a:prstGeom prst="roundRect">
             <a:avLst>
-              <a:gd name="adj" fmla="val 4615"/>
+              <a:gd name="adj" fmla="val 5263"/>
             </a:avLst>
           </a:prstGeom>
           <a:solidFill>
@@ -49147,8 +49147,8 @@
         </p:nvSpPr>
         <p:spPr>
           <a:xfrm>
-            <a:off x="923544" y="2779776"/>
-            <a:ext cx="5120640" cy="365760"/>
+            <a:off x="923544" y="2615184"/>
+            <a:ext cx="5120640" cy="329184"/>
           </a:xfrm>
           <a:prstGeom prst="rect">
             <a:avLst/>
@@ -49186,8 +49186,8 @@
         </p:nvSpPr>
         <p:spPr>
           <a:xfrm>
-            <a:off x="923544" y="3145536"/>
-            <a:ext cx="5120640" cy="603504"/>
+            <a:off x="923544" y="2953512"/>
+            <a:ext cx="5120640" cy="539496"/>
           </a:xfrm>
           <a:prstGeom prst="rect">
             <a:avLst/>
@@ -49248,12 +49248,12 @@
         </p:nvSpPr>
         <p:spPr>
           <a:xfrm>
-            <a:off x="685800" y="4005072"/>
-            <a:ext cx="5577840" cy="914400"/>
+            <a:off x="685800" y="3694176"/>
+            <a:ext cx="5577840" cy="1042416"/>
           </a:xfrm>
           <a:prstGeom prst="roundRect">
             <a:avLst>
-              <a:gd name="adj" fmla="val 6000"/>
+              <a:gd name="adj" fmla="val 5263"/>
             </a:avLst>
           </a:prstGeom>
           <a:solidFill>
@@ -49270,47 +49270,47 @@
         </p:nvSpPr>
         <p:spPr>
           <a:xfrm>
+            <a:off x="923544" y="3776472"/>
+            <a:ext cx="5120640" cy="329184"/>
+          </a:xfrm>
+          <a:prstGeom prst="rect">
+            <a:avLst/>
+          </a:prstGeom>
+          <a:noFill/>
+          <a:ln/>
+        </p:spPr>
+        <p:txBody>
+          <a:bodyPr wrap="square" lIns="0" tIns="0" rIns="0" bIns="0" rtlCol="0" anchor="ctr"/>
+          <a:lstStyle/>
+          <a:p>
+            <a:pPr indent="0" marL="0">
+              <a:buNone/>
+            </a:pPr>
+            <a:r>
+              <a:rPr lang="en-US" sz="1700" b="1" dirty="0">
+                <a:solidFill>
+                  <a:schemeClr val="accent1"/>
+                </a:solidFill>
+                <a:latin typeface="맑은 고딕" pitchFamily="34" charset="0"/>
+                <a:ea typeface="맑은 고딕" pitchFamily="34" charset="-122"/>
+                <a:cs typeface="맑은 고딕" pitchFamily="34" charset="-120"/>
+              </a:rPr>
+              <a:t>“다시는 죄를 범하지 말라” · 출교</a:t>
+            </a:r>
+            <a:endParaRPr lang="en-US" sz="1700" dirty="0"/>
+          </a:p>
+        </p:txBody>
+      </p:sp>
+      <p:sp>
+        <p:nvSpPr>
+          <p:cNvPr id="11" name="ap-0.75-2-v"/>
+          <p:cNvSpPr txBox="1"/>
+          <p:nvPr/>
+        </p:nvSpPr>
+        <p:spPr>
+          <a:xfrm>
             <a:off x="923544" y="4114800"/>
-            <a:ext cx="5120640" cy="365760"/>
-          </a:xfrm>
-          <a:prstGeom prst="rect">
-            <a:avLst/>
-          </a:prstGeom>
-          <a:noFill/>
-          <a:ln/>
-        </p:spPr>
-        <p:txBody>
-          <a:bodyPr wrap="square" lIns="0" tIns="0" rIns="0" bIns="0" rtlCol="0" anchor="ctr"/>
-          <a:lstStyle/>
-          <a:p>
-            <a:pPr indent="0" marL="0">
-              <a:buNone/>
-            </a:pPr>
-            <a:r>
-              <a:rPr lang="en-US" sz="1700" b="1" dirty="0">
-                <a:solidFill>
-                  <a:schemeClr val="accent1"/>
-                </a:solidFill>
-                <a:latin typeface="맑은 고딕" pitchFamily="34" charset="0"/>
-                <a:ea typeface="맑은 고딕" pitchFamily="34" charset="-122"/>
-                <a:cs typeface="맑은 고딕" pitchFamily="34" charset="-120"/>
-              </a:rPr>
-              <a:t>“다시는 죄를 범하지 말라”</a:t>
-            </a:r>
-            <a:endParaRPr lang="en-US" sz="1700" dirty="0"/>
-          </a:p>
-        </p:txBody>
-      </p:sp>
-      <p:sp>
-        <p:nvSpPr>
-          <p:cNvPr id="11" name="ap-0.75-2-v"/>
-          <p:cNvSpPr txBox="1"/>
-          <p:nvPr/>
-        </p:nvSpPr>
-        <p:spPr>
-          <a:xfrm>
-            <a:off x="923544" y="4480560"/>
-            <a:ext cx="5120640" cy="329184"/>
+            <a:ext cx="5120640" cy="539496"/>
           </a:xfrm>
           <a:prstGeom prst="rect">
             <a:avLst/>
@@ -49341,6 +49341,26 @@
             </a:r>
             <a:endParaRPr lang="en-US" sz="1550" dirty="0"/>
           </a:p>
+          <a:p>
+            <a:pPr indent="0" marL="0">
+              <a:lnSpc>
+                <a:spcPct val="116000"/>
+              </a:lnSpc>
+              <a:buNone/>
+            </a:pPr>
+            <a:r>
+              <a:rPr lang="en-US" sz="1550" dirty="0">
+                <a:solidFill>
+                  <a:schemeClr val="tx1"/>
+                </a:solidFill>
+                <a:latin typeface="맑은 고딕" pitchFamily="34" charset="0"/>
+                <a:ea typeface="맑은 고딕" pitchFamily="34" charset="-122"/>
+                <a:cs typeface="맑은 고딕" pitchFamily="34" charset="-120"/>
+              </a:rPr>
+              <a:t>출교 : 9:22 · 12:42 · 16:2</a:t>
+            </a:r>
+            <a:endParaRPr lang="en-US" sz="1550" dirty="0"/>
+          </a:p>
         </p:txBody>
       </p:sp>
       <p:sp>
@@ -49351,12 +49371,12 @@
         </p:nvSpPr>
         <p:spPr>
           <a:xfrm>
-            <a:off x="685800" y="5065776"/>
-            <a:ext cx="5577840" cy="914400"/>
+            <a:off x="685800" y="4855464"/>
+            <a:ext cx="5577840" cy="1042416"/>
           </a:xfrm>
           <a:prstGeom prst="roundRect">
             <a:avLst>
-              <a:gd name="adj" fmla="val 6000"/>
+              <a:gd name="adj" fmla="val 5263"/>
             </a:avLst>
           </a:prstGeom>
           <a:solidFill>
@@ -49373,8 +49393,8 @@
         </p:nvSpPr>
         <p:spPr>
           <a:xfrm>
-            <a:off x="923544" y="5175504"/>
-            <a:ext cx="5120640" cy="365760"/>
+            <a:off x="923544" y="4937760"/>
+            <a:ext cx="5120640" cy="329184"/>
           </a:xfrm>
           <a:prstGeom prst="rect">
             <a:avLst/>
@@ -49398,7 +49418,7 @@
                 <a:ea typeface="맑은 고딕" pitchFamily="34" charset="-122"/>
                 <a:cs typeface="맑은 고딕" pitchFamily="34" charset="-120"/>
               </a:rPr>
-              <a:t>출교</a:t>
+              <a:t>대조 구도</a:t>
             </a:r>
             <a:endParaRPr lang="en-US" sz="1700" dirty="0"/>
           </a:p>
@@ -49412,8 +49432,8 @@
         </p:nvSpPr>
         <p:spPr>
           <a:xfrm>
-            <a:off x="923544" y="5541264"/>
-            <a:ext cx="5120640" cy="329184"/>
+            <a:off x="923544" y="5276088"/>
+            <a:ext cx="5120640" cy="539496"/>
           </a:xfrm>
           <a:prstGeom prst="rect">
             <a:avLst/>
@@ -49440,7 +49460,27 @@
                 <a:ea typeface="맑은 고딕" pitchFamily="34" charset="-122"/>
                 <a:cs typeface="맑은 고딕" pitchFamily="34" charset="-120"/>
               </a:rPr>
-              <a:t>9:22 · 12:42 · 16:2</a:t>
+              <a:t>빛 / 어두움 · 영 / 육</a:t>
+            </a:r>
+            <a:endParaRPr lang="en-US" sz="1550" dirty="0"/>
+          </a:p>
+          <a:p>
+            <a:pPr indent="0" marL="0">
+              <a:lnSpc>
+                <a:spcPct val="116000"/>
+              </a:lnSpc>
+              <a:buNone/>
+            </a:pPr>
+            <a:r>
+              <a:rPr lang="en-US" sz="1550" dirty="0">
+                <a:solidFill>
+                  <a:schemeClr val="tx1"/>
+                </a:solidFill>
+                <a:latin typeface="맑은 고딕" pitchFamily="34" charset="0"/>
+                <a:ea typeface="맑은 고딕" pitchFamily="34" charset="-122"/>
+                <a:cs typeface="맑은 고딕" pitchFamily="34" charset="-120"/>
+              </a:rPr>
+              <a:t>진리 / 거짓 · 자유 / 종</a:t>
             </a:r>
             <a:endParaRPr lang="en-US" sz="1550" dirty="0"/>
           </a:p>
@@ -49455,11 +49495,11 @@
         <p:spPr>
           <a:xfrm>
             <a:off x="6473952" y="1609344"/>
-            <a:ext cx="5577840" cy="914400"/>
+            <a:ext cx="5577840" cy="804672"/>
           </a:xfrm>
           <a:prstGeom prst="roundRect">
             <a:avLst>
-              <a:gd name="adj" fmla="val 6000"/>
+              <a:gd name="adj" fmla="val 6818"/>
             </a:avLst>
           </a:prstGeom>
           <a:solidFill>
@@ -49476,8 +49516,8 @@
         </p:nvSpPr>
         <p:spPr>
           <a:xfrm>
-            <a:off x="6711696" y="1719072"/>
-            <a:ext cx="5120640" cy="365760"/>
+            <a:off x="6711696" y="1691640"/>
+            <a:ext cx="5120640" cy="329184"/>
           </a:xfrm>
           <a:prstGeom prst="rect">
             <a:avLst/>
@@ -49515,8 +49555,8 @@
         </p:nvSpPr>
         <p:spPr>
           <a:xfrm>
-            <a:off x="6711696" y="2084832"/>
-            <a:ext cx="5120640" cy="329184"/>
+            <a:off x="6711696" y="2029968"/>
+            <a:ext cx="5120640" cy="301752"/>
           </a:xfrm>
           <a:prstGeom prst="rect">
             <a:avLst/>
@@ -49557,12 +49597,12 @@
         </p:nvSpPr>
         <p:spPr>
           <a:xfrm>
-            <a:off x="6473952" y="2670048"/>
-            <a:ext cx="5577840" cy="914400"/>
+            <a:off x="6473952" y="2532888"/>
+            <a:ext cx="5577840" cy="804672"/>
           </a:xfrm>
           <a:prstGeom prst="roundRect">
             <a:avLst>
-              <a:gd name="adj" fmla="val 6000"/>
+              <a:gd name="adj" fmla="val 6818"/>
             </a:avLst>
           </a:prstGeom>
           <a:solidFill>
@@ -49579,8 +49619,8 @@
         </p:nvSpPr>
         <p:spPr>
           <a:xfrm>
-            <a:off x="6711696" y="2779776"/>
-            <a:ext cx="5120640" cy="365760"/>
+            <a:off x="6711696" y="2615184"/>
+            <a:ext cx="5120640" cy="329184"/>
           </a:xfrm>
           <a:prstGeom prst="rect">
             <a:avLst/>
@@ -49618,8 +49658,8 @@
         </p:nvSpPr>
         <p:spPr>
           <a:xfrm>
-            <a:off x="6711696" y="3145536"/>
-            <a:ext cx="5120640" cy="329184"/>
+            <a:off x="6711696" y="2953512"/>
+            <a:ext cx="5120640" cy="301752"/>
           </a:xfrm>
           <a:prstGeom prst="rect">
             <a:avLst/>
@@ -49660,12 +49700,12 @@
         </p:nvSpPr>
         <p:spPr>
           <a:xfrm>
-            <a:off x="6473952" y="3730752"/>
-            <a:ext cx="5577840" cy="914400"/>
+            <a:off x="6473952" y="3456432"/>
+            <a:ext cx="5577840" cy="804672"/>
           </a:xfrm>
           <a:prstGeom prst="roundRect">
             <a:avLst>
-              <a:gd name="adj" fmla="val 6000"/>
+              <a:gd name="adj" fmla="val 6818"/>
             </a:avLst>
           </a:prstGeom>
           <a:solidFill>
@@ -49682,8 +49722,8 @@
         </p:nvSpPr>
         <p:spPr>
           <a:xfrm>
-            <a:off x="6711696" y="3840480"/>
-            <a:ext cx="5120640" cy="365760"/>
+            <a:off x="6711696" y="3538728"/>
+            <a:ext cx="5120640" cy="329184"/>
           </a:xfrm>
           <a:prstGeom prst="rect">
             <a:avLst/>
@@ -49721,8 +49761,8 @@
         </p:nvSpPr>
         <p:spPr>
           <a:xfrm>
-            <a:off x="6711696" y="4206240"/>
-            <a:ext cx="5120640" cy="329184"/>
+            <a:off x="6711696" y="3877056"/>
+            <a:ext cx="5120640" cy="301752"/>
           </a:xfrm>
           <a:prstGeom prst="rect">
             <a:avLst/>
@@ -49763,12 +49803,12 @@
         </p:nvSpPr>
         <p:spPr>
           <a:xfrm>
-            <a:off x="6473952" y="4791456"/>
-            <a:ext cx="5577840" cy="914400"/>
+            <a:off x="6473952" y="4379976"/>
+            <a:ext cx="5577840" cy="804672"/>
           </a:xfrm>
           <a:prstGeom prst="roundRect">
             <a:avLst>
-              <a:gd name="adj" fmla="val 6000"/>
+              <a:gd name="adj" fmla="val 6818"/>
             </a:avLst>
           </a:prstGeom>
           <a:solidFill>
@@ -49785,8 +49825,8 @@
         </p:nvSpPr>
         <p:spPr>
           <a:xfrm>
-            <a:off x="6711696" y="4901184"/>
-            <a:ext cx="5120640" cy="365760"/>
+            <a:off x="6711696" y="4462272"/>
+            <a:ext cx="5120640" cy="329184"/>
           </a:xfrm>
           <a:prstGeom prst="rect">
             <a:avLst/>
@@ -49824,8 +49864,8 @@
         </p:nvSpPr>
         <p:spPr>
           <a:xfrm>
-            <a:off x="6711696" y="5266944"/>
-            <a:ext cx="5120640" cy="329184"/>
+            <a:off x="6711696" y="4800600"/>
+            <a:ext cx="5120640" cy="301752"/>
           </a:xfrm>
           <a:prstGeom prst="rect">
             <a:avLst/>
@@ -49866,12 +49906,12 @@
         </p:nvSpPr>
         <p:spPr>
           <a:xfrm>
-            <a:off x="6473952" y="5852160"/>
-            <a:ext cx="5577840" cy="1188720"/>
+            <a:off x="6473952" y="5303520"/>
+            <a:ext cx="5577840" cy="804672"/>
           </a:xfrm>
           <a:prstGeom prst="roundRect">
             <a:avLst>
-              <a:gd name="adj" fmla="val 4615"/>
+              <a:gd name="adj" fmla="val 6818"/>
             </a:avLst>
           </a:prstGeom>
           <a:solidFill>
@@ -49888,8 +49928,8 @@
         </p:nvSpPr>
         <p:spPr>
           <a:xfrm>
-            <a:off x="6711696" y="5961888"/>
-            <a:ext cx="5120640" cy="365760"/>
+            <a:off x="6711696" y="5385816"/>
+            <a:ext cx="5120640" cy="329184"/>
           </a:xfrm>
           <a:prstGeom prst="rect">
             <a:avLst/>
@@ -49913,7 +49953,7 @@
                 <a:ea typeface="맑은 고딕" pitchFamily="34" charset="-122"/>
                 <a:cs typeface="맑은 고딕" pitchFamily="34" charset="-120"/>
               </a:rPr>
-              <a:t>대조 구도</a:t>
+              <a:t>밤 사경</a:t>
             </a:r>
             <a:endParaRPr lang="en-US" sz="1700" dirty="0"/>
           </a:p>
@@ -49927,8 +49967,8 @@
         </p:nvSpPr>
         <p:spPr>
           <a:xfrm>
-            <a:off x="6711696" y="6327648"/>
-            <a:ext cx="5120640" cy="603504"/>
+            <a:off x="6711696" y="5724144"/>
+            <a:ext cx="5120640" cy="301752"/>
           </a:xfrm>
           <a:prstGeom prst="rect">
             <a:avLst/>
@@ -49955,27 +49995,7 @@
                 <a:ea typeface="맑은 고딕" pitchFamily="34" charset="-122"/>
                 <a:cs typeface="맑은 고딕" pitchFamily="34" charset="-120"/>
               </a:rPr>
-              <a:t>빛 / 어두움 · 영 / 육</a:t>
-            </a:r>
-            <a:endParaRPr lang="en-US" sz="1550" dirty="0"/>
-          </a:p>
-          <a:p>
-            <a:pPr indent="0" marL="0">
-              <a:lnSpc>
-                <a:spcPct val="116000"/>
-              </a:lnSpc>
-              <a:buNone/>
-            </a:pPr>
-            <a:r>
-              <a:rPr lang="en-US" sz="1550" dirty="0">
-                <a:solidFill>
-                  <a:schemeClr val="tx1"/>
-                </a:solidFill>
-                <a:latin typeface="맑은 고딕" pitchFamily="34" charset="0"/>
-                <a:ea typeface="맑은 고딕" pitchFamily="34" charset="-122"/>
-                <a:cs typeface="맑은 고딕" pitchFamily="34" charset="-120"/>
-              </a:rPr>
-              <a:t>진리 / 거짓 · 자유 / 종</a:t>
+              <a:t>예수님이 바다 위를 걸으심 (6장)</a:t>
             </a:r>
             <a:endParaRPr lang="en-US" sz="1550" dirty="0"/>
           </a:p>

--- a/dist/요한복음_1강_영광을_만나기_위한_준비.pptx
+++ b/dist/요한복음_1강_영광을_만나기_위한_준비.pptx
@@ -154,7 +154,7 @@
   <p:extLst>
     <p:ext uri="{521415D9-36F7-43E2-AB2F-B90AF26B5E84}">
       <p14:sectionLst xmlns:p14="http://schemas.microsoft.com/office/powerpoint/2010/main">
-        <p14:section name="오리엔테이션" id="{32dd01dd-efe0-53bd-b7de-7bbc3e85372d}">
+        <p14:section name="오리엔테이션" id="{25f14a9e-5891-9d7a-cd7b-696e4f42ee85}">
           <p14:sldIdLst>
             <p14:sldId id="256"/>
             <p14:sldId id="257"/>
@@ -164,7 +164,7 @@
             <p14:sldId id="261"/>
           </p14:sldIdLst>
         </p14:section>
-        <p14:section name="요한복음 분석" id="{5e005e2c-dbda-c2e5-110f-53b762a9bd48}">
+        <p14:section name="요한복음 분석" id="{29a3001d-7904-f4a3-2bf5-92fdbf496d3d}">
           <p14:sldIdLst>
             <p14:sldId id="262"/>
             <p14:sldId id="263"/>
@@ -181,7 +181,7 @@
             <p14:sldId id="274"/>
           </p14:sldIdLst>
         </p14:section>
-        <p14:section name="1과 · 예수님에 대한 증언" id="{2085e0e6-8adc-1bee-4fd7-cded5fb90731}">
+        <p14:section name="1과 · 예수님에 대한 증언" id="{3a0014bc-0daf-bdb3-6f0e-b5e57201c418}">
           <p14:sldIdLst>
             <p14:sldId id="275"/>
             <p14:sldId id="276"/>
@@ -197,7 +197,7 @@
             <p14:sldId id="286"/>
           </p14:sldIdLst>
         </p14:section>
-        <p14:section name="1과 · 하나님에 대한 증언" id="{78d000d0-7421-91ad-568b-4b4c037ba168}">
+        <p14:section name="1과 · 하나님에 대한 증언" id="{b032047f-ef7b-ca65-d57d-a5b6cbc11e1f}">
           <p14:sldIdLst>
             <p14:sldId id="287"/>
             <p14:sldId id="288"/>
@@ -213,7 +213,7 @@
             <p14:sldId id="298"/>
           </p14:sldIdLst>
         </p14:section>
-        <p14:section name="마무리" id="{6e927ba5-bba7-cf6a-cdfb-afb265593ce8}">
+        <p14:section name="마무리" id="{f25933db-2745-8807-232f-e858d33baec4}">
           <p14:sldIdLst>
             <p14:sldId id="299"/>
             <p14:sldId id="300"/>
@@ -221,7 +221,7 @@
             <p14:sldId id="302"/>
           </p14:sldIdLst>
         </p14:section>
-        <p14:section name="부록" id="{0787bcad-ca72-38ce-5023-3694ad001635}">
+        <p14:section name="부록" id="{369c8558-1699-0d60-2111-da398664b53e}">
           <p14:sldIdLst>
             <p14:sldId id="303"/>
           </p14:sldIdLst>
@@ -50253,7 +50253,7 @@
         </p:nvSpPr>
         <p:spPr>
           <a:xfrm>
-            <a:off x="685800" y="2103120"/>
+            <a:off x="685800" y="2048256"/>
             <a:ext cx="2670048" cy="1618488"/>
           </a:xfrm>
           <a:prstGeom prst="roundRect">
@@ -50282,7 +50282,7 @@
         </p:nvSpPr>
         <p:spPr>
           <a:xfrm>
-            <a:off x="923544" y="2340864"/>
+            <a:off x="923544" y="2286000"/>
             <a:ext cx="2194560" cy="320040"/>
           </a:xfrm>
           <a:prstGeom prst="rect">
@@ -50321,7 +50321,7 @@
         </p:nvSpPr>
         <p:spPr>
           <a:xfrm>
-            <a:off x="923544" y="2734056"/>
+            <a:off x="923544" y="2679192"/>
             <a:ext cx="2194560" cy="749808"/>
           </a:xfrm>
           <a:prstGeom prst="rect">
@@ -50363,7 +50363,7 @@
         </p:nvSpPr>
         <p:spPr>
           <a:xfrm>
-            <a:off x="3593592" y="2103120"/>
+            <a:off x="3593592" y="2048256"/>
             <a:ext cx="2670048" cy="1618488"/>
           </a:xfrm>
           <a:prstGeom prst="roundRect">
@@ -50392,7 +50392,7 @@
         </p:nvSpPr>
         <p:spPr>
           <a:xfrm>
-            <a:off x="3831336" y="2340864"/>
+            <a:off x="3831336" y="2286000"/>
             <a:ext cx="2194560" cy="320040"/>
           </a:xfrm>
           <a:prstGeom prst="rect">
@@ -50431,7 +50431,7 @@
         </p:nvSpPr>
         <p:spPr>
           <a:xfrm>
-            <a:off x="3831336" y="2734056"/>
+            <a:off x="3831336" y="2679192"/>
             <a:ext cx="2194560" cy="749808"/>
           </a:xfrm>
           <a:prstGeom prst="rect">
@@ -50473,7 +50473,7 @@
         </p:nvSpPr>
         <p:spPr>
           <a:xfrm>
-            <a:off x="685800" y="3959352"/>
+            <a:off x="685800" y="3904488"/>
             <a:ext cx="2670048" cy="1618488"/>
           </a:xfrm>
           <a:prstGeom prst="roundRect">
@@ -50502,7 +50502,7 @@
         </p:nvSpPr>
         <p:spPr>
           <a:xfrm>
-            <a:off x="923544" y="4197096"/>
+            <a:off x="923544" y="4142232"/>
             <a:ext cx="2194560" cy="320040"/>
           </a:xfrm>
           <a:prstGeom prst="rect">
@@ -50541,7 +50541,7 @@
         </p:nvSpPr>
         <p:spPr>
           <a:xfrm>
-            <a:off x="923544" y="4590288"/>
+            <a:off x="923544" y="4535424"/>
             <a:ext cx="2194560" cy="749808"/>
           </a:xfrm>
           <a:prstGeom prst="rect">
@@ -50603,7 +50603,7 @@
         </p:nvSpPr>
         <p:spPr>
           <a:xfrm>
-            <a:off x="3593592" y="3959352"/>
+            <a:off x="3593592" y="3904488"/>
             <a:ext cx="2670048" cy="1618488"/>
           </a:xfrm>
           <a:prstGeom prst="roundRect">
@@ -50632,7 +50632,7 @@
         </p:nvSpPr>
         <p:spPr>
           <a:xfrm>
-            <a:off x="3831336" y="4197096"/>
+            <a:off x="3831336" y="4142232"/>
             <a:ext cx="2194560" cy="320040"/>
           </a:xfrm>
           <a:prstGeom prst="rect">
@@ -50671,7 +50671,7 @@
         </p:nvSpPr>
         <p:spPr>
           <a:xfrm>
-            <a:off x="3831336" y="4590288"/>
+            <a:off x="3831336" y="4535424"/>
             <a:ext cx="2194560" cy="749808"/>
           </a:xfrm>
           <a:prstGeom prst="rect">
@@ -50733,7 +50733,7 @@
         </p:nvSpPr>
         <p:spPr>
           <a:xfrm>
-            <a:off x="685800" y="5687568"/>
+            <a:off x="685800" y="5632704"/>
             <a:ext cx="5577840" cy="548640"/>
           </a:xfrm>
           <a:prstGeom prst="roundRect">
@@ -50755,7 +50755,7 @@
         </p:nvSpPr>
         <p:spPr>
           <a:xfrm>
-            <a:off x="960120" y="5687568"/>
+            <a:off x="960120" y="5632704"/>
             <a:ext cx="5029200" cy="548640"/>
           </a:xfrm>
           <a:prstGeom prst="rect">
@@ -50894,12 +50894,12 @@
         </p:nvSpPr>
         <p:spPr>
           <a:xfrm>
-            <a:off x="6473952" y="2103120"/>
-            <a:ext cx="5577840" cy="603504"/>
+            <a:off x="6473952" y="2048256"/>
+            <a:ext cx="5577840" cy="493776"/>
           </a:xfrm>
           <a:prstGeom prst="roundRect">
             <a:avLst>
-              <a:gd name="adj" fmla="val 9091"/>
+              <a:gd name="adj" fmla="val 11111"/>
             </a:avLst>
           </a:prstGeom>
           <a:solidFill>
@@ -50916,8 +50916,8 @@
         </p:nvSpPr>
         <p:spPr>
           <a:xfrm>
-            <a:off x="6675120" y="2103120"/>
-            <a:ext cx="1188720" cy="603504"/>
+            <a:off x="6675120" y="2048256"/>
+            <a:ext cx="1188720" cy="493776"/>
           </a:xfrm>
           <a:prstGeom prst="rect">
             <a:avLst/>
@@ -50955,8 +50955,8 @@
         </p:nvSpPr>
         <p:spPr>
           <a:xfrm>
-            <a:off x="7955280" y="2103120"/>
-            <a:ext cx="3931920" cy="603504"/>
+            <a:off x="7955280" y="2048256"/>
+            <a:ext cx="3931920" cy="493776"/>
           </a:xfrm>
           <a:prstGeom prst="rect">
             <a:avLst/>
@@ -50969,6 +50969,9 @@
           <a:lstStyle/>
           <a:p>
             <a:pPr indent="0" marL="0">
+              <a:lnSpc>
+                <a:spcPct val="120000"/>
+              </a:lnSpc>
               <a:buNone/>
             </a:pPr>
             <a:r>
@@ -50994,12 +50997,12 @@
         </p:nvSpPr>
         <p:spPr>
           <a:xfrm>
-            <a:off x="6473952" y="2761488"/>
-            <a:ext cx="5577840" cy="603504"/>
+            <a:off x="6473952" y="2596896"/>
+            <a:ext cx="5577840" cy="731520"/>
           </a:xfrm>
           <a:prstGeom prst="roundRect">
             <a:avLst>
-              <a:gd name="adj" fmla="val 9091"/>
+              <a:gd name="adj" fmla="val 7500"/>
             </a:avLst>
           </a:prstGeom>
           <a:solidFill>
@@ -51021,8 +51024,8 @@
         </p:nvSpPr>
         <p:spPr>
           <a:xfrm>
-            <a:off x="6675120" y="2761488"/>
-            <a:ext cx="1188720" cy="603504"/>
+            <a:off x="6675120" y="2596896"/>
+            <a:ext cx="1188720" cy="731520"/>
           </a:xfrm>
           <a:prstGeom prst="rect">
             <a:avLst/>
@@ -51037,55 +51040,67 @@
             <a:pPr indent="0" marL="0">
               <a:buNone/>
             </a:pPr>
+            <a:endParaRPr lang="en-US" sz="1800" dirty="0"/>
+          </a:p>
+        </p:txBody>
+      </p:sp>
+      <p:sp>
+        <p:nvSpPr>
+          <p:cNvPr id="28" name="tr-1-d"/>
+          <p:cNvSpPr txBox="1"/>
+          <p:nvPr/>
+        </p:nvSpPr>
+        <p:spPr>
+          <a:xfrm>
+            <a:off x="7955280" y="2596896"/>
+            <a:ext cx="3931920" cy="731520"/>
+          </a:xfrm>
+          <a:prstGeom prst="rect">
+            <a:avLst/>
+          </a:prstGeom>
+          <a:noFill/>
+          <a:ln/>
+        </p:spPr>
+        <p:txBody>
+          <a:bodyPr wrap="square" lIns="0" tIns="0" rIns="0" bIns="0" rtlCol="0" anchor="ctr"/>
+          <a:lstStyle/>
+          <a:p>
+            <a:pPr indent="0" marL="0">
+              <a:lnSpc>
+                <a:spcPct val="120000"/>
+              </a:lnSpc>
+              <a:buNone/>
+            </a:pPr>
             <a:r>
               <a:rPr lang="en-US" sz="1800" b="1" dirty="0">
                 <a:solidFill>
-                  <a:schemeClr val="accent1"/>
-                </a:solidFill>
-                <a:latin typeface="맑은 고딕" pitchFamily="34" charset="0"/>
-                <a:ea typeface="맑은 고딕" pitchFamily="34" charset="-122"/>
-                <a:cs typeface="맑은 고딕" pitchFamily="34" charset="-120"/>
-              </a:rPr>
-              <a:t>8:10</a:t>
+                  <a:schemeClr val="tx1"/>
+                </a:solidFill>
+                <a:latin typeface="맑은 고딕" pitchFamily="34" charset="0"/>
+                <a:ea typeface="맑은 고딕" pitchFamily="34" charset="-122"/>
+                <a:cs typeface="맑은 고딕" pitchFamily="34" charset="-120"/>
+              </a:rPr>
+              <a:t>조별 소그룹 나눔 1</a:t>
             </a:r>
             <a:endParaRPr lang="en-US" sz="1800" dirty="0"/>
           </a:p>
-        </p:txBody>
-      </p:sp>
-      <p:sp>
-        <p:nvSpPr>
-          <p:cNvPr id="28" name="tr-1-d"/>
-          <p:cNvSpPr txBox="1"/>
-          <p:nvPr/>
-        </p:nvSpPr>
-        <p:spPr>
-          <a:xfrm>
-            <a:off x="7955280" y="2761488"/>
-            <a:ext cx="3931920" cy="603504"/>
-          </a:xfrm>
-          <a:prstGeom prst="rect">
-            <a:avLst/>
-          </a:prstGeom>
-          <a:noFill/>
-          <a:ln/>
-        </p:spPr>
-        <p:txBody>
-          <a:bodyPr wrap="square" lIns="0" tIns="0" rIns="0" bIns="0" rtlCol="0" anchor="ctr"/>
-          <a:lstStyle/>
-          <a:p>
-            <a:pPr indent="0" marL="0">
-              <a:buNone/>
-            </a:pPr>
-            <a:r>
-              <a:rPr lang="en-US" sz="1800" dirty="0">
-                <a:solidFill>
-                  <a:schemeClr val="tx1"/>
-                </a:solidFill>
-                <a:latin typeface="맑은 고딕" pitchFamily="34" charset="0"/>
-                <a:ea typeface="맑은 고딕" pitchFamily="34" charset="-122"/>
-                <a:cs typeface="맑은 고딕" pitchFamily="34" charset="-120"/>
-              </a:rPr>
-              <a:t>강의 1</a:t>
+          <a:p>
+            <a:pPr indent="0" marL="0">
+              <a:lnSpc>
+                <a:spcPct val="120000"/>
+              </a:lnSpc>
+              <a:buNone/>
+            </a:pPr>
+            <a:r>
+              <a:rPr lang="en-US" sz="1500" dirty="0">
+                <a:solidFill>
+                  <a:schemeClr val="accent3"/>
+                </a:solidFill>
+                <a:latin typeface="맑은 고딕" pitchFamily="34" charset="0"/>
+                <a:ea typeface="맑은 고딕" pitchFamily="34" charset="-122"/>
+                <a:cs typeface="맑은 고딕" pitchFamily="34" charset="-120"/>
+              </a:rPr>
+              <a:t>과제 체크 · 삶 나눔(가볍게) · 소감문 나눔</a:t>
             </a:r>
             <a:endParaRPr lang="en-US" sz="1800" dirty="0"/>
           </a:p>
@@ -51099,12 +51114,12 @@
         </p:nvSpPr>
         <p:spPr>
           <a:xfrm>
-            <a:off x="6473952" y="3419856"/>
-            <a:ext cx="5577840" cy="603504"/>
+            <a:off x="6473952" y="3383280"/>
+            <a:ext cx="5577840" cy="493776"/>
           </a:xfrm>
           <a:prstGeom prst="roundRect">
             <a:avLst>
-              <a:gd name="adj" fmla="val 9091"/>
+              <a:gd name="adj" fmla="val 11111"/>
             </a:avLst>
           </a:prstGeom>
           <a:solidFill>
@@ -51121,8 +51136,8 @@
         </p:nvSpPr>
         <p:spPr>
           <a:xfrm>
-            <a:off x="6675120" y="3419856"/>
-            <a:ext cx="1188720" cy="603504"/>
+            <a:off x="6675120" y="3383280"/>
+            <a:ext cx="1188720" cy="493776"/>
           </a:xfrm>
           <a:prstGeom prst="rect">
             <a:avLst/>
@@ -51146,7 +51161,7 @@
                 <a:ea typeface="맑은 고딕" pitchFamily="34" charset="-122"/>
                 <a:cs typeface="맑은 고딕" pitchFamily="34" charset="-120"/>
               </a:rPr>
-              <a:t>8:55</a:t>
+              <a:t>8:10</a:t>
             </a:r>
             <a:endParaRPr lang="en-US" sz="1800" dirty="0"/>
           </a:p>
@@ -51160,8 +51175,8 @@
         </p:nvSpPr>
         <p:spPr>
           <a:xfrm>
-            <a:off x="7955280" y="3419856"/>
-            <a:ext cx="3931920" cy="603504"/>
+            <a:off x="7955280" y="3383280"/>
+            <a:ext cx="3931920" cy="493776"/>
           </a:xfrm>
           <a:prstGeom prst="rect">
             <a:avLst/>
@@ -51174,6 +51189,9 @@
           <a:lstStyle/>
           <a:p>
             <a:pPr indent="0" marL="0">
+              <a:lnSpc>
+                <a:spcPct val="120000"/>
+              </a:lnSpc>
               <a:buNone/>
             </a:pPr>
             <a:r>
@@ -51185,7 +51203,7 @@
                 <a:ea typeface="맑은 고딕" pitchFamily="34" charset="-122"/>
                 <a:cs typeface="맑은 고딕" pitchFamily="34" charset="-120"/>
               </a:rPr>
-              <a:t>휴식</a:t>
+              <a:t>강의 1</a:t>
             </a:r>
             <a:endParaRPr lang="en-US" sz="1800" dirty="0"/>
           </a:p>
@@ -51199,12 +51217,12 @@
         </p:nvSpPr>
         <p:spPr>
           <a:xfrm>
-            <a:off x="6473952" y="4078224"/>
-            <a:ext cx="5577840" cy="603504"/>
+            <a:off x="6473952" y="3931920"/>
+            <a:ext cx="5577840" cy="493776"/>
           </a:xfrm>
           <a:prstGeom prst="roundRect">
             <a:avLst>
-              <a:gd name="adj" fmla="val 9091"/>
+              <a:gd name="adj" fmla="val 11111"/>
             </a:avLst>
           </a:prstGeom>
           <a:solidFill>
@@ -51226,8 +51244,8 @@
         </p:nvSpPr>
         <p:spPr>
           <a:xfrm>
-            <a:off x="6675120" y="4078224"/>
-            <a:ext cx="1188720" cy="603504"/>
+            <a:off x="6675120" y="3931920"/>
+            <a:ext cx="1188720" cy="493776"/>
           </a:xfrm>
           <a:prstGeom prst="rect">
             <a:avLst/>
@@ -51251,7 +51269,7 @@
                 <a:ea typeface="맑은 고딕" pitchFamily="34" charset="-122"/>
                 <a:cs typeface="맑은 고딕" pitchFamily="34" charset="-120"/>
               </a:rPr>
-              <a:t>9:05</a:t>
+              <a:t>8:55</a:t>
             </a:r>
             <a:endParaRPr lang="en-US" sz="1800" dirty="0"/>
           </a:p>
@@ -51265,8 +51283,8 @@
         </p:nvSpPr>
         <p:spPr>
           <a:xfrm>
-            <a:off x="7955280" y="4078224"/>
-            <a:ext cx="3931920" cy="603504"/>
+            <a:off x="7955280" y="3931920"/>
+            <a:ext cx="3931920" cy="493776"/>
           </a:xfrm>
           <a:prstGeom prst="rect">
             <a:avLst/>
@@ -51279,6 +51297,9 @@
           <a:lstStyle/>
           <a:p>
             <a:pPr indent="0" marL="0">
+              <a:lnSpc>
+                <a:spcPct val="120000"/>
+              </a:lnSpc>
               <a:buNone/>
             </a:pPr>
             <a:r>
@@ -51290,7 +51311,7 @@
                 <a:ea typeface="맑은 고딕" pitchFamily="34" charset="-122"/>
                 <a:cs typeface="맑은 고딕" pitchFamily="34" charset="-120"/>
               </a:rPr>
-              <a:t>조별 소그룹 나눔</a:t>
+              <a:t>휴식</a:t>
             </a:r>
             <a:endParaRPr lang="en-US" sz="1800" dirty="0"/>
           </a:p>
@@ -51304,12 +51325,12 @@
         </p:nvSpPr>
         <p:spPr>
           <a:xfrm>
-            <a:off x="6473952" y="4736592"/>
-            <a:ext cx="5577840" cy="603504"/>
+            <a:off x="6473952" y="4480560"/>
+            <a:ext cx="5577840" cy="731520"/>
           </a:xfrm>
           <a:prstGeom prst="roundRect">
             <a:avLst>
-              <a:gd name="adj" fmla="val 9091"/>
+              <a:gd name="adj" fmla="val 7500"/>
             </a:avLst>
           </a:prstGeom>
           <a:solidFill>
@@ -51326,8 +51347,8 @@
         </p:nvSpPr>
         <p:spPr>
           <a:xfrm>
-            <a:off x="6675120" y="4736592"/>
-            <a:ext cx="1188720" cy="603504"/>
+            <a:off x="6675120" y="4480560"/>
+            <a:ext cx="1188720" cy="731520"/>
           </a:xfrm>
           <a:prstGeom prst="rect">
             <a:avLst/>
@@ -51351,7 +51372,7 @@
                 <a:ea typeface="맑은 고딕" pitchFamily="34" charset="-122"/>
                 <a:cs typeface="맑은 고딕" pitchFamily="34" charset="-120"/>
               </a:rPr>
-              <a:t>9:27</a:t>
+              <a:t>9:05</a:t>
             </a:r>
             <a:endParaRPr lang="en-US" sz="1800" dirty="0"/>
           </a:p>
@@ -51365,8 +51386,8 @@
         </p:nvSpPr>
         <p:spPr>
           <a:xfrm>
-            <a:off x="7955280" y="4736592"/>
-            <a:ext cx="3931920" cy="603504"/>
+            <a:off x="7955280" y="4480560"/>
+            <a:ext cx="3931920" cy="731520"/>
           </a:xfrm>
           <a:prstGeom prst="rect">
             <a:avLst/>
@@ -51379,10 +51400,13 @@
           <a:lstStyle/>
           <a:p>
             <a:pPr indent="0" marL="0">
-              <a:buNone/>
-            </a:pPr>
-            <a:r>
-              <a:rPr lang="en-US" sz="1800" dirty="0">
+              <a:lnSpc>
+                <a:spcPct val="120000"/>
+              </a:lnSpc>
+              <a:buNone/>
+            </a:pPr>
+            <a:r>
+              <a:rPr lang="en-US" sz="1800" b="1" dirty="0">
                 <a:solidFill>
                   <a:schemeClr val="tx1"/>
                 </a:solidFill>
@@ -51390,7 +51414,27 @@
                 <a:ea typeface="맑은 고딕" pitchFamily="34" charset="-122"/>
                 <a:cs typeface="맑은 고딕" pitchFamily="34" charset="-120"/>
               </a:rPr>
-              <a:t>강의 2</a:t>
+              <a:t>조별 소그룹 나눔 2</a:t>
+            </a:r>
+            <a:endParaRPr lang="en-US" sz="1800" dirty="0"/>
+          </a:p>
+          <a:p>
+            <a:pPr indent="0" marL="0">
+              <a:lnSpc>
+                <a:spcPct val="120000"/>
+              </a:lnSpc>
+              <a:buNone/>
+            </a:pPr>
+            <a:r>
+              <a:rPr lang="en-US" sz="1500" dirty="0">
+                <a:solidFill>
+                  <a:schemeClr val="accent3"/>
+                </a:solidFill>
+                <a:latin typeface="맑은 고딕" pitchFamily="34" charset="0"/>
+                <a:ea typeface="맑은 고딕" pitchFamily="34" charset="-122"/>
+                <a:cs typeface="맑은 고딕" pitchFamily="34" charset="-120"/>
+              </a:rPr>
+              <a:t>전체 나눔</a:t>
             </a:r>
             <a:endParaRPr lang="en-US" sz="1800" dirty="0"/>
           </a:p>
@@ -51404,12 +51448,12 @@
         </p:nvSpPr>
         <p:spPr>
           <a:xfrm>
-            <a:off x="6473952" y="5394960"/>
-            <a:ext cx="5577840" cy="603504"/>
+            <a:off x="6473952" y="5266944"/>
+            <a:ext cx="5577840" cy="493776"/>
           </a:xfrm>
           <a:prstGeom prst="roundRect">
             <a:avLst>
-              <a:gd name="adj" fmla="val 9091"/>
+              <a:gd name="adj" fmla="val 11111"/>
             </a:avLst>
           </a:prstGeom>
           <a:solidFill>
@@ -51431,8 +51475,8 @@
         </p:nvSpPr>
         <p:spPr>
           <a:xfrm>
-            <a:off x="6675120" y="5394960"/>
-            <a:ext cx="1188720" cy="603504"/>
+            <a:off x="6675120" y="5266944"/>
+            <a:ext cx="1188720" cy="493776"/>
           </a:xfrm>
           <a:prstGeom prst="rect">
             <a:avLst/>
@@ -51456,6 +51500,109 @@
                 <a:ea typeface="맑은 고딕" pitchFamily="34" charset="-122"/>
                 <a:cs typeface="맑은 고딕" pitchFamily="34" charset="-120"/>
               </a:rPr>
+              <a:t>9:27</a:t>
+            </a:r>
+            <a:endParaRPr lang="en-US" sz="1800" dirty="0"/>
+          </a:p>
+        </p:txBody>
+      </p:sp>
+      <p:sp>
+        <p:nvSpPr>
+          <p:cNvPr id="40" name="tr-5-d"/>
+          <p:cNvSpPr txBox="1"/>
+          <p:nvPr/>
+        </p:nvSpPr>
+        <p:spPr>
+          <a:xfrm>
+            <a:off x="7955280" y="5266944"/>
+            <a:ext cx="3931920" cy="493776"/>
+          </a:xfrm>
+          <a:prstGeom prst="rect">
+            <a:avLst/>
+          </a:prstGeom>
+          <a:noFill/>
+          <a:ln/>
+        </p:spPr>
+        <p:txBody>
+          <a:bodyPr wrap="square" lIns="0" tIns="0" rIns="0" bIns="0" rtlCol="0" anchor="ctr"/>
+          <a:lstStyle/>
+          <a:p>
+            <a:pPr indent="0" marL="0">
+              <a:lnSpc>
+                <a:spcPct val="120000"/>
+              </a:lnSpc>
+              <a:buNone/>
+            </a:pPr>
+            <a:r>
+              <a:rPr lang="en-US" sz="1800" dirty="0">
+                <a:solidFill>
+                  <a:schemeClr val="tx1"/>
+                </a:solidFill>
+                <a:latin typeface="맑은 고딕" pitchFamily="34" charset="0"/>
+                <a:ea typeface="맑은 고딕" pitchFamily="34" charset="-122"/>
+                <a:cs typeface="맑은 고딕" pitchFamily="34" charset="-120"/>
+              </a:rPr>
+              <a:t>강의 2</a:t>
+            </a:r>
+            <a:endParaRPr lang="en-US" sz="1800" dirty="0"/>
+          </a:p>
+        </p:txBody>
+      </p:sp>
+      <p:sp>
+        <p:nvSpPr>
+          <p:cNvPr id="41" name="tr-6"/>
+          <p:cNvSpPr/>
+          <p:nvPr/>
+        </p:nvSpPr>
+        <p:spPr>
+          <a:xfrm>
+            <a:off x="6473952" y="5815584"/>
+            <a:ext cx="5577840" cy="493776"/>
+          </a:xfrm>
+          <a:prstGeom prst="roundRect">
+            <a:avLst>
+              <a:gd name="adj" fmla="val 11111"/>
+            </a:avLst>
+          </a:prstGeom>
+          <a:solidFill>
+            <a:schemeClr val="bg2"/>
+          </a:solidFill>
+          <a:ln/>
+        </p:spPr>
+      </p:sp>
+      <p:sp>
+        <p:nvSpPr>
+          <p:cNvPr id="42" name="tr-6-t"/>
+          <p:cNvSpPr txBox="1"/>
+          <p:nvPr/>
+        </p:nvSpPr>
+        <p:spPr>
+          <a:xfrm>
+            <a:off x="6675120" y="5815584"/>
+            <a:ext cx="1188720" cy="493776"/>
+          </a:xfrm>
+          <a:prstGeom prst="rect">
+            <a:avLst/>
+          </a:prstGeom>
+          <a:noFill/>
+          <a:ln/>
+        </p:spPr>
+        <p:txBody>
+          <a:bodyPr wrap="square" lIns="0" tIns="0" rIns="0" bIns="0" rtlCol="0" anchor="ctr"/>
+          <a:lstStyle/>
+          <a:p>
+            <a:pPr indent="0" marL="0">
+              <a:buNone/>
+            </a:pPr>
+            <a:r>
+              <a:rPr lang="en-US" sz="1800" b="1" dirty="0">
+                <a:solidFill>
+                  <a:schemeClr val="accent1"/>
+                </a:solidFill>
+                <a:latin typeface="맑은 고딕" pitchFamily="34" charset="0"/>
+                <a:ea typeface="맑은 고딕" pitchFamily="34" charset="-122"/>
+                <a:cs typeface="맑은 고딕" pitchFamily="34" charset="-120"/>
+              </a:rPr>
               <a:t>9:57</a:t>
             </a:r>
             <a:endParaRPr lang="en-US" sz="1800" dirty="0"/>
@@ -51464,14 +51611,14 @@
       </p:sp>
       <p:sp>
         <p:nvSpPr>
-          <p:cNvPr id="40" name="tr-5-d"/>
-          <p:cNvSpPr txBox="1"/>
-          <p:nvPr/>
-        </p:nvSpPr>
-        <p:spPr>
-          <a:xfrm>
-            <a:off x="7955280" y="5394960"/>
-            <a:ext cx="3931920" cy="603504"/>
+          <p:cNvPr id="43" name="tr-6-d"/>
+          <p:cNvSpPr txBox="1"/>
+          <p:nvPr/>
+        </p:nvSpPr>
+        <p:spPr>
+          <a:xfrm>
+            <a:off x="7955280" y="5815584"/>
+            <a:ext cx="3931920" cy="493776"/>
           </a:xfrm>
           <a:prstGeom prst="rect">
             <a:avLst/>
@@ -51484,6 +51631,9 @@
           <a:lstStyle/>
           <a:p>
             <a:pPr indent="0" marL="0">
+              <a:lnSpc>
+                <a:spcPct val="120000"/>
+              </a:lnSpc>
               <a:buNone/>
             </a:pPr>
             <a:r>
@@ -51503,7 +51653,7 @@
       </p:sp>
       <p:sp>
         <p:nvSpPr>
-          <p:cNvPr id="41" name="Text 0"/>
+          <p:cNvPr id="44" name="Text 0"/>
           <p:cNvSpPr/>
           <p:nvPr>
             <p:ph idx="101" type="body" hasCustomPrompt="1"/>

--- a/dist/요한복음_1강_영광을_만나기_위한_준비.pptx
+++ b/dist/요한복음_1강_영광을_만나기_위한_준비.pptx
@@ -154,7 +154,7 @@
   <p:extLst>
     <p:ext uri="{521415D9-36F7-43E2-AB2F-B90AF26B5E84}">
       <p14:sectionLst xmlns:p14="http://schemas.microsoft.com/office/powerpoint/2010/main">
-        <p14:section name="오리엔테이션" id="{25f14a9e-5891-9d7a-cd7b-696e4f42ee85}">
+        <p14:section name="오리엔테이션" id="{0dadda96-04b1-2863-1ef9-070cde99762b}">
           <p14:sldIdLst>
             <p14:sldId id="256"/>
             <p14:sldId id="257"/>
@@ -164,7 +164,7 @@
             <p14:sldId id="261"/>
           </p14:sldIdLst>
         </p14:section>
-        <p14:section name="요한복음 분석" id="{29a3001d-7904-f4a3-2bf5-92fdbf496d3d}">
+        <p14:section name="요한복음 분석" id="{cb6d9698-3847-0d23-a925-3a11ebb1e7bd}">
           <p14:sldIdLst>
             <p14:sldId id="262"/>
             <p14:sldId id="263"/>
@@ -181,7 +181,7 @@
             <p14:sldId id="274"/>
           </p14:sldIdLst>
         </p14:section>
-        <p14:section name="1과 · 예수님에 대한 증언" id="{3a0014bc-0daf-bdb3-6f0e-b5e57201c418}">
+        <p14:section name="1과 · 예수님에 대한 증언" id="{ec389f8c-f565-1303-def5-43f0e94f67a0}">
           <p14:sldIdLst>
             <p14:sldId id="275"/>
             <p14:sldId id="276"/>
@@ -197,7 +197,7 @@
             <p14:sldId id="286"/>
           </p14:sldIdLst>
         </p14:section>
-        <p14:section name="1과 · 하나님에 대한 증언" id="{b032047f-ef7b-ca65-d57d-a5b6cbc11e1f}">
+        <p14:section name="1과 · 하나님에 대한 증언" id="{1f89c1a3-49af-0938-c42a-e88d7f96cea1}">
           <p14:sldIdLst>
             <p14:sldId id="287"/>
             <p14:sldId id="288"/>
@@ -213,7 +213,7 @@
             <p14:sldId id="298"/>
           </p14:sldIdLst>
         </p14:section>
-        <p14:section name="마무리" id="{f25933db-2745-8807-232f-e858d33baec4}">
+        <p14:section name="마무리" id="{2209b6a1-1277-f25f-c8cb-7fd7fe28c277}">
           <p14:sldIdLst>
             <p14:sldId id="299"/>
             <p14:sldId id="300"/>
@@ -221,7 +221,7 @@
             <p14:sldId id="302"/>
           </p14:sldIdLst>
         </p14:section>
-        <p14:section name="부록" id="{369c8558-1699-0d60-2111-da398664b53e}">
+        <p14:section name="부록" id="{1f3508d5-8dc8-25e0-8c40-84c56ff5a037}">
           <p14:sldIdLst>
             <p14:sldId id="303"/>
           </p14:sldIdLst>

--- a/dist/요한복음_1강_영광을_만나기_위한_준비.pptx
+++ b/dist/요한복음_1강_영광을_만나기_위한_준비.pptx
@@ -154,7 +154,7 @@
   <p:extLst>
     <p:ext uri="{521415D9-36F7-43E2-AB2F-B90AF26B5E84}">
       <p14:sectionLst xmlns:p14="http://schemas.microsoft.com/office/powerpoint/2010/main">
-        <p14:section name="오리엔테이션" id="{0dadda96-04b1-2863-1ef9-070cde99762b}">
+        <p14:section name="오리엔테이션" id="{444525be-b0ce-2060-423e-36dad3524782}">
           <p14:sldIdLst>
             <p14:sldId id="256"/>
             <p14:sldId id="257"/>
@@ -164,7 +164,7 @@
             <p14:sldId id="261"/>
           </p14:sldIdLst>
         </p14:section>
-        <p14:section name="요한복음 분석" id="{cb6d9698-3847-0d23-a925-3a11ebb1e7bd}">
+        <p14:section name="요한복음 분석" id="{a4d46bee-8698-f132-1209-f2df8e4c508a}">
           <p14:sldIdLst>
             <p14:sldId id="262"/>
             <p14:sldId id="263"/>
@@ -181,7 +181,7 @@
             <p14:sldId id="274"/>
           </p14:sldIdLst>
         </p14:section>
-        <p14:section name="1과 · 예수님에 대한 증언" id="{ec389f8c-f565-1303-def5-43f0e94f67a0}">
+        <p14:section name="1과 · 예수님에 대한 증언" id="{7e2a1f18-9335-4584-1aae-37cce0be37e3}">
           <p14:sldIdLst>
             <p14:sldId id="275"/>
             <p14:sldId id="276"/>
@@ -197,7 +197,7 @@
             <p14:sldId id="286"/>
           </p14:sldIdLst>
         </p14:section>
-        <p14:section name="1과 · 하나님에 대한 증언" id="{1f89c1a3-49af-0938-c42a-e88d7f96cea1}">
+        <p14:section name="1과 · 하나님에 대한 증언" id="{25214ab7-0556-7c2a-b46e-fdb8b2e775fb}">
           <p14:sldIdLst>
             <p14:sldId id="287"/>
             <p14:sldId id="288"/>
@@ -213,7 +213,7 @@
             <p14:sldId id="298"/>
           </p14:sldIdLst>
         </p14:section>
-        <p14:section name="마무리" id="{2209b6a1-1277-f25f-c8cb-7fd7fe28c277}">
+        <p14:section name="마무리" id="{3358d4c4-70b3-b5ed-0990-734d2cfc8219}">
           <p14:sldIdLst>
             <p14:sldId id="299"/>
             <p14:sldId id="300"/>
@@ -221,7 +221,7 @@
             <p14:sldId id="302"/>
           </p14:sldIdLst>
         </p14:section>
-        <p14:section name="부록" id="{1f3508d5-8dc8-25e0-8c40-84c56ff5a037}">
+        <p14:section name="부록" id="{5d6ce80b-b47b-d846-4c7a-6bdc692a3e77}">
           <p14:sldIdLst>
             <p14:sldId id="303"/>
           </p14:sldIdLst>

--- a/dist/요한복음_1강_영광을_만나기_위한_준비.pptx
+++ b/dist/요한복음_1강_영광을_만나기_위한_준비.pptx
@@ -154,7 +154,7 @@
   <p:extLst>
     <p:ext uri="{521415D9-36F7-43E2-AB2F-B90AF26B5E84}">
       <p14:sectionLst xmlns:p14="http://schemas.microsoft.com/office/powerpoint/2010/main">
-        <p14:section name="오리엔테이션" id="{444525be-b0ce-2060-423e-36dad3524782}">
+        <p14:section name="오리엔테이션" id="{01dd9e28-1934-629f-0a53-dfeb4dd0c559}">
           <p14:sldIdLst>
             <p14:sldId id="256"/>
             <p14:sldId id="257"/>
@@ -164,7 +164,7 @@
             <p14:sldId id="261"/>
           </p14:sldIdLst>
         </p14:section>
-        <p14:section name="요한복음 분석" id="{a4d46bee-8698-f132-1209-f2df8e4c508a}">
+        <p14:section name="요한복음 분석" id="{feef6649-b6fd-2464-4d54-81528bca7fd8}">
           <p14:sldIdLst>
             <p14:sldId id="262"/>
             <p14:sldId id="263"/>
@@ -181,7 +181,7 @@
             <p14:sldId id="274"/>
           </p14:sldIdLst>
         </p14:section>
-        <p14:section name="1과 · 예수님에 대한 증언" id="{7e2a1f18-9335-4584-1aae-37cce0be37e3}">
+        <p14:section name="1과 · 예수님에 대한 증언" id="{b6506145-c42f-ed98-7062-51ee05a7d2af}">
           <p14:sldIdLst>
             <p14:sldId id="275"/>
             <p14:sldId id="276"/>
@@ -197,7 +197,7 @@
             <p14:sldId id="286"/>
           </p14:sldIdLst>
         </p14:section>
-        <p14:section name="1과 · 하나님에 대한 증언" id="{25214ab7-0556-7c2a-b46e-fdb8b2e775fb}">
+        <p14:section name="1과 · 하나님에 대한 증언" id="{031d6d3f-8de8-832a-f3cd-37ea3099464e}">
           <p14:sldIdLst>
             <p14:sldId id="287"/>
             <p14:sldId id="288"/>
@@ -213,7 +213,7 @@
             <p14:sldId id="298"/>
           </p14:sldIdLst>
         </p14:section>
-        <p14:section name="마무리" id="{3358d4c4-70b3-b5ed-0990-734d2cfc8219}">
+        <p14:section name="마무리" id="{930c8a0b-f033-0f01-5d73-5eb56a28a3d2}">
           <p14:sldIdLst>
             <p14:sldId id="299"/>
             <p14:sldId id="300"/>
@@ -221,7 +221,7 @@
             <p14:sldId id="302"/>
           </p14:sldIdLst>
         </p14:section>
-        <p14:section name="부록" id="{5d6ce80b-b47b-d846-4c7a-6bdc692a3e77}">
+        <p14:section name="부록" id="{c73d24f1-c6e0-f6e8-8a34-43353bbc4292}">
           <p14:sldIdLst>
             <p14:sldId id="303"/>
           </p14:sldIdLst>
